--- a/Fájlok/Bemutató.pptx
+++ b/Fájlok/Bemutató.pptx
@@ -12,16 +12,12 @@
     <p:sldId id="261" r:id="rId6"/>
     <p:sldId id="260" r:id="rId7"/>
     <p:sldId id="264" r:id="rId8"/>
-    <p:sldId id="265" r:id="rId9"/>
-    <p:sldId id="259" r:id="rId10"/>
-    <p:sldId id="258" r:id="rId11"/>
-    <p:sldId id="266" r:id="rId12"/>
-    <p:sldId id="267" r:id="rId13"/>
-    <p:sldId id="268" r:id="rId14"/>
-    <p:sldId id="269" r:id="rId15"/>
-    <p:sldId id="270" r:id="rId16"/>
-    <p:sldId id="271" r:id="rId17"/>
-    <p:sldId id="272" r:id="rId18"/>
+    <p:sldId id="268" r:id="rId9"/>
+    <p:sldId id="265" r:id="rId10"/>
+    <p:sldId id="259" r:id="rId11"/>
+    <p:sldId id="258" r:id="rId12"/>
+    <p:sldId id="266" r:id="rId13"/>
+    <p:sldId id="267" r:id="rId14"/>
   </p:sldIdLst>
   <p:sldSz cx="12192000" cy="6858000"/>
   <p:notesSz cx="6858000" cy="9144000"/>
@@ -297,7 +293,7 @@
           <a:p>
             <a:fld id="{BD2B674F-1946-412B-A744-B9E1115EC83C}" type="datetimeFigureOut">
               <a:rPr lang="en-GB" smtClean="0"/>
-              <a:t>27/02/2026</a:t>
+              <a:t>03/03/2026</a:t>
             </a:fld>
             <a:endParaRPr lang="en-GB"/>
           </a:p>
@@ -627,7 +623,7 @@
           <a:p>
             <a:fld id="{BD2B674F-1946-412B-A744-B9E1115EC83C}" type="datetimeFigureOut">
               <a:rPr lang="en-GB" smtClean="0"/>
-              <a:t>27/02/2026</a:t>
+              <a:t>03/03/2026</a:t>
             </a:fld>
             <a:endParaRPr lang="en-GB"/>
           </a:p>
@@ -807,7 +803,7 @@
           <a:p>
             <a:fld id="{BD2B674F-1946-412B-A744-B9E1115EC83C}" type="datetimeFigureOut">
               <a:rPr lang="en-GB" smtClean="0"/>
-              <a:t>27/02/2026</a:t>
+              <a:t>03/03/2026</a:t>
             </a:fld>
             <a:endParaRPr lang="en-GB"/>
           </a:p>
@@ -977,7 +973,7 @@
           <a:p>
             <a:fld id="{BD2B674F-1946-412B-A744-B9E1115EC83C}" type="datetimeFigureOut">
               <a:rPr lang="en-GB" smtClean="0"/>
-              <a:t>27/02/2026</a:t>
+              <a:t>03/03/2026</a:t>
             </a:fld>
             <a:endParaRPr lang="en-GB"/>
           </a:p>
@@ -1254,7 +1250,7 @@
           <a:p>
             <a:fld id="{BD2B674F-1946-412B-A744-B9E1115EC83C}" type="datetimeFigureOut">
               <a:rPr lang="en-GB" smtClean="0"/>
-              <a:t>27/02/2026</a:t>
+              <a:t>03/03/2026</a:t>
             </a:fld>
             <a:endParaRPr lang="en-GB"/>
           </a:p>
@@ -1648,7 +1644,7 @@
           <a:p>
             <a:fld id="{BD2B674F-1946-412B-A744-B9E1115EC83C}" type="datetimeFigureOut">
               <a:rPr lang="en-GB" smtClean="0"/>
-              <a:t>27/02/2026</a:t>
+              <a:t>03/03/2026</a:t>
             </a:fld>
             <a:endParaRPr lang="en-GB"/>
           </a:p>
@@ -2125,7 +2121,7 @@
           <a:p>
             <a:fld id="{BD2B674F-1946-412B-A744-B9E1115EC83C}" type="datetimeFigureOut">
               <a:rPr lang="en-GB" smtClean="0"/>
-              <a:t>27/02/2026</a:t>
+              <a:t>03/03/2026</a:t>
             </a:fld>
             <a:endParaRPr lang="en-GB"/>
           </a:p>
@@ -2243,7 +2239,7 @@
           <a:p>
             <a:fld id="{BD2B674F-1946-412B-A744-B9E1115EC83C}" type="datetimeFigureOut">
               <a:rPr lang="en-GB" smtClean="0"/>
-              <a:t>27/02/2026</a:t>
+              <a:t>03/03/2026</a:t>
             </a:fld>
             <a:endParaRPr lang="en-GB"/>
           </a:p>
@@ -2338,7 +2334,7 @@
           <a:p>
             <a:fld id="{BD2B674F-1946-412B-A744-B9E1115EC83C}" type="datetimeFigureOut">
               <a:rPr lang="en-GB" smtClean="0"/>
-              <a:t>27/02/2026</a:t>
+              <a:t>03/03/2026</a:t>
             </a:fld>
             <a:endParaRPr lang="en-GB"/>
           </a:p>
@@ -2684,7 +2680,7 @@
           <a:p>
             <a:fld id="{BD2B674F-1946-412B-A744-B9E1115EC83C}" type="datetimeFigureOut">
               <a:rPr lang="en-GB" smtClean="0"/>
-              <a:t>27/02/2026</a:t>
+              <a:t>03/03/2026</a:t>
             </a:fld>
             <a:endParaRPr lang="en-GB"/>
           </a:p>
@@ -3072,7 +3068,7 @@
           <a:p>
             <a:fld id="{BD2B674F-1946-412B-A744-B9E1115EC83C}" type="datetimeFigureOut">
               <a:rPr lang="en-GB" smtClean="0"/>
-              <a:t>27/02/2026</a:t>
+              <a:t>03/03/2026</a:t>
             </a:fld>
             <a:endParaRPr lang="en-GB"/>
           </a:p>
@@ -3350,7 +3346,7 @@
           <a:p>
             <a:fld id="{BD2B674F-1946-412B-A744-B9E1115EC83C}" type="datetimeFigureOut">
               <a:rPr lang="en-GB" smtClean="0"/>
-              <a:t>27/02/2026</a:t>
+              <a:t>03/03/2026</a:t>
             </a:fld>
             <a:endParaRPr lang="en-GB"/>
           </a:p>
@@ -3917,8 +3913,8 @@
         </p:nvSpPr>
         <p:spPr>
           <a:xfrm>
-            <a:off x="1432785" y="4794124"/>
-            <a:ext cx="6154616" cy="523220"/>
+            <a:off x="1248147" y="4037418"/>
+            <a:ext cx="2567715" cy="1200329"/>
           </a:xfrm>
           <a:prstGeom prst="rect">
             <a:avLst/>
@@ -3932,11 +3928,29 @@
           <a:lstStyle/>
           <a:p>
             <a:r>
-              <a:rPr lang="hu-HU" sz="2800" dirty="0">
+              <a:rPr lang="hu-HU" sz="2400" dirty="0">
                 <a:latin typeface="Times New Roman" panose="02020603050405020304" pitchFamily="18" charset="0"/>
                 <a:cs typeface="Times New Roman" panose="02020603050405020304" pitchFamily="18" charset="0"/>
               </a:rPr>
-              <a:t>Készítette: Kovács Edit és Tóthpál István</a:t>
+              <a:t>Készítették: </a:t>
+            </a:r>
+          </a:p>
+          <a:p>
+            <a:r>
+              <a:rPr lang="hu-HU" sz="2400" dirty="0">
+                <a:latin typeface="Times New Roman" panose="02020603050405020304" pitchFamily="18" charset="0"/>
+                <a:cs typeface="Times New Roman" panose="02020603050405020304" pitchFamily="18" charset="0"/>
+              </a:rPr>
+              <a:t>Kovács Edit</a:t>
+            </a:r>
+          </a:p>
+          <a:p>
+            <a:r>
+              <a:rPr lang="hu-HU" sz="2400" dirty="0">
+                <a:latin typeface="Times New Roman" panose="02020603050405020304" pitchFamily="18" charset="0"/>
+                <a:cs typeface="Times New Roman" panose="02020603050405020304" pitchFamily="18" charset="0"/>
+              </a:rPr>
+              <a:t>Tóthpál István</a:t>
             </a:r>
           </a:p>
         </p:txBody>
@@ -4077,6 +4091,194 @@
         <p:spPr>
           <a:xfrm>
             <a:off x="1371600" y="685800"/>
+            <a:ext cx="9601200" cy="829733"/>
+          </a:xfrm>
+        </p:spPr>
+        <p:txBody>
+          <a:bodyPr/>
+          <a:lstStyle/>
+          <a:p>
+            <a:r>
+              <a:rPr lang="hu-HU" dirty="0">
+                <a:solidFill>
+                  <a:schemeClr val="tx1"/>
+                </a:solidFill>
+                <a:latin typeface="Times New Roman" panose="02020603050405020304" pitchFamily="18" charset="0"/>
+                <a:cs typeface="Times New Roman" panose="02020603050405020304" pitchFamily="18" charset="0"/>
+              </a:rPr>
+              <a:t>Tesztelés</a:t>
+            </a:r>
+          </a:p>
+        </p:txBody>
+      </p:sp>
+      <p:sp>
+        <p:nvSpPr>
+          <p:cNvPr id="3" name="Tartalom helye 2">
+            <a:extLst>
+              <a:ext uri="{FF2B5EF4-FFF2-40B4-BE49-F238E27FC236}">
+                <a16:creationId xmlns:a16="http://schemas.microsoft.com/office/drawing/2014/main" id="{80692D13-F04E-4F4F-A667-DFE0B3C725A5}"/>
+              </a:ext>
+            </a:extLst>
+          </p:cNvPr>
+          <p:cNvSpPr>
+            <a:spLocks noGrp="1"/>
+          </p:cNvSpPr>
+          <p:nvPr>
+            <p:ph idx="1"/>
+          </p:nvPr>
+        </p:nvSpPr>
+        <p:spPr/>
+        <p:txBody>
+          <a:bodyPr/>
+          <a:lstStyle/>
+          <a:p>
+            <a:r>
+              <a:rPr lang="hu-HU" dirty="0">
+                <a:solidFill>
+                  <a:schemeClr val="tx1"/>
+                </a:solidFill>
+                <a:latin typeface="Times New Roman" panose="02020603050405020304" pitchFamily="18" charset="0"/>
+                <a:cs typeface="Times New Roman" panose="02020603050405020304" pitchFamily="18" charset="0"/>
+              </a:rPr>
+              <a:t>Frontend tesztek környezete:</a:t>
+            </a:r>
+          </a:p>
+          <a:p>
+            <a:pPr lvl="1"/>
+            <a:r>
+              <a:rPr lang="hu-HU" i="0" dirty="0" err="1">
+                <a:solidFill>
+                  <a:schemeClr val="tx1"/>
+                </a:solidFill>
+                <a:latin typeface="Times New Roman" panose="02020603050405020304" pitchFamily="18" charset="0"/>
+                <a:cs typeface="Times New Roman" panose="02020603050405020304" pitchFamily="18" charset="0"/>
+              </a:rPr>
+              <a:t>Selenium</a:t>
+            </a:r>
+            <a:r>
+              <a:rPr lang="hu-HU" i="0" dirty="0">
+                <a:solidFill>
+                  <a:schemeClr val="tx1"/>
+                </a:solidFill>
+                <a:latin typeface="Times New Roman" panose="02020603050405020304" pitchFamily="18" charset="0"/>
+                <a:cs typeface="Times New Roman" panose="02020603050405020304" pitchFamily="18" charset="0"/>
+              </a:rPr>
+              <a:t> </a:t>
+            </a:r>
+            <a:r>
+              <a:rPr lang="hu-HU" i="0" dirty="0" err="1">
+                <a:solidFill>
+                  <a:schemeClr val="tx1"/>
+                </a:solidFill>
+                <a:latin typeface="Times New Roman" panose="02020603050405020304" pitchFamily="18" charset="0"/>
+                <a:cs typeface="Times New Roman" panose="02020603050405020304" pitchFamily="18" charset="0"/>
+              </a:rPr>
+              <a:t>Library</a:t>
+            </a:r>
+            <a:r>
+              <a:rPr lang="hu-HU" i="0" dirty="0">
+                <a:solidFill>
+                  <a:schemeClr val="tx1"/>
+                </a:solidFill>
+                <a:latin typeface="Times New Roman" panose="02020603050405020304" pitchFamily="18" charset="0"/>
+                <a:cs typeface="Times New Roman" panose="02020603050405020304" pitchFamily="18" charset="0"/>
+              </a:rPr>
+              <a:t> - </a:t>
+            </a:r>
+            <a:r>
+              <a:rPr lang="hu-HU" i="0" dirty="0" err="1">
+                <a:solidFill>
+                  <a:schemeClr val="tx1"/>
+                </a:solidFill>
+                <a:latin typeface="Times New Roman" panose="02020603050405020304" pitchFamily="18" charset="0"/>
+                <a:cs typeface="Times New Roman" panose="02020603050405020304" pitchFamily="18" charset="0"/>
+              </a:rPr>
+              <a:t>Robotframework</a:t>
+            </a:r>
+            <a:endParaRPr lang="hu-HU" i="0" dirty="0">
+              <a:solidFill>
+                <a:schemeClr val="tx1"/>
+              </a:solidFill>
+              <a:latin typeface="Times New Roman" panose="02020603050405020304" pitchFamily="18" charset="0"/>
+              <a:cs typeface="Times New Roman" panose="02020603050405020304" pitchFamily="18" charset="0"/>
+            </a:endParaRPr>
+          </a:p>
+          <a:p>
+            <a:r>
+              <a:rPr lang="hu-HU" dirty="0">
+                <a:solidFill>
+                  <a:schemeClr val="tx1"/>
+                </a:solidFill>
+                <a:latin typeface="Times New Roman" panose="02020603050405020304" pitchFamily="18" charset="0"/>
+                <a:cs typeface="Times New Roman" panose="02020603050405020304" pitchFamily="18" charset="0"/>
+              </a:rPr>
+              <a:t>Backend tesztek környezete:</a:t>
+            </a:r>
+          </a:p>
+          <a:p>
+            <a:pPr lvl="1"/>
+            <a:r>
+              <a:rPr lang="hu-HU" i="0" dirty="0">
+                <a:solidFill>
+                  <a:schemeClr val="tx1"/>
+                </a:solidFill>
+                <a:latin typeface="Times New Roman" panose="02020603050405020304" pitchFamily="18" charset="0"/>
+                <a:cs typeface="Times New Roman" panose="02020603050405020304" pitchFamily="18" charset="0"/>
+              </a:rPr>
+              <a:t>Postman</a:t>
+            </a:r>
+          </a:p>
+        </p:txBody>
+      </p:sp>
+    </p:spTree>
+    <p:extLst>
+      <p:ext uri="{BB962C8B-B14F-4D97-AF65-F5344CB8AC3E}">
+        <p14:creationId xmlns:p14="http://schemas.microsoft.com/office/powerpoint/2010/main" val="2524480592"/>
+      </p:ext>
+    </p:extLst>
+  </p:cSld>
+  <p:clrMapOvr>
+    <a:masterClrMapping/>
+  </p:clrMapOvr>
+</p:sld>
+</file>
+
+<file path=ppt/slides/slide11.xml><?xml version="1.0" encoding="utf-8"?>
+<p:sld xmlns:a="http://schemas.openxmlformats.org/drawingml/2006/main" xmlns:r="http://schemas.openxmlformats.org/officeDocument/2006/relationships" xmlns:p="http://schemas.openxmlformats.org/presentationml/2006/main">
+  <p:cSld>
+    <p:spTree>
+      <p:nvGrpSpPr>
+        <p:cNvPr id="1" name=""/>
+        <p:cNvGrpSpPr/>
+        <p:nvPr/>
+      </p:nvGrpSpPr>
+      <p:grpSpPr>
+        <a:xfrm>
+          <a:off x="0" y="0"/>
+          <a:ext cx="0" cy="0"/>
+          <a:chOff x="0" y="0"/>
+          <a:chExt cx="0" cy="0"/>
+        </a:xfrm>
+      </p:grpSpPr>
+      <p:sp>
+        <p:nvSpPr>
+          <p:cNvPr id="2" name="Cím 1">
+            <a:extLst>
+              <a:ext uri="{FF2B5EF4-FFF2-40B4-BE49-F238E27FC236}">
+                <a16:creationId xmlns:a16="http://schemas.microsoft.com/office/drawing/2014/main" id="{D8736DA6-9D79-4DB7-90AD-09E3F55948CD}"/>
+              </a:ext>
+            </a:extLst>
+          </p:cNvPr>
+          <p:cNvSpPr>
+            <a:spLocks noGrp="1"/>
+          </p:cNvSpPr>
+          <p:nvPr>
+            <p:ph type="title"/>
+          </p:nvPr>
+        </p:nvSpPr>
+        <p:spPr>
+          <a:xfrm>
+            <a:off x="1371600" y="685800"/>
             <a:ext cx="9601200" cy="745067"/>
           </a:xfrm>
         </p:spPr>
@@ -4113,7 +4315,7 @@
             <p:ph idx="1"/>
             <p:extLst>
               <p:ext uri="{D42A27DB-BD31-4B8C-83A1-F6EECF244321}">
-                <p14:modId xmlns:p14="http://schemas.microsoft.com/office/powerpoint/2010/main" val="4053310152"/>
+                <p14:modId xmlns:p14="http://schemas.microsoft.com/office/powerpoint/2010/main" val="1931610887"/>
               </p:ext>
             </p:extLst>
           </p:nvPr>
@@ -4161,7 +4363,7 @@
                     <a:p>
                       <a:pPr marL="285750" indent="-285750">
                         <a:buFont typeface="Wingdings" panose="05000000000000000000" pitchFamily="2" charset="2"/>
-                        <a:buChar char="§"/>
+                        <a:buChar char="Ø"/>
                       </a:pPr>
                       <a:r>
                         <a:rPr lang="hu-HU" dirty="0">
@@ -4225,7 +4427,7 @@
                     <a:p>
                       <a:pPr marL="285750" indent="-285750">
                         <a:buFont typeface="Wingdings" panose="05000000000000000000" pitchFamily="2" charset="2"/>
-                        <a:buChar char="§"/>
+                        <a:buChar char="Ø"/>
                       </a:pPr>
                       <a:r>
                         <a:rPr lang="hu-HU" dirty="0">
@@ -4243,21 +4445,18 @@
                         <a:buFont typeface="Arial" panose="020B0604020202020204" pitchFamily="34" charset="0"/>
                         <a:buChar char="•"/>
                       </a:pPr>
-                      <a:r>
-                        <a:rPr lang="hu-HU" i="0" dirty="0">
-                          <a:solidFill>
-                            <a:schemeClr val="tx1"/>
-                          </a:solidFill>
-                          <a:latin typeface="Times New Roman" panose="02020603050405020304" pitchFamily="18" charset="0"/>
-                          <a:cs typeface="Times New Roman" panose="02020603050405020304" pitchFamily="18" charset="0"/>
-                        </a:rPr>
-                        <a:t>P</a:t>
-                      </a:r>
+                      <a:endParaRPr lang="hu-HU" i="0" dirty="0">
+                        <a:solidFill>
+                          <a:schemeClr val="tx1"/>
+                        </a:solidFill>
+                        <a:latin typeface="Times New Roman" panose="02020603050405020304" pitchFamily="18" charset="0"/>
+                        <a:cs typeface="Times New Roman" panose="02020603050405020304" pitchFamily="18" charset="0"/>
+                      </a:endParaRPr>
                     </a:p>
                     <a:p>
                       <a:pPr marL="285750" indent="-285750">
                         <a:buFont typeface="Wingdings" panose="05000000000000000000" pitchFamily="2" charset="2"/>
-                        <a:buChar char="§"/>
+                        <a:buChar char="Ø"/>
                       </a:pPr>
                       <a:r>
                         <a:rPr lang="hu-HU" dirty="0">
@@ -4275,16 +4474,13 @@
                         <a:buFont typeface="Arial" panose="020B0604020202020204" pitchFamily="34" charset="0"/>
                         <a:buChar char="•"/>
                       </a:pPr>
-                      <a:r>
-                        <a:rPr lang="hu-HU" i="0" dirty="0">
-                          <a:solidFill>
-                            <a:schemeClr val="tx1"/>
-                          </a:solidFill>
-                          <a:latin typeface="Times New Roman" panose="02020603050405020304" pitchFamily="18" charset="0"/>
-                          <a:cs typeface="Times New Roman" panose="02020603050405020304" pitchFamily="18" charset="0"/>
-                        </a:rPr>
-                        <a:t>P</a:t>
-                      </a:r>
+                      <a:endParaRPr lang="hu-HU" i="0" dirty="0">
+                        <a:solidFill>
+                          <a:schemeClr val="tx1"/>
+                        </a:solidFill>
+                        <a:latin typeface="Times New Roman" panose="02020603050405020304" pitchFamily="18" charset="0"/>
+                        <a:cs typeface="Times New Roman" panose="02020603050405020304" pitchFamily="18" charset="0"/>
+                      </a:endParaRPr>
                     </a:p>
                   </a:txBody>
                   <a:tcPr>
@@ -4342,7 +4538,7 @@
                     <a:p>
                       <a:pPr marL="285750" indent="-285750">
                         <a:buFont typeface="Wingdings" panose="05000000000000000000" pitchFamily="2" charset="2"/>
-                        <a:buChar char="§"/>
+                        <a:buChar char="Ø"/>
                       </a:pPr>
                       <a:r>
                         <a:rPr lang="hu-HU" dirty="0">
@@ -4422,7 +4618,7 @@
                     <a:p>
                       <a:pPr marL="285750" indent="-285750">
                         <a:buFont typeface="Wingdings" panose="05000000000000000000" pitchFamily="2" charset="2"/>
-                        <a:buChar char="§"/>
+                        <a:buChar char="Ø"/>
                       </a:pPr>
                       <a:r>
                         <a:rPr lang="hu-HU" dirty="0">
@@ -4457,21 +4653,18 @@
                         <a:buFont typeface="Arial" panose="020B0604020202020204" pitchFamily="34" charset="0"/>
                         <a:buChar char="•"/>
                       </a:pPr>
-                      <a:r>
-                        <a:rPr lang="hu-HU" i="0" dirty="0">
-                          <a:solidFill>
-                            <a:schemeClr val="tx1"/>
-                          </a:solidFill>
-                          <a:latin typeface="Times New Roman" panose="02020603050405020304" pitchFamily="18" charset="0"/>
-                          <a:cs typeface="Times New Roman" panose="02020603050405020304" pitchFamily="18" charset="0"/>
-                        </a:rPr>
-                        <a:t>P</a:t>
-                      </a:r>
+                      <a:endParaRPr lang="hu-HU" i="0" dirty="0">
+                        <a:solidFill>
+                          <a:schemeClr val="tx1"/>
+                        </a:solidFill>
+                        <a:latin typeface="Times New Roman" panose="02020603050405020304" pitchFamily="18" charset="0"/>
+                        <a:cs typeface="Times New Roman" panose="02020603050405020304" pitchFamily="18" charset="0"/>
+                      </a:endParaRPr>
                     </a:p>
                     <a:p>
                       <a:pPr marL="285750" indent="-285750">
                         <a:buFont typeface="Wingdings" panose="05000000000000000000" pitchFamily="2" charset="2"/>
-                        <a:buChar char="§"/>
+                        <a:buChar char="Ø"/>
                       </a:pPr>
                       <a:r>
                         <a:rPr lang="hu-HU" dirty="0">
@@ -4489,16 +4682,13 @@
                         <a:buFont typeface="Arial" panose="020B0604020202020204" pitchFamily="34" charset="0"/>
                         <a:buChar char="•"/>
                       </a:pPr>
-                      <a:r>
-                        <a:rPr lang="hu-HU" i="0" dirty="0">
-                          <a:solidFill>
-                            <a:schemeClr val="tx1"/>
-                          </a:solidFill>
-                          <a:latin typeface="Times New Roman" panose="02020603050405020304" pitchFamily="18" charset="0"/>
-                          <a:cs typeface="Times New Roman" panose="02020603050405020304" pitchFamily="18" charset="0"/>
-                        </a:rPr>
-                        <a:t>P</a:t>
-                      </a:r>
+                      <a:endParaRPr lang="hu-HU" i="0" dirty="0">
+                        <a:solidFill>
+                          <a:schemeClr val="tx1"/>
+                        </a:solidFill>
+                        <a:latin typeface="Times New Roman" panose="02020603050405020304" pitchFamily="18" charset="0"/>
+                        <a:cs typeface="Times New Roman" panose="02020603050405020304" pitchFamily="18" charset="0"/>
+                      </a:endParaRPr>
                     </a:p>
                   </a:txBody>
                   <a:tcPr>
@@ -4563,106 +4753,6 @@
 </p:sld>
 </file>
 
-<file path=ppt/slides/slide11.xml><?xml version="1.0" encoding="utf-8"?>
-<p:sld xmlns:a="http://schemas.openxmlformats.org/drawingml/2006/main" xmlns:r="http://schemas.openxmlformats.org/officeDocument/2006/relationships" xmlns:p="http://schemas.openxmlformats.org/presentationml/2006/main">
-  <p:cSld>
-    <p:spTree>
-      <p:nvGrpSpPr>
-        <p:cNvPr id="1" name=""/>
-        <p:cNvGrpSpPr/>
-        <p:nvPr/>
-      </p:nvGrpSpPr>
-      <p:grpSpPr>
-        <a:xfrm>
-          <a:off x="0" y="0"/>
-          <a:ext cx="0" cy="0"/>
-          <a:chOff x="0" y="0"/>
-          <a:chExt cx="0" cy="0"/>
-        </a:xfrm>
-      </p:grpSpPr>
-      <p:sp>
-        <p:nvSpPr>
-          <p:cNvPr id="2" name="Cím 1">
-            <a:extLst>
-              <a:ext uri="{FF2B5EF4-FFF2-40B4-BE49-F238E27FC236}">
-                <a16:creationId xmlns:a16="http://schemas.microsoft.com/office/drawing/2014/main" id="{D8736DA6-9D79-4DB7-90AD-09E3F55948CD}"/>
-              </a:ext>
-            </a:extLst>
-          </p:cNvPr>
-          <p:cNvSpPr>
-            <a:spLocks noGrp="1"/>
-          </p:cNvSpPr>
-          <p:nvPr>
-            <p:ph type="title"/>
-          </p:nvPr>
-        </p:nvSpPr>
-        <p:spPr>
-          <a:xfrm>
-            <a:off x="1371600" y="685800"/>
-            <a:ext cx="9601200" cy="838200"/>
-          </a:xfrm>
-        </p:spPr>
-        <p:txBody>
-          <a:bodyPr/>
-          <a:lstStyle/>
-          <a:p>
-            <a:r>
-              <a:rPr lang="hu-HU" dirty="0">
-                <a:solidFill>
-                  <a:schemeClr val="tx1"/>
-                </a:solidFill>
-                <a:latin typeface="Times New Roman" panose="02020603050405020304" pitchFamily="18" charset="0"/>
-                <a:cs typeface="Times New Roman" panose="02020603050405020304" pitchFamily="18" charset="0"/>
-              </a:rPr>
-              <a:t>Bővítési lehetőségek</a:t>
-            </a:r>
-          </a:p>
-        </p:txBody>
-      </p:sp>
-      <p:sp>
-        <p:nvSpPr>
-          <p:cNvPr id="3" name="Tartalom helye 2">
-            <a:extLst>
-              <a:ext uri="{FF2B5EF4-FFF2-40B4-BE49-F238E27FC236}">
-                <a16:creationId xmlns:a16="http://schemas.microsoft.com/office/drawing/2014/main" id="{80692D13-F04E-4F4F-A667-DFE0B3C725A5}"/>
-              </a:ext>
-            </a:extLst>
-          </p:cNvPr>
-          <p:cNvSpPr>
-            <a:spLocks noGrp="1"/>
-          </p:cNvSpPr>
-          <p:nvPr>
-            <p:ph idx="1"/>
-          </p:nvPr>
-        </p:nvSpPr>
-        <p:spPr/>
-        <p:txBody>
-          <a:bodyPr/>
-          <a:lstStyle/>
-          <a:p>
-            <a:endParaRPr lang="hu-HU" dirty="0">
-              <a:solidFill>
-                <a:schemeClr val="tx1"/>
-              </a:solidFill>
-              <a:latin typeface="Times New Roman" panose="02020603050405020304" pitchFamily="18" charset="0"/>
-              <a:cs typeface="Times New Roman" panose="02020603050405020304" pitchFamily="18" charset="0"/>
-            </a:endParaRPr>
-          </a:p>
-        </p:txBody>
-      </p:sp>
-    </p:spTree>
-    <p:extLst>
-      <p:ext uri="{BB962C8B-B14F-4D97-AF65-F5344CB8AC3E}">
-        <p14:creationId xmlns:p14="http://schemas.microsoft.com/office/powerpoint/2010/main" val="3540532608"/>
-      </p:ext>
-    </p:extLst>
-  </p:cSld>
-  <p:clrMapOvr>
-    <a:masterClrMapping/>
-  </p:clrMapOvr>
-</p:sld>
-</file>
-
 <file path=ppt/slides/slide12.xml><?xml version="1.0" encoding="utf-8"?>
 <p:sld xmlns:a="http://schemas.openxmlformats.org/drawingml/2006/main" xmlns:r="http://schemas.openxmlformats.org/officeDocument/2006/relationships" xmlns:p="http://schemas.openxmlformats.org/presentationml/2006/main">
   <p:cSld>
@@ -4698,15 +4788,14 @@
         </p:nvSpPr>
         <p:spPr>
           <a:xfrm>
-            <a:off x="1295400" y="2686050"/>
-            <a:ext cx="9601200" cy="963083"/>
+            <a:off x="1371600" y="685800"/>
+            <a:ext cx="9601200" cy="838200"/>
           </a:xfrm>
         </p:spPr>
         <p:txBody>
           <a:bodyPr/>
           <a:lstStyle/>
           <a:p>
-            <a:pPr algn="ctr"/>
             <a:r>
               <a:rPr lang="hu-HU" dirty="0">
                 <a:solidFill>
@@ -4715,15 +4804,46 @@
                 <a:latin typeface="Times New Roman" panose="02020603050405020304" pitchFamily="18" charset="0"/>
                 <a:cs typeface="Times New Roman" panose="02020603050405020304" pitchFamily="18" charset="0"/>
               </a:rPr>
-              <a:t>Köszönjük a figyelmet!</a:t>
-            </a:r>
+              <a:t>Bővítési lehetőségek</a:t>
+            </a:r>
+          </a:p>
+        </p:txBody>
+      </p:sp>
+      <p:sp>
+        <p:nvSpPr>
+          <p:cNvPr id="3" name="Tartalom helye 2">
+            <a:extLst>
+              <a:ext uri="{FF2B5EF4-FFF2-40B4-BE49-F238E27FC236}">
+                <a16:creationId xmlns:a16="http://schemas.microsoft.com/office/drawing/2014/main" id="{80692D13-F04E-4F4F-A667-DFE0B3C725A5}"/>
+              </a:ext>
+            </a:extLst>
+          </p:cNvPr>
+          <p:cNvSpPr>
+            <a:spLocks noGrp="1"/>
+          </p:cNvSpPr>
+          <p:nvPr>
+            <p:ph idx="1"/>
+          </p:nvPr>
+        </p:nvSpPr>
+        <p:spPr/>
+        <p:txBody>
+          <a:bodyPr/>
+          <a:lstStyle/>
+          <a:p>
+            <a:endParaRPr lang="hu-HU" dirty="0">
+              <a:solidFill>
+                <a:schemeClr val="tx1"/>
+              </a:solidFill>
+              <a:latin typeface="Times New Roman" panose="02020603050405020304" pitchFamily="18" charset="0"/>
+              <a:cs typeface="Times New Roman" panose="02020603050405020304" pitchFamily="18" charset="0"/>
+            </a:endParaRPr>
           </a:p>
         </p:txBody>
       </p:sp>
     </p:spTree>
     <p:extLst>
       <p:ext uri="{BB962C8B-B14F-4D97-AF65-F5344CB8AC3E}">
-        <p14:creationId xmlns:p14="http://schemas.microsoft.com/office/powerpoint/2010/main" val="3944811295"/>
+        <p14:creationId xmlns:p14="http://schemas.microsoft.com/office/powerpoint/2010/main" val="3540532608"/>
       </p:ext>
     </p:extLst>
   </p:cSld>
@@ -4766,404 +4886,36 @@
             <p:ph type="title"/>
           </p:nvPr>
         </p:nvSpPr>
-        <p:spPr/>
-        <p:txBody>
-          <a:bodyPr/>
+        <p:spPr>
+          <a:xfrm>
+            <a:off x="1295400" y="2686050"/>
+            <a:ext cx="9601200" cy="963083"/>
+          </a:xfrm>
+        </p:spPr>
+        <p:txBody>
+          <a:bodyPr>
+            <a:normAutofit/>
+          </a:bodyPr>
           <a:lstStyle/>
           <a:p>
-            <a:endParaRPr lang="hu-HU" dirty="0">
-              <a:solidFill>
-                <a:schemeClr val="tx1"/>
-              </a:solidFill>
-            </a:endParaRPr>
-          </a:p>
-        </p:txBody>
-      </p:sp>
-      <p:sp>
-        <p:nvSpPr>
-          <p:cNvPr id="3" name="Tartalom helye 2">
-            <a:extLst>
-              <a:ext uri="{FF2B5EF4-FFF2-40B4-BE49-F238E27FC236}">
-                <a16:creationId xmlns:a16="http://schemas.microsoft.com/office/drawing/2014/main" id="{80692D13-F04E-4F4F-A667-DFE0B3C725A5}"/>
-              </a:ext>
-            </a:extLst>
-          </p:cNvPr>
-          <p:cNvSpPr>
-            <a:spLocks noGrp="1"/>
-          </p:cNvSpPr>
-          <p:nvPr>
-            <p:ph idx="1"/>
-          </p:nvPr>
-        </p:nvSpPr>
-        <p:spPr/>
-        <p:txBody>
-          <a:bodyPr/>
-          <a:lstStyle/>
-          <a:p>
-            <a:endParaRPr lang="hu-HU" dirty="0">
-              <a:solidFill>
-                <a:schemeClr val="tx1"/>
-              </a:solidFill>
-            </a:endParaRPr>
+            <a:pPr algn="ctr"/>
+            <a:r>
+              <a:rPr lang="hu-HU" sz="5400" dirty="0">
+                <a:solidFill>
+                  <a:schemeClr val="tx1"/>
+                </a:solidFill>
+                <a:latin typeface="Times New Roman" panose="02020603050405020304" pitchFamily="18" charset="0"/>
+                <a:cs typeface="Times New Roman" panose="02020603050405020304" pitchFamily="18" charset="0"/>
+              </a:rPr>
+              <a:t>Köszönjük a figyelmet!</a:t>
+            </a:r>
           </a:p>
         </p:txBody>
       </p:sp>
     </p:spTree>
     <p:extLst>
       <p:ext uri="{BB962C8B-B14F-4D97-AF65-F5344CB8AC3E}">
-        <p14:creationId xmlns:p14="http://schemas.microsoft.com/office/powerpoint/2010/main" val="3528585204"/>
-      </p:ext>
-    </p:extLst>
-  </p:cSld>
-  <p:clrMapOvr>
-    <a:masterClrMapping/>
-  </p:clrMapOvr>
-</p:sld>
-</file>
-
-<file path=ppt/slides/slide14.xml><?xml version="1.0" encoding="utf-8"?>
-<p:sld xmlns:a="http://schemas.openxmlformats.org/drawingml/2006/main" xmlns:r="http://schemas.openxmlformats.org/officeDocument/2006/relationships" xmlns:p="http://schemas.openxmlformats.org/presentationml/2006/main">
-  <p:cSld>
-    <p:spTree>
-      <p:nvGrpSpPr>
-        <p:cNvPr id="1" name=""/>
-        <p:cNvGrpSpPr/>
-        <p:nvPr/>
-      </p:nvGrpSpPr>
-      <p:grpSpPr>
-        <a:xfrm>
-          <a:off x="0" y="0"/>
-          <a:ext cx="0" cy="0"/>
-          <a:chOff x="0" y="0"/>
-          <a:chExt cx="0" cy="0"/>
-        </a:xfrm>
-      </p:grpSpPr>
-      <p:sp>
-        <p:nvSpPr>
-          <p:cNvPr id="2" name="Cím 1">
-            <a:extLst>
-              <a:ext uri="{FF2B5EF4-FFF2-40B4-BE49-F238E27FC236}">
-                <a16:creationId xmlns:a16="http://schemas.microsoft.com/office/drawing/2014/main" id="{D8736DA6-9D79-4DB7-90AD-09E3F55948CD}"/>
-              </a:ext>
-            </a:extLst>
-          </p:cNvPr>
-          <p:cNvSpPr>
-            <a:spLocks noGrp="1"/>
-          </p:cNvSpPr>
-          <p:nvPr>
-            <p:ph type="title"/>
-          </p:nvPr>
-        </p:nvSpPr>
-        <p:spPr/>
-        <p:txBody>
-          <a:bodyPr/>
-          <a:lstStyle/>
-          <a:p>
-            <a:endParaRPr lang="hu-HU" dirty="0">
-              <a:solidFill>
-                <a:schemeClr val="tx1"/>
-              </a:solidFill>
-            </a:endParaRPr>
-          </a:p>
-        </p:txBody>
-      </p:sp>
-      <p:sp>
-        <p:nvSpPr>
-          <p:cNvPr id="3" name="Tartalom helye 2">
-            <a:extLst>
-              <a:ext uri="{FF2B5EF4-FFF2-40B4-BE49-F238E27FC236}">
-                <a16:creationId xmlns:a16="http://schemas.microsoft.com/office/drawing/2014/main" id="{80692D13-F04E-4F4F-A667-DFE0B3C725A5}"/>
-              </a:ext>
-            </a:extLst>
-          </p:cNvPr>
-          <p:cNvSpPr>
-            <a:spLocks noGrp="1"/>
-          </p:cNvSpPr>
-          <p:nvPr>
-            <p:ph idx="1"/>
-          </p:nvPr>
-        </p:nvSpPr>
-        <p:spPr/>
-        <p:txBody>
-          <a:bodyPr/>
-          <a:lstStyle/>
-          <a:p>
-            <a:endParaRPr lang="hu-HU" dirty="0">
-              <a:solidFill>
-                <a:schemeClr val="tx1"/>
-              </a:solidFill>
-            </a:endParaRPr>
-          </a:p>
-        </p:txBody>
-      </p:sp>
-    </p:spTree>
-    <p:extLst>
-      <p:ext uri="{BB962C8B-B14F-4D97-AF65-F5344CB8AC3E}">
-        <p14:creationId xmlns:p14="http://schemas.microsoft.com/office/powerpoint/2010/main" val="794530471"/>
-      </p:ext>
-    </p:extLst>
-  </p:cSld>
-  <p:clrMapOvr>
-    <a:masterClrMapping/>
-  </p:clrMapOvr>
-</p:sld>
-</file>
-
-<file path=ppt/slides/slide15.xml><?xml version="1.0" encoding="utf-8"?>
-<p:sld xmlns:a="http://schemas.openxmlformats.org/drawingml/2006/main" xmlns:r="http://schemas.openxmlformats.org/officeDocument/2006/relationships" xmlns:p="http://schemas.openxmlformats.org/presentationml/2006/main">
-  <p:cSld>
-    <p:spTree>
-      <p:nvGrpSpPr>
-        <p:cNvPr id="1" name=""/>
-        <p:cNvGrpSpPr/>
-        <p:nvPr/>
-      </p:nvGrpSpPr>
-      <p:grpSpPr>
-        <a:xfrm>
-          <a:off x="0" y="0"/>
-          <a:ext cx="0" cy="0"/>
-          <a:chOff x="0" y="0"/>
-          <a:chExt cx="0" cy="0"/>
-        </a:xfrm>
-      </p:grpSpPr>
-      <p:sp>
-        <p:nvSpPr>
-          <p:cNvPr id="2" name="Cím 1">
-            <a:extLst>
-              <a:ext uri="{FF2B5EF4-FFF2-40B4-BE49-F238E27FC236}">
-                <a16:creationId xmlns:a16="http://schemas.microsoft.com/office/drawing/2014/main" id="{D8736DA6-9D79-4DB7-90AD-09E3F55948CD}"/>
-              </a:ext>
-            </a:extLst>
-          </p:cNvPr>
-          <p:cNvSpPr>
-            <a:spLocks noGrp="1"/>
-          </p:cNvSpPr>
-          <p:nvPr>
-            <p:ph type="title"/>
-          </p:nvPr>
-        </p:nvSpPr>
-        <p:spPr/>
-        <p:txBody>
-          <a:bodyPr/>
-          <a:lstStyle/>
-          <a:p>
-            <a:endParaRPr lang="hu-HU" dirty="0">
-              <a:solidFill>
-                <a:schemeClr val="tx1"/>
-              </a:solidFill>
-            </a:endParaRPr>
-          </a:p>
-        </p:txBody>
-      </p:sp>
-      <p:sp>
-        <p:nvSpPr>
-          <p:cNvPr id="3" name="Tartalom helye 2">
-            <a:extLst>
-              <a:ext uri="{FF2B5EF4-FFF2-40B4-BE49-F238E27FC236}">
-                <a16:creationId xmlns:a16="http://schemas.microsoft.com/office/drawing/2014/main" id="{80692D13-F04E-4F4F-A667-DFE0B3C725A5}"/>
-              </a:ext>
-            </a:extLst>
-          </p:cNvPr>
-          <p:cNvSpPr>
-            <a:spLocks noGrp="1"/>
-          </p:cNvSpPr>
-          <p:nvPr>
-            <p:ph idx="1"/>
-          </p:nvPr>
-        </p:nvSpPr>
-        <p:spPr/>
-        <p:txBody>
-          <a:bodyPr/>
-          <a:lstStyle/>
-          <a:p>
-            <a:endParaRPr lang="hu-HU" dirty="0">
-              <a:solidFill>
-                <a:schemeClr val="tx1"/>
-              </a:solidFill>
-            </a:endParaRPr>
-          </a:p>
-        </p:txBody>
-      </p:sp>
-    </p:spTree>
-    <p:extLst>
-      <p:ext uri="{BB962C8B-B14F-4D97-AF65-F5344CB8AC3E}">
-        <p14:creationId xmlns:p14="http://schemas.microsoft.com/office/powerpoint/2010/main" val="3661361290"/>
-      </p:ext>
-    </p:extLst>
-  </p:cSld>
-  <p:clrMapOvr>
-    <a:masterClrMapping/>
-  </p:clrMapOvr>
-</p:sld>
-</file>
-
-<file path=ppt/slides/slide16.xml><?xml version="1.0" encoding="utf-8"?>
-<p:sld xmlns:a="http://schemas.openxmlformats.org/drawingml/2006/main" xmlns:r="http://schemas.openxmlformats.org/officeDocument/2006/relationships" xmlns:p="http://schemas.openxmlformats.org/presentationml/2006/main">
-  <p:cSld>
-    <p:spTree>
-      <p:nvGrpSpPr>
-        <p:cNvPr id="1" name=""/>
-        <p:cNvGrpSpPr/>
-        <p:nvPr/>
-      </p:nvGrpSpPr>
-      <p:grpSpPr>
-        <a:xfrm>
-          <a:off x="0" y="0"/>
-          <a:ext cx="0" cy="0"/>
-          <a:chOff x="0" y="0"/>
-          <a:chExt cx="0" cy="0"/>
-        </a:xfrm>
-      </p:grpSpPr>
-      <p:sp>
-        <p:nvSpPr>
-          <p:cNvPr id="2" name="Cím 1">
-            <a:extLst>
-              <a:ext uri="{FF2B5EF4-FFF2-40B4-BE49-F238E27FC236}">
-                <a16:creationId xmlns:a16="http://schemas.microsoft.com/office/drawing/2014/main" id="{D8736DA6-9D79-4DB7-90AD-09E3F55948CD}"/>
-              </a:ext>
-            </a:extLst>
-          </p:cNvPr>
-          <p:cNvSpPr>
-            <a:spLocks noGrp="1"/>
-          </p:cNvSpPr>
-          <p:nvPr>
-            <p:ph type="title"/>
-          </p:nvPr>
-        </p:nvSpPr>
-        <p:spPr/>
-        <p:txBody>
-          <a:bodyPr/>
-          <a:lstStyle/>
-          <a:p>
-            <a:endParaRPr lang="hu-HU" dirty="0">
-              <a:solidFill>
-                <a:schemeClr val="tx1"/>
-              </a:solidFill>
-            </a:endParaRPr>
-          </a:p>
-        </p:txBody>
-      </p:sp>
-      <p:sp>
-        <p:nvSpPr>
-          <p:cNvPr id="3" name="Tartalom helye 2">
-            <a:extLst>
-              <a:ext uri="{FF2B5EF4-FFF2-40B4-BE49-F238E27FC236}">
-                <a16:creationId xmlns:a16="http://schemas.microsoft.com/office/drawing/2014/main" id="{80692D13-F04E-4F4F-A667-DFE0B3C725A5}"/>
-              </a:ext>
-            </a:extLst>
-          </p:cNvPr>
-          <p:cNvSpPr>
-            <a:spLocks noGrp="1"/>
-          </p:cNvSpPr>
-          <p:nvPr>
-            <p:ph idx="1"/>
-          </p:nvPr>
-        </p:nvSpPr>
-        <p:spPr/>
-        <p:txBody>
-          <a:bodyPr/>
-          <a:lstStyle/>
-          <a:p>
-            <a:endParaRPr lang="hu-HU" dirty="0">
-              <a:solidFill>
-                <a:schemeClr val="tx1"/>
-              </a:solidFill>
-            </a:endParaRPr>
-          </a:p>
-        </p:txBody>
-      </p:sp>
-    </p:spTree>
-    <p:extLst>
-      <p:ext uri="{BB962C8B-B14F-4D97-AF65-F5344CB8AC3E}">
-        <p14:creationId xmlns:p14="http://schemas.microsoft.com/office/powerpoint/2010/main" val="163674753"/>
-      </p:ext>
-    </p:extLst>
-  </p:cSld>
-  <p:clrMapOvr>
-    <a:masterClrMapping/>
-  </p:clrMapOvr>
-</p:sld>
-</file>
-
-<file path=ppt/slides/slide17.xml><?xml version="1.0" encoding="utf-8"?>
-<p:sld xmlns:a="http://schemas.openxmlformats.org/drawingml/2006/main" xmlns:r="http://schemas.openxmlformats.org/officeDocument/2006/relationships" xmlns:p="http://schemas.openxmlformats.org/presentationml/2006/main">
-  <p:cSld>
-    <p:spTree>
-      <p:nvGrpSpPr>
-        <p:cNvPr id="1" name=""/>
-        <p:cNvGrpSpPr/>
-        <p:nvPr/>
-      </p:nvGrpSpPr>
-      <p:grpSpPr>
-        <a:xfrm>
-          <a:off x="0" y="0"/>
-          <a:ext cx="0" cy="0"/>
-          <a:chOff x="0" y="0"/>
-          <a:chExt cx="0" cy="0"/>
-        </a:xfrm>
-      </p:grpSpPr>
-      <p:sp>
-        <p:nvSpPr>
-          <p:cNvPr id="2" name="Cím 1">
-            <a:extLst>
-              <a:ext uri="{FF2B5EF4-FFF2-40B4-BE49-F238E27FC236}">
-                <a16:creationId xmlns:a16="http://schemas.microsoft.com/office/drawing/2014/main" id="{D8736DA6-9D79-4DB7-90AD-09E3F55948CD}"/>
-              </a:ext>
-            </a:extLst>
-          </p:cNvPr>
-          <p:cNvSpPr>
-            <a:spLocks noGrp="1"/>
-          </p:cNvSpPr>
-          <p:nvPr>
-            <p:ph type="title"/>
-          </p:nvPr>
-        </p:nvSpPr>
-        <p:spPr/>
-        <p:txBody>
-          <a:bodyPr/>
-          <a:lstStyle/>
-          <a:p>
-            <a:endParaRPr lang="hu-HU" dirty="0">
-              <a:solidFill>
-                <a:schemeClr val="tx1"/>
-              </a:solidFill>
-            </a:endParaRPr>
-          </a:p>
-        </p:txBody>
-      </p:sp>
-      <p:sp>
-        <p:nvSpPr>
-          <p:cNvPr id="3" name="Tartalom helye 2">
-            <a:extLst>
-              <a:ext uri="{FF2B5EF4-FFF2-40B4-BE49-F238E27FC236}">
-                <a16:creationId xmlns:a16="http://schemas.microsoft.com/office/drawing/2014/main" id="{80692D13-F04E-4F4F-A667-DFE0B3C725A5}"/>
-              </a:ext>
-            </a:extLst>
-          </p:cNvPr>
-          <p:cNvSpPr>
-            <a:spLocks noGrp="1"/>
-          </p:cNvSpPr>
-          <p:nvPr>
-            <p:ph idx="1"/>
-          </p:nvPr>
-        </p:nvSpPr>
-        <p:spPr/>
-        <p:txBody>
-          <a:bodyPr/>
-          <a:lstStyle/>
-          <a:p>
-            <a:endParaRPr lang="hu-HU" dirty="0">
-              <a:solidFill>
-                <a:schemeClr val="tx1"/>
-              </a:solidFill>
-            </a:endParaRPr>
-          </a:p>
-        </p:txBody>
-      </p:sp>
-    </p:spTree>
-    <p:extLst>
-      <p:ext uri="{BB962C8B-B14F-4D97-AF65-F5344CB8AC3E}">
-        <p14:creationId xmlns:p14="http://schemas.microsoft.com/office/powerpoint/2010/main" val="3881904646"/>
+        <p14:creationId xmlns:p14="http://schemas.microsoft.com/office/powerpoint/2010/main" val="3944811295"/>
       </p:ext>
     </p:extLst>
   </p:cSld>
@@ -5494,7 +5246,9 @@
           </a:xfrm>
         </p:spPr>
         <p:txBody>
-          <a:bodyPr/>
+          <a:bodyPr>
+            <a:normAutofit/>
+          </a:bodyPr>
           <a:lstStyle/>
           <a:p>
             <a:pPr>
@@ -5502,7 +5256,7 @@
               <a:buChar char="Ø"/>
             </a:pPr>
             <a:r>
-              <a:rPr lang="hu-HU" dirty="0">
+              <a:rPr lang="hu-HU" sz="2400" dirty="0">
                 <a:solidFill>
                   <a:schemeClr val="tx1"/>
                 </a:solidFill>
@@ -5518,7 +5272,7 @@
               <a:buChar char="Ø"/>
             </a:pPr>
             <a:r>
-              <a:rPr lang="hu-HU" dirty="0">
+              <a:rPr lang="hu-HU" sz="2400" dirty="0">
                 <a:solidFill>
                   <a:schemeClr val="tx1"/>
                 </a:solidFill>
@@ -5534,7 +5288,7 @@
               <a:buChar char="Ø"/>
             </a:pPr>
             <a:r>
-              <a:rPr lang="hu-HU" dirty="0">
+              <a:rPr lang="hu-HU" sz="2400" dirty="0">
                 <a:solidFill>
                   <a:schemeClr val="tx1"/>
                 </a:solidFill>
@@ -5550,7 +5304,7 @@
               <a:buChar char="Ø"/>
             </a:pPr>
             <a:r>
-              <a:rPr lang="hu-HU" dirty="0">
+              <a:rPr lang="hu-HU" sz="2400" dirty="0">
                 <a:solidFill>
                   <a:schemeClr val="tx1"/>
                 </a:solidFill>
@@ -5566,7 +5320,7 @@
               <a:buChar char="Ø"/>
             </a:pPr>
             <a:r>
-              <a:rPr lang="hu-HU" dirty="0">
+              <a:rPr lang="hu-HU" sz="2400" dirty="0">
                 <a:solidFill>
                   <a:schemeClr val="tx1"/>
                 </a:solidFill>
@@ -5581,7 +5335,7 @@
               <a:buFont typeface="Wingdings" panose="05000000000000000000" pitchFamily="2" charset="2"/>
               <a:buChar char="Ø"/>
             </a:pPr>
-            <a:endParaRPr lang="hu-HU" dirty="0">
+            <a:endParaRPr lang="hu-HU" sz="2400" dirty="0">
               <a:solidFill>
                 <a:schemeClr val="tx1"/>
               </a:solidFill>
@@ -5686,6 +5440,10 @@
           <a:bodyPr/>
           <a:lstStyle/>
           <a:p>
+            <a:pPr>
+              <a:buFont typeface="Wingdings" panose="05000000000000000000" pitchFamily="2" charset="2"/>
+              <a:buChar char="Ø"/>
+            </a:pPr>
             <a:r>
               <a:rPr lang="hu-HU" dirty="0">
                 <a:solidFill>
@@ -5698,7 +5456,10 @@
             </a:r>
           </a:p>
           <a:p>
-            <a:pPr lvl="1"/>
+            <a:pPr lvl="1">
+              <a:buFont typeface="Wingdings" panose="05000000000000000000" pitchFamily="2" charset="2"/>
+              <a:buChar char="§"/>
+            </a:pPr>
             <a:r>
               <a:rPr lang="hu-HU" i="0" dirty="0">
                 <a:solidFill>
@@ -5711,6 +5472,10 @@
             </a:r>
           </a:p>
           <a:p>
+            <a:pPr>
+              <a:buFont typeface="Wingdings" panose="05000000000000000000" pitchFamily="2" charset="2"/>
+              <a:buChar char="Ø"/>
+            </a:pPr>
             <a:r>
               <a:rPr lang="hu-HU" dirty="0">
                 <a:solidFill>
@@ -5723,7 +5488,10 @@
             </a:r>
           </a:p>
           <a:p>
-            <a:pPr lvl="1"/>
+            <a:pPr lvl="1">
+              <a:buFont typeface="Wingdings" panose="05000000000000000000" pitchFamily="2" charset="2"/>
+              <a:buChar char="§"/>
+            </a:pPr>
             <a:r>
               <a:rPr lang="hu-HU" i="0" dirty="0">
                 <a:solidFill>
@@ -5736,6 +5504,33 @@
             </a:r>
           </a:p>
           <a:p>
+            <a:pPr lvl="1">
+              <a:buFont typeface="Wingdings" panose="05000000000000000000" pitchFamily="2" charset="2"/>
+              <a:buChar char="§"/>
+            </a:pPr>
+            <a:r>
+              <a:rPr lang="hu-HU" i="0" dirty="0" err="1">
+                <a:solidFill>
+                  <a:schemeClr val="tx1"/>
+                </a:solidFill>
+                <a:latin typeface="Times New Roman" panose="02020603050405020304" pitchFamily="18" charset="0"/>
+                <a:cs typeface="Times New Roman" panose="02020603050405020304" pitchFamily="18" charset="0"/>
+              </a:rPr>
+              <a:t>PrimeVue</a:t>
+            </a:r>
+            <a:endParaRPr lang="hu-HU" i="0" dirty="0">
+              <a:solidFill>
+                <a:schemeClr val="tx1"/>
+              </a:solidFill>
+              <a:latin typeface="Times New Roman" panose="02020603050405020304" pitchFamily="18" charset="0"/>
+              <a:cs typeface="Times New Roman" panose="02020603050405020304" pitchFamily="18" charset="0"/>
+            </a:endParaRPr>
+          </a:p>
+          <a:p>
+            <a:pPr>
+              <a:buFont typeface="Wingdings" panose="05000000000000000000" pitchFamily="2" charset="2"/>
+              <a:buChar char="Ø"/>
+            </a:pPr>
             <a:r>
               <a:rPr lang="hu-HU" dirty="0">
                 <a:solidFill>
@@ -5748,7 +5543,10 @@
             </a:r>
           </a:p>
           <a:p>
-            <a:pPr lvl="1"/>
+            <a:pPr lvl="1">
+              <a:buFont typeface="Wingdings" panose="05000000000000000000" pitchFamily="2" charset="2"/>
+              <a:buChar char="§"/>
+            </a:pPr>
             <a:r>
               <a:rPr lang="hu-HU" i="0" dirty="0" err="1">
                 <a:solidFill>
@@ -5815,7 +5613,12 @@
             <p:ph type="title"/>
           </p:nvPr>
         </p:nvSpPr>
-        <p:spPr/>
+        <p:spPr>
+          <a:xfrm>
+            <a:off x="1371600" y="685800"/>
+            <a:ext cx="2453054" cy="896815"/>
+          </a:xfrm>
+        </p:spPr>
         <p:txBody>
           <a:bodyPr/>
           <a:lstStyle/>
@@ -5849,7 +5652,12 @@
             <p:ph idx="1"/>
           </p:nvPr>
         </p:nvSpPr>
-        <p:spPr/>
+        <p:spPr>
+          <a:xfrm>
+            <a:off x="1371600" y="2286000"/>
+            <a:ext cx="5125915" cy="3581400"/>
+          </a:xfrm>
+        </p:spPr>
         <p:txBody>
           <a:bodyPr/>
           <a:lstStyle/>
@@ -6039,12 +5847,144 @@
             <p:ph idx="1"/>
           </p:nvPr>
         </p:nvSpPr>
-        <p:spPr/>
+        <p:spPr>
+          <a:xfrm>
+            <a:off x="1371600" y="2048607"/>
+            <a:ext cx="9601200" cy="3581400"/>
+          </a:xfrm>
+        </p:spPr>
         <p:txBody>
           <a:bodyPr/>
           <a:lstStyle/>
           <a:p>
-            <a:endParaRPr lang="hu-HU" dirty="0">
+            <a:pPr>
+              <a:buFont typeface="Wingdings" panose="05000000000000000000" pitchFamily="2" charset="2"/>
+              <a:buChar char="Ø"/>
+            </a:pPr>
+            <a:r>
+              <a:rPr lang="hu-HU" dirty="0">
+                <a:solidFill>
+                  <a:schemeClr val="tx1"/>
+                </a:solidFill>
+                <a:latin typeface="Times New Roman" panose="02020603050405020304" pitchFamily="18" charset="0"/>
+                <a:cs typeface="Times New Roman" panose="02020603050405020304" pitchFamily="18" charset="0"/>
+              </a:rPr>
+              <a:t>18 tábla</a:t>
+            </a:r>
+          </a:p>
+          <a:p>
+            <a:pPr>
+              <a:buFont typeface="Wingdings" panose="05000000000000000000" pitchFamily="2" charset="2"/>
+              <a:buChar char="Ø"/>
+            </a:pPr>
+            <a:r>
+              <a:rPr lang="hu-HU" dirty="0">
+                <a:solidFill>
+                  <a:schemeClr val="tx1"/>
+                </a:solidFill>
+                <a:latin typeface="Times New Roman" panose="02020603050405020304" pitchFamily="18" charset="0"/>
+                <a:cs typeface="Times New Roman" panose="02020603050405020304" pitchFamily="18" charset="0"/>
+              </a:rPr>
+              <a:t>Mintaadatokkal való feltöltés </a:t>
+            </a:r>
+            <a:r>
+              <a:rPr lang="hu-HU" dirty="0" err="1">
+                <a:solidFill>
+                  <a:schemeClr val="tx1"/>
+                </a:solidFill>
+                <a:latin typeface="Times New Roman" panose="02020603050405020304" pitchFamily="18" charset="0"/>
+                <a:cs typeface="Times New Roman" panose="02020603050405020304" pitchFamily="18" charset="0"/>
+              </a:rPr>
+              <a:t>seeder</a:t>
+            </a:r>
+            <a:r>
+              <a:rPr lang="hu-HU" dirty="0">
+                <a:solidFill>
+                  <a:schemeClr val="tx1"/>
+                </a:solidFill>
+                <a:latin typeface="Times New Roman" panose="02020603050405020304" pitchFamily="18" charset="0"/>
+                <a:cs typeface="Times New Roman" panose="02020603050405020304" pitchFamily="18" charset="0"/>
+              </a:rPr>
+              <a:t> és </a:t>
+            </a:r>
+            <a:r>
+              <a:rPr lang="hu-HU" dirty="0" err="1">
+                <a:solidFill>
+                  <a:schemeClr val="tx1"/>
+                </a:solidFill>
+                <a:latin typeface="Times New Roman" panose="02020603050405020304" pitchFamily="18" charset="0"/>
+                <a:cs typeface="Times New Roman" panose="02020603050405020304" pitchFamily="18" charset="0"/>
+              </a:rPr>
+              <a:t>factory</a:t>
+            </a:r>
+            <a:r>
+              <a:rPr lang="hu-HU" dirty="0">
+                <a:solidFill>
+                  <a:schemeClr val="tx1"/>
+                </a:solidFill>
+                <a:latin typeface="Times New Roman" panose="02020603050405020304" pitchFamily="18" charset="0"/>
+                <a:cs typeface="Times New Roman" panose="02020603050405020304" pitchFamily="18" charset="0"/>
+              </a:rPr>
+              <a:t> segítségével:</a:t>
+            </a:r>
+          </a:p>
+          <a:p>
+            <a:pPr lvl="1"/>
+            <a:r>
+              <a:rPr lang="hu-HU" i="0" dirty="0">
+                <a:solidFill>
+                  <a:schemeClr val="tx1"/>
+                </a:solidFill>
+                <a:latin typeface="Times New Roman" panose="02020603050405020304" pitchFamily="18" charset="0"/>
+                <a:cs typeface="Times New Roman" panose="02020603050405020304" pitchFamily="18" charset="0"/>
+              </a:rPr>
+              <a:t>Termékek</a:t>
+            </a:r>
+          </a:p>
+          <a:p>
+            <a:pPr lvl="1"/>
+            <a:r>
+              <a:rPr lang="hu-HU" i="0" dirty="0">
+                <a:solidFill>
+                  <a:schemeClr val="tx1"/>
+                </a:solidFill>
+                <a:latin typeface="Times New Roman" panose="02020603050405020304" pitchFamily="18" charset="0"/>
+                <a:cs typeface="Times New Roman" panose="02020603050405020304" pitchFamily="18" charset="0"/>
+              </a:rPr>
+              <a:t>Címkék, kategóriák</a:t>
+            </a:r>
+          </a:p>
+          <a:p>
+            <a:pPr lvl="1"/>
+            <a:r>
+              <a:rPr lang="hu-HU" i="0" dirty="0">
+                <a:solidFill>
+                  <a:schemeClr val="tx1"/>
+                </a:solidFill>
+                <a:latin typeface="Times New Roman" panose="02020603050405020304" pitchFamily="18" charset="0"/>
+                <a:cs typeface="Times New Roman" panose="02020603050405020304" pitchFamily="18" charset="0"/>
+              </a:rPr>
+              <a:t>Kommentek</a:t>
+            </a:r>
+          </a:p>
+          <a:p>
+            <a:pPr lvl="1"/>
+            <a:r>
+              <a:rPr lang="hu-HU" i="0" dirty="0">
+                <a:solidFill>
+                  <a:schemeClr val="tx1"/>
+                </a:solidFill>
+                <a:latin typeface="Times New Roman" panose="02020603050405020304" pitchFamily="18" charset="0"/>
+                <a:cs typeface="Times New Roman" panose="02020603050405020304" pitchFamily="18" charset="0"/>
+              </a:rPr>
+              <a:t>Városok</a:t>
+            </a:r>
+          </a:p>
+          <a:p>
+            <a:pPr marL="530352" lvl="1" indent="0">
+              <a:buNone/>
+            </a:pPr>
+            <a:endParaRPr lang="hu-HU" i="0" dirty="0">
               <a:solidFill>
                 <a:schemeClr val="tx1"/>
               </a:solidFill>
@@ -6084,82 +6024,97 @@
           <a:chExt cx="0" cy="0"/>
         </a:xfrm>
       </p:grpSpPr>
-      <p:sp>
-        <p:nvSpPr>
-          <p:cNvPr id="2" name="Cím 1">
+      <p:pic>
+        <p:nvPicPr>
+          <p:cNvPr id="5" name="Tartalom helye 4">
             <a:extLst>
               <a:ext uri="{FF2B5EF4-FFF2-40B4-BE49-F238E27FC236}">
-                <a16:creationId xmlns:a16="http://schemas.microsoft.com/office/drawing/2014/main" id="{D8736DA6-9D79-4DB7-90AD-09E3F55948CD}"/>
+                <a16:creationId xmlns:a16="http://schemas.microsoft.com/office/drawing/2014/main" id="{6727DEE5-9D71-4742-BD18-4113BDDF0E84}"/>
               </a:ext>
             </a:extLst>
           </p:cNvPr>
-          <p:cNvSpPr>
-            <a:spLocks noGrp="1"/>
-          </p:cNvSpPr>
-          <p:nvPr>
-            <p:ph type="title"/>
-          </p:nvPr>
-        </p:nvSpPr>
-        <p:spPr/>
-        <p:txBody>
-          <a:bodyPr/>
-          <a:lstStyle/>
-          <a:p>
-            <a:r>
-              <a:rPr lang="hu-HU" dirty="0" err="1">
-                <a:solidFill>
-                  <a:schemeClr val="tx1"/>
-                </a:solidFill>
-                <a:latin typeface="Times New Roman" panose="02020603050405020304" pitchFamily="18" charset="0"/>
-                <a:cs typeface="Times New Roman" panose="02020603050405020304" pitchFamily="18" charset="0"/>
-              </a:rPr>
-              <a:t>Reszponzívitás</a:t>
-            </a:r>
-            <a:endParaRPr lang="hu-HU" dirty="0">
-              <a:solidFill>
-                <a:schemeClr val="tx1"/>
-              </a:solidFill>
-              <a:latin typeface="Times New Roman" panose="02020603050405020304" pitchFamily="18" charset="0"/>
-              <a:cs typeface="Times New Roman" panose="02020603050405020304" pitchFamily="18" charset="0"/>
-            </a:endParaRPr>
-          </a:p>
-        </p:txBody>
-      </p:sp>
-      <p:sp>
-        <p:nvSpPr>
-          <p:cNvPr id="3" name="Tartalom helye 2">
+          <p:cNvPicPr>
+            <a:picLocks noGrp="1" noChangeAspect="1"/>
+          </p:cNvPicPr>
+          <p:nvPr>
+            <p:ph idx="1"/>
+          </p:nvPr>
+        </p:nvPicPr>
+        <p:blipFill>
+          <a:blip r:embed="rId2">
+            <a:extLst>
+              <a:ext uri="{28A0092B-C50C-407E-A947-70E740481C1C}">
+                <a14:useLocalDpi xmlns:a14="http://schemas.microsoft.com/office/drawing/2010/main" val="0"/>
+              </a:ext>
+            </a:extLst>
+          </a:blip>
+          <a:stretch>
+            <a:fillRect/>
+          </a:stretch>
+        </p:blipFill>
+        <p:spPr>
+          <a:xfrm>
+            <a:off x="837928" y="408842"/>
+            <a:ext cx="11053531" cy="6040315"/>
+          </a:xfrm>
+        </p:spPr>
+      </p:pic>
+      <p:sp>
+        <p:nvSpPr>
+          <p:cNvPr id="6" name="Téglalap 5">
             <a:extLst>
               <a:ext uri="{FF2B5EF4-FFF2-40B4-BE49-F238E27FC236}">
-                <a16:creationId xmlns:a16="http://schemas.microsoft.com/office/drawing/2014/main" id="{80692D13-F04E-4F4F-A667-DFE0B3C725A5}"/>
+                <a16:creationId xmlns:a16="http://schemas.microsoft.com/office/drawing/2014/main" id="{DD21224A-048D-4922-85C5-E1ED7631335C}"/>
               </a:ext>
             </a:extLst>
           </p:cNvPr>
-          <p:cNvSpPr>
-            <a:spLocks noGrp="1"/>
-          </p:cNvSpPr>
-          <p:nvPr>
-            <p:ph idx="1"/>
-          </p:nvPr>
-        </p:nvSpPr>
-        <p:spPr/>
-        <p:txBody>
-          <a:bodyPr/>
+          <p:cNvSpPr/>
+          <p:nvPr/>
+        </p:nvSpPr>
+        <p:spPr>
+          <a:xfrm>
+            <a:off x="10770577" y="6075485"/>
+            <a:ext cx="1046285" cy="228600"/>
+          </a:xfrm>
+          <a:prstGeom prst="rect">
+            <a:avLst/>
+          </a:prstGeom>
+          <a:solidFill>
+            <a:srgbClr val="FBFBFB"/>
+          </a:solidFill>
+          <a:ln>
+            <a:noFill/>
+          </a:ln>
+        </p:spPr>
+        <p:style>
+          <a:lnRef idx="2">
+            <a:schemeClr val="accent1">
+              <a:shade val="50000"/>
+            </a:schemeClr>
+          </a:lnRef>
+          <a:fillRef idx="1">
+            <a:schemeClr val="accent1"/>
+          </a:fillRef>
+          <a:effectRef idx="0">
+            <a:schemeClr val="accent1"/>
+          </a:effectRef>
+          <a:fontRef idx="minor">
+            <a:schemeClr val="lt1"/>
+          </a:fontRef>
+        </p:style>
+        <p:txBody>
+          <a:bodyPr rtlCol="0" anchor="ctr"/>
           <a:lstStyle/>
           <a:p>
-            <a:endParaRPr lang="hu-HU" dirty="0">
-              <a:solidFill>
-                <a:schemeClr val="tx1"/>
-              </a:solidFill>
-              <a:latin typeface="Times New Roman" panose="02020603050405020304" pitchFamily="18" charset="0"/>
-              <a:cs typeface="Times New Roman" panose="02020603050405020304" pitchFamily="18" charset="0"/>
-            </a:endParaRPr>
+            <a:pPr algn="ctr"/>
+            <a:endParaRPr lang="hu-HU"/>
           </a:p>
         </p:txBody>
       </p:sp>
     </p:spTree>
     <p:extLst>
       <p:ext uri="{BB962C8B-B14F-4D97-AF65-F5344CB8AC3E}">
-        <p14:creationId xmlns:p14="http://schemas.microsoft.com/office/powerpoint/2010/main" val="1279272772"/>
+        <p14:creationId xmlns:p14="http://schemas.microsoft.com/office/powerpoint/2010/main" val="3528585204"/>
       </p:ext>
     </p:extLst>
   </p:cSld>
@@ -6205,7 +6160,7 @@
         <p:spPr>
           <a:xfrm>
             <a:off x="1371600" y="685800"/>
-            <a:ext cx="9601200" cy="829733"/>
+            <a:ext cx="9601200" cy="861646"/>
           </a:xfrm>
         </p:spPr>
         <p:txBody>
@@ -6220,7 +6175,7 @@
                 <a:latin typeface="Times New Roman" panose="02020603050405020304" pitchFamily="18" charset="0"/>
                 <a:cs typeface="Times New Roman" panose="02020603050405020304" pitchFamily="18" charset="0"/>
               </a:rPr>
-              <a:t>Tesztelés</a:t>
+              <a:t>Reszponzívitás</a:t>
             </a:r>
           </a:p>
         </p:txBody>
@@ -6246,70 +6201,7 @@
           <a:bodyPr/>
           <a:lstStyle/>
           <a:p>
-            <a:r>
-              <a:rPr lang="hu-HU" dirty="0">
-                <a:solidFill>
-                  <a:schemeClr val="tx1"/>
-                </a:solidFill>
-                <a:latin typeface="Times New Roman" panose="02020603050405020304" pitchFamily="18" charset="0"/>
-                <a:cs typeface="Times New Roman" panose="02020603050405020304" pitchFamily="18" charset="0"/>
-              </a:rPr>
-              <a:t>Frontend tesztek környezete:</a:t>
-            </a:r>
-          </a:p>
-          <a:p>
-            <a:pPr lvl="1"/>
-            <a:r>
-              <a:rPr lang="hu-HU" i="0" dirty="0" err="1">
-                <a:solidFill>
-                  <a:schemeClr val="tx1"/>
-                </a:solidFill>
-                <a:latin typeface="Times New Roman" panose="02020603050405020304" pitchFamily="18" charset="0"/>
-                <a:cs typeface="Times New Roman" panose="02020603050405020304" pitchFamily="18" charset="0"/>
-              </a:rPr>
-              <a:t>Selenium</a:t>
-            </a:r>
-            <a:r>
-              <a:rPr lang="hu-HU" i="0" dirty="0">
-                <a:solidFill>
-                  <a:schemeClr val="tx1"/>
-                </a:solidFill>
-                <a:latin typeface="Times New Roman" panose="02020603050405020304" pitchFamily="18" charset="0"/>
-                <a:cs typeface="Times New Roman" panose="02020603050405020304" pitchFamily="18" charset="0"/>
-              </a:rPr>
-              <a:t> </a:t>
-            </a:r>
-            <a:r>
-              <a:rPr lang="hu-HU" i="0" dirty="0" err="1">
-                <a:solidFill>
-                  <a:schemeClr val="tx1"/>
-                </a:solidFill>
-                <a:latin typeface="Times New Roman" panose="02020603050405020304" pitchFamily="18" charset="0"/>
-                <a:cs typeface="Times New Roman" panose="02020603050405020304" pitchFamily="18" charset="0"/>
-              </a:rPr>
-              <a:t>Library</a:t>
-            </a:r>
-            <a:r>
-              <a:rPr lang="hu-HU" i="0" dirty="0">
-                <a:solidFill>
-                  <a:schemeClr val="tx1"/>
-                </a:solidFill>
-                <a:latin typeface="Times New Roman" panose="02020603050405020304" pitchFamily="18" charset="0"/>
-                <a:cs typeface="Times New Roman" panose="02020603050405020304" pitchFamily="18" charset="0"/>
-              </a:rPr>
-              <a:t> - </a:t>
-            </a:r>
-            <a:r>
-              <a:rPr lang="hu-HU" i="0" dirty="0" err="1">
-                <a:solidFill>
-                  <a:schemeClr val="tx1"/>
-                </a:solidFill>
-                <a:latin typeface="Times New Roman" panose="02020603050405020304" pitchFamily="18" charset="0"/>
-                <a:cs typeface="Times New Roman" panose="02020603050405020304" pitchFamily="18" charset="0"/>
-              </a:rPr>
-              <a:t>Robotframework</a:t>
-            </a:r>
-            <a:endParaRPr lang="hu-HU" i="0" dirty="0">
+            <a:endParaRPr lang="hu-HU" dirty="0">
               <a:solidFill>
                 <a:schemeClr val="tx1"/>
               </a:solidFill>
@@ -6317,37 +6209,12 @@
               <a:cs typeface="Times New Roman" panose="02020603050405020304" pitchFamily="18" charset="0"/>
             </a:endParaRPr>
           </a:p>
-          <a:p>
-            <a:r>
-              <a:rPr lang="hu-HU" dirty="0">
-                <a:solidFill>
-                  <a:schemeClr val="tx1"/>
-                </a:solidFill>
-                <a:latin typeface="Times New Roman" panose="02020603050405020304" pitchFamily="18" charset="0"/>
-                <a:cs typeface="Times New Roman" panose="02020603050405020304" pitchFamily="18" charset="0"/>
-              </a:rPr>
-              <a:t>Backend tesztek környezete:</a:t>
-            </a:r>
-          </a:p>
-          <a:p>
-            <a:pPr lvl="1"/>
-            <a:r>
-              <a:rPr lang="hu-HU" i="0" dirty="0">
-                <a:solidFill>
-                  <a:schemeClr val="tx1"/>
-                </a:solidFill>
-                <a:latin typeface="Times New Roman" panose="02020603050405020304" pitchFamily="18" charset="0"/>
-                <a:cs typeface="Times New Roman" panose="02020603050405020304" pitchFamily="18" charset="0"/>
-              </a:rPr>
-              <a:t>Postman</a:t>
-            </a:r>
-          </a:p>
         </p:txBody>
       </p:sp>
     </p:spTree>
     <p:extLst>
       <p:ext uri="{BB962C8B-B14F-4D97-AF65-F5344CB8AC3E}">
-        <p14:creationId xmlns:p14="http://schemas.microsoft.com/office/powerpoint/2010/main" val="2524480592"/>
+        <p14:creationId xmlns:p14="http://schemas.microsoft.com/office/powerpoint/2010/main" val="1279272772"/>
       </p:ext>
     </p:extLst>
   </p:cSld>

--- a/Fájlok/Bemutató.pptx
+++ b/Fájlok/Bemutató.pptx
@@ -18,6 +18,7 @@
     <p:sldId id="258" r:id="rId12"/>
     <p:sldId id="266" r:id="rId13"/>
     <p:sldId id="267" r:id="rId14"/>
+    <p:sldId id="269" r:id="rId15"/>
   </p:sldIdLst>
   <p:sldSz cx="12192000" cy="6858000"/>
   <p:notesSz cx="6858000" cy="9144000"/>
@@ -293,7 +294,7 @@
           <a:p>
             <a:fld id="{BD2B674F-1946-412B-A744-B9E1115EC83C}" type="datetimeFigureOut">
               <a:rPr lang="en-GB" smtClean="0"/>
-              <a:t>03/03/2026</a:t>
+              <a:t>04/03/2026</a:t>
             </a:fld>
             <a:endParaRPr lang="en-GB"/>
           </a:p>
@@ -623,7 +624,7 @@
           <a:p>
             <a:fld id="{BD2B674F-1946-412B-A744-B9E1115EC83C}" type="datetimeFigureOut">
               <a:rPr lang="en-GB" smtClean="0"/>
-              <a:t>03/03/2026</a:t>
+              <a:t>04/03/2026</a:t>
             </a:fld>
             <a:endParaRPr lang="en-GB"/>
           </a:p>
@@ -803,7 +804,7 @@
           <a:p>
             <a:fld id="{BD2B674F-1946-412B-A744-B9E1115EC83C}" type="datetimeFigureOut">
               <a:rPr lang="en-GB" smtClean="0"/>
-              <a:t>03/03/2026</a:t>
+              <a:t>04/03/2026</a:t>
             </a:fld>
             <a:endParaRPr lang="en-GB"/>
           </a:p>
@@ -973,7 +974,7 @@
           <a:p>
             <a:fld id="{BD2B674F-1946-412B-A744-B9E1115EC83C}" type="datetimeFigureOut">
               <a:rPr lang="en-GB" smtClean="0"/>
-              <a:t>03/03/2026</a:t>
+              <a:t>04/03/2026</a:t>
             </a:fld>
             <a:endParaRPr lang="en-GB"/>
           </a:p>
@@ -1250,7 +1251,7 @@
           <a:p>
             <a:fld id="{BD2B674F-1946-412B-A744-B9E1115EC83C}" type="datetimeFigureOut">
               <a:rPr lang="en-GB" smtClean="0"/>
-              <a:t>03/03/2026</a:t>
+              <a:t>04/03/2026</a:t>
             </a:fld>
             <a:endParaRPr lang="en-GB"/>
           </a:p>
@@ -1644,7 +1645,7 @@
           <a:p>
             <a:fld id="{BD2B674F-1946-412B-A744-B9E1115EC83C}" type="datetimeFigureOut">
               <a:rPr lang="en-GB" smtClean="0"/>
-              <a:t>03/03/2026</a:t>
+              <a:t>04/03/2026</a:t>
             </a:fld>
             <a:endParaRPr lang="en-GB"/>
           </a:p>
@@ -2121,7 +2122,7 @@
           <a:p>
             <a:fld id="{BD2B674F-1946-412B-A744-B9E1115EC83C}" type="datetimeFigureOut">
               <a:rPr lang="en-GB" smtClean="0"/>
-              <a:t>03/03/2026</a:t>
+              <a:t>04/03/2026</a:t>
             </a:fld>
             <a:endParaRPr lang="en-GB"/>
           </a:p>
@@ -2239,7 +2240,7 @@
           <a:p>
             <a:fld id="{BD2B674F-1946-412B-A744-B9E1115EC83C}" type="datetimeFigureOut">
               <a:rPr lang="en-GB" smtClean="0"/>
-              <a:t>03/03/2026</a:t>
+              <a:t>04/03/2026</a:t>
             </a:fld>
             <a:endParaRPr lang="en-GB"/>
           </a:p>
@@ -2334,7 +2335,7 @@
           <a:p>
             <a:fld id="{BD2B674F-1946-412B-A744-B9E1115EC83C}" type="datetimeFigureOut">
               <a:rPr lang="en-GB" smtClean="0"/>
-              <a:t>03/03/2026</a:t>
+              <a:t>04/03/2026</a:t>
             </a:fld>
             <a:endParaRPr lang="en-GB"/>
           </a:p>
@@ -2680,7 +2681,7 @@
           <a:p>
             <a:fld id="{BD2B674F-1946-412B-A744-B9E1115EC83C}" type="datetimeFigureOut">
               <a:rPr lang="en-GB" smtClean="0"/>
-              <a:t>03/03/2026</a:t>
+              <a:t>04/03/2026</a:t>
             </a:fld>
             <a:endParaRPr lang="en-GB"/>
           </a:p>
@@ -3068,7 +3069,7 @@
           <a:p>
             <a:fld id="{BD2B674F-1946-412B-A744-B9E1115EC83C}" type="datetimeFigureOut">
               <a:rPr lang="en-GB" smtClean="0"/>
-              <a:t>03/03/2026</a:t>
+              <a:t>04/03/2026</a:t>
             </a:fld>
             <a:endParaRPr lang="en-GB"/>
           </a:p>
@@ -3346,7 +3347,7 @@
           <a:p>
             <a:fld id="{BD2B674F-1946-412B-A744-B9E1115EC83C}" type="datetimeFigureOut">
               <a:rPr lang="en-GB" smtClean="0"/>
-              <a:t>03/03/2026</a:t>
+              <a:t>04/03/2026</a:t>
             </a:fld>
             <a:endParaRPr lang="en-GB"/>
           </a:p>
@@ -4230,6 +4231,66 @@
           </a:p>
         </p:txBody>
       </p:sp>
+      <p:pic>
+        <p:nvPicPr>
+          <p:cNvPr id="5" name="Kép 4">
+            <a:extLst>
+              <a:ext uri="{FF2B5EF4-FFF2-40B4-BE49-F238E27FC236}">
+                <a16:creationId xmlns:a16="http://schemas.microsoft.com/office/drawing/2014/main" id="{44A38960-D4BA-4B80-BA28-FDA596D77D13}"/>
+              </a:ext>
+            </a:extLst>
+          </p:cNvPr>
+          <p:cNvPicPr>
+            <a:picLocks noChangeAspect="1"/>
+          </p:cNvPicPr>
+          <p:nvPr/>
+        </p:nvPicPr>
+        <p:blipFill>
+          <a:blip r:embed="rId2"/>
+          <a:stretch>
+            <a:fillRect/>
+          </a:stretch>
+        </p:blipFill>
+        <p:spPr>
+          <a:xfrm>
+            <a:off x="7807071" y="685800"/>
+            <a:ext cx="3639058" cy="4286848"/>
+          </a:xfrm>
+          <a:prstGeom prst="rect">
+            <a:avLst/>
+          </a:prstGeom>
+        </p:spPr>
+      </p:pic>
+      <p:pic>
+        <p:nvPicPr>
+          <p:cNvPr id="9" name="Kép 8">
+            <a:extLst>
+              <a:ext uri="{FF2B5EF4-FFF2-40B4-BE49-F238E27FC236}">
+                <a16:creationId xmlns:a16="http://schemas.microsoft.com/office/drawing/2014/main" id="{29CCA974-8804-4EAA-8365-E27E5DD88530}"/>
+              </a:ext>
+            </a:extLst>
+          </p:cNvPr>
+          <p:cNvPicPr>
+            <a:picLocks noChangeAspect="1"/>
+          </p:cNvPicPr>
+          <p:nvPr/>
+        </p:nvPicPr>
+        <p:blipFill>
+          <a:blip r:embed="rId3"/>
+          <a:stretch>
+            <a:fillRect/>
+          </a:stretch>
+        </p:blipFill>
+        <p:spPr>
+          <a:xfrm>
+            <a:off x="4532038" y="4093198"/>
+            <a:ext cx="2402162" cy="2079002"/>
+          </a:xfrm>
+          <a:prstGeom prst="rect">
+            <a:avLst/>
+          </a:prstGeom>
+        </p:spPr>
+      </p:pic>
     </p:spTree>
     <p:extLst>
       <p:ext uri="{BB962C8B-B14F-4D97-AF65-F5344CB8AC3E}">
@@ -4315,14 +4376,14 @@
             <p:ph idx="1"/>
             <p:extLst>
               <p:ext uri="{D42A27DB-BD31-4B8C-83A1-F6EECF244321}">
-                <p14:modId xmlns:p14="http://schemas.microsoft.com/office/powerpoint/2010/main" val="1931610887"/>
+                <p14:modId xmlns:p14="http://schemas.microsoft.com/office/powerpoint/2010/main" val="3019385836"/>
               </p:ext>
             </p:extLst>
           </p:nvPr>
         </p:nvGraphicFramePr>
         <p:xfrm>
-          <a:off x="1371600" y="2286000"/>
-          <a:ext cx="9601200" cy="2834640"/>
+          <a:off x="1591733" y="2155614"/>
+          <a:ext cx="9601200" cy="3108960"/>
         </p:xfrm>
         <a:graphic>
           <a:graphicData uri="http://schemas.openxmlformats.org/drawingml/2006/table">
@@ -4331,14 +4392,14 @@
                 <a:tableStyleId>{2D5ABB26-0587-4C30-8999-92F81FD0307C}</a:tableStyleId>
               </a:tblPr>
               <a:tblGrid>
-                <a:gridCol w="4800600">
+                <a:gridCol w="4377267">
                   <a:extLst>
                     <a:ext uri="{9D8B030D-6E8A-4147-A177-3AD203B41FA5}">
                       <a16:colId xmlns:a16="http://schemas.microsoft.com/office/drawing/2014/main" val="1522077895"/>
                     </a:ext>
                   </a:extLst>
                 </a:gridCol>
-                <a:gridCol w="4800600">
+                <a:gridCol w="5223933">
                   <a:extLst>
                     <a:ext uri="{9D8B030D-6E8A-4147-A177-3AD203B41FA5}">
                       <a16:colId xmlns:a16="http://schemas.microsoft.com/office/drawing/2014/main" val="902619467"/>
@@ -4353,12 +4414,18 @@
                     <a:lstStyle/>
                     <a:p>
                       <a:r>
-                        <a:rPr lang="hu-HU" dirty="0">
+                        <a:rPr lang="hu-HU" u="sng" dirty="0">
                           <a:latin typeface="Times New Roman" panose="02020603050405020304" pitchFamily="18" charset="0"/>
                           <a:cs typeface="Times New Roman" panose="02020603050405020304" pitchFamily="18" charset="0"/>
                         </a:rPr>
                         <a:t>Kovács Edit:</a:t>
                       </a:r>
+                    </a:p>
+                    <a:p>
+                      <a:endParaRPr lang="hu-HU" dirty="0">
+                        <a:latin typeface="Times New Roman" panose="02020603050405020304" pitchFamily="18" charset="0"/>
+                        <a:cs typeface="Times New Roman" panose="02020603050405020304" pitchFamily="18" charset="0"/>
+                      </a:endParaRPr>
                     </a:p>
                     <a:p>
                       <a:pPr marL="285750" indent="-285750">
@@ -4485,9 +4552,7 @@
                   </a:txBody>
                   <a:tcPr>
                     <a:lnL w="12700" cap="flat" cmpd="sng" algn="ctr">
-                      <a:solidFill>
-                        <a:schemeClr val="tx1"/>
-                      </a:solidFill>
+                      <a:noFill/>
                       <a:prstDash val="solid"/>
                       <a:round/>
                       <a:headEnd type="none" w="med" len="med"/>
@@ -4503,18 +4568,14 @@
                       <a:tailEnd type="none" w="med" len="med"/>
                     </a:lnR>
                     <a:lnT w="12700" cap="flat" cmpd="sng" algn="ctr">
-                      <a:solidFill>
-                        <a:schemeClr val="tx1"/>
-                      </a:solidFill>
+                      <a:noFill/>
                       <a:prstDash val="solid"/>
                       <a:round/>
                       <a:headEnd type="none" w="med" len="med"/>
                       <a:tailEnd type="none" w="med" len="med"/>
                     </a:lnT>
                     <a:lnB w="12700" cap="flat" cmpd="sng" algn="ctr">
-                      <a:solidFill>
-                        <a:schemeClr val="tx1"/>
-                      </a:solidFill>
+                      <a:noFill/>
                       <a:prstDash val="solid"/>
                       <a:round/>
                       <a:headEnd type="none" w="med" len="med"/>
@@ -4528,12 +4589,18 @@
                     <a:lstStyle/>
                     <a:p>
                       <a:r>
-                        <a:rPr lang="hu-HU" dirty="0">
+                        <a:rPr lang="hu-HU" u="sng" dirty="0">
                           <a:latin typeface="Times New Roman" panose="02020603050405020304" pitchFamily="18" charset="0"/>
                           <a:cs typeface="Times New Roman" panose="02020603050405020304" pitchFamily="18" charset="0"/>
                         </a:rPr>
                         <a:t>Tóthpál István:</a:t>
                       </a:r>
+                    </a:p>
+                    <a:p>
+                      <a:endParaRPr lang="hu-HU" dirty="0">
+                        <a:latin typeface="Times New Roman" panose="02020603050405020304" pitchFamily="18" charset="0"/>
+                        <a:cs typeface="Times New Roman" panose="02020603050405020304" pitchFamily="18" charset="0"/>
+                      </a:endParaRPr>
                     </a:p>
                     <a:p>
                       <a:pPr marL="285750" indent="-285750">
@@ -4702,27 +4769,21 @@
                       <a:tailEnd type="none" w="med" len="med"/>
                     </a:lnL>
                     <a:lnR w="12700" cap="flat" cmpd="sng" algn="ctr">
-                      <a:solidFill>
-                        <a:schemeClr val="tx1"/>
-                      </a:solidFill>
+                      <a:noFill/>
                       <a:prstDash val="solid"/>
                       <a:round/>
                       <a:headEnd type="none" w="med" len="med"/>
                       <a:tailEnd type="none" w="med" len="med"/>
                     </a:lnR>
                     <a:lnT w="12700" cap="flat" cmpd="sng" algn="ctr">
-                      <a:solidFill>
-                        <a:schemeClr val="tx1"/>
-                      </a:solidFill>
+                      <a:noFill/>
                       <a:prstDash val="solid"/>
                       <a:round/>
                       <a:headEnd type="none" w="med" len="med"/>
                       <a:tailEnd type="none" w="med" len="med"/>
                     </a:lnT>
                     <a:lnB w="12700" cap="flat" cmpd="sng" algn="ctr">
-                      <a:solidFill>
-                        <a:schemeClr val="tx1"/>
-                      </a:solidFill>
+                      <a:noFill/>
                       <a:prstDash val="solid"/>
                       <a:round/>
                       <a:headEnd type="none" w="med" len="med"/>
@@ -4825,10 +4886,27 @@
             <p:ph idx="1"/>
           </p:nvPr>
         </p:nvSpPr>
-        <p:spPr/>
+        <p:spPr>
+          <a:xfrm>
+            <a:off x="1371600" y="2286000"/>
+            <a:ext cx="8238067" cy="3581400"/>
+          </a:xfrm>
+        </p:spPr>
         <p:txBody>
           <a:bodyPr/>
           <a:lstStyle/>
+          <a:p>
+            <a:r>
+              <a:rPr lang="hu-HU" dirty="0">
+                <a:solidFill>
+                  <a:schemeClr val="tx1"/>
+                </a:solidFill>
+                <a:latin typeface="Times New Roman" panose="02020603050405020304" pitchFamily="18" charset="0"/>
+                <a:cs typeface="Times New Roman" panose="02020603050405020304" pitchFamily="18" charset="0"/>
+              </a:rPr>
+              <a:t>Szállító cégekkel való kapcsolat</a:t>
+            </a:r>
+          </a:p>
           <a:p>
             <a:endParaRPr lang="hu-HU" dirty="0">
               <a:solidFill>
@@ -4925,6 +5003,208 @@
 </p:sld>
 </file>
 
+<file path=ppt/slides/slide14.xml><?xml version="1.0" encoding="utf-8"?>
+<p:sld xmlns:a="http://schemas.openxmlformats.org/drawingml/2006/main" xmlns:r="http://schemas.openxmlformats.org/officeDocument/2006/relationships" xmlns:p="http://schemas.openxmlformats.org/presentationml/2006/main">
+  <p:cSld>
+    <p:spTree>
+      <p:nvGrpSpPr>
+        <p:cNvPr id="1" name=""/>
+        <p:cNvGrpSpPr/>
+        <p:nvPr/>
+      </p:nvGrpSpPr>
+      <p:grpSpPr>
+        <a:xfrm>
+          <a:off x="0" y="0"/>
+          <a:ext cx="0" cy="0"/>
+          <a:chOff x="0" y="0"/>
+          <a:chExt cx="0" cy="0"/>
+        </a:xfrm>
+      </p:grpSpPr>
+      <p:sp>
+        <p:nvSpPr>
+          <p:cNvPr id="3" name="Tartalom helye 2">
+            <a:extLst>
+              <a:ext uri="{FF2B5EF4-FFF2-40B4-BE49-F238E27FC236}">
+                <a16:creationId xmlns:a16="http://schemas.microsoft.com/office/drawing/2014/main" id="{F476053C-A6BC-4C33-8474-C12BD5859804}"/>
+              </a:ext>
+            </a:extLst>
+          </p:cNvPr>
+          <p:cNvSpPr>
+            <a:spLocks noGrp="1"/>
+          </p:cNvSpPr>
+          <p:nvPr>
+            <p:ph idx="1"/>
+          </p:nvPr>
+        </p:nvSpPr>
+        <p:spPr>
+          <a:xfrm>
+            <a:off x="1295400" y="2175933"/>
+            <a:ext cx="9601200" cy="3581400"/>
+          </a:xfrm>
+        </p:spPr>
+        <p:txBody>
+          <a:bodyPr>
+            <a:normAutofit fontScale="70000" lnSpcReduction="20000"/>
+          </a:bodyPr>
+          <a:lstStyle/>
+          <a:p>
+            <a:r>
+              <a:rPr lang="hu-HU" dirty="0">
+                <a:solidFill>
+                  <a:schemeClr val="tx1"/>
+                </a:solidFill>
+                <a:latin typeface="Times New Roman" panose="02020603050405020304" pitchFamily="18" charset="0"/>
+                <a:cs typeface="Times New Roman" panose="02020603050405020304" pitchFamily="18" charset="0"/>
+              </a:rPr>
+              <a:t>Prezentáció:</a:t>
+            </a:r>
+          </a:p>
+          <a:p>
+            <a:r>
+              <a:rPr lang="hu-HU" dirty="0">
+                <a:solidFill>
+                  <a:schemeClr val="tx1"/>
+                </a:solidFill>
+                <a:latin typeface="Times New Roman" panose="02020603050405020304" pitchFamily="18" charset="0"/>
+                <a:cs typeface="Times New Roman" panose="02020603050405020304" pitchFamily="18" charset="0"/>
+                <a:hlinkClick r:id="rId2"/>
+              </a:rPr>
+              <a:t>https://youtu.be/AAVxq0WvIJU?si=fdMjgQV-V2niKMhS</a:t>
+            </a:r>
+            <a:endParaRPr lang="hu-HU" dirty="0">
+              <a:solidFill>
+                <a:schemeClr val="tx1"/>
+              </a:solidFill>
+              <a:latin typeface="Times New Roman" panose="02020603050405020304" pitchFamily="18" charset="0"/>
+              <a:cs typeface="Times New Roman" panose="02020603050405020304" pitchFamily="18" charset="0"/>
+            </a:endParaRPr>
+          </a:p>
+          <a:p>
+            <a:r>
+              <a:rPr lang="hu-HU" sz="2000" b="0" i="0" u="none" strike="noStrike" baseline="0" dirty="0">
+                <a:solidFill>
+                  <a:srgbClr val="000000"/>
+                </a:solidFill>
+                <a:latin typeface="Times New Roman" panose="02020603050405020304" pitchFamily="18" charset="0"/>
+                <a:cs typeface="Times New Roman" panose="02020603050405020304" pitchFamily="18" charset="0"/>
+              </a:rPr>
+              <a:t>vizsgarész során a vizsgázó gyakorlati bemutatóval összekapcsolt szóbeli előadás formájában mutatja be a </a:t>
+            </a:r>
+          </a:p>
+          <a:p>
+            <a:r>
+              <a:rPr lang="hu-HU" sz="2000" b="0" i="0" u="none" strike="noStrike" baseline="0" dirty="0">
+                <a:solidFill>
+                  <a:srgbClr val="000000"/>
+                </a:solidFill>
+                <a:latin typeface="Times New Roman" panose="02020603050405020304" pitchFamily="18" charset="0"/>
+                <a:cs typeface="Times New Roman" panose="02020603050405020304" pitchFamily="18" charset="0"/>
+              </a:rPr>
+              <a:t>szoftver célját, </a:t>
+            </a:r>
+          </a:p>
+          <a:p>
+            <a:r>
+              <a:rPr lang="hu-HU" sz="2000" b="0" i="0" u="none" strike="noStrike" baseline="0" dirty="0">
+                <a:solidFill>
+                  <a:srgbClr val="000000"/>
+                </a:solidFill>
+                <a:latin typeface="Times New Roman" panose="02020603050405020304" pitchFamily="18" charset="0"/>
+                <a:cs typeface="Times New Roman" panose="02020603050405020304" pitchFamily="18" charset="0"/>
+              </a:rPr>
+              <a:t>műszaki megvalósítását, </a:t>
+            </a:r>
+          </a:p>
+          <a:p>
+            <a:r>
+              <a:rPr lang="hu-HU" sz="2000" b="0" i="0" u="none" strike="noStrike" baseline="0" dirty="0">
+                <a:solidFill>
+                  <a:srgbClr val="000000"/>
+                </a:solidFill>
+                <a:latin typeface="Times New Roman" panose="02020603050405020304" pitchFamily="18" charset="0"/>
+                <a:cs typeface="Times New Roman" panose="02020603050405020304" pitchFamily="18" charset="0"/>
+              </a:rPr>
+              <a:t>működését, </a:t>
+            </a:r>
+          </a:p>
+          <a:p>
+            <a:r>
+              <a:rPr lang="hu-HU" sz="2000" b="0" i="0" u="none" strike="noStrike" baseline="0" dirty="0">
+                <a:solidFill>
+                  <a:srgbClr val="000000"/>
+                </a:solidFill>
+                <a:latin typeface="Times New Roman" panose="02020603050405020304" pitchFamily="18" charset="0"/>
+                <a:cs typeface="Times New Roman" panose="02020603050405020304" pitchFamily="18" charset="0"/>
+              </a:rPr>
+              <a:t>forráskódját, </a:t>
+            </a:r>
+          </a:p>
+          <a:p>
+            <a:r>
+              <a:rPr lang="hu-HU" sz="2000" b="0" i="0" u="none" strike="noStrike" baseline="0" dirty="0">
+                <a:solidFill>
+                  <a:srgbClr val="000000"/>
+                </a:solidFill>
+                <a:latin typeface="Times New Roman" panose="02020603050405020304" pitchFamily="18" charset="0"/>
+                <a:cs typeface="Times New Roman" panose="02020603050405020304" pitchFamily="18" charset="0"/>
+              </a:rPr>
+              <a:t>a csapaton belüli munkamegosztást, a fejlesztési csapatban betöltött szerepét, a fejlesztés során használt projektszervezési eszközöket. </a:t>
+            </a:r>
+          </a:p>
+          <a:p>
+            <a:r>
+              <a:rPr lang="hu-HU" sz="2000" dirty="0">
+                <a:solidFill>
+                  <a:srgbClr val="000000"/>
+                </a:solidFill>
+                <a:latin typeface="Times New Roman" panose="02020603050405020304" pitchFamily="18" charset="0"/>
+                <a:cs typeface="Times New Roman" panose="02020603050405020304" pitchFamily="18" charset="0"/>
+              </a:rPr>
+              <a:t>Első dia szinte olyan mint a dokumentáció, mintával, dátummal „vizsgaremek” felirat</a:t>
+            </a:r>
+          </a:p>
+          <a:p>
+            <a:r>
+              <a:rPr lang="hu-HU" sz="2000" b="0" i="0" u="none" strike="noStrike" baseline="0" dirty="0">
+                <a:solidFill>
+                  <a:srgbClr val="000000"/>
+                </a:solidFill>
+                <a:latin typeface="Times New Roman" panose="02020603050405020304" pitchFamily="18" charset="0"/>
+                <a:cs typeface="Times New Roman" panose="02020603050405020304" pitchFamily="18" charset="0"/>
+              </a:rPr>
+              <a:t>Max 7 infó a dián</a:t>
+            </a:r>
+          </a:p>
+          <a:p>
+            <a:r>
+              <a:rPr lang="hu-HU" sz="2000" b="0" i="0" u="none" strike="noStrike" baseline="0" dirty="0">
+                <a:solidFill>
+                  <a:srgbClr val="000000"/>
+                </a:solidFill>
+                <a:latin typeface="Times New Roman" panose="02020603050405020304" pitchFamily="18" charset="0"/>
+                <a:cs typeface="Times New Roman" panose="02020603050405020304" pitchFamily="18" charset="0"/>
+              </a:rPr>
+              <a:t>Végén köszönjük a figyelmet</a:t>
+            </a:r>
+          </a:p>
+          <a:p>
+            <a:endParaRPr lang="hu-HU" dirty="0"/>
+          </a:p>
+        </p:txBody>
+      </p:sp>
+    </p:spTree>
+    <p:extLst>
+      <p:ext uri="{BB962C8B-B14F-4D97-AF65-F5344CB8AC3E}">
+        <p14:creationId xmlns:p14="http://schemas.microsoft.com/office/powerpoint/2010/main" val="2537151539"/>
+      </p:ext>
+    </p:extLst>
+  </p:cSld>
+  <p:clrMapOvr>
+    <a:masterClrMapping/>
+  </p:clrMapOvr>
+</p:sld>
+</file>
+
 <file path=ppt/slides/slide2.xml><?xml version="1.0" encoding="utf-8"?>
 <p:sld xmlns:a="http://schemas.openxmlformats.org/drawingml/2006/main" xmlns:r="http://schemas.openxmlformats.org/officeDocument/2006/relationships" xmlns:p="http://schemas.openxmlformats.org/presentationml/2006/main">
   <p:cSld>
@@ -4978,10 +5258,10 @@
       </p:sp>
       <p:sp>
         <p:nvSpPr>
-          <p:cNvPr id="3" name="Tartalom helye 2">
+          <p:cNvPr id="4" name="Tartalom helye 2">
             <a:extLst>
               <a:ext uri="{FF2B5EF4-FFF2-40B4-BE49-F238E27FC236}">
-                <a16:creationId xmlns:a16="http://schemas.microsoft.com/office/drawing/2014/main" id="{80692D13-F04E-4F4F-A667-DFE0B3C725A5}"/>
+                <a16:creationId xmlns:a16="http://schemas.microsoft.com/office/drawing/2014/main" id="{001DDAED-5686-4A0D-A235-F749239A7FA3}"/>
               </a:ext>
             </a:extLst>
           </p:cNvPr>
@@ -4994,159 +5274,21 @@
         </p:nvSpPr>
         <p:spPr>
           <a:xfrm>
-            <a:off x="1151467" y="1744622"/>
-            <a:ext cx="9601200" cy="4012223"/>
-          </a:xfrm>
-        </p:spPr>
-        <p:txBody>
-          <a:bodyPr>
-            <a:normAutofit fontScale="85000" lnSpcReduction="10000"/>
-          </a:bodyPr>
+            <a:off x="1371600" y="1909233"/>
+            <a:ext cx="5858933" cy="3581400"/>
+          </a:xfrm>
+        </p:spPr>
+        <p:txBody>
+          <a:bodyPr/>
           <a:lstStyle/>
           <a:p>
-            <a:r>
-              <a:rPr lang="hu-HU" dirty="0">
-                <a:solidFill>
-                  <a:schemeClr val="tx1"/>
-                </a:solidFill>
-                <a:latin typeface="Times New Roman" panose="02020603050405020304" pitchFamily="18" charset="0"/>
-                <a:cs typeface="Times New Roman" panose="02020603050405020304" pitchFamily="18" charset="0"/>
-              </a:rPr>
-              <a:t>Prezentáció:</a:t>
-            </a:r>
-          </a:p>
-          <a:p>
-            <a:r>
-              <a:rPr lang="hu-HU" dirty="0">
-                <a:solidFill>
-                  <a:schemeClr val="tx1"/>
-                </a:solidFill>
-                <a:latin typeface="Times New Roman" panose="02020603050405020304" pitchFamily="18" charset="0"/>
-                <a:cs typeface="Times New Roman" panose="02020603050405020304" pitchFamily="18" charset="0"/>
-                <a:hlinkClick r:id="rId2"/>
-              </a:rPr>
-              <a:t>https://youtu.be/AAVxq0WvIJU?si=fdMjgQV-V2niKMhS</a:t>
-            </a:r>
+            <a:pPr>
+              <a:buFont typeface="Wingdings" panose="05000000000000000000" pitchFamily="2" charset="2"/>
+              <a:buChar char="Ø"/>
+            </a:pPr>
             <a:endParaRPr lang="hu-HU" dirty="0">
               <a:solidFill>
                 <a:schemeClr val="tx1"/>
-              </a:solidFill>
-              <a:latin typeface="Times New Roman" panose="02020603050405020304" pitchFamily="18" charset="0"/>
-              <a:cs typeface="Times New Roman" panose="02020603050405020304" pitchFamily="18" charset="0"/>
-            </a:endParaRPr>
-          </a:p>
-          <a:p>
-            <a:r>
-              <a:rPr lang="hu-HU" sz="1800" b="0" i="0" u="none" strike="noStrike" baseline="0" dirty="0">
-                <a:solidFill>
-                  <a:srgbClr val="000000"/>
-                </a:solidFill>
-                <a:latin typeface="Times New Roman" panose="02020603050405020304" pitchFamily="18" charset="0"/>
-                <a:cs typeface="Times New Roman" panose="02020603050405020304" pitchFamily="18" charset="0"/>
-              </a:rPr>
-              <a:t>vizsgarész során a vizsgázó gyakorlati bemutatóval összekapcsolt szóbeli előadás formájában mutatja be a </a:t>
-            </a:r>
-          </a:p>
-          <a:p>
-            <a:r>
-              <a:rPr lang="hu-HU" sz="1800" b="0" i="0" u="none" strike="noStrike" baseline="0" dirty="0">
-                <a:solidFill>
-                  <a:srgbClr val="000000"/>
-                </a:solidFill>
-                <a:latin typeface="Times New Roman" panose="02020603050405020304" pitchFamily="18" charset="0"/>
-                <a:cs typeface="Times New Roman" panose="02020603050405020304" pitchFamily="18" charset="0"/>
-              </a:rPr>
-              <a:t>szoftver célját, </a:t>
-            </a:r>
-          </a:p>
-          <a:p>
-            <a:r>
-              <a:rPr lang="hu-HU" sz="1800" b="0" i="0" u="none" strike="noStrike" baseline="0" dirty="0">
-                <a:solidFill>
-                  <a:srgbClr val="000000"/>
-                </a:solidFill>
-                <a:latin typeface="Times New Roman" panose="02020603050405020304" pitchFamily="18" charset="0"/>
-                <a:cs typeface="Times New Roman" panose="02020603050405020304" pitchFamily="18" charset="0"/>
-              </a:rPr>
-              <a:t>műszaki megvalósítását, </a:t>
-            </a:r>
-          </a:p>
-          <a:p>
-            <a:r>
-              <a:rPr lang="hu-HU" sz="1800" b="0" i="0" u="none" strike="noStrike" baseline="0" dirty="0">
-                <a:solidFill>
-                  <a:srgbClr val="000000"/>
-                </a:solidFill>
-                <a:latin typeface="Times New Roman" panose="02020603050405020304" pitchFamily="18" charset="0"/>
-                <a:cs typeface="Times New Roman" panose="02020603050405020304" pitchFamily="18" charset="0"/>
-              </a:rPr>
-              <a:t>működését, </a:t>
-            </a:r>
-          </a:p>
-          <a:p>
-            <a:r>
-              <a:rPr lang="hu-HU" sz="1800" b="0" i="0" u="none" strike="noStrike" baseline="0" dirty="0">
-                <a:solidFill>
-                  <a:srgbClr val="000000"/>
-                </a:solidFill>
-                <a:latin typeface="Times New Roman" panose="02020603050405020304" pitchFamily="18" charset="0"/>
-                <a:cs typeface="Times New Roman" panose="02020603050405020304" pitchFamily="18" charset="0"/>
-              </a:rPr>
-              <a:t>forráskódját, </a:t>
-            </a:r>
-          </a:p>
-          <a:p>
-            <a:r>
-              <a:rPr lang="hu-HU" sz="1800" b="0" i="0" u="none" strike="noStrike" baseline="0" dirty="0">
-                <a:solidFill>
-                  <a:srgbClr val="000000"/>
-                </a:solidFill>
-                <a:latin typeface="Times New Roman" panose="02020603050405020304" pitchFamily="18" charset="0"/>
-                <a:cs typeface="Times New Roman" panose="02020603050405020304" pitchFamily="18" charset="0"/>
-              </a:rPr>
-              <a:t>a csapaton belüli munkamegosztást, a fejlesztési csapatban betöltött szerepét, a fejlesztés során használt projektszervezési eszközöket. </a:t>
-            </a:r>
-          </a:p>
-          <a:p>
-            <a:r>
-              <a:rPr lang="hu-HU" sz="1800" dirty="0">
-                <a:solidFill>
-                  <a:srgbClr val="000000"/>
-                </a:solidFill>
-                <a:latin typeface="Times New Roman" panose="02020603050405020304" pitchFamily="18" charset="0"/>
-                <a:cs typeface="Times New Roman" panose="02020603050405020304" pitchFamily="18" charset="0"/>
-              </a:rPr>
-              <a:t>Első dia szinte olyan mint a dokumentáció, mintával, dátummal „vizsgaremek” felirat</a:t>
-            </a:r>
-          </a:p>
-          <a:p>
-            <a:r>
-              <a:rPr lang="hu-HU" sz="1800" b="0" i="0" u="none" strike="noStrike" baseline="0" dirty="0">
-                <a:solidFill>
-                  <a:srgbClr val="000000"/>
-                </a:solidFill>
-                <a:latin typeface="Times New Roman" panose="02020603050405020304" pitchFamily="18" charset="0"/>
-                <a:cs typeface="Times New Roman" panose="02020603050405020304" pitchFamily="18" charset="0"/>
-              </a:rPr>
-              <a:t>Max 7 infó a dián</a:t>
-            </a:r>
-          </a:p>
-          <a:p>
-            <a:r>
-              <a:rPr lang="hu-HU" sz="1800" b="0" i="0" u="none" strike="noStrike" baseline="0" dirty="0">
-                <a:solidFill>
-                  <a:srgbClr val="000000"/>
-                </a:solidFill>
-                <a:latin typeface="Times New Roman" panose="02020603050405020304" pitchFamily="18" charset="0"/>
-                <a:cs typeface="Times New Roman" panose="02020603050405020304" pitchFamily="18" charset="0"/>
-              </a:rPr>
-              <a:t>Végén köszönjük a figyelmet</a:t>
-            </a:r>
-          </a:p>
-          <a:p>
-            <a:endParaRPr lang="hu-HU" sz="1800" b="0" i="0" u="none" strike="noStrike" baseline="0" dirty="0">
-              <a:solidFill>
-                <a:srgbClr val="000000"/>
               </a:solidFill>
               <a:latin typeface="Times New Roman" panose="02020603050405020304" pitchFamily="18" charset="0"/>
               <a:cs typeface="Times New Roman" panose="02020603050405020304" pitchFamily="18" charset="0"/>
@@ -5256,7 +5398,7 @@
               <a:buChar char="Ø"/>
             </a:pPr>
             <a:r>
-              <a:rPr lang="hu-HU" sz="2400" dirty="0">
+              <a:rPr lang="hu-HU" dirty="0">
                 <a:solidFill>
                   <a:schemeClr val="tx1"/>
                 </a:solidFill>
@@ -5272,7 +5414,7 @@
               <a:buChar char="Ø"/>
             </a:pPr>
             <a:r>
-              <a:rPr lang="hu-HU" sz="2400" dirty="0">
+              <a:rPr lang="hu-HU" dirty="0">
                 <a:solidFill>
                   <a:schemeClr val="tx1"/>
                 </a:solidFill>
@@ -5288,7 +5430,7 @@
               <a:buChar char="Ø"/>
             </a:pPr>
             <a:r>
-              <a:rPr lang="hu-HU" sz="2400" dirty="0">
+              <a:rPr lang="hu-HU" dirty="0">
                 <a:solidFill>
                   <a:schemeClr val="tx1"/>
                 </a:solidFill>
@@ -5304,7 +5446,7 @@
               <a:buChar char="Ø"/>
             </a:pPr>
             <a:r>
-              <a:rPr lang="hu-HU" sz="2400" dirty="0">
+              <a:rPr lang="hu-HU" dirty="0">
                 <a:solidFill>
                   <a:schemeClr val="tx1"/>
                 </a:solidFill>
@@ -5320,7 +5462,7 @@
               <a:buChar char="Ø"/>
             </a:pPr>
             <a:r>
-              <a:rPr lang="hu-HU" sz="2400" dirty="0">
+              <a:rPr lang="hu-HU" dirty="0">
                 <a:solidFill>
                   <a:schemeClr val="tx1"/>
                 </a:solidFill>
@@ -5335,7 +5477,7 @@
               <a:buFont typeface="Wingdings" panose="05000000000000000000" pitchFamily="2" charset="2"/>
               <a:buChar char="Ø"/>
             </a:pPr>
-            <a:endParaRPr lang="hu-HU" sz="2400" dirty="0">
+            <a:endParaRPr lang="hu-HU" dirty="0">
               <a:solidFill>
                 <a:schemeClr val="tx1"/>
               </a:solidFill>
@@ -5433,7 +5575,7 @@
         <p:spPr>
           <a:xfrm>
             <a:off x="1371600" y="2171700"/>
-            <a:ext cx="9601200" cy="3581400"/>
+            <a:ext cx="3395133" cy="3581400"/>
           </a:xfrm>
         </p:spPr>
         <p:txBody>
@@ -5662,6 +5804,28 @@
           <a:bodyPr/>
           <a:lstStyle/>
           <a:p>
+            <a:r>
+              <a:rPr lang="hu-HU" dirty="0">
+                <a:solidFill>
+                  <a:schemeClr val="tx1"/>
+                </a:solidFill>
+                <a:latin typeface="Times New Roman" panose="02020603050405020304" pitchFamily="18" charset="0"/>
+                <a:cs typeface="Times New Roman" panose="02020603050405020304" pitchFamily="18" charset="0"/>
+              </a:rPr>
+              <a:t>Laravel 12</a:t>
+            </a:r>
+          </a:p>
+          <a:p>
+            <a:r>
+              <a:rPr lang="hu-HU" dirty="0" err="1">
+                <a:solidFill>
+                  <a:schemeClr val="tx1"/>
+                </a:solidFill>
+                <a:latin typeface="Times New Roman" panose="02020603050405020304" pitchFamily="18" charset="0"/>
+                <a:cs typeface="Times New Roman" panose="02020603050405020304" pitchFamily="18" charset="0"/>
+              </a:rPr>
+              <a:t>Sanctum</a:t>
+            </a:r>
             <a:endParaRPr lang="hu-HU" dirty="0">
               <a:solidFill>
                 <a:schemeClr val="tx1"/>
@@ -5670,8 +5834,153 @@
               <a:cs typeface="Times New Roman" panose="02020603050405020304" pitchFamily="18" charset="0"/>
             </a:endParaRPr>
           </a:p>
-        </p:txBody>
-      </p:sp>
+          <a:p>
+            <a:r>
+              <a:rPr lang="hu-HU" dirty="0">
+                <a:solidFill>
+                  <a:schemeClr val="tx1"/>
+                </a:solidFill>
+                <a:latin typeface="Times New Roman" panose="02020603050405020304" pitchFamily="18" charset="0"/>
+                <a:cs typeface="Times New Roman" panose="02020603050405020304" pitchFamily="18" charset="0"/>
+              </a:rPr>
+              <a:t>Kontrollerek</a:t>
+            </a:r>
+          </a:p>
+          <a:p>
+            <a:r>
+              <a:rPr lang="hu-HU" dirty="0">
+                <a:solidFill>
+                  <a:schemeClr val="tx1"/>
+                </a:solidFill>
+                <a:latin typeface="Times New Roman" panose="02020603050405020304" pitchFamily="18" charset="0"/>
+                <a:cs typeface="Times New Roman" panose="02020603050405020304" pitchFamily="18" charset="0"/>
+              </a:rPr>
+              <a:t>Migrációk, táblák</a:t>
+            </a:r>
+          </a:p>
+          <a:p>
+            <a:r>
+              <a:rPr lang="hu-HU" dirty="0">
+                <a:solidFill>
+                  <a:schemeClr val="tx1"/>
+                </a:solidFill>
+                <a:latin typeface="Times New Roman" panose="02020603050405020304" pitchFamily="18" charset="0"/>
+                <a:cs typeface="Times New Roman" panose="02020603050405020304" pitchFamily="18" charset="0"/>
+              </a:rPr>
+              <a:t>Backend-frontend összeköttetés</a:t>
+            </a:r>
+          </a:p>
+        </p:txBody>
+      </p:sp>
+      <p:pic>
+        <p:nvPicPr>
+          <p:cNvPr id="7" name="Kép 6">
+            <a:extLst>
+              <a:ext uri="{FF2B5EF4-FFF2-40B4-BE49-F238E27FC236}">
+                <a16:creationId xmlns:a16="http://schemas.microsoft.com/office/drawing/2014/main" id="{38F5AFF7-93D3-4D08-A7F2-FB4DB21F3086}"/>
+              </a:ext>
+            </a:extLst>
+          </p:cNvPr>
+          <p:cNvPicPr>
+            <a:picLocks noChangeAspect="1"/>
+          </p:cNvPicPr>
+          <p:nvPr/>
+        </p:nvPicPr>
+        <p:blipFill rotWithShape="1">
+          <a:blip r:embed="rId2"/>
+          <a:srcRect r="1720"/>
+          <a:stretch/>
+        </p:blipFill>
+        <p:spPr>
+          <a:xfrm>
+            <a:off x="8905956" y="252182"/>
+            <a:ext cx="2930445" cy="3305636"/>
+          </a:xfrm>
+          <a:prstGeom prst="rect">
+            <a:avLst/>
+          </a:prstGeom>
+          <a:ln>
+            <a:noFill/>
+          </a:ln>
+        </p:spPr>
+      </p:pic>
+      <p:pic>
+        <p:nvPicPr>
+          <p:cNvPr id="9" name="Kép 8">
+            <a:extLst>
+              <a:ext uri="{FF2B5EF4-FFF2-40B4-BE49-F238E27FC236}">
+                <a16:creationId xmlns:a16="http://schemas.microsoft.com/office/drawing/2014/main" id="{09414831-5E14-4101-BF7E-B9A1C967507F}"/>
+              </a:ext>
+            </a:extLst>
+          </p:cNvPr>
+          <p:cNvPicPr>
+            <a:picLocks noChangeAspect="1"/>
+          </p:cNvPicPr>
+          <p:nvPr/>
+        </p:nvPicPr>
+        <p:blipFill>
+          <a:blip r:embed="rId3"/>
+          <a:stretch>
+            <a:fillRect/>
+          </a:stretch>
+        </p:blipFill>
+        <p:spPr>
+          <a:xfrm>
+            <a:off x="6678956" y="2448164"/>
+            <a:ext cx="2048161" cy="4163006"/>
+          </a:xfrm>
+          <a:prstGeom prst="rect">
+            <a:avLst/>
+          </a:prstGeom>
+        </p:spPr>
+      </p:pic>
+      <p:pic>
+        <p:nvPicPr>
+          <p:cNvPr id="2050" name="Picture 2">
+            <a:extLst>
+              <a:ext uri="{FF2B5EF4-FFF2-40B4-BE49-F238E27FC236}">
+                <a16:creationId xmlns:a16="http://schemas.microsoft.com/office/drawing/2014/main" id="{4CCB59EF-C964-4CBA-99AC-E4B332D8F9C3}"/>
+              </a:ext>
+            </a:extLst>
+          </p:cNvPr>
+          <p:cNvPicPr>
+            <a:picLocks noChangeAspect="1" noChangeArrowheads="1"/>
+          </p:cNvPicPr>
+          <p:nvPr/>
+        </p:nvPicPr>
+        <p:blipFill>
+          <a:blip r:embed="rId4">
+            <a:extLst>
+              <a:ext uri="{28A0092B-C50C-407E-A947-70E740481C1C}">
+                <a14:useLocalDpi xmlns:a14="http://schemas.microsoft.com/office/drawing/2010/main" val="0"/>
+              </a:ext>
+            </a:extLst>
+          </a:blip>
+          <a:srcRect/>
+          <a:stretch>
+            <a:fillRect/>
+          </a:stretch>
+        </p:blipFill>
+        <p:spPr bwMode="auto">
+          <a:xfrm>
+            <a:off x="10102560" y="4932069"/>
+            <a:ext cx="1435679" cy="1494130"/>
+          </a:xfrm>
+          <a:prstGeom prst="rect">
+            <a:avLst/>
+          </a:prstGeom>
+          <a:noFill/>
+          <a:extLst>
+            <a:ext uri="{909E8E84-426E-40DD-AFC4-6F175D3DCCD1}">
+              <a14:hiddenFill xmlns:a14="http://schemas.microsoft.com/office/drawing/2010/main">
+                <a:solidFill>
+                  <a:srgbClr val="FFFFFF"/>
+                </a:solidFill>
+              </a14:hiddenFill>
+            </a:ext>
+          </a:extLst>
+        </p:spPr>
+      </p:pic>
     </p:spTree>
     <p:extLst>
       <p:ext uri="{BB962C8B-B14F-4D97-AF65-F5344CB8AC3E}">
@@ -5752,11 +6061,58 @@
             <p:ph idx="1"/>
           </p:nvPr>
         </p:nvSpPr>
-        <p:spPr/>
+        <p:spPr>
+          <a:xfrm>
+            <a:off x="1371599" y="2286000"/>
+            <a:ext cx="5350933" cy="2286319"/>
+          </a:xfrm>
+        </p:spPr>
         <p:txBody>
           <a:bodyPr/>
           <a:lstStyle/>
           <a:p>
+            <a:r>
+              <a:rPr lang="hu-HU" dirty="0">
+                <a:solidFill>
+                  <a:schemeClr val="tx1"/>
+                </a:solidFill>
+                <a:latin typeface="Times New Roman" panose="02020603050405020304" pitchFamily="18" charset="0"/>
+                <a:cs typeface="Times New Roman" panose="02020603050405020304" pitchFamily="18" charset="0"/>
+              </a:rPr>
+              <a:t>Vue.js 3</a:t>
+            </a:r>
+          </a:p>
+          <a:p>
+            <a:r>
+              <a:rPr lang="hu-HU" dirty="0" err="1">
+                <a:solidFill>
+                  <a:schemeClr val="tx1"/>
+                </a:solidFill>
+                <a:latin typeface="Times New Roman" panose="02020603050405020304" pitchFamily="18" charset="0"/>
+                <a:cs typeface="Times New Roman" panose="02020603050405020304" pitchFamily="18" charset="0"/>
+              </a:rPr>
+              <a:t>Pinia</a:t>
+            </a:r>
+            <a:r>
+              <a:rPr lang="hu-HU" dirty="0">
+                <a:solidFill>
+                  <a:schemeClr val="tx1"/>
+                </a:solidFill>
+                <a:latin typeface="Times New Roman" panose="02020603050405020304" pitchFamily="18" charset="0"/>
+                <a:cs typeface="Times New Roman" panose="02020603050405020304" pitchFamily="18" charset="0"/>
+              </a:rPr>
+              <a:t>, </a:t>
+            </a:r>
+            <a:r>
+              <a:rPr lang="hu-HU" dirty="0" err="1">
+                <a:solidFill>
+                  <a:schemeClr val="tx1"/>
+                </a:solidFill>
+                <a:latin typeface="Times New Roman" panose="02020603050405020304" pitchFamily="18" charset="0"/>
+                <a:cs typeface="Times New Roman" panose="02020603050405020304" pitchFamily="18" charset="0"/>
+              </a:rPr>
+              <a:t>Axios</a:t>
+            </a:r>
             <a:endParaRPr lang="hu-HU" dirty="0">
               <a:solidFill>
                 <a:schemeClr val="tx1"/>
@@ -5765,8 +6121,170 @@
               <a:cs typeface="Times New Roman" panose="02020603050405020304" pitchFamily="18" charset="0"/>
             </a:endParaRPr>
           </a:p>
-        </p:txBody>
-      </p:sp>
+          <a:p>
+            <a:r>
+              <a:rPr lang="hu-HU" dirty="0">
+                <a:solidFill>
+                  <a:schemeClr val="tx1"/>
+                </a:solidFill>
+                <a:latin typeface="Times New Roman" panose="02020603050405020304" pitchFamily="18" charset="0"/>
+                <a:cs typeface="Times New Roman" panose="02020603050405020304" pitchFamily="18" charset="0"/>
+              </a:rPr>
+              <a:t>Bővítmények – </a:t>
+            </a:r>
+            <a:r>
+              <a:rPr lang="hu-HU" dirty="0" err="1">
+                <a:solidFill>
+                  <a:schemeClr val="tx1"/>
+                </a:solidFill>
+                <a:latin typeface="Times New Roman" panose="02020603050405020304" pitchFamily="18" charset="0"/>
+                <a:cs typeface="Times New Roman" panose="02020603050405020304" pitchFamily="18" charset="0"/>
+              </a:rPr>
+              <a:t>PrimeVue</a:t>
+            </a:r>
+            <a:r>
+              <a:rPr lang="hu-HU" dirty="0">
+                <a:solidFill>
+                  <a:schemeClr val="tx1"/>
+                </a:solidFill>
+                <a:latin typeface="Times New Roman" panose="02020603050405020304" pitchFamily="18" charset="0"/>
+                <a:cs typeface="Times New Roman" panose="02020603050405020304" pitchFamily="18" charset="0"/>
+              </a:rPr>
+              <a:t>, </a:t>
+            </a:r>
+            <a:r>
+              <a:rPr lang="hu-HU" dirty="0" err="1">
+                <a:solidFill>
+                  <a:schemeClr val="tx1"/>
+                </a:solidFill>
+                <a:latin typeface="Times New Roman" panose="02020603050405020304" pitchFamily="18" charset="0"/>
+                <a:cs typeface="Times New Roman" panose="02020603050405020304" pitchFamily="18" charset="0"/>
+              </a:rPr>
+              <a:t>FontAwesome</a:t>
+            </a:r>
+            <a:endParaRPr lang="hu-HU" dirty="0">
+              <a:solidFill>
+                <a:schemeClr val="tx1"/>
+              </a:solidFill>
+              <a:latin typeface="Times New Roman" panose="02020603050405020304" pitchFamily="18" charset="0"/>
+              <a:cs typeface="Times New Roman" panose="02020603050405020304" pitchFamily="18" charset="0"/>
+            </a:endParaRPr>
+          </a:p>
+        </p:txBody>
+      </p:sp>
+      <p:pic>
+        <p:nvPicPr>
+          <p:cNvPr id="5" name="Kép 4">
+            <a:extLst>
+              <a:ext uri="{FF2B5EF4-FFF2-40B4-BE49-F238E27FC236}">
+                <a16:creationId xmlns:a16="http://schemas.microsoft.com/office/drawing/2014/main" id="{6DCEB919-1031-473A-B48E-4F0E5E0BB266}"/>
+              </a:ext>
+            </a:extLst>
+          </p:cNvPr>
+          <p:cNvPicPr>
+            <a:picLocks noChangeAspect="1"/>
+          </p:cNvPicPr>
+          <p:nvPr/>
+        </p:nvPicPr>
+        <p:blipFill>
+          <a:blip r:embed="rId2"/>
+          <a:stretch>
+            <a:fillRect/>
+          </a:stretch>
+        </p:blipFill>
+        <p:spPr>
+          <a:xfrm>
+            <a:off x="9467148" y="397772"/>
+            <a:ext cx="2486372" cy="2286319"/>
+          </a:xfrm>
+          <a:prstGeom prst="rect">
+            <a:avLst/>
+          </a:prstGeom>
+        </p:spPr>
+      </p:pic>
+      <p:pic>
+        <p:nvPicPr>
+          <p:cNvPr id="7" name="Kép 6">
+            <a:extLst>
+              <a:ext uri="{FF2B5EF4-FFF2-40B4-BE49-F238E27FC236}">
+                <a16:creationId xmlns:a16="http://schemas.microsoft.com/office/drawing/2014/main" id="{F9846C76-EA7B-41BA-A6FE-26DD3E5DD4F3}"/>
+              </a:ext>
+            </a:extLst>
+          </p:cNvPr>
+          <p:cNvPicPr>
+            <a:picLocks noChangeAspect="1"/>
+          </p:cNvPicPr>
+          <p:nvPr/>
+        </p:nvPicPr>
+        <p:blipFill>
+          <a:blip r:embed="rId3"/>
+          <a:stretch>
+            <a:fillRect/>
+          </a:stretch>
+        </p:blipFill>
+        <p:spPr>
+          <a:xfrm>
+            <a:off x="8176330" y="3037572"/>
+            <a:ext cx="2534004" cy="3134162"/>
+          </a:xfrm>
+          <a:prstGeom prst="rect">
+            <a:avLst/>
+          </a:prstGeom>
+        </p:spPr>
+      </p:pic>
+      <p:pic>
+        <p:nvPicPr>
+          <p:cNvPr id="9" name="Kép 8">
+            <a:extLst>
+              <a:ext uri="{FF2B5EF4-FFF2-40B4-BE49-F238E27FC236}">
+                <a16:creationId xmlns:a16="http://schemas.microsoft.com/office/drawing/2014/main" id="{CCF3B571-DFA6-4E7E-998A-59BCADD48202}"/>
+              </a:ext>
+            </a:extLst>
+          </p:cNvPr>
+          <p:cNvPicPr>
+            <a:picLocks noChangeAspect="1"/>
+          </p:cNvPicPr>
+          <p:nvPr/>
+        </p:nvPicPr>
+        <p:blipFill rotWithShape="1">
+          <a:blip r:embed="rId4">
+            <a:extLst>
+              <a:ext uri="{BEBA8EAE-BF5A-486C-A8C5-ECC9F3942E4B}">
+                <a14:imgProps xmlns:a14="http://schemas.microsoft.com/office/drawing/2010/main">
+                  <a14:imgLayer r:embed="rId5">
+                    <a14:imgEffect>
+                      <a14:backgroundRemoval t="33667" b="65000" l="5667" r="93500">
+                        <a14:foregroundMark x1="8500" y1="37000" x2="8500" y2="37000"/>
+                        <a14:foregroundMark x1="5833" y1="35000" x2="5833" y2="35000"/>
+                        <a14:foregroundMark x1="48667" y1="44333" x2="48667" y2="44333"/>
+                        <a14:foregroundMark x1="60000" y1="49000" x2="60000" y2="49000"/>
+                        <a14:foregroundMark x1="77167" y1="50333" x2="77167" y2="50333"/>
+                        <a14:foregroundMark x1="80667" y1="56167" x2="80667" y2="56167"/>
+                        <a14:foregroundMark x1="84667" y1="40500" x2="84667" y2="40500"/>
+                        <a14:foregroundMark x1="84667" y1="50333" x2="84667" y2="50333"/>
+                        <a14:foregroundMark x1="89667" y1="47000" x2="89667" y2="47000"/>
+                        <a14:foregroundMark x1="93500" y1="46500" x2="93500" y2="46500"/>
+                        <a14:foregroundMark x1="23500" y1="65000" x2="23500" y2="65000"/>
+                      </a14:backgroundRemoval>
+                    </a14:imgEffect>
+                  </a14:imgLayer>
+                </a14:imgProps>
+              </a:ext>
+            </a:extLst>
+          </a:blip>
+          <a:srcRect t="30000" b="31185"/>
+          <a:stretch/>
+        </p:blipFill>
+        <p:spPr>
+          <a:xfrm>
+            <a:off x="6096000" y="5475034"/>
+            <a:ext cx="1794933" cy="696700"/>
+          </a:xfrm>
+          <a:prstGeom prst="rect">
+            <a:avLst/>
+          </a:prstGeom>
+        </p:spPr>
+      </p:pic>
     </p:spTree>
     <p:extLst>
       <p:ext uri="{BB962C8B-B14F-4D97-AF65-F5344CB8AC3E}">
@@ -5994,6 +6512,35 @@
           </a:p>
         </p:txBody>
       </p:sp>
+      <p:pic>
+        <p:nvPicPr>
+          <p:cNvPr id="5" name="Kép 4">
+            <a:extLst>
+              <a:ext uri="{FF2B5EF4-FFF2-40B4-BE49-F238E27FC236}">
+                <a16:creationId xmlns:a16="http://schemas.microsoft.com/office/drawing/2014/main" id="{A3BBF849-1D16-4AEC-B1BA-DAA24D870522}"/>
+              </a:ext>
+            </a:extLst>
+          </p:cNvPr>
+          <p:cNvPicPr>
+            <a:picLocks noChangeAspect="1"/>
+          </p:cNvPicPr>
+          <p:nvPr/>
+        </p:nvPicPr>
+        <p:blipFill rotWithShape="1">
+          <a:blip r:embed="rId2"/>
+          <a:srcRect l="1194"/>
+          <a:stretch/>
+        </p:blipFill>
+        <p:spPr>
+          <a:xfrm>
+            <a:off x="8593667" y="685800"/>
+            <a:ext cx="2776733" cy="5229955"/>
+          </a:xfrm>
+          <a:prstGeom prst="rect">
+            <a:avLst/>
+          </a:prstGeom>
+        </p:spPr>
+      </p:pic>
     </p:spTree>
     <p:extLst>
       <p:ext uri="{BB962C8B-B14F-4D97-AF65-F5344CB8AC3E}">

--- a/Fájlok/Bemutató.pptx
+++ b/Fájlok/Bemutató.pptx
@@ -294,7 +294,7 @@
           <a:p>
             <a:fld id="{BD2B674F-1946-412B-A744-B9E1115EC83C}" type="datetimeFigureOut">
               <a:rPr lang="en-GB" smtClean="0"/>
-              <a:t>04/03/2026</a:t>
+              <a:t>05/03/2026</a:t>
             </a:fld>
             <a:endParaRPr lang="en-GB"/>
           </a:p>
@@ -624,7 +624,7 @@
           <a:p>
             <a:fld id="{BD2B674F-1946-412B-A744-B9E1115EC83C}" type="datetimeFigureOut">
               <a:rPr lang="en-GB" smtClean="0"/>
-              <a:t>04/03/2026</a:t>
+              <a:t>05/03/2026</a:t>
             </a:fld>
             <a:endParaRPr lang="en-GB"/>
           </a:p>
@@ -804,7 +804,7 @@
           <a:p>
             <a:fld id="{BD2B674F-1946-412B-A744-B9E1115EC83C}" type="datetimeFigureOut">
               <a:rPr lang="en-GB" smtClean="0"/>
-              <a:t>04/03/2026</a:t>
+              <a:t>05/03/2026</a:t>
             </a:fld>
             <a:endParaRPr lang="en-GB"/>
           </a:p>
@@ -974,7 +974,7 @@
           <a:p>
             <a:fld id="{BD2B674F-1946-412B-A744-B9E1115EC83C}" type="datetimeFigureOut">
               <a:rPr lang="en-GB" smtClean="0"/>
-              <a:t>04/03/2026</a:t>
+              <a:t>05/03/2026</a:t>
             </a:fld>
             <a:endParaRPr lang="en-GB"/>
           </a:p>
@@ -1251,7 +1251,7 @@
           <a:p>
             <a:fld id="{BD2B674F-1946-412B-A744-B9E1115EC83C}" type="datetimeFigureOut">
               <a:rPr lang="en-GB" smtClean="0"/>
-              <a:t>04/03/2026</a:t>
+              <a:t>05/03/2026</a:t>
             </a:fld>
             <a:endParaRPr lang="en-GB"/>
           </a:p>
@@ -1645,7 +1645,7 @@
           <a:p>
             <a:fld id="{BD2B674F-1946-412B-A744-B9E1115EC83C}" type="datetimeFigureOut">
               <a:rPr lang="en-GB" smtClean="0"/>
-              <a:t>04/03/2026</a:t>
+              <a:t>05/03/2026</a:t>
             </a:fld>
             <a:endParaRPr lang="en-GB"/>
           </a:p>
@@ -2122,7 +2122,7 @@
           <a:p>
             <a:fld id="{BD2B674F-1946-412B-A744-B9E1115EC83C}" type="datetimeFigureOut">
               <a:rPr lang="en-GB" smtClean="0"/>
-              <a:t>04/03/2026</a:t>
+              <a:t>05/03/2026</a:t>
             </a:fld>
             <a:endParaRPr lang="en-GB"/>
           </a:p>
@@ -2240,7 +2240,7 @@
           <a:p>
             <a:fld id="{BD2B674F-1946-412B-A744-B9E1115EC83C}" type="datetimeFigureOut">
               <a:rPr lang="en-GB" smtClean="0"/>
-              <a:t>04/03/2026</a:t>
+              <a:t>05/03/2026</a:t>
             </a:fld>
             <a:endParaRPr lang="en-GB"/>
           </a:p>
@@ -2335,7 +2335,7 @@
           <a:p>
             <a:fld id="{BD2B674F-1946-412B-A744-B9E1115EC83C}" type="datetimeFigureOut">
               <a:rPr lang="en-GB" smtClean="0"/>
-              <a:t>04/03/2026</a:t>
+              <a:t>05/03/2026</a:t>
             </a:fld>
             <a:endParaRPr lang="en-GB"/>
           </a:p>
@@ -2681,7 +2681,7 @@
           <a:p>
             <a:fld id="{BD2B674F-1946-412B-A744-B9E1115EC83C}" type="datetimeFigureOut">
               <a:rPr lang="en-GB" smtClean="0"/>
-              <a:t>04/03/2026</a:t>
+              <a:t>05/03/2026</a:t>
             </a:fld>
             <a:endParaRPr lang="en-GB"/>
           </a:p>
@@ -3069,7 +3069,7 @@
           <a:p>
             <a:fld id="{BD2B674F-1946-412B-A744-B9E1115EC83C}" type="datetimeFigureOut">
               <a:rPr lang="en-GB" smtClean="0"/>
-              <a:t>04/03/2026</a:t>
+              <a:t>05/03/2026</a:t>
             </a:fld>
             <a:endParaRPr lang="en-GB"/>
           </a:p>
@@ -3347,7 +3347,7 @@
           <a:p>
             <a:fld id="{BD2B674F-1946-412B-A744-B9E1115EC83C}" type="datetimeFigureOut">
               <a:rPr lang="en-GB" smtClean="0"/>
-              <a:t>04/03/2026</a:t>
+              <a:t>05/03/2026</a:t>
             </a:fld>
             <a:endParaRPr lang="en-GB"/>
           </a:p>
@@ -4045,12 +4045,12 @@
   <p:clrMapOvr>
     <a:masterClrMapping/>
   </p:clrMapOvr>
-  <mc:AlternateContent xmlns:mc="http://schemas.openxmlformats.org/markup-compatibility/2006" xmlns:p14="http://schemas.microsoft.com/office/powerpoint/2010/main">
-    <mc:Choice Requires="p14">
-      <p:transition spd="slow" p14:dur="2000" advClick="0"/>
+  <mc:AlternateContent xmlns:mc="http://schemas.openxmlformats.org/markup-compatibility/2006">
+    <mc:Choice xmlns:p14="http://schemas.microsoft.com/office/powerpoint/2010/main" Requires="p14">
+      <p:transition p14:dur="0" advClick="0"/>
     </mc:Choice>
-    <mc:Fallback xmlns="">
-      <p:transition spd="slow" advClick="0"/>
+    <mc:Fallback>
+      <p:transition advClick="0"/>
     </mc:Fallback>
   </mc:AlternateContent>
 </p:sld>
@@ -4301,6 +4301,678 @@
   <p:clrMapOvr>
     <a:masterClrMapping/>
   </p:clrMapOvr>
+  <p:transition spd="slow">
+    <p:push dir="u"/>
+  </p:transition>
+  <p:timing>
+    <p:tnLst>
+      <p:par>
+        <p:cTn id="1" dur="indefinite" restart="never" nodeType="tmRoot">
+          <p:childTnLst>
+            <p:seq concurrent="1" nextAc="seek">
+              <p:cTn id="2" dur="indefinite" nodeType="mainSeq">
+                <p:childTnLst>
+                  <p:par>
+                    <p:cTn id="3" fill="hold">
+                      <p:stCondLst>
+                        <p:cond delay="indefinite"/>
+                        <p:cond evt="onBegin" delay="0">
+                          <p:tn val="2"/>
+                        </p:cond>
+                      </p:stCondLst>
+                      <p:childTnLst>
+                        <p:par>
+                          <p:cTn id="4" fill="hold">
+                            <p:stCondLst>
+                              <p:cond delay="0"/>
+                            </p:stCondLst>
+                            <p:childTnLst>
+                              <p:par>
+                                <p:cTn id="5" presetID="10" presetClass="entr" presetSubtype="0" fill="hold" grpId="0" nodeType="afterEffect">
+                                  <p:stCondLst>
+                                    <p:cond delay="0"/>
+                                  </p:stCondLst>
+                                  <p:childTnLst>
+                                    <p:set>
+                                      <p:cBhvr>
+                                        <p:cTn id="6" dur="1" fill="hold">
+                                          <p:stCondLst>
+                                            <p:cond delay="0"/>
+                                          </p:stCondLst>
+                                        </p:cTn>
+                                        <p:tgtEl>
+                                          <p:spTgt spid="2"/>
+                                        </p:tgtEl>
+                                        <p:attrNameLst>
+                                          <p:attrName>style.visibility</p:attrName>
+                                        </p:attrNameLst>
+                                      </p:cBhvr>
+                                      <p:to>
+                                        <p:strVal val="visible"/>
+                                      </p:to>
+                                    </p:set>
+                                    <p:animEffect transition="in" filter="fade">
+                                      <p:cBhvr>
+                                        <p:cTn id="7" dur="500"/>
+                                        <p:tgtEl>
+                                          <p:spTgt spid="2"/>
+                                        </p:tgtEl>
+                                      </p:cBhvr>
+                                    </p:animEffect>
+                                  </p:childTnLst>
+                                </p:cTn>
+                              </p:par>
+                            </p:childTnLst>
+                          </p:cTn>
+                        </p:par>
+                        <p:par>
+                          <p:cTn id="8" fill="hold">
+                            <p:stCondLst>
+                              <p:cond delay="500"/>
+                            </p:stCondLst>
+                            <p:childTnLst>
+                              <p:par>
+                                <p:cTn id="9" presetID="2" presetClass="entr" presetSubtype="2" fill="hold" nodeType="afterEffect">
+                                  <p:stCondLst>
+                                    <p:cond delay="200"/>
+                                  </p:stCondLst>
+                                  <p:childTnLst>
+                                    <p:set>
+                                      <p:cBhvr>
+                                        <p:cTn id="10" dur="1" fill="hold">
+                                          <p:stCondLst>
+                                            <p:cond delay="0"/>
+                                          </p:stCondLst>
+                                        </p:cTn>
+                                        <p:tgtEl>
+                                          <p:spTgt spid="5"/>
+                                        </p:tgtEl>
+                                        <p:attrNameLst>
+                                          <p:attrName>style.visibility</p:attrName>
+                                        </p:attrNameLst>
+                                      </p:cBhvr>
+                                      <p:to>
+                                        <p:strVal val="visible"/>
+                                      </p:to>
+                                    </p:set>
+                                    <p:anim calcmode="lin" valueType="num">
+                                      <p:cBhvr additive="base">
+                                        <p:cTn id="11" dur="500" fill="hold"/>
+                                        <p:tgtEl>
+                                          <p:spTgt spid="5"/>
+                                        </p:tgtEl>
+                                        <p:attrNameLst>
+                                          <p:attrName>ppt_x</p:attrName>
+                                        </p:attrNameLst>
+                                      </p:cBhvr>
+                                      <p:tavLst>
+                                        <p:tav tm="0">
+                                          <p:val>
+                                            <p:strVal val="1+#ppt_w/2"/>
+                                          </p:val>
+                                        </p:tav>
+                                        <p:tav tm="100000">
+                                          <p:val>
+                                            <p:strVal val="#ppt_x"/>
+                                          </p:val>
+                                        </p:tav>
+                                      </p:tavLst>
+                                    </p:anim>
+                                    <p:anim calcmode="lin" valueType="num">
+                                      <p:cBhvr additive="base">
+                                        <p:cTn id="12" dur="500" fill="hold"/>
+                                        <p:tgtEl>
+                                          <p:spTgt spid="5"/>
+                                        </p:tgtEl>
+                                        <p:attrNameLst>
+                                          <p:attrName>ppt_y</p:attrName>
+                                        </p:attrNameLst>
+                                      </p:cBhvr>
+                                      <p:tavLst>
+                                        <p:tav tm="0">
+                                          <p:val>
+                                            <p:strVal val="#ppt_y"/>
+                                          </p:val>
+                                        </p:tav>
+                                        <p:tav tm="100000">
+                                          <p:val>
+                                            <p:strVal val="#ppt_y"/>
+                                          </p:val>
+                                        </p:tav>
+                                      </p:tavLst>
+                                    </p:anim>
+                                  </p:childTnLst>
+                                </p:cTn>
+                              </p:par>
+                              <p:par>
+                                <p:cTn id="13" presetID="2" presetClass="entr" presetSubtype="4" fill="hold" nodeType="withEffect">
+                                  <p:stCondLst>
+                                    <p:cond delay="200"/>
+                                  </p:stCondLst>
+                                  <p:childTnLst>
+                                    <p:set>
+                                      <p:cBhvr>
+                                        <p:cTn id="14" dur="1" fill="hold">
+                                          <p:stCondLst>
+                                            <p:cond delay="0"/>
+                                          </p:stCondLst>
+                                        </p:cTn>
+                                        <p:tgtEl>
+                                          <p:spTgt spid="9"/>
+                                        </p:tgtEl>
+                                        <p:attrNameLst>
+                                          <p:attrName>style.visibility</p:attrName>
+                                        </p:attrNameLst>
+                                      </p:cBhvr>
+                                      <p:to>
+                                        <p:strVal val="visible"/>
+                                      </p:to>
+                                    </p:set>
+                                    <p:anim calcmode="lin" valueType="num">
+                                      <p:cBhvr additive="base">
+                                        <p:cTn id="15" dur="500" fill="hold"/>
+                                        <p:tgtEl>
+                                          <p:spTgt spid="9"/>
+                                        </p:tgtEl>
+                                        <p:attrNameLst>
+                                          <p:attrName>ppt_x</p:attrName>
+                                        </p:attrNameLst>
+                                      </p:cBhvr>
+                                      <p:tavLst>
+                                        <p:tav tm="0">
+                                          <p:val>
+                                            <p:strVal val="#ppt_x"/>
+                                          </p:val>
+                                        </p:tav>
+                                        <p:tav tm="100000">
+                                          <p:val>
+                                            <p:strVal val="#ppt_x"/>
+                                          </p:val>
+                                        </p:tav>
+                                      </p:tavLst>
+                                    </p:anim>
+                                    <p:anim calcmode="lin" valueType="num">
+                                      <p:cBhvr additive="base">
+                                        <p:cTn id="16" dur="500" fill="hold"/>
+                                        <p:tgtEl>
+                                          <p:spTgt spid="9"/>
+                                        </p:tgtEl>
+                                        <p:attrNameLst>
+                                          <p:attrName>ppt_y</p:attrName>
+                                        </p:attrNameLst>
+                                      </p:cBhvr>
+                                      <p:tavLst>
+                                        <p:tav tm="0">
+                                          <p:val>
+                                            <p:strVal val="1+#ppt_h/2"/>
+                                          </p:val>
+                                        </p:tav>
+                                        <p:tav tm="100000">
+                                          <p:val>
+                                            <p:strVal val="#ppt_y"/>
+                                          </p:val>
+                                        </p:tav>
+                                      </p:tavLst>
+                                    </p:anim>
+                                  </p:childTnLst>
+                                </p:cTn>
+                              </p:par>
+                            </p:childTnLst>
+                          </p:cTn>
+                        </p:par>
+                        <p:par>
+                          <p:cTn id="17" fill="hold">
+                            <p:stCondLst>
+                              <p:cond delay="1200"/>
+                            </p:stCondLst>
+                            <p:childTnLst>
+                              <p:par>
+                                <p:cTn id="18" presetID="42" presetClass="entr" presetSubtype="0" fill="hold" grpId="0" nodeType="afterEffect">
+                                  <p:stCondLst>
+                                    <p:cond delay="0"/>
+                                  </p:stCondLst>
+                                  <p:childTnLst>
+                                    <p:set>
+                                      <p:cBhvr>
+                                        <p:cTn id="19" dur="1" fill="hold">
+                                          <p:stCondLst>
+                                            <p:cond delay="0"/>
+                                          </p:stCondLst>
+                                        </p:cTn>
+                                        <p:tgtEl>
+                                          <p:spTgt spid="3">
+                                            <p:txEl>
+                                              <p:pRg st="0" end="0"/>
+                                            </p:txEl>
+                                          </p:spTgt>
+                                        </p:tgtEl>
+                                        <p:attrNameLst>
+                                          <p:attrName>style.visibility</p:attrName>
+                                        </p:attrNameLst>
+                                      </p:cBhvr>
+                                      <p:to>
+                                        <p:strVal val="visible"/>
+                                      </p:to>
+                                    </p:set>
+                                    <p:animEffect transition="in" filter="fade">
+                                      <p:cBhvr>
+                                        <p:cTn id="20" dur="500"/>
+                                        <p:tgtEl>
+                                          <p:spTgt spid="3">
+                                            <p:txEl>
+                                              <p:pRg st="0" end="0"/>
+                                            </p:txEl>
+                                          </p:spTgt>
+                                        </p:tgtEl>
+                                      </p:cBhvr>
+                                    </p:animEffect>
+                                    <p:anim calcmode="lin" valueType="num">
+                                      <p:cBhvr>
+                                        <p:cTn id="21" dur="500" fill="hold"/>
+                                        <p:tgtEl>
+                                          <p:spTgt spid="3">
+                                            <p:txEl>
+                                              <p:pRg st="0" end="0"/>
+                                            </p:txEl>
+                                          </p:spTgt>
+                                        </p:tgtEl>
+                                        <p:attrNameLst>
+                                          <p:attrName>ppt_x</p:attrName>
+                                        </p:attrNameLst>
+                                      </p:cBhvr>
+                                      <p:tavLst>
+                                        <p:tav tm="0">
+                                          <p:val>
+                                            <p:strVal val="#ppt_x"/>
+                                          </p:val>
+                                        </p:tav>
+                                        <p:tav tm="100000">
+                                          <p:val>
+                                            <p:strVal val="#ppt_x"/>
+                                          </p:val>
+                                        </p:tav>
+                                      </p:tavLst>
+                                    </p:anim>
+                                    <p:anim calcmode="lin" valueType="num">
+                                      <p:cBhvr>
+                                        <p:cTn id="22" dur="500" fill="hold"/>
+                                        <p:tgtEl>
+                                          <p:spTgt spid="3">
+                                            <p:txEl>
+                                              <p:pRg st="0" end="0"/>
+                                            </p:txEl>
+                                          </p:spTgt>
+                                        </p:tgtEl>
+                                        <p:attrNameLst>
+                                          <p:attrName>ppt_y</p:attrName>
+                                        </p:attrNameLst>
+                                      </p:cBhvr>
+                                      <p:tavLst>
+                                        <p:tav tm="0">
+                                          <p:val>
+                                            <p:strVal val="#ppt_y+.1"/>
+                                          </p:val>
+                                        </p:tav>
+                                        <p:tav tm="100000">
+                                          <p:val>
+                                            <p:strVal val="#ppt_y"/>
+                                          </p:val>
+                                        </p:tav>
+                                      </p:tavLst>
+                                    </p:anim>
+                                  </p:childTnLst>
+                                </p:cTn>
+                              </p:par>
+                            </p:childTnLst>
+                          </p:cTn>
+                        </p:par>
+                        <p:par>
+                          <p:cTn id="23" fill="hold">
+                            <p:stCondLst>
+                              <p:cond delay="1700"/>
+                            </p:stCondLst>
+                            <p:childTnLst>
+                              <p:par>
+                                <p:cTn id="24" presetID="42" presetClass="entr" presetSubtype="0" fill="hold" grpId="0" nodeType="afterEffect">
+                                  <p:stCondLst>
+                                    <p:cond delay="0"/>
+                                  </p:stCondLst>
+                                  <p:childTnLst>
+                                    <p:set>
+                                      <p:cBhvr>
+                                        <p:cTn id="25" dur="1" fill="hold">
+                                          <p:stCondLst>
+                                            <p:cond delay="0"/>
+                                          </p:stCondLst>
+                                        </p:cTn>
+                                        <p:tgtEl>
+                                          <p:spTgt spid="3">
+                                            <p:txEl>
+                                              <p:pRg st="1" end="1"/>
+                                            </p:txEl>
+                                          </p:spTgt>
+                                        </p:tgtEl>
+                                        <p:attrNameLst>
+                                          <p:attrName>style.visibility</p:attrName>
+                                        </p:attrNameLst>
+                                      </p:cBhvr>
+                                      <p:to>
+                                        <p:strVal val="visible"/>
+                                      </p:to>
+                                    </p:set>
+                                    <p:animEffect transition="in" filter="fade">
+                                      <p:cBhvr>
+                                        <p:cTn id="26" dur="500"/>
+                                        <p:tgtEl>
+                                          <p:spTgt spid="3">
+                                            <p:txEl>
+                                              <p:pRg st="1" end="1"/>
+                                            </p:txEl>
+                                          </p:spTgt>
+                                        </p:tgtEl>
+                                      </p:cBhvr>
+                                    </p:animEffect>
+                                    <p:anim calcmode="lin" valueType="num">
+                                      <p:cBhvr>
+                                        <p:cTn id="27" dur="500" fill="hold"/>
+                                        <p:tgtEl>
+                                          <p:spTgt spid="3">
+                                            <p:txEl>
+                                              <p:pRg st="1" end="1"/>
+                                            </p:txEl>
+                                          </p:spTgt>
+                                        </p:tgtEl>
+                                        <p:attrNameLst>
+                                          <p:attrName>ppt_x</p:attrName>
+                                        </p:attrNameLst>
+                                      </p:cBhvr>
+                                      <p:tavLst>
+                                        <p:tav tm="0">
+                                          <p:val>
+                                            <p:strVal val="#ppt_x"/>
+                                          </p:val>
+                                        </p:tav>
+                                        <p:tav tm="100000">
+                                          <p:val>
+                                            <p:strVal val="#ppt_x"/>
+                                          </p:val>
+                                        </p:tav>
+                                      </p:tavLst>
+                                    </p:anim>
+                                    <p:anim calcmode="lin" valueType="num">
+                                      <p:cBhvr>
+                                        <p:cTn id="28" dur="500" fill="hold"/>
+                                        <p:tgtEl>
+                                          <p:spTgt spid="3">
+                                            <p:txEl>
+                                              <p:pRg st="1" end="1"/>
+                                            </p:txEl>
+                                          </p:spTgt>
+                                        </p:tgtEl>
+                                        <p:attrNameLst>
+                                          <p:attrName>ppt_y</p:attrName>
+                                        </p:attrNameLst>
+                                      </p:cBhvr>
+                                      <p:tavLst>
+                                        <p:tav tm="0">
+                                          <p:val>
+                                            <p:strVal val="#ppt_y+.1"/>
+                                          </p:val>
+                                        </p:tav>
+                                        <p:tav tm="100000">
+                                          <p:val>
+                                            <p:strVal val="#ppt_y"/>
+                                          </p:val>
+                                        </p:tav>
+                                      </p:tavLst>
+                                    </p:anim>
+                                  </p:childTnLst>
+                                </p:cTn>
+                              </p:par>
+                            </p:childTnLst>
+                          </p:cTn>
+                        </p:par>
+                        <p:par>
+                          <p:cTn id="29" fill="hold">
+                            <p:stCondLst>
+                              <p:cond delay="2200"/>
+                            </p:stCondLst>
+                            <p:childTnLst>
+                              <p:par>
+                                <p:cTn id="30" presetID="42" presetClass="entr" presetSubtype="0" fill="hold" grpId="0" nodeType="afterEffect">
+                                  <p:stCondLst>
+                                    <p:cond delay="0"/>
+                                  </p:stCondLst>
+                                  <p:childTnLst>
+                                    <p:set>
+                                      <p:cBhvr>
+                                        <p:cTn id="31" dur="1" fill="hold">
+                                          <p:stCondLst>
+                                            <p:cond delay="0"/>
+                                          </p:stCondLst>
+                                        </p:cTn>
+                                        <p:tgtEl>
+                                          <p:spTgt spid="3">
+                                            <p:txEl>
+                                              <p:pRg st="2" end="2"/>
+                                            </p:txEl>
+                                          </p:spTgt>
+                                        </p:tgtEl>
+                                        <p:attrNameLst>
+                                          <p:attrName>style.visibility</p:attrName>
+                                        </p:attrNameLst>
+                                      </p:cBhvr>
+                                      <p:to>
+                                        <p:strVal val="visible"/>
+                                      </p:to>
+                                    </p:set>
+                                    <p:animEffect transition="in" filter="fade">
+                                      <p:cBhvr>
+                                        <p:cTn id="32" dur="500"/>
+                                        <p:tgtEl>
+                                          <p:spTgt spid="3">
+                                            <p:txEl>
+                                              <p:pRg st="2" end="2"/>
+                                            </p:txEl>
+                                          </p:spTgt>
+                                        </p:tgtEl>
+                                      </p:cBhvr>
+                                    </p:animEffect>
+                                    <p:anim calcmode="lin" valueType="num">
+                                      <p:cBhvr>
+                                        <p:cTn id="33" dur="500" fill="hold"/>
+                                        <p:tgtEl>
+                                          <p:spTgt spid="3">
+                                            <p:txEl>
+                                              <p:pRg st="2" end="2"/>
+                                            </p:txEl>
+                                          </p:spTgt>
+                                        </p:tgtEl>
+                                        <p:attrNameLst>
+                                          <p:attrName>ppt_x</p:attrName>
+                                        </p:attrNameLst>
+                                      </p:cBhvr>
+                                      <p:tavLst>
+                                        <p:tav tm="0">
+                                          <p:val>
+                                            <p:strVal val="#ppt_x"/>
+                                          </p:val>
+                                        </p:tav>
+                                        <p:tav tm="100000">
+                                          <p:val>
+                                            <p:strVal val="#ppt_x"/>
+                                          </p:val>
+                                        </p:tav>
+                                      </p:tavLst>
+                                    </p:anim>
+                                    <p:anim calcmode="lin" valueType="num">
+                                      <p:cBhvr>
+                                        <p:cTn id="34" dur="500" fill="hold"/>
+                                        <p:tgtEl>
+                                          <p:spTgt spid="3">
+                                            <p:txEl>
+                                              <p:pRg st="2" end="2"/>
+                                            </p:txEl>
+                                          </p:spTgt>
+                                        </p:tgtEl>
+                                        <p:attrNameLst>
+                                          <p:attrName>ppt_y</p:attrName>
+                                        </p:attrNameLst>
+                                      </p:cBhvr>
+                                      <p:tavLst>
+                                        <p:tav tm="0">
+                                          <p:val>
+                                            <p:strVal val="#ppt_y+.1"/>
+                                          </p:val>
+                                        </p:tav>
+                                        <p:tav tm="100000">
+                                          <p:val>
+                                            <p:strVal val="#ppt_y"/>
+                                          </p:val>
+                                        </p:tav>
+                                      </p:tavLst>
+                                    </p:anim>
+                                  </p:childTnLst>
+                                </p:cTn>
+                              </p:par>
+                            </p:childTnLst>
+                          </p:cTn>
+                        </p:par>
+                        <p:par>
+                          <p:cTn id="35" fill="hold">
+                            <p:stCondLst>
+                              <p:cond delay="2700"/>
+                            </p:stCondLst>
+                            <p:childTnLst>
+                              <p:par>
+                                <p:cTn id="36" presetID="42" presetClass="entr" presetSubtype="0" fill="hold" grpId="0" nodeType="afterEffect">
+                                  <p:stCondLst>
+                                    <p:cond delay="0"/>
+                                  </p:stCondLst>
+                                  <p:childTnLst>
+                                    <p:set>
+                                      <p:cBhvr>
+                                        <p:cTn id="37" dur="1" fill="hold">
+                                          <p:stCondLst>
+                                            <p:cond delay="0"/>
+                                          </p:stCondLst>
+                                        </p:cTn>
+                                        <p:tgtEl>
+                                          <p:spTgt spid="3">
+                                            <p:txEl>
+                                              <p:pRg st="3" end="3"/>
+                                            </p:txEl>
+                                          </p:spTgt>
+                                        </p:tgtEl>
+                                        <p:attrNameLst>
+                                          <p:attrName>style.visibility</p:attrName>
+                                        </p:attrNameLst>
+                                      </p:cBhvr>
+                                      <p:to>
+                                        <p:strVal val="visible"/>
+                                      </p:to>
+                                    </p:set>
+                                    <p:animEffect transition="in" filter="fade">
+                                      <p:cBhvr>
+                                        <p:cTn id="38" dur="500"/>
+                                        <p:tgtEl>
+                                          <p:spTgt spid="3">
+                                            <p:txEl>
+                                              <p:pRg st="3" end="3"/>
+                                            </p:txEl>
+                                          </p:spTgt>
+                                        </p:tgtEl>
+                                      </p:cBhvr>
+                                    </p:animEffect>
+                                    <p:anim calcmode="lin" valueType="num">
+                                      <p:cBhvr>
+                                        <p:cTn id="39" dur="500" fill="hold"/>
+                                        <p:tgtEl>
+                                          <p:spTgt spid="3">
+                                            <p:txEl>
+                                              <p:pRg st="3" end="3"/>
+                                            </p:txEl>
+                                          </p:spTgt>
+                                        </p:tgtEl>
+                                        <p:attrNameLst>
+                                          <p:attrName>ppt_x</p:attrName>
+                                        </p:attrNameLst>
+                                      </p:cBhvr>
+                                      <p:tavLst>
+                                        <p:tav tm="0">
+                                          <p:val>
+                                            <p:strVal val="#ppt_x"/>
+                                          </p:val>
+                                        </p:tav>
+                                        <p:tav tm="100000">
+                                          <p:val>
+                                            <p:strVal val="#ppt_x"/>
+                                          </p:val>
+                                        </p:tav>
+                                      </p:tavLst>
+                                    </p:anim>
+                                    <p:anim calcmode="lin" valueType="num">
+                                      <p:cBhvr>
+                                        <p:cTn id="40" dur="500" fill="hold"/>
+                                        <p:tgtEl>
+                                          <p:spTgt spid="3">
+                                            <p:txEl>
+                                              <p:pRg st="3" end="3"/>
+                                            </p:txEl>
+                                          </p:spTgt>
+                                        </p:tgtEl>
+                                        <p:attrNameLst>
+                                          <p:attrName>ppt_y</p:attrName>
+                                        </p:attrNameLst>
+                                      </p:cBhvr>
+                                      <p:tavLst>
+                                        <p:tav tm="0">
+                                          <p:val>
+                                            <p:strVal val="#ppt_y+.1"/>
+                                          </p:val>
+                                        </p:tav>
+                                        <p:tav tm="100000">
+                                          <p:val>
+                                            <p:strVal val="#ppt_y"/>
+                                          </p:val>
+                                        </p:tav>
+                                      </p:tavLst>
+                                    </p:anim>
+                                  </p:childTnLst>
+                                </p:cTn>
+                              </p:par>
+                            </p:childTnLst>
+                          </p:cTn>
+                        </p:par>
+                      </p:childTnLst>
+                    </p:cTn>
+                  </p:par>
+                </p:childTnLst>
+              </p:cTn>
+              <p:prevCondLst>
+                <p:cond evt="onPrev" delay="0">
+                  <p:tgtEl>
+                    <p:sldTgt/>
+                  </p:tgtEl>
+                </p:cond>
+              </p:prevCondLst>
+              <p:nextCondLst>
+                <p:cond evt="onNext" delay="0">
+                  <p:tgtEl>
+                    <p:sldTgt/>
+                  </p:tgtEl>
+                </p:cond>
+              </p:nextCondLst>
+            </p:seq>
+          </p:childTnLst>
+        </p:cTn>
+      </p:par>
+    </p:tnLst>
+    <p:bldLst>
+      <p:bldP spid="2" grpId="0"/>
+      <p:bldP spid="3" grpId="0" uiExpand="1" build="p"/>
+    </p:bldLst>
+  </p:timing>
 </p:sld>
 </file>
 
@@ -4811,6 +5483,188 @@
   <p:clrMapOvr>
     <a:masterClrMapping/>
   </p:clrMapOvr>
+  <p:transition spd="slow">
+    <p:push dir="u"/>
+  </p:transition>
+  <p:timing>
+    <p:tnLst>
+      <p:par>
+        <p:cTn id="1" dur="indefinite" restart="never" nodeType="tmRoot">
+          <p:childTnLst>
+            <p:seq concurrent="1" nextAc="seek">
+              <p:cTn id="2" dur="indefinite" nodeType="mainSeq">
+                <p:childTnLst>
+                  <p:par>
+                    <p:cTn id="3" fill="hold">
+                      <p:stCondLst>
+                        <p:cond delay="indefinite"/>
+                        <p:cond evt="onBegin" delay="0">
+                          <p:tn val="2"/>
+                        </p:cond>
+                      </p:stCondLst>
+                      <p:childTnLst>
+                        <p:par>
+                          <p:cTn id="4" fill="hold">
+                            <p:stCondLst>
+                              <p:cond delay="0"/>
+                            </p:stCondLst>
+                            <p:childTnLst>
+                              <p:par>
+                                <p:cTn id="5" presetID="10" presetClass="entr" presetSubtype="0" fill="hold" grpId="0" nodeType="afterEffect">
+                                  <p:stCondLst>
+                                    <p:cond delay="0"/>
+                                  </p:stCondLst>
+                                  <p:childTnLst>
+                                    <p:set>
+                                      <p:cBhvr>
+                                        <p:cTn id="6" dur="1" fill="hold">
+                                          <p:stCondLst>
+                                            <p:cond delay="0"/>
+                                          </p:stCondLst>
+                                        </p:cTn>
+                                        <p:tgtEl>
+                                          <p:spTgt spid="2"/>
+                                        </p:tgtEl>
+                                        <p:attrNameLst>
+                                          <p:attrName>style.visibility</p:attrName>
+                                        </p:attrNameLst>
+                                      </p:cBhvr>
+                                      <p:to>
+                                        <p:strVal val="visible"/>
+                                      </p:to>
+                                    </p:set>
+                                    <p:animEffect transition="in" filter="fade">
+                                      <p:cBhvr>
+                                        <p:cTn id="7" dur="500"/>
+                                        <p:tgtEl>
+                                          <p:spTgt spid="2"/>
+                                        </p:tgtEl>
+                                      </p:cBhvr>
+                                    </p:animEffect>
+                                  </p:childTnLst>
+                                </p:cTn>
+                              </p:par>
+                            </p:childTnLst>
+                          </p:cTn>
+                        </p:par>
+                        <p:par>
+                          <p:cTn id="8" fill="hold">
+                            <p:stCondLst>
+                              <p:cond delay="500"/>
+                            </p:stCondLst>
+                            <p:childTnLst>
+                              <p:par>
+                                <p:cTn id="9" presetID="42" presetClass="entr" presetSubtype="0" fill="hold" nodeType="afterEffect">
+                                  <p:stCondLst>
+                                    <p:cond delay="200"/>
+                                  </p:stCondLst>
+                                  <p:childTnLst>
+                                    <p:set>
+                                      <p:cBhvr>
+                                        <p:cTn id="10" dur="1" fill="hold">
+                                          <p:stCondLst>
+                                            <p:cond delay="0"/>
+                                          </p:stCondLst>
+                                        </p:cTn>
+                                        <p:tgtEl>
+                                          <p:spTgt spid="4"/>
+                                        </p:tgtEl>
+                                        <p:attrNameLst>
+                                          <p:attrName>style.visibility</p:attrName>
+                                        </p:attrNameLst>
+                                      </p:cBhvr>
+                                      <p:to>
+                                        <p:strVal val="visible"/>
+                                      </p:to>
+                                    </p:set>
+                                    <p:animEffect transition="in" filter="fade">
+                                      <p:cBhvr>
+                                        <p:cTn id="11" dur="500"/>
+                                        <p:tgtEl>
+                                          <p:spTgt spid="4"/>
+                                        </p:tgtEl>
+                                      </p:cBhvr>
+                                    </p:animEffect>
+                                    <p:anim calcmode="lin" valueType="num">
+                                      <p:cBhvr>
+                                        <p:cTn id="12" dur="500" fill="hold"/>
+                                        <p:tgtEl>
+                                          <p:spTgt spid="4"/>
+                                        </p:tgtEl>
+                                        <p:attrNameLst>
+                                          <p:attrName>ppt_x</p:attrName>
+                                        </p:attrNameLst>
+                                      </p:cBhvr>
+                                      <p:tavLst>
+                                        <p:tav tm="0">
+                                          <p:val>
+                                            <p:strVal val="#ppt_x"/>
+                                          </p:val>
+                                        </p:tav>
+                                        <p:tav tm="100000">
+                                          <p:val>
+                                            <p:strVal val="#ppt_x"/>
+                                          </p:val>
+                                        </p:tav>
+                                      </p:tavLst>
+                                    </p:anim>
+                                    <p:anim calcmode="lin" valueType="num">
+                                      <p:cBhvr>
+                                        <p:cTn id="13" dur="500" fill="hold"/>
+                                        <p:tgtEl>
+                                          <p:spTgt spid="4"/>
+                                        </p:tgtEl>
+                                        <p:attrNameLst>
+                                          <p:attrName>ppt_y</p:attrName>
+                                        </p:attrNameLst>
+                                      </p:cBhvr>
+                                      <p:tavLst>
+                                        <p:tav tm="0">
+                                          <p:val>
+                                            <p:strVal val="#ppt_y+.1"/>
+                                          </p:val>
+                                        </p:tav>
+                                        <p:tav tm="100000">
+                                          <p:val>
+                                            <p:strVal val="#ppt_y"/>
+                                          </p:val>
+                                        </p:tav>
+                                      </p:tavLst>
+                                    </p:anim>
+                                  </p:childTnLst>
+                                </p:cTn>
+                              </p:par>
+                            </p:childTnLst>
+                          </p:cTn>
+                        </p:par>
+                      </p:childTnLst>
+                    </p:cTn>
+                  </p:par>
+                </p:childTnLst>
+              </p:cTn>
+              <p:prevCondLst>
+                <p:cond evt="onPrev" delay="0">
+                  <p:tgtEl>
+                    <p:sldTgt/>
+                  </p:tgtEl>
+                </p:cond>
+              </p:prevCondLst>
+              <p:nextCondLst>
+                <p:cond evt="onNext" delay="0">
+                  <p:tgtEl>
+                    <p:sldTgt/>
+                  </p:tgtEl>
+                </p:cond>
+              </p:nextCondLst>
+            </p:seq>
+          </p:childTnLst>
+        </p:cTn>
+      </p:par>
+    </p:tnLst>
+    <p:bldLst>
+      <p:bldP spid="2" grpId="0"/>
+    </p:bldLst>
+  </p:timing>
 </p:sld>
 </file>
 
@@ -4928,6 +5782,205 @@
   <p:clrMapOvr>
     <a:masterClrMapping/>
   </p:clrMapOvr>
+  <p:transition spd="slow">
+    <p:push dir="u"/>
+  </p:transition>
+  <p:timing>
+    <p:tnLst>
+      <p:par>
+        <p:cTn id="1" dur="indefinite" restart="never" nodeType="tmRoot">
+          <p:childTnLst>
+            <p:seq concurrent="1" nextAc="seek">
+              <p:cTn id="2" dur="indefinite" nodeType="mainSeq">
+                <p:childTnLst>
+                  <p:par>
+                    <p:cTn id="3" fill="hold">
+                      <p:stCondLst>
+                        <p:cond delay="indefinite"/>
+                        <p:cond evt="onBegin" delay="0">
+                          <p:tn val="2"/>
+                        </p:cond>
+                      </p:stCondLst>
+                      <p:childTnLst>
+                        <p:par>
+                          <p:cTn id="4" fill="hold">
+                            <p:stCondLst>
+                              <p:cond delay="0"/>
+                            </p:stCondLst>
+                            <p:childTnLst>
+                              <p:par>
+                                <p:cTn id="5" presetID="10" presetClass="entr" presetSubtype="0" fill="hold" grpId="0" nodeType="afterEffect">
+                                  <p:stCondLst>
+                                    <p:cond delay="0"/>
+                                  </p:stCondLst>
+                                  <p:childTnLst>
+                                    <p:set>
+                                      <p:cBhvr>
+                                        <p:cTn id="6" dur="1" fill="hold">
+                                          <p:stCondLst>
+                                            <p:cond delay="0"/>
+                                          </p:stCondLst>
+                                        </p:cTn>
+                                        <p:tgtEl>
+                                          <p:spTgt spid="2"/>
+                                        </p:tgtEl>
+                                        <p:attrNameLst>
+                                          <p:attrName>style.visibility</p:attrName>
+                                        </p:attrNameLst>
+                                      </p:cBhvr>
+                                      <p:to>
+                                        <p:strVal val="visible"/>
+                                      </p:to>
+                                    </p:set>
+                                    <p:animEffect transition="in" filter="fade">
+                                      <p:cBhvr>
+                                        <p:cTn id="7" dur="500"/>
+                                        <p:tgtEl>
+                                          <p:spTgt spid="2"/>
+                                        </p:tgtEl>
+                                      </p:cBhvr>
+                                    </p:animEffect>
+                                  </p:childTnLst>
+                                </p:cTn>
+                              </p:par>
+                            </p:childTnLst>
+                          </p:cTn>
+                        </p:par>
+                        <p:par>
+                          <p:cTn id="8" fill="hold">
+                            <p:stCondLst>
+                              <p:cond delay="500"/>
+                            </p:stCondLst>
+                            <p:childTnLst>
+                              <p:par>
+                                <p:cTn id="9" presetID="42" presetClass="entr" presetSubtype="0" fill="hold" grpId="0" nodeType="afterEffect">
+                                  <p:stCondLst>
+                                    <p:cond delay="200"/>
+                                  </p:stCondLst>
+                                  <p:childTnLst>
+                                    <p:set>
+                                      <p:cBhvr>
+                                        <p:cTn id="10" dur="1" fill="hold">
+                                          <p:stCondLst>
+                                            <p:cond delay="0"/>
+                                          </p:stCondLst>
+                                        </p:cTn>
+                                        <p:tgtEl>
+                                          <p:spTgt spid="3">
+                                            <p:txEl>
+                                              <p:pRg st="0" end="0"/>
+                                            </p:txEl>
+                                          </p:spTgt>
+                                        </p:tgtEl>
+                                        <p:attrNameLst>
+                                          <p:attrName>style.visibility</p:attrName>
+                                        </p:attrNameLst>
+                                      </p:cBhvr>
+                                      <p:to>
+                                        <p:strVal val="visible"/>
+                                      </p:to>
+                                    </p:set>
+                                    <p:animEffect transition="in" filter="fade">
+                                      <p:cBhvr>
+                                        <p:cTn id="11" dur="500"/>
+                                        <p:tgtEl>
+                                          <p:spTgt spid="3">
+                                            <p:txEl>
+                                              <p:pRg st="0" end="0"/>
+                                            </p:txEl>
+                                          </p:spTgt>
+                                        </p:tgtEl>
+                                      </p:cBhvr>
+                                    </p:animEffect>
+                                    <p:anim calcmode="lin" valueType="num">
+                                      <p:cBhvr>
+                                        <p:cTn id="12" dur="500" fill="hold"/>
+                                        <p:tgtEl>
+                                          <p:spTgt spid="3">
+                                            <p:txEl>
+                                              <p:pRg st="0" end="0"/>
+                                            </p:txEl>
+                                          </p:spTgt>
+                                        </p:tgtEl>
+                                        <p:attrNameLst>
+                                          <p:attrName>ppt_x</p:attrName>
+                                        </p:attrNameLst>
+                                      </p:cBhvr>
+                                      <p:tavLst>
+                                        <p:tav tm="0">
+                                          <p:val>
+                                            <p:strVal val="#ppt_x"/>
+                                          </p:val>
+                                        </p:tav>
+                                        <p:tav tm="100000">
+                                          <p:val>
+                                            <p:strVal val="#ppt_x"/>
+                                          </p:val>
+                                        </p:tav>
+                                      </p:tavLst>
+                                    </p:anim>
+                                    <p:anim calcmode="lin" valueType="num">
+                                      <p:cBhvr>
+                                        <p:cTn id="13" dur="500" fill="hold"/>
+                                        <p:tgtEl>
+                                          <p:spTgt spid="3">
+                                            <p:txEl>
+                                              <p:pRg st="0" end="0"/>
+                                            </p:txEl>
+                                          </p:spTgt>
+                                        </p:tgtEl>
+                                        <p:attrNameLst>
+                                          <p:attrName>ppt_y</p:attrName>
+                                        </p:attrNameLst>
+                                      </p:cBhvr>
+                                      <p:tavLst>
+                                        <p:tav tm="0">
+                                          <p:val>
+                                            <p:strVal val="#ppt_y+.1"/>
+                                          </p:val>
+                                        </p:tav>
+                                        <p:tav tm="100000">
+                                          <p:val>
+                                            <p:strVal val="#ppt_y"/>
+                                          </p:val>
+                                        </p:tav>
+                                      </p:tavLst>
+                                    </p:anim>
+                                  </p:childTnLst>
+                                </p:cTn>
+                              </p:par>
+                            </p:childTnLst>
+                          </p:cTn>
+                        </p:par>
+                      </p:childTnLst>
+                    </p:cTn>
+                  </p:par>
+                </p:childTnLst>
+              </p:cTn>
+              <p:prevCondLst>
+                <p:cond evt="onPrev" delay="0">
+                  <p:tgtEl>
+                    <p:sldTgt/>
+                  </p:tgtEl>
+                </p:cond>
+              </p:prevCondLst>
+              <p:nextCondLst>
+                <p:cond evt="onNext" delay="0">
+                  <p:tgtEl>
+                    <p:sldTgt/>
+                  </p:tgtEl>
+                </p:cond>
+              </p:nextCondLst>
+            </p:seq>
+          </p:childTnLst>
+        </p:cTn>
+      </p:par>
+    </p:tnLst>
+    <p:bldLst>
+      <p:bldP spid="2" grpId="0"/>
+      <p:bldP spid="3" grpId="0" build="p"/>
+    </p:bldLst>
+  </p:timing>
 </p:sld>
 </file>
 
@@ -5000,6 +6053,98 @@
   <p:clrMapOvr>
     <a:masterClrMapping/>
   </p:clrMapOvr>
+  <p:transition spd="slow">
+    <p:push dir="u"/>
+  </p:transition>
+  <p:timing>
+    <p:tnLst>
+      <p:par>
+        <p:cTn id="1" dur="indefinite" restart="never" nodeType="tmRoot">
+          <p:childTnLst>
+            <p:seq concurrent="1" nextAc="seek">
+              <p:cTn id="2" dur="indefinite" nodeType="mainSeq">
+                <p:childTnLst>
+                  <p:par>
+                    <p:cTn id="3" fill="hold">
+                      <p:stCondLst>
+                        <p:cond delay="indefinite"/>
+                        <p:cond evt="onBegin" delay="0">
+                          <p:tn val="2"/>
+                        </p:cond>
+                      </p:stCondLst>
+                      <p:childTnLst>
+                        <p:par>
+                          <p:cTn id="4" fill="hold">
+                            <p:stCondLst>
+                              <p:cond delay="0"/>
+                            </p:stCondLst>
+                            <p:childTnLst>
+                              <p:par>
+                                <p:cTn id="5" presetID="10" presetClass="entr" presetSubtype="0" fill="hold" grpId="0" nodeType="afterEffect">
+                                  <p:stCondLst>
+                                    <p:cond delay="0"/>
+                                  </p:stCondLst>
+                                  <p:childTnLst>
+                                    <p:set>
+                                      <p:cBhvr>
+                                        <p:cTn id="6" dur="1" fill="hold">
+                                          <p:stCondLst>
+                                            <p:cond delay="0"/>
+                                          </p:stCondLst>
+                                        </p:cTn>
+                                        <p:tgtEl>
+                                          <p:spTgt spid="2"/>
+                                        </p:tgtEl>
+                                        <p:attrNameLst>
+                                          <p:attrName>style.visibility</p:attrName>
+                                        </p:attrNameLst>
+                                      </p:cBhvr>
+                                      <p:to>
+                                        <p:strVal val="visible"/>
+                                      </p:to>
+                                    </p:set>
+                                    <p:animEffect transition="in" filter="fade">
+                                      <p:cBhvr>
+                                        <p:cTn id="7" dur="500"/>
+                                        <p:tgtEl>
+                                          <p:spTgt spid="2"/>
+                                        </p:tgtEl>
+                                      </p:cBhvr>
+                                    </p:animEffect>
+                                  </p:childTnLst>
+                                </p:cTn>
+                              </p:par>
+                            </p:childTnLst>
+                          </p:cTn>
+                        </p:par>
+                      </p:childTnLst>
+                    </p:cTn>
+                  </p:par>
+                </p:childTnLst>
+              </p:cTn>
+              <p:prevCondLst>
+                <p:cond evt="onPrev" delay="0">
+                  <p:tgtEl>
+                    <p:sldTgt/>
+                  </p:tgtEl>
+                </p:cond>
+              </p:prevCondLst>
+              <p:nextCondLst>
+                <p:cond evt="onNext" delay="0">
+                  <p:tgtEl>
+                    <p:sldTgt/>
+                  </p:tgtEl>
+                </p:cond>
+              </p:nextCondLst>
+            </p:seq>
+          </p:childTnLst>
+        </p:cTn>
+      </p:par>
+    </p:tnLst>
+    <p:bldLst>
+      <p:bldP spid="2" grpId="0"/>
+    </p:bldLst>
+  </p:timing>
 </p:sld>
 </file>
 
@@ -5202,6 +6347,626 @@
   <p:clrMapOvr>
     <a:masterClrMapping/>
   </p:clrMapOvr>
+  <p:transition spd="slow">
+    <p:push dir="u"/>
+  </p:transition>
+  <p:timing>
+    <p:tnLst>
+      <p:par>
+        <p:cTn id="1" dur="indefinite" restart="never" nodeType="tmRoot">
+          <p:childTnLst>
+            <p:seq concurrent="1" nextAc="seek">
+              <p:cTn id="2" dur="indefinite" nodeType="mainSeq">
+                <p:childTnLst>
+                  <p:par>
+                    <p:cTn id="3" fill="hold">
+                      <p:stCondLst>
+                        <p:cond delay="indefinite"/>
+                        <p:cond evt="onBegin" delay="0">
+                          <p:tn val="2"/>
+                        </p:cond>
+                      </p:stCondLst>
+                      <p:childTnLst>
+                        <p:par>
+                          <p:cTn id="4" fill="hold">
+                            <p:stCondLst>
+                              <p:cond delay="0"/>
+                            </p:stCondLst>
+                            <p:childTnLst>
+                              <p:par>
+                                <p:cTn id="5" presetID="10" presetClass="entr" presetSubtype="0" fill="hold" grpId="0" nodeType="afterEffect">
+                                  <p:stCondLst>
+                                    <p:cond delay="0"/>
+                                  </p:stCondLst>
+                                  <p:childTnLst>
+                                    <p:set>
+                                      <p:cBhvr>
+                                        <p:cTn id="6" dur="1" fill="hold">
+                                          <p:stCondLst>
+                                            <p:cond delay="0"/>
+                                          </p:stCondLst>
+                                        </p:cTn>
+                                        <p:tgtEl>
+                                          <p:spTgt spid="3">
+                                            <p:txEl>
+                                              <p:pRg st="0" end="0"/>
+                                            </p:txEl>
+                                          </p:spTgt>
+                                        </p:tgtEl>
+                                        <p:attrNameLst>
+                                          <p:attrName>style.visibility</p:attrName>
+                                        </p:attrNameLst>
+                                      </p:cBhvr>
+                                      <p:to>
+                                        <p:strVal val="visible"/>
+                                      </p:to>
+                                    </p:set>
+                                    <p:animEffect transition="in" filter="fade">
+                                      <p:cBhvr>
+                                        <p:cTn id="7" dur="500"/>
+                                        <p:tgtEl>
+                                          <p:spTgt spid="3">
+                                            <p:txEl>
+                                              <p:pRg st="0" end="0"/>
+                                            </p:txEl>
+                                          </p:spTgt>
+                                        </p:tgtEl>
+                                      </p:cBhvr>
+                                    </p:animEffect>
+                                  </p:childTnLst>
+                                </p:cTn>
+                              </p:par>
+                            </p:childTnLst>
+                          </p:cTn>
+                        </p:par>
+                        <p:par>
+                          <p:cTn id="8" fill="hold">
+                            <p:stCondLst>
+                              <p:cond delay="500"/>
+                            </p:stCondLst>
+                            <p:childTnLst>
+                              <p:par>
+                                <p:cTn id="9" presetID="10" presetClass="entr" presetSubtype="0" fill="hold" grpId="0" nodeType="afterEffect">
+                                  <p:stCondLst>
+                                    <p:cond delay="0"/>
+                                  </p:stCondLst>
+                                  <p:childTnLst>
+                                    <p:set>
+                                      <p:cBhvr>
+                                        <p:cTn id="10" dur="1" fill="hold">
+                                          <p:stCondLst>
+                                            <p:cond delay="0"/>
+                                          </p:stCondLst>
+                                        </p:cTn>
+                                        <p:tgtEl>
+                                          <p:spTgt spid="3">
+                                            <p:txEl>
+                                              <p:pRg st="1" end="1"/>
+                                            </p:txEl>
+                                          </p:spTgt>
+                                        </p:tgtEl>
+                                        <p:attrNameLst>
+                                          <p:attrName>style.visibility</p:attrName>
+                                        </p:attrNameLst>
+                                      </p:cBhvr>
+                                      <p:to>
+                                        <p:strVal val="visible"/>
+                                      </p:to>
+                                    </p:set>
+                                    <p:animEffect transition="in" filter="fade">
+                                      <p:cBhvr>
+                                        <p:cTn id="11" dur="500"/>
+                                        <p:tgtEl>
+                                          <p:spTgt spid="3">
+                                            <p:txEl>
+                                              <p:pRg st="1" end="1"/>
+                                            </p:txEl>
+                                          </p:spTgt>
+                                        </p:tgtEl>
+                                      </p:cBhvr>
+                                    </p:animEffect>
+                                  </p:childTnLst>
+                                </p:cTn>
+                              </p:par>
+                            </p:childTnLst>
+                          </p:cTn>
+                        </p:par>
+                        <p:par>
+                          <p:cTn id="12" fill="hold">
+                            <p:stCondLst>
+                              <p:cond delay="1000"/>
+                            </p:stCondLst>
+                            <p:childTnLst>
+                              <p:par>
+                                <p:cTn id="13" presetID="10" presetClass="entr" presetSubtype="0" fill="hold" grpId="0" nodeType="afterEffect">
+                                  <p:stCondLst>
+                                    <p:cond delay="0"/>
+                                  </p:stCondLst>
+                                  <p:childTnLst>
+                                    <p:set>
+                                      <p:cBhvr>
+                                        <p:cTn id="14" dur="1" fill="hold">
+                                          <p:stCondLst>
+                                            <p:cond delay="0"/>
+                                          </p:stCondLst>
+                                        </p:cTn>
+                                        <p:tgtEl>
+                                          <p:spTgt spid="3">
+                                            <p:txEl>
+                                              <p:pRg st="2" end="2"/>
+                                            </p:txEl>
+                                          </p:spTgt>
+                                        </p:tgtEl>
+                                        <p:attrNameLst>
+                                          <p:attrName>style.visibility</p:attrName>
+                                        </p:attrNameLst>
+                                      </p:cBhvr>
+                                      <p:to>
+                                        <p:strVal val="visible"/>
+                                      </p:to>
+                                    </p:set>
+                                    <p:animEffect transition="in" filter="fade">
+                                      <p:cBhvr>
+                                        <p:cTn id="15" dur="500"/>
+                                        <p:tgtEl>
+                                          <p:spTgt spid="3">
+                                            <p:txEl>
+                                              <p:pRg st="2" end="2"/>
+                                            </p:txEl>
+                                          </p:spTgt>
+                                        </p:tgtEl>
+                                      </p:cBhvr>
+                                    </p:animEffect>
+                                  </p:childTnLst>
+                                </p:cTn>
+                              </p:par>
+                            </p:childTnLst>
+                          </p:cTn>
+                        </p:par>
+                        <p:par>
+                          <p:cTn id="16" fill="hold">
+                            <p:stCondLst>
+                              <p:cond delay="1500"/>
+                            </p:stCondLst>
+                            <p:childTnLst>
+                              <p:par>
+                                <p:cTn id="17" presetID="10" presetClass="entr" presetSubtype="0" fill="hold" grpId="0" nodeType="afterEffect">
+                                  <p:stCondLst>
+                                    <p:cond delay="0"/>
+                                  </p:stCondLst>
+                                  <p:childTnLst>
+                                    <p:set>
+                                      <p:cBhvr>
+                                        <p:cTn id="18" dur="1" fill="hold">
+                                          <p:stCondLst>
+                                            <p:cond delay="0"/>
+                                          </p:stCondLst>
+                                        </p:cTn>
+                                        <p:tgtEl>
+                                          <p:spTgt spid="3">
+                                            <p:txEl>
+                                              <p:pRg st="3" end="3"/>
+                                            </p:txEl>
+                                          </p:spTgt>
+                                        </p:tgtEl>
+                                        <p:attrNameLst>
+                                          <p:attrName>style.visibility</p:attrName>
+                                        </p:attrNameLst>
+                                      </p:cBhvr>
+                                      <p:to>
+                                        <p:strVal val="visible"/>
+                                      </p:to>
+                                    </p:set>
+                                    <p:animEffect transition="in" filter="fade">
+                                      <p:cBhvr>
+                                        <p:cTn id="19" dur="500"/>
+                                        <p:tgtEl>
+                                          <p:spTgt spid="3">
+                                            <p:txEl>
+                                              <p:pRg st="3" end="3"/>
+                                            </p:txEl>
+                                          </p:spTgt>
+                                        </p:tgtEl>
+                                      </p:cBhvr>
+                                    </p:animEffect>
+                                  </p:childTnLst>
+                                </p:cTn>
+                              </p:par>
+                            </p:childTnLst>
+                          </p:cTn>
+                        </p:par>
+                        <p:par>
+                          <p:cTn id="20" fill="hold">
+                            <p:stCondLst>
+                              <p:cond delay="2000"/>
+                            </p:stCondLst>
+                            <p:childTnLst>
+                              <p:par>
+                                <p:cTn id="21" presetID="10" presetClass="entr" presetSubtype="0" fill="hold" grpId="0" nodeType="afterEffect">
+                                  <p:stCondLst>
+                                    <p:cond delay="0"/>
+                                  </p:stCondLst>
+                                  <p:childTnLst>
+                                    <p:set>
+                                      <p:cBhvr>
+                                        <p:cTn id="22" dur="1" fill="hold">
+                                          <p:stCondLst>
+                                            <p:cond delay="0"/>
+                                          </p:stCondLst>
+                                        </p:cTn>
+                                        <p:tgtEl>
+                                          <p:spTgt spid="3">
+                                            <p:txEl>
+                                              <p:pRg st="4" end="4"/>
+                                            </p:txEl>
+                                          </p:spTgt>
+                                        </p:tgtEl>
+                                        <p:attrNameLst>
+                                          <p:attrName>style.visibility</p:attrName>
+                                        </p:attrNameLst>
+                                      </p:cBhvr>
+                                      <p:to>
+                                        <p:strVal val="visible"/>
+                                      </p:to>
+                                    </p:set>
+                                    <p:animEffect transition="in" filter="fade">
+                                      <p:cBhvr>
+                                        <p:cTn id="23" dur="500"/>
+                                        <p:tgtEl>
+                                          <p:spTgt spid="3">
+                                            <p:txEl>
+                                              <p:pRg st="4" end="4"/>
+                                            </p:txEl>
+                                          </p:spTgt>
+                                        </p:tgtEl>
+                                      </p:cBhvr>
+                                    </p:animEffect>
+                                  </p:childTnLst>
+                                </p:cTn>
+                              </p:par>
+                            </p:childTnLst>
+                          </p:cTn>
+                        </p:par>
+                        <p:par>
+                          <p:cTn id="24" fill="hold">
+                            <p:stCondLst>
+                              <p:cond delay="2500"/>
+                            </p:stCondLst>
+                            <p:childTnLst>
+                              <p:par>
+                                <p:cTn id="25" presetID="10" presetClass="entr" presetSubtype="0" fill="hold" grpId="0" nodeType="afterEffect">
+                                  <p:stCondLst>
+                                    <p:cond delay="0"/>
+                                  </p:stCondLst>
+                                  <p:childTnLst>
+                                    <p:set>
+                                      <p:cBhvr>
+                                        <p:cTn id="26" dur="1" fill="hold">
+                                          <p:stCondLst>
+                                            <p:cond delay="0"/>
+                                          </p:stCondLst>
+                                        </p:cTn>
+                                        <p:tgtEl>
+                                          <p:spTgt spid="3">
+                                            <p:txEl>
+                                              <p:pRg st="5" end="5"/>
+                                            </p:txEl>
+                                          </p:spTgt>
+                                        </p:tgtEl>
+                                        <p:attrNameLst>
+                                          <p:attrName>style.visibility</p:attrName>
+                                        </p:attrNameLst>
+                                      </p:cBhvr>
+                                      <p:to>
+                                        <p:strVal val="visible"/>
+                                      </p:to>
+                                    </p:set>
+                                    <p:animEffect transition="in" filter="fade">
+                                      <p:cBhvr>
+                                        <p:cTn id="27" dur="500"/>
+                                        <p:tgtEl>
+                                          <p:spTgt spid="3">
+                                            <p:txEl>
+                                              <p:pRg st="5" end="5"/>
+                                            </p:txEl>
+                                          </p:spTgt>
+                                        </p:tgtEl>
+                                      </p:cBhvr>
+                                    </p:animEffect>
+                                  </p:childTnLst>
+                                </p:cTn>
+                              </p:par>
+                            </p:childTnLst>
+                          </p:cTn>
+                        </p:par>
+                        <p:par>
+                          <p:cTn id="28" fill="hold">
+                            <p:stCondLst>
+                              <p:cond delay="3000"/>
+                            </p:stCondLst>
+                            <p:childTnLst>
+                              <p:par>
+                                <p:cTn id="29" presetID="10" presetClass="entr" presetSubtype="0" fill="hold" grpId="0" nodeType="afterEffect">
+                                  <p:stCondLst>
+                                    <p:cond delay="0"/>
+                                  </p:stCondLst>
+                                  <p:childTnLst>
+                                    <p:set>
+                                      <p:cBhvr>
+                                        <p:cTn id="30" dur="1" fill="hold">
+                                          <p:stCondLst>
+                                            <p:cond delay="0"/>
+                                          </p:stCondLst>
+                                        </p:cTn>
+                                        <p:tgtEl>
+                                          <p:spTgt spid="3">
+                                            <p:txEl>
+                                              <p:pRg st="6" end="6"/>
+                                            </p:txEl>
+                                          </p:spTgt>
+                                        </p:tgtEl>
+                                        <p:attrNameLst>
+                                          <p:attrName>style.visibility</p:attrName>
+                                        </p:attrNameLst>
+                                      </p:cBhvr>
+                                      <p:to>
+                                        <p:strVal val="visible"/>
+                                      </p:to>
+                                    </p:set>
+                                    <p:animEffect transition="in" filter="fade">
+                                      <p:cBhvr>
+                                        <p:cTn id="31" dur="500"/>
+                                        <p:tgtEl>
+                                          <p:spTgt spid="3">
+                                            <p:txEl>
+                                              <p:pRg st="6" end="6"/>
+                                            </p:txEl>
+                                          </p:spTgt>
+                                        </p:tgtEl>
+                                      </p:cBhvr>
+                                    </p:animEffect>
+                                  </p:childTnLst>
+                                </p:cTn>
+                              </p:par>
+                            </p:childTnLst>
+                          </p:cTn>
+                        </p:par>
+                        <p:par>
+                          <p:cTn id="32" fill="hold">
+                            <p:stCondLst>
+                              <p:cond delay="3500"/>
+                            </p:stCondLst>
+                            <p:childTnLst>
+                              <p:par>
+                                <p:cTn id="33" presetID="10" presetClass="entr" presetSubtype="0" fill="hold" grpId="0" nodeType="afterEffect">
+                                  <p:stCondLst>
+                                    <p:cond delay="0"/>
+                                  </p:stCondLst>
+                                  <p:childTnLst>
+                                    <p:set>
+                                      <p:cBhvr>
+                                        <p:cTn id="34" dur="1" fill="hold">
+                                          <p:stCondLst>
+                                            <p:cond delay="0"/>
+                                          </p:stCondLst>
+                                        </p:cTn>
+                                        <p:tgtEl>
+                                          <p:spTgt spid="3">
+                                            <p:txEl>
+                                              <p:pRg st="7" end="7"/>
+                                            </p:txEl>
+                                          </p:spTgt>
+                                        </p:tgtEl>
+                                        <p:attrNameLst>
+                                          <p:attrName>style.visibility</p:attrName>
+                                        </p:attrNameLst>
+                                      </p:cBhvr>
+                                      <p:to>
+                                        <p:strVal val="visible"/>
+                                      </p:to>
+                                    </p:set>
+                                    <p:animEffect transition="in" filter="fade">
+                                      <p:cBhvr>
+                                        <p:cTn id="35" dur="500"/>
+                                        <p:tgtEl>
+                                          <p:spTgt spid="3">
+                                            <p:txEl>
+                                              <p:pRg st="7" end="7"/>
+                                            </p:txEl>
+                                          </p:spTgt>
+                                        </p:tgtEl>
+                                      </p:cBhvr>
+                                    </p:animEffect>
+                                  </p:childTnLst>
+                                </p:cTn>
+                              </p:par>
+                            </p:childTnLst>
+                          </p:cTn>
+                        </p:par>
+                        <p:par>
+                          <p:cTn id="36" fill="hold">
+                            <p:stCondLst>
+                              <p:cond delay="4000"/>
+                            </p:stCondLst>
+                            <p:childTnLst>
+                              <p:par>
+                                <p:cTn id="37" presetID="10" presetClass="entr" presetSubtype="0" fill="hold" grpId="0" nodeType="afterEffect">
+                                  <p:stCondLst>
+                                    <p:cond delay="0"/>
+                                  </p:stCondLst>
+                                  <p:childTnLst>
+                                    <p:set>
+                                      <p:cBhvr>
+                                        <p:cTn id="38" dur="1" fill="hold">
+                                          <p:stCondLst>
+                                            <p:cond delay="0"/>
+                                          </p:stCondLst>
+                                        </p:cTn>
+                                        <p:tgtEl>
+                                          <p:spTgt spid="3">
+                                            <p:txEl>
+                                              <p:pRg st="8" end="8"/>
+                                            </p:txEl>
+                                          </p:spTgt>
+                                        </p:tgtEl>
+                                        <p:attrNameLst>
+                                          <p:attrName>style.visibility</p:attrName>
+                                        </p:attrNameLst>
+                                      </p:cBhvr>
+                                      <p:to>
+                                        <p:strVal val="visible"/>
+                                      </p:to>
+                                    </p:set>
+                                    <p:animEffect transition="in" filter="fade">
+                                      <p:cBhvr>
+                                        <p:cTn id="39" dur="500"/>
+                                        <p:tgtEl>
+                                          <p:spTgt spid="3">
+                                            <p:txEl>
+                                              <p:pRg st="8" end="8"/>
+                                            </p:txEl>
+                                          </p:spTgt>
+                                        </p:tgtEl>
+                                      </p:cBhvr>
+                                    </p:animEffect>
+                                  </p:childTnLst>
+                                </p:cTn>
+                              </p:par>
+                            </p:childTnLst>
+                          </p:cTn>
+                        </p:par>
+                        <p:par>
+                          <p:cTn id="40" fill="hold">
+                            <p:stCondLst>
+                              <p:cond delay="4500"/>
+                            </p:stCondLst>
+                            <p:childTnLst>
+                              <p:par>
+                                <p:cTn id="41" presetID="10" presetClass="entr" presetSubtype="0" fill="hold" grpId="0" nodeType="afterEffect">
+                                  <p:stCondLst>
+                                    <p:cond delay="0"/>
+                                  </p:stCondLst>
+                                  <p:childTnLst>
+                                    <p:set>
+                                      <p:cBhvr>
+                                        <p:cTn id="42" dur="1" fill="hold">
+                                          <p:stCondLst>
+                                            <p:cond delay="0"/>
+                                          </p:stCondLst>
+                                        </p:cTn>
+                                        <p:tgtEl>
+                                          <p:spTgt spid="3">
+                                            <p:txEl>
+                                              <p:pRg st="9" end="9"/>
+                                            </p:txEl>
+                                          </p:spTgt>
+                                        </p:tgtEl>
+                                        <p:attrNameLst>
+                                          <p:attrName>style.visibility</p:attrName>
+                                        </p:attrNameLst>
+                                      </p:cBhvr>
+                                      <p:to>
+                                        <p:strVal val="visible"/>
+                                      </p:to>
+                                    </p:set>
+                                    <p:animEffect transition="in" filter="fade">
+                                      <p:cBhvr>
+                                        <p:cTn id="43" dur="500"/>
+                                        <p:tgtEl>
+                                          <p:spTgt spid="3">
+                                            <p:txEl>
+                                              <p:pRg st="9" end="9"/>
+                                            </p:txEl>
+                                          </p:spTgt>
+                                        </p:tgtEl>
+                                      </p:cBhvr>
+                                    </p:animEffect>
+                                  </p:childTnLst>
+                                </p:cTn>
+                              </p:par>
+                            </p:childTnLst>
+                          </p:cTn>
+                        </p:par>
+                        <p:par>
+                          <p:cTn id="44" fill="hold">
+                            <p:stCondLst>
+                              <p:cond delay="5000"/>
+                            </p:stCondLst>
+                            <p:childTnLst>
+                              <p:par>
+                                <p:cTn id="45" presetID="10" presetClass="entr" presetSubtype="0" fill="hold" grpId="0" nodeType="afterEffect">
+                                  <p:stCondLst>
+                                    <p:cond delay="0"/>
+                                  </p:stCondLst>
+                                  <p:childTnLst>
+                                    <p:set>
+                                      <p:cBhvr>
+                                        <p:cTn id="46" dur="1" fill="hold">
+                                          <p:stCondLst>
+                                            <p:cond delay="0"/>
+                                          </p:stCondLst>
+                                        </p:cTn>
+                                        <p:tgtEl>
+                                          <p:spTgt spid="3">
+                                            <p:txEl>
+                                              <p:pRg st="10" end="10"/>
+                                            </p:txEl>
+                                          </p:spTgt>
+                                        </p:tgtEl>
+                                        <p:attrNameLst>
+                                          <p:attrName>style.visibility</p:attrName>
+                                        </p:attrNameLst>
+                                      </p:cBhvr>
+                                      <p:to>
+                                        <p:strVal val="visible"/>
+                                      </p:to>
+                                    </p:set>
+                                    <p:animEffect transition="in" filter="fade">
+                                      <p:cBhvr>
+                                        <p:cTn id="47" dur="500"/>
+                                        <p:tgtEl>
+                                          <p:spTgt spid="3">
+                                            <p:txEl>
+                                              <p:pRg st="10" end="10"/>
+                                            </p:txEl>
+                                          </p:spTgt>
+                                        </p:tgtEl>
+                                      </p:cBhvr>
+                                    </p:animEffect>
+                                  </p:childTnLst>
+                                </p:cTn>
+                              </p:par>
+                            </p:childTnLst>
+                          </p:cTn>
+                        </p:par>
+                      </p:childTnLst>
+                    </p:cTn>
+                  </p:par>
+                </p:childTnLst>
+              </p:cTn>
+              <p:prevCondLst>
+                <p:cond evt="onPrev" delay="0">
+                  <p:tgtEl>
+                    <p:sldTgt/>
+                  </p:tgtEl>
+                </p:cond>
+              </p:prevCondLst>
+              <p:nextCondLst>
+                <p:cond evt="onNext" delay="0">
+                  <p:tgtEl>
+                    <p:sldTgt/>
+                  </p:tgtEl>
+                </p:cond>
+              </p:nextCondLst>
+            </p:seq>
+          </p:childTnLst>
+        </p:cTn>
+      </p:par>
+    </p:tnLst>
+    <p:bldLst>
+      <p:bldP spid="3" grpId="0" uiExpand="1" build="p"/>
+    </p:bldLst>
+  </p:timing>
 </p:sld>
 </file>
 
@@ -5306,6 +7071,98 @@
   <p:clrMapOvr>
     <a:masterClrMapping/>
   </p:clrMapOvr>
+  <p:transition spd="slow">
+    <p:push dir="u"/>
+  </p:transition>
+  <p:timing>
+    <p:tnLst>
+      <p:par>
+        <p:cTn id="1" dur="indefinite" restart="never" nodeType="tmRoot">
+          <p:childTnLst>
+            <p:seq concurrent="1" nextAc="seek">
+              <p:cTn id="2" dur="indefinite" nodeType="mainSeq">
+                <p:childTnLst>
+                  <p:par>
+                    <p:cTn id="3" fill="hold">
+                      <p:stCondLst>
+                        <p:cond delay="indefinite"/>
+                        <p:cond evt="onBegin" delay="0">
+                          <p:tn val="2"/>
+                        </p:cond>
+                      </p:stCondLst>
+                      <p:childTnLst>
+                        <p:par>
+                          <p:cTn id="4" fill="hold">
+                            <p:stCondLst>
+                              <p:cond delay="0"/>
+                            </p:stCondLst>
+                            <p:childTnLst>
+                              <p:par>
+                                <p:cTn id="5" presetID="10" presetClass="entr" presetSubtype="0" fill="hold" grpId="0" nodeType="afterEffect">
+                                  <p:stCondLst>
+                                    <p:cond delay="0"/>
+                                  </p:stCondLst>
+                                  <p:childTnLst>
+                                    <p:set>
+                                      <p:cBhvr>
+                                        <p:cTn id="6" dur="1" fill="hold">
+                                          <p:stCondLst>
+                                            <p:cond delay="0"/>
+                                          </p:stCondLst>
+                                        </p:cTn>
+                                        <p:tgtEl>
+                                          <p:spTgt spid="2"/>
+                                        </p:tgtEl>
+                                        <p:attrNameLst>
+                                          <p:attrName>style.visibility</p:attrName>
+                                        </p:attrNameLst>
+                                      </p:cBhvr>
+                                      <p:to>
+                                        <p:strVal val="visible"/>
+                                      </p:to>
+                                    </p:set>
+                                    <p:animEffect transition="in" filter="fade">
+                                      <p:cBhvr>
+                                        <p:cTn id="7" dur="500"/>
+                                        <p:tgtEl>
+                                          <p:spTgt spid="2"/>
+                                        </p:tgtEl>
+                                      </p:cBhvr>
+                                    </p:animEffect>
+                                  </p:childTnLst>
+                                </p:cTn>
+                              </p:par>
+                            </p:childTnLst>
+                          </p:cTn>
+                        </p:par>
+                      </p:childTnLst>
+                    </p:cTn>
+                  </p:par>
+                </p:childTnLst>
+              </p:cTn>
+              <p:prevCondLst>
+                <p:cond evt="onPrev" delay="0">
+                  <p:tgtEl>
+                    <p:sldTgt/>
+                  </p:tgtEl>
+                </p:cond>
+              </p:prevCondLst>
+              <p:nextCondLst>
+                <p:cond evt="onNext" delay="0">
+                  <p:tgtEl>
+                    <p:sldTgt/>
+                  </p:tgtEl>
+                </p:cond>
+              </p:nextCondLst>
+            </p:seq>
+          </p:childTnLst>
+        </p:cTn>
+      </p:par>
+    </p:tnLst>
+    <p:bldLst>
+      <p:bldP spid="2" grpId="0"/>
+    </p:bldLst>
+  </p:timing>
 </p:sld>
 </file>
 
@@ -5497,6 +7354,629 @@
   <p:clrMapOvr>
     <a:masterClrMapping/>
   </p:clrMapOvr>
+  <p:transition spd="slow">
+    <p:push dir="u"/>
+  </p:transition>
+  <p:timing>
+    <p:tnLst>
+      <p:par>
+        <p:cTn id="1" dur="indefinite" restart="never" nodeType="tmRoot">
+          <p:childTnLst>
+            <p:seq concurrent="1" nextAc="seek">
+              <p:cTn id="2" dur="indefinite" nodeType="mainSeq">
+                <p:childTnLst>
+                  <p:par>
+                    <p:cTn id="3" fill="hold">
+                      <p:stCondLst>
+                        <p:cond delay="indefinite"/>
+                        <p:cond evt="onBegin" delay="0">
+                          <p:tn val="2"/>
+                        </p:cond>
+                      </p:stCondLst>
+                      <p:childTnLst>
+                        <p:par>
+                          <p:cTn id="4" fill="hold">
+                            <p:stCondLst>
+                              <p:cond delay="0"/>
+                            </p:stCondLst>
+                            <p:childTnLst>
+                              <p:par>
+                                <p:cTn id="5" presetID="10" presetClass="entr" presetSubtype="0" fill="hold" grpId="0" nodeType="afterEffect">
+                                  <p:stCondLst>
+                                    <p:cond delay="0"/>
+                                  </p:stCondLst>
+                                  <p:childTnLst>
+                                    <p:set>
+                                      <p:cBhvr>
+                                        <p:cTn id="6" dur="1" fill="hold">
+                                          <p:stCondLst>
+                                            <p:cond delay="0"/>
+                                          </p:stCondLst>
+                                        </p:cTn>
+                                        <p:tgtEl>
+                                          <p:spTgt spid="2"/>
+                                        </p:tgtEl>
+                                        <p:attrNameLst>
+                                          <p:attrName>style.visibility</p:attrName>
+                                        </p:attrNameLst>
+                                      </p:cBhvr>
+                                      <p:to>
+                                        <p:strVal val="visible"/>
+                                      </p:to>
+                                    </p:set>
+                                    <p:animEffect transition="in" filter="fade">
+                                      <p:cBhvr>
+                                        <p:cTn id="7" dur="500"/>
+                                        <p:tgtEl>
+                                          <p:spTgt spid="2"/>
+                                        </p:tgtEl>
+                                      </p:cBhvr>
+                                    </p:animEffect>
+                                  </p:childTnLst>
+                                </p:cTn>
+                              </p:par>
+                            </p:childTnLst>
+                          </p:cTn>
+                        </p:par>
+                        <p:par>
+                          <p:cTn id="8" fill="hold">
+                            <p:stCondLst>
+                              <p:cond delay="500"/>
+                            </p:stCondLst>
+                            <p:childTnLst>
+                              <p:par>
+                                <p:cTn id="9" presetID="42" presetClass="entr" presetSubtype="0" fill="hold" grpId="0" nodeType="afterEffect">
+                                  <p:stCondLst>
+                                    <p:cond delay="0"/>
+                                  </p:stCondLst>
+                                  <p:childTnLst>
+                                    <p:set>
+                                      <p:cBhvr>
+                                        <p:cTn id="10" dur="1" fill="hold">
+                                          <p:stCondLst>
+                                            <p:cond delay="0"/>
+                                          </p:stCondLst>
+                                        </p:cTn>
+                                        <p:tgtEl>
+                                          <p:spTgt spid="3">
+                                            <p:txEl>
+                                              <p:pRg st="0" end="0"/>
+                                            </p:txEl>
+                                          </p:spTgt>
+                                        </p:tgtEl>
+                                        <p:attrNameLst>
+                                          <p:attrName>style.visibility</p:attrName>
+                                        </p:attrNameLst>
+                                      </p:cBhvr>
+                                      <p:to>
+                                        <p:strVal val="visible"/>
+                                      </p:to>
+                                    </p:set>
+                                    <p:animEffect transition="in" filter="fade">
+                                      <p:cBhvr>
+                                        <p:cTn id="11" dur="1000"/>
+                                        <p:tgtEl>
+                                          <p:spTgt spid="3">
+                                            <p:txEl>
+                                              <p:pRg st="0" end="0"/>
+                                            </p:txEl>
+                                          </p:spTgt>
+                                        </p:tgtEl>
+                                      </p:cBhvr>
+                                    </p:animEffect>
+                                    <p:anim calcmode="lin" valueType="num">
+                                      <p:cBhvr>
+                                        <p:cTn id="12" dur="1000" fill="hold"/>
+                                        <p:tgtEl>
+                                          <p:spTgt spid="3">
+                                            <p:txEl>
+                                              <p:pRg st="0" end="0"/>
+                                            </p:txEl>
+                                          </p:spTgt>
+                                        </p:tgtEl>
+                                        <p:attrNameLst>
+                                          <p:attrName>ppt_x</p:attrName>
+                                        </p:attrNameLst>
+                                      </p:cBhvr>
+                                      <p:tavLst>
+                                        <p:tav tm="0">
+                                          <p:val>
+                                            <p:strVal val="#ppt_x"/>
+                                          </p:val>
+                                        </p:tav>
+                                        <p:tav tm="100000">
+                                          <p:val>
+                                            <p:strVal val="#ppt_x"/>
+                                          </p:val>
+                                        </p:tav>
+                                      </p:tavLst>
+                                    </p:anim>
+                                    <p:anim calcmode="lin" valueType="num">
+                                      <p:cBhvr>
+                                        <p:cTn id="13" dur="1000" fill="hold"/>
+                                        <p:tgtEl>
+                                          <p:spTgt spid="3">
+                                            <p:txEl>
+                                              <p:pRg st="0" end="0"/>
+                                            </p:txEl>
+                                          </p:spTgt>
+                                        </p:tgtEl>
+                                        <p:attrNameLst>
+                                          <p:attrName>ppt_y</p:attrName>
+                                        </p:attrNameLst>
+                                      </p:cBhvr>
+                                      <p:tavLst>
+                                        <p:tav tm="0">
+                                          <p:val>
+                                            <p:strVal val="#ppt_y+.1"/>
+                                          </p:val>
+                                        </p:tav>
+                                        <p:tav tm="100000">
+                                          <p:val>
+                                            <p:strVal val="#ppt_y"/>
+                                          </p:val>
+                                        </p:tav>
+                                      </p:tavLst>
+                                    </p:anim>
+                                  </p:childTnLst>
+                                </p:cTn>
+                              </p:par>
+                            </p:childTnLst>
+                          </p:cTn>
+                        </p:par>
+                        <p:par>
+                          <p:cTn id="14" fill="hold">
+                            <p:stCondLst>
+                              <p:cond delay="1500"/>
+                            </p:stCondLst>
+                            <p:childTnLst>
+                              <p:par>
+                                <p:cTn id="15" presetID="42" presetClass="entr" presetSubtype="0" fill="hold" grpId="0" nodeType="afterEffect">
+                                  <p:stCondLst>
+                                    <p:cond delay="0"/>
+                                  </p:stCondLst>
+                                  <p:childTnLst>
+                                    <p:set>
+                                      <p:cBhvr>
+                                        <p:cTn id="16" dur="1" fill="hold">
+                                          <p:stCondLst>
+                                            <p:cond delay="0"/>
+                                          </p:stCondLst>
+                                        </p:cTn>
+                                        <p:tgtEl>
+                                          <p:spTgt spid="3">
+                                            <p:txEl>
+                                              <p:pRg st="1" end="1"/>
+                                            </p:txEl>
+                                          </p:spTgt>
+                                        </p:tgtEl>
+                                        <p:attrNameLst>
+                                          <p:attrName>style.visibility</p:attrName>
+                                        </p:attrNameLst>
+                                      </p:cBhvr>
+                                      <p:to>
+                                        <p:strVal val="visible"/>
+                                      </p:to>
+                                    </p:set>
+                                    <p:animEffect transition="in" filter="fade">
+                                      <p:cBhvr>
+                                        <p:cTn id="17" dur="1000"/>
+                                        <p:tgtEl>
+                                          <p:spTgt spid="3">
+                                            <p:txEl>
+                                              <p:pRg st="1" end="1"/>
+                                            </p:txEl>
+                                          </p:spTgt>
+                                        </p:tgtEl>
+                                      </p:cBhvr>
+                                    </p:animEffect>
+                                    <p:anim calcmode="lin" valueType="num">
+                                      <p:cBhvr>
+                                        <p:cTn id="18" dur="1000" fill="hold"/>
+                                        <p:tgtEl>
+                                          <p:spTgt spid="3">
+                                            <p:txEl>
+                                              <p:pRg st="1" end="1"/>
+                                            </p:txEl>
+                                          </p:spTgt>
+                                        </p:tgtEl>
+                                        <p:attrNameLst>
+                                          <p:attrName>ppt_x</p:attrName>
+                                        </p:attrNameLst>
+                                      </p:cBhvr>
+                                      <p:tavLst>
+                                        <p:tav tm="0">
+                                          <p:val>
+                                            <p:strVal val="#ppt_x"/>
+                                          </p:val>
+                                        </p:tav>
+                                        <p:tav tm="100000">
+                                          <p:val>
+                                            <p:strVal val="#ppt_x"/>
+                                          </p:val>
+                                        </p:tav>
+                                      </p:tavLst>
+                                    </p:anim>
+                                    <p:anim calcmode="lin" valueType="num">
+                                      <p:cBhvr>
+                                        <p:cTn id="19" dur="1000" fill="hold"/>
+                                        <p:tgtEl>
+                                          <p:spTgt spid="3">
+                                            <p:txEl>
+                                              <p:pRg st="1" end="1"/>
+                                            </p:txEl>
+                                          </p:spTgt>
+                                        </p:tgtEl>
+                                        <p:attrNameLst>
+                                          <p:attrName>ppt_y</p:attrName>
+                                        </p:attrNameLst>
+                                      </p:cBhvr>
+                                      <p:tavLst>
+                                        <p:tav tm="0">
+                                          <p:val>
+                                            <p:strVal val="#ppt_y+.1"/>
+                                          </p:val>
+                                        </p:tav>
+                                        <p:tav tm="100000">
+                                          <p:val>
+                                            <p:strVal val="#ppt_y"/>
+                                          </p:val>
+                                        </p:tav>
+                                      </p:tavLst>
+                                    </p:anim>
+                                  </p:childTnLst>
+                                </p:cTn>
+                              </p:par>
+                            </p:childTnLst>
+                          </p:cTn>
+                        </p:par>
+                        <p:par>
+                          <p:cTn id="20" fill="hold">
+                            <p:stCondLst>
+                              <p:cond delay="2500"/>
+                            </p:stCondLst>
+                            <p:childTnLst>
+                              <p:par>
+                                <p:cTn id="21" presetID="42" presetClass="entr" presetSubtype="0" fill="hold" grpId="0" nodeType="afterEffect">
+                                  <p:stCondLst>
+                                    <p:cond delay="0"/>
+                                  </p:stCondLst>
+                                  <p:childTnLst>
+                                    <p:set>
+                                      <p:cBhvr>
+                                        <p:cTn id="22" dur="1" fill="hold">
+                                          <p:stCondLst>
+                                            <p:cond delay="0"/>
+                                          </p:stCondLst>
+                                        </p:cTn>
+                                        <p:tgtEl>
+                                          <p:spTgt spid="3">
+                                            <p:txEl>
+                                              <p:pRg st="2" end="2"/>
+                                            </p:txEl>
+                                          </p:spTgt>
+                                        </p:tgtEl>
+                                        <p:attrNameLst>
+                                          <p:attrName>style.visibility</p:attrName>
+                                        </p:attrNameLst>
+                                      </p:cBhvr>
+                                      <p:to>
+                                        <p:strVal val="visible"/>
+                                      </p:to>
+                                    </p:set>
+                                    <p:animEffect transition="in" filter="fade">
+                                      <p:cBhvr>
+                                        <p:cTn id="23" dur="1000"/>
+                                        <p:tgtEl>
+                                          <p:spTgt spid="3">
+                                            <p:txEl>
+                                              <p:pRg st="2" end="2"/>
+                                            </p:txEl>
+                                          </p:spTgt>
+                                        </p:tgtEl>
+                                      </p:cBhvr>
+                                    </p:animEffect>
+                                    <p:anim calcmode="lin" valueType="num">
+                                      <p:cBhvr>
+                                        <p:cTn id="24" dur="1000" fill="hold"/>
+                                        <p:tgtEl>
+                                          <p:spTgt spid="3">
+                                            <p:txEl>
+                                              <p:pRg st="2" end="2"/>
+                                            </p:txEl>
+                                          </p:spTgt>
+                                        </p:tgtEl>
+                                        <p:attrNameLst>
+                                          <p:attrName>ppt_x</p:attrName>
+                                        </p:attrNameLst>
+                                      </p:cBhvr>
+                                      <p:tavLst>
+                                        <p:tav tm="0">
+                                          <p:val>
+                                            <p:strVal val="#ppt_x"/>
+                                          </p:val>
+                                        </p:tav>
+                                        <p:tav tm="100000">
+                                          <p:val>
+                                            <p:strVal val="#ppt_x"/>
+                                          </p:val>
+                                        </p:tav>
+                                      </p:tavLst>
+                                    </p:anim>
+                                    <p:anim calcmode="lin" valueType="num">
+                                      <p:cBhvr>
+                                        <p:cTn id="25" dur="1000" fill="hold"/>
+                                        <p:tgtEl>
+                                          <p:spTgt spid="3">
+                                            <p:txEl>
+                                              <p:pRg st="2" end="2"/>
+                                            </p:txEl>
+                                          </p:spTgt>
+                                        </p:tgtEl>
+                                        <p:attrNameLst>
+                                          <p:attrName>ppt_y</p:attrName>
+                                        </p:attrNameLst>
+                                      </p:cBhvr>
+                                      <p:tavLst>
+                                        <p:tav tm="0">
+                                          <p:val>
+                                            <p:strVal val="#ppt_y+.1"/>
+                                          </p:val>
+                                        </p:tav>
+                                        <p:tav tm="100000">
+                                          <p:val>
+                                            <p:strVal val="#ppt_y"/>
+                                          </p:val>
+                                        </p:tav>
+                                      </p:tavLst>
+                                    </p:anim>
+                                  </p:childTnLst>
+                                </p:cTn>
+                              </p:par>
+                            </p:childTnLst>
+                          </p:cTn>
+                        </p:par>
+                        <p:par>
+                          <p:cTn id="26" fill="hold">
+                            <p:stCondLst>
+                              <p:cond delay="3500"/>
+                            </p:stCondLst>
+                            <p:childTnLst>
+                              <p:par>
+                                <p:cTn id="27" presetID="42" presetClass="entr" presetSubtype="0" fill="hold" grpId="0" nodeType="afterEffect">
+                                  <p:stCondLst>
+                                    <p:cond delay="0"/>
+                                  </p:stCondLst>
+                                  <p:childTnLst>
+                                    <p:set>
+                                      <p:cBhvr>
+                                        <p:cTn id="28" dur="1" fill="hold">
+                                          <p:stCondLst>
+                                            <p:cond delay="0"/>
+                                          </p:stCondLst>
+                                        </p:cTn>
+                                        <p:tgtEl>
+                                          <p:spTgt spid="3">
+                                            <p:txEl>
+                                              <p:pRg st="3" end="3"/>
+                                            </p:txEl>
+                                          </p:spTgt>
+                                        </p:tgtEl>
+                                        <p:attrNameLst>
+                                          <p:attrName>style.visibility</p:attrName>
+                                        </p:attrNameLst>
+                                      </p:cBhvr>
+                                      <p:to>
+                                        <p:strVal val="visible"/>
+                                      </p:to>
+                                    </p:set>
+                                    <p:animEffect transition="in" filter="fade">
+                                      <p:cBhvr>
+                                        <p:cTn id="29" dur="1000"/>
+                                        <p:tgtEl>
+                                          <p:spTgt spid="3">
+                                            <p:txEl>
+                                              <p:pRg st="3" end="3"/>
+                                            </p:txEl>
+                                          </p:spTgt>
+                                        </p:tgtEl>
+                                      </p:cBhvr>
+                                    </p:animEffect>
+                                    <p:anim calcmode="lin" valueType="num">
+                                      <p:cBhvr>
+                                        <p:cTn id="30" dur="1000" fill="hold"/>
+                                        <p:tgtEl>
+                                          <p:spTgt spid="3">
+                                            <p:txEl>
+                                              <p:pRg st="3" end="3"/>
+                                            </p:txEl>
+                                          </p:spTgt>
+                                        </p:tgtEl>
+                                        <p:attrNameLst>
+                                          <p:attrName>ppt_x</p:attrName>
+                                        </p:attrNameLst>
+                                      </p:cBhvr>
+                                      <p:tavLst>
+                                        <p:tav tm="0">
+                                          <p:val>
+                                            <p:strVal val="#ppt_x"/>
+                                          </p:val>
+                                        </p:tav>
+                                        <p:tav tm="100000">
+                                          <p:val>
+                                            <p:strVal val="#ppt_x"/>
+                                          </p:val>
+                                        </p:tav>
+                                      </p:tavLst>
+                                    </p:anim>
+                                    <p:anim calcmode="lin" valueType="num">
+                                      <p:cBhvr>
+                                        <p:cTn id="31" dur="1000" fill="hold"/>
+                                        <p:tgtEl>
+                                          <p:spTgt spid="3">
+                                            <p:txEl>
+                                              <p:pRg st="3" end="3"/>
+                                            </p:txEl>
+                                          </p:spTgt>
+                                        </p:tgtEl>
+                                        <p:attrNameLst>
+                                          <p:attrName>ppt_y</p:attrName>
+                                        </p:attrNameLst>
+                                      </p:cBhvr>
+                                      <p:tavLst>
+                                        <p:tav tm="0">
+                                          <p:val>
+                                            <p:strVal val="#ppt_y+.1"/>
+                                          </p:val>
+                                        </p:tav>
+                                        <p:tav tm="100000">
+                                          <p:val>
+                                            <p:strVal val="#ppt_y"/>
+                                          </p:val>
+                                        </p:tav>
+                                      </p:tavLst>
+                                    </p:anim>
+                                  </p:childTnLst>
+                                </p:cTn>
+                              </p:par>
+                            </p:childTnLst>
+                          </p:cTn>
+                        </p:par>
+                        <p:par>
+                          <p:cTn id="32" fill="hold">
+                            <p:stCondLst>
+                              <p:cond delay="4500"/>
+                            </p:stCondLst>
+                            <p:childTnLst>
+                              <p:par>
+                                <p:cTn id="33" presetID="42" presetClass="entr" presetSubtype="0" fill="hold" grpId="0" nodeType="afterEffect">
+                                  <p:stCondLst>
+                                    <p:cond delay="0"/>
+                                  </p:stCondLst>
+                                  <p:childTnLst>
+                                    <p:set>
+                                      <p:cBhvr>
+                                        <p:cTn id="34" dur="1" fill="hold">
+                                          <p:stCondLst>
+                                            <p:cond delay="0"/>
+                                          </p:stCondLst>
+                                        </p:cTn>
+                                        <p:tgtEl>
+                                          <p:spTgt spid="3">
+                                            <p:txEl>
+                                              <p:pRg st="4" end="4"/>
+                                            </p:txEl>
+                                          </p:spTgt>
+                                        </p:tgtEl>
+                                        <p:attrNameLst>
+                                          <p:attrName>style.visibility</p:attrName>
+                                        </p:attrNameLst>
+                                      </p:cBhvr>
+                                      <p:to>
+                                        <p:strVal val="visible"/>
+                                      </p:to>
+                                    </p:set>
+                                    <p:animEffect transition="in" filter="fade">
+                                      <p:cBhvr>
+                                        <p:cTn id="35" dur="1000"/>
+                                        <p:tgtEl>
+                                          <p:spTgt spid="3">
+                                            <p:txEl>
+                                              <p:pRg st="4" end="4"/>
+                                            </p:txEl>
+                                          </p:spTgt>
+                                        </p:tgtEl>
+                                      </p:cBhvr>
+                                    </p:animEffect>
+                                    <p:anim calcmode="lin" valueType="num">
+                                      <p:cBhvr>
+                                        <p:cTn id="36" dur="1000" fill="hold"/>
+                                        <p:tgtEl>
+                                          <p:spTgt spid="3">
+                                            <p:txEl>
+                                              <p:pRg st="4" end="4"/>
+                                            </p:txEl>
+                                          </p:spTgt>
+                                        </p:tgtEl>
+                                        <p:attrNameLst>
+                                          <p:attrName>ppt_x</p:attrName>
+                                        </p:attrNameLst>
+                                      </p:cBhvr>
+                                      <p:tavLst>
+                                        <p:tav tm="0">
+                                          <p:val>
+                                            <p:strVal val="#ppt_x"/>
+                                          </p:val>
+                                        </p:tav>
+                                        <p:tav tm="100000">
+                                          <p:val>
+                                            <p:strVal val="#ppt_x"/>
+                                          </p:val>
+                                        </p:tav>
+                                      </p:tavLst>
+                                    </p:anim>
+                                    <p:anim calcmode="lin" valueType="num">
+                                      <p:cBhvr>
+                                        <p:cTn id="37" dur="1000" fill="hold"/>
+                                        <p:tgtEl>
+                                          <p:spTgt spid="3">
+                                            <p:txEl>
+                                              <p:pRg st="4" end="4"/>
+                                            </p:txEl>
+                                          </p:spTgt>
+                                        </p:tgtEl>
+                                        <p:attrNameLst>
+                                          <p:attrName>ppt_y</p:attrName>
+                                        </p:attrNameLst>
+                                      </p:cBhvr>
+                                      <p:tavLst>
+                                        <p:tav tm="0">
+                                          <p:val>
+                                            <p:strVal val="#ppt_y+.1"/>
+                                          </p:val>
+                                        </p:tav>
+                                        <p:tav tm="100000">
+                                          <p:val>
+                                            <p:strVal val="#ppt_y"/>
+                                          </p:val>
+                                        </p:tav>
+                                      </p:tavLst>
+                                    </p:anim>
+                                  </p:childTnLst>
+                                </p:cTn>
+                              </p:par>
+                            </p:childTnLst>
+                          </p:cTn>
+                        </p:par>
+                      </p:childTnLst>
+                    </p:cTn>
+                  </p:par>
+                </p:childTnLst>
+              </p:cTn>
+              <p:prevCondLst>
+                <p:cond evt="onPrev" delay="0">
+                  <p:tgtEl>
+                    <p:sldTgt/>
+                  </p:tgtEl>
+                </p:cond>
+              </p:prevCondLst>
+              <p:nextCondLst>
+                <p:cond evt="onNext" delay="0">
+                  <p:tgtEl>
+                    <p:sldTgt/>
+                  </p:tgtEl>
+                </p:cond>
+              </p:nextCondLst>
+            </p:seq>
+          </p:childTnLst>
+        </p:cTn>
+      </p:par>
+    </p:tnLst>
+    <p:bldLst>
+      <p:bldP spid="2" grpId="0"/>
+      <p:bldP spid="3" grpId="0" uiExpand="1" build="p"/>
+    </p:bldLst>
+  </p:timing>
 </p:sld>
 </file>
 
@@ -5719,6 +8199,841 @@
   <p:clrMapOvr>
     <a:masterClrMapping/>
   </p:clrMapOvr>
+  <p:transition spd="slow">
+    <p:push dir="u"/>
+  </p:transition>
+  <p:timing>
+    <p:tnLst>
+      <p:par>
+        <p:cTn id="1" dur="indefinite" restart="never" nodeType="tmRoot">
+          <p:childTnLst>
+            <p:seq concurrent="1" nextAc="seek">
+              <p:cTn id="2" dur="indefinite" nodeType="mainSeq">
+                <p:childTnLst>
+                  <p:par>
+                    <p:cTn id="3" fill="hold">
+                      <p:stCondLst>
+                        <p:cond delay="indefinite"/>
+                        <p:cond evt="onBegin" delay="0">
+                          <p:tn val="2"/>
+                        </p:cond>
+                      </p:stCondLst>
+                      <p:childTnLst>
+                        <p:par>
+                          <p:cTn id="4" fill="hold">
+                            <p:stCondLst>
+                              <p:cond delay="0"/>
+                            </p:stCondLst>
+                            <p:childTnLst>
+                              <p:par>
+                                <p:cTn id="5" presetID="10" presetClass="entr" presetSubtype="0" fill="hold" grpId="0" nodeType="afterEffect">
+                                  <p:stCondLst>
+                                    <p:cond delay="0"/>
+                                  </p:stCondLst>
+                                  <p:childTnLst>
+                                    <p:set>
+                                      <p:cBhvr>
+                                        <p:cTn id="6" dur="1" fill="hold">
+                                          <p:stCondLst>
+                                            <p:cond delay="0"/>
+                                          </p:stCondLst>
+                                        </p:cTn>
+                                        <p:tgtEl>
+                                          <p:spTgt spid="2"/>
+                                        </p:tgtEl>
+                                        <p:attrNameLst>
+                                          <p:attrName>style.visibility</p:attrName>
+                                        </p:attrNameLst>
+                                      </p:cBhvr>
+                                      <p:to>
+                                        <p:strVal val="visible"/>
+                                      </p:to>
+                                    </p:set>
+                                    <p:animEffect transition="in" filter="fade">
+                                      <p:cBhvr>
+                                        <p:cTn id="7" dur="500"/>
+                                        <p:tgtEl>
+                                          <p:spTgt spid="2"/>
+                                        </p:tgtEl>
+                                      </p:cBhvr>
+                                    </p:animEffect>
+                                  </p:childTnLst>
+                                </p:cTn>
+                              </p:par>
+                            </p:childTnLst>
+                          </p:cTn>
+                        </p:par>
+                        <p:par>
+                          <p:cTn id="8" fill="hold">
+                            <p:stCondLst>
+                              <p:cond delay="500"/>
+                            </p:stCondLst>
+                            <p:childTnLst>
+                              <p:par>
+                                <p:cTn id="9" presetID="42" presetClass="entr" presetSubtype="0" fill="hold" grpId="0" nodeType="afterEffect">
+                                  <p:stCondLst>
+                                    <p:cond delay="200"/>
+                                  </p:stCondLst>
+                                  <p:childTnLst>
+                                    <p:set>
+                                      <p:cBhvr>
+                                        <p:cTn id="10" dur="1" fill="hold">
+                                          <p:stCondLst>
+                                            <p:cond delay="0"/>
+                                          </p:stCondLst>
+                                        </p:cTn>
+                                        <p:tgtEl>
+                                          <p:spTgt spid="3">
+                                            <p:txEl>
+                                              <p:pRg st="0" end="0"/>
+                                            </p:txEl>
+                                          </p:spTgt>
+                                        </p:tgtEl>
+                                        <p:attrNameLst>
+                                          <p:attrName>style.visibility</p:attrName>
+                                        </p:attrNameLst>
+                                      </p:cBhvr>
+                                      <p:to>
+                                        <p:strVal val="visible"/>
+                                      </p:to>
+                                    </p:set>
+                                    <p:animEffect transition="in" filter="fade">
+                                      <p:cBhvr>
+                                        <p:cTn id="11" dur="500"/>
+                                        <p:tgtEl>
+                                          <p:spTgt spid="3">
+                                            <p:txEl>
+                                              <p:pRg st="0" end="0"/>
+                                            </p:txEl>
+                                          </p:spTgt>
+                                        </p:tgtEl>
+                                      </p:cBhvr>
+                                    </p:animEffect>
+                                    <p:anim calcmode="lin" valueType="num">
+                                      <p:cBhvr>
+                                        <p:cTn id="12" dur="500" fill="hold"/>
+                                        <p:tgtEl>
+                                          <p:spTgt spid="3">
+                                            <p:txEl>
+                                              <p:pRg st="0" end="0"/>
+                                            </p:txEl>
+                                          </p:spTgt>
+                                        </p:tgtEl>
+                                        <p:attrNameLst>
+                                          <p:attrName>ppt_x</p:attrName>
+                                        </p:attrNameLst>
+                                      </p:cBhvr>
+                                      <p:tavLst>
+                                        <p:tav tm="0">
+                                          <p:val>
+                                            <p:strVal val="#ppt_x"/>
+                                          </p:val>
+                                        </p:tav>
+                                        <p:tav tm="100000">
+                                          <p:val>
+                                            <p:strVal val="#ppt_x"/>
+                                          </p:val>
+                                        </p:tav>
+                                      </p:tavLst>
+                                    </p:anim>
+                                    <p:anim calcmode="lin" valueType="num">
+                                      <p:cBhvr>
+                                        <p:cTn id="13" dur="500" fill="hold"/>
+                                        <p:tgtEl>
+                                          <p:spTgt spid="3">
+                                            <p:txEl>
+                                              <p:pRg st="0" end="0"/>
+                                            </p:txEl>
+                                          </p:spTgt>
+                                        </p:tgtEl>
+                                        <p:attrNameLst>
+                                          <p:attrName>ppt_y</p:attrName>
+                                        </p:attrNameLst>
+                                      </p:cBhvr>
+                                      <p:tavLst>
+                                        <p:tav tm="0">
+                                          <p:val>
+                                            <p:strVal val="#ppt_y+.1"/>
+                                          </p:val>
+                                        </p:tav>
+                                        <p:tav tm="100000">
+                                          <p:val>
+                                            <p:strVal val="#ppt_y"/>
+                                          </p:val>
+                                        </p:tav>
+                                      </p:tavLst>
+                                    </p:anim>
+                                  </p:childTnLst>
+                                </p:cTn>
+                              </p:par>
+                            </p:childTnLst>
+                          </p:cTn>
+                        </p:par>
+                        <p:par>
+                          <p:cTn id="14" fill="hold">
+                            <p:stCondLst>
+                              <p:cond delay="1200"/>
+                            </p:stCondLst>
+                            <p:childTnLst>
+                              <p:par>
+                                <p:cTn id="15" presetID="42" presetClass="entr" presetSubtype="0" fill="hold" grpId="0" nodeType="afterEffect">
+                                  <p:stCondLst>
+                                    <p:cond delay="0"/>
+                                  </p:stCondLst>
+                                  <p:childTnLst>
+                                    <p:set>
+                                      <p:cBhvr>
+                                        <p:cTn id="16" dur="1" fill="hold">
+                                          <p:stCondLst>
+                                            <p:cond delay="0"/>
+                                          </p:stCondLst>
+                                        </p:cTn>
+                                        <p:tgtEl>
+                                          <p:spTgt spid="3">
+                                            <p:txEl>
+                                              <p:pRg st="1" end="1"/>
+                                            </p:txEl>
+                                          </p:spTgt>
+                                        </p:tgtEl>
+                                        <p:attrNameLst>
+                                          <p:attrName>style.visibility</p:attrName>
+                                        </p:attrNameLst>
+                                      </p:cBhvr>
+                                      <p:to>
+                                        <p:strVal val="visible"/>
+                                      </p:to>
+                                    </p:set>
+                                    <p:animEffect transition="in" filter="fade">
+                                      <p:cBhvr>
+                                        <p:cTn id="17" dur="500"/>
+                                        <p:tgtEl>
+                                          <p:spTgt spid="3">
+                                            <p:txEl>
+                                              <p:pRg st="1" end="1"/>
+                                            </p:txEl>
+                                          </p:spTgt>
+                                        </p:tgtEl>
+                                      </p:cBhvr>
+                                    </p:animEffect>
+                                    <p:anim calcmode="lin" valueType="num">
+                                      <p:cBhvr>
+                                        <p:cTn id="18" dur="500" fill="hold"/>
+                                        <p:tgtEl>
+                                          <p:spTgt spid="3">
+                                            <p:txEl>
+                                              <p:pRg st="1" end="1"/>
+                                            </p:txEl>
+                                          </p:spTgt>
+                                        </p:tgtEl>
+                                        <p:attrNameLst>
+                                          <p:attrName>ppt_x</p:attrName>
+                                        </p:attrNameLst>
+                                      </p:cBhvr>
+                                      <p:tavLst>
+                                        <p:tav tm="0">
+                                          <p:val>
+                                            <p:strVal val="#ppt_x"/>
+                                          </p:val>
+                                        </p:tav>
+                                        <p:tav tm="100000">
+                                          <p:val>
+                                            <p:strVal val="#ppt_x"/>
+                                          </p:val>
+                                        </p:tav>
+                                      </p:tavLst>
+                                    </p:anim>
+                                    <p:anim calcmode="lin" valueType="num">
+                                      <p:cBhvr>
+                                        <p:cTn id="19" dur="500" fill="hold"/>
+                                        <p:tgtEl>
+                                          <p:spTgt spid="3">
+                                            <p:txEl>
+                                              <p:pRg st="1" end="1"/>
+                                            </p:txEl>
+                                          </p:spTgt>
+                                        </p:tgtEl>
+                                        <p:attrNameLst>
+                                          <p:attrName>ppt_y</p:attrName>
+                                        </p:attrNameLst>
+                                      </p:cBhvr>
+                                      <p:tavLst>
+                                        <p:tav tm="0">
+                                          <p:val>
+                                            <p:strVal val="#ppt_y+.1"/>
+                                          </p:val>
+                                        </p:tav>
+                                        <p:tav tm="100000">
+                                          <p:val>
+                                            <p:strVal val="#ppt_y"/>
+                                          </p:val>
+                                        </p:tav>
+                                      </p:tavLst>
+                                    </p:anim>
+                                  </p:childTnLst>
+                                </p:cTn>
+                              </p:par>
+                            </p:childTnLst>
+                          </p:cTn>
+                        </p:par>
+                        <p:par>
+                          <p:cTn id="20" fill="hold">
+                            <p:stCondLst>
+                              <p:cond delay="1700"/>
+                            </p:stCondLst>
+                            <p:childTnLst>
+                              <p:par>
+                                <p:cTn id="21" presetID="42" presetClass="entr" presetSubtype="0" fill="hold" grpId="0" nodeType="afterEffect">
+                                  <p:stCondLst>
+                                    <p:cond delay="200"/>
+                                  </p:stCondLst>
+                                  <p:childTnLst>
+                                    <p:set>
+                                      <p:cBhvr>
+                                        <p:cTn id="22" dur="1" fill="hold">
+                                          <p:stCondLst>
+                                            <p:cond delay="0"/>
+                                          </p:stCondLst>
+                                        </p:cTn>
+                                        <p:tgtEl>
+                                          <p:spTgt spid="3">
+                                            <p:txEl>
+                                              <p:pRg st="2" end="2"/>
+                                            </p:txEl>
+                                          </p:spTgt>
+                                        </p:tgtEl>
+                                        <p:attrNameLst>
+                                          <p:attrName>style.visibility</p:attrName>
+                                        </p:attrNameLst>
+                                      </p:cBhvr>
+                                      <p:to>
+                                        <p:strVal val="visible"/>
+                                      </p:to>
+                                    </p:set>
+                                    <p:animEffect transition="in" filter="fade">
+                                      <p:cBhvr>
+                                        <p:cTn id="23" dur="500"/>
+                                        <p:tgtEl>
+                                          <p:spTgt spid="3">
+                                            <p:txEl>
+                                              <p:pRg st="2" end="2"/>
+                                            </p:txEl>
+                                          </p:spTgt>
+                                        </p:tgtEl>
+                                      </p:cBhvr>
+                                    </p:animEffect>
+                                    <p:anim calcmode="lin" valueType="num">
+                                      <p:cBhvr>
+                                        <p:cTn id="24" dur="500" fill="hold"/>
+                                        <p:tgtEl>
+                                          <p:spTgt spid="3">
+                                            <p:txEl>
+                                              <p:pRg st="2" end="2"/>
+                                            </p:txEl>
+                                          </p:spTgt>
+                                        </p:tgtEl>
+                                        <p:attrNameLst>
+                                          <p:attrName>ppt_x</p:attrName>
+                                        </p:attrNameLst>
+                                      </p:cBhvr>
+                                      <p:tavLst>
+                                        <p:tav tm="0">
+                                          <p:val>
+                                            <p:strVal val="#ppt_x"/>
+                                          </p:val>
+                                        </p:tav>
+                                        <p:tav tm="100000">
+                                          <p:val>
+                                            <p:strVal val="#ppt_x"/>
+                                          </p:val>
+                                        </p:tav>
+                                      </p:tavLst>
+                                    </p:anim>
+                                    <p:anim calcmode="lin" valueType="num">
+                                      <p:cBhvr>
+                                        <p:cTn id="25" dur="500" fill="hold"/>
+                                        <p:tgtEl>
+                                          <p:spTgt spid="3">
+                                            <p:txEl>
+                                              <p:pRg st="2" end="2"/>
+                                            </p:txEl>
+                                          </p:spTgt>
+                                        </p:tgtEl>
+                                        <p:attrNameLst>
+                                          <p:attrName>ppt_y</p:attrName>
+                                        </p:attrNameLst>
+                                      </p:cBhvr>
+                                      <p:tavLst>
+                                        <p:tav tm="0">
+                                          <p:val>
+                                            <p:strVal val="#ppt_y+.1"/>
+                                          </p:val>
+                                        </p:tav>
+                                        <p:tav tm="100000">
+                                          <p:val>
+                                            <p:strVal val="#ppt_y"/>
+                                          </p:val>
+                                        </p:tav>
+                                      </p:tavLst>
+                                    </p:anim>
+                                  </p:childTnLst>
+                                </p:cTn>
+                              </p:par>
+                            </p:childTnLst>
+                          </p:cTn>
+                        </p:par>
+                        <p:par>
+                          <p:cTn id="26" fill="hold">
+                            <p:stCondLst>
+                              <p:cond delay="2400"/>
+                            </p:stCondLst>
+                            <p:childTnLst>
+                              <p:par>
+                                <p:cTn id="27" presetID="42" presetClass="entr" presetSubtype="0" fill="hold" grpId="0" nodeType="afterEffect">
+                                  <p:stCondLst>
+                                    <p:cond delay="0"/>
+                                  </p:stCondLst>
+                                  <p:childTnLst>
+                                    <p:set>
+                                      <p:cBhvr>
+                                        <p:cTn id="28" dur="1" fill="hold">
+                                          <p:stCondLst>
+                                            <p:cond delay="0"/>
+                                          </p:stCondLst>
+                                        </p:cTn>
+                                        <p:tgtEl>
+                                          <p:spTgt spid="3">
+                                            <p:txEl>
+                                              <p:pRg st="3" end="3"/>
+                                            </p:txEl>
+                                          </p:spTgt>
+                                        </p:tgtEl>
+                                        <p:attrNameLst>
+                                          <p:attrName>style.visibility</p:attrName>
+                                        </p:attrNameLst>
+                                      </p:cBhvr>
+                                      <p:to>
+                                        <p:strVal val="visible"/>
+                                      </p:to>
+                                    </p:set>
+                                    <p:animEffect transition="in" filter="fade">
+                                      <p:cBhvr>
+                                        <p:cTn id="29" dur="500"/>
+                                        <p:tgtEl>
+                                          <p:spTgt spid="3">
+                                            <p:txEl>
+                                              <p:pRg st="3" end="3"/>
+                                            </p:txEl>
+                                          </p:spTgt>
+                                        </p:tgtEl>
+                                      </p:cBhvr>
+                                    </p:animEffect>
+                                    <p:anim calcmode="lin" valueType="num">
+                                      <p:cBhvr>
+                                        <p:cTn id="30" dur="500" fill="hold"/>
+                                        <p:tgtEl>
+                                          <p:spTgt spid="3">
+                                            <p:txEl>
+                                              <p:pRg st="3" end="3"/>
+                                            </p:txEl>
+                                          </p:spTgt>
+                                        </p:tgtEl>
+                                        <p:attrNameLst>
+                                          <p:attrName>ppt_x</p:attrName>
+                                        </p:attrNameLst>
+                                      </p:cBhvr>
+                                      <p:tavLst>
+                                        <p:tav tm="0">
+                                          <p:val>
+                                            <p:strVal val="#ppt_x"/>
+                                          </p:val>
+                                        </p:tav>
+                                        <p:tav tm="100000">
+                                          <p:val>
+                                            <p:strVal val="#ppt_x"/>
+                                          </p:val>
+                                        </p:tav>
+                                      </p:tavLst>
+                                    </p:anim>
+                                    <p:anim calcmode="lin" valueType="num">
+                                      <p:cBhvr>
+                                        <p:cTn id="31" dur="500" fill="hold"/>
+                                        <p:tgtEl>
+                                          <p:spTgt spid="3">
+                                            <p:txEl>
+                                              <p:pRg st="3" end="3"/>
+                                            </p:txEl>
+                                          </p:spTgt>
+                                        </p:tgtEl>
+                                        <p:attrNameLst>
+                                          <p:attrName>ppt_y</p:attrName>
+                                        </p:attrNameLst>
+                                      </p:cBhvr>
+                                      <p:tavLst>
+                                        <p:tav tm="0">
+                                          <p:val>
+                                            <p:strVal val="#ppt_y+.1"/>
+                                          </p:val>
+                                        </p:tav>
+                                        <p:tav tm="100000">
+                                          <p:val>
+                                            <p:strVal val="#ppt_y"/>
+                                          </p:val>
+                                        </p:tav>
+                                      </p:tavLst>
+                                    </p:anim>
+                                  </p:childTnLst>
+                                </p:cTn>
+                              </p:par>
+                            </p:childTnLst>
+                          </p:cTn>
+                        </p:par>
+                        <p:par>
+                          <p:cTn id="32" fill="hold">
+                            <p:stCondLst>
+                              <p:cond delay="2900"/>
+                            </p:stCondLst>
+                            <p:childTnLst>
+                              <p:par>
+                                <p:cTn id="33" presetID="42" presetClass="entr" presetSubtype="0" fill="hold" grpId="0" nodeType="afterEffect">
+                                  <p:stCondLst>
+                                    <p:cond delay="0"/>
+                                  </p:stCondLst>
+                                  <p:childTnLst>
+                                    <p:set>
+                                      <p:cBhvr>
+                                        <p:cTn id="34" dur="1" fill="hold">
+                                          <p:stCondLst>
+                                            <p:cond delay="0"/>
+                                          </p:stCondLst>
+                                        </p:cTn>
+                                        <p:tgtEl>
+                                          <p:spTgt spid="3">
+                                            <p:txEl>
+                                              <p:pRg st="4" end="4"/>
+                                            </p:txEl>
+                                          </p:spTgt>
+                                        </p:tgtEl>
+                                        <p:attrNameLst>
+                                          <p:attrName>style.visibility</p:attrName>
+                                        </p:attrNameLst>
+                                      </p:cBhvr>
+                                      <p:to>
+                                        <p:strVal val="visible"/>
+                                      </p:to>
+                                    </p:set>
+                                    <p:animEffect transition="in" filter="fade">
+                                      <p:cBhvr>
+                                        <p:cTn id="35" dur="500"/>
+                                        <p:tgtEl>
+                                          <p:spTgt spid="3">
+                                            <p:txEl>
+                                              <p:pRg st="4" end="4"/>
+                                            </p:txEl>
+                                          </p:spTgt>
+                                        </p:tgtEl>
+                                      </p:cBhvr>
+                                    </p:animEffect>
+                                    <p:anim calcmode="lin" valueType="num">
+                                      <p:cBhvr>
+                                        <p:cTn id="36" dur="500" fill="hold"/>
+                                        <p:tgtEl>
+                                          <p:spTgt spid="3">
+                                            <p:txEl>
+                                              <p:pRg st="4" end="4"/>
+                                            </p:txEl>
+                                          </p:spTgt>
+                                        </p:tgtEl>
+                                        <p:attrNameLst>
+                                          <p:attrName>ppt_x</p:attrName>
+                                        </p:attrNameLst>
+                                      </p:cBhvr>
+                                      <p:tavLst>
+                                        <p:tav tm="0">
+                                          <p:val>
+                                            <p:strVal val="#ppt_x"/>
+                                          </p:val>
+                                        </p:tav>
+                                        <p:tav tm="100000">
+                                          <p:val>
+                                            <p:strVal val="#ppt_x"/>
+                                          </p:val>
+                                        </p:tav>
+                                      </p:tavLst>
+                                    </p:anim>
+                                    <p:anim calcmode="lin" valueType="num">
+                                      <p:cBhvr>
+                                        <p:cTn id="37" dur="500" fill="hold"/>
+                                        <p:tgtEl>
+                                          <p:spTgt spid="3">
+                                            <p:txEl>
+                                              <p:pRg st="4" end="4"/>
+                                            </p:txEl>
+                                          </p:spTgt>
+                                        </p:tgtEl>
+                                        <p:attrNameLst>
+                                          <p:attrName>ppt_y</p:attrName>
+                                        </p:attrNameLst>
+                                      </p:cBhvr>
+                                      <p:tavLst>
+                                        <p:tav tm="0">
+                                          <p:val>
+                                            <p:strVal val="#ppt_y+.1"/>
+                                          </p:val>
+                                        </p:tav>
+                                        <p:tav tm="100000">
+                                          <p:val>
+                                            <p:strVal val="#ppt_y"/>
+                                          </p:val>
+                                        </p:tav>
+                                      </p:tavLst>
+                                    </p:anim>
+                                  </p:childTnLst>
+                                </p:cTn>
+                              </p:par>
+                            </p:childTnLst>
+                          </p:cTn>
+                        </p:par>
+                        <p:par>
+                          <p:cTn id="38" fill="hold">
+                            <p:stCondLst>
+                              <p:cond delay="3400"/>
+                            </p:stCondLst>
+                            <p:childTnLst>
+                              <p:par>
+                                <p:cTn id="39" presetID="42" presetClass="entr" presetSubtype="0" fill="hold" grpId="0" nodeType="afterEffect">
+                                  <p:stCondLst>
+                                    <p:cond delay="200"/>
+                                  </p:stCondLst>
+                                  <p:childTnLst>
+                                    <p:set>
+                                      <p:cBhvr>
+                                        <p:cTn id="40" dur="1" fill="hold">
+                                          <p:stCondLst>
+                                            <p:cond delay="0"/>
+                                          </p:stCondLst>
+                                        </p:cTn>
+                                        <p:tgtEl>
+                                          <p:spTgt spid="3">
+                                            <p:txEl>
+                                              <p:pRg st="5" end="5"/>
+                                            </p:txEl>
+                                          </p:spTgt>
+                                        </p:tgtEl>
+                                        <p:attrNameLst>
+                                          <p:attrName>style.visibility</p:attrName>
+                                        </p:attrNameLst>
+                                      </p:cBhvr>
+                                      <p:to>
+                                        <p:strVal val="visible"/>
+                                      </p:to>
+                                    </p:set>
+                                    <p:animEffect transition="in" filter="fade">
+                                      <p:cBhvr>
+                                        <p:cTn id="41" dur="500"/>
+                                        <p:tgtEl>
+                                          <p:spTgt spid="3">
+                                            <p:txEl>
+                                              <p:pRg st="5" end="5"/>
+                                            </p:txEl>
+                                          </p:spTgt>
+                                        </p:tgtEl>
+                                      </p:cBhvr>
+                                    </p:animEffect>
+                                    <p:anim calcmode="lin" valueType="num">
+                                      <p:cBhvr>
+                                        <p:cTn id="42" dur="500" fill="hold"/>
+                                        <p:tgtEl>
+                                          <p:spTgt spid="3">
+                                            <p:txEl>
+                                              <p:pRg st="5" end="5"/>
+                                            </p:txEl>
+                                          </p:spTgt>
+                                        </p:tgtEl>
+                                        <p:attrNameLst>
+                                          <p:attrName>ppt_x</p:attrName>
+                                        </p:attrNameLst>
+                                      </p:cBhvr>
+                                      <p:tavLst>
+                                        <p:tav tm="0">
+                                          <p:val>
+                                            <p:strVal val="#ppt_x"/>
+                                          </p:val>
+                                        </p:tav>
+                                        <p:tav tm="100000">
+                                          <p:val>
+                                            <p:strVal val="#ppt_x"/>
+                                          </p:val>
+                                        </p:tav>
+                                      </p:tavLst>
+                                    </p:anim>
+                                    <p:anim calcmode="lin" valueType="num">
+                                      <p:cBhvr>
+                                        <p:cTn id="43" dur="500" fill="hold"/>
+                                        <p:tgtEl>
+                                          <p:spTgt spid="3">
+                                            <p:txEl>
+                                              <p:pRg st="5" end="5"/>
+                                            </p:txEl>
+                                          </p:spTgt>
+                                        </p:tgtEl>
+                                        <p:attrNameLst>
+                                          <p:attrName>ppt_y</p:attrName>
+                                        </p:attrNameLst>
+                                      </p:cBhvr>
+                                      <p:tavLst>
+                                        <p:tav tm="0">
+                                          <p:val>
+                                            <p:strVal val="#ppt_y+.1"/>
+                                          </p:val>
+                                        </p:tav>
+                                        <p:tav tm="100000">
+                                          <p:val>
+                                            <p:strVal val="#ppt_y"/>
+                                          </p:val>
+                                        </p:tav>
+                                      </p:tavLst>
+                                    </p:anim>
+                                  </p:childTnLst>
+                                </p:cTn>
+                              </p:par>
+                            </p:childTnLst>
+                          </p:cTn>
+                        </p:par>
+                        <p:par>
+                          <p:cTn id="44" fill="hold">
+                            <p:stCondLst>
+                              <p:cond delay="4100"/>
+                            </p:stCondLst>
+                            <p:childTnLst>
+                              <p:par>
+                                <p:cTn id="45" presetID="42" presetClass="entr" presetSubtype="0" fill="hold" grpId="0" nodeType="afterEffect">
+                                  <p:stCondLst>
+                                    <p:cond delay="0"/>
+                                  </p:stCondLst>
+                                  <p:childTnLst>
+                                    <p:set>
+                                      <p:cBhvr>
+                                        <p:cTn id="46" dur="1" fill="hold">
+                                          <p:stCondLst>
+                                            <p:cond delay="0"/>
+                                          </p:stCondLst>
+                                        </p:cTn>
+                                        <p:tgtEl>
+                                          <p:spTgt spid="3">
+                                            <p:txEl>
+                                              <p:pRg st="6" end="6"/>
+                                            </p:txEl>
+                                          </p:spTgt>
+                                        </p:tgtEl>
+                                        <p:attrNameLst>
+                                          <p:attrName>style.visibility</p:attrName>
+                                        </p:attrNameLst>
+                                      </p:cBhvr>
+                                      <p:to>
+                                        <p:strVal val="visible"/>
+                                      </p:to>
+                                    </p:set>
+                                    <p:animEffect transition="in" filter="fade">
+                                      <p:cBhvr>
+                                        <p:cTn id="47" dur="500"/>
+                                        <p:tgtEl>
+                                          <p:spTgt spid="3">
+                                            <p:txEl>
+                                              <p:pRg st="6" end="6"/>
+                                            </p:txEl>
+                                          </p:spTgt>
+                                        </p:tgtEl>
+                                      </p:cBhvr>
+                                    </p:animEffect>
+                                    <p:anim calcmode="lin" valueType="num">
+                                      <p:cBhvr>
+                                        <p:cTn id="48" dur="500" fill="hold"/>
+                                        <p:tgtEl>
+                                          <p:spTgt spid="3">
+                                            <p:txEl>
+                                              <p:pRg st="6" end="6"/>
+                                            </p:txEl>
+                                          </p:spTgt>
+                                        </p:tgtEl>
+                                        <p:attrNameLst>
+                                          <p:attrName>ppt_x</p:attrName>
+                                        </p:attrNameLst>
+                                      </p:cBhvr>
+                                      <p:tavLst>
+                                        <p:tav tm="0">
+                                          <p:val>
+                                            <p:strVal val="#ppt_x"/>
+                                          </p:val>
+                                        </p:tav>
+                                        <p:tav tm="100000">
+                                          <p:val>
+                                            <p:strVal val="#ppt_x"/>
+                                          </p:val>
+                                        </p:tav>
+                                      </p:tavLst>
+                                    </p:anim>
+                                    <p:anim calcmode="lin" valueType="num">
+                                      <p:cBhvr>
+                                        <p:cTn id="49" dur="500" fill="hold"/>
+                                        <p:tgtEl>
+                                          <p:spTgt spid="3">
+                                            <p:txEl>
+                                              <p:pRg st="6" end="6"/>
+                                            </p:txEl>
+                                          </p:spTgt>
+                                        </p:tgtEl>
+                                        <p:attrNameLst>
+                                          <p:attrName>ppt_y</p:attrName>
+                                        </p:attrNameLst>
+                                      </p:cBhvr>
+                                      <p:tavLst>
+                                        <p:tav tm="0">
+                                          <p:val>
+                                            <p:strVal val="#ppt_y+.1"/>
+                                          </p:val>
+                                        </p:tav>
+                                        <p:tav tm="100000">
+                                          <p:val>
+                                            <p:strVal val="#ppt_y"/>
+                                          </p:val>
+                                        </p:tav>
+                                      </p:tavLst>
+                                    </p:anim>
+                                  </p:childTnLst>
+                                </p:cTn>
+                              </p:par>
+                            </p:childTnLst>
+                          </p:cTn>
+                        </p:par>
+                      </p:childTnLst>
+                    </p:cTn>
+                  </p:par>
+                </p:childTnLst>
+              </p:cTn>
+              <p:prevCondLst>
+                <p:cond evt="onPrev" delay="0">
+                  <p:tgtEl>
+                    <p:sldTgt/>
+                  </p:tgtEl>
+                </p:cond>
+              </p:prevCondLst>
+              <p:nextCondLst>
+                <p:cond evt="onNext" delay="0">
+                  <p:tgtEl>
+                    <p:sldTgt/>
+                  </p:tgtEl>
+                </p:cond>
+              </p:nextCondLst>
+            </p:seq>
+          </p:childTnLst>
+        </p:cTn>
+      </p:par>
+    </p:tnLst>
+    <p:bldLst>
+      <p:bldP spid="2" grpId="0"/>
+      <p:bldP spid="3" grpId="0" uiExpand="1" build="p"/>
+    </p:bldLst>
+  </p:timing>
 </p:sld>
 </file>
 
@@ -5991,6 +9306,865 @@
   <p:clrMapOvr>
     <a:masterClrMapping/>
   </p:clrMapOvr>
+  <p:transition spd="slow">
+    <p:push dir="u"/>
+  </p:transition>
+  <p:timing>
+    <p:tnLst>
+      <p:par>
+        <p:cTn id="1" dur="indefinite" restart="never" nodeType="tmRoot">
+          <p:childTnLst>
+            <p:seq concurrent="1" nextAc="seek">
+              <p:cTn id="2" dur="indefinite" nodeType="mainSeq">
+                <p:childTnLst>
+                  <p:par>
+                    <p:cTn id="3" fill="hold">
+                      <p:stCondLst>
+                        <p:cond delay="indefinite"/>
+                        <p:cond evt="onBegin" delay="0">
+                          <p:tn val="2"/>
+                        </p:cond>
+                      </p:stCondLst>
+                      <p:childTnLst>
+                        <p:par>
+                          <p:cTn id="4" fill="hold">
+                            <p:stCondLst>
+                              <p:cond delay="0"/>
+                            </p:stCondLst>
+                            <p:childTnLst>
+                              <p:par>
+                                <p:cTn id="5" presetID="10" presetClass="entr" presetSubtype="0" fill="hold" grpId="0" nodeType="afterEffect">
+                                  <p:stCondLst>
+                                    <p:cond delay="0"/>
+                                  </p:stCondLst>
+                                  <p:childTnLst>
+                                    <p:set>
+                                      <p:cBhvr>
+                                        <p:cTn id="6" dur="1" fill="hold">
+                                          <p:stCondLst>
+                                            <p:cond delay="0"/>
+                                          </p:stCondLst>
+                                        </p:cTn>
+                                        <p:tgtEl>
+                                          <p:spTgt spid="2"/>
+                                        </p:tgtEl>
+                                        <p:attrNameLst>
+                                          <p:attrName>style.visibility</p:attrName>
+                                        </p:attrNameLst>
+                                      </p:cBhvr>
+                                      <p:to>
+                                        <p:strVal val="visible"/>
+                                      </p:to>
+                                    </p:set>
+                                    <p:animEffect transition="in" filter="fade">
+                                      <p:cBhvr>
+                                        <p:cTn id="7" dur="500"/>
+                                        <p:tgtEl>
+                                          <p:spTgt spid="2"/>
+                                        </p:tgtEl>
+                                      </p:cBhvr>
+                                    </p:animEffect>
+                                  </p:childTnLst>
+                                </p:cTn>
+                              </p:par>
+                            </p:childTnLst>
+                          </p:cTn>
+                        </p:par>
+                        <p:par>
+                          <p:cTn id="8" fill="hold">
+                            <p:stCondLst>
+                              <p:cond delay="500"/>
+                            </p:stCondLst>
+                            <p:childTnLst>
+                              <p:par>
+                                <p:cTn id="9" presetID="42" presetClass="entr" presetSubtype="0" fill="hold" nodeType="afterEffect">
+                                  <p:stCondLst>
+                                    <p:cond delay="0"/>
+                                  </p:stCondLst>
+                                  <p:childTnLst>
+                                    <p:set>
+                                      <p:cBhvr>
+                                        <p:cTn id="10" dur="1" fill="hold">
+                                          <p:stCondLst>
+                                            <p:cond delay="0"/>
+                                          </p:stCondLst>
+                                        </p:cTn>
+                                        <p:tgtEl>
+                                          <p:spTgt spid="9"/>
+                                        </p:tgtEl>
+                                        <p:attrNameLst>
+                                          <p:attrName>style.visibility</p:attrName>
+                                        </p:attrNameLst>
+                                      </p:cBhvr>
+                                      <p:to>
+                                        <p:strVal val="visible"/>
+                                      </p:to>
+                                    </p:set>
+                                    <p:animEffect transition="in" filter="fade">
+                                      <p:cBhvr>
+                                        <p:cTn id="11" dur="500"/>
+                                        <p:tgtEl>
+                                          <p:spTgt spid="9"/>
+                                        </p:tgtEl>
+                                      </p:cBhvr>
+                                    </p:animEffect>
+                                    <p:anim calcmode="lin" valueType="num">
+                                      <p:cBhvr>
+                                        <p:cTn id="12" dur="500" fill="hold"/>
+                                        <p:tgtEl>
+                                          <p:spTgt spid="9"/>
+                                        </p:tgtEl>
+                                        <p:attrNameLst>
+                                          <p:attrName>ppt_x</p:attrName>
+                                        </p:attrNameLst>
+                                      </p:cBhvr>
+                                      <p:tavLst>
+                                        <p:tav tm="0">
+                                          <p:val>
+                                            <p:strVal val="#ppt_x"/>
+                                          </p:val>
+                                        </p:tav>
+                                        <p:tav tm="100000">
+                                          <p:val>
+                                            <p:strVal val="#ppt_x"/>
+                                          </p:val>
+                                        </p:tav>
+                                      </p:tavLst>
+                                    </p:anim>
+                                    <p:anim calcmode="lin" valueType="num">
+                                      <p:cBhvr>
+                                        <p:cTn id="13" dur="500" fill="hold"/>
+                                        <p:tgtEl>
+                                          <p:spTgt spid="9"/>
+                                        </p:tgtEl>
+                                        <p:attrNameLst>
+                                          <p:attrName>ppt_y</p:attrName>
+                                        </p:attrNameLst>
+                                      </p:cBhvr>
+                                      <p:tavLst>
+                                        <p:tav tm="0">
+                                          <p:val>
+                                            <p:strVal val="#ppt_y+.1"/>
+                                          </p:val>
+                                        </p:tav>
+                                        <p:tav tm="100000">
+                                          <p:val>
+                                            <p:strVal val="#ppt_y"/>
+                                          </p:val>
+                                        </p:tav>
+                                      </p:tavLst>
+                                    </p:anim>
+                                  </p:childTnLst>
+                                </p:cTn>
+                              </p:par>
+                              <p:par>
+                                <p:cTn id="14" presetID="2" presetClass="entr" presetSubtype="2" fill="hold" nodeType="withEffect">
+                                  <p:stCondLst>
+                                    <p:cond delay="0"/>
+                                  </p:stCondLst>
+                                  <p:childTnLst>
+                                    <p:set>
+                                      <p:cBhvr>
+                                        <p:cTn id="15" dur="1" fill="hold">
+                                          <p:stCondLst>
+                                            <p:cond delay="0"/>
+                                          </p:stCondLst>
+                                        </p:cTn>
+                                        <p:tgtEl>
+                                          <p:spTgt spid="7"/>
+                                        </p:tgtEl>
+                                        <p:attrNameLst>
+                                          <p:attrName>style.visibility</p:attrName>
+                                        </p:attrNameLst>
+                                      </p:cBhvr>
+                                      <p:to>
+                                        <p:strVal val="visible"/>
+                                      </p:to>
+                                    </p:set>
+                                    <p:anim calcmode="lin" valueType="num">
+                                      <p:cBhvr additive="base">
+                                        <p:cTn id="16" dur="500" fill="hold"/>
+                                        <p:tgtEl>
+                                          <p:spTgt spid="7"/>
+                                        </p:tgtEl>
+                                        <p:attrNameLst>
+                                          <p:attrName>ppt_x</p:attrName>
+                                        </p:attrNameLst>
+                                      </p:cBhvr>
+                                      <p:tavLst>
+                                        <p:tav tm="0">
+                                          <p:val>
+                                            <p:strVal val="1+#ppt_w/2"/>
+                                          </p:val>
+                                        </p:tav>
+                                        <p:tav tm="100000">
+                                          <p:val>
+                                            <p:strVal val="#ppt_x"/>
+                                          </p:val>
+                                        </p:tav>
+                                      </p:tavLst>
+                                    </p:anim>
+                                    <p:anim calcmode="lin" valueType="num">
+                                      <p:cBhvr additive="base">
+                                        <p:cTn id="17" dur="500" fill="hold"/>
+                                        <p:tgtEl>
+                                          <p:spTgt spid="7"/>
+                                        </p:tgtEl>
+                                        <p:attrNameLst>
+                                          <p:attrName>ppt_y</p:attrName>
+                                        </p:attrNameLst>
+                                      </p:cBhvr>
+                                      <p:tavLst>
+                                        <p:tav tm="0">
+                                          <p:val>
+                                            <p:strVal val="#ppt_y"/>
+                                          </p:val>
+                                        </p:tav>
+                                        <p:tav tm="100000">
+                                          <p:val>
+                                            <p:strVal val="#ppt_y"/>
+                                          </p:val>
+                                        </p:tav>
+                                      </p:tavLst>
+                                    </p:anim>
+                                  </p:childTnLst>
+                                </p:cTn>
+                              </p:par>
+                              <p:par>
+                                <p:cTn id="18" presetID="2" presetClass="entr" presetSubtype="2" fill="hold" nodeType="withEffect">
+                                  <p:stCondLst>
+                                    <p:cond delay="0"/>
+                                  </p:stCondLst>
+                                  <p:childTnLst>
+                                    <p:set>
+                                      <p:cBhvr>
+                                        <p:cTn id="19" dur="1" fill="hold">
+                                          <p:stCondLst>
+                                            <p:cond delay="0"/>
+                                          </p:stCondLst>
+                                        </p:cTn>
+                                        <p:tgtEl>
+                                          <p:spTgt spid="2050"/>
+                                        </p:tgtEl>
+                                        <p:attrNameLst>
+                                          <p:attrName>style.visibility</p:attrName>
+                                        </p:attrNameLst>
+                                      </p:cBhvr>
+                                      <p:to>
+                                        <p:strVal val="visible"/>
+                                      </p:to>
+                                    </p:set>
+                                    <p:anim calcmode="lin" valueType="num">
+                                      <p:cBhvr additive="base">
+                                        <p:cTn id="20" dur="500" fill="hold"/>
+                                        <p:tgtEl>
+                                          <p:spTgt spid="2050"/>
+                                        </p:tgtEl>
+                                        <p:attrNameLst>
+                                          <p:attrName>ppt_x</p:attrName>
+                                        </p:attrNameLst>
+                                      </p:cBhvr>
+                                      <p:tavLst>
+                                        <p:tav tm="0">
+                                          <p:val>
+                                            <p:strVal val="1+#ppt_w/2"/>
+                                          </p:val>
+                                        </p:tav>
+                                        <p:tav tm="100000">
+                                          <p:val>
+                                            <p:strVal val="#ppt_x"/>
+                                          </p:val>
+                                        </p:tav>
+                                      </p:tavLst>
+                                    </p:anim>
+                                    <p:anim calcmode="lin" valueType="num">
+                                      <p:cBhvr additive="base">
+                                        <p:cTn id="21" dur="500" fill="hold"/>
+                                        <p:tgtEl>
+                                          <p:spTgt spid="2050"/>
+                                        </p:tgtEl>
+                                        <p:attrNameLst>
+                                          <p:attrName>ppt_y</p:attrName>
+                                        </p:attrNameLst>
+                                      </p:cBhvr>
+                                      <p:tavLst>
+                                        <p:tav tm="0">
+                                          <p:val>
+                                            <p:strVal val="#ppt_y"/>
+                                          </p:val>
+                                        </p:tav>
+                                        <p:tav tm="100000">
+                                          <p:val>
+                                            <p:strVal val="#ppt_y"/>
+                                          </p:val>
+                                        </p:tav>
+                                      </p:tavLst>
+                                    </p:anim>
+                                  </p:childTnLst>
+                                </p:cTn>
+                              </p:par>
+                            </p:childTnLst>
+                          </p:cTn>
+                        </p:par>
+                        <p:par>
+                          <p:cTn id="22" fill="hold">
+                            <p:stCondLst>
+                              <p:cond delay="1000"/>
+                            </p:stCondLst>
+                            <p:childTnLst>
+                              <p:par>
+                                <p:cTn id="23" presetID="42" presetClass="entr" presetSubtype="0" fill="hold" grpId="0" nodeType="afterEffect">
+                                  <p:stCondLst>
+                                    <p:cond delay="200"/>
+                                  </p:stCondLst>
+                                  <p:childTnLst>
+                                    <p:set>
+                                      <p:cBhvr>
+                                        <p:cTn id="24" dur="1" fill="hold">
+                                          <p:stCondLst>
+                                            <p:cond delay="0"/>
+                                          </p:stCondLst>
+                                        </p:cTn>
+                                        <p:tgtEl>
+                                          <p:spTgt spid="3">
+                                            <p:txEl>
+                                              <p:pRg st="0" end="0"/>
+                                            </p:txEl>
+                                          </p:spTgt>
+                                        </p:tgtEl>
+                                        <p:attrNameLst>
+                                          <p:attrName>style.visibility</p:attrName>
+                                        </p:attrNameLst>
+                                      </p:cBhvr>
+                                      <p:to>
+                                        <p:strVal val="visible"/>
+                                      </p:to>
+                                    </p:set>
+                                    <p:animEffect transition="in" filter="fade">
+                                      <p:cBhvr>
+                                        <p:cTn id="25" dur="500"/>
+                                        <p:tgtEl>
+                                          <p:spTgt spid="3">
+                                            <p:txEl>
+                                              <p:pRg st="0" end="0"/>
+                                            </p:txEl>
+                                          </p:spTgt>
+                                        </p:tgtEl>
+                                      </p:cBhvr>
+                                    </p:animEffect>
+                                    <p:anim calcmode="lin" valueType="num">
+                                      <p:cBhvr>
+                                        <p:cTn id="26" dur="500" fill="hold"/>
+                                        <p:tgtEl>
+                                          <p:spTgt spid="3">
+                                            <p:txEl>
+                                              <p:pRg st="0" end="0"/>
+                                            </p:txEl>
+                                          </p:spTgt>
+                                        </p:tgtEl>
+                                        <p:attrNameLst>
+                                          <p:attrName>ppt_x</p:attrName>
+                                        </p:attrNameLst>
+                                      </p:cBhvr>
+                                      <p:tavLst>
+                                        <p:tav tm="0">
+                                          <p:val>
+                                            <p:strVal val="#ppt_x"/>
+                                          </p:val>
+                                        </p:tav>
+                                        <p:tav tm="100000">
+                                          <p:val>
+                                            <p:strVal val="#ppt_x"/>
+                                          </p:val>
+                                        </p:tav>
+                                      </p:tavLst>
+                                    </p:anim>
+                                    <p:anim calcmode="lin" valueType="num">
+                                      <p:cBhvr>
+                                        <p:cTn id="27" dur="500" fill="hold"/>
+                                        <p:tgtEl>
+                                          <p:spTgt spid="3">
+                                            <p:txEl>
+                                              <p:pRg st="0" end="0"/>
+                                            </p:txEl>
+                                          </p:spTgt>
+                                        </p:tgtEl>
+                                        <p:attrNameLst>
+                                          <p:attrName>ppt_y</p:attrName>
+                                        </p:attrNameLst>
+                                      </p:cBhvr>
+                                      <p:tavLst>
+                                        <p:tav tm="0">
+                                          <p:val>
+                                            <p:strVal val="#ppt_y+.1"/>
+                                          </p:val>
+                                        </p:tav>
+                                        <p:tav tm="100000">
+                                          <p:val>
+                                            <p:strVal val="#ppt_y"/>
+                                          </p:val>
+                                        </p:tav>
+                                      </p:tavLst>
+                                    </p:anim>
+                                  </p:childTnLst>
+                                </p:cTn>
+                              </p:par>
+                            </p:childTnLst>
+                          </p:cTn>
+                        </p:par>
+                        <p:par>
+                          <p:cTn id="28" fill="hold">
+                            <p:stCondLst>
+                              <p:cond delay="1700"/>
+                            </p:stCondLst>
+                            <p:childTnLst>
+                              <p:par>
+                                <p:cTn id="29" presetID="42" presetClass="entr" presetSubtype="0" fill="hold" grpId="0" nodeType="afterEffect">
+                                  <p:stCondLst>
+                                    <p:cond delay="200"/>
+                                  </p:stCondLst>
+                                  <p:childTnLst>
+                                    <p:set>
+                                      <p:cBhvr>
+                                        <p:cTn id="30" dur="1" fill="hold">
+                                          <p:stCondLst>
+                                            <p:cond delay="0"/>
+                                          </p:stCondLst>
+                                        </p:cTn>
+                                        <p:tgtEl>
+                                          <p:spTgt spid="3">
+                                            <p:txEl>
+                                              <p:pRg st="1" end="1"/>
+                                            </p:txEl>
+                                          </p:spTgt>
+                                        </p:tgtEl>
+                                        <p:attrNameLst>
+                                          <p:attrName>style.visibility</p:attrName>
+                                        </p:attrNameLst>
+                                      </p:cBhvr>
+                                      <p:to>
+                                        <p:strVal val="visible"/>
+                                      </p:to>
+                                    </p:set>
+                                    <p:animEffect transition="in" filter="fade">
+                                      <p:cBhvr>
+                                        <p:cTn id="31" dur="500"/>
+                                        <p:tgtEl>
+                                          <p:spTgt spid="3">
+                                            <p:txEl>
+                                              <p:pRg st="1" end="1"/>
+                                            </p:txEl>
+                                          </p:spTgt>
+                                        </p:tgtEl>
+                                      </p:cBhvr>
+                                    </p:animEffect>
+                                    <p:anim calcmode="lin" valueType="num">
+                                      <p:cBhvr>
+                                        <p:cTn id="32" dur="500" fill="hold"/>
+                                        <p:tgtEl>
+                                          <p:spTgt spid="3">
+                                            <p:txEl>
+                                              <p:pRg st="1" end="1"/>
+                                            </p:txEl>
+                                          </p:spTgt>
+                                        </p:tgtEl>
+                                        <p:attrNameLst>
+                                          <p:attrName>ppt_x</p:attrName>
+                                        </p:attrNameLst>
+                                      </p:cBhvr>
+                                      <p:tavLst>
+                                        <p:tav tm="0">
+                                          <p:val>
+                                            <p:strVal val="#ppt_x"/>
+                                          </p:val>
+                                        </p:tav>
+                                        <p:tav tm="100000">
+                                          <p:val>
+                                            <p:strVal val="#ppt_x"/>
+                                          </p:val>
+                                        </p:tav>
+                                      </p:tavLst>
+                                    </p:anim>
+                                    <p:anim calcmode="lin" valueType="num">
+                                      <p:cBhvr>
+                                        <p:cTn id="33" dur="500" fill="hold"/>
+                                        <p:tgtEl>
+                                          <p:spTgt spid="3">
+                                            <p:txEl>
+                                              <p:pRg st="1" end="1"/>
+                                            </p:txEl>
+                                          </p:spTgt>
+                                        </p:tgtEl>
+                                        <p:attrNameLst>
+                                          <p:attrName>ppt_y</p:attrName>
+                                        </p:attrNameLst>
+                                      </p:cBhvr>
+                                      <p:tavLst>
+                                        <p:tav tm="0">
+                                          <p:val>
+                                            <p:strVal val="#ppt_y+.1"/>
+                                          </p:val>
+                                        </p:tav>
+                                        <p:tav tm="100000">
+                                          <p:val>
+                                            <p:strVal val="#ppt_y"/>
+                                          </p:val>
+                                        </p:tav>
+                                      </p:tavLst>
+                                    </p:anim>
+                                  </p:childTnLst>
+                                </p:cTn>
+                              </p:par>
+                            </p:childTnLst>
+                          </p:cTn>
+                        </p:par>
+                        <p:par>
+                          <p:cTn id="34" fill="hold">
+                            <p:stCondLst>
+                              <p:cond delay="2400"/>
+                            </p:stCondLst>
+                            <p:childTnLst>
+                              <p:par>
+                                <p:cTn id="35" presetID="42" presetClass="entr" presetSubtype="0" fill="hold" grpId="0" nodeType="afterEffect">
+                                  <p:stCondLst>
+                                    <p:cond delay="200"/>
+                                  </p:stCondLst>
+                                  <p:childTnLst>
+                                    <p:set>
+                                      <p:cBhvr>
+                                        <p:cTn id="36" dur="1" fill="hold">
+                                          <p:stCondLst>
+                                            <p:cond delay="0"/>
+                                          </p:stCondLst>
+                                        </p:cTn>
+                                        <p:tgtEl>
+                                          <p:spTgt spid="3">
+                                            <p:txEl>
+                                              <p:pRg st="2" end="2"/>
+                                            </p:txEl>
+                                          </p:spTgt>
+                                        </p:tgtEl>
+                                        <p:attrNameLst>
+                                          <p:attrName>style.visibility</p:attrName>
+                                        </p:attrNameLst>
+                                      </p:cBhvr>
+                                      <p:to>
+                                        <p:strVal val="visible"/>
+                                      </p:to>
+                                    </p:set>
+                                    <p:animEffect transition="in" filter="fade">
+                                      <p:cBhvr>
+                                        <p:cTn id="37" dur="500"/>
+                                        <p:tgtEl>
+                                          <p:spTgt spid="3">
+                                            <p:txEl>
+                                              <p:pRg st="2" end="2"/>
+                                            </p:txEl>
+                                          </p:spTgt>
+                                        </p:tgtEl>
+                                      </p:cBhvr>
+                                    </p:animEffect>
+                                    <p:anim calcmode="lin" valueType="num">
+                                      <p:cBhvr>
+                                        <p:cTn id="38" dur="500" fill="hold"/>
+                                        <p:tgtEl>
+                                          <p:spTgt spid="3">
+                                            <p:txEl>
+                                              <p:pRg st="2" end="2"/>
+                                            </p:txEl>
+                                          </p:spTgt>
+                                        </p:tgtEl>
+                                        <p:attrNameLst>
+                                          <p:attrName>ppt_x</p:attrName>
+                                        </p:attrNameLst>
+                                      </p:cBhvr>
+                                      <p:tavLst>
+                                        <p:tav tm="0">
+                                          <p:val>
+                                            <p:strVal val="#ppt_x"/>
+                                          </p:val>
+                                        </p:tav>
+                                        <p:tav tm="100000">
+                                          <p:val>
+                                            <p:strVal val="#ppt_x"/>
+                                          </p:val>
+                                        </p:tav>
+                                      </p:tavLst>
+                                    </p:anim>
+                                    <p:anim calcmode="lin" valueType="num">
+                                      <p:cBhvr>
+                                        <p:cTn id="39" dur="500" fill="hold"/>
+                                        <p:tgtEl>
+                                          <p:spTgt spid="3">
+                                            <p:txEl>
+                                              <p:pRg st="2" end="2"/>
+                                            </p:txEl>
+                                          </p:spTgt>
+                                        </p:tgtEl>
+                                        <p:attrNameLst>
+                                          <p:attrName>ppt_y</p:attrName>
+                                        </p:attrNameLst>
+                                      </p:cBhvr>
+                                      <p:tavLst>
+                                        <p:tav tm="0">
+                                          <p:val>
+                                            <p:strVal val="#ppt_y+.1"/>
+                                          </p:val>
+                                        </p:tav>
+                                        <p:tav tm="100000">
+                                          <p:val>
+                                            <p:strVal val="#ppt_y"/>
+                                          </p:val>
+                                        </p:tav>
+                                      </p:tavLst>
+                                    </p:anim>
+                                  </p:childTnLst>
+                                </p:cTn>
+                              </p:par>
+                            </p:childTnLst>
+                          </p:cTn>
+                        </p:par>
+                        <p:par>
+                          <p:cTn id="40" fill="hold">
+                            <p:stCondLst>
+                              <p:cond delay="3100"/>
+                            </p:stCondLst>
+                            <p:childTnLst>
+                              <p:par>
+                                <p:cTn id="41" presetID="42" presetClass="entr" presetSubtype="0" fill="hold" grpId="0" nodeType="afterEffect">
+                                  <p:stCondLst>
+                                    <p:cond delay="200"/>
+                                  </p:stCondLst>
+                                  <p:childTnLst>
+                                    <p:set>
+                                      <p:cBhvr>
+                                        <p:cTn id="42" dur="1" fill="hold">
+                                          <p:stCondLst>
+                                            <p:cond delay="0"/>
+                                          </p:stCondLst>
+                                        </p:cTn>
+                                        <p:tgtEl>
+                                          <p:spTgt spid="3">
+                                            <p:txEl>
+                                              <p:pRg st="3" end="3"/>
+                                            </p:txEl>
+                                          </p:spTgt>
+                                        </p:tgtEl>
+                                        <p:attrNameLst>
+                                          <p:attrName>style.visibility</p:attrName>
+                                        </p:attrNameLst>
+                                      </p:cBhvr>
+                                      <p:to>
+                                        <p:strVal val="visible"/>
+                                      </p:to>
+                                    </p:set>
+                                    <p:animEffect transition="in" filter="fade">
+                                      <p:cBhvr>
+                                        <p:cTn id="43" dur="500"/>
+                                        <p:tgtEl>
+                                          <p:spTgt spid="3">
+                                            <p:txEl>
+                                              <p:pRg st="3" end="3"/>
+                                            </p:txEl>
+                                          </p:spTgt>
+                                        </p:tgtEl>
+                                      </p:cBhvr>
+                                    </p:animEffect>
+                                    <p:anim calcmode="lin" valueType="num">
+                                      <p:cBhvr>
+                                        <p:cTn id="44" dur="500" fill="hold"/>
+                                        <p:tgtEl>
+                                          <p:spTgt spid="3">
+                                            <p:txEl>
+                                              <p:pRg st="3" end="3"/>
+                                            </p:txEl>
+                                          </p:spTgt>
+                                        </p:tgtEl>
+                                        <p:attrNameLst>
+                                          <p:attrName>ppt_x</p:attrName>
+                                        </p:attrNameLst>
+                                      </p:cBhvr>
+                                      <p:tavLst>
+                                        <p:tav tm="0">
+                                          <p:val>
+                                            <p:strVal val="#ppt_x"/>
+                                          </p:val>
+                                        </p:tav>
+                                        <p:tav tm="100000">
+                                          <p:val>
+                                            <p:strVal val="#ppt_x"/>
+                                          </p:val>
+                                        </p:tav>
+                                      </p:tavLst>
+                                    </p:anim>
+                                    <p:anim calcmode="lin" valueType="num">
+                                      <p:cBhvr>
+                                        <p:cTn id="45" dur="500" fill="hold"/>
+                                        <p:tgtEl>
+                                          <p:spTgt spid="3">
+                                            <p:txEl>
+                                              <p:pRg st="3" end="3"/>
+                                            </p:txEl>
+                                          </p:spTgt>
+                                        </p:tgtEl>
+                                        <p:attrNameLst>
+                                          <p:attrName>ppt_y</p:attrName>
+                                        </p:attrNameLst>
+                                      </p:cBhvr>
+                                      <p:tavLst>
+                                        <p:tav tm="0">
+                                          <p:val>
+                                            <p:strVal val="#ppt_y+.1"/>
+                                          </p:val>
+                                        </p:tav>
+                                        <p:tav tm="100000">
+                                          <p:val>
+                                            <p:strVal val="#ppt_y"/>
+                                          </p:val>
+                                        </p:tav>
+                                      </p:tavLst>
+                                    </p:anim>
+                                  </p:childTnLst>
+                                </p:cTn>
+                              </p:par>
+                            </p:childTnLst>
+                          </p:cTn>
+                        </p:par>
+                        <p:par>
+                          <p:cTn id="46" fill="hold">
+                            <p:stCondLst>
+                              <p:cond delay="3800"/>
+                            </p:stCondLst>
+                            <p:childTnLst>
+                              <p:par>
+                                <p:cTn id="47" presetID="42" presetClass="entr" presetSubtype="0" fill="hold" grpId="0" nodeType="afterEffect">
+                                  <p:stCondLst>
+                                    <p:cond delay="200"/>
+                                  </p:stCondLst>
+                                  <p:childTnLst>
+                                    <p:set>
+                                      <p:cBhvr>
+                                        <p:cTn id="48" dur="1" fill="hold">
+                                          <p:stCondLst>
+                                            <p:cond delay="0"/>
+                                          </p:stCondLst>
+                                        </p:cTn>
+                                        <p:tgtEl>
+                                          <p:spTgt spid="3">
+                                            <p:txEl>
+                                              <p:pRg st="4" end="4"/>
+                                            </p:txEl>
+                                          </p:spTgt>
+                                        </p:tgtEl>
+                                        <p:attrNameLst>
+                                          <p:attrName>style.visibility</p:attrName>
+                                        </p:attrNameLst>
+                                      </p:cBhvr>
+                                      <p:to>
+                                        <p:strVal val="visible"/>
+                                      </p:to>
+                                    </p:set>
+                                    <p:animEffect transition="in" filter="fade">
+                                      <p:cBhvr>
+                                        <p:cTn id="49" dur="500"/>
+                                        <p:tgtEl>
+                                          <p:spTgt spid="3">
+                                            <p:txEl>
+                                              <p:pRg st="4" end="4"/>
+                                            </p:txEl>
+                                          </p:spTgt>
+                                        </p:tgtEl>
+                                      </p:cBhvr>
+                                    </p:animEffect>
+                                    <p:anim calcmode="lin" valueType="num">
+                                      <p:cBhvr>
+                                        <p:cTn id="50" dur="500" fill="hold"/>
+                                        <p:tgtEl>
+                                          <p:spTgt spid="3">
+                                            <p:txEl>
+                                              <p:pRg st="4" end="4"/>
+                                            </p:txEl>
+                                          </p:spTgt>
+                                        </p:tgtEl>
+                                        <p:attrNameLst>
+                                          <p:attrName>ppt_x</p:attrName>
+                                        </p:attrNameLst>
+                                      </p:cBhvr>
+                                      <p:tavLst>
+                                        <p:tav tm="0">
+                                          <p:val>
+                                            <p:strVal val="#ppt_x"/>
+                                          </p:val>
+                                        </p:tav>
+                                        <p:tav tm="100000">
+                                          <p:val>
+                                            <p:strVal val="#ppt_x"/>
+                                          </p:val>
+                                        </p:tav>
+                                      </p:tavLst>
+                                    </p:anim>
+                                    <p:anim calcmode="lin" valueType="num">
+                                      <p:cBhvr>
+                                        <p:cTn id="51" dur="500" fill="hold"/>
+                                        <p:tgtEl>
+                                          <p:spTgt spid="3">
+                                            <p:txEl>
+                                              <p:pRg st="4" end="4"/>
+                                            </p:txEl>
+                                          </p:spTgt>
+                                        </p:tgtEl>
+                                        <p:attrNameLst>
+                                          <p:attrName>ppt_y</p:attrName>
+                                        </p:attrNameLst>
+                                      </p:cBhvr>
+                                      <p:tavLst>
+                                        <p:tav tm="0">
+                                          <p:val>
+                                            <p:strVal val="#ppt_y+.1"/>
+                                          </p:val>
+                                        </p:tav>
+                                        <p:tav tm="100000">
+                                          <p:val>
+                                            <p:strVal val="#ppt_y"/>
+                                          </p:val>
+                                        </p:tav>
+                                      </p:tavLst>
+                                    </p:anim>
+                                  </p:childTnLst>
+                                </p:cTn>
+                              </p:par>
+                            </p:childTnLst>
+                          </p:cTn>
+                        </p:par>
+                      </p:childTnLst>
+                    </p:cTn>
+                  </p:par>
+                </p:childTnLst>
+              </p:cTn>
+              <p:prevCondLst>
+                <p:cond evt="onPrev" delay="0">
+                  <p:tgtEl>
+                    <p:sldTgt/>
+                  </p:tgtEl>
+                </p:cond>
+              </p:prevCondLst>
+              <p:nextCondLst>
+                <p:cond evt="onNext" delay="0">
+                  <p:tgtEl>
+                    <p:sldTgt/>
+                  </p:tgtEl>
+                </p:cond>
+              </p:nextCondLst>
+            </p:seq>
+          </p:childTnLst>
+        </p:cTn>
+      </p:par>
+    </p:tnLst>
+    <p:bldLst>
+      <p:bldP spid="2" grpId="0"/>
+      <p:bldP spid="3" grpId="0" uiExpand="1" build="p"/>
+    </p:bldLst>
+  </p:timing>
 </p:sld>
 </file>
 
@@ -6295,6 +10469,608 @@
   <p:clrMapOvr>
     <a:masterClrMapping/>
   </p:clrMapOvr>
+  <p:transition spd="slow">
+    <p:push dir="u"/>
+  </p:transition>
+  <p:timing>
+    <p:tnLst>
+      <p:par>
+        <p:cTn id="1" dur="indefinite" restart="never" nodeType="tmRoot">
+          <p:childTnLst>
+            <p:seq concurrent="1" nextAc="seek">
+              <p:cTn id="2" dur="indefinite" nodeType="mainSeq">
+                <p:childTnLst>
+                  <p:par>
+                    <p:cTn id="3" fill="hold">
+                      <p:stCondLst>
+                        <p:cond delay="indefinite"/>
+                        <p:cond evt="onBegin" delay="0">
+                          <p:tn val="2"/>
+                        </p:cond>
+                      </p:stCondLst>
+                      <p:childTnLst>
+                        <p:par>
+                          <p:cTn id="4" fill="hold">
+                            <p:stCondLst>
+                              <p:cond delay="0"/>
+                            </p:stCondLst>
+                            <p:childTnLst>
+                              <p:par>
+                                <p:cTn id="5" presetID="10" presetClass="entr" presetSubtype="0" fill="hold" grpId="0" nodeType="afterEffect">
+                                  <p:stCondLst>
+                                    <p:cond delay="0"/>
+                                  </p:stCondLst>
+                                  <p:childTnLst>
+                                    <p:set>
+                                      <p:cBhvr>
+                                        <p:cTn id="6" dur="1" fill="hold">
+                                          <p:stCondLst>
+                                            <p:cond delay="0"/>
+                                          </p:stCondLst>
+                                        </p:cTn>
+                                        <p:tgtEl>
+                                          <p:spTgt spid="2"/>
+                                        </p:tgtEl>
+                                        <p:attrNameLst>
+                                          <p:attrName>style.visibility</p:attrName>
+                                        </p:attrNameLst>
+                                      </p:cBhvr>
+                                      <p:to>
+                                        <p:strVal val="visible"/>
+                                      </p:to>
+                                    </p:set>
+                                    <p:animEffect transition="in" filter="fade">
+                                      <p:cBhvr>
+                                        <p:cTn id="7" dur="500"/>
+                                        <p:tgtEl>
+                                          <p:spTgt spid="2"/>
+                                        </p:tgtEl>
+                                      </p:cBhvr>
+                                    </p:animEffect>
+                                  </p:childTnLst>
+                                </p:cTn>
+                              </p:par>
+                            </p:childTnLst>
+                          </p:cTn>
+                        </p:par>
+                        <p:par>
+                          <p:cTn id="8" fill="hold">
+                            <p:stCondLst>
+                              <p:cond delay="500"/>
+                            </p:stCondLst>
+                            <p:childTnLst>
+                              <p:par>
+                                <p:cTn id="9" presetID="2" presetClass="entr" presetSubtype="2" fill="hold" nodeType="afterEffect">
+                                  <p:stCondLst>
+                                    <p:cond delay="0"/>
+                                  </p:stCondLst>
+                                  <p:childTnLst>
+                                    <p:set>
+                                      <p:cBhvr>
+                                        <p:cTn id="10" dur="1" fill="hold">
+                                          <p:stCondLst>
+                                            <p:cond delay="0"/>
+                                          </p:stCondLst>
+                                        </p:cTn>
+                                        <p:tgtEl>
+                                          <p:spTgt spid="5"/>
+                                        </p:tgtEl>
+                                        <p:attrNameLst>
+                                          <p:attrName>style.visibility</p:attrName>
+                                        </p:attrNameLst>
+                                      </p:cBhvr>
+                                      <p:to>
+                                        <p:strVal val="visible"/>
+                                      </p:to>
+                                    </p:set>
+                                    <p:anim calcmode="lin" valueType="num">
+                                      <p:cBhvr additive="base">
+                                        <p:cTn id="11" dur="500" fill="hold"/>
+                                        <p:tgtEl>
+                                          <p:spTgt spid="5"/>
+                                        </p:tgtEl>
+                                        <p:attrNameLst>
+                                          <p:attrName>ppt_x</p:attrName>
+                                        </p:attrNameLst>
+                                      </p:cBhvr>
+                                      <p:tavLst>
+                                        <p:tav tm="0">
+                                          <p:val>
+                                            <p:strVal val="1+#ppt_w/2"/>
+                                          </p:val>
+                                        </p:tav>
+                                        <p:tav tm="100000">
+                                          <p:val>
+                                            <p:strVal val="#ppt_x"/>
+                                          </p:val>
+                                        </p:tav>
+                                      </p:tavLst>
+                                    </p:anim>
+                                    <p:anim calcmode="lin" valueType="num">
+                                      <p:cBhvr additive="base">
+                                        <p:cTn id="12" dur="500" fill="hold"/>
+                                        <p:tgtEl>
+                                          <p:spTgt spid="5"/>
+                                        </p:tgtEl>
+                                        <p:attrNameLst>
+                                          <p:attrName>ppt_y</p:attrName>
+                                        </p:attrNameLst>
+                                      </p:cBhvr>
+                                      <p:tavLst>
+                                        <p:tav tm="0">
+                                          <p:val>
+                                            <p:strVal val="#ppt_y"/>
+                                          </p:val>
+                                        </p:tav>
+                                        <p:tav tm="100000">
+                                          <p:val>
+                                            <p:strVal val="#ppt_y"/>
+                                          </p:val>
+                                        </p:tav>
+                                      </p:tavLst>
+                                    </p:anim>
+                                  </p:childTnLst>
+                                </p:cTn>
+                              </p:par>
+                              <p:par>
+                                <p:cTn id="13" presetID="2" presetClass="entr" presetSubtype="2" fill="hold" nodeType="withEffect">
+                                  <p:stCondLst>
+                                    <p:cond delay="0"/>
+                                  </p:stCondLst>
+                                  <p:childTnLst>
+                                    <p:set>
+                                      <p:cBhvr>
+                                        <p:cTn id="14" dur="1" fill="hold">
+                                          <p:stCondLst>
+                                            <p:cond delay="0"/>
+                                          </p:stCondLst>
+                                        </p:cTn>
+                                        <p:tgtEl>
+                                          <p:spTgt spid="7"/>
+                                        </p:tgtEl>
+                                        <p:attrNameLst>
+                                          <p:attrName>style.visibility</p:attrName>
+                                        </p:attrNameLst>
+                                      </p:cBhvr>
+                                      <p:to>
+                                        <p:strVal val="visible"/>
+                                      </p:to>
+                                    </p:set>
+                                    <p:anim calcmode="lin" valueType="num">
+                                      <p:cBhvr additive="base">
+                                        <p:cTn id="15" dur="500" fill="hold"/>
+                                        <p:tgtEl>
+                                          <p:spTgt spid="7"/>
+                                        </p:tgtEl>
+                                        <p:attrNameLst>
+                                          <p:attrName>ppt_x</p:attrName>
+                                        </p:attrNameLst>
+                                      </p:cBhvr>
+                                      <p:tavLst>
+                                        <p:tav tm="0">
+                                          <p:val>
+                                            <p:strVal val="1+#ppt_w/2"/>
+                                          </p:val>
+                                        </p:tav>
+                                        <p:tav tm="100000">
+                                          <p:val>
+                                            <p:strVal val="#ppt_x"/>
+                                          </p:val>
+                                        </p:tav>
+                                      </p:tavLst>
+                                    </p:anim>
+                                    <p:anim calcmode="lin" valueType="num">
+                                      <p:cBhvr additive="base">
+                                        <p:cTn id="16" dur="500" fill="hold"/>
+                                        <p:tgtEl>
+                                          <p:spTgt spid="7"/>
+                                        </p:tgtEl>
+                                        <p:attrNameLst>
+                                          <p:attrName>ppt_y</p:attrName>
+                                        </p:attrNameLst>
+                                      </p:cBhvr>
+                                      <p:tavLst>
+                                        <p:tav tm="0">
+                                          <p:val>
+                                            <p:strVal val="#ppt_y"/>
+                                          </p:val>
+                                        </p:tav>
+                                        <p:tav tm="100000">
+                                          <p:val>
+                                            <p:strVal val="#ppt_y"/>
+                                          </p:val>
+                                        </p:tav>
+                                      </p:tavLst>
+                                    </p:anim>
+                                  </p:childTnLst>
+                                </p:cTn>
+                              </p:par>
+                              <p:par>
+                                <p:cTn id="17" presetID="2" presetClass="entr" presetSubtype="4" fill="hold" nodeType="withEffect">
+                                  <p:stCondLst>
+                                    <p:cond delay="0"/>
+                                  </p:stCondLst>
+                                  <p:childTnLst>
+                                    <p:set>
+                                      <p:cBhvr>
+                                        <p:cTn id="18" dur="1" fill="hold">
+                                          <p:stCondLst>
+                                            <p:cond delay="0"/>
+                                          </p:stCondLst>
+                                        </p:cTn>
+                                        <p:tgtEl>
+                                          <p:spTgt spid="9"/>
+                                        </p:tgtEl>
+                                        <p:attrNameLst>
+                                          <p:attrName>style.visibility</p:attrName>
+                                        </p:attrNameLst>
+                                      </p:cBhvr>
+                                      <p:to>
+                                        <p:strVal val="visible"/>
+                                      </p:to>
+                                    </p:set>
+                                    <p:anim calcmode="lin" valueType="num">
+                                      <p:cBhvr additive="base">
+                                        <p:cTn id="19" dur="500" fill="hold"/>
+                                        <p:tgtEl>
+                                          <p:spTgt spid="9"/>
+                                        </p:tgtEl>
+                                        <p:attrNameLst>
+                                          <p:attrName>ppt_x</p:attrName>
+                                        </p:attrNameLst>
+                                      </p:cBhvr>
+                                      <p:tavLst>
+                                        <p:tav tm="0">
+                                          <p:val>
+                                            <p:strVal val="#ppt_x"/>
+                                          </p:val>
+                                        </p:tav>
+                                        <p:tav tm="100000">
+                                          <p:val>
+                                            <p:strVal val="#ppt_x"/>
+                                          </p:val>
+                                        </p:tav>
+                                      </p:tavLst>
+                                    </p:anim>
+                                    <p:anim calcmode="lin" valueType="num">
+                                      <p:cBhvr additive="base">
+                                        <p:cTn id="20" dur="500" fill="hold"/>
+                                        <p:tgtEl>
+                                          <p:spTgt spid="9"/>
+                                        </p:tgtEl>
+                                        <p:attrNameLst>
+                                          <p:attrName>ppt_y</p:attrName>
+                                        </p:attrNameLst>
+                                      </p:cBhvr>
+                                      <p:tavLst>
+                                        <p:tav tm="0">
+                                          <p:val>
+                                            <p:strVal val="1+#ppt_h/2"/>
+                                          </p:val>
+                                        </p:tav>
+                                        <p:tav tm="100000">
+                                          <p:val>
+                                            <p:strVal val="#ppt_y"/>
+                                          </p:val>
+                                        </p:tav>
+                                      </p:tavLst>
+                                    </p:anim>
+                                  </p:childTnLst>
+                                </p:cTn>
+                              </p:par>
+                            </p:childTnLst>
+                          </p:cTn>
+                        </p:par>
+                        <p:par>
+                          <p:cTn id="21" fill="hold">
+                            <p:stCondLst>
+                              <p:cond delay="1000"/>
+                            </p:stCondLst>
+                            <p:childTnLst>
+                              <p:par>
+                                <p:cTn id="22" presetID="2" presetClass="entr" presetSubtype="4" fill="hold" nodeType="afterEffect">
+                                  <p:stCondLst>
+                                    <p:cond delay="0"/>
+                                  </p:stCondLst>
+                                  <p:childTnLst>
+                                    <p:set>
+                                      <p:cBhvr>
+                                        <p:cTn id="23" dur="1" fill="hold">
+                                          <p:stCondLst>
+                                            <p:cond delay="0"/>
+                                          </p:stCondLst>
+                                        </p:cTn>
+                                        <p:tgtEl>
+                                          <p:spTgt spid="3">
+                                            <p:txEl>
+                                              <p:pRg st="0" end="0"/>
+                                            </p:txEl>
+                                          </p:spTgt>
+                                        </p:tgtEl>
+                                        <p:attrNameLst>
+                                          <p:attrName>style.visibility</p:attrName>
+                                        </p:attrNameLst>
+                                      </p:cBhvr>
+                                      <p:to>
+                                        <p:strVal val="visible"/>
+                                      </p:to>
+                                    </p:set>
+                                    <p:anim calcmode="lin" valueType="num">
+                                      <p:cBhvr additive="base">
+                                        <p:cTn id="24" dur="500" fill="hold"/>
+                                        <p:tgtEl>
+                                          <p:spTgt spid="3">
+                                            <p:txEl>
+                                              <p:pRg st="0" end="0"/>
+                                            </p:txEl>
+                                          </p:spTgt>
+                                        </p:tgtEl>
+                                        <p:attrNameLst>
+                                          <p:attrName>ppt_x</p:attrName>
+                                        </p:attrNameLst>
+                                      </p:cBhvr>
+                                      <p:tavLst>
+                                        <p:tav tm="0">
+                                          <p:val>
+                                            <p:strVal val="#ppt_x"/>
+                                          </p:val>
+                                        </p:tav>
+                                        <p:tav tm="100000">
+                                          <p:val>
+                                            <p:strVal val="#ppt_x"/>
+                                          </p:val>
+                                        </p:tav>
+                                      </p:tavLst>
+                                    </p:anim>
+                                    <p:anim calcmode="lin" valueType="num">
+                                      <p:cBhvr additive="base">
+                                        <p:cTn id="25" dur="500" fill="hold"/>
+                                        <p:tgtEl>
+                                          <p:spTgt spid="3">
+                                            <p:txEl>
+                                              <p:pRg st="0" end="0"/>
+                                            </p:txEl>
+                                          </p:spTgt>
+                                        </p:tgtEl>
+                                        <p:attrNameLst>
+                                          <p:attrName>ppt_y</p:attrName>
+                                        </p:attrNameLst>
+                                      </p:cBhvr>
+                                      <p:tavLst>
+                                        <p:tav tm="0">
+                                          <p:val>
+                                            <p:strVal val="1+#ppt_h/2"/>
+                                          </p:val>
+                                        </p:tav>
+                                        <p:tav tm="100000">
+                                          <p:val>
+                                            <p:strVal val="#ppt_y"/>
+                                          </p:val>
+                                        </p:tav>
+                                      </p:tavLst>
+                                    </p:anim>
+                                  </p:childTnLst>
+                                </p:cTn>
+                              </p:par>
+                            </p:childTnLst>
+                          </p:cTn>
+                        </p:par>
+                        <p:par>
+                          <p:cTn id="26" fill="hold">
+                            <p:stCondLst>
+                              <p:cond delay="1500"/>
+                            </p:stCondLst>
+                            <p:childTnLst>
+                              <p:par>
+                                <p:cTn id="27" presetID="2" presetClass="entr" presetSubtype="4" fill="hold" nodeType="afterEffect">
+                                  <p:stCondLst>
+                                    <p:cond delay="0"/>
+                                  </p:stCondLst>
+                                  <p:childTnLst>
+                                    <p:set>
+                                      <p:cBhvr>
+                                        <p:cTn id="28" dur="1" fill="hold">
+                                          <p:stCondLst>
+                                            <p:cond delay="0"/>
+                                          </p:stCondLst>
+                                        </p:cTn>
+                                        <p:tgtEl>
+                                          <p:spTgt spid="3">
+                                            <p:txEl>
+                                              <p:pRg st="1" end="1"/>
+                                            </p:txEl>
+                                          </p:spTgt>
+                                        </p:tgtEl>
+                                        <p:attrNameLst>
+                                          <p:attrName>style.visibility</p:attrName>
+                                        </p:attrNameLst>
+                                      </p:cBhvr>
+                                      <p:to>
+                                        <p:strVal val="visible"/>
+                                      </p:to>
+                                    </p:set>
+                                    <p:anim calcmode="lin" valueType="num">
+                                      <p:cBhvr additive="base">
+                                        <p:cTn id="29" dur="500" fill="hold"/>
+                                        <p:tgtEl>
+                                          <p:spTgt spid="3">
+                                            <p:txEl>
+                                              <p:pRg st="1" end="1"/>
+                                            </p:txEl>
+                                          </p:spTgt>
+                                        </p:tgtEl>
+                                        <p:attrNameLst>
+                                          <p:attrName>ppt_x</p:attrName>
+                                        </p:attrNameLst>
+                                      </p:cBhvr>
+                                      <p:tavLst>
+                                        <p:tav tm="0">
+                                          <p:val>
+                                            <p:strVal val="#ppt_x"/>
+                                          </p:val>
+                                        </p:tav>
+                                        <p:tav tm="100000">
+                                          <p:val>
+                                            <p:strVal val="#ppt_x"/>
+                                          </p:val>
+                                        </p:tav>
+                                      </p:tavLst>
+                                    </p:anim>
+                                    <p:anim calcmode="lin" valueType="num">
+                                      <p:cBhvr additive="base">
+                                        <p:cTn id="30" dur="500" fill="hold"/>
+                                        <p:tgtEl>
+                                          <p:spTgt spid="3">
+                                            <p:txEl>
+                                              <p:pRg st="1" end="1"/>
+                                            </p:txEl>
+                                          </p:spTgt>
+                                        </p:tgtEl>
+                                        <p:attrNameLst>
+                                          <p:attrName>ppt_y</p:attrName>
+                                        </p:attrNameLst>
+                                      </p:cBhvr>
+                                      <p:tavLst>
+                                        <p:tav tm="0">
+                                          <p:val>
+                                            <p:strVal val="1+#ppt_h/2"/>
+                                          </p:val>
+                                        </p:tav>
+                                        <p:tav tm="100000">
+                                          <p:val>
+                                            <p:strVal val="#ppt_y"/>
+                                          </p:val>
+                                        </p:tav>
+                                      </p:tavLst>
+                                    </p:anim>
+                                  </p:childTnLst>
+                                </p:cTn>
+                              </p:par>
+                            </p:childTnLst>
+                          </p:cTn>
+                        </p:par>
+                        <p:par>
+                          <p:cTn id="31" fill="hold">
+                            <p:stCondLst>
+                              <p:cond delay="2000"/>
+                            </p:stCondLst>
+                            <p:childTnLst>
+                              <p:par>
+                                <p:cTn id="32" presetID="2" presetClass="entr" presetSubtype="4" fill="hold" nodeType="afterEffect">
+                                  <p:stCondLst>
+                                    <p:cond delay="0"/>
+                                  </p:stCondLst>
+                                  <p:childTnLst>
+                                    <p:set>
+                                      <p:cBhvr>
+                                        <p:cTn id="33" dur="1" fill="hold">
+                                          <p:stCondLst>
+                                            <p:cond delay="0"/>
+                                          </p:stCondLst>
+                                        </p:cTn>
+                                        <p:tgtEl>
+                                          <p:spTgt spid="3">
+                                            <p:txEl>
+                                              <p:pRg st="2" end="2"/>
+                                            </p:txEl>
+                                          </p:spTgt>
+                                        </p:tgtEl>
+                                        <p:attrNameLst>
+                                          <p:attrName>style.visibility</p:attrName>
+                                        </p:attrNameLst>
+                                      </p:cBhvr>
+                                      <p:to>
+                                        <p:strVal val="visible"/>
+                                      </p:to>
+                                    </p:set>
+                                    <p:anim calcmode="lin" valueType="num">
+                                      <p:cBhvr additive="base">
+                                        <p:cTn id="34" dur="500" fill="hold"/>
+                                        <p:tgtEl>
+                                          <p:spTgt spid="3">
+                                            <p:txEl>
+                                              <p:pRg st="2" end="2"/>
+                                            </p:txEl>
+                                          </p:spTgt>
+                                        </p:tgtEl>
+                                        <p:attrNameLst>
+                                          <p:attrName>ppt_x</p:attrName>
+                                        </p:attrNameLst>
+                                      </p:cBhvr>
+                                      <p:tavLst>
+                                        <p:tav tm="0">
+                                          <p:val>
+                                            <p:strVal val="#ppt_x"/>
+                                          </p:val>
+                                        </p:tav>
+                                        <p:tav tm="100000">
+                                          <p:val>
+                                            <p:strVal val="#ppt_x"/>
+                                          </p:val>
+                                        </p:tav>
+                                      </p:tavLst>
+                                    </p:anim>
+                                    <p:anim calcmode="lin" valueType="num">
+                                      <p:cBhvr additive="base">
+                                        <p:cTn id="35" dur="500" fill="hold"/>
+                                        <p:tgtEl>
+                                          <p:spTgt spid="3">
+                                            <p:txEl>
+                                              <p:pRg st="2" end="2"/>
+                                            </p:txEl>
+                                          </p:spTgt>
+                                        </p:tgtEl>
+                                        <p:attrNameLst>
+                                          <p:attrName>ppt_y</p:attrName>
+                                        </p:attrNameLst>
+                                      </p:cBhvr>
+                                      <p:tavLst>
+                                        <p:tav tm="0">
+                                          <p:val>
+                                            <p:strVal val="1+#ppt_h/2"/>
+                                          </p:val>
+                                        </p:tav>
+                                        <p:tav tm="100000">
+                                          <p:val>
+                                            <p:strVal val="#ppt_y"/>
+                                          </p:val>
+                                        </p:tav>
+                                      </p:tavLst>
+                                    </p:anim>
+                                  </p:childTnLst>
+                                </p:cTn>
+                              </p:par>
+                            </p:childTnLst>
+                          </p:cTn>
+                        </p:par>
+                      </p:childTnLst>
+                    </p:cTn>
+                  </p:par>
+                </p:childTnLst>
+              </p:cTn>
+              <p:prevCondLst>
+                <p:cond evt="onPrev" delay="0">
+                  <p:tgtEl>
+                    <p:sldTgt/>
+                  </p:tgtEl>
+                </p:cond>
+              </p:prevCondLst>
+              <p:nextCondLst>
+                <p:cond evt="onNext" delay="0">
+                  <p:tgtEl>
+                    <p:sldTgt/>
+                  </p:tgtEl>
+                </p:cond>
+              </p:nextCondLst>
+            </p:seq>
+          </p:childTnLst>
+        </p:cTn>
+      </p:par>
+    </p:tnLst>
+    <p:bldLst>
+      <p:bldP spid="2" grpId="0"/>
+    </p:bldLst>
+  </p:timing>
 </p:sld>
 </file>
 
@@ -6551,6 +11327,745 @@
   <p:clrMapOvr>
     <a:masterClrMapping/>
   </p:clrMapOvr>
+  <p:transition spd="slow">
+    <p:push dir="u"/>
+  </p:transition>
+  <p:timing>
+    <p:tnLst>
+      <p:par>
+        <p:cTn id="1" dur="indefinite" restart="never" nodeType="tmRoot">
+          <p:childTnLst>
+            <p:seq concurrent="1" nextAc="seek">
+              <p:cTn id="2" dur="indefinite" nodeType="mainSeq">
+                <p:childTnLst>
+                  <p:par>
+                    <p:cTn id="3" fill="hold">
+                      <p:stCondLst>
+                        <p:cond delay="indefinite"/>
+                        <p:cond evt="onBegin" delay="0">
+                          <p:tn val="2"/>
+                        </p:cond>
+                      </p:stCondLst>
+                      <p:childTnLst>
+                        <p:par>
+                          <p:cTn id="4" fill="hold">
+                            <p:stCondLst>
+                              <p:cond delay="0"/>
+                            </p:stCondLst>
+                            <p:childTnLst>
+                              <p:par>
+                                <p:cTn id="5" presetID="10" presetClass="entr" presetSubtype="0" fill="hold" grpId="0" nodeType="afterEffect">
+                                  <p:stCondLst>
+                                    <p:cond delay="200"/>
+                                  </p:stCondLst>
+                                  <p:childTnLst>
+                                    <p:set>
+                                      <p:cBhvr>
+                                        <p:cTn id="6" dur="1" fill="hold">
+                                          <p:stCondLst>
+                                            <p:cond delay="0"/>
+                                          </p:stCondLst>
+                                        </p:cTn>
+                                        <p:tgtEl>
+                                          <p:spTgt spid="2"/>
+                                        </p:tgtEl>
+                                        <p:attrNameLst>
+                                          <p:attrName>style.visibility</p:attrName>
+                                        </p:attrNameLst>
+                                      </p:cBhvr>
+                                      <p:to>
+                                        <p:strVal val="visible"/>
+                                      </p:to>
+                                    </p:set>
+                                    <p:animEffect transition="in" filter="fade">
+                                      <p:cBhvr>
+                                        <p:cTn id="7" dur="500"/>
+                                        <p:tgtEl>
+                                          <p:spTgt spid="2"/>
+                                        </p:tgtEl>
+                                      </p:cBhvr>
+                                    </p:animEffect>
+                                  </p:childTnLst>
+                                </p:cTn>
+                              </p:par>
+                            </p:childTnLst>
+                          </p:cTn>
+                        </p:par>
+                        <p:par>
+                          <p:cTn id="8" fill="hold">
+                            <p:stCondLst>
+                              <p:cond delay="700"/>
+                            </p:stCondLst>
+                            <p:childTnLst>
+                              <p:par>
+                                <p:cTn id="9" presetID="2" presetClass="entr" presetSubtype="2" fill="hold" nodeType="afterEffect">
+                                  <p:stCondLst>
+                                    <p:cond delay="200"/>
+                                  </p:stCondLst>
+                                  <p:childTnLst>
+                                    <p:set>
+                                      <p:cBhvr>
+                                        <p:cTn id="10" dur="1" fill="hold">
+                                          <p:stCondLst>
+                                            <p:cond delay="0"/>
+                                          </p:stCondLst>
+                                        </p:cTn>
+                                        <p:tgtEl>
+                                          <p:spTgt spid="5"/>
+                                        </p:tgtEl>
+                                        <p:attrNameLst>
+                                          <p:attrName>style.visibility</p:attrName>
+                                        </p:attrNameLst>
+                                      </p:cBhvr>
+                                      <p:to>
+                                        <p:strVal val="visible"/>
+                                      </p:to>
+                                    </p:set>
+                                    <p:anim calcmode="lin" valueType="num">
+                                      <p:cBhvr additive="base">
+                                        <p:cTn id="11" dur="500" fill="hold"/>
+                                        <p:tgtEl>
+                                          <p:spTgt spid="5"/>
+                                        </p:tgtEl>
+                                        <p:attrNameLst>
+                                          <p:attrName>ppt_x</p:attrName>
+                                        </p:attrNameLst>
+                                      </p:cBhvr>
+                                      <p:tavLst>
+                                        <p:tav tm="0">
+                                          <p:val>
+                                            <p:strVal val="1+#ppt_w/2"/>
+                                          </p:val>
+                                        </p:tav>
+                                        <p:tav tm="100000">
+                                          <p:val>
+                                            <p:strVal val="#ppt_x"/>
+                                          </p:val>
+                                        </p:tav>
+                                      </p:tavLst>
+                                    </p:anim>
+                                    <p:anim calcmode="lin" valueType="num">
+                                      <p:cBhvr additive="base">
+                                        <p:cTn id="12" dur="500" fill="hold"/>
+                                        <p:tgtEl>
+                                          <p:spTgt spid="5"/>
+                                        </p:tgtEl>
+                                        <p:attrNameLst>
+                                          <p:attrName>ppt_y</p:attrName>
+                                        </p:attrNameLst>
+                                      </p:cBhvr>
+                                      <p:tavLst>
+                                        <p:tav tm="0">
+                                          <p:val>
+                                            <p:strVal val="#ppt_y"/>
+                                          </p:val>
+                                        </p:tav>
+                                        <p:tav tm="100000">
+                                          <p:val>
+                                            <p:strVal val="#ppt_y"/>
+                                          </p:val>
+                                        </p:tav>
+                                      </p:tavLst>
+                                    </p:anim>
+                                  </p:childTnLst>
+                                </p:cTn>
+                              </p:par>
+                            </p:childTnLst>
+                          </p:cTn>
+                        </p:par>
+                        <p:par>
+                          <p:cTn id="13" fill="hold">
+                            <p:stCondLst>
+                              <p:cond delay="1400"/>
+                            </p:stCondLst>
+                            <p:childTnLst>
+                              <p:par>
+                                <p:cTn id="14" presetID="2" presetClass="entr" presetSubtype="4" fill="hold" grpId="0" nodeType="afterEffect">
+                                  <p:stCondLst>
+                                    <p:cond delay="200"/>
+                                  </p:stCondLst>
+                                  <p:childTnLst>
+                                    <p:set>
+                                      <p:cBhvr>
+                                        <p:cTn id="15" dur="1" fill="hold">
+                                          <p:stCondLst>
+                                            <p:cond delay="0"/>
+                                          </p:stCondLst>
+                                        </p:cTn>
+                                        <p:tgtEl>
+                                          <p:spTgt spid="3">
+                                            <p:txEl>
+                                              <p:pRg st="0" end="0"/>
+                                            </p:txEl>
+                                          </p:spTgt>
+                                        </p:tgtEl>
+                                        <p:attrNameLst>
+                                          <p:attrName>style.visibility</p:attrName>
+                                        </p:attrNameLst>
+                                      </p:cBhvr>
+                                      <p:to>
+                                        <p:strVal val="visible"/>
+                                      </p:to>
+                                    </p:set>
+                                    <p:anim calcmode="lin" valueType="num">
+                                      <p:cBhvr additive="base">
+                                        <p:cTn id="16" dur="500" fill="hold"/>
+                                        <p:tgtEl>
+                                          <p:spTgt spid="3">
+                                            <p:txEl>
+                                              <p:pRg st="0" end="0"/>
+                                            </p:txEl>
+                                          </p:spTgt>
+                                        </p:tgtEl>
+                                        <p:attrNameLst>
+                                          <p:attrName>ppt_x</p:attrName>
+                                        </p:attrNameLst>
+                                      </p:cBhvr>
+                                      <p:tavLst>
+                                        <p:tav tm="0">
+                                          <p:val>
+                                            <p:strVal val="#ppt_x"/>
+                                          </p:val>
+                                        </p:tav>
+                                        <p:tav tm="100000">
+                                          <p:val>
+                                            <p:strVal val="#ppt_x"/>
+                                          </p:val>
+                                        </p:tav>
+                                      </p:tavLst>
+                                    </p:anim>
+                                    <p:anim calcmode="lin" valueType="num">
+                                      <p:cBhvr additive="base">
+                                        <p:cTn id="17" dur="500" fill="hold"/>
+                                        <p:tgtEl>
+                                          <p:spTgt spid="3">
+                                            <p:txEl>
+                                              <p:pRg st="0" end="0"/>
+                                            </p:txEl>
+                                          </p:spTgt>
+                                        </p:tgtEl>
+                                        <p:attrNameLst>
+                                          <p:attrName>ppt_y</p:attrName>
+                                        </p:attrNameLst>
+                                      </p:cBhvr>
+                                      <p:tavLst>
+                                        <p:tav tm="0">
+                                          <p:val>
+                                            <p:strVal val="1+#ppt_h/2"/>
+                                          </p:val>
+                                        </p:tav>
+                                        <p:tav tm="100000">
+                                          <p:val>
+                                            <p:strVal val="#ppt_y"/>
+                                          </p:val>
+                                        </p:tav>
+                                      </p:tavLst>
+                                    </p:anim>
+                                  </p:childTnLst>
+                                </p:cTn>
+                              </p:par>
+                            </p:childTnLst>
+                          </p:cTn>
+                        </p:par>
+                        <p:par>
+                          <p:cTn id="18" fill="hold">
+                            <p:stCondLst>
+                              <p:cond delay="2100"/>
+                            </p:stCondLst>
+                            <p:childTnLst>
+                              <p:par>
+                                <p:cTn id="19" presetID="2" presetClass="entr" presetSubtype="4" fill="hold" grpId="0" nodeType="afterEffect">
+                                  <p:stCondLst>
+                                    <p:cond delay="200"/>
+                                  </p:stCondLst>
+                                  <p:childTnLst>
+                                    <p:set>
+                                      <p:cBhvr>
+                                        <p:cTn id="20" dur="1" fill="hold">
+                                          <p:stCondLst>
+                                            <p:cond delay="0"/>
+                                          </p:stCondLst>
+                                        </p:cTn>
+                                        <p:tgtEl>
+                                          <p:spTgt spid="3">
+                                            <p:txEl>
+                                              <p:pRg st="1" end="1"/>
+                                            </p:txEl>
+                                          </p:spTgt>
+                                        </p:tgtEl>
+                                        <p:attrNameLst>
+                                          <p:attrName>style.visibility</p:attrName>
+                                        </p:attrNameLst>
+                                      </p:cBhvr>
+                                      <p:to>
+                                        <p:strVal val="visible"/>
+                                      </p:to>
+                                    </p:set>
+                                    <p:anim calcmode="lin" valueType="num">
+                                      <p:cBhvr additive="base">
+                                        <p:cTn id="21" dur="500" fill="hold"/>
+                                        <p:tgtEl>
+                                          <p:spTgt spid="3">
+                                            <p:txEl>
+                                              <p:pRg st="1" end="1"/>
+                                            </p:txEl>
+                                          </p:spTgt>
+                                        </p:tgtEl>
+                                        <p:attrNameLst>
+                                          <p:attrName>ppt_x</p:attrName>
+                                        </p:attrNameLst>
+                                      </p:cBhvr>
+                                      <p:tavLst>
+                                        <p:tav tm="0">
+                                          <p:val>
+                                            <p:strVal val="#ppt_x"/>
+                                          </p:val>
+                                        </p:tav>
+                                        <p:tav tm="100000">
+                                          <p:val>
+                                            <p:strVal val="#ppt_x"/>
+                                          </p:val>
+                                        </p:tav>
+                                      </p:tavLst>
+                                    </p:anim>
+                                    <p:anim calcmode="lin" valueType="num">
+                                      <p:cBhvr additive="base">
+                                        <p:cTn id="22" dur="500" fill="hold"/>
+                                        <p:tgtEl>
+                                          <p:spTgt spid="3">
+                                            <p:txEl>
+                                              <p:pRg st="1" end="1"/>
+                                            </p:txEl>
+                                          </p:spTgt>
+                                        </p:tgtEl>
+                                        <p:attrNameLst>
+                                          <p:attrName>ppt_y</p:attrName>
+                                        </p:attrNameLst>
+                                      </p:cBhvr>
+                                      <p:tavLst>
+                                        <p:tav tm="0">
+                                          <p:val>
+                                            <p:strVal val="1+#ppt_h/2"/>
+                                          </p:val>
+                                        </p:tav>
+                                        <p:tav tm="100000">
+                                          <p:val>
+                                            <p:strVal val="#ppt_y"/>
+                                          </p:val>
+                                        </p:tav>
+                                      </p:tavLst>
+                                    </p:anim>
+                                  </p:childTnLst>
+                                </p:cTn>
+                              </p:par>
+                            </p:childTnLst>
+                          </p:cTn>
+                        </p:par>
+                        <p:par>
+                          <p:cTn id="23" fill="hold">
+                            <p:stCondLst>
+                              <p:cond delay="2800"/>
+                            </p:stCondLst>
+                            <p:childTnLst>
+                              <p:par>
+                                <p:cTn id="24" presetID="2" presetClass="entr" presetSubtype="4" fill="hold" grpId="0" nodeType="afterEffect">
+                                  <p:stCondLst>
+                                    <p:cond delay="0"/>
+                                  </p:stCondLst>
+                                  <p:childTnLst>
+                                    <p:set>
+                                      <p:cBhvr>
+                                        <p:cTn id="25" dur="1" fill="hold">
+                                          <p:stCondLst>
+                                            <p:cond delay="0"/>
+                                          </p:stCondLst>
+                                        </p:cTn>
+                                        <p:tgtEl>
+                                          <p:spTgt spid="3">
+                                            <p:txEl>
+                                              <p:pRg st="2" end="2"/>
+                                            </p:txEl>
+                                          </p:spTgt>
+                                        </p:tgtEl>
+                                        <p:attrNameLst>
+                                          <p:attrName>style.visibility</p:attrName>
+                                        </p:attrNameLst>
+                                      </p:cBhvr>
+                                      <p:to>
+                                        <p:strVal val="visible"/>
+                                      </p:to>
+                                    </p:set>
+                                    <p:anim calcmode="lin" valueType="num">
+                                      <p:cBhvr additive="base">
+                                        <p:cTn id="26" dur="500" fill="hold"/>
+                                        <p:tgtEl>
+                                          <p:spTgt spid="3">
+                                            <p:txEl>
+                                              <p:pRg st="2" end="2"/>
+                                            </p:txEl>
+                                          </p:spTgt>
+                                        </p:tgtEl>
+                                        <p:attrNameLst>
+                                          <p:attrName>ppt_x</p:attrName>
+                                        </p:attrNameLst>
+                                      </p:cBhvr>
+                                      <p:tavLst>
+                                        <p:tav tm="0">
+                                          <p:val>
+                                            <p:strVal val="#ppt_x"/>
+                                          </p:val>
+                                        </p:tav>
+                                        <p:tav tm="100000">
+                                          <p:val>
+                                            <p:strVal val="#ppt_x"/>
+                                          </p:val>
+                                        </p:tav>
+                                      </p:tavLst>
+                                    </p:anim>
+                                    <p:anim calcmode="lin" valueType="num">
+                                      <p:cBhvr additive="base">
+                                        <p:cTn id="27" dur="500" fill="hold"/>
+                                        <p:tgtEl>
+                                          <p:spTgt spid="3">
+                                            <p:txEl>
+                                              <p:pRg st="2" end="2"/>
+                                            </p:txEl>
+                                          </p:spTgt>
+                                        </p:tgtEl>
+                                        <p:attrNameLst>
+                                          <p:attrName>ppt_y</p:attrName>
+                                        </p:attrNameLst>
+                                      </p:cBhvr>
+                                      <p:tavLst>
+                                        <p:tav tm="0">
+                                          <p:val>
+                                            <p:strVal val="1+#ppt_h/2"/>
+                                          </p:val>
+                                        </p:tav>
+                                        <p:tav tm="100000">
+                                          <p:val>
+                                            <p:strVal val="#ppt_y"/>
+                                          </p:val>
+                                        </p:tav>
+                                      </p:tavLst>
+                                    </p:anim>
+                                  </p:childTnLst>
+                                </p:cTn>
+                              </p:par>
+                            </p:childTnLst>
+                          </p:cTn>
+                        </p:par>
+                        <p:par>
+                          <p:cTn id="28" fill="hold">
+                            <p:stCondLst>
+                              <p:cond delay="3300"/>
+                            </p:stCondLst>
+                            <p:childTnLst>
+                              <p:par>
+                                <p:cTn id="29" presetID="2" presetClass="entr" presetSubtype="4" fill="hold" grpId="0" nodeType="afterEffect">
+                                  <p:stCondLst>
+                                    <p:cond delay="0"/>
+                                  </p:stCondLst>
+                                  <p:childTnLst>
+                                    <p:set>
+                                      <p:cBhvr>
+                                        <p:cTn id="30" dur="1" fill="hold">
+                                          <p:stCondLst>
+                                            <p:cond delay="0"/>
+                                          </p:stCondLst>
+                                        </p:cTn>
+                                        <p:tgtEl>
+                                          <p:spTgt spid="3">
+                                            <p:txEl>
+                                              <p:pRg st="3" end="3"/>
+                                            </p:txEl>
+                                          </p:spTgt>
+                                        </p:tgtEl>
+                                        <p:attrNameLst>
+                                          <p:attrName>style.visibility</p:attrName>
+                                        </p:attrNameLst>
+                                      </p:cBhvr>
+                                      <p:to>
+                                        <p:strVal val="visible"/>
+                                      </p:to>
+                                    </p:set>
+                                    <p:anim calcmode="lin" valueType="num">
+                                      <p:cBhvr additive="base">
+                                        <p:cTn id="31" dur="500" fill="hold"/>
+                                        <p:tgtEl>
+                                          <p:spTgt spid="3">
+                                            <p:txEl>
+                                              <p:pRg st="3" end="3"/>
+                                            </p:txEl>
+                                          </p:spTgt>
+                                        </p:tgtEl>
+                                        <p:attrNameLst>
+                                          <p:attrName>ppt_x</p:attrName>
+                                        </p:attrNameLst>
+                                      </p:cBhvr>
+                                      <p:tavLst>
+                                        <p:tav tm="0">
+                                          <p:val>
+                                            <p:strVal val="#ppt_x"/>
+                                          </p:val>
+                                        </p:tav>
+                                        <p:tav tm="100000">
+                                          <p:val>
+                                            <p:strVal val="#ppt_x"/>
+                                          </p:val>
+                                        </p:tav>
+                                      </p:tavLst>
+                                    </p:anim>
+                                    <p:anim calcmode="lin" valueType="num">
+                                      <p:cBhvr additive="base">
+                                        <p:cTn id="32" dur="500" fill="hold"/>
+                                        <p:tgtEl>
+                                          <p:spTgt spid="3">
+                                            <p:txEl>
+                                              <p:pRg st="3" end="3"/>
+                                            </p:txEl>
+                                          </p:spTgt>
+                                        </p:tgtEl>
+                                        <p:attrNameLst>
+                                          <p:attrName>ppt_y</p:attrName>
+                                        </p:attrNameLst>
+                                      </p:cBhvr>
+                                      <p:tavLst>
+                                        <p:tav tm="0">
+                                          <p:val>
+                                            <p:strVal val="1+#ppt_h/2"/>
+                                          </p:val>
+                                        </p:tav>
+                                        <p:tav tm="100000">
+                                          <p:val>
+                                            <p:strVal val="#ppt_y"/>
+                                          </p:val>
+                                        </p:tav>
+                                      </p:tavLst>
+                                    </p:anim>
+                                  </p:childTnLst>
+                                </p:cTn>
+                              </p:par>
+                            </p:childTnLst>
+                          </p:cTn>
+                        </p:par>
+                        <p:par>
+                          <p:cTn id="33" fill="hold">
+                            <p:stCondLst>
+                              <p:cond delay="3800"/>
+                            </p:stCondLst>
+                            <p:childTnLst>
+                              <p:par>
+                                <p:cTn id="34" presetID="2" presetClass="entr" presetSubtype="4" fill="hold" grpId="0" nodeType="afterEffect">
+                                  <p:stCondLst>
+                                    <p:cond delay="0"/>
+                                  </p:stCondLst>
+                                  <p:childTnLst>
+                                    <p:set>
+                                      <p:cBhvr>
+                                        <p:cTn id="35" dur="1" fill="hold">
+                                          <p:stCondLst>
+                                            <p:cond delay="0"/>
+                                          </p:stCondLst>
+                                        </p:cTn>
+                                        <p:tgtEl>
+                                          <p:spTgt spid="3">
+                                            <p:txEl>
+                                              <p:pRg st="4" end="4"/>
+                                            </p:txEl>
+                                          </p:spTgt>
+                                        </p:tgtEl>
+                                        <p:attrNameLst>
+                                          <p:attrName>style.visibility</p:attrName>
+                                        </p:attrNameLst>
+                                      </p:cBhvr>
+                                      <p:to>
+                                        <p:strVal val="visible"/>
+                                      </p:to>
+                                    </p:set>
+                                    <p:anim calcmode="lin" valueType="num">
+                                      <p:cBhvr additive="base">
+                                        <p:cTn id="36" dur="500" fill="hold"/>
+                                        <p:tgtEl>
+                                          <p:spTgt spid="3">
+                                            <p:txEl>
+                                              <p:pRg st="4" end="4"/>
+                                            </p:txEl>
+                                          </p:spTgt>
+                                        </p:tgtEl>
+                                        <p:attrNameLst>
+                                          <p:attrName>ppt_x</p:attrName>
+                                        </p:attrNameLst>
+                                      </p:cBhvr>
+                                      <p:tavLst>
+                                        <p:tav tm="0">
+                                          <p:val>
+                                            <p:strVal val="#ppt_x"/>
+                                          </p:val>
+                                        </p:tav>
+                                        <p:tav tm="100000">
+                                          <p:val>
+                                            <p:strVal val="#ppt_x"/>
+                                          </p:val>
+                                        </p:tav>
+                                      </p:tavLst>
+                                    </p:anim>
+                                    <p:anim calcmode="lin" valueType="num">
+                                      <p:cBhvr additive="base">
+                                        <p:cTn id="37" dur="500" fill="hold"/>
+                                        <p:tgtEl>
+                                          <p:spTgt spid="3">
+                                            <p:txEl>
+                                              <p:pRg st="4" end="4"/>
+                                            </p:txEl>
+                                          </p:spTgt>
+                                        </p:tgtEl>
+                                        <p:attrNameLst>
+                                          <p:attrName>ppt_y</p:attrName>
+                                        </p:attrNameLst>
+                                      </p:cBhvr>
+                                      <p:tavLst>
+                                        <p:tav tm="0">
+                                          <p:val>
+                                            <p:strVal val="1+#ppt_h/2"/>
+                                          </p:val>
+                                        </p:tav>
+                                        <p:tav tm="100000">
+                                          <p:val>
+                                            <p:strVal val="#ppt_y"/>
+                                          </p:val>
+                                        </p:tav>
+                                      </p:tavLst>
+                                    </p:anim>
+                                  </p:childTnLst>
+                                </p:cTn>
+                              </p:par>
+                            </p:childTnLst>
+                          </p:cTn>
+                        </p:par>
+                        <p:par>
+                          <p:cTn id="38" fill="hold">
+                            <p:stCondLst>
+                              <p:cond delay="4300"/>
+                            </p:stCondLst>
+                            <p:childTnLst>
+                              <p:par>
+                                <p:cTn id="39" presetID="2" presetClass="entr" presetSubtype="4" fill="hold" grpId="0" nodeType="afterEffect">
+                                  <p:stCondLst>
+                                    <p:cond delay="0"/>
+                                  </p:stCondLst>
+                                  <p:childTnLst>
+                                    <p:set>
+                                      <p:cBhvr>
+                                        <p:cTn id="40" dur="1" fill="hold">
+                                          <p:stCondLst>
+                                            <p:cond delay="0"/>
+                                          </p:stCondLst>
+                                        </p:cTn>
+                                        <p:tgtEl>
+                                          <p:spTgt spid="3">
+                                            <p:txEl>
+                                              <p:pRg st="5" end="5"/>
+                                            </p:txEl>
+                                          </p:spTgt>
+                                        </p:tgtEl>
+                                        <p:attrNameLst>
+                                          <p:attrName>style.visibility</p:attrName>
+                                        </p:attrNameLst>
+                                      </p:cBhvr>
+                                      <p:to>
+                                        <p:strVal val="visible"/>
+                                      </p:to>
+                                    </p:set>
+                                    <p:anim calcmode="lin" valueType="num">
+                                      <p:cBhvr additive="base">
+                                        <p:cTn id="41" dur="500" fill="hold"/>
+                                        <p:tgtEl>
+                                          <p:spTgt spid="3">
+                                            <p:txEl>
+                                              <p:pRg st="5" end="5"/>
+                                            </p:txEl>
+                                          </p:spTgt>
+                                        </p:tgtEl>
+                                        <p:attrNameLst>
+                                          <p:attrName>ppt_x</p:attrName>
+                                        </p:attrNameLst>
+                                      </p:cBhvr>
+                                      <p:tavLst>
+                                        <p:tav tm="0">
+                                          <p:val>
+                                            <p:strVal val="#ppt_x"/>
+                                          </p:val>
+                                        </p:tav>
+                                        <p:tav tm="100000">
+                                          <p:val>
+                                            <p:strVal val="#ppt_x"/>
+                                          </p:val>
+                                        </p:tav>
+                                      </p:tavLst>
+                                    </p:anim>
+                                    <p:anim calcmode="lin" valueType="num">
+                                      <p:cBhvr additive="base">
+                                        <p:cTn id="42" dur="500" fill="hold"/>
+                                        <p:tgtEl>
+                                          <p:spTgt spid="3">
+                                            <p:txEl>
+                                              <p:pRg st="5" end="5"/>
+                                            </p:txEl>
+                                          </p:spTgt>
+                                        </p:tgtEl>
+                                        <p:attrNameLst>
+                                          <p:attrName>ppt_y</p:attrName>
+                                        </p:attrNameLst>
+                                      </p:cBhvr>
+                                      <p:tavLst>
+                                        <p:tav tm="0">
+                                          <p:val>
+                                            <p:strVal val="1+#ppt_h/2"/>
+                                          </p:val>
+                                        </p:tav>
+                                        <p:tav tm="100000">
+                                          <p:val>
+                                            <p:strVal val="#ppt_y"/>
+                                          </p:val>
+                                        </p:tav>
+                                      </p:tavLst>
+                                    </p:anim>
+                                  </p:childTnLst>
+                                </p:cTn>
+                              </p:par>
+                            </p:childTnLst>
+                          </p:cTn>
+                        </p:par>
+                      </p:childTnLst>
+                    </p:cTn>
+                  </p:par>
+                </p:childTnLst>
+              </p:cTn>
+              <p:prevCondLst>
+                <p:cond evt="onPrev" delay="0">
+                  <p:tgtEl>
+                    <p:sldTgt/>
+                  </p:tgtEl>
+                </p:cond>
+              </p:prevCondLst>
+              <p:nextCondLst>
+                <p:cond evt="onNext" delay="0">
+                  <p:tgtEl>
+                    <p:sldTgt/>
+                  </p:tgtEl>
+                </p:cond>
+              </p:nextCondLst>
+            </p:seq>
+          </p:childTnLst>
+        </p:cTn>
+      </p:par>
+    </p:tnLst>
+    <p:bldLst>
+      <p:bldP spid="2" grpId="0"/>
+      <p:bldP spid="3" grpId="0" uiExpand="1" build="p"/>
+    </p:bldLst>
+  </p:timing>
 </p:sld>
 </file>
 
@@ -6604,14 +12119,24 @@
             <a:off x="837928" y="408842"/>
             <a:ext cx="11053531" cy="6040315"/>
           </a:xfrm>
+          <a:noFill/>
+          <a:effectLst>
+            <a:outerShdw blurRad="279400" dir="5400000" algn="ctr" rotWithShape="0">
+              <a:schemeClr val="tx1">
+                <a:lumMod val="50000"/>
+                <a:lumOff val="50000"/>
+                <a:alpha val="26000"/>
+              </a:schemeClr>
+            </a:outerShdw>
+          </a:effectLst>
         </p:spPr>
       </p:pic>
       <p:sp>
         <p:nvSpPr>
-          <p:cNvPr id="6" name="Téglalap 5">
+          <p:cNvPr id="7" name="Téglalap 6">
             <a:extLst>
               <a:ext uri="{FF2B5EF4-FFF2-40B4-BE49-F238E27FC236}">
-                <a16:creationId xmlns:a16="http://schemas.microsoft.com/office/drawing/2014/main" id="{DD21224A-048D-4922-85C5-E1ED7631335C}"/>
+                <a16:creationId xmlns:a16="http://schemas.microsoft.com/office/drawing/2014/main" id="{26378F6A-7F11-43CD-B05D-8B1B6F0809DF}"/>
               </a:ext>
             </a:extLst>
           </p:cNvPr>
@@ -6668,6 +12193,133 @@
   <p:clrMapOvr>
     <a:masterClrMapping/>
   </p:clrMapOvr>
+  <p:transition spd="slow">
+    <p:push dir="u"/>
+  </p:transition>
+  <p:timing>
+    <p:tnLst>
+      <p:par>
+        <p:cTn id="1" dur="indefinite" restart="never" nodeType="tmRoot">
+          <p:childTnLst>
+            <p:seq concurrent="1" nextAc="seek">
+              <p:cTn id="2" dur="indefinite" nodeType="mainSeq">
+                <p:childTnLst>
+                  <p:par>
+                    <p:cTn id="3" fill="hold">
+                      <p:stCondLst>
+                        <p:cond delay="indefinite"/>
+                        <p:cond evt="onBegin" delay="0">
+                          <p:tn val="2"/>
+                        </p:cond>
+                      </p:stCondLst>
+                      <p:childTnLst>
+                        <p:par>
+                          <p:cTn id="4" fill="hold">
+                            <p:stCondLst>
+                              <p:cond delay="0"/>
+                            </p:stCondLst>
+                            <p:childTnLst>
+                              <p:par>
+                                <p:cTn id="5" presetID="10" presetClass="entr" presetSubtype="0" fill="hold" grpId="0" nodeType="afterEffect">
+                                  <p:stCondLst>
+                                    <p:cond delay="0"/>
+                                  </p:stCondLst>
+                                  <p:childTnLst>
+                                    <p:set>
+                                      <p:cBhvr>
+                                        <p:cTn id="6" dur="1" fill="hold">
+                                          <p:stCondLst>
+                                            <p:cond delay="0"/>
+                                          </p:stCondLst>
+                                        </p:cTn>
+                                        <p:tgtEl>
+                                          <p:spTgt spid="7"/>
+                                        </p:tgtEl>
+                                        <p:attrNameLst>
+                                          <p:attrName>style.visibility</p:attrName>
+                                        </p:attrNameLst>
+                                      </p:cBhvr>
+                                      <p:to>
+                                        <p:strVal val="visible"/>
+                                      </p:to>
+                                    </p:set>
+                                    <p:animEffect transition="in" filter="fade">
+                                      <p:cBhvr>
+                                        <p:cTn id="7" dur="500"/>
+                                        <p:tgtEl>
+                                          <p:spTgt spid="7"/>
+                                        </p:tgtEl>
+                                      </p:cBhvr>
+                                    </p:animEffect>
+                                  </p:childTnLst>
+                                </p:cTn>
+                              </p:par>
+                              <p:par>
+                                <p:cTn id="8" presetID="10" presetClass="entr" presetSubtype="0" fill="hold" nodeType="withEffect">
+                                  <p:stCondLst>
+                                    <p:cond delay="200"/>
+                                  </p:stCondLst>
+                                  <p:childTnLst>
+                                    <p:set>
+                                      <p:cBhvr>
+                                        <p:cTn id="9" dur="1" fill="hold">
+                                          <p:stCondLst>
+                                            <p:cond delay="0"/>
+                                          </p:stCondLst>
+                                        </p:cTn>
+                                        <p:tgtEl>
+                                          <p:spTgt spid="5"/>
+                                        </p:tgtEl>
+                                        <p:attrNameLst>
+                                          <p:attrName>style.visibility</p:attrName>
+                                        </p:attrNameLst>
+                                      </p:cBhvr>
+                                      <p:to>
+                                        <p:strVal val="visible"/>
+                                      </p:to>
+                                    </p:set>
+                                    <p:animEffect transition="in" filter="fade">
+                                      <p:cBhvr>
+                                        <p:cTn id="10" dur="500"/>
+                                        <p:tgtEl>
+                                          <p:spTgt spid="5"/>
+                                        </p:tgtEl>
+                                      </p:cBhvr>
+                                    </p:animEffect>
+                                  </p:childTnLst>
+                                </p:cTn>
+                              </p:par>
+                            </p:childTnLst>
+                          </p:cTn>
+                        </p:par>
+                      </p:childTnLst>
+                    </p:cTn>
+                  </p:par>
+                </p:childTnLst>
+              </p:cTn>
+              <p:prevCondLst>
+                <p:cond evt="onPrev" delay="0">
+                  <p:tgtEl>
+                    <p:sldTgt/>
+                  </p:tgtEl>
+                </p:cond>
+              </p:prevCondLst>
+              <p:nextCondLst>
+                <p:cond evt="onNext" delay="0">
+                  <p:tgtEl>
+                    <p:sldTgt/>
+                  </p:tgtEl>
+                </p:cond>
+              </p:nextCondLst>
+            </p:seq>
+          </p:childTnLst>
+        </p:cTn>
+      </p:par>
+    </p:tnLst>
+    <p:bldLst>
+      <p:bldP spid="7" grpId="0" animBg="1"/>
+    </p:bldLst>
+  </p:timing>
 </p:sld>
 </file>
 
@@ -6768,6 +12420,98 @@
   <p:clrMapOvr>
     <a:masterClrMapping/>
   </p:clrMapOvr>
+  <p:transition spd="slow">
+    <p:push dir="u"/>
+  </p:transition>
+  <p:timing>
+    <p:tnLst>
+      <p:par>
+        <p:cTn id="1" dur="indefinite" restart="never" nodeType="tmRoot">
+          <p:childTnLst>
+            <p:seq concurrent="1" nextAc="seek">
+              <p:cTn id="2" dur="indefinite" nodeType="mainSeq">
+                <p:childTnLst>
+                  <p:par>
+                    <p:cTn id="3" fill="hold">
+                      <p:stCondLst>
+                        <p:cond delay="indefinite"/>
+                        <p:cond evt="onBegin" delay="0">
+                          <p:tn val="2"/>
+                        </p:cond>
+                      </p:stCondLst>
+                      <p:childTnLst>
+                        <p:par>
+                          <p:cTn id="4" fill="hold">
+                            <p:stCondLst>
+                              <p:cond delay="0"/>
+                            </p:stCondLst>
+                            <p:childTnLst>
+                              <p:par>
+                                <p:cTn id="5" presetID="10" presetClass="entr" presetSubtype="0" fill="hold" grpId="0" nodeType="afterEffect">
+                                  <p:stCondLst>
+                                    <p:cond delay="0"/>
+                                  </p:stCondLst>
+                                  <p:childTnLst>
+                                    <p:set>
+                                      <p:cBhvr>
+                                        <p:cTn id="6" dur="1" fill="hold">
+                                          <p:stCondLst>
+                                            <p:cond delay="0"/>
+                                          </p:stCondLst>
+                                        </p:cTn>
+                                        <p:tgtEl>
+                                          <p:spTgt spid="2"/>
+                                        </p:tgtEl>
+                                        <p:attrNameLst>
+                                          <p:attrName>style.visibility</p:attrName>
+                                        </p:attrNameLst>
+                                      </p:cBhvr>
+                                      <p:to>
+                                        <p:strVal val="visible"/>
+                                      </p:to>
+                                    </p:set>
+                                    <p:animEffect transition="in" filter="fade">
+                                      <p:cBhvr>
+                                        <p:cTn id="7" dur="500"/>
+                                        <p:tgtEl>
+                                          <p:spTgt spid="2"/>
+                                        </p:tgtEl>
+                                      </p:cBhvr>
+                                    </p:animEffect>
+                                  </p:childTnLst>
+                                </p:cTn>
+                              </p:par>
+                            </p:childTnLst>
+                          </p:cTn>
+                        </p:par>
+                      </p:childTnLst>
+                    </p:cTn>
+                  </p:par>
+                </p:childTnLst>
+              </p:cTn>
+              <p:prevCondLst>
+                <p:cond evt="onPrev" delay="0">
+                  <p:tgtEl>
+                    <p:sldTgt/>
+                  </p:tgtEl>
+                </p:cond>
+              </p:prevCondLst>
+              <p:nextCondLst>
+                <p:cond evt="onNext" delay="0">
+                  <p:tgtEl>
+                    <p:sldTgt/>
+                  </p:tgtEl>
+                </p:cond>
+              </p:nextCondLst>
+            </p:seq>
+          </p:childTnLst>
+        </p:cTn>
+      </p:par>
+    </p:tnLst>
+    <p:bldLst>
+      <p:bldP spid="2" grpId="0"/>
+    </p:bldLst>
+  </p:timing>
 </p:sld>
 </file>
 

--- a/Fájlok/Bemutató.pptx
+++ b/Fájlok/Bemutató.pptx
@@ -9,13 +9,13 @@
     <p:sldId id="257" r:id="rId3"/>
     <p:sldId id="262" r:id="rId4"/>
     <p:sldId id="263" r:id="rId5"/>
-    <p:sldId id="261" r:id="rId6"/>
-    <p:sldId id="260" r:id="rId7"/>
-    <p:sldId id="264" r:id="rId8"/>
-    <p:sldId id="268" r:id="rId9"/>
-    <p:sldId id="265" r:id="rId10"/>
-    <p:sldId id="259" r:id="rId11"/>
-    <p:sldId id="258" r:id="rId12"/>
+    <p:sldId id="258" r:id="rId6"/>
+    <p:sldId id="261" r:id="rId7"/>
+    <p:sldId id="260" r:id="rId8"/>
+    <p:sldId id="264" r:id="rId9"/>
+    <p:sldId id="268" r:id="rId10"/>
+    <p:sldId id="265" r:id="rId11"/>
+    <p:sldId id="259" r:id="rId12"/>
     <p:sldId id="266" r:id="rId13"/>
     <p:sldId id="267" r:id="rId14"/>
     <p:sldId id="269" r:id="rId15"/>
@@ -294,7 +294,7 @@
           <a:p>
             <a:fld id="{BD2B674F-1946-412B-A744-B9E1115EC83C}" type="datetimeFigureOut">
               <a:rPr lang="en-GB" smtClean="0"/>
-              <a:t>05/03/2026</a:t>
+              <a:t>06/03/2026</a:t>
             </a:fld>
             <a:endParaRPr lang="en-GB"/>
           </a:p>
@@ -624,7 +624,7 @@
           <a:p>
             <a:fld id="{BD2B674F-1946-412B-A744-B9E1115EC83C}" type="datetimeFigureOut">
               <a:rPr lang="en-GB" smtClean="0"/>
-              <a:t>05/03/2026</a:t>
+              <a:t>06/03/2026</a:t>
             </a:fld>
             <a:endParaRPr lang="en-GB"/>
           </a:p>
@@ -804,7 +804,7 @@
           <a:p>
             <a:fld id="{BD2B674F-1946-412B-A744-B9E1115EC83C}" type="datetimeFigureOut">
               <a:rPr lang="en-GB" smtClean="0"/>
-              <a:t>05/03/2026</a:t>
+              <a:t>06/03/2026</a:t>
             </a:fld>
             <a:endParaRPr lang="en-GB"/>
           </a:p>
@@ -974,7 +974,7 @@
           <a:p>
             <a:fld id="{BD2B674F-1946-412B-A744-B9E1115EC83C}" type="datetimeFigureOut">
               <a:rPr lang="en-GB" smtClean="0"/>
-              <a:t>05/03/2026</a:t>
+              <a:t>06/03/2026</a:t>
             </a:fld>
             <a:endParaRPr lang="en-GB"/>
           </a:p>
@@ -1251,7 +1251,7 @@
           <a:p>
             <a:fld id="{BD2B674F-1946-412B-A744-B9E1115EC83C}" type="datetimeFigureOut">
               <a:rPr lang="en-GB" smtClean="0"/>
-              <a:t>05/03/2026</a:t>
+              <a:t>06/03/2026</a:t>
             </a:fld>
             <a:endParaRPr lang="en-GB"/>
           </a:p>
@@ -1645,7 +1645,7 @@
           <a:p>
             <a:fld id="{BD2B674F-1946-412B-A744-B9E1115EC83C}" type="datetimeFigureOut">
               <a:rPr lang="en-GB" smtClean="0"/>
-              <a:t>05/03/2026</a:t>
+              <a:t>06/03/2026</a:t>
             </a:fld>
             <a:endParaRPr lang="en-GB"/>
           </a:p>
@@ -2122,7 +2122,7 @@
           <a:p>
             <a:fld id="{BD2B674F-1946-412B-A744-B9E1115EC83C}" type="datetimeFigureOut">
               <a:rPr lang="en-GB" smtClean="0"/>
-              <a:t>05/03/2026</a:t>
+              <a:t>06/03/2026</a:t>
             </a:fld>
             <a:endParaRPr lang="en-GB"/>
           </a:p>
@@ -2240,7 +2240,7 @@
           <a:p>
             <a:fld id="{BD2B674F-1946-412B-A744-B9E1115EC83C}" type="datetimeFigureOut">
               <a:rPr lang="en-GB" smtClean="0"/>
-              <a:t>05/03/2026</a:t>
+              <a:t>06/03/2026</a:t>
             </a:fld>
             <a:endParaRPr lang="en-GB"/>
           </a:p>
@@ -2335,7 +2335,7 @@
           <a:p>
             <a:fld id="{BD2B674F-1946-412B-A744-B9E1115EC83C}" type="datetimeFigureOut">
               <a:rPr lang="en-GB" smtClean="0"/>
-              <a:t>05/03/2026</a:t>
+              <a:t>06/03/2026</a:t>
             </a:fld>
             <a:endParaRPr lang="en-GB"/>
           </a:p>
@@ -2681,7 +2681,7 @@
           <a:p>
             <a:fld id="{BD2B674F-1946-412B-A744-B9E1115EC83C}" type="datetimeFigureOut">
               <a:rPr lang="en-GB" smtClean="0"/>
-              <a:t>05/03/2026</a:t>
+              <a:t>06/03/2026</a:t>
             </a:fld>
             <a:endParaRPr lang="en-GB"/>
           </a:p>
@@ -3069,7 +3069,7 @@
           <a:p>
             <a:fld id="{BD2B674F-1946-412B-A744-B9E1115EC83C}" type="datetimeFigureOut">
               <a:rPr lang="en-GB" smtClean="0"/>
-              <a:t>05/03/2026</a:t>
+              <a:t>06/03/2026</a:t>
             </a:fld>
             <a:endParaRPr lang="en-GB"/>
           </a:p>
@@ -3347,7 +3347,7 @@
           <a:p>
             <a:fld id="{BD2B674F-1946-412B-A744-B9E1115EC83C}" type="datetimeFigureOut">
               <a:rPr lang="en-GB" smtClean="0"/>
-              <a:t>05/03/2026</a:t>
+              <a:t>06/03/2026</a:t>
             </a:fld>
             <a:endParaRPr lang="en-GB"/>
           </a:p>
@@ -4045,11 +4045,11 @@
   <p:clrMapOvr>
     <a:masterClrMapping/>
   </p:clrMapOvr>
-  <mc:AlternateContent xmlns:mc="http://schemas.openxmlformats.org/markup-compatibility/2006">
-    <mc:Choice xmlns:p14="http://schemas.microsoft.com/office/powerpoint/2010/main" Requires="p14">
+  <mc:AlternateContent xmlns:mc="http://schemas.openxmlformats.org/markup-compatibility/2006" xmlns:p14="http://schemas.microsoft.com/office/powerpoint/2010/main">
+    <mc:Choice Requires="p14">
       <p:transition p14:dur="0" advClick="0"/>
     </mc:Choice>
-    <mc:Fallback>
+    <mc:Fallback xmlns="">
       <p:transition advClick="0"/>
     </mc:Fallback>
   </mc:AlternateContent>
@@ -4057,6 +4057,198 @@
 </file>
 
 <file path=ppt/slides/slide10.xml><?xml version="1.0" encoding="utf-8"?>
+<p:sld xmlns:a="http://schemas.openxmlformats.org/drawingml/2006/main" xmlns:r="http://schemas.openxmlformats.org/officeDocument/2006/relationships" xmlns:p="http://schemas.openxmlformats.org/presentationml/2006/main">
+  <p:cSld>
+    <p:spTree>
+      <p:nvGrpSpPr>
+        <p:cNvPr id="1" name=""/>
+        <p:cNvGrpSpPr/>
+        <p:nvPr/>
+      </p:nvGrpSpPr>
+      <p:grpSpPr>
+        <a:xfrm>
+          <a:off x="0" y="0"/>
+          <a:ext cx="0" cy="0"/>
+          <a:chOff x="0" y="0"/>
+          <a:chExt cx="0" cy="0"/>
+        </a:xfrm>
+      </p:grpSpPr>
+      <p:sp>
+        <p:nvSpPr>
+          <p:cNvPr id="2" name="Cím 1">
+            <a:extLst>
+              <a:ext uri="{FF2B5EF4-FFF2-40B4-BE49-F238E27FC236}">
+                <a16:creationId xmlns:a16="http://schemas.microsoft.com/office/drawing/2014/main" id="{D8736DA6-9D79-4DB7-90AD-09E3F55948CD}"/>
+              </a:ext>
+            </a:extLst>
+          </p:cNvPr>
+          <p:cNvSpPr>
+            <a:spLocks noGrp="1"/>
+          </p:cNvSpPr>
+          <p:nvPr>
+            <p:ph type="title"/>
+          </p:nvPr>
+        </p:nvSpPr>
+        <p:spPr>
+          <a:xfrm>
+            <a:off x="1371600" y="685800"/>
+            <a:ext cx="9601200" cy="861646"/>
+          </a:xfrm>
+        </p:spPr>
+        <p:txBody>
+          <a:bodyPr/>
+          <a:lstStyle/>
+          <a:p>
+            <a:r>
+              <a:rPr lang="hu-HU" dirty="0">
+                <a:solidFill>
+                  <a:schemeClr val="tx1"/>
+                </a:solidFill>
+                <a:latin typeface="Times New Roman" panose="02020603050405020304" pitchFamily="18" charset="0"/>
+                <a:cs typeface="Times New Roman" panose="02020603050405020304" pitchFamily="18" charset="0"/>
+              </a:rPr>
+              <a:t>Reszponzívitás</a:t>
+            </a:r>
+          </a:p>
+        </p:txBody>
+      </p:sp>
+      <p:sp>
+        <p:nvSpPr>
+          <p:cNvPr id="3" name="Tartalom helye 2">
+            <a:extLst>
+              <a:ext uri="{FF2B5EF4-FFF2-40B4-BE49-F238E27FC236}">
+                <a16:creationId xmlns:a16="http://schemas.microsoft.com/office/drawing/2014/main" id="{80692D13-F04E-4F4F-A667-DFE0B3C725A5}"/>
+              </a:ext>
+            </a:extLst>
+          </p:cNvPr>
+          <p:cNvSpPr>
+            <a:spLocks noGrp="1"/>
+          </p:cNvSpPr>
+          <p:nvPr>
+            <p:ph idx="1"/>
+          </p:nvPr>
+        </p:nvSpPr>
+        <p:spPr/>
+        <p:txBody>
+          <a:bodyPr/>
+          <a:lstStyle/>
+          <a:p>
+            <a:endParaRPr lang="hu-HU" dirty="0">
+              <a:solidFill>
+                <a:schemeClr val="tx1"/>
+              </a:solidFill>
+              <a:latin typeface="Times New Roman" panose="02020603050405020304" pitchFamily="18" charset="0"/>
+              <a:cs typeface="Times New Roman" panose="02020603050405020304" pitchFamily="18" charset="0"/>
+            </a:endParaRPr>
+          </a:p>
+        </p:txBody>
+      </p:sp>
+    </p:spTree>
+    <p:extLst>
+      <p:ext uri="{BB962C8B-B14F-4D97-AF65-F5344CB8AC3E}">
+        <p14:creationId xmlns:p14="http://schemas.microsoft.com/office/powerpoint/2010/main" val="1279272772"/>
+      </p:ext>
+    </p:extLst>
+  </p:cSld>
+  <p:clrMapOvr>
+    <a:masterClrMapping/>
+  </p:clrMapOvr>
+  <p:transition spd="slow">
+    <p:push dir="u"/>
+  </p:transition>
+  <p:timing>
+    <p:tnLst>
+      <p:par>
+        <p:cTn id="1" dur="indefinite" restart="never" nodeType="tmRoot">
+          <p:childTnLst>
+            <p:seq concurrent="1" nextAc="seek">
+              <p:cTn id="2" dur="indefinite" nodeType="mainSeq">
+                <p:childTnLst>
+                  <p:par>
+                    <p:cTn id="3" fill="hold">
+                      <p:stCondLst>
+                        <p:cond delay="indefinite"/>
+                        <p:cond evt="onBegin" delay="0">
+                          <p:tn val="2"/>
+                        </p:cond>
+                      </p:stCondLst>
+                      <p:childTnLst>
+                        <p:par>
+                          <p:cTn id="4" fill="hold">
+                            <p:stCondLst>
+                              <p:cond delay="0"/>
+                            </p:stCondLst>
+                            <p:childTnLst>
+                              <p:par>
+                                <p:cTn id="5" presetID="10" presetClass="entr" presetSubtype="0" fill="hold" grpId="0" nodeType="afterEffect">
+                                  <p:stCondLst>
+                                    <p:cond delay="0"/>
+                                  </p:stCondLst>
+                                  <p:childTnLst>
+                                    <p:set>
+                                      <p:cBhvr>
+                                        <p:cTn id="6" dur="1" fill="hold">
+                                          <p:stCondLst>
+                                            <p:cond delay="0"/>
+                                          </p:stCondLst>
+                                        </p:cTn>
+                                        <p:tgtEl>
+                                          <p:spTgt spid="2"/>
+                                        </p:tgtEl>
+                                        <p:attrNameLst>
+                                          <p:attrName>style.visibility</p:attrName>
+                                        </p:attrNameLst>
+                                      </p:cBhvr>
+                                      <p:to>
+                                        <p:strVal val="visible"/>
+                                      </p:to>
+                                    </p:set>
+                                    <p:animEffect transition="in" filter="fade">
+                                      <p:cBhvr>
+                                        <p:cTn id="7" dur="500"/>
+                                        <p:tgtEl>
+                                          <p:spTgt spid="2"/>
+                                        </p:tgtEl>
+                                      </p:cBhvr>
+                                    </p:animEffect>
+                                  </p:childTnLst>
+                                </p:cTn>
+                              </p:par>
+                            </p:childTnLst>
+                          </p:cTn>
+                        </p:par>
+                      </p:childTnLst>
+                    </p:cTn>
+                  </p:par>
+                </p:childTnLst>
+              </p:cTn>
+              <p:prevCondLst>
+                <p:cond evt="onPrev" delay="0">
+                  <p:tgtEl>
+                    <p:sldTgt/>
+                  </p:tgtEl>
+                </p:cond>
+              </p:prevCondLst>
+              <p:nextCondLst>
+                <p:cond evt="onNext" delay="0">
+                  <p:tgtEl>
+                    <p:sldTgt/>
+                  </p:tgtEl>
+                </p:cond>
+              </p:nextCondLst>
+            </p:seq>
+          </p:childTnLst>
+        </p:cTn>
+      </p:par>
+    </p:tnLst>
+    <p:bldLst>
+      <p:bldP spid="2" grpId="0"/>
+    </p:bldLst>
+  </p:timing>
+</p:sld>
+</file>
+
+<file path=ppt/slides/slide11.xml><?xml version="1.0" encoding="utf-8"?>
 <p:sld xmlns:a="http://schemas.openxmlformats.org/drawingml/2006/main" xmlns:r="http://schemas.openxmlformats.org/officeDocument/2006/relationships" xmlns:p="http://schemas.openxmlformats.org/presentationml/2006/main">
   <p:cSld>
     <p:spTree>
@@ -4976,7 +5168,3376 @@
 </p:sld>
 </file>
 
-<file path=ppt/slides/slide11.xml><?xml version="1.0" encoding="utf-8"?>
+<file path=ppt/slides/slide12.xml><?xml version="1.0" encoding="utf-8"?>
+<p:sld xmlns:a="http://schemas.openxmlformats.org/drawingml/2006/main" xmlns:r="http://schemas.openxmlformats.org/officeDocument/2006/relationships" xmlns:p="http://schemas.openxmlformats.org/presentationml/2006/main">
+  <p:cSld>
+    <p:spTree>
+      <p:nvGrpSpPr>
+        <p:cNvPr id="1" name=""/>
+        <p:cNvGrpSpPr/>
+        <p:nvPr/>
+      </p:nvGrpSpPr>
+      <p:grpSpPr>
+        <a:xfrm>
+          <a:off x="0" y="0"/>
+          <a:ext cx="0" cy="0"/>
+          <a:chOff x="0" y="0"/>
+          <a:chExt cx="0" cy="0"/>
+        </a:xfrm>
+      </p:grpSpPr>
+      <p:sp>
+        <p:nvSpPr>
+          <p:cNvPr id="2" name="Cím 1">
+            <a:extLst>
+              <a:ext uri="{FF2B5EF4-FFF2-40B4-BE49-F238E27FC236}">
+                <a16:creationId xmlns:a16="http://schemas.microsoft.com/office/drawing/2014/main" id="{D8736DA6-9D79-4DB7-90AD-09E3F55948CD}"/>
+              </a:ext>
+            </a:extLst>
+          </p:cNvPr>
+          <p:cNvSpPr>
+            <a:spLocks noGrp="1"/>
+          </p:cNvSpPr>
+          <p:nvPr>
+            <p:ph type="title"/>
+          </p:nvPr>
+        </p:nvSpPr>
+        <p:spPr>
+          <a:xfrm>
+            <a:off x="1371600" y="685800"/>
+            <a:ext cx="9601200" cy="838200"/>
+          </a:xfrm>
+        </p:spPr>
+        <p:txBody>
+          <a:bodyPr/>
+          <a:lstStyle/>
+          <a:p>
+            <a:r>
+              <a:rPr lang="hu-HU" dirty="0">
+                <a:solidFill>
+                  <a:schemeClr val="tx1"/>
+                </a:solidFill>
+                <a:latin typeface="Times New Roman" panose="02020603050405020304" pitchFamily="18" charset="0"/>
+                <a:cs typeface="Times New Roman" panose="02020603050405020304" pitchFamily="18" charset="0"/>
+              </a:rPr>
+              <a:t>Bővítési lehetőségek</a:t>
+            </a:r>
+          </a:p>
+        </p:txBody>
+      </p:sp>
+      <p:sp>
+        <p:nvSpPr>
+          <p:cNvPr id="3" name="Tartalom helye 2">
+            <a:extLst>
+              <a:ext uri="{FF2B5EF4-FFF2-40B4-BE49-F238E27FC236}">
+                <a16:creationId xmlns:a16="http://schemas.microsoft.com/office/drawing/2014/main" id="{80692D13-F04E-4F4F-A667-DFE0B3C725A5}"/>
+              </a:ext>
+            </a:extLst>
+          </p:cNvPr>
+          <p:cNvSpPr>
+            <a:spLocks noGrp="1"/>
+          </p:cNvSpPr>
+          <p:nvPr>
+            <p:ph idx="1"/>
+          </p:nvPr>
+        </p:nvSpPr>
+        <p:spPr>
+          <a:xfrm>
+            <a:off x="1371600" y="2286000"/>
+            <a:ext cx="8238067" cy="3581400"/>
+          </a:xfrm>
+        </p:spPr>
+        <p:txBody>
+          <a:bodyPr/>
+          <a:lstStyle/>
+          <a:p>
+            <a:r>
+              <a:rPr lang="hu-HU" dirty="0">
+                <a:solidFill>
+                  <a:schemeClr val="tx1"/>
+                </a:solidFill>
+                <a:latin typeface="Times New Roman" panose="02020603050405020304" pitchFamily="18" charset="0"/>
+                <a:cs typeface="Times New Roman" panose="02020603050405020304" pitchFamily="18" charset="0"/>
+              </a:rPr>
+              <a:t>Szállító cégekkel való kapcsolat</a:t>
+            </a:r>
+          </a:p>
+          <a:p>
+            <a:endParaRPr lang="hu-HU" dirty="0">
+              <a:solidFill>
+                <a:schemeClr val="tx1"/>
+              </a:solidFill>
+              <a:latin typeface="Times New Roman" panose="02020603050405020304" pitchFamily="18" charset="0"/>
+              <a:cs typeface="Times New Roman" panose="02020603050405020304" pitchFamily="18" charset="0"/>
+            </a:endParaRPr>
+          </a:p>
+        </p:txBody>
+      </p:sp>
+    </p:spTree>
+    <p:extLst>
+      <p:ext uri="{BB962C8B-B14F-4D97-AF65-F5344CB8AC3E}">
+        <p14:creationId xmlns:p14="http://schemas.microsoft.com/office/powerpoint/2010/main" val="3540532608"/>
+      </p:ext>
+    </p:extLst>
+  </p:cSld>
+  <p:clrMapOvr>
+    <a:masterClrMapping/>
+  </p:clrMapOvr>
+  <p:transition spd="slow">
+    <p:push dir="u"/>
+  </p:transition>
+  <p:timing>
+    <p:tnLst>
+      <p:par>
+        <p:cTn id="1" dur="indefinite" restart="never" nodeType="tmRoot">
+          <p:childTnLst>
+            <p:seq concurrent="1" nextAc="seek">
+              <p:cTn id="2" dur="indefinite" nodeType="mainSeq">
+                <p:childTnLst>
+                  <p:par>
+                    <p:cTn id="3" fill="hold">
+                      <p:stCondLst>
+                        <p:cond delay="indefinite"/>
+                        <p:cond evt="onBegin" delay="0">
+                          <p:tn val="2"/>
+                        </p:cond>
+                      </p:stCondLst>
+                      <p:childTnLst>
+                        <p:par>
+                          <p:cTn id="4" fill="hold">
+                            <p:stCondLst>
+                              <p:cond delay="0"/>
+                            </p:stCondLst>
+                            <p:childTnLst>
+                              <p:par>
+                                <p:cTn id="5" presetID="10" presetClass="entr" presetSubtype="0" fill="hold" grpId="0" nodeType="afterEffect">
+                                  <p:stCondLst>
+                                    <p:cond delay="0"/>
+                                  </p:stCondLst>
+                                  <p:childTnLst>
+                                    <p:set>
+                                      <p:cBhvr>
+                                        <p:cTn id="6" dur="1" fill="hold">
+                                          <p:stCondLst>
+                                            <p:cond delay="0"/>
+                                          </p:stCondLst>
+                                        </p:cTn>
+                                        <p:tgtEl>
+                                          <p:spTgt spid="2"/>
+                                        </p:tgtEl>
+                                        <p:attrNameLst>
+                                          <p:attrName>style.visibility</p:attrName>
+                                        </p:attrNameLst>
+                                      </p:cBhvr>
+                                      <p:to>
+                                        <p:strVal val="visible"/>
+                                      </p:to>
+                                    </p:set>
+                                    <p:animEffect transition="in" filter="fade">
+                                      <p:cBhvr>
+                                        <p:cTn id="7" dur="500"/>
+                                        <p:tgtEl>
+                                          <p:spTgt spid="2"/>
+                                        </p:tgtEl>
+                                      </p:cBhvr>
+                                    </p:animEffect>
+                                  </p:childTnLst>
+                                </p:cTn>
+                              </p:par>
+                            </p:childTnLst>
+                          </p:cTn>
+                        </p:par>
+                        <p:par>
+                          <p:cTn id="8" fill="hold">
+                            <p:stCondLst>
+                              <p:cond delay="500"/>
+                            </p:stCondLst>
+                            <p:childTnLst>
+                              <p:par>
+                                <p:cTn id="9" presetID="42" presetClass="entr" presetSubtype="0" fill="hold" grpId="0" nodeType="afterEffect">
+                                  <p:stCondLst>
+                                    <p:cond delay="200"/>
+                                  </p:stCondLst>
+                                  <p:childTnLst>
+                                    <p:set>
+                                      <p:cBhvr>
+                                        <p:cTn id="10" dur="1" fill="hold">
+                                          <p:stCondLst>
+                                            <p:cond delay="0"/>
+                                          </p:stCondLst>
+                                        </p:cTn>
+                                        <p:tgtEl>
+                                          <p:spTgt spid="3">
+                                            <p:txEl>
+                                              <p:pRg st="0" end="0"/>
+                                            </p:txEl>
+                                          </p:spTgt>
+                                        </p:tgtEl>
+                                        <p:attrNameLst>
+                                          <p:attrName>style.visibility</p:attrName>
+                                        </p:attrNameLst>
+                                      </p:cBhvr>
+                                      <p:to>
+                                        <p:strVal val="visible"/>
+                                      </p:to>
+                                    </p:set>
+                                    <p:animEffect transition="in" filter="fade">
+                                      <p:cBhvr>
+                                        <p:cTn id="11" dur="500"/>
+                                        <p:tgtEl>
+                                          <p:spTgt spid="3">
+                                            <p:txEl>
+                                              <p:pRg st="0" end="0"/>
+                                            </p:txEl>
+                                          </p:spTgt>
+                                        </p:tgtEl>
+                                      </p:cBhvr>
+                                    </p:animEffect>
+                                    <p:anim calcmode="lin" valueType="num">
+                                      <p:cBhvr>
+                                        <p:cTn id="12" dur="500" fill="hold"/>
+                                        <p:tgtEl>
+                                          <p:spTgt spid="3">
+                                            <p:txEl>
+                                              <p:pRg st="0" end="0"/>
+                                            </p:txEl>
+                                          </p:spTgt>
+                                        </p:tgtEl>
+                                        <p:attrNameLst>
+                                          <p:attrName>ppt_x</p:attrName>
+                                        </p:attrNameLst>
+                                      </p:cBhvr>
+                                      <p:tavLst>
+                                        <p:tav tm="0">
+                                          <p:val>
+                                            <p:strVal val="#ppt_x"/>
+                                          </p:val>
+                                        </p:tav>
+                                        <p:tav tm="100000">
+                                          <p:val>
+                                            <p:strVal val="#ppt_x"/>
+                                          </p:val>
+                                        </p:tav>
+                                      </p:tavLst>
+                                    </p:anim>
+                                    <p:anim calcmode="lin" valueType="num">
+                                      <p:cBhvr>
+                                        <p:cTn id="13" dur="500" fill="hold"/>
+                                        <p:tgtEl>
+                                          <p:spTgt spid="3">
+                                            <p:txEl>
+                                              <p:pRg st="0" end="0"/>
+                                            </p:txEl>
+                                          </p:spTgt>
+                                        </p:tgtEl>
+                                        <p:attrNameLst>
+                                          <p:attrName>ppt_y</p:attrName>
+                                        </p:attrNameLst>
+                                      </p:cBhvr>
+                                      <p:tavLst>
+                                        <p:tav tm="0">
+                                          <p:val>
+                                            <p:strVal val="#ppt_y+.1"/>
+                                          </p:val>
+                                        </p:tav>
+                                        <p:tav tm="100000">
+                                          <p:val>
+                                            <p:strVal val="#ppt_y"/>
+                                          </p:val>
+                                        </p:tav>
+                                      </p:tavLst>
+                                    </p:anim>
+                                  </p:childTnLst>
+                                </p:cTn>
+                              </p:par>
+                            </p:childTnLst>
+                          </p:cTn>
+                        </p:par>
+                      </p:childTnLst>
+                    </p:cTn>
+                  </p:par>
+                </p:childTnLst>
+              </p:cTn>
+              <p:prevCondLst>
+                <p:cond evt="onPrev" delay="0">
+                  <p:tgtEl>
+                    <p:sldTgt/>
+                  </p:tgtEl>
+                </p:cond>
+              </p:prevCondLst>
+              <p:nextCondLst>
+                <p:cond evt="onNext" delay="0">
+                  <p:tgtEl>
+                    <p:sldTgt/>
+                  </p:tgtEl>
+                </p:cond>
+              </p:nextCondLst>
+            </p:seq>
+          </p:childTnLst>
+        </p:cTn>
+      </p:par>
+    </p:tnLst>
+    <p:bldLst>
+      <p:bldP spid="2" grpId="0"/>
+      <p:bldP spid="3" grpId="0" build="p"/>
+    </p:bldLst>
+  </p:timing>
+</p:sld>
+</file>
+
+<file path=ppt/slides/slide13.xml><?xml version="1.0" encoding="utf-8"?>
+<p:sld xmlns:a="http://schemas.openxmlformats.org/drawingml/2006/main" xmlns:r="http://schemas.openxmlformats.org/officeDocument/2006/relationships" xmlns:p="http://schemas.openxmlformats.org/presentationml/2006/main">
+  <p:cSld>
+    <p:spTree>
+      <p:nvGrpSpPr>
+        <p:cNvPr id="1" name=""/>
+        <p:cNvGrpSpPr/>
+        <p:nvPr/>
+      </p:nvGrpSpPr>
+      <p:grpSpPr>
+        <a:xfrm>
+          <a:off x="0" y="0"/>
+          <a:ext cx="0" cy="0"/>
+          <a:chOff x="0" y="0"/>
+          <a:chExt cx="0" cy="0"/>
+        </a:xfrm>
+      </p:grpSpPr>
+      <p:sp>
+        <p:nvSpPr>
+          <p:cNvPr id="2" name="Cím 1">
+            <a:extLst>
+              <a:ext uri="{FF2B5EF4-FFF2-40B4-BE49-F238E27FC236}">
+                <a16:creationId xmlns:a16="http://schemas.microsoft.com/office/drawing/2014/main" id="{D8736DA6-9D79-4DB7-90AD-09E3F55948CD}"/>
+              </a:ext>
+            </a:extLst>
+          </p:cNvPr>
+          <p:cNvSpPr>
+            <a:spLocks noGrp="1"/>
+          </p:cNvSpPr>
+          <p:nvPr>
+            <p:ph type="title"/>
+          </p:nvPr>
+        </p:nvSpPr>
+        <p:spPr>
+          <a:xfrm>
+            <a:off x="1295400" y="2686050"/>
+            <a:ext cx="9601200" cy="963083"/>
+          </a:xfrm>
+        </p:spPr>
+        <p:txBody>
+          <a:bodyPr>
+            <a:normAutofit/>
+          </a:bodyPr>
+          <a:lstStyle/>
+          <a:p>
+            <a:pPr algn="ctr"/>
+            <a:r>
+              <a:rPr lang="hu-HU" sz="5400" dirty="0">
+                <a:solidFill>
+                  <a:schemeClr val="tx1"/>
+                </a:solidFill>
+                <a:latin typeface="Times New Roman" panose="02020603050405020304" pitchFamily="18" charset="0"/>
+                <a:cs typeface="Times New Roman" panose="02020603050405020304" pitchFamily="18" charset="0"/>
+              </a:rPr>
+              <a:t>Köszönjük a figyelmet!</a:t>
+            </a:r>
+          </a:p>
+        </p:txBody>
+      </p:sp>
+    </p:spTree>
+    <p:extLst>
+      <p:ext uri="{BB962C8B-B14F-4D97-AF65-F5344CB8AC3E}">
+        <p14:creationId xmlns:p14="http://schemas.microsoft.com/office/powerpoint/2010/main" val="3944811295"/>
+      </p:ext>
+    </p:extLst>
+  </p:cSld>
+  <p:clrMapOvr>
+    <a:masterClrMapping/>
+  </p:clrMapOvr>
+  <p:transition spd="slow">
+    <p:push dir="u"/>
+  </p:transition>
+  <p:timing>
+    <p:tnLst>
+      <p:par>
+        <p:cTn id="1" dur="indefinite" restart="never" nodeType="tmRoot">
+          <p:childTnLst>
+            <p:seq concurrent="1" nextAc="seek">
+              <p:cTn id="2" dur="indefinite" nodeType="mainSeq">
+                <p:childTnLst>
+                  <p:par>
+                    <p:cTn id="3" fill="hold">
+                      <p:stCondLst>
+                        <p:cond delay="indefinite"/>
+                        <p:cond evt="onBegin" delay="0">
+                          <p:tn val="2"/>
+                        </p:cond>
+                      </p:stCondLst>
+                      <p:childTnLst>
+                        <p:par>
+                          <p:cTn id="4" fill="hold">
+                            <p:stCondLst>
+                              <p:cond delay="0"/>
+                            </p:stCondLst>
+                            <p:childTnLst>
+                              <p:par>
+                                <p:cTn id="5" presetID="10" presetClass="entr" presetSubtype="0" fill="hold" grpId="0" nodeType="afterEffect">
+                                  <p:stCondLst>
+                                    <p:cond delay="0"/>
+                                  </p:stCondLst>
+                                  <p:childTnLst>
+                                    <p:set>
+                                      <p:cBhvr>
+                                        <p:cTn id="6" dur="1" fill="hold">
+                                          <p:stCondLst>
+                                            <p:cond delay="0"/>
+                                          </p:stCondLst>
+                                        </p:cTn>
+                                        <p:tgtEl>
+                                          <p:spTgt spid="2"/>
+                                        </p:tgtEl>
+                                        <p:attrNameLst>
+                                          <p:attrName>style.visibility</p:attrName>
+                                        </p:attrNameLst>
+                                      </p:cBhvr>
+                                      <p:to>
+                                        <p:strVal val="visible"/>
+                                      </p:to>
+                                    </p:set>
+                                    <p:animEffect transition="in" filter="fade">
+                                      <p:cBhvr>
+                                        <p:cTn id="7" dur="500"/>
+                                        <p:tgtEl>
+                                          <p:spTgt spid="2"/>
+                                        </p:tgtEl>
+                                      </p:cBhvr>
+                                    </p:animEffect>
+                                  </p:childTnLst>
+                                </p:cTn>
+                              </p:par>
+                            </p:childTnLst>
+                          </p:cTn>
+                        </p:par>
+                      </p:childTnLst>
+                    </p:cTn>
+                  </p:par>
+                </p:childTnLst>
+              </p:cTn>
+              <p:prevCondLst>
+                <p:cond evt="onPrev" delay="0">
+                  <p:tgtEl>
+                    <p:sldTgt/>
+                  </p:tgtEl>
+                </p:cond>
+              </p:prevCondLst>
+              <p:nextCondLst>
+                <p:cond evt="onNext" delay="0">
+                  <p:tgtEl>
+                    <p:sldTgt/>
+                  </p:tgtEl>
+                </p:cond>
+              </p:nextCondLst>
+            </p:seq>
+          </p:childTnLst>
+        </p:cTn>
+      </p:par>
+    </p:tnLst>
+    <p:bldLst>
+      <p:bldP spid="2" grpId="0"/>
+    </p:bldLst>
+  </p:timing>
+</p:sld>
+</file>
+
+<file path=ppt/slides/slide14.xml><?xml version="1.0" encoding="utf-8"?>
+<p:sld xmlns:a="http://schemas.openxmlformats.org/drawingml/2006/main" xmlns:r="http://schemas.openxmlformats.org/officeDocument/2006/relationships" xmlns:p="http://schemas.openxmlformats.org/presentationml/2006/main">
+  <p:cSld>
+    <p:spTree>
+      <p:nvGrpSpPr>
+        <p:cNvPr id="1" name=""/>
+        <p:cNvGrpSpPr/>
+        <p:nvPr/>
+      </p:nvGrpSpPr>
+      <p:grpSpPr>
+        <a:xfrm>
+          <a:off x="0" y="0"/>
+          <a:ext cx="0" cy="0"/>
+          <a:chOff x="0" y="0"/>
+          <a:chExt cx="0" cy="0"/>
+        </a:xfrm>
+      </p:grpSpPr>
+      <p:sp>
+        <p:nvSpPr>
+          <p:cNvPr id="3" name="Tartalom helye 2">
+            <a:extLst>
+              <a:ext uri="{FF2B5EF4-FFF2-40B4-BE49-F238E27FC236}">
+                <a16:creationId xmlns:a16="http://schemas.microsoft.com/office/drawing/2014/main" id="{F476053C-A6BC-4C33-8474-C12BD5859804}"/>
+              </a:ext>
+            </a:extLst>
+          </p:cNvPr>
+          <p:cNvSpPr>
+            <a:spLocks noGrp="1"/>
+          </p:cNvSpPr>
+          <p:nvPr>
+            <p:ph idx="1"/>
+          </p:nvPr>
+        </p:nvSpPr>
+        <p:spPr>
+          <a:xfrm>
+            <a:off x="1295400" y="2175933"/>
+            <a:ext cx="9601200" cy="3581400"/>
+          </a:xfrm>
+        </p:spPr>
+        <p:txBody>
+          <a:bodyPr>
+            <a:normAutofit fontScale="70000" lnSpcReduction="20000"/>
+          </a:bodyPr>
+          <a:lstStyle/>
+          <a:p>
+            <a:r>
+              <a:rPr lang="hu-HU" dirty="0">
+                <a:solidFill>
+                  <a:schemeClr val="tx1"/>
+                </a:solidFill>
+                <a:latin typeface="Times New Roman" panose="02020603050405020304" pitchFamily="18" charset="0"/>
+                <a:cs typeface="Times New Roman" panose="02020603050405020304" pitchFamily="18" charset="0"/>
+              </a:rPr>
+              <a:t>Prezentáció:</a:t>
+            </a:r>
+          </a:p>
+          <a:p>
+            <a:r>
+              <a:rPr lang="hu-HU" dirty="0">
+                <a:solidFill>
+                  <a:schemeClr val="tx1"/>
+                </a:solidFill>
+                <a:latin typeface="Times New Roman" panose="02020603050405020304" pitchFamily="18" charset="0"/>
+                <a:cs typeface="Times New Roman" panose="02020603050405020304" pitchFamily="18" charset="0"/>
+                <a:hlinkClick r:id="rId2"/>
+              </a:rPr>
+              <a:t>https://youtu.be/AAVxq0WvIJU?si=fdMjgQV-V2niKMhS</a:t>
+            </a:r>
+            <a:endParaRPr lang="hu-HU" dirty="0">
+              <a:solidFill>
+                <a:schemeClr val="tx1"/>
+              </a:solidFill>
+              <a:latin typeface="Times New Roman" panose="02020603050405020304" pitchFamily="18" charset="0"/>
+              <a:cs typeface="Times New Roman" panose="02020603050405020304" pitchFamily="18" charset="0"/>
+            </a:endParaRPr>
+          </a:p>
+          <a:p>
+            <a:r>
+              <a:rPr lang="hu-HU" sz="2000" b="0" i="0" u="none" strike="noStrike" baseline="0" dirty="0">
+                <a:solidFill>
+                  <a:srgbClr val="000000"/>
+                </a:solidFill>
+                <a:latin typeface="Times New Roman" panose="02020603050405020304" pitchFamily="18" charset="0"/>
+                <a:cs typeface="Times New Roman" panose="02020603050405020304" pitchFamily="18" charset="0"/>
+              </a:rPr>
+              <a:t>vizsgarész során a vizsgázó gyakorlati bemutatóval összekapcsolt szóbeli előadás formájában mutatja be a </a:t>
+            </a:r>
+          </a:p>
+          <a:p>
+            <a:r>
+              <a:rPr lang="hu-HU" sz="2000" b="0" i="0" u="none" strike="noStrike" baseline="0" dirty="0">
+                <a:solidFill>
+                  <a:srgbClr val="000000"/>
+                </a:solidFill>
+                <a:latin typeface="Times New Roman" panose="02020603050405020304" pitchFamily="18" charset="0"/>
+                <a:cs typeface="Times New Roman" panose="02020603050405020304" pitchFamily="18" charset="0"/>
+              </a:rPr>
+              <a:t>szoftver célját, </a:t>
+            </a:r>
+          </a:p>
+          <a:p>
+            <a:r>
+              <a:rPr lang="hu-HU" sz="2000" b="0" i="0" u="none" strike="noStrike" baseline="0" dirty="0">
+                <a:solidFill>
+                  <a:srgbClr val="000000"/>
+                </a:solidFill>
+                <a:latin typeface="Times New Roman" panose="02020603050405020304" pitchFamily="18" charset="0"/>
+                <a:cs typeface="Times New Roman" panose="02020603050405020304" pitchFamily="18" charset="0"/>
+              </a:rPr>
+              <a:t>műszaki megvalósítását, </a:t>
+            </a:r>
+          </a:p>
+          <a:p>
+            <a:r>
+              <a:rPr lang="hu-HU" sz="2000" b="0" i="0" u="none" strike="noStrike" baseline="0" dirty="0">
+                <a:solidFill>
+                  <a:srgbClr val="000000"/>
+                </a:solidFill>
+                <a:latin typeface="Times New Roman" panose="02020603050405020304" pitchFamily="18" charset="0"/>
+                <a:cs typeface="Times New Roman" panose="02020603050405020304" pitchFamily="18" charset="0"/>
+              </a:rPr>
+              <a:t>működését, </a:t>
+            </a:r>
+          </a:p>
+          <a:p>
+            <a:r>
+              <a:rPr lang="hu-HU" sz="2000" b="0" i="0" u="none" strike="noStrike" baseline="0" dirty="0">
+                <a:solidFill>
+                  <a:srgbClr val="000000"/>
+                </a:solidFill>
+                <a:latin typeface="Times New Roman" panose="02020603050405020304" pitchFamily="18" charset="0"/>
+                <a:cs typeface="Times New Roman" panose="02020603050405020304" pitchFamily="18" charset="0"/>
+              </a:rPr>
+              <a:t>forráskódját, </a:t>
+            </a:r>
+          </a:p>
+          <a:p>
+            <a:r>
+              <a:rPr lang="hu-HU" sz="2000" b="0" i="0" u="none" strike="noStrike" baseline="0" dirty="0">
+                <a:solidFill>
+                  <a:srgbClr val="000000"/>
+                </a:solidFill>
+                <a:latin typeface="Times New Roman" panose="02020603050405020304" pitchFamily="18" charset="0"/>
+                <a:cs typeface="Times New Roman" panose="02020603050405020304" pitchFamily="18" charset="0"/>
+              </a:rPr>
+              <a:t>a csapaton belüli munkamegosztást, a fejlesztési csapatban betöltött szerepét, a fejlesztés során használt projektszervezési eszközöket. </a:t>
+            </a:r>
+          </a:p>
+          <a:p>
+            <a:r>
+              <a:rPr lang="hu-HU" sz="2000" dirty="0">
+                <a:solidFill>
+                  <a:srgbClr val="000000"/>
+                </a:solidFill>
+                <a:latin typeface="Times New Roman" panose="02020603050405020304" pitchFamily="18" charset="0"/>
+                <a:cs typeface="Times New Roman" panose="02020603050405020304" pitchFamily="18" charset="0"/>
+              </a:rPr>
+              <a:t>Első dia szinte olyan mint a dokumentáció, mintával, dátummal „vizsgaremek” felirat</a:t>
+            </a:r>
+          </a:p>
+          <a:p>
+            <a:r>
+              <a:rPr lang="hu-HU" sz="2000" b="0" i="0" u="none" strike="noStrike" baseline="0" dirty="0">
+                <a:solidFill>
+                  <a:srgbClr val="000000"/>
+                </a:solidFill>
+                <a:latin typeface="Times New Roman" panose="02020603050405020304" pitchFamily="18" charset="0"/>
+                <a:cs typeface="Times New Roman" panose="02020603050405020304" pitchFamily="18" charset="0"/>
+              </a:rPr>
+              <a:t>Max 7 infó a dián</a:t>
+            </a:r>
+          </a:p>
+          <a:p>
+            <a:r>
+              <a:rPr lang="hu-HU" sz="2000" b="0" i="0" u="none" strike="noStrike" baseline="0" dirty="0">
+                <a:solidFill>
+                  <a:srgbClr val="000000"/>
+                </a:solidFill>
+                <a:latin typeface="Times New Roman" panose="02020603050405020304" pitchFamily="18" charset="0"/>
+                <a:cs typeface="Times New Roman" panose="02020603050405020304" pitchFamily="18" charset="0"/>
+              </a:rPr>
+              <a:t>Végén köszönjük a figyelmet</a:t>
+            </a:r>
+          </a:p>
+          <a:p>
+            <a:endParaRPr lang="hu-HU" dirty="0"/>
+          </a:p>
+        </p:txBody>
+      </p:sp>
+    </p:spTree>
+    <p:extLst>
+      <p:ext uri="{BB962C8B-B14F-4D97-AF65-F5344CB8AC3E}">
+        <p14:creationId xmlns:p14="http://schemas.microsoft.com/office/powerpoint/2010/main" val="2537151539"/>
+      </p:ext>
+    </p:extLst>
+  </p:cSld>
+  <p:clrMapOvr>
+    <a:masterClrMapping/>
+  </p:clrMapOvr>
+  <p:transition spd="slow">
+    <p:push dir="u"/>
+  </p:transition>
+  <p:timing>
+    <p:tnLst>
+      <p:par>
+        <p:cTn id="1" dur="indefinite" restart="never" nodeType="tmRoot">
+          <p:childTnLst>
+            <p:seq concurrent="1" nextAc="seek">
+              <p:cTn id="2" dur="indefinite" nodeType="mainSeq">
+                <p:childTnLst>
+                  <p:par>
+                    <p:cTn id="3" fill="hold">
+                      <p:stCondLst>
+                        <p:cond delay="indefinite"/>
+                        <p:cond evt="onBegin" delay="0">
+                          <p:tn val="2"/>
+                        </p:cond>
+                      </p:stCondLst>
+                      <p:childTnLst>
+                        <p:par>
+                          <p:cTn id="4" fill="hold">
+                            <p:stCondLst>
+                              <p:cond delay="0"/>
+                            </p:stCondLst>
+                            <p:childTnLst>
+                              <p:par>
+                                <p:cTn id="5" presetID="10" presetClass="entr" presetSubtype="0" fill="hold" grpId="0" nodeType="afterEffect">
+                                  <p:stCondLst>
+                                    <p:cond delay="0"/>
+                                  </p:stCondLst>
+                                  <p:childTnLst>
+                                    <p:set>
+                                      <p:cBhvr>
+                                        <p:cTn id="6" dur="1" fill="hold">
+                                          <p:stCondLst>
+                                            <p:cond delay="0"/>
+                                          </p:stCondLst>
+                                        </p:cTn>
+                                        <p:tgtEl>
+                                          <p:spTgt spid="3">
+                                            <p:txEl>
+                                              <p:pRg st="0" end="0"/>
+                                            </p:txEl>
+                                          </p:spTgt>
+                                        </p:tgtEl>
+                                        <p:attrNameLst>
+                                          <p:attrName>style.visibility</p:attrName>
+                                        </p:attrNameLst>
+                                      </p:cBhvr>
+                                      <p:to>
+                                        <p:strVal val="visible"/>
+                                      </p:to>
+                                    </p:set>
+                                    <p:animEffect transition="in" filter="fade">
+                                      <p:cBhvr>
+                                        <p:cTn id="7" dur="500"/>
+                                        <p:tgtEl>
+                                          <p:spTgt spid="3">
+                                            <p:txEl>
+                                              <p:pRg st="0" end="0"/>
+                                            </p:txEl>
+                                          </p:spTgt>
+                                        </p:tgtEl>
+                                      </p:cBhvr>
+                                    </p:animEffect>
+                                  </p:childTnLst>
+                                </p:cTn>
+                              </p:par>
+                            </p:childTnLst>
+                          </p:cTn>
+                        </p:par>
+                        <p:par>
+                          <p:cTn id="8" fill="hold">
+                            <p:stCondLst>
+                              <p:cond delay="500"/>
+                            </p:stCondLst>
+                            <p:childTnLst>
+                              <p:par>
+                                <p:cTn id="9" presetID="10" presetClass="entr" presetSubtype="0" fill="hold" grpId="0" nodeType="afterEffect">
+                                  <p:stCondLst>
+                                    <p:cond delay="0"/>
+                                  </p:stCondLst>
+                                  <p:childTnLst>
+                                    <p:set>
+                                      <p:cBhvr>
+                                        <p:cTn id="10" dur="1" fill="hold">
+                                          <p:stCondLst>
+                                            <p:cond delay="0"/>
+                                          </p:stCondLst>
+                                        </p:cTn>
+                                        <p:tgtEl>
+                                          <p:spTgt spid="3">
+                                            <p:txEl>
+                                              <p:pRg st="1" end="1"/>
+                                            </p:txEl>
+                                          </p:spTgt>
+                                        </p:tgtEl>
+                                        <p:attrNameLst>
+                                          <p:attrName>style.visibility</p:attrName>
+                                        </p:attrNameLst>
+                                      </p:cBhvr>
+                                      <p:to>
+                                        <p:strVal val="visible"/>
+                                      </p:to>
+                                    </p:set>
+                                    <p:animEffect transition="in" filter="fade">
+                                      <p:cBhvr>
+                                        <p:cTn id="11" dur="500"/>
+                                        <p:tgtEl>
+                                          <p:spTgt spid="3">
+                                            <p:txEl>
+                                              <p:pRg st="1" end="1"/>
+                                            </p:txEl>
+                                          </p:spTgt>
+                                        </p:tgtEl>
+                                      </p:cBhvr>
+                                    </p:animEffect>
+                                  </p:childTnLst>
+                                </p:cTn>
+                              </p:par>
+                            </p:childTnLst>
+                          </p:cTn>
+                        </p:par>
+                        <p:par>
+                          <p:cTn id="12" fill="hold">
+                            <p:stCondLst>
+                              <p:cond delay="1000"/>
+                            </p:stCondLst>
+                            <p:childTnLst>
+                              <p:par>
+                                <p:cTn id="13" presetID="10" presetClass="entr" presetSubtype="0" fill="hold" grpId="0" nodeType="afterEffect">
+                                  <p:stCondLst>
+                                    <p:cond delay="0"/>
+                                  </p:stCondLst>
+                                  <p:childTnLst>
+                                    <p:set>
+                                      <p:cBhvr>
+                                        <p:cTn id="14" dur="1" fill="hold">
+                                          <p:stCondLst>
+                                            <p:cond delay="0"/>
+                                          </p:stCondLst>
+                                        </p:cTn>
+                                        <p:tgtEl>
+                                          <p:spTgt spid="3">
+                                            <p:txEl>
+                                              <p:pRg st="2" end="2"/>
+                                            </p:txEl>
+                                          </p:spTgt>
+                                        </p:tgtEl>
+                                        <p:attrNameLst>
+                                          <p:attrName>style.visibility</p:attrName>
+                                        </p:attrNameLst>
+                                      </p:cBhvr>
+                                      <p:to>
+                                        <p:strVal val="visible"/>
+                                      </p:to>
+                                    </p:set>
+                                    <p:animEffect transition="in" filter="fade">
+                                      <p:cBhvr>
+                                        <p:cTn id="15" dur="500"/>
+                                        <p:tgtEl>
+                                          <p:spTgt spid="3">
+                                            <p:txEl>
+                                              <p:pRg st="2" end="2"/>
+                                            </p:txEl>
+                                          </p:spTgt>
+                                        </p:tgtEl>
+                                      </p:cBhvr>
+                                    </p:animEffect>
+                                  </p:childTnLst>
+                                </p:cTn>
+                              </p:par>
+                            </p:childTnLst>
+                          </p:cTn>
+                        </p:par>
+                        <p:par>
+                          <p:cTn id="16" fill="hold">
+                            <p:stCondLst>
+                              <p:cond delay="1500"/>
+                            </p:stCondLst>
+                            <p:childTnLst>
+                              <p:par>
+                                <p:cTn id="17" presetID="10" presetClass="entr" presetSubtype="0" fill="hold" grpId="0" nodeType="afterEffect">
+                                  <p:stCondLst>
+                                    <p:cond delay="0"/>
+                                  </p:stCondLst>
+                                  <p:childTnLst>
+                                    <p:set>
+                                      <p:cBhvr>
+                                        <p:cTn id="18" dur="1" fill="hold">
+                                          <p:stCondLst>
+                                            <p:cond delay="0"/>
+                                          </p:stCondLst>
+                                        </p:cTn>
+                                        <p:tgtEl>
+                                          <p:spTgt spid="3">
+                                            <p:txEl>
+                                              <p:pRg st="3" end="3"/>
+                                            </p:txEl>
+                                          </p:spTgt>
+                                        </p:tgtEl>
+                                        <p:attrNameLst>
+                                          <p:attrName>style.visibility</p:attrName>
+                                        </p:attrNameLst>
+                                      </p:cBhvr>
+                                      <p:to>
+                                        <p:strVal val="visible"/>
+                                      </p:to>
+                                    </p:set>
+                                    <p:animEffect transition="in" filter="fade">
+                                      <p:cBhvr>
+                                        <p:cTn id="19" dur="500"/>
+                                        <p:tgtEl>
+                                          <p:spTgt spid="3">
+                                            <p:txEl>
+                                              <p:pRg st="3" end="3"/>
+                                            </p:txEl>
+                                          </p:spTgt>
+                                        </p:tgtEl>
+                                      </p:cBhvr>
+                                    </p:animEffect>
+                                  </p:childTnLst>
+                                </p:cTn>
+                              </p:par>
+                            </p:childTnLst>
+                          </p:cTn>
+                        </p:par>
+                        <p:par>
+                          <p:cTn id="20" fill="hold">
+                            <p:stCondLst>
+                              <p:cond delay="2000"/>
+                            </p:stCondLst>
+                            <p:childTnLst>
+                              <p:par>
+                                <p:cTn id="21" presetID="10" presetClass="entr" presetSubtype="0" fill="hold" grpId="0" nodeType="afterEffect">
+                                  <p:stCondLst>
+                                    <p:cond delay="0"/>
+                                  </p:stCondLst>
+                                  <p:childTnLst>
+                                    <p:set>
+                                      <p:cBhvr>
+                                        <p:cTn id="22" dur="1" fill="hold">
+                                          <p:stCondLst>
+                                            <p:cond delay="0"/>
+                                          </p:stCondLst>
+                                        </p:cTn>
+                                        <p:tgtEl>
+                                          <p:spTgt spid="3">
+                                            <p:txEl>
+                                              <p:pRg st="4" end="4"/>
+                                            </p:txEl>
+                                          </p:spTgt>
+                                        </p:tgtEl>
+                                        <p:attrNameLst>
+                                          <p:attrName>style.visibility</p:attrName>
+                                        </p:attrNameLst>
+                                      </p:cBhvr>
+                                      <p:to>
+                                        <p:strVal val="visible"/>
+                                      </p:to>
+                                    </p:set>
+                                    <p:animEffect transition="in" filter="fade">
+                                      <p:cBhvr>
+                                        <p:cTn id="23" dur="500"/>
+                                        <p:tgtEl>
+                                          <p:spTgt spid="3">
+                                            <p:txEl>
+                                              <p:pRg st="4" end="4"/>
+                                            </p:txEl>
+                                          </p:spTgt>
+                                        </p:tgtEl>
+                                      </p:cBhvr>
+                                    </p:animEffect>
+                                  </p:childTnLst>
+                                </p:cTn>
+                              </p:par>
+                            </p:childTnLst>
+                          </p:cTn>
+                        </p:par>
+                        <p:par>
+                          <p:cTn id="24" fill="hold">
+                            <p:stCondLst>
+                              <p:cond delay="2500"/>
+                            </p:stCondLst>
+                            <p:childTnLst>
+                              <p:par>
+                                <p:cTn id="25" presetID="10" presetClass="entr" presetSubtype="0" fill="hold" grpId="0" nodeType="afterEffect">
+                                  <p:stCondLst>
+                                    <p:cond delay="0"/>
+                                  </p:stCondLst>
+                                  <p:childTnLst>
+                                    <p:set>
+                                      <p:cBhvr>
+                                        <p:cTn id="26" dur="1" fill="hold">
+                                          <p:stCondLst>
+                                            <p:cond delay="0"/>
+                                          </p:stCondLst>
+                                        </p:cTn>
+                                        <p:tgtEl>
+                                          <p:spTgt spid="3">
+                                            <p:txEl>
+                                              <p:pRg st="5" end="5"/>
+                                            </p:txEl>
+                                          </p:spTgt>
+                                        </p:tgtEl>
+                                        <p:attrNameLst>
+                                          <p:attrName>style.visibility</p:attrName>
+                                        </p:attrNameLst>
+                                      </p:cBhvr>
+                                      <p:to>
+                                        <p:strVal val="visible"/>
+                                      </p:to>
+                                    </p:set>
+                                    <p:animEffect transition="in" filter="fade">
+                                      <p:cBhvr>
+                                        <p:cTn id="27" dur="500"/>
+                                        <p:tgtEl>
+                                          <p:spTgt spid="3">
+                                            <p:txEl>
+                                              <p:pRg st="5" end="5"/>
+                                            </p:txEl>
+                                          </p:spTgt>
+                                        </p:tgtEl>
+                                      </p:cBhvr>
+                                    </p:animEffect>
+                                  </p:childTnLst>
+                                </p:cTn>
+                              </p:par>
+                            </p:childTnLst>
+                          </p:cTn>
+                        </p:par>
+                        <p:par>
+                          <p:cTn id="28" fill="hold">
+                            <p:stCondLst>
+                              <p:cond delay="3000"/>
+                            </p:stCondLst>
+                            <p:childTnLst>
+                              <p:par>
+                                <p:cTn id="29" presetID="10" presetClass="entr" presetSubtype="0" fill="hold" grpId="0" nodeType="afterEffect">
+                                  <p:stCondLst>
+                                    <p:cond delay="0"/>
+                                  </p:stCondLst>
+                                  <p:childTnLst>
+                                    <p:set>
+                                      <p:cBhvr>
+                                        <p:cTn id="30" dur="1" fill="hold">
+                                          <p:stCondLst>
+                                            <p:cond delay="0"/>
+                                          </p:stCondLst>
+                                        </p:cTn>
+                                        <p:tgtEl>
+                                          <p:spTgt spid="3">
+                                            <p:txEl>
+                                              <p:pRg st="6" end="6"/>
+                                            </p:txEl>
+                                          </p:spTgt>
+                                        </p:tgtEl>
+                                        <p:attrNameLst>
+                                          <p:attrName>style.visibility</p:attrName>
+                                        </p:attrNameLst>
+                                      </p:cBhvr>
+                                      <p:to>
+                                        <p:strVal val="visible"/>
+                                      </p:to>
+                                    </p:set>
+                                    <p:animEffect transition="in" filter="fade">
+                                      <p:cBhvr>
+                                        <p:cTn id="31" dur="500"/>
+                                        <p:tgtEl>
+                                          <p:spTgt spid="3">
+                                            <p:txEl>
+                                              <p:pRg st="6" end="6"/>
+                                            </p:txEl>
+                                          </p:spTgt>
+                                        </p:tgtEl>
+                                      </p:cBhvr>
+                                    </p:animEffect>
+                                  </p:childTnLst>
+                                </p:cTn>
+                              </p:par>
+                            </p:childTnLst>
+                          </p:cTn>
+                        </p:par>
+                        <p:par>
+                          <p:cTn id="32" fill="hold">
+                            <p:stCondLst>
+                              <p:cond delay="3500"/>
+                            </p:stCondLst>
+                            <p:childTnLst>
+                              <p:par>
+                                <p:cTn id="33" presetID="10" presetClass="entr" presetSubtype="0" fill="hold" grpId="0" nodeType="afterEffect">
+                                  <p:stCondLst>
+                                    <p:cond delay="0"/>
+                                  </p:stCondLst>
+                                  <p:childTnLst>
+                                    <p:set>
+                                      <p:cBhvr>
+                                        <p:cTn id="34" dur="1" fill="hold">
+                                          <p:stCondLst>
+                                            <p:cond delay="0"/>
+                                          </p:stCondLst>
+                                        </p:cTn>
+                                        <p:tgtEl>
+                                          <p:spTgt spid="3">
+                                            <p:txEl>
+                                              <p:pRg st="7" end="7"/>
+                                            </p:txEl>
+                                          </p:spTgt>
+                                        </p:tgtEl>
+                                        <p:attrNameLst>
+                                          <p:attrName>style.visibility</p:attrName>
+                                        </p:attrNameLst>
+                                      </p:cBhvr>
+                                      <p:to>
+                                        <p:strVal val="visible"/>
+                                      </p:to>
+                                    </p:set>
+                                    <p:animEffect transition="in" filter="fade">
+                                      <p:cBhvr>
+                                        <p:cTn id="35" dur="500"/>
+                                        <p:tgtEl>
+                                          <p:spTgt spid="3">
+                                            <p:txEl>
+                                              <p:pRg st="7" end="7"/>
+                                            </p:txEl>
+                                          </p:spTgt>
+                                        </p:tgtEl>
+                                      </p:cBhvr>
+                                    </p:animEffect>
+                                  </p:childTnLst>
+                                </p:cTn>
+                              </p:par>
+                            </p:childTnLst>
+                          </p:cTn>
+                        </p:par>
+                        <p:par>
+                          <p:cTn id="36" fill="hold">
+                            <p:stCondLst>
+                              <p:cond delay="4000"/>
+                            </p:stCondLst>
+                            <p:childTnLst>
+                              <p:par>
+                                <p:cTn id="37" presetID="10" presetClass="entr" presetSubtype="0" fill="hold" grpId="0" nodeType="afterEffect">
+                                  <p:stCondLst>
+                                    <p:cond delay="0"/>
+                                  </p:stCondLst>
+                                  <p:childTnLst>
+                                    <p:set>
+                                      <p:cBhvr>
+                                        <p:cTn id="38" dur="1" fill="hold">
+                                          <p:stCondLst>
+                                            <p:cond delay="0"/>
+                                          </p:stCondLst>
+                                        </p:cTn>
+                                        <p:tgtEl>
+                                          <p:spTgt spid="3">
+                                            <p:txEl>
+                                              <p:pRg st="8" end="8"/>
+                                            </p:txEl>
+                                          </p:spTgt>
+                                        </p:tgtEl>
+                                        <p:attrNameLst>
+                                          <p:attrName>style.visibility</p:attrName>
+                                        </p:attrNameLst>
+                                      </p:cBhvr>
+                                      <p:to>
+                                        <p:strVal val="visible"/>
+                                      </p:to>
+                                    </p:set>
+                                    <p:animEffect transition="in" filter="fade">
+                                      <p:cBhvr>
+                                        <p:cTn id="39" dur="500"/>
+                                        <p:tgtEl>
+                                          <p:spTgt spid="3">
+                                            <p:txEl>
+                                              <p:pRg st="8" end="8"/>
+                                            </p:txEl>
+                                          </p:spTgt>
+                                        </p:tgtEl>
+                                      </p:cBhvr>
+                                    </p:animEffect>
+                                  </p:childTnLst>
+                                </p:cTn>
+                              </p:par>
+                            </p:childTnLst>
+                          </p:cTn>
+                        </p:par>
+                        <p:par>
+                          <p:cTn id="40" fill="hold">
+                            <p:stCondLst>
+                              <p:cond delay="4500"/>
+                            </p:stCondLst>
+                            <p:childTnLst>
+                              <p:par>
+                                <p:cTn id="41" presetID="10" presetClass="entr" presetSubtype="0" fill="hold" grpId="0" nodeType="afterEffect">
+                                  <p:stCondLst>
+                                    <p:cond delay="0"/>
+                                  </p:stCondLst>
+                                  <p:childTnLst>
+                                    <p:set>
+                                      <p:cBhvr>
+                                        <p:cTn id="42" dur="1" fill="hold">
+                                          <p:stCondLst>
+                                            <p:cond delay="0"/>
+                                          </p:stCondLst>
+                                        </p:cTn>
+                                        <p:tgtEl>
+                                          <p:spTgt spid="3">
+                                            <p:txEl>
+                                              <p:pRg st="9" end="9"/>
+                                            </p:txEl>
+                                          </p:spTgt>
+                                        </p:tgtEl>
+                                        <p:attrNameLst>
+                                          <p:attrName>style.visibility</p:attrName>
+                                        </p:attrNameLst>
+                                      </p:cBhvr>
+                                      <p:to>
+                                        <p:strVal val="visible"/>
+                                      </p:to>
+                                    </p:set>
+                                    <p:animEffect transition="in" filter="fade">
+                                      <p:cBhvr>
+                                        <p:cTn id="43" dur="500"/>
+                                        <p:tgtEl>
+                                          <p:spTgt spid="3">
+                                            <p:txEl>
+                                              <p:pRg st="9" end="9"/>
+                                            </p:txEl>
+                                          </p:spTgt>
+                                        </p:tgtEl>
+                                      </p:cBhvr>
+                                    </p:animEffect>
+                                  </p:childTnLst>
+                                </p:cTn>
+                              </p:par>
+                            </p:childTnLst>
+                          </p:cTn>
+                        </p:par>
+                        <p:par>
+                          <p:cTn id="44" fill="hold">
+                            <p:stCondLst>
+                              <p:cond delay="5000"/>
+                            </p:stCondLst>
+                            <p:childTnLst>
+                              <p:par>
+                                <p:cTn id="45" presetID="10" presetClass="entr" presetSubtype="0" fill="hold" grpId="0" nodeType="afterEffect">
+                                  <p:stCondLst>
+                                    <p:cond delay="0"/>
+                                  </p:stCondLst>
+                                  <p:childTnLst>
+                                    <p:set>
+                                      <p:cBhvr>
+                                        <p:cTn id="46" dur="1" fill="hold">
+                                          <p:stCondLst>
+                                            <p:cond delay="0"/>
+                                          </p:stCondLst>
+                                        </p:cTn>
+                                        <p:tgtEl>
+                                          <p:spTgt spid="3">
+                                            <p:txEl>
+                                              <p:pRg st="10" end="10"/>
+                                            </p:txEl>
+                                          </p:spTgt>
+                                        </p:tgtEl>
+                                        <p:attrNameLst>
+                                          <p:attrName>style.visibility</p:attrName>
+                                        </p:attrNameLst>
+                                      </p:cBhvr>
+                                      <p:to>
+                                        <p:strVal val="visible"/>
+                                      </p:to>
+                                    </p:set>
+                                    <p:animEffect transition="in" filter="fade">
+                                      <p:cBhvr>
+                                        <p:cTn id="47" dur="500"/>
+                                        <p:tgtEl>
+                                          <p:spTgt spid="3">
+                                            <p:txEl>
+                                              <p:pRg st="10" end="10"/>
+                                            </p:txEl>
+                                          </p:spTgt>
+                                        </p:tgtEl>
+                                      </p:cBhvr>
+                                    </p:animEffect>
+                                  </p:childTnLst>
+                                </p:cTn>
+                              </p:par>
+                            </p:childTnLst>
+                          </p:cTn>
+                        </p:par>
+                      </p:childTnLst>
+                    </p:cTn>
+                  </p:par>
+                </p:childTnLst>
+              </p:cTn>
+              <p:prevCondLst>
+                <p:cond evt="onPrev" delay="0">
+                  <p:tgtEl>
+                    <p:sldTgt/>
+                  </p:tgtEl>
+                </p:cond>
+              </p:prevCondLst>
+              <p:nextCondLst>
+                <p:cond evt="onNext" delay="0">
+                  <p:tgtEl>
+                    <p:sldTgt/>
+                  </p:tgtEl>
+                </p:cond>
+              </p:nextCondLst>
+            </p:seq>
+          </p:childTnLst>
+        </p:cTn>
+      </p:par>
+    </p:tnLst>
+    <p:bldLst>
+      <p:bldP spid="3" grpId="0" uiExpand="1" build="p"/>
+    </p:bldLst>
+  </p:timing>
+</p:sld>
+</file>
+
+<file path=ppt/slides/slide2.xml><?xml version="1.0" encoding="utf-8"?>
+<p:sld xmlns:a="http://schemas.openxmlformats.org/drawingml/2006/main" xmlns:r="http://schemas.openxmlformats.org/officeDocument/2006/relationships" xmlns:p="http://schemas.openxmlformats.org/presentationml/2006/main">
+  <p:cSld>
+    <p:spTree>
+      <p:nvGrpSpPr>
+        <p:cNvPr id="1" name=""/>
+        <p:cNvGrpSpPr/>
+        <p:nvPr/>
+      </p:nvGrpSpPr>
+      <p:grpSpPr>
+        <a:xfrm>
+          <a:off x="0" y="0"/>
+          <a:ext cx="0" cy="0"/>
+          <a:chOff x="0" y="0"/>
+          <a:chExt cx="0" cy="0"/>
+        </a:xfrm>
+      </p:grpSpPr>
+      <p:sp>
+        <p:nvSpPr>
+          <p:cNvPr id="2" name="Cím 1">
+            <a:extLst>
+              <a:ext uri="{FF2B5EF4-FFF2-40B4-BE49-F238E27FC236}">
+                <a16:creationId xmlns:a16="http://schemas.microsoft.com/office/drawing/2014/main" id="{D8736DA6-9D79-4DB7-90AD-09E3F55948CD}"/>
+              </a:ext>
+            </a:extLst>
+          </p:cNvPr>
+          <p:cNvSpPr>
+            <a:spLocks noGrp="1"/>
+          </p:cNvSpPr>
+          <p:nvPr>
+            <p:ph type="title"/>
+          </p:nvPr>
+        </p:nvSpPr>
+        <p:spPr/>
+        <p:txBody>
+          <a:bodyPr/>
+          <a:lstStyle/>
+          <a:p>
+            <a:r>
+              <a:rPr lang="hu-HU" dirty="0">
+                <a:solidFill>
+                  <a:schemeClr val="tx1"/>
+                </a:solidFill>
+                <a:latin typeface="Times New Roman" panose="02020603050405020304" pitchFamily="18" charset="0"/>
+                <a:cs typeface="Times New Roman" panose="02020603050405020304" pitchFamily="18" charset="0"/>
+              </a:rPr>
+              <a:t>A projekt bemutatása</a:t>
+            </a:r>
+          </a:p>
+        </p:txBody>
+      </p:sp>
+      <p:sp>
+        <p:nvSpPr>
+          <p:cNvPr id="4" name="Tartalom helye 2">
+            <a:extLst>
+              <a:ext uri="{FF2B5EF4-FFF2-40B4-BE49-F238E27FC236}">
+                <a16:creationId xmlns:a16="http://schemas.microsoft.com/office/drawing/2014/main" id="{001DDAED-5686-4A0D-A235-F749239A7FA3}"/>
+              </a:ext>
+            </a:extLst>
+          </p:cNvPr>
+          <p:cNvSpPr>
+            <a:spLocks noGrp="1"/>
+          </p:cNvSpPr>
+          <p:nvPr>
+            <p:ph idx="1"/>
+          </p:nvPr>
+        </p:nvSpPr>
+        <p:spPr>
+          <a:xfrm>
+            <a:off x="1371600" y="1909233"/>
+            <a:ext cx="5858933" cy="3581400"/>
+          </a:xfrm>
+        </p:spPr>
+        <p:txBody>
+          <a:bodyPr/>
+          <a:lstStyle/>
+          <a:p>
+            <a:pPr>
+              <a:buFont typeface="Wingdings" panose="05000000000000000000" pitchFamily="2" charset="2"/>
+              <a:buChar char="Ø"/>
+            </a:pPr>
+            <a:endParaRPr lang="hu-HU" dirty="0">
+              <a:solidFill>
+                <a:schemeClr val="tx1"/>
+              </a:solidFill>
+              <a:latin typeface="Times New Roman" panose="02020603050405020304" pitchFamily="18" charset="0"/>
+              <a:cs typeface="Times New Roman" panose="02020603050405020304" pitchFamily="18" charset="0"/>
+            </a:endParaRPr>
+          </a:p>
+        </p:txBody>
+      </p:sp>
+    </p:spTree>
+    <p:extLst>
+      <p:ext uri="{BB962C8B-B14F-4D97-AF65-F5344CB8AC3E}">
+        <p14:creationId xmlns:p14="http://schemas.microsoft.com/office/powerpoint/2010/main" val="1081421890"/>
+      </p:ext>
+    </p:extLst>
+  </p:cSld>
+  <p:clrMapOvr>
+    <a:masterClrMapping/>
+  </p:clrMapOvr>
+  <p:transition spd="slow">
+    <p:push dir="u"/>
+  </p:transition>
+  <p:timing>
+    <p:tnLst>
+      <p:par>
+        <p:cTn id="1" dur="indefinite" restart="never" nodeType="tmRoot">
+          <p:childTnLst>
+            <p:seq concurrent="1" nextAc="seek">
+              <p:cTn id="2" dur="indefinite" nodeType="mainSeq">
+                <p:childTnLst>
+                  <p:par>
+                    <p:cTn id="3" fill="hold">
+                      <p:stCondLst>
+                        <p:cond delay="indefinite"/>
+                        <p:cond evt="onBegin" delay="0">
+                          <p:tn val="2"/>
+                        </p:cond>
+                      </p:stCondLst>
+                      <p:childTnLst>
+                        <p:par>
+                          <p:cTn id="4" fill="hold">
+                            <p:stCondLst>
+                              <p:cond delay="0"/>
+                            </p:stCondLst>
+                            <p:childTnLst>
+                              <p:par>
+                                <p:cTn id="5" presetID="10" presetClass="entr" presetSubtype="0" fill="hold" grpId="0" nodeType="afterEffect">
+                                  <p:stCondLst>
+                                    <p:cond delay="0"/>
+                                  </p:stCondLst>
+                                  <p:childTnLst>
+                                    <p:set>
+                                      <p:cBhvr>
+                                        <p:cTn id="6" dur="1" fill="hold">
+                                          <p:stCondLst>
+                                            <p:cond delay="0"/>
+                                          </p:stCondLst>
+                                        </p:cTn>
+                                        <p:tgtEl>
+                                          <p:spTgt spid="2"/>
+                                        </p:tgtEl>
+                                        <p:attrNameLst>
+                                          <p:attrName>style.visibility</p:attrName>
+                                        </p:attrNameLst>
+                                      </p:cBhvr>
+                                      <p:to>
+                                        <p:strVal val="visible"/>
+                                      </p:to>
+                                    </p:set>
+                                    <p:animEffect transition="in" filter="fade">
+                                      <p:cBhvr>
+                                        <p:cTn id="7" dur="500"/>
+                                        <p:tgtEl>
+                                          <p:spTgt spid="2"/>
+                                        </p:tgtEl>
+                                      </p:cBhvr>
+                                    </p:animEffect>
+                                  </p:childTnLst>
+                                </p:cTn>
+                              </p:par>
+                            </p:childTnLst>
+                          </p:cTn>
+                        </p:par>
+                      </p:childTnLst>
+                    </p:cTn>
+                  </p:par>
+                </p:childTnLst>
+              </p:cTn>
+              <p:prevCondLst>
+                <p:cond evt="onPrev" delay="0">
+                  <p:tgtEl>
+                    <p:sldTgt/>
+                  </p:tgtEl>
+                </p:cond>
+              </p:prevCondLst>
+              <p:nextCondLst>
+                <p:cond evt="onNext" delay="0">
+                  <p:tgtEl>
+                    <p:sldTgt/>
+                  </p:tgtEl>
+                </p:cond>
+              </p:nextCondLst>
+            </p:seq>
+          </p:childTnLst>
+        </p:cTn>
+      </p:par>
+    </p:tnLst>
+    <p:bldLst>
+      <p:bldP spid="2" grpId="0"/>
+    </p:bldLst>
+  </p:timing>
+</p:sld>
+</file>
+
+<file path=ppt/slides/slide3.xml><?xml version="1.0" encoding="utf-8"?>
+<p:sld xmlns:a="http://schemas.openxmlformats.org/drawingml/2006/main" xmlns:r="http://schemas.openxmlformats.org/officeDocument/2006/relationships" xmlns:p="http://schemas.openxmlformats.org/presentationml/2006/main">
+  <p:cSld>
+    <p:spTree>
+      <p:nvGrpSpPr>
+        <p:cNvPr id="1" name=""/>
+        <p:cNvGrpSpPr/>
+        <p:nvPr/>
+      </p:nvGrpSpPr>
+      <p:grpSpPr>
+        <a:xfrm>
+          <a:off x="0" y="0"/>
+          <a:ext cx="0" cy="0"/>
+          <a:chOff x="0" y="0"/>
+          <a:chExt cx="0" cy="0"/>
+        </a:xfrm>
+      </p:grpSpPr>
+      <p:sp>
+        <p:nvSpPr>
+          <p:cNvPr id="2" name="Cím 1">
+            <a:extLst>
+              <a:ext uri="{FF2B5EF4-FFF2-40B4-BE49-F238E27FC236}">
+                <a16:creationId xmlns:a16="http://schemas.microsoft.com/office/drawing/2014/main" id="{D8736DA6-9D79-4DB7-90AD-09E3F55948CD}"/>
+              </a:ext>
+            </a:extLst>
+          </p:cNvPr>
+          <p:cNvSpPr>
+            <a:spLocks noGrp="1"/>
+          </p:cNvSpPr>
+          <p:nvPr>
+            <p:ph type="title"/>
+          </p:nvPr>
+        </p:nvSpPr>
+        <p:spPr>
+          <a:xfrm>
+            <a:off x="1371600" y="685800"/>
+            <a:ext cx="9601200" cy="956733"/>
+          </a:xfrm>
+        </p:spPr>
+        <p:txBody>
+          <a:bodyPr/>
+          <a:lstStyle/>
+          <a:p>
+            <a:r>
+              <a:rPr lang="hu-HU" dirty="0">
+                <a:solidFill>
+                  <a:schemeClr val="tx1"/>
+                </a:solidFill>
+                <a:latin typeface="Times New Roman" panose="02020603050405020304" pitchFamily="18" charset="0"/>
+                <a:cs typeface="Times New Roman" panose="02020603050405020304" pitchFamily="18" charset="0"/>
+              </a:rPr>
+              <a:t>Az oldalunk funkciói</a:t>
+            </a:r>
+          </a:p>
+        </p:txBody>
+      </p:sp>
+      <p:sp>
+        <p:nvSpPr>
+          <p:cNvPr id="3" name="Tartalom helye 2">
+            <a:extLst>
+              <a:ext uri="{FF2B5EF4-FFF2-40B4-BE49-F238E27FC236}">
+                <a16:creationId xmlns:a16="http://schemas.microsoft.com/office/drawing/2014/main" id="{80692D13-F04E-4F4F-A667-DFE0B3C725A5}"/>
+              </a:ext>
+            </a:extLst>
+          </p:cNvPr>
+          <p:cNvSpPr>
+            <a:spLocks noGrp="1"/>
+          </p:cNvSpPr>
+          <p:nvPr>
+            <p:ph idx="1"/>
+          </p:nvPr>
+        </p:nvSpPr>
+        <p:spPr>
+          <a:xfrm>
+            <a:off x="1371600" y="1871133"/>
+            <a:ext cx="9127067" cy="3581400"/>
+          </a:xfrm>
+        </p:spPr>
+        <p:txBody>
+          <a:bodyPr>
+            <a:normAutofit/>
+          </a:bodyPr>
+          <a:lstStyle/>
+          <a:p>
+            <a:pPr>
+              <a:buFont typeface="Wingdings" panose="05000000000000000000" pitchFamily="2" charset="2"/>
+              <a:buChar char="Ø"/>
+            </a:pPr>
+            <a:r>
+              <a:rPr lang="hu-HU" dirty="0">
+                <a:solidFill>
+                  <a:schemeClr val="tx1"/>
+                </a:solidFill>
+                <a:latin typeface="Times New Roman" panose="02020603050405020304" pitchFamily="18" charset="0"/>
+                <a:cs typeface="Times New Roman" panose="02020603050405020304" pitchFamily="18" charset="0"/>
+              </a:rPr>
+              <a:t>Belépés</a:t>
+            </a:r>
+          </a:p>
+          <a:p>
+            <a:pPr>
+              <a:buFont typeface="Wingdings" panose="05000000000000000000" pitchFamily="2" charset="2"/>
+              <a:buChar char="Ø"/>
+            </a:pPr>
+            <a:r>
+              <a:rPr lang="hu-HU" dirty="0">
+                <a:solidFill>
+                  <a:schemeClr val="tx1"/>
+                </a:solidFill>
+                <a:latin typeface="Times New Roman" panose="02020603050405020304" pitchFamily="18" charset="0"/>
+                <a:cs typeface="Times New Roman" panose="02020603050405020304" pitchFamily="18" charset="0"/>
+              </a:rPr>
+              <a:t>Regisztráció</a:t>
+            </a:r>
+          </a:p>
+          <a:p>
+            <a:pPr>
+              <a:buFont typeface="Wingdings" panose="05000000000000000000" pitchFamily="2" charset="2"/>
+              <a:buChar char="Ø"/>
+            </a:pPr>
+            <a:r>
+              <a:rPr lang="hu-HU" dirty="0">
+                <a:solidFill>
+                  <a:schemeClr val="tx1"/>
+                </a:solidFill>
+                <a:latin typeface="Times New Roman" panose="02020603050405020304" pitchFamily="18" charset="0"/>
+                <a:cs typeface="Times New Roman" panose="02020603050405020304" pitchFamily="18" charset="0"/>
+              </a:rPr>
+              <a:t>Termékek böngészése, rendelése</a:t>
+            </a:r>
+          </a:p>
+          <a:p>
+            <a:pPr>
+              <a:buFont typeface="Wingdings" panose="05000000000000000000" pitchFamily="2" charset="2"/>
+              <a:buChar char="Ø"/>
+            </a:pPr>
+            <a:r>
+              <a:rPr lang="hu-HU" dirty="0">
+                <a:solidFill>
+                  <a:schemeClr val="tx1"/>
+                </a:solidFill>
+                <a:latin typeface="Times New Roman" panose="02020603050405020304" pitchFamily="18" charset="0"/>
+                <a:cs typeface="Times New Roman" panose="02020603050405020304" pitchFamily="18" charset="0"/>
+              </a:rPr>
+              <a:t>Blogposztok böngészése, újak feltöltése</a:t>
+            </a:r>
+          </a:p>
+          <a:p>
+            <a:pPr>
+              <a:buFont typeface="Wingdings" panose="05000000000000000000" pitchFamily="2" charset="2"/>
+              <a:buChar char="Ø"/>
+            </a:pPr>
+            <a:r>
+              <a:rPr lang="hu-HU" dirty="0">
+                <a:solidFill>
+                  <a:schemeClr val="tx1"/>
+                </a:solidFill>
+                <a:latin typeface="Times New Roman" panose="02020603050405020304" pitchFamily="18" charset="0"/>
+                <a:cs typeface="Times New Roman" panose="02020603050405020304" pitchFamily="18" charset="0"/>
+              </a:rPr>
+              <a:t>Egyedi minták készítése kép alapján horgoláshoz, kötéshez és hímzéshez, és az ehhez szükséges eszközök megrendelése az oldalunkról</a:t>
+            </a:r>
+          </a:p>
+          <a:p>
+            <a:pPr>
+              <a:buFont typeface="Wingdings" panose="05000000000000000000" pitchFamily="2" charset="2"/>
+              <a:buChar char="Ø"/>
+            </a:pPr>
+            <a:endParaRPr lang="hu-HU" dirty="0">
+              <a:solidFill>
+                <a:schemeClr val="tx1"/>
+              </a:solidFill>
+              <a:latin typeface="Times New Roman" panose="02020603050405020304" pitchFamily="18" charset="0"/>
+              <a:cs typeface="Times New Roman" panose="02020603050405020304" pitchFamily="18" charset="0"/>
+            </a:endParaRPr>
+          </a:p>
+        </p:txBody>
+      </p:sp>
+    </p:spTree>
+    <p:extLst>
+      <p:ext uri="{BB962C8B-B14F-4D97-AF65-F5344CB8AC3E}">
+        <p14:creationId xmlns:p14="http://schemas.microsoft.com/office/powerpoint/2010/main" val="3117878991"/>
+      </p:ext>
+    </p:extLst>
+  </p:cSld>
+  <p:clrMapOvr>
+    <a:masterClrMapping/>
+  </p:clrMapOvr>
+  <p:transition spd="slow">
+    <p:push dir="u"/>
+  </p:transition>
+  <p:timing>
+    <p:tnLst>
+      <p:par>
+        <p:cTn id="1" dur="indefinite" restart="never" nodeType="tmRoot">
+          <p:childTnLst>
+            <p:seq concurrent="1" nextAc="seek">
+              <p:cTn id="2" dur="indefinite" nodeType="mainSeq">
+                <p:childTnLst>
+                  <p:par>
+                    <p:cTn id="3" fill="hold">
+                      <p:stCondLst>
+                        <p:cond delay="indefinite"/>
+                        <p:cond evt="onBegin" delay="0">
+                          <p:tn val="2"/>
+                        </p:cond>
+                      </p:stCondLst>
+                      <p:childTnLst>
+                        <p:par>
+                          <p:cTn id="4" fill="hold">
+                            <p:stCondLst>
+                              <p:cond delay="0"/>
+                            </p:stCondLst>
+                            <p:childTnLst>
+                              <p:par>
+                                <p:cTn id="5" presetID="10" presetClass="entr" presetSubtype="0" fill="hold" grpId="0" nodeType="afterEffect">
+                                  <p:stCondLst>
+                                    <p:cond delay="0"/>
+                                  </p:stCondLst>
+                                  <p:childTnLst>
+                                    <p:set>
+                                      <p:cBhvr>
+                                        <p:cTn id="6" dur="1" fill="hold">
+                                          <p:stCondLst>
+                                            <p:cond delay="0"/>
+                                          </p:stCondLst>
+                                        </p:cTn>
+                                        <p:tgtEl>
+                                          <p:spTgt spid="2"/>
+                                        </p:tgtEl>
+                                        <p:attrNameLst>
+                                          <p:attrName>style.visibility</p:attrName>
+                                        </p:attrNameLst>
+                                      </p:cBhvr>
+                                      <p:to>
+                                        <p:strVal val="visible"/>
+                                      </p:to>
+                                    </p:set>
+                                    <p:animEffect transition="in" filter="fade">
+                                      <p:cBhvr>
+                                        <p:cTn id="7" dur="500"/>
+                                        <p:tgtEl>
+                                          <p:spTgt spid="2"/>
+                                        </p:tgtEl>
+                                      </p:cBhvr>
+                                    </p:animEffect>
+                                  </p:childTnLst>
+                                </p:cTn>
+                              </p:par>
+                            </p:childTnLst>
+                          </p:cTn>
+                        </p:par>
+                        <p:par>
+                          <p:cTn id="8" fill="hold">
+                            <p:stCondLst>
+                              <p:cond delay="500"/>
+                            </p:stCondLst>
+                            <p:childTnLst>
+                              <p:par>
+                                <p:cTn id="9" presetID="42" presetClass="entr" presetSubtype="0" fill="hold" grpId="0" nodeType="afterEffect">
+                                  <p:stCondLst>
+                                    <p:cond delay="0"/>
+                                  </p:stCondLst>
+                                  <p:childTnLst>
+                                    <p:set>
+                                      <p:cBhvr>
+                                        <p:cTn id="10" dur="1" fill="hold">
+                                          <p:stCondLst>
+                                            <p:cond delay="0"/>
+                                          </p:stCondLst>
+                                        </p:cTn>
+                                        <p:tgtEl>
+                                          <p:spTgt spid="3">
+                                            <p:txEl>
+                                              <p:pRg st="0" end="0"/>
+                                            </p:txEl>
+                                          </p:spTgt>
+                                        </p:tgtEl>
+                                        <p:attrNameLst>
+                                          <p:attrName>style.visibility</p:attrName>
+                                        </p:attrNameLst>
+                                      </p:cBhvr>
+                                      <p:to>
+                                        <p:strVal val="visible"/>
+                                      </p:to>
+                                    </p:set>
+                                    <p:animEffect transition="in" filter="fade">
+                                      <p:cBhvr>
+                                        <p:cTn id="11" dur="1000"/>
+                                        <p:tgtEl>
+                                          <p:spTgt spid="3">
+                                            <p:txEl>
+                                              <p:pRg st="0" end="0"/>
+                                            </p:txEl>
+                                          </p:spTgt>
+                                        </p:tgtEl>
+                                      </p:cBhvr>
+                                    </p:animEffect>
+                                    <p:anim calcmode="lin" valueType="num">
+                                      <p:cBhvr>
+                                        <p:cTn id="12" dur="1000" fill="hold"/>
+                                        <p:tgtEl>
+                                          <p:spTgt spid="3">
+                                            <p:txEl>
+                                              <p:pRg st="0" end="0"/>
+                                            </p:txEl>
+                                          </p:spTgt>
+                                        </p:tgtEl>
+                                        <p:attrNameLst>
+                                          <p:attrName>ppt_x</p:attrName>
+                                        </p:attrNameLst>
+                                      </p:cBhvr>
+                                      <p:tavLst>
+                                        <p:tav tm="0">
+                                          <p:val>
+                                            <p:strVal val="#ppt_x"/>
+                                          </p:val>
+                                        </p:tav>
+                                        <p:tav tm="100000">
+                                          <p:val>
+                                            <p:strVal val="#ppt_x"/>
+                                          </p:val>
+                                        </p:tav>
+                                      </p:tavLst>
+                                    </p:anim>
+                                    <p:anim calcmode="lin" valueType="num">
+                                      <p:cBhvr>
+                                        <p:cTn id="13" dur="1000" fill="hold"/>
+                                        <p:tgtEl>
+                                          <p:spTgt spid="3">
+                                            <p:txEl>
+                                              <p:pRg st="0" end="0"/>
+                                            </p:txEl>
+                                          </p:spTgt>
+                                        </p:tgtEl>
+                                        <p:attrNameLst>
+                                          <p:attrName>ppt_y</p:attrName>
+                                        </p:attrNameLst>
+                                      </p:cBhvr>
+                                      <p:tavLst>
+                                        <p:tav tm="0">
+                                          <p:val>
+                                            <p:strVal val="#ppt_y+.1"/>
+                                          </p:val>
+                                        </p:tav>
+                                        <p:tav tm="100000">
+                                          <p:val>
+                                            <p:strVal val="#ppt_y"/>
+                                          </p:val>
+                                        </p:tav>
+                                      </p:tavLst>
+                                    </p:anim>
+                                  </p:childTnLst>
+                                </p:cTn>
+                              </p:par>
+                            </p:childTnLst>
+                          </p:cTn>
+                        </p:par>
+                        <p:par>
+                          <p:cTn id="14" fill="hold">
+                            <p:stCondLst>
+                              <p:cond delay="1500"/>
+                            </p:stCondLst>
+                            <p:childTnLst>
+                              <p:par>
+                                <p:cTn id="15" presetID="42" presetClass="entr" presetSubtype="0" fill="hold" grpId="0" nodeType="afterEffect">
+                                  <p:stCondLst>
+                                    <p:cond delay="0"/>
+                                  </p:stCondLst>
+                                  <p:childTnLst>
+                                    <p:set>
+                                      <p:cBhvr>
+                                        <p:cTn id="16" dur="1" fill="hold">
+                                          <p:stCondLst>
+                                            <p:cond delay="0"/>
+                                          </p:stCondLst>
+                                        </p:cTn>
+                                        <p:tgtEl>
+                                          <p:spTgt spid="3">
+                                            <p:txEl>
+                                              <p:pRg st="1" end="1"/>
+                                            </p:txEl>
+                                          </p:spTgt>
+                                        </p:tgtEl>
+                                        <p:attrNameLst>
+                                          <p:attrName>style.visibility</p:attrName>
+                                        </p:attrNameLst>
+                                      </p:cBhvr>
+                                      <p:to>
+                                        <p:strVal val="visible"/>
+                                      </p:to>
+                                    </p:set>
+                                    <p:animEffect transition="in" filter="fade">
+                                      <p:cBhvr>
+                                        <p:cTn id="17" dur="1000"/>
+                                        <p:tgtEl>
+                                          <p:spTgt spid="3">
+                                            <p:txEl>
+                                              <p:pRg st="1" end="1"/>
+                                            </p:txEl>
+                                          </p:spTgt>
+                                        </p:tgtEl>
+                                      </p:cBhvr>
+                                    </p:animEffect>
+                                    <p:anim calcmode="lin" valueType="num">
+                                      <p:cBhvr>
+                                        <p:cTn id="18" dur="1000" fill="hold"/>
+                                        <p:tgtEl>
+                                          <p:spTgt spid="3">
+                                            <p:txEl>
+                                              <p:pRg st="1" end="1"/>
+                                            </p:txEl>
+                                          </p:spTgt>
+                                        </p:tgtEl>
+                                        <p:attrNameLst>
+                                          <p:attrName>ppt_x</p:attrName>
+                                        </p:attrNameLst>
+                                      </p:cBhvr>
+                                      <p:tavLst>
+                                        <p:tav tm="0">
+                                          <p:val>
+                                            <p:strVal val="#ppt_x"/>
+                                          </p:val>
+                                        </p:tav>
+                                        <p:tav tm="100000">
+                                          <p:val>
+                                            <p:strVal val="#ppt_x"/>
+                                          </p:val>
+                                        </p:tav>
+                                      </p:tavLst>
+                                    </p:anim>
+                                    <p:anim calcmode="lin" valueType="num">
+                                      <p:cBhvr>
+                                        <p:cTn id="19" dur="1000" fill="hold"/>
+                                        <p:tgtEl>
+                                          <p:spTgt spid="3">
+                                            <p:txEl>
+                                              <p:pRg st="1" end="1"/>
+                                            </p:txEl>
+                                          </p:spTgt>
+                                        </p:tgtEl>
+                                        <p:attrNameLst>
+                                          <p:attrName>ppt_y</p:attrName>
+                                        </p:attrNameLst>
+                                      </p:cBhvr>
+                                      <p:tavLst>
+                                        <p:tav tm="0">
+                                          <p:val>
+                                            <p:strVal val="#ppt_y+.1"/>
+                                          </p:val>
+                                        </p:tav>
+                                        <p:tav tm="100000">
+                                          <p:val>
+                                            <p:strVal val="#ppt_y"/>
+                                          </p:val>
+                                        </p:tav>
+                                      </p:tavLst>
+                                    </p:anim>
+                                  </p:childTnLst>
+                                </p:cTn>
+                              </p:par>
+                            </p:childTnLst>
+                          </p:cTn>
+                        </p:par>
+                        <p:par>
+                          <p:cTn id="20" fill="hold">
+                            <p:stCondLst>
+                              <p:cond delay="2500"/>
+                            </p:stCondLst>
+                            <p:childTnLst>
+                              <p:par>
+                                <p:cTn id="21" presetID="42" presetClass="entr" presetSubtype="0" fill="hold" grpId="0" nodeType="afterEffect">
+                                  <p:stCondLst>
+                                    <p:cond delay="0"/>
+                                  </p:stCondLst>
+                                  <p:childTnLst>
+                                    <p:set>
+                                      <p:cBhvr>
+                                        <p:cTn id="22" dur="1" fill="hold">
+                                          <p:stCondLst>
+                                            <p:cond delay="0"/>
+                                          </p:stCondLst>
+                                        </p:cTn>
+                                        <p:tgtEl>
+                                          <p:spTgt spid="3">
+                                            <p:txEl>
+                                              <p:pRg st="2" end="2"/>
+                                            </p:txEl>
+                                          </p:spTgt>
+                                        </p:tgtEl>
+                                        <p:attrNameLst>
+                                          <p:attrName>style.visibility</p:attrName>
+                                        </p:attrNameLst>
+                                      </p:cBhvr>
+                                      <p:to>
+                                        <p:strVal val="visible"/>
+                                      </p:to>
+                                    </p:set>
+                                    <p:animEffect transition="in" filter="fade">
+                                      <p:cBhvr>
+                                        <p:cTn id="23" dur="1000"/>
+                                        <p:tgtEl>
+                                          <p:spTgt spid="3">
+                                            <p:txEl>
+                                              <p:pRg st="2" end="2"/>
+                                            </p:txEl>
+                                          </p:spTgt>
+                                        </p:tgtEl>
+                                      </p:cBhvr>
+                                    </p:animEffect>
+                                    <p:anim calcmode="lin" valueType="num">
+                                      <p:cBhvr>
+                                        <p:cTn id="24" dur="1000" fill="hold"/>
+                                        <p:tgtEl>
+                                          <p:spTgt spid="3">
+                                            <p:txEl>
+                                              <p:pRg st="2" end="2"/>
+                                            </p:txEl>
+                                          </p:spTgt>
+                                        </p:tgtEl>
+                                        <p:attrNameLst>
+                                          <p:attrName>ppt_x</p:attrName>
+                                        </p:attrNameLst>
+                                      </p:cBhvr>
+                                      <p:tavLst>
+                                        <p:tav tm="0">
+                                          <p:val>
+                                            <p:strVal val="#ppt_x"/>
+                                          </p:val>
+                                        </p:tav>
+                                        <p:tav tm="100000">
+                                          <p:val>
+                                            <p:strVal val="#ppt_x"/>
+                                          </p:val>
+                                        </p:tav>
+                                      </p:tavLst>
+                                    </p:anim>
+                                    <p:anim calcmode="lin" valueType="num">
+                                      <p:cBhvr>
+                                        <p:cTn id="25" dur="1000" fill="hold"/>
+                                        <p:tgtEl>
+                                          <p:spTgt spid="3">
+                                            <p:txEl>
+                                              <p:pRg st="2" end="2"/>
+                                            </p:txEl>
+                                          </p:spTgt>
+                                        </p:tgtEl>
+                                        <p:attrNameLst>
+                                          <p:attrName>ppt_y</p:attrName>
+                                        </p:attrNameLst>
+                                      </p:cBhvr>
+                                      <p:tavLst>
+                                        <p:tav tm="0">
+                                          <p:val>
+                                            <p:strVal val="#ppt_y+.1"/>
+                                          </p:val>
+                                        </p:tav>
+                                        <p:tav tm="100000">
+                                          <p:val>
+                                            <p:strVal val="#ppt_y"/>
+                                          </p:val>
+                                        </p:tav>
+                                      </p:tavLst>
+                                    </p:anim>
+                                  </p:childTnLst>
+                                </p:cTn>
+                              </p:par>
+                            </p:childTnLst>
+                          </p:cTn>
+                        </p:par>
+                        <p:par>
+                          <p:cTn id="26" fill="hold">
+                            <p:stCondLst>
+                              <p:cond delay="3500"/>
+                            </p:stCondLst>
+                            <p:childTnLst>
+                              <p:par>
+                                <p:cTn id="27" presetID="42" presetClass="entr" presetSubtype="0" fill="hold" grpId="0" nodeType="afterEffect">
+                                  <p:stCondLst>
+                                    <p:cond delay="0"/>
+                                  </p:stCondLst>
+                                  <p:childTnLst>
+                                    <p:set>
+                                      <p:cBhvr>
+                                        <p:cTn id="28" dur="1" fill="hold">
+                                          <p:stCondLst>
+                                            <p:cond delay="0"/>
+                                          </p:stCondLst>
+                                        </p:cTn>
+                                        <p:tgtEl>
+                                          <p:spTgt spid="3">
+                                            <p:txEl>
+                                              <p:pRg st="3" end="3"/>
+                                            </p:txEl>
+                                          </p:spTgt>
+                                        </p:tgtEl>
+                                        <p:attrNameLst>
+                                          <p:attrName>style.visibility</p:attrName>
+                                        </p:attrNameLst>
+                                      </p:cBhvr>
+                                      <p:to>
+                                        <p:strVal val="visible"/>
+                                      </p:to>
+                                    </p:set>
+                                    <p:animEffect transition="in" filter="fade">
+                                      <p:cBhvr>
+                                        <p:cTn id="29" dur="1000"/>
+                                        <p:tgtEl>
+                                          <p:spTgt spid="3">
+                                            <p:txEl>
+                                              <p:pRg st="3" end="3"/>
+                                            </p:txEl>
+                                          </p:spTgt>
+                                        </p:tgtEl>
+                                      </p:cBhvr>
+                                    </p:animEffect>
+                                    <p:anim calcmode="lin" valueType="num">
+                                      <p:cBhvr>
+                                        <p:cTn id="30" dur="1000" fill="hold"/>
+                                        <p:tgtEl>
+                                          <p:spTgt spid="3">
+                                            <p:txEl>
+                                              <p:pRg st="3" end="3"/>
+                                            </p:txEl>
+                                          </p:spTgt>
+                                        </p:tgtEl>
+                                        <p:attrNameLst>
+                                          <p:attrName>ppt_x</p:attrName>
+                                        </p:attrNameLst>
+                                      </p:cBhvr>
+                                      <p:tavLst>
+                                        <p:tav tm="0">
+                                          <p:val>
+                                            <p:strVal val="#ppt_x"/>
+                                          </p:val>
+                                        </p:tav>
+                                        <p:tav tm="100000">
+                                          <p:val>
+                                            <p:strVal val="#ppt_x"/>
+                                          </p:val>
+                                        </p:tav>
+                                      </p:tavLst>
+                                    </p:anim>
+                                    <p:anim calcmode="lin" valueType="num">
+                                      <p:cBhvr>
+                                        <p:cTn id="31" dur="1000" fill="hold"/>
+                                        <p:tgtEl>
+                                          <p:spTgt spid="3">
+                                            <p:txEl>
+                                              <p:pRg st="3" end="3"/>
+                                            </p:txEl>
+                                          </p:spTgt>
+                                        </p:tgtEl>
+                                        <p:attrNameLst>
+                                          <p:attrName>ppt_y</p:attrName>
+                                        </p:attrNameLst>
+                                      </p:cBhvr>
+                                      <p:tavLst>
+                                        <p:tav tm="0">
+                                          <p:val>
+                                            <p:strVal val="#ppt_y+.1"/>
+                                          </p:val>
+                                        </p:tav>
+                                        <p:tav tm="100000">
+                                          <p:val>
+                                            <p:strVal val="#ppt_y"/>
+                                          </p:val>
+                                        </p:tav>
+                                      </p:tavLst>
+                                    </p:anim>
+                                  </p:childTnLst>
+                                </p:cTn>
+                              </p:par>
+                            </p:childTnLst>
+                          </p:cTn>
+                        </p:par>
+                        <p:par>
+                          <p:cTn id="32" fill="hold">
+                            <p:stCondLst>
+                              <p:cond delay="4500"/>
+                            </p:stCondLst>
+                            <p:childTnLst>
+                              <p:par>
+                                <p:cTn id="33" presetID="42" presetClass="entr" presetSubtype="0" fill="hold" grpId="0" nodeType="afterEffect">
+                                  <p:stCondLst>
+                                    <p:cond delay="0"/>
+                                  </p:stCondLst>
+                                  <p:childTnLst>
+                                    <p:set>
+                                      <p:cBhvr>
+                                        <p:cTn id="34" dur="1" fill="hold">
+                                          <p:stCondLst>
+                                            <p:cond delay="0"/>
+                                          </p:stCondLst>
+                                        </p:cTn>
+                                        <p:tgtEl>
+                                          <p:spTgt spid="3">
+                                            <p:txEl>
+                                              <p:pRg st="4" end="4"/>
+                                            </p:txEl>
+                                          </p:spTgt>
+                                        </p:tgtEl>
+                                        <p:attrNameLst>
+                                          <p:attrName>style.visibility</p:attrName>
+                                        </p:attrNameLst>
+                                      </p:cBhvr>
+                                      <p:to>
+                                        <p:strVal val="visible"/>
+                                      </p:to>
+                                    </p:set>
+                                    <p:animEffect transition="in" filter="fade">
+                                      <p:cBhvr>
+                                        <p:cTn id="35" dur="1000"/>
+                                        <p:tgtEl>
+                                          <p:spTgt spid="3">
+                                            <p:txEl>
+                                              <p:pRg st="4" end="4"/>
+                                            </p:txEl>
+                                          </p:spTgt>
+                                        </p:tgtEl>
+                                      </p:cBhvr>
+                                    </p:animEffect>
+                                    <p:anim calcmode="lin" valueType="num">
+                                      <p:cBhvr>
+                                        <p:cTn id="36" dur="1000" fill="hold"/>
+                                        <p:tgtEl>
+                                          <p:spTgt spid="3">
+                                            <p:txEl>
+                                              <p:pRg st="4" end="4"/>
+                                            </p:txEl>
+                                          </p:spTgt>
+                                        </p:tgtEl>
+                                        <p:attrNameLst>
+                                          <p:attrName>ppt_x</p:attrName>
+                                        </p:attrNameLst>
+                                      </p:cBhvr>
+                                      <p:tavLst>
+                                        <p:tav tm="0">
+                                          <p:val>
+                                            <p:strVal val="#ppt_x"/>
+                                          </p:val>
+                                        </p:tav>
+                                        <p:tav tm="100000">
+                                          <p:val>
+                                            <p:strVal val="#ppt_x"/>
+                                          </p:val>
+                                        </p:tav>
+                                      </p:tavLst>
+                                    </p:anim>
+                                    <p:anim calcmode="lin" valueType="num">
+                                      <p:cBhvr>
+                                        <p:cTn id="37" dur="1000" fill="hold"/>
+                                        <p:tgtEl>
+                                          <p:spTgt spid="3">
+                                            <p:txEl>
+                                              <p:pRg st="4" end="4"/>
+                                            </p:txEl>
+                                          </p:spTgt>
+                                        </p:tgtEl>
+                                        <p:attrNameLst>
+                                          <p:attrName>ppt_y</p:attrName>
+                                        </p:attrNameLst>
+                                      </p:cBhvr>
+                                      <p:tavLst>
+                                        <p:tav tm="0">
+                                          <p:val>
+                                            <p:strVal val="#ppt_y+.1"/>
+                                          </p:val>
+                                        </p:tav>
+                                        <p:tav tm="100000">
+                                          <p:val>
+                                            <p:strVal val="#ppt_y"/>
+                                          </p:val>
+                                        </p:tav>
+                                      </p:tavLst>
+                                    </p:anim>
+                                  </p:childTnLst>
+                                </p:cTn>
+                              </p:par>
+                            </p:childTnLst>
+                          </p:cTn>
+                        </p:par>
+                      </p:childTnLst>
+                    </p:cTn>
+                  </p:par>
+                </p:childTnLst>
+              </p:cTn>
+              <p:prevCondLst>
+                <p:cond evt="onPrev" delay="0">
+                  <p:tgtEl>
+                    <p:sldTgt/>
+                  </p:tgtEl>
+                </p:cond>
+              </p:prevCondLst>
+              <p:nextCondLst>
+                <p:cond evt="onNext" delay="0">
+                  <p:tgtEl>
+                    <p:sldTgt/>
+                  </p:tgtEl>
+                </p:cond>
+              </p:nextCondLst>
+            </p:seq>
+          </p:childTnLst>
+        </p:cTn>
+      </p:par>
+    </p:tnLst>
+    <p:bldLst>
+      <p:bldP spid="2" grpId="0"/>
+      <p:bldP spid="3" grpId="0" uiExpand="1" build="p"/>
+    </p:bldLst>
+  </p:timing>
+</p:sld>
+</file>
+
+<file path=ppt/slides/slide4.xml><?xml version="1.0" encoding="utf-8"?>
+<p:sld xmlns:a="http://schemas.openxmlformats.org/drawingml/2006/main" xmlns:r="http://schemas.openxmlformats.org/officeDocument/2006/relationships" xmlns:p="http://schemas.openxmlformats.org/presentationml/2006/main">
+  <p:cSld>
+    <p:spTree>
+      <p:nvGrpSpPr>
+        <p:cNvPr id="1" name=""/>
+        <p:cNvGrpSpPr/>
+        <p:nvPr/>
+      </p:nvGrpSpPr>
+      <p:grpSpPr>
+        <a:xfrm>
+          <a:off x="0" y="0"/>
+          <a:ext cx="0" cy="0"/>
+          <a:chOff x="0" y="0"/>
+          <a:chExt cx="0" cy="0"/>
+        </a:xfrm>
+      </p:grpSpPr>
+      <p:sp>
+        <p:nvSpPr>
+          <p:cNvPr id="2" name="Cím 1">
+            <a:extLst>
+              <a:ext uri="{FF2B5EF4-FFF2-40B4-BE49-F238E27FC236}">
+                <a16:creationId xmlns:a16="http://schemas.microsoft.com/office/drawing/2014/main" id="{D8736DA6-9D79-4DB7-90AD-09E3F55948CD}"/>
+              </a:ext>
+            </a:extLst>
+          </p:cNvPr>
+          <p:cNvSpPr>
+            <a:spLocks noGrp="1"/>
+          </p:cNvSpPr>
+          <p:nvPr>
+            <p:ph type="title"/>
+          </p:nvPr>
+        </p:nvSpPr>
+        <p:spPr>
+          <a:xfrm>
+            <a:off x="1371600" y="685800"/>
+            <a:ext cx="9601200" cy="931333"/>
+          </a:xfrm>
+        </p:spPr>
+        <p:txBody>
+          <a:bodyPr/>
+          <a:lstStyle/>
+          <a:p>
+            <a:r>
+              <a:rPr lang="hu-HU" dirty="0">
+                <a:solidFill>
+                  <a:schemeClr val="tx1"/>
+                </a:solidFill>
+                <a:latin typeface="Times New Roman" panose="02020603050405020304" pitchFamily="18" charset="0"/>
+                <a:cs typeface="Times New Roman" panose="02020603050405020304" pitchFamily="18" charset="0"/>
+              </a:rPr>
+              <a:t>Program részei</a:t>
+            </a:r>
+          </a:p>
+        </p:txBody>
+      </p:sp>
+      <p:sp>
+        <p:nvSpPr>
+          <p:cNvPr id="3" name="Tartalom helye 2">
+            <a:extLst>
+              <a:ext uri="{FF2B5EF4-FFF2-40B4-BE49-F238E27FC236}">
+                <a16:creationId xmlns:a16="http://schemas.microsoft.com/office/drawing/2014/main" id="{80692D13-F04E-4F4F-A667-DFE0B3C725A5}"/>
+              </a:ext>
+            </a:extLst>
+          </p:cNvPr>
+          <p:cNvSpPr>
+            <a:spLocks noGrp="1"/>
+          </p:cNvSpPr>
+          <p:nvPr>
+            <p:ph idx="1"/>
+          </p:nvPr>
+        </p:nvSpPr>
+        <p:spPr>
+          <a:xfrm>
+            <a:off x="1371600" y="2171700"/>
+            <a:ext cx="3395133" cy="3581400"/>
+          </a:xfrm>
+        </p:spPr>
+        <p:txBody>
+          <a:bodyPr/>
+          <a:lstStyle/>
+          <a:p>
+            <a:pPr>
+              <a:buFont typeface="Wingdings" panose="05000000000000000000" pitchFamily="2" charset="2"/>
+              <a:buChar char="Ø"/>
+            </a:pPr>
+            <a:r>
+              <a:rPr lang="hu-HU" dirty="0">
+                <a:solidFill>
+                  <a:schemeClr val="tx1"/>
+                </a:solidFill>
+                <a:latin typeface="Times New Roman" panose="02020603050405020304" pitchFamily="18" charset="0"/>
+                <a:cs typeface="Times New Roman" panose="02020603050405020304" pitchFamily="18" charset="0"/>
+              </a:rPr>
+              <a:t>Backend</a:t>
+            </a:r>
+          </a:p>
+          <a:p>
+            <a:pPr lvl="1">
+              <a:buFont typeface="Wingdings" panose="05000000000000000000" pitchFamily="2" charset="2"/>
+              <a:buChar char="§"/>
+            </a:pPr>
+            <a:r>
+              <a:rPr lang="hu-HU" i="0" dirty="0">
+                <a:solidFill>
+                  <a:schemeClr val="tx1"/>
+                </a:solidFill>
+                <a:latin typeface="Times New Roman" panose="02020603050405020304" pitchFamily="18" charset="0"/>
+                <a:cs typeface="Times New Roman" panose="02020603050405020304" pitchFamily="18" charset="0"/>
+              </a:rPr>
+              <a:t>Laravel</a:t>
+            </a:r>
+          </a:p>
+          <a:p>
+            <a:pPr>
+              <a:buFont typeface="Wingdings" panose="05000000000000000000" pitchFamily="2" charset="2"/>
+              <a:buChar char="Ø"/>
+            </a:pPr>
+            <a:r>
+              <a:rPr lang="hu-HU" dirty="0">
+                <a:solidFill>
+                  <a:schemeClr val="tx1"/>
+                </a:solidFill>
+                <a:latin typeface="Times New Roman" panose="02020603050405020304" pitchFamily="18" charset="0"/>
+                <a:cs typeface="Times New Roman" panose="02020603050405020304" pitchFamily="18" charset="0"/>
+              </a:rPr>
+              <a:t>Frontend</a:t>
+            </a:r>
+          </a:p>
+          <a:p>
+            <a:pPr lvl="1">
+              <a:buFont typeface="Wingdings" panose="05000000000000000000" pitchFamily="2" charset="2"/>
+              <a:buChar char="§"/>
+            </a:pPr>
+            <a:r>
+              <a:rPr lang="hu-HU" i="0" dirty="0">
+                <a:solidFill>
+                  <a:schemeClr val="tx1"/>
+                </a:solidFill>
+                <a:latin typeface="Times New Roman" panose="02020603050405020304" pitchFamily="18" charset="0"/>
+                <a:cs typeface="Times New Roman" panose="02020603050405020304" pitchFamily="18" charset="0"/>
+              </a:rPr>
+              <a:t>Vue.js</a:t>
+            </a:r>
+          </a:p>
+          <a:p>
+            <a:pPr lvl="1">
+              <a:buFont typeface="Wingdings" panose="05000000000000000000" pitchFamily="2" charset="2"/>
+              <a:buChar char="§"/>
+            </a:pPr>
+            <a:r>
+              <a:rPr lang="hu-HU" i="0" dirty="0" err="1">
+                <a:solidFill>
+                  <a:schemeClr val="tx1"/>
+                </a:solidFill>
+                <a:latin typeface="Times New Roman" panose="02020603050405020304" pitchFamily="18" charset="0"/>
+                <a:cs typeface="Times New Roman" panose="02020603050405020304" pitchFamily="18" charset="0"/>
+              </a:rPr>
+              <a:t>PrimeVue</a:t>
+            </a:r>
+            <a:endParaRPr lang="hu-HU" i="0" dirty="0">
+              <a:solidFill>
+                <a:schemeClr val="tx1"/>
+              </a:solidFill>
+              <a:latin typeface="Times New Roman" panose="02020603050405020304" pitchFamily="18" charset="0"/>
+              <a:cs typeface="Times New Roman" panose="02020603050405020304" pitchFamily="18" charset="0"/>
+            </a:endParaRPr>
+          </a:p>
+          <a:p>
+            <a:pPr>
+              <a:buFont typeface="Wingdings" panose="05000000000000000000" pitchFamily="2" charset="2"/>
+              <a:buChar char="Ø"/>
+            </a:pPr>
+            <a:r>
+              <a:rPr lang="hu-HU" dirty="0">
+                <a:solidFill>
+                  <a:schemeClr val="tx1"/>
+                </a:solidFill>
+                <a:latin typeface="Times New Roman" panose="02020603050405020304" pitchFamily="18" charset="0"/>
+                <a:cs typeface="Times New Roman" panose="02020603050405020304" pitchFamily="18" charset="0"/>
+              </a:rPr>
+              <a:t>Adatbázis</a:t>
+            </a:r>
+          </a:p>
+          <a:p>
+            <a:pPr lvl="1">
+              <a:buFont typeface="Wingdings" panose="05000000000000000000" pitchFamily="2" charset="2"/>
+              <a:buChar char="§"/>
+            </a:pPr>
+            <a:r>
+              <a:rPr lang="hu-HU" i="0" dirty="0" err="1">
+                <a:solidFill>
+                  <a:schemeClr val="tx1"/>
+                </a:solidFill>
+                <a:latin typeface="Times New Roman" panose="02020603050405020304" pitchFamily="18" charset="0"/>
+                <a:cs typeface="Times New Roman" panose="02020603050405020304" pitchFamily="18" charset="0"/>
+              </a:rPr>
+              <a:t>Mysql</a:t>
+            </a:r>
+            <a:endParaRPr lang="hu-HU" i="0" dirty="0">
+              <a:solidFill>
+                <a:schemeClr val="tx1"/>
+              </a:solidFill>
+              <a:latin typeface="Times New Roman" panose="02020603050405020304" pitchFamily="18" charset="0"/>
+              <a:cs typeface="Times New Roman" panose="02020603050405020304" pitchFamily="18" charset="0"/>
+            </a:endParaRPr>
+          </a:p>
+        </p:txBody>
+      </p:sp>
+    </p:spTree>
+    <p:extLst>
+      <p:ext uri="{BB962C8B-B14F-4D97-AF65-F5344CB8AC3E}">
+        <p14:creationId xmlns:p14="http://schemas.microsoft.com/office/powerpoint/2010/main" val="769519101"/>
+      </p:ext>
+    </p:extLst>
+  </p:cSld>
+  <p:clrMapOvr>
+    <a:masterClrMapping/>
+  </p:clrMapOvr>
+  <p:transition spd="slow">
+    <p:push dir="u"/>
+  </p:transition>
+  <p:timing>
+    <p:tnLst>
+      <p:par>
+        <p:cTn id="1" dur="indefinite" restart="never" nodeType="tmRoot">
+          <p:childTnLst>
+            <p:seq concurrent="1" nextAc="seek">
+              <p:cTn id="2" dur="indefinite" nodeType="mainSeq">
+                <p:childTnLst>
+                  <p:par>
+                    <p:cTn id="3" fill="hold">
+                      <p:stCondLst>
+                        <p:cond delay="indefinite"/>
+                        <p:cond evt="onBegin" delay="0">
+                          <p:tn val="2"/>
+                        </p:cond>
+                      </p:stCondLst>
+                      <p:childTnLst>
+                        <p:par>
+                          <p:cTn id="4" fill="hold">
+                            <p:stCondLst>
+                              <p:cond delay="0"/>
+                            </p:stCondLst>
+                            <p:childTnLst>
+                              <p:par>
+                                <p:cTn id="5" presetID="10" presetClass="entr" presetSubtype="0" fill="hold" grpId="0" nodeType="afterEffect">
+                                  <p:stCondLst>
+                                    <p:cond delay="0"/>
+                                  </p:stCondLst>
+                                  <p:childTnLst>
+                                    <p:set>
+                                      <p:cBhvr>
+                                        <p:cTn id="6" dur="1" fill="hold">
+                                          <p:stCondLst>
+                                            <p:cond delay="0"/>
+                                          </p:stCondLst>
+                                        </p:cTn>
+                                        <p:tgtEl>
+                                          <p:spTgt spid="2"/>
+                                        </p:tgtEl>
+                                        <p:attrNameLst>
+                                          <p:attrName>style.visibility</p:attrName>
+                                        </p:attrNameLst>
+                                      </p:cBhvr>
+                                      <p:to>
+                                        <p:strVal val="visible"/>
+                                      </p:to>
+                                    </p:set>
+                                    <p:animEffect transition="in" filter="fade">
+                                      <p:cBhvr>
+                                        <p:cTn id="7" dur="500"/>
+                                        <p:tgtEl>
+                                          <p:spTgt spid="2"/>
+                                        </p:tgtEl>
+                                      </p:cBhvr>
+                                    </p:animEffect>
+                                  </p:childTnLst>
+                                </p:cTn>
+                              </p:par>
+                            </p:childTnLst>
+                          </p:cTn>
+                        </p:par>
+                        <p:par>
+                          <p:cTn id="8" fill="hold">
+                            <p:stCondLst>
+                              <p:cond delay="500"/>
+                            </p:stCondLst>
+                            <p:childTnLst>
+                              <p:par>
+                                <p:cTn id="9" presetID="42" presetClass="entr" presetSubtype="0" fill="hold" grpId="0" nodeType="afterEffect">
+                                  <p:stCondLst>
+                                    <p:cond delay="200"/>
+                                  </p:stCondLst>
+                                  <p:childTnLst>
+                                    <p:set>
+                                      <p:cBhvr>
+                                        <p:cTn id="10" dur="1" fill="hold">
+                                          <p:stCondLst>
+                                            <p:cond delay="0"/>
+                                          </p:stCondLst>
+                                        </p:cTn>
+                                        <p:tgtEl>
+                                          <p:spTgt spid="3">
+                                            <p:txEl>
+                                              <p:pRg st="0" end="0"/>
+                                            </p:txEl>
+                                          </p:spTgt>
+                                        </p:tgtEl>
+                                        <p:attrNameLst>
+                                          <p:attrName>style.visibility</p:attrName>
+                                        </p:attrNameLst>
+                                      </p:cBhvr>
+                                      <p:to>
+                                        <p:strVal val="visible"/>
+                                      </p:to>
+                                    </p:set>
+                                    <p:animEffect transition="in" filter="fade">
+                                      <p:cBhvr>
+                                        <p:cTn id="11" dur="500"/>
+                                        <p:tgtEl>
+                                          <p:spTgt spid="3">
+                                            <p:txEl>
+                                              <p:pRg st="0" end="0"/>
+                                            </p:txEl>
+                                          </p:spTgt>
+                                        </p:tgtEl>
+                                      </p:cBhvr>
+                                    </p:animEffect>
+                                    <p:anim calcmode="lin" valueType="num">
+                                      <p:cBhvr>
+                                        <p:cTn id="12" dur="500" fill="hold"/>
+                                        <p:tgtEl>
+                                          <p:spTgt spid="3">
+                                            <p:txEl>
+                                              <p:pRg st="0" end="0"/>
+                                            </p:txEl>
+                                          </p:spTgt>
+                                        </p:tgtEl>
+                                        <p:attrNameLst>
+                                          <p:attrName>ppt_x</p:attrName>
+                                        </p:attrNameLst>
+                                      </p:cBhvr>
+                                      <p:tavLst>
+                                        <p:tav tm="0">
+                                          <p:val>
+                                            <p:strVal val="#ppt_x"/>
+                                          </p:val>
+                                        </p:tav>
+                                        <p:tav tm="100000">
+                                          <p:val>
+                                            <p:strVal val="#ppt_x"/>
+                                          </p:val>
+                                        </p:tav>
+                                      </p:tavLst>
+                                    </p:anim>
+                                    <p:anim calcmode="lin" valueType="num">
+                                      <p:cBhvr>
+                                        <p:cTn id="13" dur="500" fill="hold"/>
+                                        <p:tgtEl>
+                                          <p:spTgt spid="3">
+                                            <p:txEl>
+                                              <p:pRg st="0" end="0"/>
+                                            </p:txEl>
+                                          </p:spTgt>
+                                        </p:tgtEl>
+                                        <p:attrNameLst>
+                                          <p:attrName>ppt_y</p:attrName>
+                                        </p:attrNameLst>
+                                      </p:cBhvr>
+                                      <p:tavLst>
+                                        <p:tav tm="0">
+                                          <p:val>
+                                            <p:strVal val="#ppt_y+.1"/>
+                                          </p:val>
+                                        </p:tav>
+                                        <p:tav tm="100000">
+                                          <p:val>
+                                            <p:strVal val="#ppt_y"/>
+                                          </p:val>
+                                        </p:tav>
+                                      </p:tavLst>
+                                    </p:anim>
+                                  </p:childTnLst>
+                                </p:cTn>
+                              </p:par>
+                            </p:childTnLst>
+                          </p:cTn>
+                        </p:par>
+                        <p:par>
+                          <p:cTn id="14" fill="hold">
+                            <p:stCondLst>
+                              <p:cond delay="1200"/>
+                            </p:stCondLst>
+                            <p:childTnLst>
+                              <p:par>
+                                <p:cTn id="15" presetID="42" presetClass="entr" presetSubtype="0" fill="hold" grpId="0" nodeType="afterEffect">
+                                  <p:stCondLst>
+                                    <p:cond delay="0"/>
+                                  </p:stCondLst>
+                                  <p:childTnLst>
+                                    <p:set>
+                                      <p:cBhvr>
+                                        <p:cTn id="16" dur="1" fill="hold">
+                                          <p:stCondLst>
+                                            <p:cond delay="0"/>
+                                          </p:stCondLst>
+                                        </p:cTn>
+                                        <p:tgtEl>
+                                          <p:spTgt spid="3">
+                                            <p:txEl>
+                                              <p:pRg st="1" end="1"/>
+                                            </p:txEl>
+                                          </p:spTgt>
+                                        </p:tgtEl>
+                                        <p:attrNameLst>
+                                          <p:attrName>style.visibility</p:attrName>
+                                        </p:attrNameLst>
+                                      </p:cBhvr>
+                                      <p:to>
+                                        <p:strVal val="visible"/>
+                                      </p:to>
+                                    </p:set>
+                                    <p:animEffect transition="in" filter="fade">
+                                      <p:cBhvr>
+                                        <p:cTn id="17" dur="500"/>
+                                        <p:tgtEl>
+                                          <p:spTgt spid="3">
+                                            <p:txEl>
+                                              <p:pRg st="1" end="1"/>
+                                            </p:txEl>
+                                          </p:spTgt>
+                                        </p:tgtEl>
+                                      </p:cBhvr>
+                                    </p:animEffect>
+                                    <p:anim calcmode="lin" valueType="num">
+                                      <p:cBhvr>
+                                        <p:cTn id="18" dur="500" fill="hold"/>
+                                        <p:tgtEl>
+                                          <p:spTgt spid="3">
+                                            <p:txEl>
+                                              <p:pRg st="1" end="1"/>
+                                            </p:txEl>
+                                          </p:spTgt>
+                                        </p:tgtEl>
+                                        <p:attrNameLst>
+                                          <p:attrName>ppt_x</p:attrName>
+                                        </p:attrNameLst>
+                                      </p:cBhvr>
+                                      <p:tavLst>
+                                        <p:tav tm="0">
+                                          <p:val>
+                                            <p:strVal val="#ppt_x"/>
+                                          </p:val>
+                                        </p:tav>
+                                        <p:tav tm="100000">
+                                          <p:val>
+                                            <p:strVal val="#ppt_x"/>
+                                          </p:val>
+                                        </p:tav>
+                                      </p:tavLst>
+                                    </p:anim>
+                                    <p:anim calcmode="lin" valueType="num">
+                                      <p:cBhvr>
+                                        <p:cTn id="19" dur="500" fill="hold"/>
+                                        <p:tgtEl>
+                                          <p:spTgt spid="3">
+                                            <p:txEl>
+                                              <p:pRg st="1" end="1"/>
+                                            </p:txEl>
+                                          </p:spTgt>
+                                        </p:tgtEl>
+                                        <p:attrNameLst>
+                                          <p:attrName>ppt_y</p:attrName>
+                                        </p:attrNameLst>
+                                      </p:cBhvr>
+                                      <p:tavLst>
+                                        <p:tav tm="0">
+                                          <p:val>
+                                            <p:strVal val="#ppt_y+.1"/>
+                                          </p:val>
+                                        </p:tav>
+                                        <p:tav tm="100000">
+                                          <p:val>
+                                            <p:strVal val="#ppt_y"/>
+                                          </p:val>
+                                        </p:tav>
+                                      </p:tavLst>
+                                    </p:anim>
+                                  </p:childTnLst>
+                                </p:cTn>
+                              </p:par>
+                            </p:childTnLst>
+                          </p:cTn>
+                        </p:par>
+                        <p:par>
+                          <p:cTn id="20" fill="hold">
+                            <p:stCondLst>
+                              <p:cond delay="1700"/>
+                            </p:stCondLst>
+                            <p:childTnLst>
+                              <p:par>
+                                <p:cTn id="21" presetID="42" presetClass="entr" presetSubtype="0" fill="hold" grpId="0" nodeType="afterEffect">
+                                  <p:stCondLst>
+                                    <p:cond delay="200"/>
+                                  </p:stCondLst>
+                                  <p:childTnLst>
+                                    <p:set>
+                                      <p:cBhvr>
+                                        <p:cTn id="22" dur="1" fill="hold">
+                                          <p:stCondLst>
+                                            <p:cond delay="0"/>
+                                          </p:stCondLst>
+                                        </p:cTn>
+                                        <p:tgtEl>
+                                          <p:spTgt spid="3">
+                                            <p:txEl>
+                                              <p:pRg st="2" end="2"/>
+                                            </p:txEl>
+                                          </p:spTgt>
+                                        </p:tgtEl>
+                                        <p:attrNameLst>
+                                          <p:attrName>style.visibility</p:attrName>
+                                        </p:attrNameLst>
+                                      </p:cBhvr>
+                                      <p:to>
+                                        <p:strVal val="visible"/>
+                                      </p:to>
+                                    </p:set>
+                                    <p:animEffect transition="in" filter="fade">
+                                      <p:cBhvr>
+                                        <p:cTn id="23" dur="500"/>
+                                        <p:tgtEl>
+                                          <p:spTgt spid="3">
+                                            <p:txEl>
+                                              <p:pRg st="2" end="2"/>
+                                            </p:txEl>
+                                          </p:spTgt>
+                                        </p:tgtEl>
+                                      </p:cBhvr>
+                                    </p:animEffect>
+                                    <p:anim calcmode="lin" valueType="num">
+                                      <p:cBhvr>
+                                        <p:cTn id="24" dur="500" fill="hold"/>
+                                        <p:tgtEl>
+                                          <p:spTgt spid="3">
+                                            <p:txEl>
+                                              <p:pRg st="2" end="2"/>
+                                            </p:txEl>
+                                          </p:spTgt>
+                                        </p:tgtEl>
+                                        <p:attrNameLst>
+                                          <p:attrName>ppt_x</p:attrName>
+                                        </p:attrNameLst>
+                                      </p:cBhvr>
+                                      <p:tavLst>
+                                        <p:tav tm="0">
+                                          <p:val>
+                                            <p:strVal val="#ppt_x"/>
+                                          </p:val>
+                                        </p:tav>
+                                        <p:tav tm="100000">
+                                          <p:val>
+                                            <p:strVal val="#ppt_x"/>
+                                          </p:val>
+                                        </p:tav>
+                                      </p:tavLst>
+                                    </p:anim>
+                                    <p:anim calcmode="lin" valueType="num">
+                                      <p:cBhvr>
+                                        <p:cTn id="25" dur="500" fill="hold"/>
+                                        <p:tgtEl>
+                                          <p:spTgt spid="3">
+                                            <p:txEl>
+                                              <p:pRg st="2" end="2"/>
+                                            </p:txEl>
+                                          </p:spTgt>
+                                        </p:tgtEl>
+                                        <p:attrNameLst>
+                                          <p:attrName>ppt_y</p:attrName>
+                                        </p:attrNameLst>
+                                      </p:cBhvr>
+                                      <p:tavLst>
+                                        <p:tav tm="0">
+                                          <p:val>
+                                            <p:strVal val="#ppt_y+.1"/>
+                                          </p:val>
+                                        </p:tav>
+                                        <p:tav tm="100000">
+                                          <p:val>
+                                            <p:strVal val="#ppt_y"/>
+                                          </p:val>
+                                        </p:tav>
+                                      </p:tavLst>
+                                    </p:anim>
+                                  </p:childTnLst>
+                                </p:cTn>
+                              </p:par>
+                            </p:childTnLst>
+                          </p:cTn>
+                        </p:par>
+                        <p:par>
+                          <p:cTn id="26" fill="hold">
+                            <p:stCondLst>
+                              <p:cond delay="2400"/>
+                            </p:stCondLst>
+                            <p:childTnLst>
+                              <p:par>
+                                <p:cTn id="27" presetID="42" presetClass="entr" presetSubtype="0" fill="hold" grpId="0" nodeType="afterEffect">
+                                  <p:stCondLst>
+                                    <p:cond delay="0"/>
+                                  </p:stCondLst>
+                                  <p:childTnLst>
+                                    <p:set>
+                                      <p:cBhvr>
+                                        <p:cTn id="28" dur="1" fill="hold">
+                                          <p:stCondLst>
+                                            <p:cond delay="0"/>
+                                          </p:stCondLst>
+                                        </p:cTn>
+                                        <p:tgtEl>
+                                          <p:spTgt spid="3">
+                                            <p:txEl>
+                                              <p:pRg st="3" end="3"/>
+                                            </p:txEl>
+                                          </p:spTgt>
+                                        </p:tgtEl>
+                                        <p:attrNameLst>
+                                          <p:attrName>style.visibility</p:attrName>
+                                        </p:attrNameLst>
+                                      </p:cBhvr>
+                                      <p:to>
+                                        <p:strVal val="visible"/>
+                                      </p:to>
+                                    </p:set>
+                                    <p:animEffect transition="in" filter="fade">
+                                      <p:cBhvr>
+                                        <p:cTn id="29" dur="500"/>
+                                        <p:tgtEl>
+                                          <p:spTgt spid="3">
+                                            <p:txEl>
+                                              <p:pRg st="3" end="3"/>
+                                            </p:txEl>
+                                          </p:spTgt>
+                                        </p:tgtEl>
+                                      </p:cBhvr>
+                                    </p:animEffect>
+                                    <p:anim calcmode="lin" valueType="num">
+                                      <p:cBhvr>
+                                        <p:cTn id="30" dur="500" fill="hold"/>
+                                        <p:tgtEl>
+                                          <p:spTgt spid="3">
+                                            <p:txEl>
+                                              <p:pRg st="3" end="3"/>
+                                            </p:txEl>
+                                          </p:spTgt>
+                                        </p:tgtEl>
+                                        <p:attrNameLst>
+                                          <p:attrName>ppt_x</p:attrName>
+                                        </p:attrNameLst>
+                                      </p:cBhvr>
+                                      <p:tavLst>
+                                        <p:tav tm="0">
+                                          <p:val>
+                                            <p:strVal val="#ppt_x"/>
+                                          </p:val>
+                                        </p:tav>
+                                        <p:tav tm="100000">
+                                          <p:val>
+                                            <p:strVal val="#ppt_x"/>
+                                          </p:val>
+                                        </p:tav>
+                                      </p:tavLst>
+                                    </p:anim>
+                                    <p:anim calcmode="lin" valueType="num">
+                                      <p:cBhvr>
+                                        <p:cTn id="31" dur="500" fill="hold"/>
+                                        <p:tgtEl>
+                                          <p:spTgt spid="3">
+                                            <p:txEl>
+                                              <p:pRg st="3" end="3"/>
+                                            </p:txEl>
+                                          </p:spTgt>
+                                        </p:tgtEl>
+                                        <p:attrNameLst>
+                                          <p:attrName>ppt_y</p:attrName>
+                                        </p:attrNameLst>
+                                      </p:cBhvr>
+                                      <p:tavLst>
+                                        <p:tav tm="0">
+                                          <p:val>
+                                            <p:strVal val="#ppt_y+.1"/>
+                                          </p:val>
+                                        </p:tav>
+                                        <p:tav tm="100000">
+                                          <p:val>
+                                            <p:strVal val="#ppt_y"/>
+                                          </p:val>
+                                        </p:tav>
+                                      </p:tavLst>
+                                    </p:anim>
+                                  </p:childTnLst>
+                                </p:cTn>
+                              </p:par>
+                            </p:childTnLst>
+                          </p:cTn>
+                        </p:par>
+                        <p:par>
+                          <p:cTn id="32" fill="hold">
+                            <p:stCondLst>
+                              <p:cond delay="2900"/>
+                            </p:stCondLst>
+                            <p:childTnLst>
+                              <p:par>
+                                <p:cTn id="33" presetID="42" presetClass="entr" presetSubtype="0" fill="hold" grpId="0" nodeType="afterEffect">
+                                  <p:stCondLst>
+                                    <p:cond delay="0"/>
+                                  </p:stCondLst>
+                                  <p:childTnLst>
+                                    <p:set>
+                                      <p:cBhvr>
+                                        <p:cTn id="34" dur="1" fill="hold">
+                                          <p:stCondLst>
+                                            <p:cond delay="0"/>
+                                          </p:stCondLst>
+                                        </p:cTn>
+                                        <p:tgtEl>
+                                          <p:spTgt spid="3">
+                                            <p:txEl>
+                                              <p:pRg st="4" end="4"/>
+                                            </p:txEl>
+                                          </p:spTgt>
+                                        </p:tgtEl>
+                                        <p:attrNameLst>
+                                          <p:attrName>style.visibility</p:attrName>
+                                        </p:attrNameLst>
+                                      </p:cBhvr>
+                                      <p:to>
+                                        <p:strVal val="visible"/>
+                                      </p:to>
+                                    </p:set>
+                                    <p:animEffect transition="in" filter="fade">
+                                      <p:cBhvr>
+                                        <p:cTn id="35" dur="500"/>
+                                        <p:tgtEl>
+                                          <p:spTgt spid="3">
+                                            <p:txEl>
+                                              <p:pRg st="4" end="4"/>
+                                            </p:txEl>
+                                          </p:spTgt>
+                                        </p:tgtEl>
+                                      </p:cBhvr>
+                                    </p:animEffect>
+                                    <p:anim calcmode="lin" valueType="num">
+                                      <p:cBhvr>
+                                        <p:cTn id="36" dur="500" fill="hold"/>
+                                        <p:tgtEl>
+                                          <p:spTgt spid="3">
+                                            <p:txEl>
+                                              <p:pRg st="4" end="4"/>
+                                            </p:txEl>
+                                          </p:spTgt>
+                                        </p:tgtEl>
+                                        <p:attrNameLst>
+                                          <p:attrName>ppt_x</p:attrName>
+                                        </p:attrNameLst>
+                                      </p:cBhvr>
+                                      <p:tavLst>
+                                        <p:tav tm="0">
+                                          <p:val>
+                                            <p:strVal val="#ppt_x"/>
+                                          </p:val>
+                                        </p:tav>
+                                        <p:tav tm="100000">
+                                          <p:val>
+                                            <p:strVal val="#ppt_x"/>
+                                          </p:val>
+                                        </p:tav>
+                                      </p:tavLst>
+                                    </p:anim>
+                                    <p:anim calcmode="lin" valueType="num">
+                                      <p:cBhvr>
+                                        <p:cTn id="37" dur="500" fill="hold"/>
+                                        <p:tgtEl>
+                                          <p:spTgt spid="3">
+                                            <p:txEl>
+                                              <p:pRg st="4" end="4"/>
+                                            </p:txEl>
+                                          </p:spTgt>
+                                        </p:tgtEl>
+                                        <p:attrNameLst>
+                                          <p:attrName>ppt_y</p:attrName>
+                                        </p:attrNameLst>
+                                      </p:cBhvr>
+                                      <p:tavLst>
+                                        <p:tav tm="0">
+                                          <p:val>
+                                            <p:strVal val="#ppt_y+.1"/>
+                                          </p:val>
+                                        </p:tav>
+                                        <p:tav tm="100000">
+                                          <p:val>
+                                            <p:strVal val="#ppt_y"/>
+                                          </p:val>
+                                        </p:tav>
+                                      </p:tavLst>
+                                    </p:anim>
+                                  </p:childTnLst>
+                                </p:cTn>
+                              </p:par>
+                            </p:childTnLst>
+                          </p:cTn>
+                        </p:par>
+                        <p:par>
+                          <p:cTn id="38" fill="hold">
+                            <p:stCondLst>
+                              <p:cond delay="3400"/>
+                            </p:stCondLst>
+                            <p:childTnLst>
+                              <p:par>
+                                <p:cTn id="39" presetID="42" presetClass="entr" presetSubtype="0" fill="hold" grpId="0" nodeType="afterEffect">
+                                  <p:stCondLst>
+                                    <p:cond delay="200"/>
+                                  </p:stCondLst>
+                                  <p:childTnLst>
+                                    <p:set>
+                                      <p:cBhvr>
+                                        <p:cTn id="40" dur="1" fill="hold">
+                                          <p:stCondLst>
+                                            <p:cond delay="0"/>
+                                          </p:stCondLst>
+                                        </p:cTn>
+                                        <p:tgtEl>
+                                          <p:spTgt spid="3">
+                                            <p:txEl>
+                                              <p:pRg st="5" end="5"/>
+                                            </p:txEl>
+                                          </p:spTgt>
+                                        </p:tgtEl>
+                                        <p:attrNameLst>
+                                          <p:attrName>style.visibility</p:attrName>
+                                        </p:attrNameLst>
+                                      </p:cBhvr>
+                                      <p:to>
+                                        <p:strVal val="visible"/>
+                                      </p:to>
+                                    </p:set>
+                                    <p:animEffect transition="in" filter="fade">
+                                      <p:cBhvr>
+                                        <p:cTn id="41" dur="500"/>
+                                        <p:tgtEl>
+                                          <p:spTgt spid="3">
+                                            <p:txEl>
+                                              <p:pRg st="5" end="5"/>
+                                            </p:txEl>
+                                          </p:spTgt>
+                                        </p:tgtEl>
+                                      </p:cBhvr>
+                                    </p:animEffect>
+                                    <p:anim calcmode="lin" valueType="num">
+                                      <p:cBhvr>
+                                        <p:cTn id="42" dur="500" fill="hold"/>
+                                        <p:tgtEl>
+                                          <p:spTgt spid="3">
+                                            <p:txEl>
+                                              <p:pRg st="5" end="5"/>
+                                            </p:txEl>
+                                          </p:spTgt>
+                                        </p:tgtEl>
+                                        <p:attrNameLst>
+                                          <p:attrName>ppt_x</p:attrName>
+                                        </p:attrNameLst>
+                                      </p:cBhvr>
+                                      <p:tavLst>
+                                        <p:tav tm="0">
+                                          <p:val>
+                                            <p:strVal val="#ppt_x"/>
+                                          </p:val>
+                                        </p:tav>
+                                        <p:tav tm="100000">
+                                          <p:val>
+                                            <p:strVal val="#ppt_x"/>
+                                          </p:val>
+                                        </p:tav>
+                                      </p:tavLst>
+                                    </p:anim>
+                                    <p:anim calcmode="lin" valueType="num">
+                                      <p:cBhvr>
+                                        <p:cTn id="43" dur="500" fill="hold"/>
+                                        <p:tgtEl>
+                                          <p:spTgt spid="3">
+                                            <p:txEl>
+                                              <p:pRg st="5" end="5"/>
+                                            </p:txEl>
+                                          </p:spTgt>
+                                        </p:tgtEl>
+                                        <p:attrNameLst>
+                                          <p:attrName>ppt_y</p:attrName>
+                                        </p:attrNameLst>
+                                      </p:cBhvr>
+                                      <p:tavLst>
+                                        <p:tav tm="0">
+                                          <p:val>
+                                            <p:strVal val="#ppt_y+.1"/>
+                                          </p:val>
+                                        </p:tav>
+                                        <p:tav tm="100000">
+                                          <p:val>
+                                            <p:strVal val="#ppt_y"/>
+                                          </p:val>
+                                        </p:tav>
+                                      </p:tavLst>
+                                    </p:anim>
+                                  </p:childTnLst>
+                                </p:cTn>
+                              </p:par>
+                            </p:childTnLst>
+                          </p:cTn>
+                        </p:par>
+                        <p:par>
+                          <p:cTn id="44" fill="hold">
+                            <p:stCondLst>
+                              <p:cond delay="4100"/>
+                            </p:stCondLst>
+                            <p:childTnLst>
+                              <p:par>
+                                <p:cTn id="45" presetID="42" presetClass="entr" presetSubtype="0" fill="hold" grpId="0" nodeType="afterEffect">
+                                  <p:stCondLst>
+                                    <p:cond delay="0"/>
+                                  </p:stCondLst>
+                                  <p:childTnLst>
+                                    <p:set>
+                                      <p:cBhvr>
+                                        <p:cTn id="46" dur="1" fill="hold">
+                                          <p:stCondLst>
+                                            <p:cond delay="0"/>
+                                          </p:stCondLst>
+                                        </p:cTn>
+                                        <p:tgtEl>
+                                          <p:spTgt spid="3">
+                                            <p:txEl>
+                                              <p:pRg st="6" end="6"/>
+                                            </p:txEl>
+                                          </p:spTgt>
+                                        </p:tgtEl>
+                                        <p:attrNameLst>
+                                          <p:attrName>style.visibility</p:attrName>
+                                        </p:attrNameLst>
+                                      </p:cBhvr>
+                                      <p:to>
+                                        <p:strVal val="visible"/>
+                                      </p:to>
+                                    </p:set>
+                                    <p:animEffect transition="in" filter="fade">
+                                      <p:cBhvr>
+                                        <p:cTn id="47" dur="500"/>
+                                        <p:tgtEl>
+                                          <p:spTgt spid="3">
+                                            <p:txEl>
+                                              <p:pRg st="6" end="6"/>
+                                            </p:txEl>
+                                          </p:spTgt>
+                                        </p:tgtEl>
+                                      </p:cBhvr>
+                                    </p:animEffect>
+                                    <p:anim calcmode="lin" valueType="num">
+                                      <p:cBhvr>
+                                        <p:cTn id="48" dur="500" fill="hold"/>
+                                        <p:tgtEl>
+                                          <p:spTgt spid="3">
+                                            <p:txEl>
+                                              <p:pRg st="6" end="6"/>
+                                            </p:txEl>
+                                          </p:spTgt>
+                                        </p:tgtEl>
+                                        <p:attrNameLst>
+                                          <p:attrName>ppt_x</p:attrName>
+                                        </p:attrNameLst>
+                                      </p:cBhvr>
+                                      <p:tavLst>
+                                        <p:tav tm="0">
+                                          <p:val>
+                                            <p:strVal val="#ppt_x"/>
+                                          </p:val>
+                                        </p:tav>
+                                        <p:tav tm="100000">
+                                          <p:val>
+                                            <p:strVal val="#ppt_x"/>
+                                          </p:val>
+                                        </p:tav>
+                                      </p:tavLst>
+                                    </p:anim>
+                                    <p:anim calcmode="lin" valueType="num">
+                                      <p:cBhvr>
+                                        <p:cTn id="49" dur="500" fill="hold"/>
+                                        <p:tgtEl>
+                                          <p:spTgt spid="3">
+                                            <p:txEl>
+                                              <p:pRg st="6" end="6"/>
+                                            </p:txEl>
+                                          </p:spTgt>
+                                        </p:tgtEl>
+                                        <p:attrNameLst>
+                                          <p:attrName>ppt_y</p:attrName>
+                                        </p:attrNameLst>
+                                      </p:cBhvr>
+                                      <p:tavLst>
+                                        <p:tav tm="0">
+                                          <p:val>
+                                            <p:strVal val="#ppt_y+.1"/>
+                                          </p:val>
+                                        </p:tav>
+                                        <p:tav tm="100000">
+                                          <p:val>
+                                            <p:strVal val="#ppt_y"/>
+                                          </p:val>
+                                        </p:tav>
+                                      </p:tavLst>
+                                    </p:anim>
+                                  </p:childTnLst>
+                                </p:cTn>
+                              </p:par>
+                            </p:childTnLst>
+                          </p:cTn>
+                        </p:par>
+                      </p:childTnLst>
+                    </p:cTn>
+                  </p:par>
+                </p:childTnLst>
+              </p:cTn>
+              <p:prevCondLst>
+                <p:cond evt="onPrev" delay="0">
+                  <p:tgtEl>
+                    <p:sldTgt/>
+                  </p:tgtEl>
+                </p:cond>
+              </p:prevCondLst>
+              <p:nextCondLst>
+                <p:cond evt="onNext" delay="0">
+                  <p:tgtEl>
+                    <p:sldTgt/>
+                  </p:tgtEl>
+                </p:cond>
+              </p:nextCondLst>
+            </p:seq>
+          </p:childTnLst>
+        </p:cTn>
+      </p:par>
+    </p:tnLst>
+    <p:bldLst>
+      <p:bldP spid="2" grpId="0"/>
+      <p:bldP spid="3" grpId="0" uiExpand="1" build="p"/>
+    </p:bldLst>
+  </p:timing>
+</p:sld>
+</file>
+
+<file path=ppt/slides/slide5.xml><?xml version="1.0" encoding="utf-8"?>
 <p:sld xmlns:a="http://schemas.openxmlformats.org/drawingml/2006/main" xmlns:r="http://schemas.openxmlformats.org/officeDocument/2006/relationships" xmlns:p="http://schemas.openxmlformats.org/presentationml/2006/main">
   <p:cSld>
     <p:spTree>
@@ -5668,3376 +9229,7 @@
 </p:sld>
 </file>
 
-<file path=ppt/slides/slide12.xml><?xml version="1.0" encoding="utf-8"?>
-<p:sld xmlns:a="http://schemas.openxmlformats.org/drawingml/2006/main" xmlns:r="http://schemas.openxmlformats.org/officeDocument/2006/relationships" xmlns:p="http://schemas.openxmlformats.org/presentationml/2006/main">
-  <p:cSld>
-    <p:spTree>
-      <p:nvGrpSpPr>
-        <p:cNvPr id="1" name=""/>
-        <p:cNvGrpSpPr/>
-        <p:nvPr/>
-      </p:nvGrpSpPr>
-      <p:grpSpPr>
-        <a:xfrm>
-          <a:off x="0" y="0"/>
-          <a:ext cx="0" cy="0"/>
-          <a:chOff x="0" y="0"/>
-          <a:chExt cx="0" cy="0"/>
-        </a:xfrm>
-      </p:grpSpPr>
-      <p:sp>
-        <p:nvSpPr>
-          <p:cNvPr id="2" name="Cím 1">
-            <a:extLst>
-              <a:ext uri="{FF2B5EF4-FFF2-40B4-BE49-F238E27FC236}">
-                <a16:creationId xmlns:a16="http://schemas.microsoft.com/office/drawing/2014/main" id="{D8736DA6-9D79-4DB7-90AD-09E3F55948CD}"/>
-              </a:ext>
-            </a:extLst>
-          </p:cNvPr>
-          <p:cNvSpPr>
-            <a:spLocks noGrp="1"/>
-          </p:cNvSpPr>
-          <p:nvPr>
-            <p:ph type="title"/>
-          </p:nvPr>
-        </p:nvSpPr>
-        <p:spPr>
-          <a:xfrm>
-            <a:off x="1371600" y="685800"/>
-            <a:ext cx="9601200" cy="838200"/>
-          </a:xfrm>
-        </p:spPr>
-        <p:txBody>
-          <a:bodyPr/>
-          <a:lstStyle/>
-          <a:p>
-            <a:r>
-              <a:rPr lang="hu-HU" dirty="0">
-                <a:solidFill>
-                  <a:schemeClr val="tx1"/>
-                </a:solidFill>
-                <a:latin typeface="Times New Roman" panose="02020603050405020304" pitchFamily="18" charset="0"/>
-                <a:cs typeface="Times New Roman" panose="02020603050405020304" pitchFamily="18" charset="0"/>
-              </a:rPr>
-              <a:t>Bővítési lehetőségek</a:t>
-            </a:r>
-          </a:p>
-        </p:txBody>
-      </p:sp>
-      <p:sp>
-        <p:nvSpPr>
-          <p:cNvPr id="3" name="Tartalom helye 2">
-            <a:extLst>
-              <a:ext uri="{FF2B5EF4-FFF2-40B4-BE49-F238E27FC236}">
-                <a16:creationId xmlns:a16="http://schemas.microsoft.com/office/drawing/2014/main" id="{80692D13-F04E-4F4F-A667-DFE0B3C725A5}"/>
-              </a:ext>
-            </a:extLst>
-          </p:cNvPr>
-          <p:cNvSpPr>
-            <a:spLocks noGrp="1"/>
-          </p:cNvSpPr>
-          <p:nvPr>
-            <p:ph idx="1"/>
-          </p:nvPr>
-        </p:nvSpPr>
-        <p:spPr>
-          <a:xfrm>
-            <a:off x="1371600" y="2286000"/>
-            <a:ext cx="8238067" cy="3581400"/>
-          </a:xfrm>
-        </p:spPr>
-        <p:txBody>
-          <a:bodyPr/>
-          <a:lstStyle/>
-          <a:p>
-            <a:r>
-              <a:rPr lang="hu-HU" dirty="0">
-                <a:solidFill>
-                  <a:schemeClr val="tx1"/>
-                </a:solidFill>
-                <a:latin typeface="Times New Roman" panose="02020603050405020304" pitchFamily="18" charset="0"/>
-                <a:cs typeface="Times New Roman" panose="02020603050405020304" pitchFamily="18" charset="0"/>
-              </a:rPr>
-              <a:t>Szállító cégekkel való kapcsolat</a:t>
-            </a:r>
-          </a:p>
-          <a:p>
-            <a:endParaRPr lang="hu-HU" dirty="0">
-              <a:solidFill>
-                <a:schemeClr val="tx1"/>
-              </a:solidFill>
-              <a:latin typeface="Times New Roman" panose="02020603050405020304" pitchFamily="18" charset="0"/>
-              <a:cs typeface="Times New Roman" panose="02020603050405020304" pitchFamily="18" charset="0"/>
-            </a:endParaRPr>
-          </a:p>
-        </p:txBody>
-      </p:sp>
-    </p:spTree>
-    <p:extLst>
-      <p:ext uri="{BB962C8B-B14F-4D97-AF65-F5344CB8AC3E}">
-        <p14:creationId xmlns:p14="http://schemas.microsoft.com/office/powerpoint/2010/main" val="3540532608"/>
-      </p:ext>
-    </p:extLst>
-  </p:cSld>
-  <p:clrMapOvr>
-    <a:masterClrMapping/>
-  </p:clrMapOvr>
-  <p:transition spd="slow">
-    <p:push dir="u"/>
-  </p:transition>
-  <p:timing>
-    <p:tnLst>
-      <p:par>
-        <p:cTn id="1" dur="indefinite" restart="never" nodeType="tmRoot">
-          <p:childTnLst>
-            <p:seq concurrent="1" nextAc="seek">
-              <p:cTn id="2" dur="indefinite" nodeType="mainSeq">
-                <p:childTnLst>
-                  <p:par>
-                    <p:cTn id="3" fill="hold">
-                      <p:stCondLst>
-                        <p:cond delay="indefinite"/>
-                        <p:cond evt="onBegin" delay="0">
-                          <p:tn val="2"/>
-                        </p:cond>
-                      </p:stCondLst>
-                      <p:childTnLst>
-                        <p:par>
-                          <p:cTn id="4" fill="hold">
-                            <p:stCondLst>
-                              <p:cond delay="0"/>
-                            </p:stCondLst>
-                            <p:childTnLst>
-                              <p:par>
-                                <p:cTn id="5" presetID="10" presetClass="entr" presetSubtype="0" fill="hold" grpId="0" nodeType="afterEffect">
-                                  <p:stCondLst>
-                                    <p:cond delay="0"/>
-                                  </p:stCondLst>
-                                  <p:childTnLst>
-                                    <p:set>
-                                      <p:cBhvr>
-                                        <p:cTn id="6" dur="1" fill="hold">
-                                          <p:stCondLst>
-                                            <p:cond delay="0"/>
-                                          </p:stCondLst>
-                                        </p:cTn>
-                                        <p:tgtEl>
-                                          <p:spTgt spid="2"/>
-                                        </p:tgtEl>
-                                        <p:attrNameLst>
-                                          <p:attrName>style.visibility</p:attrName>
-                                        </p:attrNameLst>
-                                      </p:cBhvr>
-                                      <p:to>
-                                        <p:strVal val="visible"/>
-                                      </p:to>
-                                    </p:set>
-                                    <p:animEffect transition="in" filter="fade">
-                                      <p:cBhvr>
-                                        <p:cTn id="7" dur="500"/>
-                                        <p:tgtEl>
-                                          <p:spTgt spid="2"/>
-                                        </p:tgtEl>
-                                      </p:cBhvr>
-                                    </p:animEffect>
-                                  </p:childTnLst>
-                                </p:cTn>
-                              </p:par>
-                            </p:childTnLst>
-                          </p:cTn>
-                        </p:par>
-                        <p:par>
-                          <p:cTn id="8" fill="hold">
-                            <p:stCondLst>
-                              <p:cond delay="500"/>
-                            </p:stCondLst>
-                            <p:childTnLst>
-                              <p:par>
-                                <p:cTn id="9" presetID="42" presetClass="entr" presetSubtype="0" fill="hold" grpId="0" nodeType="afterEffect">
-                                  <p:stCondLst>
-                                    <p:cond delay="200"/>
-                                  </p:stCondLst>
-                                  <p:childTnLst>
-                                    <p:set>
-                                      <p:cBhvr>
-                                        <p:cTn id="10" dur="1" fill="hold">
-                                          <p:stCondLst>
-                                            <p:cond delay="0"/>
-                                          </p:stCondLst>
-                                        </p:cTn>
-                                        <p:tgtEl>
-                                          <p:spTgt spid="3">
-                                            <p:txEl>
-                                              <p:pRg st="0" end="0"/>
-                                            </p:txEl>
-                                          </p:spTgt>
-                                        </p:tgtEl>
-                                        <p:attrNameLst>
-                                          <p:attrName>style.visibility</p:attrName>
-                                        </p:attrNameLst>
-                                      </p:cBhvr>
-                                      <p:to>
-                                        <p:strVal val="visible"/>
-                                      </p:to>
-                                    </p:set>
-                                    <p:animEffect transition="in" filter="fade">
-                                      <p:cBhvr>
-                                        <p:cTn id="11" dur="500"/>
-                                        <p:tgtEl>
-                                          <p:spTgt spid="3">
-                                            <p:txEl>
-                                              <p:pRg st="0" end="0"/>
-                                            </p:txEl>
-                                          </p:spTgt>
-                                        </p:tgtEl>
-                                      </p:cBhvr>
-                                    </p:animEffect>
-                                    <p:anim calcmode="lin" valueType="num">
-                                      <p:cBhvr>
-                                        <p:cTn id="12" dur="500" fill="hold"/>
-                                        <p:tgtEl>
-                                          <p:spTgt spid="3">
-                                            <p:txEl>
-                                              <p:pRg st="0" end="0"/>
-                                            </p:txEl>
-                                          </p:spTgt>
-                                        </p:tgtEl>
-                                        <p:attrNameLst>
-                                          <p:attrName>ppt_x</p:attrName>
-                                        </p:attrNameLst>
-                                      </p:cBhvr>
-                                      <p:tavLst>
-                                        <p:tav tm="0">
-                                          <p:val>
-                                            <p:strVal val="#ppt_x"/>
-                                          </p:val>
-                                        </p:tav>
-                                        <p:tav tm="100000">
-                                          <p:val>
-                                            <p:strVal val="#ppt_x"/>
-                                          </p:val>
-                                        </p:tav>
-                                      </p:tavLst>
-                                    </p:anim>
-                                    <p:anim calcmode="lin" valueType="num">
-                                      <p:cBhvr>
-                                        <p:cTn id="13" dur="500" fill="hold"/>
-                                        <p:tgtEl>
-                                          <p:spTgt spid="3">
-                                            <p:txEl>
-                                              <p:pRg st="0" end="0"/>
-                                            </p:txEl>
-                                          </p:spTgt>
-                                        </p:tgtEl>
-                                        <p:attrNameLst>
-                                          <p:attrName>ppt_y</p:attrName>
-                                        </p:attrNameLst>
-                                      </p:cBhvr>
-                                      <p:tavLst>
-                                        <p:tav tm="0">
-                                          <p:val>
-                                            <p:strVal val="#ppt_y+.1"/>
-                                          </p:val>
-                                        </p:tav>
-                                        <p:tav tm="100000">
-                                          <p:val>
-                                            <p:strVal val="#ppt_y"/>
-                                          </p:val>
-                                        </p:tav>
-                                      </p:tavLst>
-                                    </p:anim>
-                                  </p:childTnLst>
-                                </p:cTn>
-                              </p:par>
-                            </p:childTnLst>
-                          </p:cTn>
-                        </p:par>
-                      </p:childTnLst>
-                    </p:cTn>
-                  </p:par>
-                </p:childTnLst>
-              </p:cTn>
-              <p:prevCondLst>
-                <p:cond evt="onPrev" delay="0">
-                  <p:tgtEl>
-                    <p:sldTgt/>
-                  </p:tgtEl>
-                </p:cond>
-              </p:prevCondLst>
-              <p:nextCondLst>
-                <p:cond evt="onNext" delay="0">
-                  <p:tgtEl>
-                    <p:sldTgt/>
-                  </p:tgtEl>
-                </p:cond>
-              </p:nextCondLst>
-            </p:seq>
-          </p:childTnLst>
-        </p:cTn>
-      </p:par>
-    </p:tnLst>
-    <p:bldLst>
-      <p:bldP spid="2" grpId="0"/>
-      <p:bldP spid="3" grpId="0" build="p"/>
-    </p:bldLst>
-  </p:timing>
-</p:sld>
-</file>
-
-<file path=ppt/slides/slide13.xml><?xml version="1.0" encoding="utf-8"?>
-<p:sld xmlns:a="http://schemas.openxmlformats.org/drawingml/2006/main" xmlns:r="http://schemas.openxmlformats.org/officeDocument/2006/relationships" xmlns:p="http://schemas.openxmlformats.org/presentationml/2006/main">
-  <p:cSld>
-    <p:spTree>
-      <p:nvGrpSpPr>
-        <p:cNvPr id="1" name=""/>
-        <p:cNvGrpSpPr/>
-        <p:nvPr/>
-      </p:nvGrpSpPr>
-      <p:grpSpPr>
-        <a:xfrm>
-          <a:off x="0" y="0"/>
-          <a:ext cx="0" cy="0"/>
-          <a:chOff x="0" y="0"/>
-          <a:chExt cx="0" cy="0"/>
-        </a:xfrm>
-      </p:grpSpPr>
-      <p:sp>
-        <p:nvSpPr>
-          <p:cNvPr id="2" name="Cím 1">
-            <a:extLst>
-              <a:ext uri="{FF2B5EF4-FFF2-40B4-BE49-F238E27FC236}">
-                <a16:creationId xmlns:a16="http://schemas.microsoft.com/office/drawing/2014/main" id="{D8736DA6-9D79-4DB7-90AD-09E3F55948CD}"/>
-              </a:ext>
-            </a:extLst>
-          </p:cNvPr>
-          <p:cNvSpPr>
-            <a:spLocks noGrp="1"/>
-          </p:cNvSpPr>
-          <p:nvPr>
-            <p:ph type="title"/>
-          </p:nvPr>
-        </p:nvSpPr>
-        <p:spPr>
-          <a:xfrm>
-            <a:off x="1295400" y="2686050"/>
-            <a:ext cx="9601200" cy="963083"/>
-          </a:xfrm>
-        </p:spPr>
-        <p:txBody>
-          <a:bodyPr>
-            <a:normAutofit/>
-          </a:bodyPr>
-          <a:lstStyle/>
-          <a:p>
-            <a:pPr algn="ctr"/>
-            <a:r>
-              <a:rPr lang="hu-HU" sz="5400" dirty="0">
-                <a:solidFill>
-                  <a:schemeClr val="tx1"/>
-                </a:solidFill>
-                <a:latin typeface="Times New Roman" panose="02020603050405020304" pitchFamily="18" charset="0"/>
-                <a:cs typeface="Times New Roman" panose="02020603050405020304" pitchFamily="18" charset="0"/>
-              </a:rPr>
-              <a:t>Köszönjük a figyelmet!</a:t>
-            </a:r>
-          </a:p>
-        </p:txBody>
-      </p:sp>
-    </p:spTree>
-    <p:extLst>
-      <p:ext uri="{BB962C8B-B14F-4D97-AF65-F5344CB8AC3E}">
-        <p14:creationId xmlns:p14="http://schemas.microsoft.com/office/powerpoint/2010/main" val="3944811295"/>
-      </p:ext>
-    </p:extLst>
-  </p:cSld>
-  <p:clrMapOvr>
-    <a:masterClrMapping/>
-  </p:clrMapOvr>
-  <p:transition spd="slow">
-    <p:push dir="u"/>
-  </p:transition>
-  <p:timing>
-    <p:tnLst>
-      <p:par>
-        <p:cTn id="1" dur="indefinite" restart="never" nodeType="tmRoot">
-          <p:childTnLst>
-            <p:seq concurrent="1" nextAc="seek">
-              <p:cTn id="2" dur="indefinite" nodeType="mainSeq">
-                <p:childTnLst>
-                  <p:par>
-                    <p:cTn id="3" fill="hold">
-                      <p:stCondLst>
-                        <p:cond delay="indefinite"/>
-                        <p:cond evt="onBegin" delay="0">
-                          <p:tn val="2"/>
-                        </p:cond>
-                      </p:stCondLst>
-                      <p:childTnLst>
-                        <p:par>
-                          <p:cTn id="4" fill="hold">
-                            <p:stCondLst>
-                              <p:cond delay="0"/>
-                            </p:stCondLst>
-                            <p:childTnLst>
-                              <p:par>
-                                <p:cTn id="5" presetID="10" presetClass="entr" presetSubtype="0" fill="hold" grpId="0" nodeType="afterEffect">
-                                  <p:stCondLst>
-                                    <p:cond delay="0"/>
-                                  </p:stCondLst>
-                                  <p:childTnLst>
-                                    <p:set>
-                                      <p:cBhvr>
-                                        <p:cTn id="6" dur="1" fill="hold">
-                                          <p:stCondLst>
-                                            <p:cond delay="0"/>
-                                          </p:stCondLst>
-                                        </p:cTn>
-                                        <p:tgtEl>
-                                          <p:spTgt spid="2"/>
-                                        </p:tgtEl>
-                                        <p:attrNameLst>
-                                          <p:attrName>style.visibility</p:attrName>
-                                        </p:attrNameLst>
-                                      </p:cBhvr>
-                                      <p:to>
-                                        <p:strVal val="visible"/>
-                                      </p:to>
-                                    </p:set>
-                                    <p:animEffect transition="in" filter="fade">
-                                      <p:cBhvr>
-                                        <p:cTn id="7" dur="500"/>
-                                        <p:tgtEl>
-                                          <p:spTgt spid="2"/>
-                                        </p:tgtEl>
-                                      </p:cBhvr>
-                                    </p:animEffect>
-                                  </p:childTnLst>
-                                </p:cTn>
-                              </p:par>
-                            </p:childTnLst>
-                          </p:cTn>
-                        </p:par>
-                      </p:childTnLst>
-                    </p:cTn>
-                  </p:par>
-                </p:childTnLst>
-              </p:cTn>
-              <p:prevCondLst>
-                <p:cond evt="onPrev" delay="0">
-                  <p:tgtEl>
-                    <p:sldTgt/>
-                  </p:tgtEl>
-                </p:cond>
-              </p:prevCondLst>
-              <p:nextCondLst>
-                <p:cond evt="onNext" delay="0">
-                  <p:tgtEl>
-                    <p:sldTgt/>
-                  </p:tgtEl>
-                </p:cond>
-              </p:nextCondLst>
-            </p:seq>
-          </p:childTnLst>
-        </p:cTn>
-      </p:par>
-    </p:tnLst>
-    <p:bldLst>
-      <p:bldP spid="2" grpId="0"/>
-    </p:bldLst>
-  </p:timing>
-</p:sld>
-</file>
-
-<file path=ppt/slides/slide14.xml><?xml version="1.0" encoding="utf-8"?>
-<p:sld xmlns:a="http://schemas.openxmlformats.org/drawingml/2006/main" xmlns:r="http://schemas.openxmlformats.org/officeDocument/2006/relationships" xmlns:p="http://schemas.openxmlformats.org/presentationml/2006/main">
-  <p:cSld>
-    <p:spTree>
-      <p:nvGrpSpPr>
-        <p:cNvPr id="1" name=""/>
-        <p:cNvGrpSpPr/>
-        <p:nvPr/>
-      </p:nvGrpSpPr>
-      <p:grpSpPr>
-        <a:xfrm>
-          <a:off x="0" y="0"/>
-          <a:ext cx="0" cy="0"/>
-          <a:chOff x="0" y="0"/>
-          <a:chExt cx="0" cy="0"/>
-        </a:xfrm>
-      </p:grpSpPr>
-      <p:sp>
-        <p:nvSpPr>
-          <p:cNvPr id="3" name="Tartalom helye 2">
-            <a:extLst>
-              <a:ext uri="{FF2B5EF4-FFF2-40B4-BE49-F238E27FC236}">
-                <a16:creationId xmlns:a16="http://schemas.microsoft.com/office/drawing/2014/main" id="{F476053C-A6BC-4C33-8474-C12BD5859804}"/>
-              </a:ext>
-            </a:extLst>
-          </p:cNvPr>
-          <p:cNvSpPr>
-            <a:spLocks noGrp="1"/>
-          </p:cNvSpPr>
-          <p:nvPr>
-            <p:ph idx="1"/>
-          </p:nvPr>
-        </p:nvSpPr>
-        <p:spPr>
-          <a:xfrm>
-            <a:off x="1295400" y="2175933"/>
-            <a:ext cx="9601200" cy="3581400"/>
-          </a:xfrm>
-        </p:spPr>
-        <p:txBody>
-          <a:bodyPr>
-            <a:normAutofit fontScale="70000" lnSpcReduction="20000"/>
-          </a:bodyPr>
-          <a:lstStyle/>
-          <a:p>
-            <a:r>
-              <a:rPr lang="hu-HU" dirty="0">
-                <a:solidFill>
-                  <a:schemeClr val="tx1"/>
-                </a:solidFill>
-                <a:latin typeface="Times New Roman" panose="02020603050405020304" pitchFamily="18" charset="0"/>
-                <a:cs typeface="Times New Roman" panose="02020603050405020304" pitchFamily="18" charset="0"/>
-              </a:rPr>
-              <a:t>Prezentáció:</a:t>
-            </a:r>
-          </a:p>
-          <a:p>
-            <a:r>
-              <a:rPr lang="hu-HU" dirty="0">
-                <a:solidFill>
-                  <a:schemeClr val="tx1"/>
-                </a:solidFill>
-                <a:latin typeface="Times New Roman" panose="02020603050405020304" pitchFamily="18" charset="0"/>
-                <a:cs typeface="Times New Roman" panose="02020603050405020304" pitchFamily="18" charset="0"/>
-                <a:hlinkClick r:id="rId2"/>
-              </a:rPr>
-              <a:t>https://youtu.be/AAVxq0WvIJU?si=fdMjgQV-V2niKMhS</a:t>
-            </a:r>
-            <a:endParaRPr lang="hu-HU" dirty="0">
-              <a:solidFill>
-                <a:schemeClr val="tx1"/>
-              </a:solidFill>
-              <a:latin typeface="Times New Roman" panose="02020603050405020304" pitchFamily="18" charset="0"/>
-              <a:cs typeface="Times New Roman" panose="02020603050405020304" pitchFamily="18" charset="0"/>
-            </a:endParaRPr>
-          </a:p>
-          <a:p>
-            <a:r>
-              <a:rPr lang="hu-HU" sz="2000" b="0" i="0" u="none" strike="noStrike" baseline="0" dirty="0">
-                <a:solidFill>
-                  <a:srgbClr val="000000"/>
-                </a:solidFill>
-                <a:latin typeface="Times New Roman" panose="02020603050405020304" pitchFamily="18" charset="0"/>
-                <a:cs typeface="Times New Roman" panose="02020603050405020304" pitchFamily="18" charset="0"/>
-              </a:rPr>
-              <a:t>vizsgarész során a vizsgázó gyakorlati bemutatóval összekapcsolt szóbeli előadás formájában mutatja be a </a:t>
-            </a:r>
-          </a:p>
-          <a:p>
-            <a:r>
-              <a:rPr lang="hu-HU" sz="2000" b="0" i="0" u="none" strike="noStrike" baseline="0" dirty="0">
-                <a:solidFill>
-                  <a:srgbClr val="000000"/>
-                </a:solidFill>
-                <a:latin typeface="Times New Roman" panose="02020603050405020304" pitchFamily="18" charset="0"/>
-                <a:cs typeface="Times New Roman" panose="02020603050405020304" pitchFamily="18" charset="0"/>
-              </a:rPr>
-              <a:t>szoftver célját, </a:t>
-            </a:r>
-          </a:p>
-          <a:p>
-            <a:r>
-              <a:rPr lang="hu-HU" sz="2000" b="0" i="0" u="none" strike="noStrike" baseline="0" dirty="0">
-                <a:solidFill>
-                  <a:srgbClr val="000000"/>
-                </a:solidFill>
-                <a:latin typeface="Times New Roman" panose="02020603050405020304" pitchFamily="18" charset="0"/>
-                <a:cs typeface="Times New Roman" panose="02020603050405020304" pitchFamily="18" charset="0"/>
-              </a:rPr>
-              <a:t>műszaki megvalósítását, </a:t>
-            </a:r>
-          </a:p>
-          <a:p>
-            <a:r>
-              <a:rPr lang="hu-HU" sz="2000" b="0" i="0" u="none" strike="noStrike" baseline="0" dirty="0">
-                <a:solidFill>
-                  <a:srgbClr val="000000"/>
-                </a:solidFill>
-                <a:latin typeface="Times New Roman" panose="02020603050405020304" pitchFamily="18" charset="0"/>
-                <a:cs typeface="Times New Roman" panose="02020603050405020304" pitchFamily="18" charset="0"/>
-              </a:rPr>
-              <a:t>működését, </a:t>
-            </a:r>
-          </a:p>
-          <a:p>
-            <a:r>
-              <a:rPr lang="hu-HU" sz="2000" b="0" i="0" u="none" strike="noStrike" baseline="0" dirty="0">
-                <a:solidFill>
-                  <a:srgbClr val="000000"/>
-                </a:solidFill>
-                <a:latin typeface="Times New Roman" panose="02020603050405020304" pitchFamily="18" charset="0"/>
-                <a:cs typeface="Times New Roman" panose="02020603050405020304" pitchFamily="18" charset="0"/>
-              </a:rPr>
-              <a:t>forráskódját, </a:t>
-            </a:r>
-          </a:p>
-          <a:p>
-            <a:r>
-              <a:rPr lang="hu-HU" sz="2000" b="0" i="0" u="none" strike="noStrike" baseline="0" dirty="0">
-                <a:solidFill>
-                  <a:srgbClr val="000000"/>
-                </a:solidFill>
-                <a:latin typeface="Times New Roman" panose="02020603050405020304" pitchFamily="18" charset="0"/>
-                <a:cs typeface="Times New Roman" panose="02020603050405020304" pitchFamily="18" charset="0"/>
-              </a:rPr>
-              <a:t>a csapaton belüli munkamegosztást, a fejlesztési csapatban betöltött szerepét, a fejlesztés során használt projektszervezési eszközöket. </a:t>
-            </a:r>
-          </a:p>
-          <a:p>
-            <a:r>
-              <a:rPr lang="hu-HU" sz="2000" dirty="0">
-                <a:solidFill>
-                  <a:srgbClr val="000000"/>
-                </a:solidFill>
-                <a:latin typeface="Times New Roman" panose="02020603050405020304" pitchFamily="18" charset="0"/>
-                <a:cs typeface="Times New Roman" panose="02020603050405020304" pitchFamily="18" charset="0"/>
-              </a:rPr>
-              <a:t>Első dia szinte olyan mint a dokumentáció, mintával, dátummal „vizsgaremek” felirat</a:t>
-            </a:r>
-          </a:p>
-          <a:p>
-            <a:r>
-              <a:rPr lang="hu-HU" sz="2000" b="0" i="0" u="none" strike="noStrike" baseline="0" dirty="0">
-                <a:solidFill>
-                  <a:srgbClr val="000000"/>
-                </a:solidFill>
-                <a:latin typeface="Times New Roman" panose="02020603050405020304" pitchFamily="18" charset="0"/>
-                <a:cs typeface="Times New Roman" panose="02020603050405020304" pitchFamily="18" charset="0"/>
-              </a:rPr>
-              <a:t>Max 7 infó a dián</a:t>
-            </a:r>
-          </a:p>
-          <a:p>
-            <a:r>
-              <a:rPr lang="hu-HU" sz="2000" b="0" i="0" u="none" strike="noStrike" baseline="0" dirty="0">
-                <a:solidFill>
-                  <a:srgbClr val="000000"/>
-                </a:solidFill>
-                <a:latin typeface="Times New Roman" panose="02020603050405020304" pitchFamily="18" charset="0"/>
-                <a:cs typeface="Times New Roman" panose="02020603050405020304" pitchFamily="18" charset="0"/>
-              </a:rPr>
-              <a:t>Végén köszönjük a figyelmet</a:t>
-            </a:r>
-          </a:p>
-          <a:p>
-            <a:endParaRPr lang="hu-HU" dirty="0"/>
-          </a:p>
-        </p:txBody>
-      </p:sp>
-    </p:spTree>
-    <p:extLst>
-      <p:ext uri="{BB962C8B-B14F-4D97-AF65-F5344CB8AC3E}">
-        <p14:creationId xmlns:p14="http://schemas.microsoft.com/office/powerpoint/2010/main" val="2537151539"/>
-      </p:ext>
-    </p:extLst>
-  </p:cSld>
-  <p:clrMapOvr>
-    <a:masterClrMapping/>
-  </p:clrMapOvr>
-  <p:transition spd="slow">
-    <p:push dir="u"/>
-  </p:transition>
-  <p:timing>
-    <p:tnLst>
-      <p:par>
-        <p:cTn id="1" dur="indefinite" restart="never" nodeType="tmRoot">
-          <p:childTnLst>
-            <p:seq concurrent="1" nextAc="seek">
-              <p:cTn id="2" dur="indefinite" nodeType="mainSeq">
-                <p:childTnLst>
-                  <p:par>
-                    <p:cTn id="3" fill="hold">
-                      <p:stCondLst>
-                        <p:cond delay="indefinite"/>
-                        <p:cond evt="onBegin" delay="0">
-                          <p:tn val="2"/>
-                        </p:cond>
-                      </p:stCondLst>
-                      <p:childTnLst>
-                        <p:par>
-                          <p:cTn id="4" fill="hold">
-                            <p:stCondLst>
-                              <p:cond delay="0"/>
-                            </p:stCondLst>
-                            <p:childTnLst>
-                              <p:par>
-                                <p:cTn id="5" presetID="10" presetClass="entr" presetSubtype="0" fill="hold" grpId="0" nodeType="afterEffect">
-                                  <p:stCondLst>
-                                    <p:cond delay="0"/>
-                                  </p:stCondLst>
-                                  <p:childTnLst>
-                                    <p:set>
-                                      <p:cBhvr>
-                                        <p:cTn id="6" dur="1" fill="hold">
-                                          <p:stCondLst>
-                                            <p:cond delay="0"/>
-                                          </p:stCondLst>
-                                        </p:cTn>
-                                        <p:tgtEl>
-                                          <p:spTgt spid="3">
-                                            <p:txEl>
-                                              <p:pRg st="0" end="0"/>
-                                            </p:txEl>
-                                          </p:spTgt>
-                                        </p:tgtEl>
-                                        <p:attrNameLst>
-                                          <p:attrName>style.visibility</p:attrName>
-                                        </p:attrNameLst>
-                                      </p:cBhvr>
-                                      <p:to>
-                                        <p:strVal val="visible"/>
-                                      </p:to>
-                                    </p:set>
-                                    <p:animEffect transition="in" filter="fade">
-                                      <p:cBhvr>
-                                        <p:cTn id="7" dur="500"/>
-                                        <p:tgtEl>
-                                          <p:spTgt spid="3">
-                                            <p:txEl>
-                                              <p:pRg st="0" end="0"/>
-                                            </p:txEl>
-                                          </p:spTgt>
-                                        </p:tgtEl>
-                                      </p:cBhvr>
-                                    </p:animEffect>
-                                  </p:childTnLst>
-                                </p:cTn>
-                              </p:par>
-                            </p:childTnLst>
-                          </p:cTn>
-                        </p:par>
-                        <p:par>
-                          <p:cTn id="8" fill="hold">
-                            <p:stCondLst>
-                              <p:cond delay="500"/>
-                            </p:stCondLst>
-                            <p:childTnLst>
-                              <p:par>
-                                <p:cTn id="9" presetID="10" presetClass="entr" presetSubtype="0" fill="hold" grpId="0" nodeType="afterEffect">
-                                  <p:stCondLst>
-                                    <p:cond delay="0"/>
-                                  </p:stCondLst>
-                                  <p:childTnLst>
-                                    <p:set>
-                                      <p:cBhvr>
-                                        <p:cTn id="10" dur="1" fill="hold">
-                                          <p:stCondLst>
-                                            <p:cond delay="0"/>
-                                          </p:stCondLst>
-                                        </p:cTn>
-                                        <p:tgtEl>
-                                          <p:spTgt spid="3">
-                                            <p:txEl>
-                                              <p:pRg st="1" end="1"/>
-                                            </p:txEl>
-                                          </p:spTgt>
-                                        </p:tgtEl>
-                                        <p:attrNameLst>
-                                          <p:attrName>style.visibility</p:attrName>
-                                        </p:attrNameLst>
-                                      </p:cBhvr>
-                                      <p:to>
-                                        <p:strVal val="visible"/>
-                                      </p:to>
-                                    </p:set>
-                                    <p:animEffect transition="in" filter="fade">
-                                      <p:cBhvr>
-                                        <p:cTn id="11" dur="500"/>
-                                        <p:tgtEl>
-                                          <p:spTgt spid="3">
-                                            <p:txEl>
-                                              <p:pRg st="1" end="1"/>
-                                            </p:txEl>
-                                          </p:spTgt>
-                                        </p:tgtEl>
-                                      </p:cBhvr>
-                                    </p:animEffect>
-                                  </p:childTnLst>
-                                </p:cTn>
-                              </p:par>
-                            </p:childTnLst>
-                          </p:cTn>
-                        </p:par>
-                        <p:par>
-                          <p:cTn id="12" fill="hold">
-                            <p:stCondLst>
-                              <p:cond delay="1000"/>
-                            </p:stCondLst>
-                            <p:childTnLst>
-                              <p:par>
-                                <p:cTn id="13" presetID="10" presetClass="entr" presetSubtype="0" fill="hold" grpId="0" nodeType="afterEffect">
-                                  <p:stCondLst>
-                                    <p:cond delay="0"/>
-                                  </p:stCondLst>
-                                  <p:childTnLst>
-                                    <p:set>
-                                      <p:cBhvr>
-                                        <p:cTn id="14" dur="1" fill="hold">
-                                          <p:stCondLst>
-                                            <p:cond delay="0"/>
-                                          </p:stCondLst>
-                                        </p:cTn>
-                                        <p:tgtEl>
-                                          <p:spTgt spid="3">
-                                            <p:txEl>
-                                              <p:pRg st="2" end="2"/>
-                                            </p:txEl>
-                                          </p:spTgt>
-                                        </p:tgtEl>
-                                        <p:attrNameLst>
-                                          <p:attrName>style.visibility</p:attrName>
-                                        </p:attrNameLst>
-                                      </p:cBhvr>
-                                      <p:to>
-                                        <p:strVal val="visible"/>
-                                      </p:to>
-                                    </p:set>
-                                    <p:animEffect transition="in" filter="fade">
-                                      <p:cBhvr>
-                                        <p:cTn id="15" dur="500"/>
-                                        <p:tgtEl>
-                                          <p:spTgt spid="3">
-                                            <p:txEl>
-                                              <p:pRg st="2" end="2"/>
-                                            </p:txEl>
-                                          </p:spTgt>
-                                        </p:tgtEl>
-                                      </p:cBhvr>
-                                    </p:animEffect>
-                                  </p:childTnLst>
-                                </p:cTn>
-                              </p:par>
-                            </p:childTnLst>
-                          </p:cTn>
-                        </p:par>
-                        <p:par>
-                          <p:cTn id="16" fill="hold">
-                            <p:stCondLst>
-                              <p:cond delay="1500"/>
-                            </p:stCondLst>
-                            <p:childTnLst>
-                              <p:par>
-                                <p:cTn id="17" presetID="10" presetClass="entr" presetSubtype="0" fill="hold" grpId="0" nodeType="afterEffect">
-                                  <p:stCondLst>
-                                    <p:cond delay="0"/>
-                                  </p:stCondLst>
-                                  <p:childTnLst>
-                                    <p:set>
-                                      <p:cBhvr>
-                                        <p:cTn id="18" dur="1" fill="hold">
-                                          <p:stCondLst>
-                                            <p:cond delay="0"/>
-                                          </p:stCondLst>
-                                        </p:cTn>
-                                        <p:tgtEl>
-                                          <p:spTgt spid="3">
-                                            <p:txEl>
-                                              <p:pRg st="3" end="3"/>
-                                            </p:txEl>
-                                          </p:spTgt>
-                                        </p:tgtEl>
-                                        <p:attrNameLst>
-                                          <p:attrName>style.visibility</p:attrName>
-                                        </p:attrNameLst>
-                                      </p:cBhvr>
-                                      <p:to>
-                                        <p:strVal val="visible"/>
-                                      </p:to>
-                                    </p:set>
-                                    <p:animEffect transition="in" filter="fade">
-                                      <p:cBhvr>
-                                        <p:cTn id="19" dur="500"/>
-                                        <p:tgtEl>
-                                          <p:spTgt spid="3">
-                                            <p:txEl>
-                                              <p:pRg st="3" end="3"/>
-                                            </p:txEl>
-                                          </p:spTgt>
-                                        </p:tgtEl>
-                                      </p:cBhvr>
-                                    </p:animEffect>
-                                  </p:childTnLst>
-                                </p:cTn>
-                              </p:par>
-                            </p:childTnLst>
-                          </p:cTn>
-                        </p:par>
-                        <p:par>
-                          <p:cTn id="20" fill="hold">
-                            <p:stCondLst>
-                              <p:cond delay="2000"/>
-                            </p:stCondLst>
-                            <p:childTnLst>
-                              <p:par>
-                                <p:cTn id="21" presetID="10" presetClass="entr" presetSubtype="0" fill="hold" grpId="0" nodeType="afterEffect">
-                                  <p:stCondLst>
-                                    <p:cond delay="0"/>
-                                  </p:stCondLst>
-                                  <p:childTnLst>
-                                    <p:set>
-                                      <p:cBhvr>
-                                        <p:cTn id="22" dur="1" fill="hold">
-                                          <p:stCondLst>
-                                            <p:cond delay="0"/>
-                                          </p:stCondLst>
-                                        </p:cTn>
-                                        <p:tgtEl>
-                                          <p:spTgt spid="3">
-                                            <p:txEl>
-                                              <p:pRg st="4" end="4"/>
-                                            </p:txEl>
-                                          </p:spTgt>
-                                        </p:tgtEl>
-                                        <p:attrNameLst>
-                                          <p:attrName>style.visibility</p:attrName>
-                                        </p:attrNameLst>
-                                      </p:cBhvr>
-                                      <p:to>
-                                        <p:strVal val="visible"/>
-                                      </p:to>
-                                    </p:set>
-                                    <p:animEffect transition="in" filter="fade">
-                                      <p:cBhvr>
-                                        <p:cTn id="23" dur="500"/>
-                                        <p:tgtEl>
-                                          <p:spTgt spid="3">
-                                            <p:txEl>
-                                              <p:pRg st="4" end="4"/>
-                                            </p:txEl>
-                                          </p:spTgt>
-                                        </p:tgtEl>
-                                      </p:cBhvr>
-                                    </p:animEffect>
-                                  </p:childTnLst>
-                                </p:cTn>
-                              </p:par>
-                            </p:childTnLst>
-                          </p:cTn>
-                        </p:par>
-                        <p:par>
-                          <p:cTn id="24" fill="hold">
-                            <p:stCondLst>
-                              <p:cond delay="2500"/>
-                            </p:stCondLst>
-                            <p:childTnLst>
-                              <p:par>
-                                <p:cTn id="25" presetID="10" presetClass="entr" presetSubtype="0" fill="hold" grpId="0" nodeType="afterEffect">
-                                  <p:stCondLst>
-                                    <p:cond delay="0"/>
-                                  </p:stCondLst>
-                                  <p:childTnLst>
-                                    <p:set>
-                                      <p:cBhvr>
-                                        <p:cTn id="26" dur="1" fill="hold">
-                                          <p:stCondLst>
-                                            <p:cond delay="0"/>
-                                          </p:stCondLst>
-                                        </p:cTn>
-                                        <p:tgtEl>
-                                          <p:spTgt spid="3">
-                                            <p:txEl>
-                                              <p:pRg st="5" end="5"/>
-                                            </p:txEl>
-                                          </p:spTgt>
-                                        </p:tgtEl>
-                                        <p:attrNameLst>
-                                          <p:attrName>style.visibility</p:attrName>
-                                        </p:attrNameLst>
-                                      </p:cBhvr>
-                                      <p:to>
-                                        <p:strVal val="visible"/>
-                                      </p:to>
-                                    </p:set>
-                                    <p:animEffect transition="in" filter="fade">
-                                      <p:cBhvr>
-                                        <p:cTn id="27" dur="500"/>
-                                        <p:tgtEl>
-                                          <p:spTgt spid="3">
-                                            <p:txEl>
-                                              <p:pRg st="5" end="5"/>
-                                            </p:txEl>
-                                          </p:spTgt>
-                                        </p:tgtEl>
-                                      </p:cBhvr>
-                                    </p:animEffect>
-                                  </p:childTnLst>
-                                </p:cTn>
-                              </p:par>
-                            </p:childTnLst>
-                          </p:cTn>
-                        </p:par>
-                        <p:par>
-                          <p:cTn id="28" fill="hold">
-                            <p:stCondLst>
-                              <p:cond delay="3000"/>
-                            </p:stCondLst>
-                            <p:childTnLst>
-                              <p:par>
-                                <p:cTn id="29" presetID="10" presetClass="entr" presetSubtype="0" fill="hold" grpId="0" nodeType="afterEffect">
-                                  <p:stCondLst>
-                                    <p:cond delay="0"/>
-                                  </p:stCondLst>
-                                  <p:childTnLst>
-                                    <p:set>
-                                      <p:cBhvr>
-                                        <p:cTn id="30" dur="1" fill="hold">
-                                          <p:stCondLst>
-                                            <p:cond delay="0"/>
-                                          </p:stCondLst>
-                                        </p:cTn>
-                                        <p:tgtEl>
-                                          <p:spTgt spid="3">
-                                            <p:txEl>
-                                              <p:pRg st="6" end="6"/>
-                                            </p:txEl>
-                                          </p:spTgt>
-                                        </p:tgtEl>
-                                        <p:attrNameLst>
-                                          <p:attrName>style.visibility</p:attrName>
-                                        </p:attrNameLst>
-                                      </p:cBhvr>
-                                      <p:to>
-                                        <p:strVal val="visible"/>
-                                      </p:to>
-                                    </p:set>
-                                    <p:animEffect transition="in" filter="fade">
-                                      <p:cBhvr>
-                                        <p:cTn id="31" dur="500"/>
-                                        <p:tgtEl>
-                                          <p:spTgt spid="3">
-                                            <p:txEl>
-                                              <p:pRg st="6" end="6"/>
-                                            </p:txEl>
-                                          </p:spTgt>
-                                        </p:tgtEl>
-                                      </p:cBhvr>
-                                    </p:animEffect>
-                                  </p:childTnLst>
-                                </p:cTn>
-                              </p:par>
-                            </p:childTnLst>
-                          </p:cTn>
-                        </p:par>
-                        <p:par>
-                          <p:cTn id="32" fill="hold">
-                            <p:stCondLst>
-                              <p:cond delay="3500"/>
-                            </p:stCondLst>
-                            <p:childTnLst>
-                              <p:par>
-                                <p:cTn id="33" presetID="10" presetClass="entr" presetSubtype="0" fill="hold" grpId="0" nodeType="afterEffect">
-                                  <p:stCondLst>
-                                    <p:cond delay="0"/>
-                                  </p:stCondLst>
-                                  <p:childTnLst>
-                                    <p:set>
-                                      <p:cBhvr>
-                                        <p:cTn id="34" dur="1" fill="hold">
-                                          <p:stCondLst>
-                                            <p:cond delay="0"/>
-                                          </p:stCondLst>
-                                        </p:cTn>
-                                        <p:tgtEl>
-                                          <p:spTgt spid="3">
-                                            <p:txEl>
-                                              <p:pRg st="7" end="7"/>
-                                            </p:txEl>
-                                          </p:spTgt>
-                                        </p:tgtEl>
-                                        <p:attrNameLst>
-                                          <p:attrName>style.visibility</p:attrName>
-                                        </p:attrNameLst>
-                                      </p:cBhvr>
-                                      <p:to>
-                                        <p:strVal val="visible"/>
-                                      </p:to>
-                                    </p:set>
-                                    <p:animEffect transition="in" filter="fade">
-                                      <p:cBhvr>
-                                        <p:cTn id="35" dur="500"/>
-                                        <p:tgtEl>
-                                          <p:spTgt spid="3">
-                                            <p:txEl>
-                                              <p:pRg st="7" end="7"/>
-                                            </p:txEl>
-                                          </p:spTgt>
-                                        </p:tgtEl>
-                                      </p:cBhvr>
-                                    </p:animEffect>
-                                  </p:childTnLst>
-                                </p:cTn>
-                              </p:par>
-                            </p:childTnLst>
-                          </p:cTn>
-                        </p:par>
-                        <p:par>
-                          <p:cTn id="36" fill="hold">
-                            <p:stCondLst>
-                              <p:cond delay="4000"/>
-                            </p:stCondLst>
-                            <p:childTnLst>
-                              <p:par>
-                                <p:cTn id="37" presetID="10" presetClass="entr" presetSubtype="0" fill="hold" grpId="0" nodeType="afterEffect">
-                                  <p:stCondLst>
-                                    <p:cond delay="0"/>
-                                  </p:stCondLst>
-                                  <p:childTnLst>
-                                    <p:set>
-                                      <p:cBhvr>
-                                        <p:cTn id="38" dur="1" fill="hold">
-                                          <p:stCondLst>
-                                            <p:cond delay="0"/>
-                                          </p:stCondLst>
-                                        </p:cTn>
-                                        <p:tgtEl>
-                                          <p:spTgt spid="3">
-                                            <p:txEl>
-                                              <p:pRg st="8" end="8"/>
-                                            </p:txEl>
-                                          </p:spTgt>
-                                        </p:tgtEl>
-                                        <p:attrNameLst>
-                                          <p:attrName>style.visibility</p:attrName>
-                                        </p:attrNameLst>
-                                      </p:cBhvr>
-                                      <p:to>
-                                        <p:strVal val="visible"/>
-                                      </p:to>
-                                    </p:set>
-                                    <p:animEffect transition="in" filter="fade">
-                                      <p:cBhvr>
-                                        <p:cTn id="39" dur="500"/>
-                                        <p:tgtEl>
-                                          <p:spTgt spid="3">
-                                            <p:txEl>
-                                              <p:pRg st="8" end="8"/>
-                                            </p:txEl>
-                                          </p:spTgt>
-                                        </p:tgtEl>
-                                      </p:cBhvr>
-                                    </p:animEffect>
-                                  </p:childTnLst>
-                                </p:cTn>
-                              </p:par>
-                            </p:childTnLst>
-                          </p:cTn>
-                        </p:par>
-                        <p:par>
-                          <p:cTn id="40" fill="hold">
-                            <p:stCondLst>
-                              <p:cond delay="4500"/>
-                            </p:stCondLst>
-                            <p:childTnLst>
-                              <p:par>
-                                <p:cTn id="41" presetID="10" presetClass="entr" presetSubtype="0" fill="hold" grpId="0" nodeType="afterEffect">
-                                  <p:stCondLst>
-                                    <p:cond delay="0"/>
-                                  </p:stCondLst>
-                                  <p:childTnLst>
-                                    <p:set>
-                                      <p:cBhvr>
-                                        <p:cTn id="42" dur="1" fill="hold">
-                                          <p:stCondLst>
-                                            <p:cond delay="0"/>
-                                          </p:stCondLst>
-                                        </p:cTn>
-                                        <p:tgtEl>
-                                          <p:spTgt spid="3">
-                                            <p:txEl>
-                                              <p:pRg st="9" end="9"/>
-                                            </p:txEl>
-                                          </p:spTgt>
-                                        </p:tgtEl>
-                                        <p:attrNameLst>
-                                          <p:attrName>style.visibility</p:attrName>
-                                        </p:attrNameLst>
-                                      </p:cBhvr>
-                                      <p:to>
-                                        <p:strVal val="visible"/>
-                                      </p:to>
-                                    </p:set>
-                                    <p:animEffect transition="in" filter="fade">
-                                      <p:cBhvr>
-                                        <p:cTn id="43" dur="500"/>
-                                        <p:tgtEl>
-                                          <p:spTgt spid="3">
-                                            <p:txEl>
-                                              <p:pRg st="9" end="9"/>
-                                            </p:txEl>
-                                          </p:spTgt>
-                                        </p:tgtEl>
-                                      </p:cBhvr>
-                                    </p:animEffect>
-                                  </p:childTnLst>
-                                </p:cTn>
-                              </p:par>
-                            </p:childTnLst>
-                          </p:cTn>
-                        </p:par>
-                        <p:par>
-                          <p:cTn id="44" fill="hold">
-                            <p:stCondLst>
-                              <p:cond delay="5000"/>
-                            </p:stCondLst>
-                            <p:childTnLst>
-                              <p:par>
-                                <p:cTn id="45" presetID="10" presetClass="entr" presetSubtype="0" fill="hold" grpId="0" nodeType="afterEffect">
-                                  <p:stCondLst>
-                                    <p:cond delay="0"/>
-                                  </p:stCondLst>
-                                  <p:childTnLst>
-                                    <p:set>
-                                      <p:cBhvr>
-                                        <p:cTn id="46" dur="1" fill="hold">
-                                          <p:stCondLst>
-                                            <p:cond delay="0"/>
-                                          </p:stCondLst>
-                                        </p:cTn>
-                                        <p:tgtEl>
-                                          <p:spTgt spid="3">
-                                            <p:txEl>
-                                              <p:pRg st="10" end="10"/>
-                                            </p:txEl>
-                                          </p:spTgt>
-                                        </p:tgtEl>
-                                        <p:attrNameLst>
-                                          <p:attrName>style.visibility</p:attrName>
-                                        </p:attrNameLst>
-                                      </p:cBhvr>
-                                      <p:to>
-                                        <p:strVal val="visible"/>
-                                      </p:to>
-                                    </p:set>
-                                    <p:animEffect transition="in" filter="fade">
-                                      <p:cBhvr>
-                                        <p:cTn id="47" dur="500"/>
-                                        <p:tgtEl>
-                                          <p:spTgt spid="3">
-                                            <p:txEl>
-                                              <p:pRg st="10" end="10"/>
-                                            </p:txEl>
-                                          </p:spTgt>
-                                        </p:tgtEl>
-                                      </p:cBhvr>
-                                    </p:animEffect>
-                                  </p:childTnLst>
-                                </p:cTn>
-                              </p:par>
-                            </p:childTnLst>
-                          </p:cTn>
-                        </p:par>
-                      </p:childTnLst>
-                    </p:cTn>
-                  </p:par>
-                </p:childTnLst>
-              </p:cTn>
-              <p:prevCondLst>
-                <p:cond evt="onPrev" delay="0">
-                  <p:tgtEl>
-                    <p:sldTgt/>
-                  </p:tgtEl>
-                </p:cond>
-              </p:prevCondLst>
-              <p:nextCondLst>
-                <p:cond evt="onNext" delay="0">
-                  <p:tgtEl>
-                    <p:sldTgt/>
-                  </p:tgtEl>
-                </p:cond>
-              </p:nextCondLst>
-            </p:seq>
-          </p:childTnLst>
-        </p:cTn>
-      </p:par>
-    </p:tnLst>
-    <p:bldLst>
-      <p:bldP spid="3" grpId="0" uiExpand="1" build="p"/>
-    </p:bldLst>
-  </p:timing>
-</p:sld>
-</file>
-
-<file path=ppt/slides/slide2.xml><?xml version="1.0" encoding="utf-8"?>
-<p:sld xmlns:a="http://schemas.openxmlformats.org/drawingml/2006/main" xmlns:r="http://schemas.openxmlformats.org/officeDocument/2006/relationships" xmlns:p="http://schemas.openxmlformats.org/presentationml/2006/main">
-  <p:cSld>
-    <p:spTree>
-      <p:nvGrpSpPr>
-        <p:cNvPr id="1" name=""/>
-        <p:cNvGrpSpPr/>
-        <p:nvPr/>
-      </p:nvGrpSpPr>
-      <p:grpSpPr>
-        <a:xfrm>
-          <a:off x="0" y="0"/>
-          <a:ext cx="0" cy="0"/>
-          <a:chOff x="0" y="0"/>
-          <a:chExt cx="0" cy="0"/>
-        </a:xfrm>
-      </p:grpSpPr>
-      <p:sp>
-        <p:nvSpPr>
-          <p:cNvPr id="2" name="Cím 1">
-            <a:extLst>
-              <a:ext uri="{FF2B5EF4-FFF2-40B4-BE49-F238E27FC236}">
-                <a16:creationId xmlns:a16="http://schemas.microsoft.com/office/drawing/2014/main" id="{D8736DA6-9D79-4DB7-90AD-09E3F55948CD}"/>
-              </a:ext>
-            </a:extLst>
-          </p:cNvPr>
-          <p:cNvSpPr>
-            <a:spLocks noGrp="1"/>
-          </p:cNvSpPr>
-          <p:nvPr>
-            <p:ph type="title"/>
-          </p:nvPr>
-        </p:nvSpPr>
-        <p:spPr/>
-        <p:txBody>
-          <a:bodyPr/>
-          <a:lstStyle/>
-          <a:p>
-            <a:r>
-              <a:rPr lang="hu-HU" dirty="0">
-                <a:solidFill>
-                  <a:schemeClr val="tx1"/>
-                </a:solidFill>
-                <a:latin typeface="Times New Roman" panose="02020603050405020304" pitchFamily="18" charset="0"/>
-                <a:cs typeface="Times New Roman" panose="02020603050405020304" pitchFamily="18" charset="0"/>
-              </a:rPr>
-              <a:t>A projekt bemutatása</a:t>
-            </a:r>
-          </a:p>
-        </p:txBody>
-      </p:sp>
-      <p:sp>
-        <p:nvSpPr>
-          <p:cNvPr id="4" name="Tartalom helye 2">
-            <a:extLst>
-              <a:ext uri="{FF2B5EF4-FFF2-40B4-BE49-F238E27FC236}">
-                <a16:creationId xmlns:a16="http://schemas.microsoft.com/office/drawing/2014/main" id="{001DDAED-5686-4A0D-A235-F749239A7FA3}"/>
-              </a:ext>
-            </a:extLst>
-          </p:cNvPr>
-          <p:cNvSpPr>
-            <a:spLocks noGrp="1"/>
-          </p:cNvSpPr>
-          <p:nvPr>
-            <p:ph idx="1"/>
-          </p:nvPr>
-        </p:nvSpPr>
-        <p:spPr>
-          <a:xfrm>
-            <a:off x="1371600" y="1909233"/>
-            <a:ext cx="5858933" cy="3581400"/>
-          </a:xfrm>
-        </p:spPr>
-        <p:txBody>
-          <a:bodyPr/>
-          <a:lstStyle/>
-          <a:p>
-            <a:pPr>
-              <a:buFont typeface="Wingdings" panose="05000000000000000000" pitchFamily="2" charset="2"/>
-              <a:buChar char="Ø"/>
-            </a:pPr>
-            <a:endParaRPr lang="hu-HU" dirty="0">
-              <a:solidFill>
-                <a:schemeClr val="tx1"/>
-              </a:solidFill>
-              <a:latin typeface="Times New Roman" panose="02020603050405020304" pitchFamily="18" charset="0"/>
-              <a:cs typeface="Times New Roman" panose="02020603050405020304" pitchFamily="18" charset="0"/>
-            </a:endParaRPr>
-          </a:p>
-        </p:txBody>
-      </p:sp>
-    </p:spTree>
-    <p:extLst>
-      <p:ext uri="{BB962C8B-B14F-4D97-AF65-F5344CB8AC3E}">
-        <p14:creationId xmlns:p14="http://schemas.microsoft.com/office/powerpoint/2010/main" val="1081421890"/>
-      </p:ext>
-    </p:extLst>
-  </p:cSld>
-  <p:clrMapOvr>
-    <a:masterClrMapping/>
-  </p:clrMapOvr>
-  <p:transition spd="slow">
-    <p:push dir="u"/>
-  </p:transition>
-  <p:timing>
-    <p:tnLst>
-      <p:par>
-        <p:cTn id="1" dur="indefinite" restart="never" nodeType="tmRoot">
-          <p:childTnLst>
-            <p:seq concurrent="1" nextAc="seek">
-              <p:cTn id="2" dur="indefinite" nodeType="mainSeq">
-                <p:childTnLst>
-                  <p:par>
-                    <p:cTn id="3" fill="hold">
-                      <p:stCondLst>
-                        <p:cond delay="indefinite"/>
-                        <p:cond evt="onBegin" delay="0">
-                          <p:tn val="2"/>
-                        </p:cond>
-                      </p:stCondLst>
-                      <p:childTnLst>
-                        <p:par>
-                          <p:cTn id="4" fill="hold">
-                            <p:stCondLst>
-                              <p:cond delay="0"/>
-                            </p:stCondLst>
-                            <p:childTnLst>
-                              <p:par>
-                                <p:cTn id="5" presetID="10" presetClass="entr" presetSubtype="0" fill="hold" grpId="0" nodeType="afterEffect">
-                                  <p:stCondLst>
-                                    <p:cond delay="0"/>
-                                  </p:stCondLst>
-                                  <p:childTnLst>
-                                    <p:set>
-                                      <p:cBhvr>
-                                        <p:cTn id="6" dur="1" fill="hold">
-                                          <p:stCondLst>
-                                            <p:cond delay="0"/>
-                                          </p:stCondLst>
-                                        </p:cTn>
-                                        <p:tgtEl>
-                                          <p:spTgt spid="2"/>
-                                        </p:tgtEl>
-                                        <p:attrNameLst>
-                                          <p:attrName>style.visibility</p:attrName>
-                                        </p:attrNameLst>
-                                      </p:cBhvr>
-                                      <p:to>
-                                        <p:strVal val="visible"/>
-                                      </p:to>
-                                    </p:set>
-                                    <p:animEffect transition="in" filter="fade">
-                                      <p:cBhvr>
-                                        <p:cTn id="7" dur="500"/>
-                                        <p:tgtEl>
-                                          <p:spTgt spid="2"/>
-                                        </p:tgtEl>
-                                      </p:cBhvr>
-                                    </p:animEffect>
-                                  </p:childTnLst>
-                                </p:cTn>
-                              </p:par>
-                            </p:childTnLst>
-                          </p:cTn>
-                        </p:par>
-                      </p:childTnLst>
-                    </p:cTn>
-                  </p:par>
-                </p:childTnLst>
-              </p:cTn>
-              <p:prevCondLst>
-                <p:cond evt="onPrev" delay="0">
-                  <p:tgtEl>
-                    <p:sldTgt/>
-                  </p:tgtEl>
-                </p:cond>
-              </p:prevCondLst>
-              <p:nextCondLst>
-                <p:cond evt="onNext" delay="0">
-                  <p:tgtEl>
-                    <p:sldTgt/>
-                  </p:tgtEl>
-                </p:cond>
-              </p:nextCondLst>
-            </p:seq>
-          </p:childTnLst>
-        </p:cTn>
-      </p:par>
-    </p:tnLst>
-    <p:bldLst>
-      <p:bldP spid="2" grpId="0"/>
-    </p:bldLst>
-  </p:timing>
-</p:sld>
-</file>
-
-<file path=ppt/slides/slide3.xml><?xml version="1.0" encoding="utf-8"?>
-<p:sld xmlns:a="http://schemas.openxmlformats.org/drawingml/2006/main" xmlns:r="http://schemas.openxmlformats.org/officeDocument/2006/relationships" xmlns:p="http://schemas.openxmlformats.org/presentationml/2006/main">
-  <p:cSld>
-    <p:spTree>
-      <p:nvGrpSpPr>
-        <p:cNvPr id="1" name=""/>
-        <p:cNvGrpSpPr/>
-        <p:nvPr/>
-      </p:nvGrpSpPr>
-      <p:grpSpPr>
-        <a:xfrm>
-          <a:off x="0" y="0"/>
-          <a:ext cx="0" cy="0"/>
-          <a:chOff x="0" y="0"/>
-          <a:chExt cx="0" cy="0"/>
-        </a:xfrm>
-      </p:grpSpPr>
-      <p:sp>
-        <p:nvSpPr>
-          <p:cNvPr id="2" name="Cím 1">
-            <a:extLst>
-              <a:ext uri="{FF2B5EF4-FFF2-40B4-BE49-F238E27FC236}">
-                <a16:creationId xmlns:a16="http://schemas.microsoft.com/office/drawing/2014/main" id="{D8736DA6-9D79-4DB7-90AD-09E3F55948CD}"/>
-              </a:ext>
-            </a:extLst>
-          </p:cNvPr>
-          <p:cNvSpPr>
-            <a:spLocks noGrp="1"/>
-          </p:cNvSpPr>
-          <p:nvPr>
-            <p:ph type="title"/>
-          </p:nvPr>
-        </p:nvSpPr>
-        <p:spPr>
-          <a:xfrm>
-            <a:off x="1371600" y="685800"/>
-            <a:ext cx="9601200" cy="956733"/>
-          </a:xfrm>
-        </p:spPr>
-        <p:txBody>
-          <a:bodyPr/>
-          <a:lstStyle/>
-          <a:p>
-            <a:r>
-              <a:rPr lang="hu-HU" dirty="0">
-                <a:solidFill>
-                  <a:schemeClr val="tx1"/>
-                </a:solidFill>
-                <a:latin typeface="Times New Roman" panose="02020603050405020304" pitchFamily="18" charset="0"/>
-                <a:cs typeface="Times New Roman" panose="02020603050405020304" pitchFamily="18" charset="0"/>
-              </a:rPr>
-              <a:t>Az oldalunk funkciói</a:t>
-            </a:r>
-          </a:p>
-        </p:txBody>
-      </p:sp>
-      <p:sp>
-        <p:nvSpPr>
-          <p:cNvPr id="3" name="Tartalom helye 2">
-            <a:extLst>
-              <a:ext uri="{FF2B5EF4-FFF2-40B4-BE49-F238E27FC236}">
-                <a16:creationId xmlns:a16="http://schemas.microsoft.com/office/drawing/2014/main" id="{80692D13-F04E-4F4F-A667-DFE0B3C725A5}"/>
-              </a:ext>
-            </a:extLst>
-          </p:cNvPr>
-          <p:cNvSpPr>
-            <a:spLocks noGrp="1"/>
-          </p:cNvSpPr>
-          <p:nvPr>
-            <p:ph idx="1"/>
-          </p:nvPr>
-        </p:nvSpPr>
-        <p:spPr>
-          <a:xfrm>
-            <a:off x="1371600" y="1871133"/>
-            <a:ext cx="9127067" cy="3581400"/>
-          </a:xfrm>
-        </p:spPr>
-        <p:txBody>
-          <a:bodyPr>
-            <a:normAutofit/>
-          </a:bodyPr>
-          <a:lstStyle/>
-          <a:p>
-            <a:pPr>
-              <a:buFont typeface="Wingdings" panose="05000000000000000000" pitchFamily="2" charset="2"/>
-              <a:buChar char="Ø"/>
-            </a:pPr>
-            <a:r>
-              <a:rPr lang="hu-HU" dirty="0">
-                <a:solidFill>
-                  <a:schemeClr val="tx1"/>
-                </a:solidFill>
-                <a:latin typeface="Times New Roman" panose="02020603050405020304" pitchFamily="18" charset="0"/>
-                <a:cs typeface="Times New Roman" panose="02020603050405020304" pitchFamily="18" charset="0"/>
-              </a:rPr>
-              <a:t>Belépés</a:t>
-            </a:r>
-          </a:p>
-          <a:p>
-            <a:pPr>
-              <a:buFont typeface="Wingdings" panose="05000000000000000000" pitchFamily="2" charset="2"/>
-              <a:buChar char="Ø"/>
-            </a:pPr>
-            <a:r>
-              <a:rPr lang="hu-HU" dirty="0">
-                <a:solidFill>
-                  <a:schemeClr val="tx1"/>
-                </a:solidFill>
-                <a:latin typeface="Times New Roman" panose="02020603050405020304" pitchFamily="18" charset="0"/>
-                <a:cs typeface="Times New Roman" panose="02020603050405020304" pitchFamily="18" charset="0"/>
-              </a:rPr>
-              <a:t>Regisztráció</a:t>
-            </a:r>
-          </a:p>
-          <a:p>
-            <a:pPr>
-              <a:buFont typeface="Wingdings" panose="05000000000000000000" pitchFamily="2" charset="2"/>
-              <a:buChar char="Ø"/>
-            </a:pPr>
-            <a:r>
-              <a:rPr lang="hu-HU" dirty="0">
-                <a:solidFill>
-                  <a:schemeClr val="tx1"/>
-                </a:solidFill>
-                <a:latin typeface="Times New Roman" panose="02020603050405020304" pitchFamily="18" charset="0"/>
-                <a:cs typeface="Times New Roman" panose="02020603050405020304" pitchFamily="18" charset="0"/>
-              </a:rPr>
-              <a:t>Termékek böngészése, rendelése</a:t>
-            </a:r>
-          </a:p>
-          <a:p>
-            <a:pPr>
-              <a:buFont typeface="Wingdings" panose="05000000000000000000" pitchFamily="2" charset="2"/>
-              <a:buChar char="Ø"/>
-            </a:pPr>
-            <a:r>
-              <a:rPr lang="hu-HU" dirty="0">
-                <a:solidFill>
-                  <a:schemeClr val="tx1"/>
-                </a:solidFill>
-                <a:latin typeface="Times New Roman" panose="02020603050405020304" pitchFamily="18" charset="0"/>
-                <a:cs typeface="Times New Roman" panose="02020603050405020304" pitchFamily="18" charset="0"/>
-              </a:rPr>
-              <a:t>Blogposztok böngészése, újak feltöltése</a:t>
-            </a:r>
-          </a:p>
-          <a:p>
-            <a:pPr>
-              <a:buFont typeface="Wingdings" panose="05000000000000000000" pitchFamily="2" charset="2"/>
-              <a:buChar char="Ø"/>
-            </a:pPr>
-            <a:r>
-              <a:rPr lang="hu-HU" dirty="0">
-                <a:solidFill>
-                  <a:schemeClr val="tx1"/>
-                </a:solidFill>
-                <a:latin typeface="Times New Roman" panose="02020603050405020304" pitchFamily="18" charset="0"/>
-                <a:cs typeface="Times New Roman" panose="02020603050405020304" pitchFamily="18" charset="0"/>
-              </a:rPr>
-              <a:t>Egyedi minták készítése kép alapján horgoláshoz, kötéshez és hímzéshez, és az ehhez szükséges eszközök megrendelése az oldalunkról</a:t>
-            </a:r>
-          </a:p>
-          <a:p>
-            <a:pPr>
-              <a:buFont typeface="Wingdings" panose="05000000000000000000" pitchFamily="2" charset="2"/>
-              <a:buChar char="Ø"/>
-            </a:pPr>
-            <a:endParaRPr lang="hu-HU" dirty="0">
-              <a:solidFill>
-                <a:schemeClr val="tx1"/>
-              </a:solidFill>
-              <a:latin typeface="Times New Roman" panose="02020603050405020304" pitchFamily="18" charset="0"/>
-              <a:cs typeface="Times New Roman" panose="02020603050405020304" pitchFamily="18" charset="0"/>
-            </a:endParaRPr>
-          </a:p>
-        </p:txBody>
-      </p:sp>
-    </p:spTree>
-    <p:extLst>
-      <p:ext uri="{BB962C8B-B14F-4D97-AF65-F5344CB8AC3E}">
-        <p14:creationId xmlns:p14="http://schemas.microsoft.com/office/powerpoint/2010/main" val="3117878991"/>
-      </p:ext>
-    </p:extLst>
-  </p:cSld>
-  <p:clrMapOvr>
-    <a:masterClrMapping/>
-  </p:clrMapOvr>
-  <p:transition spd="slow">
-    <p:push dir="u"/>
-  </p:transition>
-  <p:timing>
-    <p:tnLst>
-      <p:par>
-        <p:cTn id="1" dur="indefinite" restart="never" nodeType="tmRoot">
-          <p:childTnLst>
-            <p:seq concurrent="1" nextAc="seek">
-              <p:cTn id="2" dur="indefinite" nodeType="mainSeq">
-                <p:childTnLst>
-                  <p:par>
-                    <p:cTn id="3" fill="hold">
-                      <p:stCondLst>
-                        <p:cond delay="indefinite"/>
-                        <p:cond evt="onBegin" delay="0">
-                          <p:tn val="2"/>
-                        </p:cond>
-                      </p:stCondLst>
-                      <p:childTnLst>
-                        <p:par>
-                          <p:cTn id="4" fill="hold">
-                            <p:stCondLst>
-                              <p:cond delay="0"/>
-                            </p:stCondLst>
-                            <p:childTnLst>
-                              <p:par>
-                                <p:cTn id="5" presetID="10" presetClass="entr" presetSubtype="0" fill="hold" grpId="0" nodeType="afterEffect">
-                                  <p:stCondLst>
-                                    <p:cond delay="0"/>
-                                  </p:stCondLst>
-                                  <p:childTnLst>
-                                    <p:set>
-                                      <p:cBhvr>
-                                        <p:cTn id="6" dur="1" fill="hold">
-                                          <p:stCondLst>
-                                            <p:cond delay="0"/>
-                                          </p:stCondLst>
-                                        </p:cTn>
-                                        <p:tgtEl>
-                                          <p:spTgt spid="2"/>
-                                        </p:tgtEl>
-                                        <p:attrNameLst>
-                                          <p:attrName>style.visibility</p:attrName>
-                                        </p:attrNameLst>
-                                      </p:cBhvr>
-                                      <p:to>
-                                        <p:strVal val="visible"/>
-                                      </p:to>
-                                    </p:set>
-                                    <p:animEffect transition="in" filter="fade">
-                                      <p:cBhvr>
-                                        <p:cTn id="7" dur="500"/>
-                                        <p:tgtEl>
-                                          <p:spTgt spid="2"/>
-                                        </p:tgtEl>
-                                      </p:cBhvr>
-                                    </p:animEffect>
-                                  </p:childTnLst>
-                                </p:cTn>
-                              </p:par>
-                            </p:childTnLst>
-                          </p:cTn>
-                        </p:par>
-                        <p:par>
-                          <p:cTn id="8" fill="hold">
-                            <p:stCondLst>
-                              <p:cond delay="500"/>
-                            </p:stCondLst>
-                            <p:childTnLst>
-                              <p:par>
-                                <p:cTn id="9" presetID="42" presetClass="entr" presetSubtype="0" fill="hold" grpId="0" nodeType="afterEffect">
-                                  <p:stCondLst>
-                                    <p:cond delay="0"/>
-                                  </p:stCondLst>
-                                  <p:childTnLst>
-                                    <p:set>
-                                      <p:cBhvr>
-                                        <p:cTn id="10" dur="1" fill="hold">
-                                          <p:stCondLst>
-                                            <p:cond delay="0"/>
-                                          </p:stCondLst>
-                                        </p:cTn>
-                                        <p:tgtEl>
-                                          <p:spTgt spid="3">
-                                            <p:txEl>
-                                              <p:pRg st="0" end="0"/>
-                                            </p:txEl>
-                                          </p:spTgt>
-                                        </p:tgtEl>
-                                        <p:attrNameLst>
-                                          <p:attrName>style.visibility</p:attrName>
-                                        </p:attrNameLst>
-                                      </p:cBhvr>
-                                      <p:to>
-                                        <p:strVal val="visible"/>
-                                      </p:to>
-                                    </p:set>
-                                    <p:animEffect transition="in" filter="fade">
-                                      <p:cBhvr>
-                                        <p:cTn id="11" dur="1000"/>
-                                        <p:tgtEl>
-                                          <p:spTgt spid="3">
-                                            <p:txEl>
-                                              <p:pRg st="0" end="0"/>
-                                            </p:txEl>
-                                          </p:spTgt>
-                                        </p:tgtEl>
-                                      </p:cBhvr>
-                                    </p:animEffect>
-                                    <p:anim calcmode="lin" valueType="num">
-                                      <p:cBhvr>
-                                        <p:cTn id="12" dur="1000" fill="hold"/>
-                                        <p:tgtEl>
-                                          <p:spTgt spid="3">
-                                            <p:txEl>
-                                              <p:pRg st="0" end="0"/>
-                                            </p:txEl>
-                                          </p:spTgt>
-                                        </p:tgtEl>
-                                        <p:attrNameLst>
-                                          <p:attrName>ppt_x</p:attrName>
-                                        </p:attrNameLst>
-                                      </p:cBhvr>
-                                      <p:tavLst>
-                                        <p:tav tm="0">
-                                          <p:val>
-                                            <p:strVal val="#ppt_x"/>
-                                          </p:val>
-                                        </p:tav>
-                                        <p:tav tm="100000">
-                                          <p:val>
-                                            <p:strVal val="#ppt_x"/>
-                                          </p:val>
-                                        </p:tav>
-                                      </p:tavLst>
-                                    </p:anim>
-                                    <p:anim calcmode="lin" valueType="num">
-                                      <p:cBhvr>
-                                        <p:cTn id="13" dur="1000" fill="hold"/>
-                                        <p:tgtEl>
-                                          <p:spTgt spid="3">
-                                            <p:txEl>
-                                              <p:pRg st="0" end="0"/>
-                                            </p:txEl>
-                                          </p:spTgt>
-                                        </p:tgtEl>
-                                        <p:attrNameLst>
-                                          <p:attrName>ppt_y</p:attrName>
-                                        </p:attrNameLst>
-                                      </p:cBhvr>
-                                      <p:tavLst>
-                                        <p:tav tm="0">
-                                          <p:val>
-                                            <p:strVal val="#ppt_y+.1"/>
-                                          </p:val>
-                                        </p:tav>
-                                        <p:tav tm="100000">
-                                          <p:val>
-                                            <p:strVal val="#ppt_y"/>
-                                          </p:val>
-                                        </p:tav>
-                                      </p:tavLst>
-                                    </p:anim>
-                                  </p:childTnLst>
-                                </p:cTn>
-                              </p:par>
-                            </p:childTnLst>
-                          </p:cTn>
-                        </p:par>
-                        <p:par>
-                          <p:cTn id="14" fill="hold">
-                            <p:stCondLst>
-                              <p:cond delay="1500"/>
-                            </p:stCondLst>
-                            <p:childTnLst>
-                              <p:par>
-                                <p:cTn id="15" presetID="42" presetClass="entr" presetSubtype="0" fill="hold" grpId="0" nodeType="afterEffect">
-                                  <p:stCondLst>
-                                    <p:cond delay="0"/>
-                                  </p:stCondLst>
-                                  <p:childTnLst>
-                                    <p:set>
-                                      <p:cBhvr>
-                                        <p:cTn id="16" dur="1" fill="hold">
-                                          <p:stCondLst>
-                                            <p:cond delay="0"/>
-                                          </p:stCondLst>
-                                        </p:cTn>
-                                        <p:tgtEl>
-                                          <p:spTgt spid="3">
-                                            <p:txEl>
-                                              <p:pRg st="1" end="1"/>
-                                            </p:txEl>
-                                          </p:spTgt>
-                                        </p:tgtEl>
-                                        <p:attrNameLst>
-                                          <p:attrName>style.visibility</p:attrName>
-                                        </p:attrNameLst>
-                                      </p:cBhvr>
-                                      <p:to>
-                                        <p:strVal val="visible"/>
-                                      </p:to>
-                                    </p:set>
-                                    <p:animEffect transition="in" filter="fade">
-                                      <p:cBhvr>
-                                        <p:cTn id="17" dur="1000"/>
-                                        <p:tgtEl>
-                                          <p:spTgt spid="3">
-                                            <p:txEl>
-                                              <p:pRg st="1" end="1"/>
-                                            </p:txEl>
-                                          </p:spTgt>
-                                        </p:tgtEl>
-                                      </p:cBhvr>
-                                    </p:animEffect>
-                                    <p:anim calcmode="lin" valueType="num">
-                                      <p:cBhvr>
-                                        <p:cTn id="18" dur="1000" fill="hold"/>
-                                        <p:tgtEl>
-                                          <p:spTgt spid="3">
-                                            <p:txEl>
-                                              <p:pRg st="1" end="1"/>
-                                            </p:txEl>
-                                          </p:spTgt>
-                                        </p:tgtEl>
-                                        <p:attrNameLst>
-                                          <p:attrName>ppt_x</p:attrName>
-                                        </p:attrNameLst>
-                                      </p:cBhvr>
-                                      <p:tavLst>
-                                        <p:tav tm="0">
-                                          <p:val>
-                                            <p:strVal val="#ppt_x"/>
-                                          </p:val>
-                                        </p:tav>
-                                        <p:tav tm="100000">
-                                          <p:val>
-                                            <p:strVal val="#ppt_x"/>
-                                          </p:val>
-                                        </p:tav>
-                                      </p:tavLst>
-                                    </p:anim>
-                                    <p:anim calcmode="lin" valueType="num">
-                                      <p:cBhvr>
-                                        <p:cTn id="19" dur="1000" fill="hold"/>
-                                        <p:tgtEl>
-                                          <p:spTgt spid="3">
-                                            <p:txEl>
-                                              <p:pRg st="1" end="1"/>
-                                            </p:txEl>
-                                          </p:spTgt>
-                                        </p:tgtEl>
-                                        <p:attrNameLst>
-                                          <p:attrName>ppt_y</p:attrName>
-                                        </p:attrNameLst>
-                                      </p:cBhvr>
-                                      <p:tavLst>
-                                        <p:tav tm="0">
-                                          <p:val>
-                                            <p:strVal val="#ppt_y+.1"/>
-                                          </p:val>
-                                        </p:tav>
-                                        <p:tav tm="100000">
-                                          <p:val>
-                                            <p:strVal val="#ppt_y"/>
-                                          </p:val>
-                                        </p:tav>
-                                      </p:tavLst>
-                                    </p:anim>
-                                  </p:childTnLst>
-                                </p:cTn>
-                              </p:par>
-                            </p:childTnLst>
-                          </p:cTn>
-                        </p:par>
-                        <p:par>
-                          <p:cTn id="20" fill="hold">
-                            <p:stCondLst>
-                              <p:cond delay="2500"/>
-                            </p:stCondLst>
-                            <p:childTnLst>
-                              <p:par>
-                                <p:cTn id="21" presetID="42" presetClass="entr" presetSubtype="0" fill="hold" grpId="0" nodeType="afterEffect">
-                                  <p:stCondLst>
-                                    <p:cond delay="0"/>
-                                  </p:stCondLst>
-                                  <p:childTnLst>
-                                    <p:set>
-                                      <p:cBhvr>
-                                        <p:cTn id="22" dur="1" fill="hold">
-                                          <p:stCondLst>
-                                            <p:cond delay="0"/>
-                                          </p:stCondLst>
-                                        </p:cTn>
-                                        <p:tgtEl>
-                                          <p:spTgt spid="3">
-                                            <p:txEl>
-                                              <p:pRg st="2" end="2"/>
-                                            </p:txEl>
-                                          </p:spTgt>
-                                        </p:tgtEl>
-                                        <p:attrNameLst>
-                                          <p:attrName>style.visibility</p:attrName>
-                                        </p:attrNameLst>
-                                      </p:cBhvr>
-                                      <p:to>
-                                        <p:strVal val="visible"/>
-                                      </p:to>
-                                    </p:set>
-                                    <p:animEffect transition="in" filter="fade">
-                                      <p:cBhvr>
-                                        <p:cTn id="23" dur="1000"/>
-                                        <p:tgtEl>
-                                          <p:spTgt spid="3">
-                                            <p:txEl>
-                                              <p:pRg st="2" end="2"/>
-                                            </p:txEl>
-                                          </p:spTgt>
-                                        </p:tgtEl>
-                                      </p:cBhvr>
-                                    </p:animEffect>
-                                    <p:anim calcmode="lin" valueType="num">
-                                      <p:cBhvr>
-                                        <p:cTn id="24" dur="1000" fill="hold"/>
-                                        <p:tgtEl>
-                                          <p:spTgt spid="3">
-                                            <p:txEl>
-                                              <p:pRg st="2" end="2"/>
-                                            </p:txEl>
-                                          </p:spTgt>
-                                        </p:tgtEl>
-                                        <p:attrNameLst>
-                                          <p:attrName>ppt_x</p:attrName>
-                                        </p:attrNameLst>
-                                      </p:cBhvr>
-                                      <p:tavLst>
-                                        <p:tav tm="0">
-                                          <p:val>
-                                            <p:strVal val="#ppt_x"/>
-                                          </p:val>
-                                        </p:tav>
-                                        <p:tav tm="100000">
-                                          <p:val>
-                                            <p:strVal val="#ppt_x"/>
-                                          </p:val>
-                                        </p:tav>
-                                      </p:tavLst>
-                                    </p:anim>
-                                    <p:anim calcmode="lin" valueType="num">
-                                      <p:cBhvr>
-                                        <p:cTn id="25" dur="1000" fill="hold"/>
-                                        <p:tgtEl>
-                                          <p:spTgt spid="3">
-                                            <p:txEl>
-                                              <p:pRg st="2" end="2"/>
-                                            </p:txEl>
-                                          </p:spTgt>
-                                        </p:tgtEl>
-                                        <p:attrNameLst>
-                                          <p:attrName>ppt_y</p:attrName>
-                                        </p:attrNameLst>
-                                      </p:cBhvr>
-                                      <p:tavLst>
-                                        <p:tav tm="0">
-                                          <p:val>
-                                            <p:strVal val="#ppt_y+.1"/>
-                                          </p:val>
-                                        </p:tav>
-                                        <p:tav tm="100000">
-                                          <p:val>
-                                            <p:strVal val="#ppt_y"/>
-                                          </p:val>
-                                        </p:tav>
-                                      </p:tavLst>
-                                    </p:anim>
-                                  </p:childTnLst>
-                                </p:cTn>
-                              </p:par>
-                            </p:childTnLst>
-                          </p:cTn>
-                        </p:par>
-                        <p:par>
-                          <p:cTn id="26" fill="hold">
-                            <p:stCondLst>
-                              <p:cond delay="3500"/>
-                            </p:stCondLst>
-                            <p:childTnLst>
-                              <p:par>
-                                <p:cTn id="27" presetID="42" presetClass="entr" presetSubtype="0" fill="hold" grpId="0" nodeType="afterEffect">
-                                  <p:stCondLst>
-                                    <p:cond delay="0"/>
-                                  </p:stCondLst>
-                                  <p:childTnLst>
-                                    <p:set>
-                                      <p:cBhvr>
-                                        <p:cTn id="28" dur="1" fill="hold">
-                                          <p:stCondLst>
-                                            <p:cond delay="0"/>
-                                          </p:stCondLst>
-                                        </p:cTn>
-                                        <p:tgtEl>
-                                          <p:spTgt spid="3">
-                                            <p:txEl>
-                                              <p:pRg st="3" end="3"/>
-                                            </p:txEl>
-                                          </p:spTgt>
-                                        </p:tgtEl>
-                                        <p:attrNameLst>
-                                          <p:attrName>style.visibility</p:attrName>
-                                        </p:attrNameLst>
-                                      </p:cBhvr>
-                                      <p:to>
-                                        <p:strVal val="visible"/>
-                                      </p:to>
-                                    </p:set>
-                                    <p:animEffect transition="in" filter="fade">
-                                      <p:cBhvr>
-                                        <p:cTn id="29" dur="1000"/>
-                                        <p:tgtEl>
-                                          <p:spTgt spid="3">
-                                            <p:txEl>
-                                              <p:pRg st="3" end="3"/>
-                                            </p:txEl>
-                                          </p:spTgt>
-                                        </p:tgtEl>
-                                      </p:cBhvr>
-                                    </p:animEffect>
-                                    <p:anim calcmode="lin" valueType="num">
-                                      <p:cBhvr>
-                                        <p:cTn id="30" dur="1000" fill="hold"/>
-                                        <p:tgtEl>
-                                          <p:spTgt spid="3">
-                                            <p:txEl>
-                                              <p:pRg st="3" end="3"/>
-                                            </p:txEl>
-                                          </p:spTgt>
-                                        </p:tgtEl>
-                                        <p:attrNameLst>
-                                          <p:attrName>ppt_x</p:attrName>
-                                        </p:attrNameLst>
-                                      </p:cBhvr>
-                                      <p:tavLst>
-                                        <p:tav tm="0">
-                                          <p:val>
-                                            <p:strVal val="#ppt_x"/>
-                                          </p:val>
-                                        </p:tav>
-                                        <p:tav tm="100000">
-                                          <p:val>
-                                            <p:strVal val="#ppt_x"/>
-                                          </p:val>
-                                        </p:tav>
-                                      </p:tavLst>
-                                    </p:anim>
-                                    <p:anim calcmode="lin" valueType="num">
-                                      <p:cBhvr>
-                                        <p:cTn id="31" dur="1000" fill="hold"/>
-                                        <p:tgtEl>
-                                          <p:spTgt spid="3">
-                                            <p:txEl>
-                                              <p:pRg st="3" end="3"/>
-                                            </p:txEl>
-                                          </p:spTgt>
-                                        </p:tgtEl>
-                                        <p:attrNameLst>
-                                          <p:attrName>ppt_y</p:attrName>
-                                        </p:attrNameLst>
-                                      </p:cBhvr>
-                                      <p:tavLst>
-                                        <p:tav tm="0">
-                                          <p:val>
-                                            <p:strVal val="#ppt_y+.1"/>
-                                          </p:val>
-                                        </p:tav>
-                                        <p:tav tm="100000">
-                                          <p:val>
-                                            <p:strVal val="#ppt_y"/>
-                                          </p:val>
-                                        </p:tav>
-                                      </p:tavLst>
-                                    </p:anim>
-                                  </p:childTnLst>
-                                </p:cTn>
-                              </p:par>
-                            </p:childTnLst>
-                          </p:cTn>
-                        </p:par>
-                        <p:par>
-                          <p:cTn id="32" fill="hold">
-                            <p:stCondLst>
-                              <p:cond delay="4500"/>
-                            </p:stCondLst>
-                            <p:childTnLst>
-                              <p:par>
-                                <p:cTn id="33" presetID="42" presetClass="entr" presetSubtype="0" fill="hold" grpId="0" nodeType="afterEffect">
-                                  <p:stCondLst>
-                                    <p:cond delay="0"/>
-                                  </p:stCondLst>
-                                  <p:childTnLst>
-                                    <p:set>
-                                      <p:cBhvr>
-                                        <p:cTn id="34" dur="1" fill="hold">
-                                          <p:stCondLst>
-                                            <p:cond delay="0"/>
-                                          </p:stCondLst>
-                                        </p:cTn>
-                                        <p:tgtEl>
-                                          <p:spTgt spid="3">
-                                            <p:txEl>
-                                              <p:pRg st="4" end="4"/>
-                                            </p:txEl>
-                                          </p:spTgt>
-                                        </p:tgtEl>
-                                        <p:attrNameLst>
-                                          <p:attrName>style.visibility</p:attrName>
-                                        </p:attrNameLst>
-                                      </p:cBhvr>
-                                      <p:to>
-                                        <p:strVal val="visible"/>
-                                      </p:to>
-                                    </p:set>
-                                    <p:animEffect transition="in" filter="fade">
-                                      <p:cBhvr>
-                                        <p:cTn id="35" dur="1000"/>
-                                        <p:tgtEl>
-                                          <p:spTgt spid="3">
-                                            <p:txEl>
-                                              <p:pRg st="4" end="4"/>
-                                            </p:txEl>
-                                          </p:spTgt>
-                                        </p:tgtEl>
-                                      </p:cBhvr>
-                                    </p:animEffect>
-                                    <p:anim calcmode="lin" valueType="num">
-                                      <p:cBhvr>
-                                        <p:cTn id="36" dur="1000" fill="hold"/>
-                                        <p:tgtEl>
-                                          <p:spTgt spid="3">
-                                            <p:txEl>
-                                              <p:pRg st="4" end="4"/>
-                                            </p:txEl>
-                                          </p:spTgt>
-                                        </p:tgtEl>
-                                        <p:attrNameLst>
-                                          <p:attrName>ppt_x</p:attrName>
-                                        </p:attrNameLst>
-                                      </p:cBhvr>
-                                      <p:tavLst>
-                                        <p:tav tm="0">
-                                          <p:val>
-                                            <p:strVal val="#ppt_x"/>
-                                          </p:val>
-                                        </p:tav>
-                                        <p:tav tm="100000">
-                                          <p:val>
-                                            <p:strVal val="#ppt_x"/>
-                                          </p:val>
-                                        </p:tav>
-                                      </p:tavLst>
-                                    </p:anim>
-                                    <p:anim calcmode="lin" valueType="num">
-                                      <p:cBhvr>
-                                        <p:cTn id="37" dur="1000" fill="hold"/>
-                                        <p:tgtEl>
-                                          <p:spTgt spid="3">
-                                            <p:txEl>
-                                              <p:pRg st="4" end="4"/>
-                                            </p:txEl>
-                                          </p:spTgt>
-                                        </p:tgtEl>
-                                        <p:attrNameLst>
-                                          <p:attrName>ppt_y</p:attrName>
-                                        </p:attrNameLst>
-                                      </p:cBhvr>
-                                      <p:tavLst>
-                                        <p:tav tm="0">
-                                          <p:val>
-                                            <p:strVal val="#ppt_y+.1"/>
-                                          </p:val>
-                                        </p:tav>
-                                        <p:tav tm="100000">
-                                          <p:val>
-                                            <p:strVal val="#ppt_y"/>
-                                          </p:val>
-                                        </p:tav>
-                                      </p:tavLst>
-                                    </p:anim>
-                                  </p:childTnLst>
-                                </p:cTn>
-                              </p:par>
-                            </p:childTnLst>
-                          </p:cTn>
-                        </p:par>
-                      </p:childTnLst>
-                    </p:cTn>
-                  </p:par>
-                </p:childTnLst>
-              </p:cTn>
-              <p:prevCondLst>
-                <p:cond evt="onPrev" delay="0">
-                  <p:tgtEl>
-                    <p:sldTgt/>
-                  </p:tgtEl>
-                </p:cond>
-              </p:prevCondLst>
-              <p:nextCondLst>
-                <p:cond evt="onNext" delay="0">
-                  <p:tgtEl>
-                    <p:sldTgt/>
-                  </p:tgtEl>
-                </p:cond>
-              </p:nextCondLst>
-            </p:seq>
-          </p:childTnLst>
-        </p:cTn>
-      </p:par>
-    </p:tnLst>
-    <p:bldLst>
-      <p:bldP spid="2" grpId="0"/>
-      <p:bldP spid="3" grpId="0" uiExpand="1" build="p"/>
-    </p:bldLst>
-  </p:timing>
-</p:sld>
-</file>
-
-<file path=ppt/slides/slide4.xml><?xml version="1.0" encoding="utf-8"?>
-<p:sld xmlns:a="http://schemas.openxmlformats.org/drawingml/2006/main" xmlns:r="http://schemas.openxmlformats.org/officeDocument/2006/relationships" xmlns:p="http://schemas.openxmlformats.org/presentationml/2006/main">
-  <p:cSld>
-    <p:spTree>
-      <p:nvGrpSpPr>
-        <p:cNvPr id="1" name=""/>
-        <p:cNvGrpSpPr/>
-        <p:nvPr/>
-      </p:nvGrpSpPr>
-      <p:grpSpPr>
-        <a:xfrm>
-          <a:off x="0" y="0"/>
-          <a:ext cx="0" cy="0"/>
-          <a:chOff x="0" y="0"/>
-          <a:chExt cx="0" cy="0"/>
-        </a:xfrm>
-      </p:grpSpPr>
-      <p:sp>
-        <p:nvSpPr>
-          <p:cNvPr id="2" name="Cím 1">
-            <a:extLst>
-              <a:ext uri="{FF2B5EF4-FFF2-40B4-BE49-F238E27FC236}">
-                <a16:creationId xmlns:a16="http://schemas.microsoft.com/office/drawing/2014/main" id="{D8736DA6-9D79-4DB7-90AD-09E3F55948CD}"/>
-              </a:ext>
-            </a:extLst>
-          </p:cNvPr>
-          <p:cNvSpPr>
-            <a:spLocks noGrp="1"/>
-          </p:cNvSpPr>
-          <p:nvPr>
-            <p:ph type="title"/>
-          </p:nvPr>
-        </p:nvSpPr>
-        <p:spPr>
-          <a:xfrm>
-            <a:off x="1371600" y="685800"/>
-            <a:ext cx="9601200" cy="931333"/>
-          </a:xfrm>
-        </p:spPr>
-        <p:txBody>
-          <a:bodyPr/>
-          <a:lstStyle/>
-          <a:p>
-            <a:r>
-              <a:rPr lang="hu-HU" dirty="0">
-                <a:solidFill>
-                  <a:schemeClr val="tx1"/>
-                </a:solidFill>
-                <a:latin typeface="Times New Roman" panose="02020603050405020304" pitchFamily="18" charset="0"/>
-                <a:cs typeface="Times New Roman" panose="02020603050405020304" pitchFamily="18" charset="0"/>
-              </a:rPr>
-              <a:t>Program részei</a:t>
-            </a:r>
-          </a:p>
-        </p:txBody>
-      </p:sp>
-      <p:sp>
-        <p:nvSpPr>
-          <p:cNvPr id="3" name="Tartalom helye 2">
-            <a:extLst>
-              <a:ext uri="{FF2B5EF4-FFF2-40B4-BE49-F238E27FC236}">
-                <a16:creationId xmlns:a16="http://schemas.microsoft.com/office/drawing/2014/main" id="{80692D13-F04E-4F4F-A667-DFE0B3C725A5}"/>
-              </a:ext>
-            </a:extLst>
-          </p:cNvPr>
-          <p:cNvSpPr>
-            <a:spLocks noGrp="1"/>
-          </p:cNvSpPr>
-          <p:nvPr>
-            <p:ph idx="1"/>
-          </p:nvPr>
-        </p:nvSpPr>
-        <p:spPr>
-          <a:xfrm>
-            <a:off x="1371600" y="2171700"/>
-            <a:ext cx="3395133" cy="3581400"/>
-          </a:xfrm>
-        </p:spPr>
-        <p:txBody>
-          <a:bodyPr/>
-          <a:lstStyle/>
-          <a:p>
-            <a:pPr>
-              <a:buFont typeface="Wingdings" panose="05000000000000000000" pitchFamily="2" charset="2"/>
-              <a:buChar char="Ø"/>
-            </a:pPr>
-            <a:r>
-              <a:rPr lang="hu-HU" dirty="0">
-                <a:solidFill>
-                  <a:schemeClr val="tx1"/>
-                </a:solidFill>
-                <a:latin typeface="Times New Roman" panose="02020603050405020304" pitchFamily="18" charset="0"/>
-                <a:cs typeface="Times New Roman" panose="02020603050405020304" pitchFamily="18" charset="0"/>
-              </a:rPr>
-              <a:t>Backend</a:t>
-            </a:r>
-          </a:p>
-          <a:p>
-            <a:pPr lvl="1">
-              <a:buFont typeface="Wingdings" panose="05000000000000000000" pitchFamily="2" charset="2"/>
-              <a:buChar char="§"/>
-            </a:pPr>
-            <a:r>
-              <a:rPr lang="hu-HU" i="0" dirty="0">
-                <a:solidFill>
-                  <a:schemeClr val="tx1"/>
-                </a:solidFill>
-                <a:latin typeface="Times New Roman" panose="02020603050405020304" pitchFamily="18" charset="0"/>
-                <a:cs typeface="Times New Roman" panose="02020603050405020304" pitchFamily="18" charset="0"/>
-              </a:rPr>
-              <a:t>Laravel</a:t>
-            </a:r>
-          </a:p>
-          <a:p>
-            <a:pPr>
-              <a:buFont typeface="Wingdings" panose="05000000000000000000" pitchFamily="2" charset="2"/>
-              <a:buChar char="Ø"/>
-            </a:pPr>
-            <a:r>
-              <a:rPr lang="hu-HU" dirty="0">
-                <a:solidFill>
-                  <a:schemeClr val="tx1"/>
-                </a:solidFill>
-                <a:latin typeface="Times New Roman" panose="02020603050405020304" pitchFamily="18" charset="0"/>
-                <a:cs typeface="Times New Roman" panose="02020603050405020304" pitchFamily="18" charset="0"/>
-              </a:rPr>
-              <a:t>Frontend</a:t>
-            </a:r>
-          </a:p>
-          <a:p>
-            <a:pPr lvl="1">
-              <a:buFont typeface="Wingdings" panose="05000000000000000000" pitchFamily="2" charset="2"/>
-              <a:buChar char="§"/>
-            </a:pPr>
-            <a:r>
-              <a:rPr lang="hu-HU" i="0" dirty="0">
-                <a:solidFill>
-                  <a:schemeClr val="tx1"/>
-                </a:solidFill>
-                <a:latin typeface="Times New Roman" panose="02020603050405020304" pitchFamily="18" charset="0"/>
-                <a:cs typeface="Times New Roman" panose="02020603050405020304" pitchFamily="18" charset="0"/>
-              </a:rPr>
-              <a:t>Vue.js</a:t>
-            </a:r>
-          </a:p>
-          <a:p>
-            <a:pPr lvl="1">
-              <a:buFont typeface="Wingdings" panose="05000000000000000000" pitchFamily="2" charset="2"/>
-              <a:buChar char="§"/>
-            </a:pPr>
-            <a:r>
-              <a:rPr lang="hu-HU" i="0" dirty="0" err="1">
-                <a:solidFill>
-                  <a:schemeClr val="tx1"/>
-                </a:solidFill>
-                <a:latin typeface="Times New Roman" panose="02020603050405020304" pitchFamily="18" charset="0"/>
-                <a:cs typeface="Times New Roman" panose="02020603050405020304" pitchFamily="18" charset="0"/>
-              </a:rPr>
-              <a:t>PrimeVue</a:t>
-            </a:r>
-            <a:endParaRPr lang="hu-HU" i="0" dirty="0">
-              <a:solidFill>
-                <a:schemeClr val="tx1"/>
-              </a:solidFill>
-              <a:latin typeface="Times New Roman" panose="02020603050405020304" pitchFamily="18" charset="0"/>
-              <a:cs typeface="Times New Roman" panose="02020603050405020304" pitchFamily="18" charset="0"/>
-            </a:endParaRPr>
-          </a:p>
-          <a:p>
-            <a:pPr>
-              <a:buFont typeface="Wingdings" panose="05000000000000000000" pitchFamily="2" charset="2"/>
-              <a:buChar char="Ø"/>
-            </a:pPr>
-            <a:r>
-              <a:rPr lang="hu-HU" dirty="0">
-                <a:solidFill>
-                  <a:schemeClr val="tx1"/>
-                </a:solidFill>
-                <a:latin typeface="Times New Roman" panose="02020603050405020304" pitchFamily="18" charset="0"/>
-                <a:cs typeface="Times New Roman" panose="02020603050405020304" pitchFamily="18" charset="0"/>
-              </a:rPr>
-              <a:t>Adatbázis</a:t>
-            </a:r>
-          </a:p>
-          <a:p>
-            <a:pPr lvl="1">
-              <a:buFont typeface="Wingdings" panose="05000000000000000000" pitchFamily="2" charset="2"/>
-              <a:buChar char="§"/>
-            </a:pPr>
-            <a:r>
-              <a:rPr lang="hu-HU" i="0" dirty="0" err="1">
-                <a:solidFill>
-                  <a:schemeClr val="tx1"/>
-                </a:solidFill>
-                <a:latin typeface="Times New Roman" panose="02020603050405020304" pitchFamily="18" charset="0"/>
-                <a:cs typeface="Times New Roman" panose="02020603050405020304" pitchFamily="18" charset="0"/>
-              </a:rPr>
-              <a:t>Mysql</a:t>
-            </a:r>
-            <a:endParaRPr lang="hu-HU" i="0" dirty="0">
-              <a:solidFill>
-                <a:schemeClr val="tx1"/>
-              </a:solidFill>
-              <a:latin typeface="Times New Roman" panose="02020603050405020304" pitchFamily="18" charset="0"/>
-              <a:cs typeface="Times New Roman" panose="02020603050405020304" pitchFamily="18" charset="0"/>
-            </a:endParaRPr>
-          </a:p>
-        </p:txBody>
-      </p:sp>
-    </p:spTree>
-    <p:extLst>
-      <p:ext uri="{BB962C8B-B14F-4D97-AF65-F5344CB8AC3E}">
-        <p14:creationId xmlns:p14="http://schemas.microsoft.com/office/powerpoint/2010/main" val="769519101"/>
-      </p:ext>
-    </p:extLst>
-  </p:cSld>
-  <p:clrMapOvr>
-    <a:masterClrMapping/>
-  </p:clrMapOvr>
-  <p:transition spd="slow">
-    <p:push dir="u"/>
-  </p:transition>
-  <p:timing>
-    <p:tnLst>
-      <p:par>
-        <p:cTn id="1" dur="indefinite" restart="never" nodeType="tmRoot">
-          <p:childTnLst>
-            <p:seq concurrent="1" nextAc="seek">
-              <p:cTn id="2" dur="indefinite" nodeType="mainSeq">
-                <p:childTnLst>
-                  <p:par>
-                    <p:cTn id="3" fill="hold">
-                      <p:stCondLst>
-                        <p:cond delay="indefinite"/>
-                        <p:cond evt="onBegin" delay="0">
-                          <p:tn val="2"/>
-                        </p:cond>
-                      </p:stCondLst>
-                      <p:childTnLst>
-                        <p:par>
-                          <p:cTn id="4" fill="hold">
-                            <p:stCondLst>
-                              <p:cond delay="0"/>
-                            </p:stCondLst>
-                            <p:childTnLst>
-                              <p:par>
-                                <p:cTn id="5" presetID="10" presetClass="entr" presetSubtype="0" fill="hold" grpId="0" nodeType="afterEffect">
-                                  <p:stCondLst>
-                                    <p:cond delay="0"/>
-                                  </p:stCondLst>
-                                  <p:childTnLst>
-                                    <p:set>
-                                      <p:cBhvr>
-                                        <p:cTn id="6" dur="1" fill="hold">
-                                          <p:stCondLst>
-                                            <p:cond delay="0"/>
-                                          </p:stCondLst>
-                                        </p:cTn>
-                                        <p:tgtEl>
-                                          <p:spTgt spid="2"/>
-                                        </p:tgtEl>
-                                        <p:attrNameLst>
-                                          <p:attrName>style.visibility</p:attrName>
-                                        </p:attrNameLst>
-                                      </p:cBhvr>
-                                      <p:to>
-                                        <p:strVal val="visible"/>
-                                      </p:to>
-                                    </p:set>
-                                    <p:animEffect transition="in" filter="fade">
-                                      <p:cBhvr>
-                                        <p:cTn id="7" dur="500"/>
-                                        <p:tgtEl>
-                                          <p:spTgt spid="2"/>
-                                        </p:tgtEl>
-                                      </p:cBhvr>
-                                    </p:animEffect>
-                                  </p:childTnLst>
-                                </p:cTn>
-                              </p:par>
-                            </p:childTnLst>
-                          </p:cTn>
-                        </p:par>
-                        <p:par>
-                          <p:cTn id="8" fill="hold">
-                            <p:stCondLst>
-                              <p:cond delay="500"/>
-                            </p:stCondLst>
-                            <p:childTnLst>
-                              <p:par>
-                                <p:cTn id="9" presetID="42" presetClass="entr" presetSubtype="0" fill="hold" grpId="0" nodeType="afterEffect">
-                                  <p:stCondLst>
-                                    <p:cond delay="200"/>
-                                  </p:stCondLst>
-                                  <p:childTnLst>
-                                    <p:set>
-                                      <p:cBhvr>
-                                        <p:cTn id="10" dur="1" fill="hold">
-                                          <p:stCondLst>
-                                            <p:cond delay="0"/>
-                                          </p:stCondLst>
-                                        </p:cTn>
-                                        <p:tgtEl>
-                                          <p:spTgt spid="3">
-                                            <p:txEl>
-                                              <p:pRg st="0" end="0"/>
-                                            </p:txEl>
-                                          </p:spTgt>
-                                        </p:tgtEl>
-                                        <p:attrNameLst>
-                                          <p:attrName>style.visibility</p:attrName>
-                                        </p:attrNameLst>
-                                      </p:cBhvr>
-                                      <p:to>
-                                        <p:strVal val="visible"/>
-                                      </p:to>
-                                    </p:set>
-                                    <p:animEffect transition="in" filter="fade">
-                                      <p:cBhvr>
-                                        <p:cTn id="11" dur="500"/>
-                                        <p:tgtEl>
-                                          <p:spTgt spid="3">
-                                            <p:txEl>
-                                              <p:pRg st="0" end="0"/>
-                                            </p:txEl>
-                                          </p:spTgt>
-                                        </p:tgtEl>
-                                      </p:cBhvr>
-                                    </p:animEffect>
-                                    <p:anim calcmode="lin" valueType="num">
-                                      <p:cBhvr>
-                                        <p:cTn id="12" dur="500" fill="hold"/>
-                                        <p:tgtEl>
-                                          <p:spTgt spid="3">
-                                            <p:txEl>
-                                              <p:pRg st="0" end="0"/>
-                                            </p:txEl>
-                                          </p:spTgt>
-                                        </p:tgtEl>
-                                        <p:attrNameLst>
-                                          <p:attrName>ppt_x</p:attrName>
-                                        </p:attrNameLst>
-                                      </p:cBhvr>
-                                      <p:tavLst>
-                                        <p:tav tm="0">
-                                          <p:val>
-                                            <p:strVal val="#ppt_x"/>
-                                          </p:val>
-                                        </p:tav>
-                                        <p:tav tm="100000">
-                                          <p:val>
-                                            <p:strVal val="#ppt_x"/>
-                                          </p:val>
-                                        </p:tav>
-                                      </p:tavLst>
-                                    </p:anim>
-                                    <p:anim calcmode="lin" valueType="num">
-                                      <p:cBhvr>
-                                        <p:cTn id="13" dur="500" fill="hold"/>
-                                        <p:tgtEl>
-                                          <p:spTgt spid="3">
-                                            <p:txEl>
-                                              <p:pRg st="0" end="0"/>
-                                            </p:txEl>
-                                          </p:spTgt>
-                                        </p:tgtEl>
-                                        <p:attrNameLst>
-                                          <p:attrName>ppt_y</p:attrName>
-                                        </p:attrNameLst>
-                                      </p:cBhvr>
-                                      <p:tavLst>
-                                        <p:tav tm="0">
-                                          <p:val>
-                                            <p:strVal val="#ppt_y+.1"/>
-                                          </p:val>
-                                        </p:tav>
-                                        <p:tav tm="100000">
-                                          <p:val>
-                                            <p:strVal val="#ppt_y"/>
-                                          </p:val>
-                                        </p:tav>
-                                      </p:tavLst>
-                                    </p:anim>
-                                  </p:childTnLst>
-                                </p:cTn>
-                              </p:par>
-                            </p:childTnLst>
-                          </p:cTn>
-                        </p:par>
-                        <p:par>
-                          <p:cTn id="14" fill="hold">
-                            <p:stCondLst>
-                              <p:cond delay="1200"/>
-                            </p:stCondLst>
-                            <p:childTnLst>
-                              <p:par>
-                                <p:cTn id="15" presetID="42" presetClass="entr" presetSubtype="0" fill="hold" grpId="0" nodeType="afterEffect">
-                                  <p:stCondLst>
-                                    <p:cond delay="0"/>
-                                  </p:stCondLst>
-                                  <p:childTnLst>
-                                    <p:set>
-                                      <p:cBhvr>
-                                        <p:cTn id="16" dur="1" fill="hold">
-                                          <p:stCondLst>
-                                            <p:cond delay="0"/>
-                                          </p:stCondLst>
-                                        </p:cTn>
-                                        <p:tgtEl>
-                                          <p:spTgt spid="3">
-                                            <p:txEl>
-                                              <p:pRg st="1" end="1"/>
-                                            </p:txEl>
-                                          </p:spTgt>
-                                        </p:tgtEl>
-                                        <p:attrNameLst>
-                                          <p:attrName>style.visibility</p:attrName>
-                                        </p:attrNameLst>
-                                      </p:cBhvr>
-                                      <p:to>
-                                        <p:strVal val="visible"/>
-                                      </p:to>
-                                    </p:set>
-                                    <p:animEffect transition="in" filter="fade">
-                                      <p:cBhvr>
-                                        <p:cTn id="17" dur="500"/>
-                                        <p:tgtEl>
-                                          <p:spTgt spid="3">
-                                            <p:txEl>
-                                              <p:pRg st="1" end="1"/>
-                                            </p:txEl>
-                                          </p:spTgt>
-                                        </p:tgtEl>
-                                      </p:cBhvr>
-                                    </p:animEffect>
-                                    <p:anim calcmode="lin" valueType="num">
-                                      <p:cBhvr>
-                                        <p:cTn id="18" dur="500" fill="hold"/>
-                                        <p:tgtEl>
-                                          <p:spTgt spid="3">
-                                            <p:txEl>
-                                              <p:pRg st="1" end="1"/>
-                                            </p:txEl>
-                                          </p:spTgt>
-                                        </p:tgtEl>
-                                        <p:attrNameLst>
-                                          <p:attrName>ppt_x</p:attrName>
-                                        </p:attrNameLst>
-                                      </p:cBhvr>
-                                      <p:tavLst>
-                                        <p:tav tm="0">
-                                          <p:val>
-                                            <p:strVal val="#ppt_x"/>
-                                          </p:val>
-                                        </p:tav>
-                                        <p:tav tm="100000">
-                                          <p:val>
-                                            <p:strVal val="#ppt_x"/>
-                                          </p:val>
-                                        </p:tav>
-                                      </p:tavLst>
-                                    </p:anim>
-                                    <p:anim calcmode="lin" valueType="num">
-                                      <p:cBhvr>
-                                        <p:cTn id="19" dur="500" fill="hold"/>
-                                        <p:tgtEl>
-                                          <p:spTgt spid="3">
-                                            <p:txEl>
-                                              <p:pRg st="1" end="1"/>
-                                            </p:txEl>
-                                          </p:spTgt>
-                                        </p:tgtEl>
-                                        <p:attrNameLst>
-                                          <p:attrName>ppt_y</p:attrName>
-                                        </p:attrNameLst>
-                                      </p:cBhvr>
-                                      <p:tavLst>
-                                        <p:tav tm="0">
-                                          <p:val>
-                                            <p:strVal val="#ppt_y+.1"/>
-                                          </p:val>
-                                        </p:tav>
-                                        <p:tav tm="100000">
-                                          <p:val>
-                                            <p:strVal val="#ppt_y"/>
-                                          </p:val>
-                                        </p:tav>
-                                      </p:tavLst>
-                                    </p:anim>
-                                  </p:childTnLst>
-                                </p:cTn>
-                              </p:par>
-                            </p:childTnLst>
-                          </p:cTn>
-                        </p:par>
-                        <p:par>
-                          <p:cTn id="20" fill="hold">
-                            <p:stCondLst>
-                              <p:cond delay="1700"/>
-                            </p:stCondLst>
-                            <p:childTnLst>
-                              <p:par>
-                                <p:cTn id="21" presetID="42" presetClass="entr" presetSubtype="0" fill="hold" grpId="0" nodeType="afterEffect">
-                                  <p:stCondLst>
-                                    <p:cond delay="200"/>
-                                  </p:stCondLst>
-                                  <p:childTnLst>
-                                    <p:set>
-                                      <p:cBhvr>
-                                        <p:cTn id="22" dur="1" fill="hold">
-                                          <p:stCondLst>
-                                            <p:cond delay="0"/>
-                                          </p:stCondLst>
-                                        </p:cTn>
-                                        <p:tgtEl>
-                                          <p:spTgt spid="3">
-                                            <p:txEl>
-                                              <p:pRg st="2" end="2"/>
-                                            </p:txEl>
-                                          </p:spTgt>
-                                        </p:tgtEl>
-                                        <p:attrNameLst>
-                                          <p:attrName>style.visibility</p:attrName>
-                                        </p:attrNameLst>
-                                      </p:cBhvr>
-                                      <p:to>
-                                        <p:strVal val="visible"/>
-                                      </p:to>
-                                    </p:set>
-                                    <p:animEffect transition="in" filter="fade">
-                                      <p:cBhvr>
-                                        <p:cTn id="23" dur="500"/>
-                                        <p:tgtEl>
-                                          <p:spTgt spid="3">
-                                            <p:txEl>
-                                              <p:pRg st="2" end="2"/>
-                                            </p:txEl>
-                                          </p:spTgt>
-                                        </p:tgtEl>
-                                      </p:cBhvr>
-                                    </p:animEffect>
-                                    <p:anim calcmode="lin" valueType="num">
-                                      <p:cBhvr>
-                                        <p:cTn id="24" dur="500" fill="hold"/>
-                                        <p:tgtEl>
-                                          <p:spTgt spid="3">
-                                            <p:txEl>
-                                              <p:pRg st="2" end="2"/>
-                                            </p:txEl>
-                                          </p:spTgt>
-                                        </p:tgtEl>
-                                        <p:attrNameLst>
-                                          <p:attrName>ppt_x</p:attrName>
-                                        </p:attrNameLst>
-                                      </p:cBhvr>
-                                      <p:tavLst>
-                                        <p:tav tm="0">
-                                          <p:val>
-                                            <p:strVal val="#ppt_x"/>
-                                          </p:val>
-                                        </p:tav>
-                                        <p:tav tm="100000">
-                                          <p:val>
-                                            <p:strVal val="#ppt_x"/>
-                                          </p:val>
-                                        </p:tav>
-                                      </p:tavLst>
-                                    </p:anim>
-                                    <p:anim calcmode="lin" valueType="num">
-                                      <p:cBhvr>
-                                        <p:cTn id="25" dur="500" fill="hold"/>
-                                        <p:tgtEl>
-                                          <p:spTgt spid="3">
-                                            <p:txEl>
-                                              <p:pRg st="2" end="2"/>
-                                            </p:txEl>
-                                          </p:spTgt>
-                                        </p:tgtEl>
-                                        <p:attrNameLst>
-                                          <p:attrName>ppt_y</p:attrName>
-                                        </p:attrNameLst>
-                                      </p:cBhvr>
-                                      <p:tavLst>
-                                        <p:tav tm="0">
-                                          <p:val>
-                                            <p:strVal val="#ppt_y+.1"/>
-                                          </p:val>
-                                        </p:tav>
-                                        <p:tav tm="100000">
-                                          <p:val>
-                                            <p:strVal val="#ppt_y"/>
-                                          </p:val>
-                                        </p:tav>
-                                      </p:tavLst>
-                                    </p:anim>
-                                  </p:childTnLst>
-                                </p:cTn>
-                              </p:par>
-                            </p:childTnLst>
-                          </p:cTn>
-                        </p:par>
-                        <p:par>
-                          <p:cTn id="26" fill="hold">
-                            <p:stCondLst>
-                              <p:cond delay="2400"/>
-                            </p:stCondLst>
-                            <p:childTnLst>
-                              <p:par>
-                                <p:cTn id="27" presetID="42" presetClass="entr" presetSubtype="0" fill="hold" grpId="0" nodeType="afterEffect">
-                                  <p:stCondLst>
-                                    <p:cond delay="0"/>
-                                  </p:stCondLst>
-                                  <p:childTnLst>
-                                    <p:set>
-                                      <p:cBhvr>
-                                        <p:cTn id="28" dur="1" fill="hold">
-                                          <p:stCondLst>
-                                            <p:cond delay="0"/>
-                                          </p:stCondLst>
-                                        </p:cTn>
-                                        <p:tgtEl>
-                                          <p:spTgt spid="3">
-                                            <p:txEl>
-                                              <p:pRg st="3" end="3"/>
-                                            </p:txEl>
-                                          </p:spTgt>
-                                        </p:tgtEl>
-                                        <p:attrNameLst>
-                                          <p:attrName>style.visibility</p:attrName>
-                                        </p:attrNameLst>
-                                      </p:cBhvr>
-                                      <p:to>
-                                        <p:strVal val="visible"/>
-                                      </p:to>
-                                    </p:set>
-                                    <p:animEffect transition="in" filter="fade">
-                                      <p:cBhvr>
-                                        <p:cTn id="29" dur="500"/>
-                                        <p:tgtEl>
-                                          <p:spTgt spid="3">
-                                            <p:txEl>
-                                              <p:pRg st="3" end="3"/>
-                                            </p:txEl>
-                                          </p:spTgt>
-                                        </p:tgtEl>
-                                      </p:cBhvr>
-                                    </p:animEffect>
-                                    <p:anim calcmode="lin" valueType="num">
-                                      <p:cBhvr>
-                                        <p:cTn id="30" dur="500" fill="hold"/>
-                                        <p:tgtEl>
-                                          <p:spTgt spid="3">
-                                            <p:txEl>
-                                              <p:pRg st="3" end="3"/>
-                                            </p:txEl>
-                                          </p:spTgt>
-                                        </p:tgtEl>
-                                        <p:attrNameLst>
-                                          <p:attrName>ppt_x</p:attrName>
-                                        </p:attrNameLst>
-                                      </p:cBhvr>
-                                      <p:tavLst>
-                                        <p:tav tm="0">
-                                          <p:val>
-                                            <p:strVal val="#ppt_x"/>
-                                          </p:val>
-                                        </p:tav>
-                                        <p:tav tm="100000">
-                                          <p:val>
-                                            <p:strVal val="#ppt_x"/>
-                                          </p:val>
-                                        </p:tav>
-                                      </p:tavLst>
-                                    </p:anim>
-                                    <p:anim calcmode="lin" valueType="num">
-                                      <p:cBhvr>
-                                        <p:cTn id="31" dur="500" fill="hold"/>
-                                        <p:tgtEl>
-                                          <p:spTgt spid="3">
-                                            <p:txEl>
-                                              <p:pRg st="3" end="3"/>
-                                            </p:txEl>
-                                          </p:spTgt>
-                                        </p:tgtEl>
-                                        <p:attrNameLst>
-                                          <p:attrName>ppt_y</p:attrName>
-                                        </p:attrNameLst>
-                                      </p:cBhvr>
-                                      <p:tavLst>
-                                        <p:tav tm="0">
-                                          <p:val>
-                                            <p:strVal val="#ppt_y+.1"/>
-                                          </p:val>
-                                        </p:tav>
-                                        <p:tav tm="100000">
-                                          <p:val>
-                                            <p:strVal val="#ppt_y"/>
-                                          </p:val>
-                                        </p:tav>
-                                      </p:tavLst>
-                                    </p:anim>
-                                  </p:childTnLst>
-                                </p:cTn>
-                              </p:par>
-                            </p:childTnLst>
-                          </p:cTn>
-                        </p:par>
-                        <p:par>
-                          <p:cTn id="32" fill="hold">
-                            <p:stCondLst>
-                              <p:cond delay="2900"/>
-                            </p:stCondLst>
-                            <p:childTnLst>
-                              <p:par>
-                                <p:cTn id="33" presetID="42" presetClass="entr" presetSubtype="0" fill="hold" grpId="0" nodeType="afterEffect">
-                                  <p:stCondLst>
-                                    <p:cond delay="0"/>
-                                  </p:stCondLst>
-                                  <p:childTnLst>
-                                    <p:set>
-                                      <p:cBhvr>
-                                        <p:cTn id="34" dur="1" fill="hold">
-                                          <p:stCondLst>
-                                            <p:cond delay="0"/>
-                                          </p:stCondLst>
-                                        </p:cTn>
-                                        <p:tgtEl>
-                                          <p:spTgt spid="3">
-                                            <p:txEl>
-                                              <p:pRg st="4" end="4"/>
-                                            </p:txEl>
-                                          </p:spTgt>
-                                        </p:tgtEl>
-                                        <p:attrNameLst>
-                                          <p:attrName>style.visibility</p:attrName>
-                                        </p:attrNameLst>
-                                      </p:cBhvr>
-                                      <p:to>
-                                        <p:strVal val="visible"/>
-                                      </p:to>
-                                    </p:set>
-                                    <p:animEffect transition="in" filter="fade">
-                                      <p:cBhvr>
-                                        <p:cTn id="35" dur="500"/>
-                                        <p:tgtEl>
-                                          <p:spTgt spid="3">
-                                            <p:txEl>
-                                              <p:pRg st="4" end="4"/>
-                                            </p:txEl>
-                                          </p:spTgt>
-                                        </p:tgtEl>
-                                      </p:cBhvr>
-                                    </p:animEffect>
-                                    <p:anim calcmode="lin" valueType="num">
-                                      <p:cBhvr>
-                                        <p:cTn id="36" dur="500" fill="hold"/>
-                                        <p:tgtEl>
-                                          <p:spTgt spid="3">
-                                            <p:txEl>
-                                              <p:pRg st="4" end="4"/>
-                                            </p:txEl>
-                                          </p:spTgt>
-                                        </p:tgtEl>
-                                        <p:attrNameLst>
-                                          <p:attrName>ppt_x</p:attrName>
-                                        </p:attrNameLst>
-                                      </p:cBhvr>
-                                      <p:tavLst>
-                                        <p:tav tm="0">
-                                          <p:val>
-                                            <p:strVal val="#ppt_x"/>
-                                          </p:val>
-                                        </p:tav>
-                                        <p:tav tm="100000">
-                                          <p:val>
-                                            <p:strVal val="#ppt_x"/>
-                                          </p:val>
-                                        </p:tav>
-                                      </p:tavLst>
-                                    </p:anim>
-                                    <p:anim calcmode="lin" valueType="num">
-                                      <p:cBhvr>
-                                        <p:cTn id="37" dur="500" fill="hold"/>
-                                        <p:tgtEl>
-                                          <p:spTgt spid="3">
-                                            <p:txEl>
-                                              <p:pRg st="4" end="4"/>
-                                            </p:txEl>
-                                          </p:spTgt>
-                                        </p:tgtEl>
-                                        <p:attrNameLst>
-                                          <p:attrName>ppt_y</p:attrName>
-                                        </p:attrNameLst>
-                                      </p:cBhvr>
-                                      <p:tavLst>
-                                        <p:tav tm="0">
-                                          <p:val>
-                                            <p:strVal val="#ppt_y+.1"/>
-                                          </p:val>
-                                        </p:tav>
-                                        <p:tav tm="100000">
-                                          <p:val>
-                                            <p:strVal val="#ppt_y"/>
-                                          </p:val>
-                                        </p:tav>
-                                      </p:tavLst>
-                                    </p:anim>
-                                  </p:childTnLst>
-                                </p:cTn>
-                              </p:par>
-                            </p:childTnLst>
-                          </p:cTn>
-                        </p:par>
-                        <p:par>
-                          <p:cTn id="38" fill="hold">
-                            <p:stCondLst>
-                              <p:cond delay="3400"/>
-                            </p:stCondLst>
-                            <p:childTnLst>
-                              <p:par>
-                                <p:cTn id="39" presetID="42" presetClass="entr" presetSubtype="0" fill="hold" grpId="0" nodeType="afterEffect">
-                                  <p:stCondLst>
-                                    <p:cond delay="200"/>
-                                  </p:stCondLst>
-                                  <p:childTnLst>
-                                    <p:set>
-                                      <p:cBhvr>
-                                        <p:cTn id="40" dur="1" fill="hold">
-                                          <p:stCondLst>
-                                            <p:cond delay="0"/>
-                                          </p:stCondLst>
-                                        </p:cTn>
-                                        <p:tgtEl>
-                                          <p:spTgt spid="3">
-                                            <p:txEl>
-                                              <p:pRg st="5" end="5"/>
-                                            </p:txEl>
-                                          </p:spTgt>
-                                        </p:tgtEl>
-                                        <p:attrNameLst>
-                                          <p:attrName>style.visibility</p:attrName>
-                                        </p:attrNameLst>
-                                      </p:cBhvr>
-                                      <p:to>
-                                        <p:strVal val="visible"/>
-                                      </p:to>
-                                    </p:set>
-                                    <p:animEffect transition="in" filter="fade">
-                                      <p:cBhvr>
-                                        <p:cTn id="41" dur="500"/>
-                                        <p:tgtEl>
-                                          <p:spTgt spid="3">
-                                            <p:txEl>
-                                              <p:pRg st="5" end="5"/>
-                                            </p:txEl>
-                                          </p:spTgt>
-                                        </p:tgtEl>
-                                      </p:cBhvr>
-                                    </p:animEffect>
-                                    <p:anim calcmode="lin" valueType="num">
-                                      <p:cBhvr>
-                                        <p:cTn id="42" dur="500" fill="hold"/>
-                                        <p:tgtEl>
-                                          <p:spTgt spid="3">
-                                            <p:txEl>
-                                              <p:pRg st="5" end="5"/>
-                                            </p:txEl>
-                                          </p:spTgt>
-                                        </p:tgtEl>
-                                        <p:attrNameLst>
-                                          <p:attrName>ppt_x</p:attrName>
-                                        </p:attrNameLst>
-                                      </p:cBhvr>
-                                      <p:tavLst>
-                                        <p:tav tm="0">
-                                          <p:val>
-                                            <p:strVal val="#ppt_x"/>
-                                          </p:val>
-                                        </p:tav>
-                                        <p:tav tm="100000">
-                                          <p:val>
-                                            <p:strVal val="#ppt_x"/>
-                                          </p:val>
-                                        </p:tav>
-                                      </p:tavLst>
-                                    </p:anim>
-                                    <p:anim calcmode="lin" valueType="num">
-                                      <p:cBhvr>
-                                        <p:cTn id="43" dur="500" fill="hold"/>
-                                        <p:tgtEl>
-                                          <p:spTgt spid="3">
-                                            <p:txEl>
-                                              <p:pRg st="5" end="5"/>
-                                            </p:txEl>
-                                          </p:spTgt>
-                                        </p:tgtEl>
-                                        <p:attrNameLst>
-                                          <p:attrName>ppt_y</p:attrName>
-                                        </p:attrNameLst>
-                                      </p:cBhvr>
-                                      <p:tavLst>
-                                        <p:tav tm="0">
-                                          <p:val>
-                                            <p:strVal val="#ppt_y+.1"/>
-                                          </p:val>
-                                        </p:tav>
-                                        <p:tav tm="100000">
-                                          <p:val>
-                                            <p:strVal val="#ppt_y"/>
-                                          </p:val>
-                                        </p:tav>
-                                      </p:tavLst>
-                                    </p:anim>
-                                  </p:childTnLst>
-                                </p:cTn>
-                              </p:par>
-                            </p:childTnLst>
-                          </p:cTn>
-                        </p:par>
-                        <p:par>
-                          <p:cTn id="44" fill="hold">
-                            <p:stCondLst>
-                              <p:cond delay="4100"/>
-                            </p:stCondLst>
-                            <p:childTnLst>
-                              <p:par>
-                                <p:cTn id="45" presetID="42" presetClass="entr" presetSubtype="0" fill="hold" grpId="0" nodeType="afterEffect">
-                                  <p:stCondLst>
-                                    <p:cond delay="0"/>
-                                  </p:stCondLst>
-                                  <p:childTnLst>
-                                    <p:set>
-                                      <p:cBhvr>
-                                        <p:cTn id="46" dur="1" fill="hold">
-                                          <p:stCondLst>
-                                            <p:cond delay="0"/>
-                                          </p:stCondLst>
-                                        </p:cTn>
-                                        <p:tgtEl>
-                                          <p:spTgt spid="3">
-                                            <p:txEl>
-                                              <p:pRg st="6" end="6"/>
-                                            </p:txEl>
-                                          </p:spTgt>
-                                        </p:tgtEl>
-                                        <p:attrNameLst>
-                                          <p:attrName>style.visibility</p:attrName>
-                                        </p:attrNameLst>
-                                      </p:cBhvr>
-                                      <p:to>
-                                        <p:strVal val="visible"/>
-                                      </p:to>
-                                    </p:set>
-                                    <p:animEffect transition="in" filter="fade">
-                                      <p:cBhvr>
-                                        <p:cTn id="47" dur="500"/>
-                                        <p:tgtEl>
-                                          <p:spTgt spid="3">
-                                            <p:txEl>
-                                              <p:pRg st="6" end="6"/>
-                                            </p:txEl>
-                                          </p:spTgt>
-                                        </p:tgtEl>
-                                      </p:cBhvr>
-                                    </p:animEffect>
-                                    <p:anim calcmode="lin" valueType="num">
-                                      <p:cBhvr>
-                                        <p:cTn id="48" dur="500" fill="hold"/>
-                                        <p:tgtEl>
-                                          <p:spTgt spid="3">
-                                            <p:txEl>
-                                              <p:pRg st="6" end="6"/>
-                                            </p:txEl>
-                                          </p:spTgt>
-                                        </p:tgtEl>
-                                        <p:attrNameLst>
-                                          <p:attrName>ppt_x</p:attrName>
-                                        </p:attrNameLst>
-                                      </p:cBhvr>
-                                      <p:tavLst>
-                                        <p:tav tm="0">
-                                          <p:val>
-                                            <p:strVal val="#ppt_x"/>
-                                          </p:val>
-                                        </p:tav>
-                                        <p:tav tm="100000">
-                                          <p:val>
-                                            <p:strVal val="#ppt_x"/>
-                                          </p:val>
-                                        </p:tav>
-                                      </p:tavLst>
-                                    </p:anim>
-                                    <p:anim calcmode="lin" valueType="num">
-                                      <p:cBhvr>
-                                        <p:cTn id="49" dur="500" fill="hold"/>
-                                        <p:tgtEl>
-                                          <p:spTgt spid="3">
-                                            <p:txEl>
-                                              <p:pRg st="6" end="6"/>
-                                            </p:txEl>
-                                          </p:spTgt>
-                                        </p:tgtEl>
-                                        <p:attrNameLst>
-                                          <p:attrName>ppt_y</p:attrName>
-                                        </p:attrNameLst>
-                                      </p:cBhvr>
-                                      <p:tavLst>
-                                        <p:tav tm="0">
-                                          <p:val>
-                                            <p:strVal val="#ppt_y+.1"/>
-                                          </p:val>
-                                        </p:tav>
-                                        <p:tav tm="100000">
-                                          <p:val>
-                                            <p:strVal val="#ppt_y"/>
-                                          </p:val>
-                                        </p:tav>
-                                      </p:tavLst>
-                                    </p:anim>
-                                  </p:childTnLst>
-                                </p:cTn>
-                              </p:par>
-                            </p:childTnLst>
-                          </p:cTn>
-                        </p:par>
-                      </p:childTnLst>
-                    </p:cTn>
-                  </p:par>
-                </p:childTnLst>
-              </p:cTn>
-              <p:prevCondLst>
-                <p:cond evt="onPrev" delay="0">
-                  <p:tgtEl>
-                    <p:sldTgt/>
-                  </p:tgtEl>
-                </p:cond>
-              </p:prevCondLst>
-              <p:nextCondLst>
-                <p:cond evt="onNext" delay="0">
-                  <p:tgtEl>
-                    <p:sldTgt/>
-                  </p:tgtEl>
-                </p:cond>
-              </p:nextCondLst>
-            </p:seq>
-          </p:childTnLst>
-        </p:cTn>
-      </p:par>
-    </p:tnLst>
-    <p:bldLst>
-      <p:bldP spid="2" grpId="0"/>
-      <p:bldP spid="3" grpId="0" uiExpand="1" build="p"/>
-    </p:bldLst>
-  </p:timing>
-</p:sld>
-</file>
-
-<file path=ppt/slides/slide5.xml><?xml version="1.0" encoding="utf-8"?>
+<file path=ppt/slides/slide6.xml><?xml version="1.0" encoding="utf-8"?>
 <p:sld xmlns:a="http://schemas.openxmlformats.org/drawingml/2006/main" xmlns:r="http://schemas.openxmlformats.org/officeDocument/2006/relationships" xmlns:p="http://schemas.openxmlformats.org/presentationml/2006/main">
   <p:cSld>
     <p:spTree>
@@ -10168,7 +10360,7 @@
 </p:sld>
 </file>
 
-<file path=ppt/slides/slide6.xml><?xml version="1.0" encoding="utf-8"?>
+<file path=ppt/slides/slide7.xml><?xml version="1.0" encoding="utf-8"?>
 <p:sld xmlns:a="http://schemas.openxmlformats.org/drawingml/2006/main" xmlns:r="http://schemas.openxmlformats.org/officeDocument/2006/relationships" xmlns:p="http://schemas.openxmlformats.org/presentationml/2006/main">
   <p:cSld>
     <p:spTree>
@@ -11074,7 +11266,7 @@
 </p:sld>
 </file>
 
-<file path=ppt/slides/slide7.xml><?xml version="1.0" encoding="utf-8"?>
+<file path=ppt/slides/slide8.xml><?xml version="1.0" encoding="utf-8"?>
 <p:sld xmlns:a="http://schemas.openxmlformats.org/drawingml/2006/main" xmlns:r="http://schemas.openxmlformats.org/officeDocument/2006/relationships" xmlns:p="http://schemas.openxmlformats.org/presentationml/2006/main">
   <p:cSld>
     <p:spTree>
@@ -12069,7 +12261,7 @@
 </p:sld>
 </file>
 
-<file path=ppt/slides/slide8.xml><?xml version="1.0" encoding="utf-8"?>
+<file path=ppt/slides/slide9.xml><?xml version="1.0" encoding="utf-8"?>
 <p:sld xmlns:a="http://schemas.openxmlformats.org/drawingml/2006/main" xmlns:r="http://schemas.openxmlformats.org/officeDocument/2006/relationships" xmlns:p="http://schemas.openxmlformats.org/presentationml/2006/main">
   <p:cSld>
     <p:spTree>
@@ -12318,198 +12510,6 @@
     </p:tnLst>
     <p:bldLst>
       <p:bldP spid="7" grpId="0" animBg="1"/>
-    </p:bldLst>
-  </p:timing>
-</p:sld>
-</file>
-
-<file path=ppt/slides/slide9.xml><?xml version="1.0" encoding="utf-8"?>
-<p:sld xmlns:a="http://schemas.openxmlformats.org/drawingml/2006/main" xmlns:r="http://schemas.openxmlformats.org/officeDocument/2006/relationships" xmlns:p="http://schemas.openxmlformats.org/presentationml/2006/main">
-  <p:cSld>
-    <p:spTree>
-      <p:nvGrpSpPr>
-        <p:cNvPr id="1" name=""/>
-        <p:cNvGrpSpPr/>
-        <p:nvPr/>
-      </p:nvGrpSpPr>
-      <p:grpSpPr>
-        <a:xfrm>
-          <a:off x="0" y="0"/>
-          <a:ext cx="0" cy="0"/>
-          <a:chOff x="0" y="0"/>
-          <a:chExt cx="0" cy="0"/>
-        </a:xfrm>
-      </p:grpSpPr>
-      <p:sp>
-        <p:nvSpPr>
-          <p:cNvPr id="2" name="Cím 1">
-            <a:extLst>
-              <a:ext uri="{FF2B5EF4-FFF2-40B4-BE49-F238E27FC236}">
-                <a16:creationId xmlns:a16="http://schemas.microsoft.com/office/drawing/2014/main" id="{D8736DA6-9D79-4DB7-90AD-09E3F55948CD}"/>
-              </a:ext>
-            </a:extLst>
-          </p:cNvPr>
-          <p:cNvSpPr>
-            <a:spLocks noGrp="1"/>
-          </p:cNvSpPr>
-          <p:nvPr>
-            <p:ph type="title"/>
-          </p:nvPr>
-        </p:nvSpPr>
-        <p:spPr>
-          <a:xfrm>
-            <a:off x="1371600" y="685800"/>
-            <a:ext cx="9601200" cy="861646"/>
-          </a:xfrm>
-        </p:spPr>
-        <p:txBody>
-          <a:bodyPr/>
-          <a:lstStyle/>
-          <a:p>
-            <a:r>
-              <a:rPr lang="hu-HU" dirty="0">
-                <a:solidFill>
-                  <a:schemeClr val="tx1"/>
-                </a:solidFill>
-                <a:latin typeface="Times New Roman" panose="02020603050405020304" pitchFamily="18" charset="0"/>
-                <a:cs typeface="Times New Roman" panose="02020603050405020304" pitchFamily="18" charset="0"/>
-              </a:rPr>
-              <a:t>Reszponzívitás</a:t>
-            </a:r>
-          </a:p>
-        </p:txBody>
-      </p:sp>
-      <p:sp>
-        <p:nvSpPr>
-          <p:cNvPr id="3" name="Tartalom helye 2">
-            <a:extLst>
-              <a:ext uri="{FF2B5EF4-FFF2-40B4-BE49-F238E27FC236}">
-                <a16:creationId xmlns:a16="http://schemas.microsoft.com/office/drawing/2014/main" id="{80692D13-F04E-4F4F-A667-DFE0B3C725A5}"/>
-              </a:ext>
-            </a:extLst>
-          </p:cNvPr>
-          <p:cNvSpPr>
-            <a:spLocks noGrp="1"/>
-          </p:cNvSpPr>
-          <p:nvPr>
-            <p:ph idx="1"/>
-          </p:nvPr>
-        </p:nvSpPr>
-        <p:spPr/>
-        <p:txBody>
-          <a:bodyPr/>
-          <a:lstStyle/>
-          <a:p>
-            <a:endParaRPr lang="hu-HU" dirty="0">
-              <a:solidFill>
-                <a:schemeClr val="tx1"/>
-              </a:solidFill>
-              <a:latin typeface="Times New Roman" panose="02020603050405020304" pitchFamily="18" charset="0"/>
-              <a:cs typeface="Times New Roman" panose="02020603050405020304" pitchFamily="18" charset="0"/>
-            </a:endParaRPr>
-          </a:p>
-        </p:txBody>
-      </p:sp>
-    </p:spTree>
-    <p:extLst>
-      <p:ext uri="{BB962C8B-B14F-4D97-AF65-F5344CB8AC3E}">
-        <p14:creationId xmlns:p14="http://schemas.microsoft.com/office/powerpoint/2010/main" val="1279272772"/>
-      </p:ext>
-    </p:extLst>
-  </p:cSld>
-  <p:clrMapOvr>
-    <a:masterClrMapping/>
-  </p:clrMapOvr>
-  <p:transition spd="slow">
-    <p:push dir="u"/>
-  </p:transition>
-  <p:timing>
-    <p:tnLst>
-      <p:par>
-        <p:cTn id="1" dur="indefinite" restart="never" nodeType="tmRoot">
-          <p:childTnLst>
-            <p:seq concurrent="1" nextAc="seek">
-              <p:cTn id="2" dur="indefinite" nodeType="mainSeq">
-                <p:childTnLst>
-                  <p:par>
-                    <p:cTn id="3" fill="hold">
-                      <p:stCondLst>
-                        <p:cond delay="indefinite"/>
-                        <p:cond evt="onBegin" delay="0">
-                          <p:tn val="2"/>
-                        </p:cond>
-                      </p:stCondLst>
-                      <p:childTnLst>
-                        <p:par>
-                          <p:cTn id="4" fill="hold">
-                            <p:stCondLst>
-                              <p:cond delay="0"/>
-                            </p:stCondLst>
-                            <p:childTnLst>
-                              <p:par>
-                                <p:cTn id="5" presetID="10" presetClass="entr" presetSubtype="0" fill="hold" grpId="0" nodeType="afterEffect">
-                                  <p:stCondLst>
-                                    <p:cond delay="0"/>
-                                  </p:stCondLst>
-                                  <p:childTnLst>
-                                    <p:set>
-                                      <p:cBhvr>
-                                        <p:cTn id="6" dur="1" fill="hold">
-                                          <p:stCondLst>
-                                            <p:cond delay="0"/>
-                                          </p:stCondLst>
-                                        </p:cTn>
-                                        <p:tgtEl>
-                                          <p:spTgt spid="2"/>
-                                        </p:tgtEl>
-                                        <p:attrNameLst>
-                                          <p:attrName>style.visibility</p:attrName>
-                                        </p:attrNameLst>
-                                      </p:cBhvr>
-                                      <p:to>
-                                        <p:strVal val="visible"/>
-                                      </p:to>
-                                    </p:set>
-                                    <p:animEffect transition="in" filter="fade">
-                                      <p:cBhvr>
-                                        <p:cTn id="7" dur="500"/>
-                                        <p:tgtEl>
-                                          <p:spTgt spid="2"/>
-                                        </p:tgtEl>
-                                      </p:cBhvr>
-                                    </p:animEffect>
-                                  </p:childTnLst>
-                                </p:cTn>
-                              </p:par>
-                            </p:childTnLst>
-                          </p:cTn>
-                        </p:par>
-                      </p:childTnLst>
-                    </p:cTn>
-                  </p:par>
-                </p:childTnLst>
-              </p:cTn>
-              <p:prevCondLst>
-                <p:cond evt="onPrev" delay="0">
-                  <p:tgtEl>
-                    <p:sldTgt/>
-                  </p:tgtEl>
-                </p:cond>
-              </p:prevCondLst>
-              <p:nextCondLst>
-                <p:cond evt="onNext" delay="0">
-                  <p:tgtEl>
-                    <p:sldTgt/>
-                  </p:tgtEl>
-                </p:cond>
-              </p:nextCondLst>
-            </p:seq>
-          </p:childTnLst>
-        </p:cTn>
-      </p:par>
-    </p:tnLst>
-    <p:bldLst>
-      <p:bldP spid="2" grpId="0"/>
     </p:bldLst>
   </p:timing>
 </p:sld>

--- a/Fájlok/Bemutató.pptx
+++ b/Fájlok/Bemutató.pptx
@@ -13,11 +13,11 @@
     <p:sldId id="261" r:id="rId7"/>
     <p:sldId id="260" r:id="rId8"/>
     <p:sldId id="264" r:id="rId9"/>
-    <p:sldId id="268" r:id="rId10"/>
-    <p:sldId id="265" r:id="rId11"/>
-    <p:sldId id="259" r:id="rId12"/>
-    <p:sldId id="266" r:id="rId13"/>
-    <p:sldId id="267" r:id="rId14"/>
+    <p:sldId id="265" r:id="rId10"/>
+    <p:sldId id="259" r:id="rId11"/>
+    <p:sldId id="266" r:id="rId12"/>
+    <p:sldId id="267" r:id="rId13"/>
+    <p:sldId id="268" r:id="rId14"/>
     <p:sldId id="269" r:id="rId15"/>
   </p:sldIdLst>
   <p:sldSz cx="12192000" cy="6858000"/>
@@ -294,7 +294,7 @@
           <a:p>
             <a:fld id="{BD2B674F-1946-412B-A744-B9E1115EC83C}" type="datetimeFigureOut">
               <a:rPr lang="en-GB" smtClean="0"/>
-              <a:t>06/03/2026</a:t>
+              <a:t>20/03/2026</a:t>
             </a:fld>
             <a:endParaRPr lang="en-GB"/>
           </a:p>
@@ -624,7 +624,7 @@
           <a:p>
             <a:fld id="{BD2B674F-1946-412B-A744-B9E1115EC83C}" type="datetimeFigureOut">
               <a:rPr lang="en-GB" smtClean="0"/>
-              <a:t>06/03/2026</a:t>
+              <a:t>20/03/2026</a:t>
             </a:fld>
             <a:endParaRPr lang="en-GB"/>
           </a:p>
@@ -804,7 +804,7 @@
           <a:p>
             <a:fld id="{BD2B674F-1946-412B-A744-B9E1115EC83C}" type="datetimeFigureOut">
               <a:rPr lang="en-GB" smtClean="0"/>
-              <a:t>06/03/2026</a:t>
+              <a:t>20/03/2026</a:t>
             </a:fld>
             <a:endParaRPr lang="en-GB"/>
           </a:p>
@@ -974,7 +974,7 @@
           <a:p>
             <a:fld id="{BD2B674F-1946-412B-A744-B9E1115EC83C}" type="datetimeFigureOut">
               <a:rPr lang="en-GB" smtClean="0"/>
-              <a:t>06/03/2026</a:t>
+              <a:t>20/03/2026</a:t>
             </a:fld>
             <a:endParaRPr lang="en-GB"/>
           </a:p>
@@ -1251,7 +1251,7 @@
           <a:p>
             <a:fld id="{BD2B674F-1946-412B-A744-B9E1115EC83C}" type="datetimeFigureOut">
               <a:rPr lang="en-GB" smtClean="0"/>
-              <a:t>06/03/2026</a:t>
+              <a:t>20/03/2026</a:t>
             </a:fld>
             <a:endParaRPr lang="en-GB"/>
           </a:p>
@@ -1645,7 +1645,7 @@
           <a:p>
             <a:fld id="{BD2B674F-1946-412B-A744-B9E1115EC83C}" type="datetimeFigureOut">
               <a:rPr lang="en-GB" smtClean="0"/>
-              <a:t>06/03/2026</a:t>
+              <a:t>20/03/2026</a:t>
             </a:fld>
             <a:endParaRPr lang="en-GB"/>
           </a:p>
@@ -2122,7 +2122,7 @@
           <a:p>
             <a:fld id="{BD2B674F-1946-412B-A744-B9E1115EC83C}" type="datetimeFigureOut">
               <a:rPr lang="en-GB" smtClean="0"/>
-              <a:t>06/03/2026</a:t>
+              <a:t>20/03/2026</a:t>
             </a:fld>
             <a:endParaRPr lang="en-GB"/>
           </a:p>
@@ -2240,7 +2240,7 @@
           <a:p>
             <a:fld id="{BD2B674F-1946-412B-A744-B9E1115EC83C}" type="datetimeFigureOut">
               <a:rPr lang="en-GB" smtClean="0"/>
-              <a:t>06/03/2026</a:t>
+              <a:t>20/03/2026</a:t>
             </a:fld>
             <a:endParaRPr lang="en-GB"/>
           </a:p>
@@ -2335,7 +2335,7 @@
           <a:p>
             <a:fld id="{BD2B674F-1946-412B-A744-B9E1115EC83C}" type="datetimeFigureOut">
               <a:rPr lang="en-GB" smtClean="0"/>
-              <a:t>06/03/2026</a:t>
+              <a:t>20/03/2026</a:t>
             </a:fld>
             <a:endParaRPr lang="en-GB"/>
           </a:p>
@@ -2681,7 +2681,7 @@
           <a:p>
             <a:fld id="{BD2B674F-1946-412B-A744-B9E1115EC83C}" type="datetimeFigureOut">
               <a:rPr lang="en-GB" smtClean="0"/>
-              <a:t>06/03/2026</a:t>
+              <a:t>20/03/2026</a:t>
             </a:fld>
             <a:endParaRPr lang="en-GB"/>
           </a:p>
@@ -3069,7 +3069,7 @@
           <a:p>
             <a:fld id="{BD2B674F-1946-412B-A744-B9E1115EC83C}" type="datetimeFigureOut">
               <a:rPr lang="en-GB" smtClean="0"/>
-              <a:t>06/03/2026</a:t>
+              <a:t>20/03/2026</a:t>
             </a:fld>
             <a:endParaRPr lang="en-GB"/>
           </a:p>
@@ -3347,7 +3347,7 @@
           <a:p>
             <a:fld id="{BD2B674F-1946-412B-A744-B9E1115EC83C}" type="datetimeFigureOut">
               <a:rPr lang="en-GB" smtClean="0"/>
-              <a:t>06/03/2026</a:t>
+              <a:t>20/03/2026</a:t>
             </a:fld>
             <a:endParaRPr lang="en-GB"/>
           </a:p>
@@ -4092,198 +4092,6 @@
         <p:spPr>
           <a:xfrm>
             <a:off x="1371600" y="685800"/>
-            <a:ext cx="9601200" cy="861646"/>
-          </a:xfrm>
-        </p:spPr>
-        <p:txBody>
-          <a:bodyPr/>
-          <a:lstStyle/>
-          <a:p>
-            <a:r>
-              <a:rPr lang="hu-HU" dirty="0">
-                <a:solidFill>
-                  <a:schemeClr val="tx1"/>
-                </a:solidFill>
-                <a:latin typeface="Times New Roman" panose="02020603050405020304" pitchFamily="18" charset="0"/>
-                <a:cs typeface="Times New Roman" panose="02020603050405020304" pitchFamily="18" charset="0"/>
-              </a:rPr>
-              <a:t>Reszponzívitás</a:t>
-            </a:r>
-          </a:p>
-        </p:txBody>
-      </p:sp>
-      <p:sp>
-        <p:nvSpPr>
-          <p:cNvPr id="3" name="Tartalom helye 2">
-            <a:extLst>
-              <a:ext uri="{FF2B5EF4-FFF2-40B4-BE49-F238E27FC236}">
-                <a16:creationId xmlns:a16="http://schemas.microsoft.com/office/drawing/2014/main" id="{80692D13-F04E-4F4F-A667-DFE0B3C725A5}"/>
-              </a:ext>
-            </a:extLst>
-          </p:cNvPr>
-          <p:cNvSpPr>
-            <a:spLocks noGrp="1"/>
-          </p:cNvSpPr>
-          <p:nvPr>
-            <p:ph idx="1"/>
-          </p:nvPr>
-        </p:nvSpPr>
-        <p:spPr/>
-        <p:txBody>
-          <a:bodyPr/>
-          <a:lstStyle/>
-          <a:p>
-            <a:endParaRPr lang="hu-HU" dirty="0">
-              <a:solidFill>
-                <a:schemeClr val="tx1"/>
-              </a:solidFill>
-              <a:latin typeface="Times New Roman" panose="02020603050405020304" pitchFamily="18" charset="0"/>
-              <a:cs typeface="Times New Roman" panose="02020603050405020304" pitchFamily="18" charset="0"/>
-            </a:endParaRPr>
-          </a:p>
-        </p:txBody>
-      </p:sp>
-    </p:spTree>
-    <p:extLst>
-      <p:ext uri="{BB962C8B-B14F-4D97-AF65-F5344CB8AC3E}">
-        <p14:creationId xmlns:p14="http://schemas.microsoft.com/office/powerpoint/2010/main" val="1279272772"/>
-      </p:ext>
-    </p:extLst>
-  </p:cSld>
-  <p:clrMapOvr>
-    <a:masterClrMapping/>
-  </p:clrMapOvr>
-  <p:transition spd="slow">
-    <p:push dir="u"/>
-  </p:transition>
-  <p:timing>
-    <p:tnLst>
-      <p:par>
-        <p:cTn id="1" dur="indefinite" restart="never" nodeType="tmRoot">
-          <p:childTnLst>
-            <p:seq concurrent="1" nextAc="seek">
-              <p:cTn id="2" dur="indefinite" nodeType="mainSeq">
-                <p:childTnLst>
-                  <p:par>
-                    <p:cTn id="3" fill="hold">
-                      <p:stCondLst>
-                        <p:cond delay="indefinite"/>
-                        <p:cond evt="onBegin" delay="0">
-                          <p:tn val="2"/>
-                        </p:cond>
-                      </p:stCondLst>
-                      <p:childTnLst>
-                        <p:par>
-                          <p:cTn id="4" fill="hold">
-                            <p:stCondLst>
-                              <p:cond delay="0"/>
-                            </p:stCondLst>
-                            <p:childTnLst>
-                              <p:par>
-                                <p:cTn id="5" presetID="10" presetClass="entr" presetSubtype="0" fill="hold" grpId="0" nodeType="afterEffect">
-                                  <p:stCondLst>
-                                    <p:cond delay="0"/>
-                                  </p:stCondLst>
-                                  <p:childTnLst>
-                                    <p:set>
-                                      <p:cBhvr>
-                                        <p:cTn id="6" dur="1" fill="hold">
-                                          <p:stCondLst>
-                                            <p:cond delay="0"/>
-                                          </p:stCondLst>
-                                        </p:cTn>
-                                        <p:tgtEl>
-                                          <p:spTgt spid="2"/>
-                                        </p:tgtEl>
-                                        <p:attrNameLst>
-                                          <p:attrName>style.visibility</p:attrName>
-                                        </p:attrNameLst>
-                                      </p:cBhvr>
-                                      <p:to>
-                                        <p:strVal val="visible"/>
-                                      </p:to>
-                                    </p:set>
-                                    <p:animEffect transition="in" filter="fade">
-                                      <p:cBhvr>
-                                        <p:cTn id="7" dur="500"/>
-                                        <p:tgtEl>
-                                          <p:spTgt spid="2"/>
-                                        </p:tgtEl>
-                                      </p:cBhvr>
-                                    </p:animEffect>
-                                  </p:childTnLst>
-                                </p:cTn>
-                              </p:par>
-                            </p:childTnLst>
-                          </p:cTn>
-                        </p:par>
-                      </p:childTnLst>
-                    </p:cTn>
-                  </p:par>
-                </p:childTnLst>
-              </p:cTn>
-              <p:prevCondLst>
-                <p:cond evt="onPrev" delay="0">
-                  <p:tgtEl>
-                    <p:sldTgt/>
-                  </p:tgtEl>
-                </p:cond>
-              </p:prevCondLst>
-              <p:nextCondLst>
-                <p:cond evt="onNext" delay="0">
-                  <p:tgtEl>
-                    <p:sldTgt/>
-                  </p:tgtEl>
-                </p:cond>
-              </p:nextCondLst>
-            </p:seq>
-          </p:childTnLst>
-        </p:cTn>
-      </p:par>
-    </p:tnLst>
-    <p:bldLst>
-      <p:bldP spid="2" grpId="0"/>
-    </p:bldLst>
-  </p:timing>
-</p:sld>
-</file>
-
-<file path=ppt/slides/slide11.xml><?xml version="1.0" encoding="utf-8"?>
-<p:sld xmlns:a="http://schemas.openxmlformats.org/drawingml/2006/main" xmlns:r="http://schemas.openxmlformats.org/officeDocument/2006/relationships" xmlns:p="http://schemas.openxmlformats.org/presentationml/2006/main">
-  <p:cSld>
-    <p:spTree>
-      <p:nvGrpSpPr>
-        <p:cNvPr id="1" name=""/>
-        <p:cNvGrpSpPr/>
-        <p:nvPr/>
-      </p:nvGrpSpPr>
-      <p:grpSpPr>
-        <a:xfrm>
-          <a:off x="0" y="0"/>
-          <a:ext cx="0" cy="0"/>
-          <a:chOff x="0" y="0"/>
-          <a:chExt cx="0" cy="0"/>
-        </a:xfrm>
-      </p:grpSpPr>
-      <p:sp>
-        <p:nvSpPr>
-          <p:cNvPr id="2" name="Cím 1">
-            <a:extLst>
-              <a:ext uri="{FF2B5EF4-FFF2-40B4-BE49-F238E27FC236}">
-                <a16:creationId xmlns:a16="http://schemas.microsoft.com/office/drawing/2014/main" id="{D8736DA6-9D79-4DB7-90AD-09E3F55948CD}"/>
-              </a:ext>
-            </a:extLst>
-          </p:cNvPr>
-          <p:cNvSpPr>
-            <a:spLocks noGrp="1"/>
-          </p:cNvSpPr>
-          <p:nvPr>
-            <p:ph type="title"/>
-          </p:nvPr>
-        </p:nvSpPr>
-        <p:spPr>
-          <a:xfrm>
-            <a:off x="1371600" y="685800"/>
             <a:ext cx="9601200" cy="829733"/>
           </a:xfrm>
         </p:spPr>
@@ -5168,7 +4976,7 @@
 </p:sld>
 </file>
 
-<file path=ppt/slides/slide12.xml><?xml version="1.0" encoding="utf-8"?>
+<file path=ppt/slides/slide11.xml><?xml version="1.0" encoding="utf-8"?>
 <p:sld xmlns:a="http://schemas.openxmlformats.org/drawingml/2006/main" xmlns:r="http://schemas.openxmlformats.org/officeDocument/2006/relationships" xmlns:p="http://schemas.openxmlformats.org/presentationml/2006/main">
   <p:cSld>
     <p:spTree>
@@ -5219,7 +5027,7 @@
                 <a:latin typeface="Times New Roman" panose="02020603050405020304" pitchFamily="18" charset="0"/>
                 <a:cs typeface="Times New Roman" panose="02020603050405020304" pitchFamily="18" charset="0"/>
               </a:rPr>
-              <a:t>Bővítési lehetőségek</a:t>
+              <a:t>Fejlesztési lehetőségek</a:t>
             </a:r>
           </a:p>
         </p:txBody>
@@ -5259,6 +5067,66 @@
                 <a:cs typeface="Times New Roman" panose="02020603050405020304" pitchFamily="18" charset="0"/>
               </a:rPr>
               <a:t>Szállító cégekkel való kapcsolat</a:t>
+            </a:r>
+          </a:p>
+          <a:p>
+            <a:r>
+              <a:rPr lang="hu-HU" dirty="0">
+                <a:solidFill>
+                  <a:schemeClr val="tx1"/>
+                </a:solidFill>
+                <a:latin typeface="Times New Roman" panose="02020603050405020304" pitchFamily="18" charset="0"/>
+                <a:cs typeface="Times New Roman" panose="02020603050405020304" pitchFamily="18" charset="0"/>
+              </a:rPr>
+              <a:t>Fizetési cégekkel való kapcsolat (online fizetés)</a:t>
+            </a:r>
+          </a:p>
+          <a:p>
+            <a:r>
+              <a:rPr lang="hu-HU" dirty="0">
+                <a:solidFill>
+                  <a:schemeClr val="tx1"/>
+                </a:solidFill>
+                <a:latin typeface="Times New Roman" panose="02020603050405020304" pitchFamily="18" charset="0"/>
+                <a:cs typeface="Times New Roman" panose="02020603050405020304" pitchFamily="18" charset="0"/>
+              </a:rPr>
+              <a:t>Mobil alkalmazás</a:t>
+            </a:r>
+          </a:p>
+          <a:p>
+            <a:r>
+              <a:rPr lang="hu-HU" dirty="0">
+                <a:solidFill>
+                  <a:schemeClr val="tx1"/>
+                </a:solidFill>
+                <a:latin typeface="Times New Roman" panose="02020603050405020304" pitchFamily="18" charset="0"/>
+                <a:cs typeface="Times New Roman" panose="02020603050405020304" pitchFamily="18" charset="0"/>
+              </a:rPr>
+              <a:t>Moderátorok</a:t>
+            </a:r>
+          </a:p>
+          <a:p>
+            <a:r>
+              <a:rPr lang="hu-HU" dirty="0">
+                <a:solidFill>
+                  <a:schemeClr val="tx1"/>
+                </a:solidFill>
+                <a:latin typeface="Times New Roman" panose="02020603050405020304" pitchFamily="18" charset="0"/>
+                <a:cs typeface="Times New Roman" panose="02020603050405020304" pitchFamily="18" charset="0"/>
+              </a:rPr>
+              <a:t>Felhasználók közötti üzenetváltás</a:t>
+            </a:r>
+          </a:p>
+          <a:p>
+            <a:r>
+              <a:rPr lang="hu-HU" dirty="0">
+                <a:solidFill>
+                  <a:schemeClr val="tx1"/>
+                </a:solidFill>
+                <a:latin typeface="Times New Roman" panose="02020603050405020304" pitchFamily="18" charset="0"/>
+                <a:cs typeface="Times New Roman" panose="02020603050405020304" pitchFamily="18" charset="0"/>
+              </a:rPr>
+              <a:t>Ruhadarabok kötés és horgolási mintatervezése</a:t>
             </a:r>
           </a:p>
           <a:p>
@@ -5455,6 +5323,581 @@
                       </p:childTnLst>
                     </p:cTn>
                   </p:par>
+                  <p:par>
+                    <p:cTn id="14" fill="hold">
+                      <p:stCondLst>
+                        <p:cond delay="indefinite"/>
+                      </p:stCondLst>
+                      <p:childTnLst>
+                        <p:par>
+                          <p:cTn id="15" fill="hold">
+                            <p:stCondLst>
+                              <p:cond delay="0"/>
+                            </p:stCondLst>
+                            <p:childTnLst>
+                              <p:par>
+                                <p:cTn id="16" presetID="42" presetClass="entr" presetSubtype="0" fill="hold" grpId="0" nodeType="clickEffect">
+                                  <p:stCondLst>
+                                    <p:cond delay="200"/>
+                                  </p:stCondLst>
+                                  <p:childTnLst>
+                                    <p:set>
+                                      <p:cBhvr>
+                                        <p:cTn id="17" dur="1" fill="hold">
+                                          <p:stCondLst>
+                                            <p:cond delay="0"/>
+                                          </p:stCondLst>
+                                        </p:cTn>
+                                        <p:tgtEl>
+                                          <p:spTgt spid="3">
+                                            <p:txEl>
+                                              <p:pRg st="1" end="1"/>
+                                            </p:txEl>
+                                          </p:spTgt>
+                                        </p:tgtEl>
+                                        <p:attrNameLst>
+                                          <p:attrName>style.visibility</p:attrName>
+                                        </p:attrNameLst>
+                                      </p:cBhvr>
+                                      <p:to>
+                                        <p:strVal val="visible"/>
+                                      </p:to>
+                                    </p:set>
+                                    <p:animEffect transition="in" filter="fade">
+                                      <p:cBhvr>
+                                        <p:cTn id="18" dur="500"/>
+                                        <p:tgtEl>
+                                          <p:spTgt spid="3">
+                                            <p:txEl>
+                                              <p:pRg st="1" end="1"/>
+                                            </p:txEl>
+                                          </p:spTgt>
+                                        </p:tgtEl>
+                                      </p:cBhvr>
+                                    </p:animEffect>
+                                    <p:anim calcmode="lin" valueType="num">
+                                      <p:cBhvr>
+                                        <p:cTn id="19" dur="500" fill="hold"/>
+                                        <p:tgtEl>
+                                          <p:spTgt spid="3">
+                                            <p:txEl>
+                                              <p:pRg st="1" end="1"/>
+                                            </p:txEl>
+                                          </p:spTgt>
+                                        </p:tgtEl>
+                                        <p:attrNameLst>
+                                          <p:attrName>ppt_x</p:attrName>
+                                        </p:attrNameLst>
+                                      </p:cBhvr>
+                                      <p:tavLst>
+                                        <p:tav tm="0">
+                                          <p:val>
+                                            <p:strVal val="#ppt_x"/>
+                                          </p:val>
+                                        </p:tav>
+                                        <p:tav tm="100000">
+                                          <p:val>
+                                            <p:strVal val="#ppt_x"/>
+                                          </p:val>
+                                        </p:tav>
+                                      </p:tavLst>
+                                    </p:anim>
+                                    <p:anim calcmode="lin" valueType="num">
+                                      <p:cBhvr>
+                                        <p:cTn id="20" dur="500" fill="hold"/>
+                                        <p:tgtEl>
+                                          <p:spTgt spid="3">
+                                            <p:txEl>
+                                              <p:pRg st="1" end="1"/>
+                                            </p:txEl>
+                                          </p:spTgt>
+                                        </p:tgtEl>
+                                        <p:attrNameLst>
+                                          <p:attrName>ppt_y</p:attrName>
+                                        </p:attrNameLst>
+                                      </p:cBhvr>
+                                      <p:tavLst>
+                                        <p:tav tm="0">
+                                          <p:val>
+                                            <p:strVal val="#ppt_y+.1"/>
+                                          </p:val>
+                                        </p:tav>
+                                        <p:tav tm="100000">
+                                          <p:val>
+                                            <p:strVal val="#ppt_y"/>
+                                          </p:val>
+                                        </p:tav>
+                                      </p:tavLst>
+                                    </p:anim>
+                                  </p:childTnLst>
+                                </p:cTn>
+                              </p:par>
+                            </p:childTnLst>
+                          </p:cTn>
+                        </p:par>
+                      </p:childTnLst>
+                    </p:cTn>
+                  </p:par>
+                  <p:par>
+                    <p:cTn id="21" fill="hold">
+                      <p:stCondLst>
+                        <p:cond delay="indefinite"/>
+                      </p:stCondLst>
+                      <p:childTnLst>
+                        <p:par>
+                          <p:cTn id="22" fill="hold">
+                            <p:stCondLst>
+                              <p:cond delay="0"/>
+                            </p:stCondLst>
+                            <p:childTnLst>
+                              <p:par>
+                                <p:cTn id="23" presetID="42" presetClass="entr" presetSubtype="0" fill="hold" grpId="0" nodeType="clickEffect">
+                                  <p:stCondLst>
+                                    <p:cond delay="200"/>
+                                  </p:stCondLst>
+                                  <p:childTnLst>
+                                    <p:set>
+                                      <p:cBhvr>
+                                        <p:cTn id="24" dur="1" fill="hold">
+                                          <p:stCondLst>
+                                            <p:cond delay="0"/>
+                                          </p:stCondLst>
+                                        </p:cTn>
+                                        <p:tgtEl>
+                                          <p:spTgt spid="3">
+                                            <p:txEl>
+                                              <p:pRg st="2" end="2"/>
+                                            </p:txEl>
+                                          </p:spTgt>
+                                        </p:tgtEl>
+                                        <p:attrNameLst>
+                                          <p:attrName>style.visibility</p:attrName>
+                                        </p:attrNameLst>
+                                      </p:cBhvr>
+                                      <p:to>
+                                        <p:strVal val="visible"/>
+                                      </p:to>
+                                    </p:set>
+                                    <p:animEffect transition="in" filter="fade">
+                                      <p:cBhvr>
+                                        <p:cTn id="25" dur="500"/>
+                                        <p:tgtEl>
+                                          <p:spTgt spid="3">
+                                            <p:txEl>
+                                              <p:pRg st="2" end="2"/>
+                                            </p:txEl>
+                                          </p:spTgt>
+                                        </p:tgtEl>
+                                      </p:cBhvr>
+                                    </p:animEffect>
+                                    <p:anim calcmode="lin" valueType="num">
+                                      <p:cBhvr>
+                                        <p:cTn id="26" dur="500" fill="hold"/>
+                                        <p:tgtEl>
+                                          <p:spTgt spid="3">
+                                            <p:txEl>
+                                              <p:pRg st="2" end="2"/>
+                                            </p:txEl>
+                                          </p:spTgt>
+                                        </p:tgtEl>
+                                        <p:attrNameLst>
+                                          <p:attrName>ppt_x</p:attrName>
+                                        </p:attrNameLst>
+                                      </p:cBhvr>
+                                      <p:tavLst>
+                                        <p:tav tm="0">
+                                          <p:val>
+                                            <p:strVal val="#ppt_x"/>
+                                          </p:val>
+                                        </p:tav>
+                                        <p:tav tm="100000">
+                                          <p:val>
+                                            <p:strVal val="#ppt_x"/>
+                                          </p:val>
+                                        </p:tav>
+                                      </p:tavLst>
+                                    </p:anim>
+                                    <p:anim calcmode="lin" valueType="num">
+                                      <p:cBhvr>
+                                        <p:cTn id="27" dur="500" fill="hold"/>
+                                        <p:tgtEl>
+                                          <p:spTgt spid="3">
+                                            <p:txEl>
+                                              <p:pRg st="2" end="2"/>
+                                            </p:txEl>
+                                          </p:spTgt>
+                                        </p:tgtEl>
+                                        <p:attrNameLst>
+                                          <p:attrName>ppt_y</p:attrName>
+                                        </p:attrNameLst>
+                                      </p:cBhvr>
+                                      <p:tavLst>
+                                        <p:tav tm="0">
+                                          <p:val>
+                                            <p:strVal val="#ppt_y+.1"/>
+                                          </p:val>
+                                        </p:tav>
+                                        <p:tav tm="100000">
+                                          <p:val>
+                                            <p:strVal val="#ppt_y"/>
+                                          </p:val>
+                                        </p:tav>
+                                      </p:tavLst>
+                                    </p:anim>
+                                  </p:childTnLst>
+                                </p:cTn>
+                              </p:par>
+                            </p:childTnLst>
+                          </p:cTn>
+                        </p:par>
+                      </p:childTnLst>
+                    </p:cTn>
+                  </p:par>
+                  <p:par>
+                    <p:cTn id="28" fill="hold">
+                      <p:stCondLst>
+                        <p:cond delay="indefinite"/>
+                      </p:stCondLst>
+                      <p:childTnLst>
+                        <p:par>
+                          <p:cTn id="29" fill="hold">
+                            <p:stCondLst>
+                              <p:cond delay="0"/>
+                            </p:stCondLst>
+                            <p:childTnLst>
+                              <p:par>
+                                <p:cTn id="30" presetID="42" presetClass="entr" presetSubtype="0" fill="hold" grpId="0" nodeType="clickEffect">
+                                  <p:stCondLst>
+                                    <p:cond delay="200"/>
+                                  </p:stCondLst>
+                                  <p:childTnLst>
+                                    <p:set>
+                                      <p:cBhvr>
+                                        <p:cTn id="31" dur="1" fill="hold">
+                                          <p:stCondLst>
+                                            <p:cond delay="0"/>
+                                          </p:stCondLst>
+                                        </p:cTn>
+                                        <p:tgtEl>
+                                          <p:spTgt spid="3">
+                                            <p:txEl>
+                                              <p:pRg st="3" end="3"/>
+                                            </p:txEl>
+                                          </p:spTgt>
+                                        </p:tgtEl>
+                                        <p:attrNameLst>
+                                          <p:attrName>style.visibility</p:attrName>
+                                        </p:attrNameLst>
+                                      </p:cBhvr>
+                                      <p:to>
+                                        <p:strVal val="visible"/>
+                                      </p:to>
+                                    </p:set>
+                                    <p:animEffect transition="in" filter="fade">
+                                      <p:cBhvr>
+                                        <p:cTn id="32" dur="500"/>
+                                        <p:tgtEl>
+                                          <p:spTgt spid="3">
+                                            <p:txEl>
+                                              <p:pRg st="3" end="3"/>
+                                            </p:txEl>
+                                          </p:spTgt>
+                                        </p:tgtEl>
+                                      </p:cBhvr>
+                                    </p:animEffect>
+                                    <p:anim calcmode="lin" valueType="num">
+                                      <p:cBhvr>
+                                        <p:cTn id="33" dur="500" fill="hold"/>
+                                        <p:tgtEl>
+                                          <p:spTgt spid="3">
+                                            <p:txEl>
+                                              <p:pRg st="3" end="3"/>
+                                            </p:txEl>
+                                          </p:spTgt>
+                                        </p:tgtEl>
+                                        <p:attrNameLst>
+                                          <p:attrName>ppt_x</p:attrName>
+                                        </p:attrNameLst>
+                                      </p:cBhvr>
+                                      <p:tavLst>
+                                        <p:tav tm="0">
+                                          <p:val>
+                                            <p:strVal val="#ppt_x"/>
+                                          </p:val>
+                                        </p:tav>
+                                        <p:tav tm="100000">
+                                          <p:val>
+                                            <p:strVal val="#ppt_x"/>
+                                          </p:val>
+                                        </p:tav>
+                                      </p:tavLst>
+                                    </p:anim>
+                                    <p:anim calcmode="lin" valueType="num">
+                                      <p:cBhvr>
+                                        <p:cTn id="34" dur="500" fill="hold"/>
+                                        <p:tgtEl>
+                                          <p:spTgt spid="3">
+                                            <p:txEl>
+                                              <p:pRg st="3" end="3"/>
+                                            </p:txEl>
+                                          </p:spTgt>
+                                        </p:tgtEl>
+                                        <p:attrNameLst>
+                                          <p:attrName>ppt_y</p:attrName>
+                                        </p:attrNameLst>
+                                      </p:cBhvr>
+                                      <p:tavLst>
+                                        <p:tav tm="0">
+                                          <p:val>
+                                            <p:strVal val="#ppt_y+.1"/>
+                                          </p:val>
+                                        </p:tav>
+                                        <p:tav tm="100000">
+                                          <p:val>
+                                            <p:strVal val="#ppt_y"/>
+                                          </p:val>
+                                        </p:tav>
+                                      </p:tavLst>
+                                    </p:anim>
+                                  </p:childTnLst>
+                                </p:cTn>
+                              </p:par>
+                            </p:childTnLst>
+                          </p:cTn>
+                        </p:par>
+                      </p:childTnLst>
+                    </p:cTn>
+                  </p:par>
+                  <p:par>
+                    <p:cTn id="35" fill="hold">
+                      <p:stCondLst>
+                        <p:cond delay="indefinite"/>
+                      </p:stCondLst>
+                      <p:childTnLst>
+                        <p:par>
+                          <p:cTn id="36" fill="hold">
+                            <p:stCondLst>
+                              <p:cond delay="0"/>
+                            </p:stCondLst>
+                            <p:childTnLst>
+                              <p:par>
+                                <p:cTn id="37" presetID="42" presetClass="entr" presetSubtype="0" fill="hold" grpId="0" nodeType="clickEffect">
+                                  <p:stCondLst>
+                                    <p:cond delay="200"/>
+                                  </p:stCondLst>
+                                  <p:childTnLst>
+                                    <p:set>
+                                      <p:cBhvr>
+                                        <p:cTn id="38" dur="1" fill="hold">
+                                          <p:stCondLst>
+                                            <p:cond delay="0"/>
+                                          </p:stCondLst>
+                                        </p:cTn>
+                                        <p:tgtEl>
+                                          <p:spTgt spid="3">
+                                            <p:txEl>
+                                              <p:pRg st="4" end="4"/>
+                                            </p:txEl>
+                                          </p:spTgt>
+                                        </p:tgtEl>
+                                        <p:attrNameLst>
+                                          <p:attrName>style.visibility</p:attrName>
+                                        </p:attrNameLst>
+                                      </p:cBhvr>
+                                      <p:to>
+                                        <p:strVal val="visible"/>
+                                      </p:to>
+                                    </p:set>
+                                    <p:animEffect transition="in" filter="fade">
+                                      <p:cBhvr>
+                                        <p:cTn id="39" dur="500"/>
+                                        <p:tgtEl>
+                                          <p:spTgt spid="3">
+                                            <p:txEl>
+                                              <p:pRg st="4" end="4"/>
+                                            </p:txEl>
+                                          </p:spTgt>
+                                        </p:tgtEl>
+                                      </p:cBhvr>
+                                    </p:animEffect>
+                                    <p:anim calcmode="lin" valueType="num">
+                                      <p:cBhvr>
+                                        <p:cTn id="40" dur="500" fill="hold"/>
+                                        <p:tgtEl>
+                                          <p:spTgt spid="3">
+                                            <p:txEl>
+                                              <p:pRg st="4" end="4"/>
+                                            </p:txEl>
+                                          </p:spTgt>
+                                        </p:tgtEl>
+                                        <p:attrNameLst>
+                                          <p:attrName>ppt_x</p:attrName>
+                                        </p:attrNameLst>
+                                      </p:cBhvr>
+                                      <p:tavLst>
+                                        <p:tav tm="0">
+                                          <p:val>
+                                            <p:strVal val="#ppt_x"/>
+                                          </p:val>
+                                        </p:tav>
+                                        <p:tav tm="100000">
+                                          <p:val>
+                                            <p:strVal val="#ppt_x"/>
+                                          </p:val>
+                                        </p:tav>
+                                      </p:tavLst>
+                                    </p:anim>
+                                    <p:anim calcmode="lin" valueType="num">
+                                      <p:cBhvr>
+                                        <p:cTn id="41" dur="500" fill="hold"/>
+                                        <p:tgtEl>
+                                          <p:spTgt spid="3">
+                                            <p:txEl>
+                                              <p:pRg st="4" end="4"/>
+                                            </p:txEl>
+                                          </p:spTgt>
+                                        </p:tgtEl>
+                                        <p:attrNameLst>
+                                          <p:attrName>ppt_y</p:attrName>
+                                        </p:attrNameLst>
+                                      </p:cBhvr>
+                                      <p:tavLst>
+                                        <p:tav tm="0">
+                                          <p:val>
+                                            <p:strVal val="#ppt_y+.1"/>
+                                          </p:val>
+                                        </p:tav>
+                                        <p:tav tm="100000">
+                                          <p:val>
+                                            <p:strVal val="#ppt_y"/>
+                                          </p:val>
+                                        </p:tav>
+                                      </p:tavLst>
+                                    </p:anim>
+                                  </p:childTnLst>
+                                </p:cTn>
+                              </p:par>
+                            </p:childTnLst>
+                          </p:cTn>
+                        </p:par>
+                      </p:childTnLst>
+                    </p:cTn>
+                  </p:par>
+                  <p:par>
+                    <p:cTn id="42" fill="hold">
+                      <p:stCondLst>
+                        <p:cond delay="indefinite"/>
+                      </p:stCondLst>
+                      <p:childTnLst>
+                        <p:par>
+                          <p:cTn id="43" fill="hold">
+                            <p:stCondLst>
+                              <p:cond delay="0"/>
+                            </p:stCondLst>
+                            <p:childTnLst>
+                              <p:par>
+                                <p:cTn id="44" presetID="42" presetClass="entr" presetSubtype="0" fill="hold" grpId="0" nodeType="clickEffect">
+                                  <p:stCondLst>
+                                    <p:cond delay="200"/>
+                                  </p:stCondLst>
+                                  <p:childTnLst>
+                                    <p:set>
+                                      <p:cBhvr>
+                                        <p:cTn id="45" dur="1" fill="hold">
+                                          <p:stCondLst>
+                                            <p:cond delay="0"/>
+                                          </p:stCondLst>
+                                        </p:cTn>
+                                        <p:tgtEl>
+                                          <p:spTgt spid="3">
+                                            <p:txEl>
+                                              <p:pRg st="5" end="5"/>
+                                            </p:txEl>
+                                          </p:spTgt>
+                                        </p:tgtEl>
+                                        <p:attrNameLst>
+                                          <p:attrName>style.visibility</p:attrName>
+                                        </p:attrNameLst>
+                                      </p:cBhvr>
+                                      <p:to>
+                                        <p:strVal val="visible"/>
+                                      </p:to>
+                                    </p:set>
+                                    <p:animEffect transition="in" filter="fade">
+                                      <p:cBhvr>
+                                        <p:cTn id="46" dur="500"/>
+                                        <p:tgtEl>
+                                          <p:spTgt spid="3">
+                                            <p:txEl>
+                                              <p:pRg st="5" end="5"/>
+                                            </p:txEl>
+                                          </p:spTgt>
+                                        </p:tgtEl>
+                                      </p:cBhvr>
+                                    </p:animEffect>
+                                    <p:anim calcmode="lin" valueType="num">
+                                      <p:cBhvr>
+                                        <p:cTn id="47" dur="500" fill="hold"/>
+                                        <p:tgtEl>
+                                          <p:spTgt spid="3">
+                                            <p:txEl>
+                                              <p:pRg st="5" end="5"/>
+                                            </p:txEl>
+                                          </p:spTgt>
+                                        </p:tgtEl>
+                                        <p:attrNameLst>
+                                          <p:attrName>ppt_x</p:attrName>
+                                        </p:attrNameLst>
+                                      </p:cBhvr>
+                                      <p:tavLst>
+                                        <p:tav tm="0">
+                                          <p:val>
+                                            <p:strVal val="#ppt_x"/>
+                                          </p:val>
+                                        </p:tav>
+                                        <p:tav tm="100000">
+                                          <p:val>
+                                            <p:strVal val="#ppt_x"/>
+                                          </p:val>
+                                        </p:tav>
+                                      </p:tavLst>
+                                    </p:anim>
+                                    <p:anim calcmode="lin" valueType="num">
+                                      <p:cBhvr>
+                                        <p:cTn id="48" dur="500" fill="hold"/>
+                                        <p:tgtEl>
+                                          <p:spTgt spid="3">
+                                            <p:txEl>
+                                              <p:pRg st="5" end="5"/>
+                                            </p:txEl>
+                                          </p:spTgt>
+                                        </p:tgtEl>
+                                        <p:attrNameLst>
+                                          <p:attrName>ppt_y</p:attrName>
+                                        </p:attrNameLst>
+                                      </p:cBhvr>
+                                      <p:tavLst>
+                                        <p:tav tm="0">
+                                          <p:val>
+                                            <p:strVal val="#ppt_y+.1"/>
+                                          </p:val>
+                                        </p:tav>
+                                        <p:tav tm="100000">
+                                          <p:val>
+                                            <p:strVal val="#ppt_y"/>
+                                          </p:val>
+                                        </p:tav>
+                                      </p:tavLst>
+                                    </p:anim>
+                                  </p:childTnLst>
+                                </p:cTn>
+                              </p:par>
+                            </p:childTnLst>
+                          </p:cTn>
+                        </p:par>
+                      </p:childTnLst>
+                    </p:cTn>
+                  </p:par>
                 </p:childTnLst>
               </p:cTn>
               <p:prevCondLst>
@@ -5484,7 +5927,7 @@
 </p:sld>
 </file>
 
-<file path=ppt/slides/slide13.xml><?xml version="1.0" encoding="utf-8"?>
+<file path=ppt/slides/slide12.xml><?xml version="1.0" encoding="utf-8"?>
 <p:sld xmlns:a="http://schemas.openxmlformats.org/drawingml/2006/main" xmlns:r="http://schemas.openxmlformats.org/officeDocument/2006/relationships" xmlns:p="http://schemas.openxmlformats.org/presentationml/2006/main">
   <p:cSld>
     <p:spTree>
@@ -5643,6 +6086,192 @@
     </p:tnLst>
     <p:bldLst>
       <p:bldP spid="2" grpId="0"/>
+    </p:bldLst>
+  </p:timing>
+</p:sld>
+</file>
+
+<file path=ppt/slides/slide13.xml><?xml version="1.0" encoding="utf-8"?>
+<p:sld xmlns:a="http://schemas.openxmlformats.org/drawingml/2006/main" xmlns:r="http://schemas.openxmlformats.org/officeDocument/2006/relationships" xmlns:p="http://schemas.openxmlformats.org/presentationml/2006/main">
+  <p:cSld>
+    <p:spTree>
+      <p:nvGrpSpPr>
+        <p:cNvPr id="1" name=""/>
+        <p:cNvGrpSpPr/>
+        <p:nvPr/>
+      </p:nvGrpSpPr>
+      <p:grpSpPr>
+        <a:xfrm>
+          <a:off x="0" y="0"/>
+          <a:ext cx="0" cy="0"/>
+          <a:chOff x="0" y="0"/>
+          <a:chExt cx="0" cy="0"/>
+        </a:xfrm>
+      </p:grpSpPr>
+      <p:sp>
+        <p:nvSpPr>
+          <p:cNvPr id="3" name="Tartalom helye 2">
+            <a:extLst>
+              <a:ext uri="{FF2B5EF4-FFF2-40B4-BE49-F238E27FC236}">
+                <a16:creationId xmlns:a16="http://schemas.microsoft.com/office/drawing/2014/main" id="{A028852F-82BE-4AA8-A846-2ABD4E7A6393}"/>
+              </a:ext>
+            </a:extLst>
+          </p:cNvPr>
+          <p:cNvSpPr>
+            <a:spLocks noGrp="1"/>
+          </p:cNvSpPr>
+          <p:nvPr>
+            <p:ph idx="1"/>
+          </p:nvPr>
+        </p:nvSpPr>
+        <p:spPr/>
+        <p:txBody>
+          <a:bodyPr/>
+          <a:lstStyle/>
+          <a:p>
+            <a:endParaRPr lang="hu-HU" dirty="0"/>
+          </a:p>
+        </p:txBody>
+      </p:sp>
+      <p:sp>
+        <p:nvSpPr>
+          <p:cNvPr id="6" name="Cím 1">
+            <a:extLst>
+              <a:ext uri="{FF2B5EF4-FFF2-40B4-BE49-F238E27FC236}">
+                <a16:creationId xmlns:a16="http://schemas.microsoft.com/office/drawing/2014/main" id="{B89468A5-FD64-4D93-8DB9-8EE491183EE6}"/>
+              </a:ext>
+            </a:extLst>
+          </p:cNvPr>
+          <p:cNvSpPr>
+            <a:spLocks noGrp="1"/>
+          </p:cNvSpPr>
+          <p:nvPr>
+            <p:ph type="title"/>
+          </p:nvPr>
+        </p:nvSpPr>
+        <p:spPr>
+          <a:xfrm>
+            <a:off x="1371600" y="685800"/>
+            <a:ext cx="9601200" cy="838200"/>
+          </a:xfrm>
+        </p:spPr>
+        <p:txBody>
+          <a:bodyPr/>
+          <a:lstStyle/>
+          <a:p>
+            <a:r>
+              <a:rPr lang="hu-HU" dirty="0">
+                <a:solidFill>
+                  <a:schemeClr val="tx1"/>
+                </a:solidFill>
+                <a:latin typeface="Times New Roman" panose="02020603050405020304" pitchFamily="18" charset="0"/>
+                <a:cs typeface="Times New Roman" panose="02020603050405020304" pitchFamily="18" charset="0"/>
+              </a:rPr>
+              <a:t>Források</a:t>
+            </a:r>
+          </a:p>
+        </p:txBody>
+      </p:sp>
+    </p:spTree>
+    <p:extLst>
+      <p:ext uri="{BB962C8B-B14F-4D97-AF65-F5344CB8AC3E}">
+        <p14:creationId xmlns:p14="http://schemas.microsoft.com/office/powerpoint/2010/main" val="3528585204"/>
+      </p:ext>
+    </p:extLst>
+  </p:cSld>
+  <p:clrMapOvr>
+    <a:masterClrMapping/>
+  </p:clrMapOvr>
+  <p:transition spd="slow">
+    <p:push dir="u"/>
+  </p:transition>
+  <p:timing>
+    <p:tnLst>
+      <p:par>
+        <p:cTn id="1" dur="indefinite" restart="never" nodeType="tmRoot">
+          <p:childTnLst>
+            <p:seq concurrent="1" nextAc="seek">
+              <p:cTn id="2" dur="indefinite" nodeType="mainSeq">
+                <p:childTnLst>
+                  <p:par>
+                    <p:cTn id="3" fill="hold">
+                      <p:stCondLst>
+                        <p:cond delay="indefinite"/>
+                        <p:cond evt="onBegin" delay="0">
+                          <p:tn val="2"/>
+                        </p:cond>
+                      </p:stCondLst>
+                      <p:childTnLst>
+                        <p:par>
+                          <p:cTn id="4" fill="hold">
+                            <p:stCondLst>
+                              <p:cond delay="0"/>
+                            </p:stCondLst>
+                            <p:childTnLst>
+                              <p:par>
+                                <p:cTn id="5" presetID="10" presetClass="entr" presetSubtype="0" fill="hold" grpId="0" nodeType="afterEffect">
+                                  <p:stCondLst>
+                                    <p:cond delay="0"/>
+                                  </p:stCondLst>
+                                  <p:childTnLst>
+                                    <p:set>
+                                      <p:cBhvr>
+                                        <p:cTn id="6" dur="1" fill="hold">
+                                          <p:stCondLst>
+                                            <p:cond delay="0"/>
+                                          </p:stCondLst>
+                                        </p:cTn>
+                                        <p:tgtEl>
+                                          <p:spTgt spid="6"/>
+                                        </p:tgtEl>
+                                        <p:attrNameLst>
+                                          <p:attrName>style.visibility</p:attrName>
+                                        </p:attrNameLst>
+                                      </p:cBhvr>
+                                      <p:to>
+                                        <p:strVal val="visible"/>
+                                      </p:to>
+                                    </p:set>
+                                    <p:animEffect transition="in" filter="fade">
+                                      <p:cBhvr>
+                                        <p:cTn id="7" dur="500"/>
+                                        <p:tgtEl>
+                                          <p:spTgt spid="6"/>
+                                        </p:tgtEl>
+                                      </p:cBhvr>
+                                    </p:animEffect>
+                                  </p:childTnLst>
+                                </p:cTn>
+                              </p:par>
+                            </p:childTnLst>
+                          </p:cTn>
+                        </p:par>
+                      </p:childTnLst>
+                    </p:cTn>
+                  </p:par>
+                </p:childTnLst>
+              </p:cTn>
+              <p:prevCondLst>
+                <p:cond evt="onPrev" delay="0">
+                  <p:tgtEl>
+                    <p:sldTgt/>
+                  </p:tgtEl>
+                </p:cond>
+              </p:prevCondLst>
+              <p:nextCondLst>
+                <p:cond evt="onNext" delay="0">
+                  <p:tgtEl>
+                    <p:sldTgt/>
+                  </p:tgtEl>
+                </p:cond>
+              </p:nextCondLst>
+            </p:seq>
+          </p:childTnLst>
+        </p:cTn>
+      </p:par>
+    </p:tnLst>
+    <p:bldLst>
+      <p:bldP spid="6" grpId="0"/>
     </p:bldLst>
   </p:timing>
 </p:sld>
@@ -6540,7 +7169,7 @@
         <p:spPr>
           <a:xfrm>
             <a:off x="1371600" y="1909233"/>
-            <a:ext cx="5858933" cy="3581400"/>
+            <a:ext cx="7077808" cy="3581400"/>
           </a:xfrm>
         </p:spPr>
         <p:txBody>
@@ -6551,13 +7180,80 @@
               <a:buFont typeface="Wingdings" panose="05000000000000000000" pitchFamily="2" charset="2"/>
               <a:buChar char="Ø"/>
             </a:pPr>
-            <a:endParaRPr lang="hu-HU" dirty="0">
-              <a:solidFill>
-                <a:schemeClr val="tx1"/>
-              </a:solidFill>
-              <a:latin typeface="Times New Roman" panose="02020603050405020304" pitchFamily="18" charset="0"/>
-              <a:cs typeface="Times New Roman" panose="02020603050405020304" pitchFamily="18" charset="0"/>
-            </a:endParaRPr>
+            <a:r>
+              <a:rPr lang="hu-HU" dirty="0">
+                <a:solidFill>
+                  <a:schemeClr val="tx1"/>
+                </a:solidFill>
+                <a:latin typeface="Times New Roman" panose="02020603050405020304" pitchFamily="18" charset="0"/>
+                <a:cs typeface="Times New Roman" panose="02020603050405020304" pitchFamily="18" charset="0"/>
+              </a:rPr>
+              <a:t>Webáruház egy kreatív hobbibolt számára</a:t>
+            </a:r>
+          </a:p>
+          <a:p>
+            <a:pPr>
+              <a:buFont typeface="Wingdings" panose="05000000000000000000" pitchFamily="2" charset="2"/>
+              <a:buChar char="Ø"/>
+            </a:pPr>
+            <a:r>
+              <a:rPr lang="hu-HU" dirty="0">
+                <a:solidFill>
+                  <a:schemeClr val="tx1"/>
+                </a:solidFill>
+                <a:latin typeface="Times New Roman" panose="02020603050405020304" pitchFamily="18" charset="0"/>
+                <a:cs typeface="Times New Roman" panose="02020603050405020304" pitchFamily="18" charset="0"/>
+              </a:rPr>
+              <a:t>Célok:</a:t>
+            </a:r>
+          </a:p>
+          <a:p>
+            <a:pPr lvl="1">
+              <a:buFont typeface="Wingdings" panose="05000000000000000000" pitchFamily="2" charset="2"/>
+              <a:buChar char="Ø"/>
+            </a:pPr>
+            <a:r>
+              <a:rPr lang="hu-HU" i="0" dirty="0">
+                <a:solidFill>
+                  <a:schemeClr val="tx1"/>
+                </a:solidFill>
+                <a:latin typeface="Times New Roman" panose="02020603050405020304" pitchFamily="18" charset="0"/>
+                <a:cs typeface="Times New Roman" panose="02020603050405020304" pitchFamily="18" charset="0"/>
+              </a:rPr>
+              <a:t>A bolt elérésének növelése</a:t>
+            </a:r>
+          </a:p>
+          <a:p>
+            <a:pPr lvl="1">
+              <a:buFont typeface="Wingdings" panose="05000000000000000000" pitchFamily="2" charset="2"/>
+              <a:buChar char="Ø"/>
+            </a:pPr>
+            <a:r>
+              <a:rPr lang="hu-HU" i="0" dirty="0">
+                <a:solidFill>
+                  <a:schemeClr val="tx1"/>
+                </a:solidFill>
+                <a:latin typeface="Times New Roman" panose="02020603050405020304" pitchFamily="18" charset="0"/>
+                <a:cs typeface="Times New Roman" panose="02020603050405020304" pitchFamily="18" charset="0"/>
+              </a:rPr>
+              <a:t>Ötletek, tapasztalatok és segédletek elérése</a:t>
+            </a:r>
+          </a:p>
+          <a:p>
+            <a:pPr lvl="1">
+              <a:buFont typeface="Wingdings" panose="05000000000000000000" pitchFamily="2" charset="2"/>
+              <a:buChar char="Ø"/>
+            </a:pPr>
+            <a:r>
+              <a:rPr lang="hu-HU" i="0" dirty="0">
+                <a:solidFill>
+                  <a:schemeClr val="tx1"/>
+                </a:solidFill>
+                <a:latin typeface="Times New Roman" panose="02020603050405020304" pitchFamily="18" charset="0"/>
+                <a:cs typeface="Times New Roman" panose="02020603050405020304" pitchFamily="18" charset="0"/>
+              </a:rPr>
+              <a:t>Interaktív felület létrehozása horgoláshoz és kötéshez</a:t>
+            </a:r>
           </a:p>
         </p:txBody>
       </p:sp>
@@ -11496,17 +12192,62 @@
         </p:nvPicPr>
         <p:blipFill rotWithShape="1">
           <a:blip r:embed="rId2"/>
-          <a:srcRect l="1194"/>
+          <a:srcRect l="1194" b="47548"/>
           <a:stretch/>
         </p:blipFill>
         <p:spPr>
           <a:xfrm>
-            <a:off x="8593667" y="685800"/>
-            <a:ext cx="2776733" cy="5229955"/>
+            <a:off x="8593667" y="685801"/>
+            <a:ext cx="2776733" cy="2743200"/>
           </a:xfrm>
           <a:prstGeom prst="rect">
             <a:avLst/>
           </a:prstGeom>
+        </p:spPr>
+      </p:pic>
+      <p:pic>
+        <p:nvPicPr>
+          <p:cNvPr id="6" name="Tartalom helye 4">
+            <a:extLst>
+              <a:ext uri="{FF2B5EF4-FFF2-40B4-BE49-F238E27FC236}">
+                <a16:creationId xmlns:a16="http://schemas.microsoft.com/office/drawing/2014/main" id="{1BE3CA50-2222-4845-A8AB-0CE8C5056A0A}"/>
+              </a:ext>
+            </a:extLst>
+          </p:cNvPr>
+          <p:cNvPicPr>
+            <a:picLocks noChangeAspect="1"/>
+          </p:cNvPicPr>
+          <p:nvPr/>
+        </p:nvPicPr>
+        <p:blipFill rotWithShape="1">
+          <a:blip r:embed="rId3">
+            <a:extLst>
+              <a:ext uri="{28A0092B-C50C-407E-A947-70E740481C1C}">
+                <a14:useLocalDpi xmlns:a14="http://schemas.microsoft.com/office/drawing/2010/main" val="0"/>
+              </a:ext>
+            </a:extLst>
+          </a:blip>
+          <a:srcRect l="36629" t="17395" r="36973" b="8660"/>
+          <a:stretch/>
+        </p:blipFill>
+        <p:spPr>
+          <a:xfrm>
+            <a:off x="6172200" y="3534506"/>
+            <a:ext cx="2062868" cy="3156437"/>
+          </a:xfrm>
+          <a:prstGeom prst="rect">
+            <a:avLst/>
+          </a:prstGeom>
+          <a:noFill/>
+          <a:effectLst>
+            <a:outerShdw blurRad="279400" dir="5400000" algn="ctr" rotWithShape="0">
+              <a:schemeClr val="tx1">
+                <a:lumMod val="50000"/>
+                <a:lumOff val="50000"/>
+                <a:alpha val="26000"/>
+              </a:schemeClr>
+            </a:outerShdw>
+          </a:effectLst>
         </p:spPr>
       </p:pic>
     </p:spTree>
@@ -12223,6 +12964,41 @@
                                         </p:tav>
                                       </p:tavLst>
                                     </p:anim>
+                                  </p:childTnLst>
+                                </p:cTn>
+                              </p:par>
+                              <p:par>
+                                <p:cTn id="43" presetID="10" presetClass="entr" presetSubtype="0" fill="hold" nodeType="withEffect">
+                                  <p:stCondLst>
+                                    <p:cond delay="200"/>
+                                  </p:stCondLst>
+                                  <p:childTnLst>
+                                    <p:set>
+                                      <p:cBhvr>
+                                        <p:cTn id="44" dur="1" fill="hold">
+                                          <p:stCondLst>
+                                            <p:cond delay="0"/>
+                                          </p:stCondLst>
+                                        </p:cTn>
+                                        <p:tgtEl>
+                                          <p:spTgt spid="6"/>
+                                        </p:tgtEl>
+                                        <p:attrNameLst>
+                                          <p:attrName>style.visibility</p:attrName>
+                                        </p:attrNameLst>
+                                      </p:cBhvr>
+                                      <p:to>
+                                        <p:strVal val="visible"/>
+                                      </p:to>
+                                    </p:set>
+                                    <p:animEffect transition="in" filter="fade">
+                                      <p:cBhvr>
+                                        <p:cTn id="45" dur="500"/>
+                                        <p:tgtEl>
+                                          <p:spTgt spid="6"/>
+                                        </p:tgtEl>
+                                      </p:cBhvr>
+                                    </p:animEffect>
                                   </p:childTnLst>
                                 </p:cTn>
                               </p:par>
@@ -12278,107 +13054,80 @@
           <a:chExt cx="0" cy="0"/>
         </a:xfrm>
       </p:grpSpPr>
-      <p:pic>
-        <p:nvPicPr>
-          <p:cNvPr id="5" name="Tartalom helye 4">
+      <p:sp>
+        <p:nvSpPr>
+          <p:cNvPr id="2" name="Cím 1">
             <a:extLst>
               <a:ext uri="{FF2B5EF4-FFF2-40B4-BE49-F238E27FC236}">
-                <a16:creationId xmlns:a16="http://schemas.microsoft.com/office/drawing/2014/main" id="{6727DEE5-9D71-4742-BD18-4113BDDF0E84}"/>
+                <a16:creationId xmlns:a16="http://schemas.microsoft.com/office/drawing/2014/main" id="{D8736DA6-9D79-4DB7-90AD-09E3F55948CD}"/>
               </a:ext>
             </a:extLst>
           </p:cNvPr>
-          <p:cNvPicPr>
-            <a:picLocks noGrp="1" noChangeAspect="1"/>
-          </p:cNvPicPr>
+          <p:cNvSpPr>
+            <a:spLocks noGrp="1"/>
+          </p:cNvSpPr>
+          <p:nvPr>
+            <p:ph type="title"/>
+          </p:nvPr>
+        </p:nvSpPr>
+        <p:spPr>
+          <a:xfrm>
+            <a:off x="1371600" y="685800"/>
+            <a:ext cx="9601200" cy="861646"/>
+          </a:xfrm>
+        </p:spPr>
+        <p:txBody>
+          <a:bodyPr/>
+          <a:lstStyle/>
+          <a:p>
+            <a:r>
+              <a:rPr lang="hu-HU" dirty="0">
+                <a:solidFill>
+                  <a:schemeClr val="tx1"/>
+                </a:solidFill>
+                <a:latin typeface="Times New Roman" panose="02020603050405020304" pitchFamily="18" charset="0"/>
+                <a:cs typeface="Times New Roman" panose="02020603050405020304" pitchFamily="18" charset="0"/>
+              </a:rPr>
+              <a:t>Reszponzívitás</a:t>
+            </a:r>
+          </a:p>
+        </p:txBody>
+      </p:sp>
+      <p:sp>
+        <p:nvSpPr>
+          <p:cNvPr id="3" name="Tartalom helye 2">
+            <a:extLst>
+              <a:ext uri="{FF2B5EF4-FFF2-40B4-BE49-F238E27FC236}">
+                <a16:creationId xmlns:a16="http://schemas.microsoft.com/office/drawing/2014/main" id="{80692D13-F04E-4F4F-A667-DFE0B3C725A5}"/>
+              </a:ext>
+            </a:extLst>
+          </p:cNvPr>
+          <p:cNvSpPr>
+            <a:spLocks noGrp="1"/>
+          </p:cNvSpPr>
           <p:nvPr>
             <p:ph idx="1"/>
           </p:nvPr>
-        </p:nvPicPr>
-        <p:blipFill>
-          <a:blip r:embed="rId2">
-            <a:extLst>
-              <a:ext uri="{28A0092B-C50C-407E-A947-70E740481C1C}">
-                <a14:useLocalDpi xmlns:a14="http://schemas.microsoft.com/office/drawing/2010/main" val="0"/>
-              </a:ext>
-            </a:extLst>
-          </a:blip>
-          <a:stretch>
-            <a:fillRect/>
-          </a:stretch>
-        </p:blipFill>
-        <p:spPr>
-          <a:xfrm>
-            <a:off x="837928" y="408842"/>
-            <a:ext cx="11053531" cy="6040315"/>
-          </a:xfrm>
-          <a:noFill/>
-          <a:effectLst>
-            <a:outerShdw blurRad="279400" dir="5400000" algn="ctr" rotWithShape="0">
-              <a:schemeClr val="tx1">
-                <a:lumMod val="50000"/>
-                <a:lumOff val="50000"/>
-                <a:alpha val="26000"/>
-              </a:schemeClr>
-            </a:outerShdw>
-          </a:effectLst>
-        </p:spPr>
-      </p:pic>
-      <p:sp>
-        <p:nvSpPr>
-          <p:cNvPr id="7" name="Téglalap 6">
-            <a:extLst>
-              <a:ext uri="{FF2B5EF4-FFF2-40B4-BE49-F238E27FC236}">
-                <a16:creationId xmlns:a16="http://schemas.microsoft.com/office/drawing/2014/main" id="{26378F6A-7F11-43CD-B05D-8B1B6F0809DF}"/>
-              </a:ext>
-            </a:extLst>
-          </p:cNvPr>
-          <p:cNvSpPr/>
-          <p:nvPr/>
         </p:nvSpPr>
-        <p:spPr>
-          <a:xfrm>
-            <a:off x="10770577" y="6075485"/>
-            <a:ext cx="1046285" cy="228600"/>
-          </a:xfrm>
-          <a:prstGeom prst="rect">
-            <a:avLst/>
-          </a:prstGeom>
-          <a:solidFill>
-            <a:srgbClr val="FBFBFB"/>
-          </a:solidFill>
-          <a:ln>
-            <a:noFill/>
-          </a:ln>
-        </p:spPr>
-        <p:style>
-          <a:lnRef idx="2">
-            <a:schemeClr val="accent1">
-              <a:shade val="50000"/>
-            </a:schemeClr>
-          </a:lnRef>
-          <a:fillRef idx="1">
-            <a:schemeClr val="accent1"/>
-          </a:fillRef>
-          <a:effectRef idx="0">
-            <a:schemeClr val="accent1"/>
-          </a:effectRef>
-          <a:fontRef idx="minor">
-            <a:schemeClr val="lt1"/>
-          </a:fontRef>
-        </p:style>
+        <p:spPr/>
         <p:txBody>
-          <a:bodyPr rtlCol="0" anchor="ctr"/>
+          <a:bodyPr/>
           <a:lstStyle/>
           <a:p>
-            <a:pPr algn="ctr"/>
-            <a:endParaRPr lang="hu-HU"/>
+            <a:endParaRPr lang="hu-HU" dirty="0">
+              <a:solidFill>
+                <a:schemeClr val="tx1"/>
+              </a:solidFill>
+              <a:latin typeface="Times New Roman" panose="02020603050405020304" pitchFamily="18" charset="0"/>
+              <a:cs typeface="Times New Roman" panose="02020603050405020304" pitchFamily="18" charset="0"/>
+            </a:endParaRPr>
           </a:p>
         </p:txBody>
       </p:sp>
     </p:spTree>
     <p:extLst>
       <p:ext uri="{BB962C8B-B14F-4D97-AF65-F5344CB8AC3E}">
-        <p14:creationId xmlns:p14="http://schemas.microsoft.com/office/powerpoint/2010/main" val="3528585204"/>
+        <p14:creationId xmlns:p14="http://schemas.microsoft.com/office/powerpoint/2010/main" val="1279272772"/>
       </p:ext>
     </p:extLst>
   </p:cSld>
@@ -12425,7 +13174,7 @@
                                           </p:stCondLst>
                                         </p:cTn>
                                         <p:tgtEl>
-                                          <p:spTgt spid="7"/>
+                                          <p:spTgt spid="2"/>
                                         </p:tgtEl>
                                         <p:attrNameLst>
                                           <p:attrName>style.visibility</p:attrName>
@@ -12439,42 +13188,7 @@
                                       <p:cBhvr>
                                         <p:cTn id="7" dur="500"/>
                                         <p:tgtEl>
-                                          <p:spTgt spid="7"/>
-                                        </p:tgtEl>
-                                      </p:cBhvr>
-                                    </p:animEffect>
-                                  </p:childTnLst>
-                                </p:cTn>
-                              </p:par>
-                              <p:par>
-                                <p:cTn id="8" presetID="10" presetClass="entr" presetSubtype="0" fill="hold" nodeType="withEffect">
-                                  <p:stCondLst>
-                                    <p:cond delay="200"/>
-                                  </p:stCondLst>
-                                  <p:childTnLst>
-                                    <p:set>
-                                      <p:cBhvr>
-                                        <p:cTn id="9" dur="1" fill="hold">
-                                          <p:stCondLst>
-                                            <p:cond delay="0"/>
-                                          </p:stCondLst>
-                                        </p:cTn>
-                                        <p:tgtEl>
-                                          <p:spTgt spid="5"/>
-                                        </p:tgtEl>
-                                        <p:attrNameLst>
-                                          <p:attrName>style.visibility</p:attrName>
-                                        </p:attrNameLst>
-                                      </p:cBhvr>
-                                      <p:to>
-                                        <p:strVal val="visible"/>
-                                      </p:to>
-                                    </p:set>
-                                    <p:animEffect transition="in" filter="fade">
-                                      <p:cBhvr>
-                                        <p:cTn id="10" dur="500"/>
-                                        <p:tgtEl>
-                                          <p:spTgt spid="5"/>
+                                          <p:spTgt spid="2"/>
                                         </p:tgtEl>
                                       </p:cBhvr>
                                     </p:animEffect>
@@ -12509,7 +13223,7 @@
       </p:par>
     </p:tnLst>
     <p:bldLst>
-      <p:bldP spid="7" grpId="0" animBg="1"/>
+      <p:bldP spid="2" grpId="0"/>
     </p:bldLst>
   </p:timing>
 </p:sld>

--- a/Fájlok/Bemutató.pptx
+++ b/Fájlok/Bemutató.pptx
@@ -294,7 +294,7 @@
           <a:p>
             <a:fld id="{BD2B674F-1946-412B-A744-B9E1115EC83C}" type="datetimeFigureOut">
               <a:rPr lang="en-GB" smtClean="0"/>
-              <a:t>20/03/2026</a:t>
+              <a:t>23/03/2026</a:t>
             </a:fld>
             <a:endParaRPr lang="en-GB"/>
           </a:p>
@@ -624,7 +624,7 @@
           <a:p>
             <a:fld id="{BD2B674F-1946-412B-A744-B9E1115EC83C}" type="datetimeFigureOut">
               <a:rPr lang="en-GB" smtClean="0"/>
-              <a:t>20/03/2026</a:t>
+              <a:t>23/03/2026</a:t>
             </a:fld>
             <a:endParaRPr lang="en-GB"/>
           </a:p>
@@ -804,7 +804,7 @@
           <a:p>
             <a:fld id="{BD2B674F-1946-412B-A744-B9E1115EC83C}" type="datetimeFigureOut">
               <a:rPr lang="en-GB" smtClean="0"/>
-              <a:t>20/03/2026</a:t>
+              <a:t>23/03/2026</a:t>
             </a:fld>
             <a:endParaRPr lang="en-GB"/>
           </a:p>
@@ -974,7 +974,7 @@
           <a:p>
             <a:fld id="{BD2B674F-1946-412B-A744-B9E1115EC83C}" type="datetimeFigureOut">
               <a:rPr lang="en-GB" smtClean="0"/>
-              <a:t>20/03/2026</a:t>
+              <a:t>23/03/2026</a:t>
             </a:fld>
             <a:endParaRPr lang="en-GB"/>
           </a:p>
@@ -1251,7 +1251,7 @@
           <a:p>
             <a:fld id="{BD2B674F-1946-412B-A744-B9E1115EC83C}" type="datetimeFigureOut">
               <a:rPr lang="en-GB" smtClean="0"/>
-              <a:t>20/03/2026</a:t>
+              <a:t>23/03/2026</a:t>
             </a:fld>
             <a:endParaRPr lang="en-GB"/>
           </a:p>
@@ -1645,7 +1645,7 @@
           <a:p>
             <a:fld id="{BD2B674F-1946-412B-A744-B9E1115EC83C}" type="datetimeFigureOut">
               <a:rPr lang="en-GB" smtClean="0"/>
-              <a:t>20/03/2026</a:t>
+              <a:t>23/03/2026</a:t>
             </a:fld>
             <a:endParaRPr lang="en-GB"/>
           </a:p>
@@ -2122,7 +2122,7 @@
           <a:p>
             <a:fld id="{BD2B674F-1946-412B-A744-B9E1115EC83C}" type="datetimeFigureOut">
               <a:rPr lang="en-GB" smtClean="0"/>
-              <a:t>20/03/2026</a:t>
+              <a:t>23/03/2026</a:t>
             </a:fld>
             <a:endParaRPr lang="en-GB"/>
           </a:p>
@@ -2240,7 +2240,7 @@
           <a:p>
             <a:fld id="{BD2B674F-1946-412B-A744-B9E1115EC83C}" type="datetimeFigureOut">
               <a:rPr lang="en-GB" smtClean="0"/>
-              <a:t>20/03/2026</a:t>
+              <a:t>23/03/2026</a:t>
             </a:fld>
             <a:endParaRPr lang="en-GB"/>
           </a:p>
@@ -2335,7 +2335,7 @@
           <a:p>
             <a:fld id="{BD2B674F-1946-412B-A744-B9E1115EC83C}" type="datetimeFigureOut">
               <a:rPr lang="en-GB" smtClean="0"/>
-              <a:t>20/03/2026</a:t>
+              <a:t>23/03/2026</a:t>
             </a:fld>
             <a:endParaRPr lang="en-GB"/>
           </a:p>
@@ -2681,7 +2681,7 @@
           <a:p>
             <a:fld id="{BD2B674F-1946-412B-A744-B9E1115EC83C}" type="datetimeFigureOut">
               <a:rPr lang="en-GB" smtClean="0"/>
-              <a:t>20/03/2026</a:t>
+              <a:t>23/03/2026</a:t>
             </a:fld>
             <a:endParaRPr lang="en-GB"/>
           </a:p>
@@ -3069,7 +3069,7 @@
           <a:p>
             <a:fld id="{BD2B674F-1946-412B-A744-B9E1115EC83C}" type="datetimeFigureOut">
               <a:rPr lang="en-GB" smtClean="0"/>
-              <a:t>20/03/2026</a:t>
+              <a:t>23/03/2026</a:t>
             </a:fld>
             <a:endParaRPr lang="en-GB"/>
           </a:p>
@@ -3347,7 +3347,7 @@
           <a:p>
             <a:fld id="{BD2B674F-1946-412B-A744-B9E1115EC83C}" type="datetimeFigureOut">
               <a:rPr lang="en-GB" smtClean="0"/>
-              <a:t>20/03/2026</a:t>
+              <a:t>23/03/2026</a:t>
             </a:fld>
             <a:endParaRPr lang="en-GB"/>
           </a:p>
@@ -10152,7 +10152,7 @@
           <p:nvPr/>
         </p:nvPicPr>
         <p:blipFill>
-          <a:blip r:embed="rId4">
+          <a:blip r:embed="rId4" cstate="hqprint">
             <a:extLst>
               <a:ext uri="{28A0092B-C50C-407E-A947-70E740481C1C}">
                 <a14:useLocalDpi xmlns:a14="http://schemas.microsoft.com/office/drawing/2010/main" val="0"/>
@@ -13109,7 +13109,12 @@
             <p:ph idx="1"/>
           </p:nvPr>
         </p:nvSpPr>
-        <p:spPr/>
+        <p:spPr>
+          <a:xfrm>
+            <a:off x="1371600" y="2286000"/>
+            <a:ext cx="4595091" cy="3581400"/>
+          </a:xfrm>
+        </p:spPr>
         <p:txBody>
           <a:bodyPr/>
           <a:lstStyle/>
@@ -13124,6 +13129,30 @@
           </a:p>
         </p:txBody>
       </p:sp>
+      <p:pic>
+        <p:nvPicPr>
+          <p:cNvPr id="4" name="Kép 3"/>
+          <p:cNvPicPr>
+            <a:picLocks noChangeAspect="1"/>
+          </p:cNvPicPr>
+          <p:nvPr/>
+        </p:nvPicPr>
+        <p:blipFill>
+          <a:blip r:embed="rId2"/>
+          <a:stretch>
+            <a:fillRect/>
+          </a:stretch>
+        </p:blipFill>
+        <p:spPr>
+          <a:xfrm>
+            <a:off x="8977612" y="685800"/>
+            <a:ext cx="2741953" cy="5510335"/>
+          </a:xfrm>
+          <a:prstGeom prst="rect">
+            <a:avLst/>
+          </a:prstGeom>
+        </p:spPr>
+      </p:pic>
     </p:spTree>
     <p:extLst>
       <p:ext uri="{BB962C8B-B14F-4D97-AF65-F5344CB8AC3E}">

--- a/Fájlok/Bemutató.pptx
+++ b/Fájlok/Bemutató.pptx
@@ -18,7 +18,6 @@
     <p:sldId id="266" r:id="rId12"/>
     <p:sldId id="267" r:id="rId13"/>
     <p:sldId id="268" r:id="rId14"/>
-    <p:sldId id="269" r:id="rId15"/>
   </p:sldIdLst>
   <p:sldSz cx="12192000" cy="6858000"/>
   <p:notesSz cx="6858000" cy="9144000"/>
@@ -294,7 +293,7 @@
           <a:p>
             <a:fld id="{BD2B674F-1946-412B-A744-B9E1115EC83C}" type="datetimeFigureOut">
               <a:rPr lang="en-GB" smtClean="0"/>
-              <a:t>23/03/2026</a:t>
+              <a:t>26/03/2026</a:t>
             </a:fld>
             <a:endParaRPr lang="en-GB"/>
           </a:p>
@@ -624,7 +623,7 @@
           <a:p>
             <a:fld id="{BD2B674F-1946-412B-A744-B9E1115EC83C}" type="datetimeFigureOut">
               <a:rPr lang="en-GB" smtClean="0"/>
-              <a:t>23/03/2026</a:t>
+              <a:t>26/03/2026</a:t>
             </a:fld>
             <a:endParaRPr lang="en-GB"/>
           </a:p>
@@ -804,7 +803,7 @@
           <a:p>
             <a:fld id="{BD2B674F-1946-412B-A744-B9E1115EC83C}" type="datetimeFigureOut">
               <a:rPr lang="en-GB" smtClean="0"/>
-              <a:t>23/03/2026</a:t>
+              <a:t>26/03/2026</a:t>
             </a:fld>
             <a:endParaRPr lang="en-GB"/>
           </a:p>
@@ -974,7 +973,7 @@
           <a:p>
             <a:fld id="{BD2B674F-1946-412B-A744-B9E1115EC83C}" type="datetimeFigureOut">
               <a:rPr lang="en-GB" smtClean="0"/>
-              <a:t>23/03/2026</a:t>
+              <a:t>26/03/2026</a:t>
             </a:fld>
             <a:endParaRPr lang="en-GB"/>
           </a:p>
@@ -1251,7 +1250,7 @@
           <a:p>
             <a:fld id="{BD2B674F-1946-412B-A744-B9E1115EC83C}" type="datetimeFigureOut">
               <a:rPr lang="en-GB" smtClean="0"/>
-              <a:t>23/03/2026</a:t>
+              <a:t>26/03/2026</a:t>
             </a:fld>
             <a:endParaRPr lang="en-GB"/>
           </a:p>
@@ -1645,7 +1644,7 @@
           <a:p>
             <a:fld id="{BD2B674F-1946-412B-A744-B9E1115EC83C}" type="datetimeFigureOut">
               <a:rPr lang="en-GB" smtClean="0"/>
-              <a:t>23/03/2026</a:t>
+              <a:t>26/03/2026</a:t>
             </a:fld>
             <a:endParaRPr lang="en-GB"/>
           </a:p>
@@ -2122,7 +2121,7 @@
           <a:p>
             <a:fld id="{BD2B674F-1946-412B-A744-B9E1115EC83C}" type="datetimeFigureOut">
               <a:rPr lang="en-GB" smtClean="0"/>
-              <a:t>23/03/2026</a:t>
+              <a:t>26/03/2026</a:t>
             </a:fld>
             <a:endParaRPr lang="en-GB"/>
           </a:p>
@@ -2240,7 +2239,7 @@
           <a:p>
             <a:fld id="{BD2B674F-1946-412B-A744-B9E1115EC83C}" type="datetimeFigureOut">
               <a:rPr lang="en-GB" smtClean="0"/>
-              <a:t>23/03/2026</a:t>
+              <a:t>26/03/2026</a:t>
             </a:fld>
             <a:endParaRPr lang="en-GB"/>
           </a:p>
@@ -2335,7 +2334,7 @@
           <a:p>
             <a:fld id="{BD2B674F-1946-412B-A744-B9E1115EC83C}" type="datetimeFigureOut">
               <a:rPr lang="en-GB" smtClean="0"/>
-              <a:t>23/03/2026</a:t>
+              <a:t>26/03/2026</a:t>
             </a:fld>
             <a:endParaRPr lang="en-GB"/>
           </a:p>
@@ -2681,7 +2680,7 @@
           <a:p>
             <a:fld id="{BD2B674F-1946-412B-A744-B9E1115EC83C}" type="datetimeFigureOut">
               <a:rPr lang="en-GB" smtClean="0"/>
-              <a:t>23/03/2026</a:t>
+              <a:t>26/03/2026</a:t>
             </a:fld>
             <a:endParaRPr lang="en-GB"/>
           </a:p>
@@ -3069,7 +3068,7 @@
           <a:p>
             <a:fld id="{BD2B674F-1946-412B-A744-B9E1115EC83C}" type="datetimeFigureOut">
               <a:rPr lang="en-GB" smtClean="0"/>
-              <a:t>23/03/2026</a:t>
+              <a:t>26/03/2026</a:t>
             </a:fld>
             <a:endParaRPr lang="en-GB"/>
           </a:p>
@@ -3347,7 +3346,7 @@
           <a:p>
             <a:fld id="{BD2B674F-1946-412B-A744-B9E1115EC83C}" type="datetimeFigureOut">
               <a:rPr lang="en-GB" smtClean="0"/>
-              <a:t>23/03/2026</a:t>
+              <a:t>26/03/2026</a:t>
             </a:fld>
             <a:endParaRPr lang="en-GB"/>
           </a:p>
@@ -6277,828 +6276,6 @@
 </p:sld>
 </file>
 
-<file path=ppt/slides/slide14.xml><?xml version="1.0" encoding="utf-8"?>
-<p:sld xmlns:a="http://schemas.openxmlformats.org/drawingml/2006/main" xmlns:r="http://schemas.openxmlformats.org/officeDocument/2006/relationships" xmlns:p="http://schemas.openxmlformats.org/presentationml/2006/main">
-  <p:cSld>
-    <p:spTree>
-      <p:nvGrpSpPr>
-        <p:cNvPr id="1" name=""/>
-        <p:cNvGrpSpPr/>
-        <p:nvPr/>
-      </p:nvGrpSpPr>
-      <p:grpSpPr>
-        <a:xfrm>
-          <a:off x="0" y="0"/>
-          <a:ext cx="0" cy="0"/>
-          <a:chOff x="0" y="0"/>
-          <a:chExt cx="0" cy="0"/>
-        </a:xfrm>
-      </p:grpSpPr>
-      <p:sp>
-        <p:nvSpPr>
-          <p:cNvPr id="3" name="Tartalom helye 2">
-            <a:extLst>
-              <a:ext uri="{FF2B5EF4-FFF2-40B4-BE49-F238E27FC236}">
-                <a16:creationId xmlns:a16="http://schemas.microsoft.com/office/drawing/2014/main" id="{F476053C-A6BC-4C33-8474-C12BD5859804}"/>
-              </a:ext>
-            </a:extLst>
-          </p:cNvPr>
-          <p:cNvSpPr>
-            <a:spLocks noGrp="1"/>
-          </p:cNvSpPr>
-          <p:nvPr>
-            <p:ph idx="1"/>
-          </p:nvPr>
-        </p:nvSpPr>
-        <p:spPr>
-          <a:xfrm>
-            <a:off x="1295400" y="2175933"/>
-            <a:ext cx="9601200" cy="3581400"/>
-          </a:xfrm>
-        </p:spPr>
-        <p:txBody>
-          <a:bodyPr>
-            <a:normAutofit fontScale="70000" lnSpcReduction="20000"/>
-          </a:bodyPr>
-          <a:lstStyle/>
-          <a:p>
-            <a:r>
-              <a:rPr lang="hu-HU" dirty="0">
-                <a:solidFill>
-                  <a:schemeClr val="tx1"/>
-                </a:solidFill>
-                <a:latin typeface="Times New Roman" panose="02020603050405020304" pitchFamily="18" charset="0"/>
-                <a:cs typeface="Times New Roman" panose="02020603050405020304" pitchFamily="18" charset="0"/>
-              </a:rPr>
-              <a:t>Prezentáció:</a:t>
-            </a:r>
-          </a:p>
-          <a:p>
-            <a:r>
-              <a:rPr lang="hu-HU" dirty="0">
-                <a:solidFill>
-                  <a:schemeClr val="tx1"/>
-                </a:solidFill>
-                <a:latin typeface="Times New Roman" panose="02020603050405020304" pitchFamily="18" charset="0"/>
-                <a:cs typeface="Times New Roman" panose="02020603050405020304" pitchFamily="18" charset="0"/>
-                <a:hlinkClick r:id="rId2"/>
-              </a:rPr>
-              <a:t>https://youtu.be/AAVxq0WvIJU?si=fdMjgQV-V2niKMhS</a:t>
-            </a:r>
-            <a:endParaRPr lang="hu-HU" dirty="0">
-              <a:solidFill>
-                <a:schemeClr val="tx1"/>
-              </a:solidFill>
-              <a:latin typeface="Times New Roman" panose="02020603050405020304" pitchFamily="18" charset="0"/>
-              <a:cs typeface="Times New Roman" panose="02020603050405020304" pitchFamily="18" charset="0"/>
-            </a:endParaRPr>
-          </a:p>
-          <a:p>
-            <a:r>
-              <a:rPr lang="hu-HU" sz="2000" b="0" i="0" u="none" strike="noStrike" baseline="0" dirty="0">
-                <a:solidFill>
-                  <a:srgbClr val="000000"/>
-                </a:solidFill>
-                <a:latin typeface="Times New Roman" panose="02020603050405020304" pitchFamily="18" charset="0"/>
-                <a:cs typeface="Times New Roman" panose="02020603050405020304" pitchFamily="18" charset="0"/>
-              </a:rPr>
-              <a:t>vizsgarész során a vizsgázó gyakorlati bemutatóval összekapcsolt szóbeli előadás formájában mutatja be a </a:t>
-            </a:r>
-          </a:p>
-          <a:p>
-            <a:r>
-              <a:rPr lang="hu-HU" sz="2000" b="0" i="0" u="none" strike="noStrike" baseline="0" dirty="0">
-                <a:solidFill>
-                  <a:srgbClr val="000000"/>
-                </a:solidFill>
-                <a:latin typeface="Times New Roman" panose="02020603050405020304" pitchFamily="18" charset="0"/>
-                <a:cs typeface="Times New Roman" panose="02020603050405020304" pitchFamily="18" charset="0"/>
-              </a:rPr>
-              <a:t>szoftver célját, </a:t>
-            </a:r>
-          </a:p>
-          <a:p>
-            <a:r>
-              <a:rPr lang="hu-HU" sz="2000" b="0" i="0" u="none" strike="noStrike" baseline="0" dirty="0">
-                <a:solidFill>
-                  <a:srgbClr val="000000"/>
-                </a:solidFill>
-                <a:latin typeface="Times New Roman" panose="02020603050405020304" pitchFamily="18" charset="0"/>
-                <a:cs typeface="Times New Roman" panose="02020603050405020304" pitchFamily="18" charset="0"/>
-              </a:rPr>
-              <a:t>műszaki megvalósítását, </a:t>
-            </a:r>
-          </a:p>
-          <a:p>
-            <a:r>
-              <a:rPr lang="hu-HU" sz="2000" b="0" i="0" u="none" strike="noStrike" baseline="0" dirty="0">
-                <a:solidFill>
-                  <a:srgbClr val="000000"/>
-                </a:solidFill>
-                <a:latin typeface="Times New Roman" panose="02020603050405020304" pitchFamily="18" charset="0"/>
-                <a:cs typeface="Times New Roman" panose="02020603050405020304" pitchFamily="18" charset="0"/>
-              </a:rPr>
-              <a:t>működését, </a:t>
-            </a:r>
-          </a:p>
-          <a:p>
-            <a:r>
-              <a:rPr lang="hu-HU" sz="2000" b="0" i="0" u="none" strike="noStrike" baseline="0" dirty="0">
-                <a:solidFill>
-                  <a:srgbClr val="000000"/>
-                </a:solidFill>
-                <a:latin typeface="Times New Roman" panose="02020603050405020304" pitchFamily="18" charset="0"/>
-                <a:cs typeface="Times New Roman" panose="02020603050405020304" pitchFamily="18" charset="0"/>
-              </a:rPr>
-              <a:t>forráskódját, </a:t>
-            </a:r>
-          </a:p>
-          <a:p>
-            <a:r>
-              <a:rPr lang="hu-HU" sz="2000" b="0" i="0" u="none" strike="noStrike" baseline="0" dirty="0">
-                <a:solidFill>
-                  <a:srgbClr val="000000"/>
-                </a:solidFill>
-                <a:latin typeface="Times New Roman" panose="02020603050405020304" pitchFamily="18" charset="0"/>
-                <a:cs typeface="Times New Roman" panose="02020603050405020304" pitchFamily="18" charset="0"/>
-              </a:rPr>
-              <a:t>a csapaton belüli munkamegosztást, a fejlesztési csapatban betöltött szerepét, a fejlesztés során használt projektszervezési eszközöket. </a:t>
-            </a:r>
-          </a:p>
-          <a:p>
-            <a:r>
-              <a:rPr lang="hu-HU" sz="2000" dirty="0">
-                <a:solidFill>
-                  <a:srgbClr val="000000"/>
-                </a:solidFill>
-                <a:latin typeface="Times New Roman" panose="02020603050405020304" pitchFamily="18" charset="0"/>
-                <a:cs typeface="Times New Roman" panose="02020603050405020304" pitchFamily="18" charset="0"/>
-              </a:rPr>
-              <a:t>Első dia szinte olyan mint a dokumentáció, mintával, dátummal „vizsgaremek” felirat</a:t>
-            </a:r>
-          </a:p>
-          <a:p>
-            <a:r>
-              <a:rPr lang="hu-HU" sz="2000" b="0" i="0" u="none" strike="noStrike" baseline="0" dirty="0">
-                <a:solidFill>
-                  <a:srgbClr val="000000"/>
-                </a:solidFill>
-                <a:latin typeface="Times New Roman" panose="02020603050405020304" pitchFamily="18" charset="0"/>
-                <a:cs typeface="Times New Roman" panose="02020603050405020304" pitchFamily="18" charset="0"/>
-              </a:rPr>
-              <a:t>Max 7 infó a dián</a:t>
-            </a:r>
-          </a:p>
-          <a:p>
-            <a:r>
-              <a:rPr lang="hu-HU" sz="2000" b="0" i="0" u="none" strike="noStrike" baseline="0" dirty="0">
-                <a:solidFill>
-                  <a:srgbClr val="000000"/>
-                </a:solidFill>
-                <a:latin typeface="Times New Roman" panose="02020603050405020304" pitchFamily="18" charset="0"/>
-                <a:cs typeface="Times New Roman" panose="02020603050405020304" pitchFamily="18" charset="0"/>
-              </a:rPr>
-              <a:t>Végén köszönjük a figyelmet</a:t>
-            </a:r>
-          </a:p>
-          <a:p>
-            <a:endParaRPr lang="hu-HU" dirty="0"/>
-          </a:p>
-        </p:txBody>
-      </p:sp>
-    </p:spTree>
-    <p:extLst>
-      <p:ext uri="{BB962C8B-B14F-4D97-AF65-F5344CB8AC3E}">
-        <p14:creationId xmlns:p14="http://schemas.microsoft.com/office/powerpoint/2010/main" val="2537151539"/>
-      </p:ext>
-    </p:extLst>
-  </p:cSld>
-  <p:clrMapOvr>
-    <a:masterClrMapping/>
-  </p:clrMapOvr>
-  <p:transition spd="slow">
-    <p:push dir="u"/>
-  </p:transition>
-  <p:timing>
-    <p:tnLst>
-      <p:par>
-        <p:cTn id="1" dur="indefinite" restart="never" nodeType="tmRoot">
-          <p:childTnLst>
-            <p:seq concurrent="1" nextAc="seek">
-              <p:cTn id="2" dur="indefinite" nodeType="mainSeq">
-                <p:childTnLst>
-                  <p:par>
-                    <p:cTn id="3" fill="hold">
-                      <p:stCondLst>
-                        <p:cond delay="indefinite"/>
-                        <p:cond evt="onBegin" delay="0">
-                          <p:tn val="2"/>
-                        </p:cond>
-                      </p:stCondLst>
-                      <p:childTnLst>
-                        <p:par>
-                          <p:cTn id="4" fill="hold">
-                            <p:stCondLst>
-                              <p:cond delay="0"/>
-                            </p:stCondLst>
-                            <p:childTnLst>
-                              <p:par>
-                                <p:cTn id="5" presetID="10" presetClass="entr" presetSubtype="0" fill="hold" grpId="0" nodeType="afterEffect">
-                                  <p:stCondLst>
-                                    <p:cond delay="0"/>
-                                  </p:stCondLst>
-                                  <p:childTnLst>
-                                    <p:set>
-                                      <p:cBhvr>
-                                        <p:cTn id="6" dur="1" fill="hold">
-                                          <p:stCondLst>
-                                            <p:cond delay="0"/>
-                                          </p:stCondLst>
-                                        </p:cTn>
-                                        <p:tgtEl>
-                                          <p:spTgt spid="3">
-                                            <p:txEl>
-                                              <p:pRg st="0" end="0"/>
-                                            </p:txEl>
-                                          </p:spTgt>
-                                        </p:tgtEl>
-                                        <p:attrNameLst>
-                                          <p:attrName>style.visibility</p:attrName>
-                                        </p:attrNameLst>
-                                      </p:cBhvr>
-                                      <p:to>
-                                        <p:strVal val="visible"/>
-                                      </p:to>
-                                    </p:set>
-                                    <p:animEffect transition="in" filter="fade">
-                                      <p:cBhvr>
-                                        <p:cTn id="7" dur="500"/>
-                                        <p:tgtEl>
-                                          <p:spTgt spid="3">
-                                            <p:txEl>
-                                              <p:pRg st="0" end="0"/>
-                                            </p:txEl>
-                                          </p:spTgt>
-                                        </p:tgtEl>
-                                      </p:cBhvr>
-                                    </p:animEffect>
-                                  </p:childTnLst>
-                                </p:cTn>
-                              </p:par>
-                            </p:childTnLst>
-                          </p:cTn>
-                        </p:par>
-                        <p:par>
-                          <p:cTn id="8" fill="hold">
-                            <p:stCondLst>
-                              <p:cond delay="500"/>
-                            </p:stCondLst>
-                            <p:childTnLst>
-                              <p:par>
-                                <p:cTn id="9" presetID="10" presetClass="entr" presetSubtype="0" fill="hold" grpId="0" nodeType="afterEffect">
-                                  <p:stCondLst>
-                                    <p:cond delay="0"/>
-                                  </p:stCondLst>
-                                  <p:childTnLst>
-                                    <p:set>
-                                      <p:cBhvr>
-                                        <p:cTn id="10" dur="1" fill="hold">
-                                          <p:stCondLst>
-                                            <p:cond delay="0"/>
-                                          </p:stCondLst>
-                                        </p:cTn>
-                                        <p:tgtEl>
-                                          <p:spTgt spid="3">
-                                            <p:txEl>
-                                              <p:pRg st="1" end="1"/>
-                                            </p:txEl>
-                                          </p:spTgt>
-                                        </p:tgtEl>
-                                        <p:attrNameLst>
-                                          <p:attrName>style.visibility</p:attrName>
-                                        </p:attrNameLst>
-                                      </p:cBhvr>
-                                      <p:to>
-                                        <p:strVal val="visible"/>
-                                      </p:to>
-                                    </p:set>
-                                    <p:animEffect transition="in" filter="fade">
-                                      <p:cBhvr>
-                                        <p:cTn id="11" dur="500"/>
-                                        <p:tgtEl>
-                                          <p:spTgt spid="3">
-                                            <p:txEl>
-                                              <p:pRg st="1" end="1"/>
-                                            </p:txEl>
-                                          </p:spTgt>
-                                        </p:tgtEl>
-                                      </p:cBhvr>
-                                    </p:animEffect>
-                                  </p:childTnLst>
-                                </p:cTn>
-                              </p:par>
-                            </p:childTnLst>
-                          </p:cTn>
-                        </p:par>
-                        <p:par>
-                          <p:cTn id="12" fill="hold">
-                            <p:stCondLst>
-                              <p:cond delay="1000"/>
-                            </p:stCondLst>
-                            <p:childTnLst>
-                              <p:par>
-                                <p:cTn id="13" presetID="10" presetClass="entr" presetSubtype="0" fill="hold" grpId="0" nodeType="afterEffect">
-                                  <p:stCondLst>
-                                    <p:cond delay="0"/>
-                                  </p:stCondLst>
-                                  <p:childTnLst>
-                                    <p:set>
-                                      <p:cBhvr>
-                                        <p:cTn id="14" dur="1" fill="hold">
-                                          <p:stCondLst>
-                                            <p:cond delay="0"/>
-                                          </p:stCondLst>
-                                        </p:cTn>
-                                        <p:tgtEl>
-                                          <p:spTgt spid="3">
-                                            <p:txEl>
-                                              <p:pRg st="2" end="2"/>
-                                            </p:txEl>
-                                          </p:spTgt>
-                                        </p:tgtEl>
-                                        <p:attrNameLst>
-                                          <p:attrName>style.visibility</p:attrName>
-                                        </p:attrNameLst>
-                                      </p:cBhvr>
-                                      <p:to>
-                                        <p:strVal val="visible"/>
-                                      </p:to>
-                                    </p:set>
-                                    <p:animEffect transition="in" filter="fade">
-                                      <p:cBhvr>
-                                        <p:cTn id="15" dur="500"/>
-                                        <p:tgtEl>
-                                          <p:spTgt spid="3">
-                                            <p:txEl>
-                                              <p:pRg st="2" end="2"/>
-                                            </p:txEl>
-                                          </p:spTgt>
-                                        </p:tgtEl>
-                                      </p:cBhvr>
-                                    </p:animEffect>
-                                  </p:childTnLst>
-                                </p:cTn>
-                              </p:par>
-                            </p:childTnLst>
-                          </p:cTn>
-                        </p:par>
-                        <p:par>
-                          <p:cTn id="16" fill="hold">
-                            <p:stCondLst>
-                              <p:cond delay="1500"/>
-                            </p:stCondLst>
-                            <p:childTnLst>
-                              <p:par>
-                                <p:cTn id="17" presetID="10" presetClass="entr" presetSubtype="0" fill="hold" grpId="0" nodeType="afterEffect">
-                                  <p:stCondLst>
-                                    <p:cond delay="0"/>
-                                  </p:stCondLst>
-                                  <p:childTnLst>
-                                    <p:set>
-                                      <p:cBhvr>
-                                        <p:cTn id="18" dur="1" fill="hold">
-                                          <p:stCondLst>
-                                            <p:cond delay="0"/>
-                                          </p:stCondLst>
-                                        </p:cTn>
-                                        <p:tgtEl>
-                                          <p:spTgt spid="3">
-                                            <p:txEl>
-                                              <p:pRg st="3" end="3"/>
-                                            </p:txEl>
-                                          </p:spTgt>
-                                        </p:tgtEl>
-                                        <p:attrNameLst>
-                                          <p:attrName>style.visibility</p:attrName>
-                                        </p:attrNameLst>
-                                      </p:cBhvr>
-                                      <p:to>
-                                        <p:strVal val="visible"/>
-                                      </p:to>
-                                    </p:set>
-                                    <p:animEffect transition="in" filter="fade">
-                                      <p:cBhvr>
-                                        <p:cTn id="19" dur="500"/>
-                                        <p:tgtEl>
-                                          <p:spTgt spid="3">
-                                            <p:txEl>
-                                              <p:pRg st="3" end="3"/>
-                                            </p:txEl>
-                                          </p:spTgt>
-                                        </p:tgtEl>
-                                      </p:cBhvr>
-                                    </p:animEffect>
-                                  </p:childTnLst>
-                                </p:cTn>
-                              </p:par>
-                            </p:childTnLst>
-                          </p:cTn>
-                        </p:par>
-                        <p:par>
-                          <p:cTn id="20" fill="hold">
-                            <p:stCondLst>
-                              <p:cond delay="2000"/>
-                            </p:stCondLst>
-                            <p:childTnLst>
-                              <p:par>
-                                <p:cTn id="21" presetID="10" presetClass="entr" presetSubtype="0" fill="hold" grpId="0" nodeType="afterEffect">
-                                  <p:stCondLst>
-                                    <p:cond delay="0"/>
-                                  </p:stCondLst>
-                                  <p:childTnLst>
-                                    <p:set>
-                                      <p:cBhvr>
-                                        <p:cTn id="22" dur="1" fill="hold">
-                                          <p:stCondLst>
-                                            <p:cond delay="0"/>
-                                          </p:stCondLst>
-                                        </p:cTn>
-                                        <p:tgtEl>
-                                          <p:spTgt spid="3">
-                                            <p:txEl>
-                                              <p:pRg st="4" end="4"/>
-                                            </p:txEl>
-                                          </p:spTgt>
-                                        </p:tgtEl>
-                                        <p:attrNameLst>
-                                          <p:attrName>style.visibility</p:attrName>
-                                        </p:attrNameLst>
-                                      </p:cBhvr>
-                                      <p:to>
-                                        <p:strVal val="visible"/>
-                                      </p:to>
-                                    </p:set>
-                                    <p:animEffect transition="in" filter="fade">
-                                      <p:cBhvr>
-                                        <p:cTn id="23" dur="500"/>
-                                        <p:tgtEl>
-                                          <p:spTgt spid="3">
-                                            <p:txEl>
-                                              <p:pRg st="4" end="4"/>
-                                            </p:txEl>
-                                          </p:spTgt>
-                                        </p:tgtEl>
-                                      </p:cBhvr>
-                                    </p:animEffect>
-                                  </p:childTnLst>
-                                </p:cTn>
-                              </p:par>
-                            </p:childTnLst>
-                          </p:cTn>
-                        </p:par>
-                        <p:par>
-                          <p:cTn id="24" fill="hold">
-                            <p:stCondLst>
-                              <p:cond delay="2500"/>
-                            </p:stCondLst>
-                            <p:childTnLst>
-                              <p:par>
-                                <p:cTn id="25" presetID="10" presetClass="entr" presetSubtype="0" fill="hold" grpId="0" nodeType="afterEffect">
-                                  <p:stCondLst>
-                                    <p:cond delay="0"/>
-                                  </p:stCondLst>
-                                  <p:childTnLst>
-                                    <p:set>
-                                      <p:cBhvr>
-                                        <p:cTn id="26" dur="1" fill="hold">
-                                          <p:stCondLst>
-                                            <p:cond delay="0"/>
-                                          </p:stCondLst>
-                                        </p:cTn>
-                                        <p:tgtEl>
-                                          <p:spTgt spid="3">
-                                            <p:txEl>
-                                              <p:pRg st="5" end="5"/>
-                                            </p:txEl>
-                                          </p:spTgt>
-                                        </p:tgtEl>
-                                        <p:attrNameLst>
-                                          <p:attrName>style.visibility</p:attrName>
-                                        </p:attrNameLst>
-                                      </p:cBhvr>
-                                      <p:to>
-                                        <p:strVal val="visible"/>
-                                      </p:to>
-                                    </p:set>
-                                    <p:animEffect transition="in" filter="fade">
-                                      <p:cBhvr>
-                                        <p:cTn id="27" dur="500"/>
-                                        <p:tgtEl>
-                                          <p:spTgt spid="3">
-                                            <p:txEl>
-                                              <p:pRg st="5" end="5"/>
-                                            </p:txEl>
-                                          </p:spTgt>
-                                        </p:tgtEl>
-                                      </p:cBhvr>
-                                    </p:animEffect>
-                                  </p:childTnLst>
-                                </p:cTn>
-                              </p:par>
-                            </p:childTnLst>
-                          </p:cTn>
-                        </p:par>
-                        <p:par>
-                          <p:cTn id="28" fill="hold">
-                            <p:stCondLst>
-                              <p:cond delay="3000"/>
-                            </p:stCondLst>
-                            <p:childTnLst>
-                              <p:par>
-                                <p:cTn id="29" presetID="10" presetClass="entr" presetSubtype="0" fill="hold" grpId="0" nodeType="afterEffect">
-                                  <p:stCondLst>
-                                    <p:cond delay="0"/>
-                                  </p:stCondLst>
-                                  <p:childTnLst>
-                                    <p:set>
-                                      <p:cBhvr>
-                                        <p:cTn id="30" dur="1" fill="hold">
-                                          <p:stCondLst>
-                                            <p:cond delay="0"/>
-                                          </p:stCondLst>
-                                        </p:cTn>
-                                        <p:tgtEl>
-                                          <p:spTgt spid="3">
-                                            <p:txEl>
-                                              <p:pRg st="6" end="6"/>
-                                            </p:txEl>
-                                          </p:spTgt>
-                                        </p:tgtEl>
-                                        <p:attrNameLst>
-                                          <p:attrName>style.visibility</p:attrName>
-                                        </p:attrNameLst>
-                                      </p:cBhvr>
-                                      <p:to>
-                                        <p:strVal val="visible"/>
-                                      </p:to>
-                                    </p:set>
-                                    <p:animEffect transition="in" filter="fade">
-                                      <p:cBhvr>
-                                        <p:cTn id="31" dur="500"/>
-                                        <p:tgtEl>
-                                          <p:spTgt spid="3">
-                                            <p:txEl>
-                                              <p:pRg st="6" end="6"/>
-                                            </p:txEl>
-                                          </p:spTgt>
-                                        </p:tgtEl>
-                                      </p:cBhvr>
-                                    </p:animEffect>
-                                  </p:childTnLst>
-                                </p:cTn>
-                              </p:par>
-                            </p:childTnLst>
-                          </p:cTn>
-                        </p:par>
-                        <p:par>
-                          <p:cTn id="32" fill="hold">
-                            <p:stCondLst>
-                              <p:cond delay="3500"/>
-                            </p:stCondLst>
-                            <p:childTnLst>
-                              <p:par>
-                                <p:cTn id="33" presetID="10" presetClass="entr" presetSubtype="0" fill="hold" grpId="0" nodeType="afterEffect">
-                                  <p:stCondLst>
-                                    <p:cond delay="0"/>
-                                  </p:stCondLst>
-                                  <p:childTnLst>
-                                    <p:set>
-                                      <p:cBhvr>
-                                        <p:cTn id="34" dur="1" fill="hold">
-                                          <p:stCondLst>
-                                            <p:cond delay="0"/>
-                                          </p:stCondLst>
-                                        </p:cTn>
-                                        <p:tgtEl>
-                                          <p:spTgt spid="3">
-                                            <p:txEl>
-                                              <p:pRg st="7" end="7"/>
-                                            </p:txEl>
-                                          </p:spTgt>
-                                        </p:tgtEl>
-                                        <p:attrNameLst>
-                                          <p:attrName>style.visibility</p:attrName>
-                                        </p:attrNameLst>
-                                      </p:cBhvr>
-                                      <p:to>
-                                        <p:strVal val="visible"/>
-                                      </p:to>
-                                    </p:set>
-                                    <p:animEffect transition="in" filter="fade">
-                                      <p:cBhvr>
-                                        <p:cTn id="35" dur="500"/>
-                                        <p:tgtEl>
-                                          <p:spTgt spid="3">
-                                            <p:txEl>
-                                              <p:pRg st="7" end="7"/>
-                                            </p:txEl>
-                                          </p:spTgt>
-                                        </p:tgtEl>
-                                      </p:cBhvr>
-                                    </p:animEffect>
-                                  </p:childTnLst>
-                                </p:cTn>
-                              </p:par>
-                            </p:childTnLst>
-                          </p:cTn>
-                        </p:par>
-                        <p:par>
-                          <p:cTn id="36" fill="hold">
-                            <p:stCondLst>
-                              <p:cond delay="4000"/>
-                            </p:stCondLst>
-                            <p:childTnLst>
-                              <p:par>
-                                <p:cTn id="37" presetID="10" presetClass="entr" presetSubtype="0" fill="hold" grpId="0" nodeType="afterEffect">
-                                  <p:stCondLst>
-                                    <p:cond delay="0"/>
-                                  </p:stCondLst>
-                                  <p:childTnLst>
-                                    <p:set>
-                                      <p:cBhvr>
-                                        <p:cTn id="38" dur="1" fill="hold">
-                                          <p:stCondLst>
-                                            <p:cond delay="0"/>
-                                          </p:stCondLst>
-                                        </p:cTn>
-                                        <p:tgtEl>
-                                          <p:spTgt spid="3">
-                                            <p:txEl>
-                                              <p:pRg st="8" end="8"/>
-                                            </p:txEl>
-                                          </p:spTgt>
-                                        </p:tgtEl>
-                                        <p:attrNameLst>
-                                          <p:attrName>style.visibility</p:attrName>
-                                        </p:attrNameLst>
-                                      </p:cBhvr>
-                                      <p:to>
-                                        <p:strVal val="visible"/>
-                                      </p:to>
-                                    </p:set>
-                                    <p:animEffect transition="in" filter="fade">
-                                      <p:cBhvr>
-                                        <p:cTn id="39" dur="500"/>
-                                        <p:tgtEl>
-                                          <p:spTgt spid="3">
-                                            <p:txEl>
-                                              <p:pRg st="8" end="8"/>
-                                            </p:txEl>
-                                          </p:spTgt>
-                                        </p:tgtEl>
-                                      </p:cBhvr>
-                                    </p:animEffect>
-                                  </p:childTnLst>
-                                </p:cTn>
-                              </p:par>
-                            </p:childTnLst>
-                          </p:cTn>
-                        </p:par>
-                        <p:par>
-                          <p:cTn id="40" fill="hold">
-                            <p:stCondLst>
-                              <p:cond delay="4500"/>
-                            </p:stCondLst>
-                            <p:childTnLst>
-                              <p:par>
-                                <p:cTn id="41" presetID="10" presetClass="entr" presetSubtype="0" fill="hold" grpId="0" nodeType="afterEffect">
-                                  <p:stCondLst>
-                                    <p:cond delay="0"/>
-                                  </p:stCondLst>
-                                  <p:childTnLst>
-                                    <p:set>
-                                      <p:cBhvr>
-                                        <p:cTn id="42" dur="1" fill="hold">
-                                          <p:stCondLst>
-                                            <p:cond delay="0"/>
-                                          </p:stCondLst>
-                                        </p:cTn>
-                                        <p:tgtEl>
-                                          <p:spTgt spid="3">
-                                            <p:txEl>
-                                              <p:pRg st="9" end="9"/>
-                                            </p:txEl>
-                                          </p:spTgt>
-                                        </p:tgtEl>
-                                        <p:attrNameLst>
-                                          <p:attrName>style.visibility</p:attrName>
-                                        </p:attrNameLst>
-                                      </p:cBhvr>
-                                      <p:to>
-                                        <p:strVal val="visible"/>
-                                      </p:to>
-                                    </p:set>
-                                    <p:animEffect transition="in" filter="fade">
-                                      <p:cBhvr>
-                                        <p:cTn id="43" dur="500"/>
-                                        <p:tgtEl>
-                                          <p:spTgt spid="3">
-                                            <p:txEl>
-                                              <p:pRg st="9" end="9"/>
-                                            </p:txEl>
-                                          </p:spTgt>
-                                        </p:tgtEl>
-                                      </p:cBhvr>
-                                    </p:animEffect>
-                                  </p:childTnLst>
-                                </p:cTn>
-                              </p:par>
-                            </p:childTnLst>
-                          </p:cTn>
-                        </p:par>
-                        <p:par>
-                          <p:cTn id="44" fill="hold">
-                            <p:stCondLst>
-                              <p:cond delay="5000"/>
-                            </p:stCondLst>
-                            <p:childTnLst>
-                              <p:par>
-                                <p:cTn id="45" presetID="10" presetClass="entr" presetSubtype="0" fill="hold" grpId="0" nodeType="afterEffect">
-                                  <p:stCondLst>
-                                    <p:cond delay="0"/>
-                                  </p:stCondLst>
-                                  <p:childTnLst>
-                                    <p:set>
-                                      <p:cBhvr>
-                                        <p:cTn id="46" dur="1" fill="hold">
-                                          <p:stCondLst>
-                                            <p:cond delay="0"/>
-                                          </p:stCondLst>
-                                        </p:cTn>
-                                        <p:tgtEl>
-                                          <p:spTgt spid="3">
-                                            <p:txEl>
-                                              <p:pRg st="10" end="10"/>
-                                            </p:txEl>
-                                          </p:spTgt>
-                                        </p:tgtEl>
-                                        <p:attrNameLst>
-                                          <p:attrName>style.visibility</p:attrName>
-                                        </p:attrNameLst>
-                                      </p:cBhvr>
-                                      <p:to>
-                                        <p:strVal val="visible"/>
-                                      </p:to>
-                                    </p:set>
-                                    <p:animEffect transition="in" filter="fade">
-                                      <p:cBhvr>
-                                        <p:cTn id="47" dur="500"/>
-                                        <p:tgtEl>
-                                          <p:spTgt spid="3">
-                                            <p:txEl>
-                                              <p:pRg st="10" end="10"/>
-                                            </p:txEl>
-                                          </p:spTgt>
-                                        </p:tgtEl>
-                                      </p:cBhvr>
-                                    </p:animEffect>
-                                  </p:childTnLst>
-                                </p:cTn>
-                              </p:par>
-                            </p:childTnLst>
-                          </p:cTn>
-                        </p:par>
-                      </p:childTnLst>
-                    </p:cTn>
-                  </p:par>
-                </p:childTnLst>
-              </p:cTn>
-              <p:prevCondLst>
-                <p:cond evt="onPrev" delay="0">
-                  <p:tgtEl>
-                    <p:sldTgt/>
-                  </p:tgtEl>
-                </p:cond>
-              </p:prevCondLst>
-              <p:nextCondLst>
-                <p:cond evt="onNext" delay="0">
-                  <p:tgtEl>
-                    <p:sldTgt/>
-                  </p:tgtEl>
-                </p:cond>
-              </p:nextCondLst>
-            </p:seq>
-          </p:childTnLst>
-        </p:cTn>
-      </p:par>
-    </p:tnLst>
-    <p:bldLst>
-      <p:bldP spid="3" grpId="0" uiExpand="1" build="p"/>
-    </p:bldLst>
-  </p:timing>
-</p:sld>
-</file>
-
 <file path=ppt/slides/slide2.xml><?xml version="1.0" encoding="utf-8"?>
 <p:sld xmlns:a="http://schemas.openxmlformats.org/drawingml/2006/main" xmlns:r="http://schemas.openxmlformats.org/officeDocument/2006/relationships" xmlns:p="http://schemas.openxmlformats.org/presentationml/2006/main">
   <p:cSld>
@@ -7188,8 +6365,25 @@
                 <a:latin typeface="Times New Roman" panose="02020603050405020304" pitchFamily="18" charset="0"/>
                 <a:cs typeface="Times New Roman" panose="02020603050405020304" pitchFamily="18" charset="0"/>
               </a:rPr>
-              <a:t>Webáruház egy kreatív hobbibolt számára</a:t>
-            </a:r>
+              <a:t>Webáruház egy kreatív hobbibolt </a:t>
+            </a:r>
+            <a:r>
+              <a:rPr lang="hu-HU" dirty="0" smtClean="0">
+                <a:solidFill>
+                  <a:schemeClr val="tx1"/>
+                </a:solidFill>
+                <a:latin typeface="Times New Roman" panose="02020603050405020304" pitchFamily="18" charset="0"/>
+                <a:cs typeface="Times New Roman" panose="02020603050405020304" pitchFamily="18" charset="0"/>
+              </a:rPr>
+              <a:t>számára</a:t>
+            </a:r>
+            <a:endParaRPr lang="hu-HU" dirty="0">
+              <a:solidFill>
+                <a:schemeClr val="tx1"/>
+              </a:solidFill>
+              <a:latin typeface="Times New Roman" panose="02020603050405020304" pitchFamily="18" charset="0"/>
+              <a:cs typeface="Times New Roman" panose="02020603050405020304" pitchFamily="18" charset="0"/>
+            </a:endParaRPr>
           </a:p>
           <a:p>
             <a:pPr>
@@ -7252,11 +6446,52 @@
                 <a:latin typeface="Times New Roman" panose="02020603050405020304" pitchFamily="18" charset="0"/>
                 <a:cs typeface="Times New Roman" panose="02020603050405020304" pitchFamily="18" charset="0"/>
               </a:rPr>
-              <a:t>Interaktív felület létrehozása horgoláshoz és kötéshez</a:t>
-            </a:r>
+              <a:t>Interaktív felület létrehozása horgoláshoz és </a:t>
+            </a:r>
+            <a:r>
+              <a:rPr lang="hu-HU" i="0" dirty="0" smtClean="0">
+                <a:solidFill>
+                  <a:schemeClr val="tx1"/>
+                </a:solidFill>
+                <a:latin typeface="Times New Roman" panose="02020603050405020304" pitchFamily="18" charset="0"/>
+                <a:cs typeface="Times New Roman" panose="02020603050405020304" pitchFamily="18" charset="0"/>
+              </a:rPr>
+              <a:t>kötéshez</a:t>
+            </a:r>
+            <a:endParaRPr lang="hu-HU" i="0" dirty="0">
+              <a:solidFill>
+                <a:schemeClr val="tx1"/>
+              </a:solidFill>
+              <a:latin typeface="Times New Roman" panose="02020603050405020304" pitchFamily="18" charset="0"/>
+              <a:cs typeface="Times New Roman" panose="02020603050405020304" pitchFamily="18" charset="0"/>
+            </a:endParaRPr>
           </a:p>
         </p:txBody>
       </p:sp>
+      <p:pic>
+        <p:nvPicPr>
+          <p:cNvPr id="3" name="Kép 2"/>
+          <p:cNvPicPr>
+            <a:picLocks noChangeAspect="1"/>
+          </p:cNvPicPr>
+          <p:nvPr/>
+        </p:nvPicPr>
+        <p:blipFill>
+          <a:blip r:embed="rId2"/>
+          <a:stretch>
+            <a:fillRect/>
+          </a:stretch>
+        </p:blipFill>
+        <p:spPr>
+          <a:xfrm>
+            <a:off x="7887855" y="4858853"/>
+            <a:ext cx="3084945" cy="871583"/>
+          </a:xfrm>
+          <a:prstGeom prst="rect">
+            <a:avLst/>
+          </a:prstGeom>
+        </p:spPr>
+      </p:pic>
     </p:spTree>
     <p:extLst>
       <p:ext uri="{BB962C8B-B14F-4D97-AF65-F5344CB8AC3E}">
@@ -13111,15 +12346,64 @@
         </p:nvSpPr>
         <p:spPr>
           <a:xfrm>
-            <a:off x="1371600" y="2286000"/>
-            <a:ext cx="4595091" cy="3581400"/>
+            <a:off x="1371601" y="2036620"/>
+            <a:ext cx="5232400" cy="3581400"/>
           </a:xfrm>
         </p:spPr>
         <p:txBody>
           <a:bodyPr/>
           <a:lstStyle/>
           <a:p>
-            <a:endParaRPr lang="hu-HU" dirty="0">
+            <a:r>
+              <a:rPr lang="hu-HU" dirty="0" smtClean="0">
+                <a:solidFill>
+                  <a:schemeClr val="tx1"/>
+                </a:solidFill>
+                <a:latin typeface="Times New Roman" panose="02020603050405020304" pitchFamily="18" charset="0"/>
+                <a:cs typeface="Times New Roman" panose="02020603050405020304" pitchFamily="18" charset="0"/>
+              </a:rPr>
+              <a:t>Igényes kinézet az összes funkció elérésével az alábbiakon is:</a:t>
+            </a:r>
+          </a:p>
+          <a:p>
+            <a:pPr lvl="1"/>
+            <a:r>
+              <a:rPr lang="hu-HU" i="0" dirty="0" smtClean="0">
+                <a:solidFill>
+                  <a:schemeClr val="tx1"/>
+                </a:solidFill>
+                <a:latin typeface="Times New Roman" panose="02020603050405020304" pitchFamily="18" charset="0"/>
+                <a:cs typeface="Times New Roman" panose="02020603050405020304" pitchFamily="18" charset="0"/>
+              </a:rPr>
+              <a:t>Laptop</a:t>
+            </a:r>
+          </a:p>
+          <a:p>
+            <a:pPr lvl="1"/>
+            <a:r>
+              <a:rPr lang="hu-HU" i="0" dirty="0" smtClean="0">
+                <a:solidFill>
+                  <a:schemeClr val="tx1"/>
+                </a:solidFill>
+                <a:latin typeface="Times New Roman" panose="02020603050405020304" pitchFamily="18" charset="0"/>
+                <a:cs typeface="Times New Roman" panose="02020603050405020304" pitchFamily="18" charset="0"/>
+              </a:rPr>
+              <a:t>Tablet</a:t>
+            </a:r>
+          </a:p>
+          <a:p>
+            <a:pPr lvl="1"/>
+            <a:r>
+              <a:rPr lang="hu-HU" i="0" dirty="0" smtClean="0">
+                <a:solidFill>
+                  <a:schemeClr val="tx1"/>
+                </a:solidFill>
+                <a:latin typeface="Times New Roman" panose="02020603050405020304" pitchFamily="18" charset="0"/>
+                <a:cs typeface="Times New Roman" panose="02020603050405020304" pitchFamily="18" charset="0"/>
+              </a:rPr>
+              <a:t>Mobil</a:t>
+            </a:r>
+            <a:endParaRPr lang="hu-HU" i="0" dirty="0">
               <a:solidFill>
                 <a:schemeClr val="tx1"/>
               </a:solidFill>
@@ -13147,6 +12431,30 @@
           <a:xfrm>
             <a:off x="8977612" y="685800"/>
             <a:ext cx="2741953" cy="5510335"/>
+          </a:xfrm>
+          <a:prstGeom prst="rect">
+            <a:avLst/>
+          </a:prstGeom>
+        </p:spPr>
+      </p:pic>
+      <p:pic>
+        <p:nvPicPr>
+          <p:cNvPr id="5" name="Kép 4"/>
+          <p:cNvPicPr>
+            <a:picLocks noChangeAspect="1"/>
+          </p:cNvPicPr>
+          <p:nvPr/>
+        </p:nvPicPr>
+        <p:blipFill>
+          <a:blip r:embed="rId3"/>
+          <a:stretch>
+            <a:fillRect/>
+          </a:stretch>
+        </p:blipFill>
+        <p:spPr>
+          <a:xfrm>
+            <a:off x="5482899" y="2709111"/>
+            <a:ext cx="2889689" cy="4068916"/>
           </a:xfrm>
           <a:prstGeom prst="rect">
             <a:avLst/>

--- a/Fájlok/Bemutató.pptx
+++ b/Fájlok/Bemutató.pptx
@@ -293,7 +293,7 @@
           <a:p>
             <a:fld id="{BD2B674F-1946-412B-A744-B9E1115EC83C}" type="datetimeFigureOut">
               <a:rPr lang="en-GB" smtClean="0"/>
-              <a:t>26/03/2026</a:t>
+              <a:t>27/03/2026</a:t>
             </a:fld>
             <a:endParaRPr lang="en-GB"/>
           </a:p>
@@ -623,7 +623,7 @@
           <a:p>
             <a:fld id="{BD2B674F-1946-412B-A744-B9E1115EC83C}" type="datetimeFigureOut">
               <a:rPr lang="en-GB" smtClean="0"/>
-              <a:t>26/03/2026</a:t>
+              <a:t>27/03/2026</a:t>
             </a:fld>
             <a:endParaRPr lang="en-GB"/>
           </a:p>
@@ -803,7 +803,7 @@
           <a:p>
             <a:fld id="{BD2B674F-1946-412B-A744-B9E1115EC83C}" type="datetimeFigureOut">
               <a:rPr lang="en-GB" smtClean="0"/>
-              <a:t>26/03/2026</a:t>
+              <a:t>27/03/2026</a:t>
             </a:fld>
             <a:endParaRPr lang="en-GB"/>
           </a:p>
@@ -973,7 +973,7 @@
           <a:p>
             <a:fld id="{BD2B674F-1946-412B-A744-B9E1115EC83C}" type="datetimeFigureOut">
               <a:rPr lang="en-GB" smtClean="0"/>
-              <a:t>26/03/2026</a:t>
+              <a:t>27/03/2026</a:t>
             </a:fld>
             <a:endParaRPr lang="en-GB"/>
           </a:p>
@@ -1250,7 +1250,7 @@
           <a:p>
             <a:fld id="{BD2B674F-1946-412B-A744-B9E1115EC83C}" type="datetimeFigureOut">
               <a:rPr lang="en-GB" smtClean="0"/>
-              <a:t>26/03/2026</a:t>
+              <a:t>27/03/2026</a:t>
             </a:fld>
             <a:endParaRPr lang="en-GB"/>
           </a:p>
@@ -1644,7 +1644,7 @@
           <a:p>
             <a:fld id="{BD2B674F-1946-412B-A744-B9E1115EC83C}" type="datetimeFigureOut">
               <a:rPr lang="en-GB" smtClean="0"/>
-              <a:t>26/03/2026</a:t>
+              <a:t>27/03/2026</a:t>
             </a:fld>
             <a:endParaRPr lang="en-GB"/>
           </a:p>
@@ -2121,7 +2121,7 @@
           <a:p>
             <a:fld id="{BD2B674F-1946-412B-A744-B9E1115EC83C}" type="datetimeFigureOut">
               <a:rPr lang="en-GB" smtClean="0"/>
-              <a:t>26/03/2026</a:t>
+              <a:t>27/03/2026</a:t>
             </a:fld>
             <a:endParaRPr lang="en-GB"/>
           </a:p>
@@ -2239,7 +2239,7 @@
           <a:p>
             <a:fld id="{BD2B674F-1946-412B-A744-B9E1115EC83C}" type="datetimeFigureOut">
               <a:rPr lang="en-GB" smtClean="0"/>
-              <a:t>26/03/2026</a:t>
+              <a:t>27/03/2026</a:t>
             </a:fld>
             <a:endParaRPr lang="en-GB"/>
           </a:p>
@@ -2334,7 +2334,7 @@
           <a:p>
             <a:fld id="{BD2B674F-1946-412B-A744-B9E1115EC83C}" type="datetimeFigureOut">
               <a:rPr lang="en-GB" smtClean="0"/>
-              <a:t>26/03/2026</a:t>
+              <a:t>27/03/2026</a:t>
             </a:fld>
             <a:endParaRPr lang="en-GB"/>
           </a:p>
@@ -2680,7 +2680,7 @@
           <a:p>
             <a:fld id="{BD2B674F-1946-412B-A744-B9E1115EC83C}" type="datetimeFigureOut">
               <a:rPr lang="en-GB" smtClean="0"/>
-              <a:t>26/03/2026</a:t>
+              <a:t>27/03/2026</a:t>
             </a:fld>
             <a:endParaRPr lang="en-GB"/>
           </a:p>
@@ -3068,7 +3068,7 @@
           <a:p>
             <a:fld id="{BD2B674F-1946-412B-A744-B9E1115EC83C}" type="datetimeFigureOut">
               <a:rPr lang="en-GB" smtClean="0"/>
-              <a:t>26/03/2026</a:t>
+              <a:t>27/03/2026</a:t>
             </a:fld>
             <a:endParaRPr lang="en-GB"/>
           </a:p>
@@ -3346,7 +3346,7 @@
           <a:p>
             <a:fld id="{BD2B674F-1946-412B-A744-B9E1115EC83C}" type="datetimeFigureOut">
               <a:rPr lang="en-GB" smtClean="0"/>
-              <a:t>26/03/2026</a:t>
+              <a:t>27/03/2026</a:t>
             </a:fld>
             <a:endParaRPr lang="en-GB"/>
           </a:p>
@@ -3844,6 +3844,14 @@
 <file path=ppt/slides/slide1.xml><?xml version="1.0" encoding="utf-8"?>
 <p:sld xmlns:a="http://schemas.openxmlformats.org/drawingml/2006/main" xmlns:r="http://schemas.openxmlformats.org/officeDocument/2006/relationships" xmlns:p="http://schemas.openxmlformats.org/presentationml/2006/main">
   <p:cSld>
+    <p:bg>
+      <p:bgPr>
+        <a:solidFill>
+          <a:srgbClr val="FFF0E0"/>
+        </a:solidFill>
+        <a:effectLst/>
+      </p:bgPr>
+    </p:bg>
     <p:spTree>
       <p:nvGrpSpPr>
         <p:cNvPr id="1" name=""/>
@@ -4058,6 +4066,14 @@
 <file path=ppt/slides/slide10.xml><?xml version="1.0" encoding="utf-8"?>
 <p:sld xmlns:a="http://schemas.openxmlformats.org/drawingml/2006/main" xmlns:r="http://schemas.openxmlformats.org/officeDocument/2006/relationships" xmlns:p="http://schemas.openxmlformats.org/presentationml/2006/main">
   <p:cSld>
+    <p:bg>
+      <p:bgPr>
+        <a:solidFill>
+          <a:srgbClr val="FFF0E0"/>
+        </a:solidFill>
+        <a:effectLst/>
+      </p:bgPr>
+    </p:bg>
     <p:spTree>
       <p:nvGrpSpPr>
         <p:cNvPr id="1" name=""/>
@@ -4367,13 +4383,13 @@
                         <p:par>
                           <p:cTn id="8" fill="hold">
                             <p:stCondLst>
-                              <p:cond delay="500"/>
+                              <p:cond delay="700"/>
                             </p:stCondLst>
                             <p:childTnLst>
                               <p:par>
-                                <p:cTn id="9" presetID="2" presetClass="entr" presetSubtype="2" fill="hold" nodeType="afterEffect">
+                                <p:cTn id="9" presetID="42" presetClass="entr" presetSubtype="0" fill="hold" grpId="0" nodeType="afterEffect">
                                   <p:stCondLst>
-                                    <p:cond delay="200"/>
+                                    <p:cond delay="0"/>
                                   </p:stCondLst>
                                   <p:childTnLst>
                                     <p:set>
@@ -4384,7 +4400,11 @@
                                           </p:stCondLst>
                                         </p:cTn>
                                         <p:tgtEl>
-                                          <p:spTgt spid="5"/>
+                                          <p:spTgt spid="3">
+                                            <p:txEl>
+                                              <p:pRg st="0" end="0"/>
+                                            </p:txEl>
+                                          </p:spTgt>
                                         </p:tgtEl>
                                         <p:attrNameLst>
                                           <p:attrName>style.visibility</p:attrName>
@@ -4394,11 +4414,27 @@
                                         <p:strVal val="visible"/>
                                       </p:to>
                                     </p:set>
+                                    <p:animEffect transition="in" filter="fade">
+                                      <p:cBhvr>
+                                        <p:cTn id="11" dur="500"/>
+                                        <p:tgtEl>
+                                          <p:spTgt spid="3">
+                                            <p:txEl>
+                                              <p:pRg st="0" end="0"/>
+                                            </p:txEl>
+                                          </p:spTgt>
+                                        </p:tgtEl>
+                                      </p:cBhvr>
+                                    </p:animEffect>
                                     <p:anim calcmode="lin" valueType="num">
-                                      <p:cBhvr additive="base">
-                                        <p:cTn id="11" dur="500" fill="hold"/>
-                                        <p:tgtEl>
-                                          <p:spTgt spid="5"/>
+                                      <p:cBhvr>
+                                        <p:cTn id="12" dur="500" fill="hold"/>
+                                        <p:tgtEl>
+                                          <p:spTgt spid="3">
+                                            <p:txEl>
+                                              <p:pRg st="0" end="0"/>
+                                            </p:txEl>
+                                          </p:spTgt>
                                         </p:tgtEl>
                                         <p:attrNameLst>
                                           <p:attrName>ppt_x</p:attrName>
@@ -4407,7 +4443,7 @@
                                       <p:tavLst>
                                         <p:tav tm="0">
                                           <p:val>
-                                            <p:strVal val="1+#ppt_w/2"/>
+                                            <p:strVal val="#ppt_x"/>
                                           </p:val>
                                         </p:tav>
                                         <p:tav tm="100000">
@@ -4418,10 +4454,14 @@
                                       </p:tavLst>
                                     </p:anim>
                                     <p:anim calcmode="lin" valueType="num">
-                                      <p:cBhvr additive="base">
-                                        <p:cTn id="12" dur="500" fill="hold"/>
-                                        <p:tgtEl>
-                                          <p:spTgt spid="5"/>
+                                      <p:cBhvr>
+                                        <p:cTn id="13" dur="500" fill="hold"/>
+                                        <p:tgtEl>
+                                          <p:spTgt spid="3">
+                                            <p:txEl>
+                                              <p:pRg st="0" end="0"/>
+                                            </p:txEl>
+                                          </p:spTgt>
                                         </p:tgtEl>
                                         <p:attrNameLst>
                                           <p:attrName>ppt_y</p:attrName>
@@ -4430,80 +4470,7 @@
                                       <p:tavLst>
                                         <p:tav tm="0">
                                           <p:val>
-                                            <p:strVal val="#ppt_y"/>
-                                          </p:val>
-                                        </p:tav>
-                                        <p:tav tm="100000">
-                                          <p:val>
-                                            <p:strVal val="#ppt_y"/>
-                                          </p:val>
-                                        </p:tav>
-                                      </p:tavLst>
-                                    </p:anim>
-                                  </p:childTnLst>
-                                </p:cTn>
-                              </p:par>
-                              <p:par>
-                                <p:cTn id="13" presetID="2" presetClass="entr" presetSubtype="4" fill="hold" nodeType="withEffect">
-                                  <p:stCondLst>
-                                    <p:cond delay="200"/>
-                                  </p:stCondLst>
-                                  <p:childTnLst>
-                                    <p:set>
-                                      <p:cBhvr>
-                                        <p:cTn id="14" dur="1" fill="hold">
-                                          <p:stCondLst>
-                                            <p:cond delay="0"/>
-                                          </p:stCondLst>
-                                        </p:cTn>
-                                        <p:tgtEl>
-                                          <p:spTgt spid="9"/>
-                                        </p:tgtEl>
-                                        <p:attrNameLst>
-                                          <p:attrName>style.visibility</p:attrName>
-                                        </p:attrNameLst>
-                                      </p:cBhvr>
-                                      <p:to>
-                                        <p:strVal val="visible"/>
-                                      </p:to>
-                                    </p:set>
-                                    <p:anim calcmode="lin" valueType="num">
-                                      <p:cBhvr additive="base">
-                                        <p:cTn id="15" dur="500" fill="hold"/>
-                                        <p:tgtEl>
-                                          <p:spTgt spid="9"/>
-                                        </p:tgtEl>
-                                        <p:attrNameLst>
-                                          <p:attrName>ppt_x</p:attrName>
-                                        </p:attrNameLst>
-                                      </p:cBhvr>
-                                      <p:tavLst>
-                                        <p:tav tm="0">
-                                          <p:val>
-                                            <p:strVal val="#ppt_x"/>
-                                          </p:val>
-                                        </p:tav>
-                                        <p:tav tm="100000">
-                                          <p:val>
-                                            <p:strVal val="#ppt_x"/>
-                                          </p:val>
-                                        </p:tav>
-                                      </p:tavLst>
-                                    </p:anim>
-                                    <p:anim calcmode="lin" valueType="num">
-                                      <p:cBhvr additive="base">
-                                        <p:cTn id="16" dur="500" fill="hold"/>
-                                        <p:tgtEl>
-                                          <p:spTgt spid="9"/>
-                                        </p:tgtEl>
-                                        <p:attrNameLst>
-                                          <p:attrName>ppt_y</p:attrName>
-                                        </p:attrNameLst>
-                                      </p:cBhvr>
-                                      <p:tavLst>
-                                        <p:tav tm="0">
-                                          <p:val>
-                                            <p:strVal val="1+#ppt_h/2"/>
+                                            <p:strVal val="#ppt_y+.1"/>
                                           </p:val>
                                         </p:tav>
                                         <p:tav tm="100000">
@@ -4520,20 +4487,20 @@
                           </p:cTn>
                         </p:par>
                         <p:par>
-                          <p:cTn id="17" fill="hold">
+                          <p:cTn id="14" fill="hold">
                             <p:stCondLst>
                               <p:cond delay="1200"/>
                             </p:stCondLst>
                             <p:childTnLst>
                               <p:par>
-                                <p:cTn id="18" presetID="42" presetClass="entr" presetSubtype="0" fill="hold" grpId="0" nodeType="afterEffect">
+                                <p:cTn id="15" presetID="42" presetClass="entr" presetSubtype="0" fill="hold" grpId="0" nodeType="afterEffect">
                                   <p:stCondLst>
                                     <p:cond delay="0"/>
                                   </p:stCondLst>
                                   <p:childTnLst>
                                     <p:set>
                                       <p:cBhvr>
-                                        <p:cTn id="19" dur="1" fill="hold">
+                                        <p:cTn id="16" dur="1" fill="hold">
                                           <p:stCondLst>
                                             <p:cond delay="0"/>
                                           </p:stCondLst>
@@ -4541,7 +4508,7 @@
                                         <p:tgtEl>
                                           <p:spTgt spid="3">
                                             <p:txEl>
-                                              <p:pRg st="0" end="0"/>
+                                              <p:pRg st="1" end="1"/>
                                             </p:txEl>
                                           </p:spTgt>
                                         </p:tgtEl>
@@ -4555,11 +4522,11 @@
                                     </p:set>
                                     <p:animEffect transition="in" filter="fade">
                                       <p:cBhvr>
-                                        <p:cTn id="20" dur="500"/>
-                                        <p:tgtEl>
-                                          <p:spTgt spid="3">
-                                            <p:txEl>
-                                              <p:pRg st="0" end="0"/>
+                                        <p:cTn id="17" dur="500"/>
+                                        <p:tgtEl>
+                                          <p:spTgt spid="3">
+                                            <p:txEl>
+                                              <p:pRg st="1" end="1"/>
                                             </p:txEl>
                                           </p:spTgt>
                                         </p:tgtEl>
@@ -4567,11 +4534,11 @@
                                     </p:animEffect>
                                     <p:anim calcmode="lin" valueType="num">
                                       <p:cBhvr>
-                                        <p:cTn id="21" dur="500" fill="hold"/>
-                                        <p:tgtEl>
-                                          <p:spTgt spid="3">
-                                            <p:txEl>
-                                              <p:pRg st="0" end="0"/>
+                                        <p:cTn id="18" dur="500" fill="hold"/>
+                                        <p:tgtEl>
+                                          <p:spTgt spid="3">
+                                            <p:txEl>
+                                              <p:pRg st="1" end="1"/>
                                             </p:txEl>
                                           </p:spTgt>
                                         </p:tgtEl>
@@ -4594,11 +4561,11 @@
                                     </p:anim>
                                     <p:anim calcmode="lin" valueType="num">
                                       <p:cBhvr>
-                                        <p:cTn id="22" dur="500" fill="hold"/>
-                                        <p:tgtEl>
-                                          <p:spTgt spid="3">
-                                            <p:txEl>
-                                              <p:pRg st="0" end="0"/>
+                                        <p:cTn id="19" dur="500" fill="hold"/>
+                                        <p:tgtEl>
+                                          <p:spTgt spid="3">
+                                            <p:txEl>
+                                              <p:pRg st="1" end="1"/>
                                             </p:txEl>
                                           </p:spTgt>
                                         </p:tgtEl>
@@ -4626,20 +4593,20 @@
                           </p:cTn>
                         </p:par>
                         <p:par>
-                          <p:cTn id="23" fill="hold">
+                          <p:cTn id="20" fill="hold">
                             <p:stCondLst>
                               <p:cond delay="1700"/>
                             </p:stCondLst>
                             <p:childTnLst>
                               <p:par>
-                                <p:cTn id="24" presetID="42" presetClass="entr" presetSubtype="0" fill="hold" grpId="0" nodeType="afterEffect">
+                                <p:cTn id="21" presetID="42" presetClass="entr" presetSubtype="0" fill="hold" grpId="0" nodeType="afterEffect">
                                   <p:stCondLst>
                                     <p:cond delay="0"/>
                                   </p:stCondLst>
                                   <p:childTnLst>
                                     <p:set>
                                       <p:cBhvr>
-                                        <p:cTn id="25" dur="1" fill="hold">
+                                        <p:cTn id="22" dur="1" fill="hold">
                                           <p:stCondLst>
                                             <p:cond delay="0"/>
                                           </p:stCondLst>
@@ -4647,7 +4614,7 @@
                                         <p:tgtEl>
                                           <p:spTgt spid="3">
                                             <p:txEl>
-                                              <p:pRg st="1" end="1"/>
+                                              <p:pRg st="2" end="2"/>
                                             </p:txEl>
                                           </p:spTgt>
                                         </p:tgtEl>
@@ -4661,11 +4628,11 @@
                                     </p:set>
                                     <p:animEffect transition="in" filter="fade">
                                       <p:cBhvr>
-                                        <p:cTn id="26" dur="500"/>
-                                        <p:tgtEl>
-                                          <p:spTgt spid="3">
-                                            <p:txEl>
-                                              <p:pRg st="1" end="1"/>
+                                        <p:cTn id="23" dur="500"/>
+                                        <p:tgtEl>
+                                          <p:spTgt spid="3">
+                                            <p:txEl>
+                                              <p:pRg st="2" end="2"/>
                                             </p:txEl>
                                           </p:spTgt>
                                         </p:tgtEl>
@@ -4673,11 +4640,11 @@
                                     </p:animEffect>
                                     <p:anim calcmode="lin" valueType="num">
                                       <p:cBhvr>
-                                        <p:cTn id="27" dur="500" fill="hold"/>
-                                        <p:tgtEl>
-                                          <p:spTgt spid="3">
-                                            <p:txEl>
-                                              <p:pRg st="1" end="1"/>
+                                        <p:cTn id="24" dur="500" fill="hold"/>
+                                        <p:tgtEl>
+                                          <p:spTgt spid="3">
+                                            <p:txEl>
+                                              <p:pRg st="2" end="2"/>
                                             </p:txEl>
                                           </p:spTgt>
                                         </p:tgtEl>
@@ -4700,11 +4667,11 @@
                                     </p:anim>
                                     <p:anim calcmode="lin" valueType="num">
                                       <p:cBhvr>
-                                        <p:cTn id="28" dur="500" fill="hold"/>
-                                        <p:tgtEl>
-                                          <p:spTgt spid="3">
-                                            <p:txEl>
-                                              <p:pRg st="1" end="1"/>
+                                        <p:cTn id="25" dur="500" fill="hold"/>
+                                        <p:tgtEl>
+                                          <p:spTgt spid="3">
+                                            <p:txEl>
+                                              <p:pRg st="2" end="2"/>
                                             </p:txEl>
                                           </p:spTgt>
                                         </p:tgtEl>
@@ -4732,20 +4699,20 @@
                           </p:cTn>
                         </p:par>
                         <p:par>
-                          <p:cTn id="29" fill="hold">
+                          <p:cTn id="26" fill="hold">
                             <p:stCondLst>
                               <p:cond delay="2200"/>
                             </p:stCondLst>
                             <p:childTnLst>
                               <p:par>
-                                <p:cTn id="30" presetID="42" presetClass="entr" presetSubtype="0" fill="hold" grpId="0" nodeType="afterEffect">
+                                <p:cTn id="27" presetID="42" presetClass="entr" presetSubtype="0" fill="hold" grpId="0" nodeType="afterEffect">
                                   <p:stCondLst>
                                     <p:cond delay="0"/>
                                   </p:stCondLst>
                                   <p:childTnLst>
                                     <p:set>
                                       <p:cBhvr>
-                                        <p:cTn id="31" dur="1" fill="hold">
+                                        <p:cTn id="28" dur="1" fill="hold">
                                           <p:stCondLst>
                                             <p:cond delay="0"/>
                                           </p:stCondLst>
@@ -4753,7 +4720,7 @@
                                         <p:tgtEl>
                                           <p:spTgt spid="3">
                                             <p:txEl>
-                                              <p:pRg st="2" end="2"/>
+                                              <p:pRg st="3" end="3"/>
                                             </p:txEl>
                                           </p:spTgt>
                                         </p:tgtEl>
@@ -4767,11 +4734,11 @@
                                     </p:set>
                                     <p:animEffect transition="in" filter="fade">
                                       <p:cBhvr>
-                                        <p:cTn id="32" dur="500"/>
-                                        <p:tgtEl>
-                                          <p:spTgt spid="3">
-                                            <p:txEl>
-                                              <p:pRg st="2" end="2"/>
+                                        <p:cTn id="29" dur="500"/>
+                                        <p:tgtEl>
+                                          <p:spTgt spid="3">
+                                            <p:txEl>
+                                              <p:pRg st="3" end="3"/>
                                             </p:txEl>
                                           </p:spTgt>
                                         </p:tgtEl>
@@ -4779,11 +4746,11 @@
                                     </p:animEffect>
                                     <p:anim calcmode="lin" valueType="num">
                                       <p:cBhvr>
-                                        <p:cTn id="33" dur="500" fill="hold"/>
-                                        <p:tgtEl>
-                                          <p:spTgt spid="3">
-                                            <p:txEl>
-                                              <p:pRg st="2" end="2"/>
+                                        <p:cTn id="30" dur="500" fill="hold"/>
+                                        <p:tgtEl>
+                                          <p:spTgt spid="3">
+                                            <p:txEl>
+                                              <p:pRg st="3" end="3"/>
                                             </p:txEl>
                                           </p:spTgt>
                                         </p:tgtEl>
@@ -4806,11 +4773,11 @@
                                     </p:anim>
                                     <p:anim calcmode="lin" valueType="num">
                                       <p:cBhvr>
-                                        <p:cTn id="34" dur="500" fill="hold"/>
-                                        <p:tgtEl>
-                                          <p:spTgt spid="3">
-                                            <p:txEl>
-                                              <p:pRg st="2" end="2"/>
+                                        <p:cTn id="31" dur="500" fill="hold"/>
+                                        <p:tgtEl>
+                                          <p:spTgt spid="3">
+                                            <p:txEl>
+                                              <p:pRg st="3" end="3"/>
                                             </p:txEl>
                                           </p:spTgt>
                                         </p:tgtEl>
@@ -4838,30 +4805,26 @@
                           </p:cTn>
                         </p:par>
                         <p:par>
-                          <p:cTn id="35" fill="hold">
+                          <p:cTn id="32" fill="hold">
                             <p:stCondLst>
                               <p:cond delay="2700"/>
                             </p:stCondLst>
                             <p:childTnLst>
                               <p:par>
-                                <p:cTn id="36" presetID="42" presetClass="entr" presetSubtype="0" fill="hold" grpId="0" nodeType="afterEffect">
+                                <p:cTn id="33" presetID="2" presetClass="entr" presetSubtype="2" fill="hold" nodeType="afterEffect">
                                   <p:stCondLst>
                                     <p:cond delay="0"/>
                                   </p:stCondLst>
                                   <p:childTnLst>
                                     <p:set>
                                       <p:cBhvr>
-                                        <p:cTn id="37" dur="1" fill="hold">
+                                        <p:cTn id="34" dur="1" fill="hold">
                                           <p:stCondLst>
                                             <p:cond delay="0"/>
                                           </p:stCondLst>
                                         </p:cTn>
                                         <p:tgtEl>
-                                          <p:spTgt spid="3">
-                                            <p:txEl>
-                                              <p:pRg st="3" end="3"/>
-                                            </p:txEl>
-                                          </p:spTgt>
+                                          <p:spTgt spid="5"/>
                                         </p:tgtEl>
                                         <p:attrNameLst>
                                           <p:attrName>style.visibility</p:attrName>
@@ -4871,27 +4834,11 @@
                                         <p:strVal val="visible"/>
                                       </p:to>
                                     </p:set>
-                                    <p:animEffect transition="in" filter="fade">
-                                      <p:cBhvr>
-                                        <p:cTn id="38" dur="500"/>
-                                        <p:tgtEl>
-                                          <p:spTgt spid="3">
-                                            <p:txEl>
-                                              <p:pRg st="3" end="3"/>
-                                            </p:txEl>
-                                          </p:spTgt>
-                                        </p:tgtEl>
-                                      </p:cBhvr>
-                                    </p:animEffect>
                                     <p:anim calcmode="lin" valueType="num">
-                                      <p:cBhvr>
-                                        <p:cTn id="39" dur="500" fill="hold"/>
-                                        <p:tgtEl>
-                                          <p:spTgt spid="3">
-                                            <p:txEl>
-                                              <p:pRg st="3" end="3"/>
-                                            </p:txEl>
-                                          </p:spTgt>
+                                      <p:cBhvr additive="base">
+                                        <p:cTn id="35" dur="500" fill="hold"/>
+                                        <p:tgtEl>
+                                          <p:spTgt spid="5"/>
                                         </p:tgtEl>
                                         <p:attrNameLst>
                                           <p:attrName>ppt_x</p:attrName>
@@ -4900,7 +4847,7 @@
                                       <p:tavLst>
                                         <p:tav tm="0">
                                           <p:val>
-                                            <p:strVal val="#ppt_x"/>
+                                            <p:strVal val="1+#ppt_w/2"/>
                                           </p:val>
                                         </p:tav>
                                         <p:tav tm="100000">
@@ -4911,14 +4858,10 @@
                                       </p:tavLst>
                                     </p:anim>
                                     <p:anim calcmode="lin" valueType="num">
-                                      <p:cBhvr>
-                                        <p:cTn id="40" dur="500" fill="hold"/>
-                                        <p:tgtEl>
-                                          <p:spTgt spid="3">
-                                            <p:txEl>
-                                              <p:pRg st="3" end="3"/>
-                                            </p:txEl>
-                                          </p:spTgt>
+                                      <p:cBhvr additive="base">
+                                        <p:cTn id="36" dur="500" fill="hold"/>
+                                        <p:tgtEl>
+                                          <p:spTgt spid="5"/>
                                         </p:tgtEl>
                                         <p:attrNameLst>
                                           <p:attrName>ppt_y</p:attrName>
@@ -4927,7 +4870,80 @@
                                       <p:tavLst>
                                         <p:tav tm="0">
                                           <p:val>
-                                            <p:strVal val="#ppt_y+.1"/>
+                                            <p:strVal val="#ppt_y"/>
+                                          </p:val>
+                                        </p:tav>
+                                        <p:tav tm="100000">
+                                          <p:val>
+                                            <p:strVal val="#ppt_y"/>
+                                          </p:val>
+                                        </p:tav>
+                                      </p:tavLst>
+                                    </p:anim>
+                                  </p:childTnLst>
+                                </p:cTn>
+                              </p:par>
+                              <p:par>
+                                <p:cTn id="37" presetID="2" presetClass="entr" presetSubtype="4" fill="hold" nodeType="withEffect">
+                                  <p:stCondLst>
+                                    <p:cond delay="0"/>
+                                  </p:stCondLst>
+                                  <p:childTnLst>
+                                    <p:set>
+                                      <p:cBhvr>
+                                        <p:cTn id="38" dur="1" fill="hold">
+                                          <p:stCondLst>
+                                            <p:cond delay="0"/>
+                                          </p:stCondLst>
+                                        </p:cTn>
+                                        <p:tgtEl>
+                                          <p:spTgt spid="9"/>
+                                        </p:tgtEl>
+                                        <p:attrNameLst>
+                                          <p:attrName>style.visibility</p:attrName>
+                                        </p:attrNameLst>
+                                      </p:cBhvr>
+                                      <p:to>
+                                        <p:strVal val="visible"/>
+                                      </p:to>
+                                    </p:set>
+                                    <p:anim calcmode="lin" valueType="num">
+                                      <p:cBhvr additive="base">
+                                        <p:cTn id="39" dur="500" fill="hold"/>
+                                        <p:tgtEl>
+                                          <p:spTgt spid="9"/>
+                                        </p:tgtEl>
+                                        <p:attrNameLst>
+                                          <p:attrName>ppt_x</p:attrName>
+                                        </p:attrNameLst>
+                                      </p:cBhvr>
+                                      <p:tavLst>
+                                        <p:tav tm="0">
+                                          <p:val>
+                                            <p:strVal val="#ppt_x"/>
+                                          </p:val>
+                                        </p:tav>
+                                        <p:tav tm="100000">
+                                          <p:val>
+                                            <p:strVal val="#ppt_x"/>
+                                          </p:val>
+                                        </p:tav>
+                                      </p:tavLst>
+                                    </p:anim>
+                                    <p:anim calcmode="lin" valueType="num">
+                                      <p:cBhvr additive="base">
+                                        <p:cTn id="40" dur="500" fill="hold"/>
+                                        <p:tgtEl>
+                                          <p:spTgt spid="9"/>
+                                        </p:tgtEl>
+                                        <p:attrNameLst>
+                                          <p:attrName>ppt_y</p:attrName>
+                                        </p:attrNameLst>
+                                      </p:cBhvr>
+                                      <p:tavLst>
+                                        <p:tav tm="0">
+                                          <p:val>
+                                            <p:strVal val="1+#ppt_h/2"/>
                                           </p:val>
                                         </p:tav>
                                         <p:tav tm="100000">
@@ -4978,6 +4994,14 @@
 <file path=ppt/slides/slide11.xml><?xml version="1.0" encoding="utf-8"?>
 <p:sld xmlns:a="http://schemas.openxmlformats.org/drawingml/2006/main" xmlns:r="http://schemas.openxmlformats.org/officeDocument/2006/relationships" xmlns:p="http://schemas.openxmlformats.org/presentationml/2006/main">
   <p:cSld>
+    <p:bg>
+      <p:bgPr>
+        <a:solidFill>
+          <a:srgbClr val="FFF0E0"/>
+        </a:solidFill>
+        <a:effectLst/>
+      </p:bgPr>
+    </p:bg>
     <p:spTree>
       <p:nvGrpSpPr>
         <p:cNvPr id="1" name=""/>
@@ -5319,30 +5343,21 @@
                             </p:childTnLst>
                           </p:cTn>
                         </p:par>
-                      </p:childTnLst>
-                    </p:cTn>
-                  </p:par>
-                  <p:par>
-                    <p:cTn id="14" fill="hold">
-                      <p:stCondLst>
-                        <p:cond delay="indefinite"/>
-                      </p:stCondLst>
-                      <p:childTnLst>
                         <p:par>
-                          <p:cTn id="15" fill="hold">
+                          <p:cTn id="14" fill="hold">
                             <p:stCondLst>
-                              <p:cond delay="0"/>
+                              <p:cond delay="1200"/>
                             </p:stCondLst>
                             <p:childTnLst>
                               <p:par>
-                                <p:cTn id="16" presetID="42" presetClass="entr" presetSubtype="0" fill="hold" grpId="0" nodeType="clickEffect">
+                                <p:cTn id="15" presetID="42" presetClass="entr" presetSubtype="0" fill="hold" grpId="0" nodeType="afterEffect">
                                   <p:stCondLst>
                                     <p:cond delay="200"/>
                                   </p:stCondLst>
                                   <p:childTnLst>
                                     <p:set>
                                       <p:cBhvr>
-                                        <p:cTn id="17" dur="1" fill="hold">
+                                        <p:cTn id="16" dur="1" fill="hold">
                                           <p:stCondLst>
                                             <p:cond delay="0"/>
                                           </p:stCondLst>
@@ -5364,7 +5379,7 @@
                                     </p:set>
                                     <p:animEffect transition="in" filter="fade">
                                       <p:cBhvr>
-                                        <p:cTn id="18" dur="500"/>
+                                        <p:cTn id="17" dur="500"/>
                                         <p:tgtEl>
                                           <p:spTgt spid="3">
                                             <p:txEl>
@@ -5376,7 +5391,7 @@
                                     </p:animEffect>
                                     <p:anim calcmode="lin" valueType="num">
                                       <p:cBhvr>
-                                        <p:cTn id="19" dur="500" fill="hold"/>
+                                        <p:cTn id="18" dur="500" fill="hold"/>
                                         <p:tgtEl>
                                           <p:spTgt spid="3">
                                             <p:txEl>
@@ -5403,7 +5418,7 @@
                                     </p:anim>
                                     <p:anim calcmode="lin" valueType="num">
                                       <p:cBhvr>
-                                        <p:cTn id="20" dur="500" fill="hold"/>
+                                        <p:cTn id="19" dur="500" fill="hold"/>
                                         <p:tgtEl>
                                           <p:spTgt spid="3">
                                             <p:txEl>
@@ -5434,30 +5449,21 @@
                             </p:childTnLst>
                           </p:cTn>
                         </p:par>
-                      </p:childTnLst>
-                    </p:cTn>
-                  </p:par>
-                  <p:par>
-                    <p:cTn id="21" fill="hold">
-                      <p:stCondLst>
-                        <p:cond delay="indefinite"/>
-                      </p:stCondLst>
-                      <p:childTnLst>
                         <p:par>
-                          <p:cTn id="22" fill="hold">
+                          <p:cTn id="20" fill="hold">
                             <p:stCondLst>
-                              <p:cond delay="0"/>
+                              <p:cond delay="1900"/>
                             </p:stCondLst>
                             <p:childTnLst>
                               <p:par>
-                                <p:cTn id="23" presetID="42" presetClass="entr" presetSubtype="0" fill="hold" grpId="0" nodeType="clickEffect">
+                                <p:cTn id="21" presetID="42" presetClass="entr" presetSubtype="0" fill="hold" grpId="0" nodeType="afterEffect">
                                   <p:stCondLst>
                                     <p:cond delay="200"/>
                                   </p:stCondLst>
                                   <p:childTnLst>
                                     <p:set>
                                       <p:cBhvr>
-                                        <p:cTn id="24" dur="1" fill="hold">
+                                        <p:cTn id="22" dur="1" fill="hold">
                                           <p:stCondLst>
                                             <p:cond delay="0"/>
                                           </p:stCondLst>
@@ -5479,7 +5485,7 @@
                                     </p:set>
                                     <p:animEffect transition="in" filter="fade">
                                       <p:cBhvr>
-                                        <p:cTn id="25" dur="500"/>
+                                        <p:cTn id="23" dur="500"/>
                                         <p:tgtEl>
                                           <p:spTgt spid="3">
                                             <p:txEl>
@@ -5491,7 +5497,7 @@
                                     </p:animEffect>
                                     <p:anim calcmode="lin" valueType="num">
                                       <p:cBhvr>
-                                        <p:cTn id="26" dur="500" fill="hold"/>
+                                        <p:cTn id="24" dur="500" fill="hold"/>
                                         <p:tgtEl>
                                           <p:spTgt spid="3">
                                             <p:txEl>
@@ -5518,7 +5524,7 @@
                                     </p:anim>
                                     <p:anim calcmode="lin" valueType="num">
                                       <p:cBhvr>
-                                        <p:cTn id="27" dur="500" fill="hold"/>
+                                        <p:cTn id="25" dur="500" fill="hold"/>
                                         <p:tgtEl>
                                           <p:spTgt spid="3">
                                             <p:txEl>
@@ -5549,30 +5555,21 @@
                             </p:childTnLst>
                           </p:cTn>
                         </p:par>
-                      </p:childTnLst>
-                    </p:cTn>
-                  </p:par>
-                  <p:par>
-                    <p:cTn id="28" fill="hold">
-                      <p:stCondLst>
-                        <p:cond delay="indefinite"/>
-                      </p:stCondLst>
-                      <p:childTnLst>
                         <p:par>
-                          <p:cTn id="29" fill="hold">
+                          <p:cTn id="26" fill="hold">
                             <p:stCondLst>
-                              <p:cond delay="0"/>
+                              <p:cond delay="2600"/>
                             </p:stCondLst>
                             <p:childTnLst>
                               <p:par>
-                                <p:cTn id="30" presetID="42" presetClass="entr" presetSubtype="0" fill="hold" grpId="0" nodeType="clickEffect">
+                                <p:cTn id="27" presetID="42" presetClass="entr" presetSubtype="0" fill="hold" grpId="0" nodeType="afterEffect">
                                   <p:stCondLst>
                                     <p:cond delay="200"/>
                                   </p:stCondLst>
                                   <p:childTnLst>
                                     <p:set>
                                       <p:cBhvr>
-                                        <p:cTn id="31" dur="1" fill="hold">
+                                        <p:cTn id="28" dur="1" fill="hold">
                                           <p:stCondLst>
                                             <p:cond delay="0"/>
                                           </p:stCondLst>
@@ -5594,7 +5591,7 @@
                                     </p:set>
                                     <p:animEffect transition="in" filter="fade">
                                       <p:cBhvr>
-                                        <p:cTn id="32" dur="500"/>
+                                        <p:cTn id="29" dur="500"/>
                                         <p:tgtEl>
                                           <p:spTgt spid="3">
                                             <p:txEl>
@@ -5606,7 +5603,7 @@
                                     </p:animEffect>
                                     <p:anim calcmode="lin" valueType="num">
                                       <p:cBhvr>
-                                        <p:cTn id="33" dur="500" fill="hold"/>
+                                        <p:cTn id="30" dur="500" fill="hold"/>
                                         <p:tgtEl>
                                           <p:spTgt spid="3">
                                             <p:txEl>
@@ -5633,7 +5630,7 @@
                                     </p:anim>
                                     <p:anim calcmode="lin" valueType="num">
                                       <p:cBhvr>
-                                        <p:cTn id="34" dur="500" fill="hold"/>
+                                        <p:cTn id="31" dur="500" fill="hold"/>
                                         <p:tgtEl>
                                           <p:spTgt spid="3">
                                             <p:txEl>
@@ -5664,30 +5661,21 @@
                             </p:childTnLst>
                           </p:cTn>
                         </p:par>
-                      </p:childTnLst>
-                    </p:cTn>
-                  </p:par>
-                  <p:par>
-                    <p:cTn id="35" fill="hold">
-                      <p:stCondLst>
-                        <p:cond delay="indefinite"/>
-                      </p:stCondLst>
-                      <p:childTnLst>
                         <p:par>
-                          <p:cTn id="36" fill="hold">
+                          <p:cTn id="32" fill="hold">
                             <p:stCondLst>
-                              <p:cond delay="0"/>
+                              <p:cond delay="3300"/>
                             </p:stCondLst>
                             <p:childTnLst>
                               <p:par>
-                                <p:cTn id="37" presetID="42" presetClass="entr" presetSubtype="0" fill="hold" grpId="0" nodeType="clickEffect">
+                                <p:cTn id="33" presetID="42" presetClass="entr" presetSubtype="0" fill="hold" grpId="0" nodeType="afterEffect">
                                   <p:stCondLst>
                                     <p:cond delay="200"/>
                                   </p:stCondLst>
                                   <p:childTnLst>
                                     <p:set>
                                       <p:cBhvr>
-                                        <p:cTn id="38" dur="1" fill="hold">
+                                        <p:cTn id="34" dur="1" fill="hold">
                                           <p:stCondLst>
                                             <p:cond delay="0"/>
                                           </p:stCondLst>
@@ -5709,7 +5697,7 @@
                                     </p:set>
                                     <p:animEffect transition="in" filter="fade">
                                       <p:cBhvr>
-                                        <p:cTn id="39" dur="500"/>
+                                        <p:cTn id="35" dur="500"/>
                                         <p:tgtEl>
                                           <p:spTgt spid="3">
                                             <p:txEl>
@@ -5721,7 +5709,7 @@
                                     </p:animEffect>
                                     <p:anim calcmode="lin" valueType="num">
                                       <p:cBhvr>
-                                        <p:cTn id="40" dur="500" fill="hold"/>
+                                        <p:cTn id="36" dur="500" fill="hold"/>
                                         <p:tgtEl>
                                           <p:spTgt spid="3">
                                             <p:txEl>
@@ -5748,7 +5736,7 @@
                                     </p:anim>
                                     <p:anim calcmode="lin" valueType="num">
                                       <p:cBhvr>
-                                        <p:cTn id="41" dur="500" fill="hold"/>
+                                        <p:cTn id="37" dur="500" fill="hold"/>
                                         <p:tgtEl>
                                           <p:spTgt spid="3">
                                             <p:txEl>
@@ -5779,30 +5767,21 @@
                             </p:childTnLst>
                           </p:cTn>
                         </p:par>
-                      </p:childTnLst>
-                    </p:cTn>
-                  </p:par>
-                  <p:par>
-                    <p:cTn id="42" fill="hold">
-                      <p:stCondLst>
-                        <p:cond delay="indefinite"/>
-                      </p:stCondLst>
-                      <p:childTnLst>
                         <p:par>
-                          <p:cTn id="43" fill="hold">
+                          <p:cTn id="38" fill="hold">
                             <p:stCondLst>
-                              <p:cond delay="0"/>
+                              <p:cond delay="4000"/>
                             </p:stCondLst>
                             <p:childTnLst>
                               <p:par>
-                                <p:cTn id="44" presetID="42" presetClass="entr" presetSubtype="0" fill="hold" grpId="0" nodeType="clickEffect">
+                                <p:cTn id="39" presetID="42" presetClass="entr" presetSubtype="0" fill="hold" grpId="0" nodeType="afterEffect">
                                   <p:stCondLst>
                                     <p:cond delay="200"/>
                                   </p:stCondLst>
                                   <p:childTnLst>
                                     <p:set>
                                       <p:cBhvr>
-                                        <p:cTn id="45" dur="1" fill="hold">
+                                        <p:cTn id="40" dur="1" fill="hold">
                                           <p:stCondLst>
                                             <p:cond delay="0"/>
                                           </p:stCondLst>
@@ -5824,7 +5803,7 @@
                                     </p:set>
                                     <p:animEffect transition="in" filter="fade">
                                       <p:cBhvr>
-                                        <p:cTn id="46" dur="500"/>
+                                        <p:cTn id="41" dur="500"/>
                                         <p:tgtEl>
                                           <p:spTgt spid="3">
                                             <p:txEl>
@@ -5836,7 +5815,7 @@
                                     </p:animEffect>
                                     <p:anim calcmode="lin" valueType="num">
                                       <p:cBhvr>
-                                        <p:cTn id="47" dur="500" fill="hold"/>
+                                        <p:cTn id="42" dur="500" fill="hold"/>
                                         <p:tgtEl>
                                           <p:spTgt spid="3">
                                             <p:txEl>
@@ -5863,7 +5842,7 @@
                                     </p:anim>
                                     <p:anim calcmode="lin" valueType="num">
                                       <p:cBhvr>
-                                        <p:cTn id="48" dur="500" fill="hold"/>
+                                        <p:cTn id="43" dur="500" fill="hold"/>
                                         <p:tgtEl>
                                           <p:spTgt spid="3">
                                             <p:txEl>
@@ -5920,7 +5899,7 @@
     </p:tnLst>
     <p:bldLst>
       <p:bldP spid="2" grpId="0"/>
-      <p:bldP spid="3" grpId="0" build="p"/>
+      <p:bldP spid="3" grpId="0" uiExpand="1" build="p"/>
     </p:bldLst>
   </p:timing>
 </p:sld>
@@ -5929,6 +5908,14 @@
 <file path=ppt/slides/slide12.xml><?xml version="1.0" encoding="utf-8"?>
 <p:sld xmlns:a="http://schemas.openxmlformats.org/drawingml/2006/main" xmlns:r="http://schemas.openxmlformats.org/officeDocument/2006/relationships" xmlns:p="http://schemas.openxmlformats.org/presentationml/2006/main">
   <p:cSld>
+    <p:bg>
+      <p:bgPr>
+        <a:solidFill>
+          <a:srgbClr val="FFF0E0"/>
+        </a:solidFill>
+        <a:effectLst/>
+      </p:bgPr>
+    </p:bg>
     <p:spTree>
       <p:nvGrpSpPr>
         <p:cNvPr id="1" name=""/>
@@ -6093,6 +6080,14 @@
 <file path=ppt/slides/slide13.xml><?xml version="1.0" encoding="utf-8"?>
 <p:sld xmlns:a="http://schemas.openxmlformats.org/drawingml/2006/main" xmlns:r="http://schemas.openxmlformats.org/officeDocument/2006/relationships" xmlns:p="http://schemas.openxmlformats.org/presentationml/2006/main">
   <p:cSld>
+    <p:bg>
+      <p:bgPr>
+        <a:solidFill>
+          <a:srgbClr val="FFF0E0"/>
+        </a:solidFill>
+        <a:effectLst/>
+      </p:bgPr>
+    </p:bg>
     <p:spTree>
       <p:nvGrpSpPr>
         <p:cNvPr id="1" name=""/>
@@ -6123,12 +6118,71 @@
             <p:ph idx="1"/>
           </p:nvPr>
         </p:nvSpPr>
-        <p:spPr/>
+        <p:spPr>
+          <a:xfrm>
+            <a:off x="1371600" y="2286000"/>
+            <a:ext cx="9601200" cy="2057400"/>
+          </a:xfrm>
+        </p:spPr>
         <p:txBody>
-          <a:bodyPr/>
+          <a:bodyPr>
+            <a:normAutofit/>
+          </a:bodyPr>
           <a:lstStyle/>
           <a:p>
-            <a:endParaRPr lang="hu-HU" dirty="0"/>
+            <a:r>
+              <a:rPr lang="hu-HU" sz="1800" dirty="0" err="1"/>
+              <a:t>Vue</a:t>
+            </a:r>
+            <a:r>
+              <a:rPr lang="hu-HU" sz="1800" dirty="0"/>
+              <a:t> </a:t>
+            </a:r>
+            <a:r>
+              <a:rPr lang="hu-HU" sz="1800" dirty="0" err="1"/>
+              <a:t>logo</a:t>
+            </a:r>
+            <a:r>
+              <a:rPr lang="hu-HU" sz="1800" dirty="0"/>
+              <a:t>: </a:t>
+            </a:r>
+            <a:r>
+              <a:rPr lang="hu-HU" sz="1800" dirty="0">
+                <a:hlinkClick r:id="rId2"/>
+              </a:rPr>
+              <a:t>https://www.svgrepo.com/svg/452130/vue</a:t>
+            </a:r>
+            <a:endParaRPr lang="hu-HU" sz="1800" dirty="0"/>
+          </a:p>
+          <a:p>
+            <a:r>
+              <a:rPr lang="hu-HU" sz="1800" dirty="0"/>
+              <a:t>Laravel </a:t>
+            </a:r>
+            <a:r>
+              <a:rPr lang="hu-HU" sz="1800" dirty="0" err="1"/>
+              <a:t>logo</a:t>
+            </a:r>
+            <a:r>
+              <a:rPr lang="hu-HU" sz="1800" dirty="0"/>
+              <a:t>: </a:t>
+            </a:r>
+            <a:r>
+              <a:rPr lang="hu-HU" sz="1800" dirty="0">
+                <a:hlinkClick r:id="rId3"/>
+              </a:rPr>
+              <a:t>https://www.logo.wine/logo/Laravel</a:t>
+            </a:r>
+            <a:endParaRPr lang="hu-HU" sz="1800" dirty="0"/>
+          </a:p>
+          <a:p>
+            <a:pPr marL="0" indent="0">
+              <a:buNone/>
+            </a:pPr>
+            <a:endParaRPr lang="hu-HU" sz="1800" dirty="0"/>
+          </a:p>
+          <a:p>
+            <a:endParaRPr lang="hu-HU" sz="1800" dirty="0"/>
           </a:p>
         </p:txBody>
       </p:sp>
@@ -6279,6 +6333,14 @@
 <file path=ppt/slides/slide2.xml><?xml version="1.0" encoding="utf-8"?>
 <p:sld xmlns:a="http://schemas.openxmlformats.org/drawingml/2006/main" xmlns:r="http://schemas.openxmlformats.org/officeDocument/2006/relationships" xmlns:p="http://schemas.openxmlformats.org/presentationml/2006/main">
   <p:cSld>
+    <p:bg>
+      <p:bgPr>
+        <a:solidFill>
+          <a:srgbClr val="FFF0E0"/>
+        </a:solidFill>
+        <a:effectLst/>
+      </p:bgPr>
+    </p:bg>
     <p:spTree>
       <p:nvGrpSpPr>
         <p:cNvPr id="1" name=""/>
@@ -6365,25 +6427,8 @@
                 <a:latin typeface="Times New Roman" panose="02020603050405020304" pitchFamily="18" charset="0"/>
                 <a:cs typeface="Times New Roman" panose="02020603050405020304" pitchFamily="18" charset="0"/>
               </a:rPr>
-              <a:t>Webáruház egy kreatív hobbibolt </a:t>
-            </a:r>
-            <a:r>
-              <a:rPr lang="hu-HU" dirty="0" smtClean="0">
-                <a:solidFill>
-                  <a:schemeClr val="tx1"/>
-                </a:solidFill>
-                <a:latin typeface="Times New Roman" panose="02020603050405020304" pitchFamily="18" charset="0"/>
-                <a:cs typeface="Times New Roman" panose="02020603050405020304" pitchFamily="18" charset="0"/>
-              </a:rPr>
-              <a:t>számára</a:t>
-            </a:r>
-            <a:endParaRPr lang="hu-HU" dirty="0">
-              <a:solidFill>
-                <a:schemeClr val="tx1"/>
-              </a:solidFill>
-              <a:latin typeface="Times New Roman" panose="02020603050405020304" pitchFamily="18" charset="0"/>
-              <a:cs typeface="Times New Roman" panose="02020603050405020304" pitchFamily="18" charset="0"/>
-            </a:endParaRPr>
+              <a:t>Webáruház egy kreatív hobbibolt számára</a:t>
+            </a:r>
           </a:p>
           <a:p>
             <a:pPr>
@@ -6446,31 +6491,20 @@
                 <a:latin typeface="Times New Roman" panose="02020603050405020304" pitchFamily="18" charset="0"/>
                 <a:cs typeface="Times New Roman" panose="02020603050405020304" pitchFamily="18" charset="0"/>
               </a:rPr>
-              <a:t>Interaktív felület létrehozása horgoláshoz és </a:t>
-            </a:r>
-            <a:r>
-              <a:rPr lang="hu-HU" i="0" dirty="0" smtClean="0">
-                <a:solidFill>
-                  <a:schemeClr val="tx1"/>
-                </a:solidFill>
-                <a:latin typeface="Times New Roman" panose="02020603050405020304" pitchFamily="18" charset="0"/>
-                <a:cs typeface="Times New Roman" panose="02020603050405020304" pitchFamily="18" charset="0"/>
-              </a:rPr>
-              <a:t>kötéshez</a:t>
-            </a:r>
-            <a:endParaRPr lang="hu-HU" i="0" dirty="0">
-              <a:solidFill>
-                <a:schemeClr val="tx1"/>
-              </a:solidFill>
-              <a:latin typeface="Times New Roman" panose="02020603050405020304" pitchFamily="18" charset="0"/>
-              <a:cs typeface="Times New Roman" panose="02020603050405020304" pitchFamily="18" charset="0"/>
-            </a:endParaRPr>
+              <a:t>Interaktív felület létrehozása horgoláshoz és kötéshez</a:t>
+            </a:r>
           </a:p>
         </p:txBody>
       </p:sp>
       <p:pic>
         <p:nvPicPr>
-          <p:cNvPr id="3" name="Kép 2"/>
+          <p:cNvPr id="8" name="Kép 7">
+            <a:extLst>
+              <a:ext uri="{FF2B5EF4-FFF2-40B4-BE49-F238E27FC236}">
+                <a16:creationId xmlns:a16="http://schemas.microsoft.com/office/drawing/2014/main" id="{6A36C547-47DA-446B-B8C6-9CED0751F742}"/>
+              </a:ext>
+            </a:extLst>
+          </p:cNvPr>
           <p:cNvPicPr>
             <a:picLocks noChangeAspect="1"/>
           </p:cNvPicPr>
@@ -6484,8 +6518,8 @@
         </p:blipFill>
         <p:spPr>
           <a:xfrm>
-            <a:off x="7887855" y="4858853"/>
-            <a:ext cx="3084945" cy="871583"/>
+            <a:off x="8309587" y="5065258"/>
+            <a:ext cx="2663213" cy="850749"/>
           </a:xfrm>
           <a:prstGeom prst="rect">
             <a:avLst/>
@@ -6566,6 +6600,618 @@
                             </p:childTnLst>
                           </p:cTn>
                         </p:par>
+                        <p:par>
+                          <p:cTn id="8" fill="hold">
+                            <p:stCondLst>
+                              <p:cond delay="500"/>
+                            </p:stCondLst>
+                            <p:childTnLst>
+                              <p:par>
+                                <p:cTn id="9" presetID="42" presetClass="entr" presetSubtype="0" fill="hold" nodeType="afterEffect">
+                                  <p:stCondLst>
+                                    <p:cond delay="200"/>
+                                  </p:stCondLst>
+                                  <p:childTnLst>
+                                    <p:set>
+                                      <p:cBhvr>
+                                        <p:cTn id="10" dur="1" fill="hold">
+                                          <p:stCondLst>
+                                            <p:cond delay="0"/>
+                                          </p:stCondLst>
+                                        </p:cTn>
+                                        <p:tgtEl>
+                                          <p:spTgt spid="4">
+                                            <p:txEl>
+                                              <p:pRg st="0" end="0"/>
+                                            </p:txEl>
+                                          </p:spTgt>
+                                        </p:tgtEl>
+                                        <p:attrNameLst>
+                                          <p:attrName>style.visibility</p:attrName>
+                                        </p:attrNameLst>
+                                      </p:cBhvr>
+                                      <p:to>
+                                        <p:strVal val="visible"/>
+                                      </p:to>
+                                    </p:set>
+                                    <p:animEffect transition="in" filter="fade">
+                                      <p:cBhvr>
+                                        <p:cTn id="11" dur="500"/>
+                                        <p:tgtEl>
+                                          <p:spTgt spid="4">
+                                            <p:txEl>
+                                              <p:pRg st="0" end="0"/>
+                                            </p:txEl>
+                                          </p:spTgt>
+                                        </p:tgtEl>
+                                      </p:cBhvr>
+                                    </p:animEffect>
+                                    <p:anim calcmode="lin" valueType="num">
+                                      <p:cBhvr>
+                                        <p:cTn id="12" dur="500" fill="hold"/>
+                                        <p:tgtEl>
+                                          <p:spTgt spid="4">
+                                            <p:txEl>
+                                              <p:pRg st="0" end="0"/>
+                                            </p:txEl>
+                                          </p:spTgt>
+                                        </p:tgtEl>
+                                        <p:attrNameLst>
+                                          <p:attrName>ppt_x</p:attrName>
+                                        </p:attrNameLst>
+                                      </p:cBhvr>
+                                      <p:tavLst>
+                                        <p:tav tm="0">
+                                          <p:val>
+                                            <p:strVal val="#ppt_x"/>
+                                          </p:val>
+                                        </p:tav>
+                                        <p:tav tm="100000">
+                                          <p:val>
+                                            <p:strVal val="#ppt_x"/>
+                                          </p:val>
+                                        </p:tav>
+                                      </p:tavLst>
+                                    </p:anim>
+                                    <p:anim calcmode="lin" valueType="num">
+                                      <p:cBhvr>
+                                        <p:cTn id="13" dur="500" fill="hold"/>
+                                        <p:tgtEl>
+                                          <p:spTgt spid="4">
+                                            <p:txEl>
+                                              <p:pRg st="0" end="0"/>
+                                            </p:txEl>
+                                          </p:spTgt>
+                                        </p:tgtEl>
+                                        <p:attrNameLst>
+                                          <p:attrName>ppt_y</p:attrName>
+                                        </p:attrNameLst>
+                                      </p:cBhvr>
+                                      <p:tavLst>
+                                        <p:tav tm="0">
+                                          <p:val>
+                                            <p:strVal val="#ppt_y+.1"/>
+                                          </p:val>
+                                        </p:tav>
+                                        <p:tav tm="100000">
+                                          <p:val>
+                                            <p:strVal val="#ppt_y"/>
+                                          </p:val>
+                                        </p:tav>
+                                      </p:tavLst>
+                                    </p:anim>
+                                  </p:childTnLst>
+                                </p:cTn>
+                              </p:par>
+                            </p:childTnLst>
+                          </p:cTn>
+                        </p:par>
+                        <p:par>
+                          <p:cTn id="14" fill="hold">
+                            <p:stCondLst>
+                              <p:cond delay="1200"/>
+                            </p:stCondLst>
+                            <p:childTnLst>
+                              <p:par>
+                                <p:cTn id="15" presetID="42" presetClass="entr" presetSubtype="0" fill="hold" nodeType="afterEffect">
+                                  <p:stCondLst>
+                                    <p:cond delay="200"/>
+                                  </p:stCondLst>
+                                  <p:childTnLst>
+                                    <p:set>
+                                      <p:cBhvr>
+                                        <p:cTn id="16" dur="1" fill="hold">
+                                          <p:stCondLst>
+                                            <p:cond delay="0"/>
+                                          </p:stCondLst>
+                                        </p:cTn>
+                                        <p:tgtEl>
+                                          <p:spTgt spid="4">
+                                            <p:txEl>
+                                              <p:pRg st="1" end="1"/>
+                                            </p:txEl>
+                                          </p:spTgt>
+                                        </p:tgtEl>
+                                        <p:attrNameLst>
+                                          <p:attrName>style.visibility</p:attrName>
+                                        </p:attrNameLst>
+                                      </p:cBhvr>
+                                      <p:to>
+                                        <p:strVal val="visible"/>
+                                      </p:to>
+                                    </p:set>
+                                    <p:animEffect transition="in" filter="fade">
+                                      <p:cBhvr>
+                                        <p:cTn id="17" dur="500"/>
+                                        <p:tgtEl>
+                                          <p:spTgt spid="4">
+                                            <p:txEl>
+                                              <p:pRg st="1" end="1"/>
+                                            </p:txEl>
+                                          </p:spTgt>
+                                        </p:tgtEl>
+                                      </p:cBhvr>
+                                    </p:animEffect>
+                                    <p:anim calcmode="lin" valueType="num">
+                                      <p:cBhvr>
+                                        <p:cTn id="18" dur="500" fill="hold"/>
+                                        <p:tgtEl>
+                                          <p:spTgt spid="4">
+                                            <p:txEl>
+                                              <p:pRg st="1" end="1"/>
+                                            </p:txEl>
+                                          </p:spTgt>
+                                        </p:tgtEl>
+                                        <p:attrNameLst>
+                                          <p:attrName>ppt_x</p:attrName>
+                                        </p:attrNameLst>
+                                      </p:cBhvr>
+                                      <p:tavLst>
+                                        <p:tav tm="0">
+                                          <p:val>
+                                            <p:strVal val="#ppt_x"/>
+                                          </p:val>
+                                        </p:tav>
+                                        <p:tav tm="100000">
+                                          <p:val>
+                                            <p:strVal val="#ppt_x"/>
+                                          </p:val>
+                                        </p:tav>
+                                      </p:tavLst>
+                                    </p:anim>
+                                    <p:anim calcmode="lin" valueType="num">
+                                      <p:cBhvr>
+                                        <p:cTn id="19" dur="500" fill="hold"/>
+                                        <p:tgtEl>
+                                          <p:spTgt spid="4">
+                                            <p:txEl>
+                                              <p:pRg st="1" end="1"/>
+                                            </p:txEl>
+                                          </p:spTgt>
+                                        </p:tgtEl>
+                                        <p:attrNameLst>
+                                          <p:attrName>ppt_y</p:attrName>
+                                        </p:attrNameLst>
+                                      </p:cBhvr>
+                                      <p:tavLst>
+                                        <p:tav tm="0">
+                                          <p:val>
+                                            <p:strVal val="#ppt_y+.1"/>
+                                          </p:val>
+                                        </p:tav>
+                                        <p:tav tm="100000">
+                                          <p:val>
+                                            <p:strVal val="#ppt_y"/>
+                                          </p:val>
+                                        </p:tav>
+                                      </p:tavLst>
+                                    </p:anim>
+                                  </p:childTnLst>
+                                </p:cTn>
+                              </p:par>
+                            </p:childTnLst>
+                          </p:cTn>
+                        </p:par>
+                        <p:par>
+                          <p:cTn id="20" fill="hold">
+                            <p:stCondLst>
+                              <p:cond delay="1900"/>
+                            </p:stCondLst>
+                            <p:childTnLst>
+                              <p:par>
+                                <p:cTn id="21" presetID="42" presetClass="entr" presetSubtype="0" fill="hold" nodeType="afterEffect">
+                                  <p:stCondLst>
+                                    <p:cond delay="200"/>
+                                  </p:stCondLst>
+                                  <p:childTnLst>
+                                    <p:set>
+                                      <p:cBhvr>
+                                        <p:cTn id="22" dur="1" fill="hold">
+                                          <p:stCondLst>
+                                            <p:cond delay="0"/>
+                                          </p:stCondLst>
+                                        </p:cTn>
+                                        <p:tgtEl>
+                                          <p:spTgt spid="4">
+                                            <p:txEl>
+                                              <p:pRg st="2" end="2"/>
+                                            </p:txEl>
+                                          </p:spTgt>
+                                        </p:tgtEl>
+                                        <p:attrNameLst>
+                                          <p:attrName>style.visibility</p:attrName>
+                                        </p:attrNameLst>
+                                      </p:cBhvr>
+                                      <p:to>
+                                        <p:strVal val="visible"/>
+                                      </p:to>
+                                    </p:set>
+                                    <p:animEffect transition="in" filter="fade">
+                                      <p:cBhvr>
+                                        <p:cTn id="23" dur="500"/>
+                                        <p:tgtEl>
+                                          <p:spTgt spid="4">
+                                            <p:txEl>
+                                              <p:pRg st="2" end="2"/>
+                                            </p:txEl>
+                                          </p:spTgt>
+                                        </p:tgtEl>
+                                      </p:cBhvr>
+                                    </p:animEffect>
+                                    <p:anim calcmode="lin" valueType="num">
+                                      <p:cBhvr>
+                                        <p:cTn id="24" dur="500" fill="hold"/>
+                                        <p:tgtEl>
+                                          <p:spTgt spid="4">
+                                            <p:txEl>
+                                              <p:pRg st="2" end="2"/>
+                                            </p:txEl>
+                                          </p:spTgt>
+                                        </p:tgtEl>
+                                        <p:attrNameLst>
+                                          <p:attrName>ppt_x</p:attrName>
+                                        </p:attrNameLst>
+                                      </p:cBhvr>
+                                      <p:tavLst>
+                                        <p:tav tm="0">
+                                          <p:val>
+                                            <p:strVal val="#ppt_x"/>
+                                          </p:val>
+                                        </p:tav>
+                                        <p:tav tm="100000">
+                                          <p:val>
+                                            <p:strVal val="#ppt_x"/>
+                                          </p:val>
+                                        </p:tav>
+                                      </p:tavLst>
+                                    </p:anim>
+                                    <p:anim calcmode="lin" valueType="num">
+                                      <p:cBhvr>
+                                        <p:cTn id="25" dur="500" fill="hold"/>
+                                        <p:tgtEl>
+                                          <p:spTgt spid="4">
+                                            <p:txEl>
+                                              <p:pRg st="2" end="2"/>
+                                            </p:txEl>
+                                          </p:spTgt>
+                                        </p:tgtEl>
+                                        <p:attrNameLst>
+                                          <p:attrName>ppt_y</p:attrName>
+                                        </p:attrNameLst>
+                                      </p:cBhvr>
+                                      <p:tavLst>
+                                        <p:tav tm="0">
+                                          <p:val>
+                                            <p:strVal val="#ppt_y+.1"/>
+                                          </p:val>
+                                        </p:tav>
+                                        <p:tav tm="100000">
+                                          <p:val>
+                                            <p:strVal val="#ppt_y"/>
+                                          </p:val>
+                                        </p:tav>
+                                      </p:tavLst>
+                                    </p:anim>
+                                  </p:childTnLst>
+                                </p:cTn>
+                              </p:par>
+                            </p:childTnLst>
+                          </p:cTn>
+                        </p:par>
+                        <p:par>
+                          <p:cTn id="26" fill="hold">
+                            <p:stCondLst>
+                              <p:cond delay="2600"/>
+                            </p:stCondLst>
+                            <p:childTnLst>
+                              <p:par>
+                                <p:cTn id="27" presetID="42" presetClass="entr" presetSubtype="0" fill="hold" nodeType="afterEffect">
+                                  <p:stCondLst>
+                                    <p:cond delay="200"/>
+                                  </p:stCondLst>
+                                  <p:childTnLst>
+                                    <p:set>
+                                      <p:cBhvr>
+                                        <p:cTn id="28" dur="1" fill="hold">
+                                          <p:stCondLst>
+                                            <p:cond delay="0"/>
+                                          </p:stCondLst>
+                                        </p:cTn>
+                                        <p:tgtEl>
+                                          <p:spTgt spid="4">
+                                            <p:txEl>
+                                              <p:pRg st="3" end="3"/>
+                                            </p:txEl>
+                                          </p:spTgt>
+                                        </p:tgtEl>
+                                        <p:attrNameLst>
+                                          <p:attrName>style.visibility</p:attrName>
+                                        </p:attrNameLst>
+                                      </p:cBhvr>
+                                      <p:to>
+                                        <p:strVal val="visible"/>
+                                      </p:to>
+                                    </p:set>
+                                    <p:animEffect transition="in" filter="fade">
+                                      <p:cBhvr>
+                                        <p:cTn id="29" dur="500"/>
+                                        <p:tgtEl>
+                                          <p:spTgt spid="4">
+                                            <p:txEl>
+                                              <p:pRg st="3" end="3"/>
+                                            </p:txEl>
+                                          </p:spTgt>
+                                        </p:tgtEl>
+                                      </p:cBhvr>
+                                    </p:animEffect>
+                                    <p:anim calcmode="lin" valueType="num">
+                                      <p:cBhvr>
+                                        <p:cTn id="30" dur="500" fill="hold"/>
+                                        <p:tgtEl>
+                                          <p:spTgt spid="4">
+                                            <p:txEl>
+                                              <p:pRg st="3" end="3"/>
+                                            </p:txEl>
+                                          </p:spTgt>
+                                        </p:tgtEl>
+                                        <p:attrNameLst>
+                                          <p:attrName>ppt_x</p:attrName>
+                                        </p:attrNameLst>
+                                      </p:cBhvr>
+                                      <p:tavLst>
+                                        <p:tav tm="0">
+                                          <p:val>
+                                            <p:strVal val="#ppt_x"/>
+                                          </p:val>
+                                        </p:tav>
+                                        <p:tav tm="100000">
+                                          <p:val>
+                                            <p:strVal val="#ppt_x"/>
+                                          </p:val>
+                                        </p:tav>
+                                      </p:tavLst>
+                                    </p:anim>
+                                    <p:anim calcmode="lin" valueType="num">
+                                      <p:cBhvr>
+                                        <p:cTn id="31" dur="500" fill="hold"/>
+                                        <p:tgtEl>
+                                          <p:spTgt spid="4">
+                                            <p:txEl>
+                                              <p:pRg st="3" end="3"/>
+                                            </p:txEl>
+                                          </p:spTgt>
+                                        </p:tgtEl>
+                                        <p:attrNameLst>
+                                          <p:attrName>ppt_y</p:attrName>
+                                        </p:attrNameLst>
+                                      </p:cBhvr>
+                                      <p:tavLst>
+                                        <p:tav tm="0">
+                                          <p:val>
+                                            <p:strVal val="#ppt_y+.1"/>
+                                          </p:val>
+                                        </p:tav>
+                                        <p:tav tm="100000">
+                                          <p:val>
+                                            <p:strVal val="#ppt_y"/>
+                                          </p:val>
+                                        </p:tav>
+                                      </p:tavLst>
+                                    </p:anim>
+                                  </p:childTnLst>
+                                </p:cTn>
+                              </p:par>
+                            </p:childTnLst>
+                          </p:cTn>
+                        </p:par>
+                        <p:par>
+                          <p:cTn id="32" fill="hold">
+                            <p:stCondLst>
+                              <p:cond delay="3300"/>
+                            </p:stCondLst>
+                            <p:childTnLst>
+                              <p:par>
+                                <p:cTn id="33" presetID="42" presetClass="entr" presetSubtype="0" fill="hold" nodeType="afterEffect">
+                                  <p:stCondLst>
+                                    <p:cond delay="200"/>
+                                  </p:stCondLst>
+                                  <p:childTnLst>
+                                    <p:set>
+                                      <p:cBhvr>
+                                        <p:cTn id="34" dur="1" fill="hold">
+                                          <p:stCondLst>
+                                            <p:cond delay="0"/>
+                                          </p:stCondLst>
+                                        </p:cTn>
+                                        <p:tgtEl>
+                                          <p:spTgt spid="4">
+                                            <p:txEl>
+                                              <p:pRg st="4" end="4"/>
+                                            </p:txEl>
+                                          </p:spTgt>
+                                        </p:tgtEl>
+                                        <p:attrNameLst>
+                                          <p:attrName>style.visibility</p:attrName>
+                                        </p:attrNameLst>
+                                      </p:cBhvr>
+                                      <p:to>
+                                        <p:strVal val="visible"/>
+                                      </p:to>
+                                    </p:set>
+                                    <p:animEffect transition="in" filter="fade">
+                                      <p:cBhvr>
+                                        <p:cTn id="35" dur="500"/>
+                                        <p:tgtEl>
+                                          <p:spTgt spid="4">
+                                            <p:txEl>
+                                              <p:pRg st="4" end="4"/>
+                                            </p:txEl>
+                                          </p:spTgt>
+                                        </p:tgtEl>
+                                      </p:cBhvr>
+                                    </p:animEffect>
+                                    <p:anim calcmode="lin" valueType="num">
+                                      <p:cBhvr>
+                                        <p:cTn id="36" dur="500" fill="hold"/>
+                                        <p:tgtEl>
+                                          <p:spTgt spid="4">
+                                            <p:txEl>
+                                              <p:pRg st="4" end="4"/>
+                                            </p:txEl>
+                                          </p:spTgt>
+                                        </p:tgtEl>
+                                        <p:attrNameLst>
+                                          <p:attrName>ppt_x</p:attrName>
+                                        </p:attrNameLst>
+                                      </p:cBhvr>
+                                      <p:tavLst>
+                                        <p:tav tm="0">
+                                          <p:val>
+                                            <p:strVal val="#ppt_x"/>
+                                          </p:val>
+                                        </p:tav>
+                                        <p:tav tm="100000">
+                                          <p:val>
+                                            <p:strVal val="#ppt_x"/>
+                                          </p:val>
+                                        </p:tav>
+                                      </p:tavLst>
+                                    </p:anim>
+                                    <p:anim calcmode="lin" valueType="num">
+                                      <p:cBhvr>
+                                        <p:cTn id="37" dur="500" fill="hold"/>
+                                        <p:tgtEl>
+                                          <p:spTgt spid="4">
+                                            <p:txEl>
+                                              <p:pRg st="4" end="4"/>
+                                            </p:txEl>
+                                          </p:spTgt>
+                                        </p:tgtEl>
+                                        <p:attrNameLst>
+                                          <p:attrName>ppt_y</p:attrName>
+                                        </p:attrNameLst>
+                                      </p:cBhvr>
+                                      <p:tavLst>
+                                        <p:tav tm="0">
+                                          <p:val>
+                                            <p:strVal val="#ppt_y+.1"/>
+                                          </p:val>
+                                        </p:tav>
+                                        <p:tav tm="100000">
+                                          <p:val>
+                                            <p:strVal val="#ppt_y"/>
+                                          </p:val>
+                                        </p:tav>
+                                      </p:tavLst>
+                                    </p:anim>
+                                  </p:childTnLst>
+                                </p:cTn>
+                              </p:par>
+                            </p:childTnLst>
+                          </p:cTn>
+                        </p:par>
+                        <p:par>
+                          <p:cTn id="38" fill="hold">
+                            <p:stCondLst>
+                              <p:cond delay="4000"/>
+                            </p:stCondLst>
+                            <p:childTnLst>
+                              <p:par>
+                                <p:cTn id="39" presetID="2" presetClass="entr" presetSubtype="2" fill="hold" nodeType="afterEffect">
+                                  <p:stCondLst>
+                                    <p:cond delay="200"/>
+                                  </p:stCondLst>
+                                  <p:childTnLst>
+                                    <p:set>
+                                      <p:cBhvr>
+                                        <p:cTn id="40" dur="1" fill="hold">
+                                          <p:stCondLst>
+                                            <p:cond delay="0"/>
+                                          </p:stCondLst>
+                                        </p:cTn>
+                                        <p:tgtEl>
+                                          <p:spTgt spid="8"/>
+                                        </p:tgtEl>
+                                        <p:attrNameLst>
+                                          <p:attrName>style.visibility</p:attrName>
+                                        </p:attrNameLst>
+                                      </p:cBhvr>
+                                      <p:to>
+                                        <p:strVal val="visible"/>
+                                      </p:to>
+                                    </p:set>
+                                    <p:anim calcmode="lin" valueType="num">
+                                      <p:cBhvr additive="base">
+                                        <p:cTn id="41" dur="500" fill="hold"/>
+                                        <p:tgtEl>
+                                          <p:spTgt spid="8"/>
+                                        </p:tgtEl>
+                                        <p:attrNameLst>
+                                          <p:attrName>ppt_x</p:attrName>
+                                        </p:attrNameLst>
+                                      </p:cBhvr>
+                                      <p:tavLst>
+                                        <p:tav tm="0">
+                                          <p:val>
+                                            <p:strVal val="1+#ppt_w/2"/>
+                                          </p:val>
+                                        </p:tav>
+                                        <p:tav tm="100000">
+                                          <p:val>
+                                            <p:strVal val="#ppt_x"/>
+                                          </p:val>
+                                        </p:tav>
+                                      </p:tavLst>
+                                    </p:anim>
+                                    <p:anim calcmode="lin" valueType="num">
+                                      <p:cBhvr additive="base">
+                                        <p:cTn id="42" dur="500" fill="hold"/>
+                                        <p:tgtEl>
+                                          <p:spTgt spid="8"/>
+                                        </p:tgtEl>
+                                        <p:attrNameLst>
+                                          <p:attrName>ppt_y</p:attrName>
+                                        </p:attrNameLst>
+                                      </p:cBhvr>
+                                      <p:tavLst>
+                                        <p:tav tm="0">
+                                          <p:val>
+                                            <p:strVal val="#ppt_y"/>
+                                          </p:val>
+                                        </p:tav>
+                                        <p:tav tm="100000">
+                                          <p:val>
+                                            <p:strVal val="#ppt_y"/>
+                                          </p:val>
+                                        </p:tav>
+                                      </p:tavLst>
+                                    </p:anim>
+                                  </p:childTnLst>
+                                </p:cTn>
+                              </p:par>
+                            </p:childTnLst>
+                          </p:cTn>
+                        </p:par>
                       </p:childTnLst>
                     </p:cTn>
                   </p:par>
@@ -6600,6 +7246,14 @@
 <file path=ppt/slides/slide3.xml><?xml version="1.0" encoding="utf-8"?>
 <p:sld xmlns:a="http://schemas.openxmlformats.org/drawingml/2006/main" xmlns:r="http://schemas.openxmlformats.org/officeDocument/2006/relationships" xmlns:p="http://schemas.openxmlformats.org/presentationml/2006/main">
   <p:cSld>
+    <p:bg>
+      <p:bgPr>
+        <a:solidFill>
+          <a:srgbClr val="FFF0E0"/>
+        </a:solidFill>
+        <a:effectLst/>
+      </p:bgPr>
+    </p:bg>
     <p:spTree>
       <p:nvGrpSpPr>
         <p:cNvPr id="1" name=""/>
@@ -7414,6 +8068,14 @@
 <file path=ppt/slides/slide4.xml><?xml version="1.0" encoding="utf-8"?>
 <p:sld xmlns:a="http://schemas.openxmlformats.org/drawingml/2006/main" xmlns:r="http://schemas.openxmlformats.org/officeDocument/2006/relationships" xmlns:p="http://schemas.openxmlformats.org/presentationml/2006/main">
   <p:cSld>
+    <p:bg>
+      <p:bgPr>
+        <a:solidFill>
+          <a:srgbClr val="FFF0E0"/>
+        </a:solidFill>
+        <a:effectLst/>
+      </p:bgPr>
+    </p:bg>
     <p:spTree>
       <p:nvGrpSpPr>
         <p:cNvPr id="1" name=""/>
@@ -8471,6 +9133,14 @@
 <file path=ppt/slides/slide5.xml><?xml version="1.0" encoding="utf-8"?>
 <p:sld xmlns:a="http://schemas.openxmlformats.org/drawingml/2006/main" xmlns:r="http://schemas.openxmlformats.org/officeDocument/2006/relationships" xmlns:p="http://schemas.openxmlformats.org/presentationml/2006/main">
   <p:cSld>
+    <p:bg>
+      <p:bgPr>
+        <a:solidFill>
+          <a:srgbClr val="FFF0E0"/>
+        </a:solidFill>
+        <a:effectLst/>
+      </p:bgPr>
+    </p:bg>
     <p:spTree>
       <p:nvGrpSpPr>
         <p:cNvPr id="1" name=""/>
@@ -9163,6 +9833,14 @@
 <file path=ppt/slides/slide6.xml><?xml version="1.0" encoding="utf-8"?>
 <p:sld xmlns:a="http://schemas.openxmlformats.org/drawingml/2006/main" xmlns:r="http://schemas.openxmlformats.org/officeDocument/2006/relationships" xmlns:p="http://schemas.openxmlformats.org/presentationml/2006/main">
   <p:cSld>
+    <p:bg>
+      <p:bgPr>
+        <a:solidFill>
+          <a:srgbClr val="FFF0E0"/>
+        </a:solidFill>
+        <a:effectLst/>
+      </p:bgPr>
+    </p:bg>
     <p:spTree>
       <p:nvGrpSpPr>
         <p:cNvPr id="1" name=""/>
@@ -9356,16 +10034,15 @@
           </p:cNvPicPr>
           <p:nvPr/>
         </p:nvPicPr>
-        <p:blipFill>
+        <p:blipFill rotWithShape="1">
           <a:blip r:embed="rId3"/>
-          <a:stretch>
-            <a:fillRect/>
-          </a:stretch>
+          <a:srcRect b="34417"/>
+          <a:stretch/>
         </p:blipFill>
         <p:spPr>
           <a:xfrm>
-            <a:off x="6678956" y="2448164"/>
-            <a:ext cx="2048161" cy="4163006"/>
+            <a:off x="6857795" y="3566955"/>
+            <a:ext cx="2048161" cy="2730228"/>
           </a:xfrm>
           <a:prstGeom prst="rect">
             <a:avLst/>
@@ -9500,9 +10177,9 @@
                             </p:stCondLst>
                             <p:childTnLst>
                               <p:par>
-                                <p:cTn id="9" presetID="42" presetClass="entr" presetSubtype="0" fill="hold" nodeType="afterEffect">
+                                <p:cTn id="9" presetID="42" presetClass="entr" presetSubtype="0" fill="hold" grpId="0" nodeType="afterEffect">
                                   <p:stCondLst>
-                                    <p:cond delay="0"/>
+                                    <p:cond delay="200"/>
                                   </p:stCondLst>
                                   <p:childTnLst>
                                     <p:set>
@@ -9513,7 +10190,11 @@
                                           </p:stCondLst>
                                         </p:cTn>
                                         <p:tgtEl>
-                                          <p:spTgt spid="9"/>
+                                          <p:spTgt spid="3">
+                                            <p:txEl>
+                                              <p:pRg st="0" end="0"/>
+                                            </p:txEl>
+                                          </p:spTgt>
                                         </p:tgtEl>
                                         <p:attrNameLst>
                                           <p:attrName>style.visibility</p:attrName>
@@ -9527,7 +10208,11 @@
                                       <p:cBhvr>
                                         <p:cTn id="11" dur="500"/>
                                         <p:tgtEl>
-                                          <p:spTgt spid="9"/>
+                                          <p:spTgt spid="3">
+                                            <p:txEl>
+                                              <p:pRg st="0" end="0"/>
+                                            </p:txEl>
+                                          </p:spTgt>
                                         </p:tgtEl>
                                       </p:cBhvr>
                                     </p:animEffect>
@@ -9535,7 +10220,11 @@
                                       <p:cBhvr>
                                         <p:cTn id="12" dur="500" fill="hold"/>
                                         <p:tgtEl>
-                                          <p:spTgt spid="9"/>
+                                          <p:spTgt spid="3">
+                                            <p:txEl>
+                                              <p:pRg st="0" end="0"/>
+                                            </p:txEl>
+                                          </p:spTgt>
                                         </p:tgtEl>
                                         <p:attrNameLst>
                                           <p:attrName>ppt_x</p:attrName>
@@ -9558,7 +10247,11 @@
                                       <p:cBhvr>
                                         <p:cTn id="13" dur="500" fill="hold"/>
                                         <p:tgtEl>
-                                          <p:spTgt spid="9"/>
+                                          <p:spTgt spid="3">
+                                            <p:txEl>
+                                              <p:pRg st="0" end="0"/>
+                                            </p:txEl>
+                                          </p:spTgt>
                                         </p:tgtEl>
                                         <p:attrNameLst>
                                           <p:attrName>ppt_y</p:attrName>
@@ -9568,152 +10261,6 @@
                                         <p:tav tm="0">
                                           <p:val>
                                             <p:strVal val="#ppt_y+.1"/>
-                                          </p:val>
-                                        </p:tav>
-                                        <p:tav tm="100000">
-                                          <p:val>
-                                            <p:strVal val="#ppt_y"/>
-                                          </p:val>
-                                        </p:tav>
-                                      </p:tavLst>
-                                    </p:anim>
-                                  </p:childTnLst>
-                                </p:cTn>
-                              </p:par>
-                              <p:par>
-                                <p:cTn id="14" presetID="2" presetClass="entr" presetSubtype="2" fill="hold" nodeType="withEffect">
-                                  <p:stCondLst>
-                                    <p:cond delay="0"/>
-                                  </p:stCondLst>
-                                  <p:childTnLst>
-                                    <p:set>
-                                      <p:cBhvr>
-                                        <p:cTn id="15" dur="1" fill="hold">
-                                          <p:stCondLst>
-                                            <p:cond delay="0"/>
-                                          </p:stCondLst>
-                                        </p:cTn>
-                                        <p:tgtEl>
-                                          <p:spTgt spid="7"/>
-                                        </p:tgtEl>
-                                        <p:attrNameLst>
-                                          <p:attrName>style.visibility</p:attrName>
-                                        </p:attrNameLst>
-                                      </p:cBhvr>
-                                      <p:to>
-                                        <p:strVal val="visible"/>
-                                      </p:to>
-                                    </p:set>
-                                    <p:anim calcmode="lin" valueType="num">
-                                      <p:cBhvr additive="base">
-                                        <p:cTn id="16" dur="500" fill="hold"/>
-                                        <p:tgtEl>
-                                          <p:spTgt spid="7"/>
-                                        </p:tgtEl>
-                                        <p:attrNameLst>
-                                          <p:attrName>ppt_x</p:attrName>
-                                        </p:attrNameLst>
-                                      </p:cBhvr>
-                                      <p:tavLst>
-                                        <p:tav tm="0">
-                                          <p:val>
-                                            <p:strVal val="1+#ppt_w/2"/>
-                                          </p:val>
-                                        </p:tav>
-                                        <p:tav tm="100000">
-                                          <p:val>
-                                            <p:strVal val="#ppt_x"/>
-                                          </p:val>
-                                        </p:tav>
-                                      </p:tavLst>
-                                    </p:anim>
-                                    <p:anim calcmode="lin" valueType="num">
-                                      <p:cBhvr additive="base">
-                                        <p:cTn id="17" dur="500" fill="hold"/>
-                                        <p:tgtEl>
-                                          <p:spTgt spid="7"/>
-                                        </p:tgtEl>
-                                        <p:attrNameLst>
-                                          <p:attrName>ppt_y</p:attrName>
-                                        </p:attrNameLst>
-                                      </p:cBhvr>
-                                      <p:tavLst>
-                                        <p:tav tm="0">
-                                          <p:val>
-                                            <p:strVal val="#ppt_y"/>
-                                          </p:val>
-                                        </p:tav>
-                                        <p:tav tm="100000">
-                                          <p:val>
-                                            <p:strVal val="#ppt_y"/>
-                                          </p:val>
-                                        </p:tav>
-                                      </p:tavLst>
-                                    </p:anim>
-                                  </p:childTnLst>
-                                </p:cTn>
-                              </p:par>
-                              <p:par>
-                                <p:cTn id="18" presetID="2" presetClass="entr" presetSubtype="2" fill="hold" nodeType="withEffect">
-                                  <p:stCondLst>
-                                    <p:cond delay="0"/>
-                                  </p:stCondLst>
-                                  <p:childTnLst>
-                                    <p:set>
-                                      <p:cBhvr>
-                                        <p:cTn id="19" dur="1" fill="hold">
-                                          <p:stCondLst>
-                                            <p:cond delay="0"/>
-                                          </p:stCondLst>
-                                        </p:cTn>
-                                        <p:tgtEl>
-                                          <p:spTgt spid="2050"/>
-                                        </p:tgtEl>
-                                        <p:attrNameLst>
-                                          <p:attrName>style.visibility</p:attrName>
-                                        </p:attrNameLst>
-                                      </p:cBhvr>
-                                      <p:to>
-                                        <p:strVal val="visible"/>
-                                      </p:to>
-                                    </p:set>
-                                    <p:anim calcmode="lin" valueType="num">
-                                      <p:cBhvr additive="base">
-                                        <p:cTn id="20" dur="500" fill="hold"/>
-                                        <p:tgtEl>
-                                          <p:spTgt spid="2050"/>
-                                        </p:tgtEl>
-                                        <p:attrNameLst>
-                                          <p:attrName>ppt_x</p:attrName>
-                                        </p:attrNameLst>
-                                      </p:cBhvr>
-                                      <p:tavLst>
-                                        <p:tav tm="0">
-                                          <p:val>
-                                            <p:strVal val="1+#ppt_w/2"/>
-                                          </p:val>
-                                        </p:tav>
-                                        <p:tav tm="100000">
-                                          <p:val>
-                                            <p:strVal val="#ppt_x"/>
-                                          </p:val>
-                                        </p:tav>
-                                      </p:tavLst>
-                                    </p:anim>
-                                    <p:anim calcmode="lin" valueType="num">
-                                      <p:cBhvr additive="base">
-                                        <p:cTn id="21" dur="500" fill="hold"/>
-                                        <p:tgtEl>
-                                          <p:spTgt spid="2050"/>
-                                        </p:tgtEl>
-                                        <p:attrNameLst>
-                                          <p:attrName>ppt_y</p:attrName>
-                                        </p:attrNameLst>
-                                      </p:cBhvr>
-                                      <p:tavLst>
-                                        <p:tav tm="0">
-                                          <p:val>
-                                            <p:strVal val="#ppt_y"/>
                                           </p:val>
                                         </p:tav>
                                         <p:tav tm="100000">
@@ -9730,20 +10277,20 @@
                           </p:cTn>
                         </p:par>
                         <p:par>
-                          <p:cTn id="22" fill="hold">
+                          <p:cTn id="14" fill="hold">
                             <p:stCondLst>
-                              <p:cond delay="1000"/>
+                              <p:cond delay="1200"/>
                             </p:stCondLst>
                             <p:childTnLst>
                               <p:par>
-                                <p:cTn id="23" presetID="42" presetClass="entr" presetSubtype="0" fill="hold" grpId="0" nodeType="afterEffect">
+                                <p:cTn id="15" presetID="42" presetClass="entr" presetSubtype="0" fill="hold" grpId="0" nodeType="afterEffect">
                                   <p:stCondLst>
                                     <p:cond delay="200"/>
                                   </p:stCondLst>
                                   <p:childTnLst>
                                     <p:set>
                                       <p:cBhvr>
-                                        <p:cTn id="24" dur="1" fill="hold">
+                                        <p:cTn id="16" dur="1" fill="hold">
                                           <p:stCondLst>
                                             <p:cond delay="0"/>
                                           </p:stCondLst>
@@ -9751,7 +10298,7 @@
                                         <p:tgtEl>
                                           <p:spTgt spid="3">
                                             <p:txEl>
-                                              <p:pRg st="0" end="0"/>
+                                              <p:pRg st="1" end="1"/>
                                             </p:txEl>
                                           </p:spTgt>
                                         </p:tgtEl>
@@ -9765,11 +10312,11 @@
                                     </p:set>
                                     <p:animEffect transition="in" filter="fade">
                                       <p:cBhvr>
-                                        <p:cTn id="25" dur="500"/>
-                                        <p:tgtEl>
-                                          <p:spTgt spid="3">
-                                            <p:txEl>
-                                              <p:pRg st="0" end="0"/>
+                                        <p:cTn id="17" dur="500"/>
+                                        <p:tgtEl>
+                                          <p:spTgt spid="3">
+                                            <p:txEl>
+                                              <p:pRg st="1" end="1"/>
                                             </p:txEl>
                                           </p:spTgt>
                                         </p:tgtEl>
@@ -9777,11 +10324,11 @@
                                     </p:animEffect>
                                     <p:anim calcmode="lin" valueType="num">
                                       <p:cBhvr>
-                                        <p:cTn id="26" dur="500" fill="hold"/>
-                                        <p:tgtEl>
-                                          <p:spTgt spid="3">
-                                            <p:txEl>
-                                              <p:pRg st="0" end="0"/>
+                                        <p:cTn id="18" dur="500" fill="hold"/>
+                                        <p:tgtEl>
+                                          <p:spTgt spid="3">
+                                            <p:txEl>
+                                              <p:pRg st="1" end="1"/>
                                             </p:txEl>
                                           </p:spTgt>
                                         </p:tgtEl>
@@ -9804,11 +10351,11 @@
                                     </p:anim>
                                     <p:anim calcmode="lin" valueType="num">
                                       <p:cBhvr>
-                                        <p:cTn id="27" dur="500" fill="hold"/>
-                                        <p:tgtEl>
-                                          <p:spTgt spid="3">
-                                            <p:txEl>
-                                              <p:pRg st="0" end="0"/>
+                                        <p:cTn id="19" dur="500" fill="hold"/>
+                                        <p:tgtEl>
+                                          <p:spTgt spid="3">
+                                            <p:txEl>
+                                              <p:pRg st="1" end="1"/>
                                             </p:txEl>
                                           </p:spTgt>
                                         </p:tgtEl>
@@ -9836,20 +10383,20 @@
                           </p:cTn>
                         </p:par>
                         <p:par>
-                          <p:cTn id="28" fill="hold">
+                          <p:cTn id="20" fill="hold">
                             <p:stCondLst>
-                              <p:cond delay="1700"/>
+                              <p:cond delay="1900"/>
                             </p:stCondLst>
                             <p:childTnLst>
                               <p:par>
-                                <p:cTn id="29" presetID="42" presetClass="entr" presetSubtype="0" fill="hold" grpId="0" nodeType="afterEffect">
+                                <p:cTn id="21" presetID="42" presetClass="entr" presetSubtype="0" fill="hold" grpId="0" nodeType="afterEffect">
                                   <p:stCondLst>
                                     <p:cond delay="200"/>
                                   </p:stCondLst>
                                   <p:childTnLst>
                                     <p:set>
                                       <p:cBhvr>
-                                        <p:cTn id="30" dur="1" fill="hold">
+                                        <p:cTn id="22" dur="1" fill="hold">
                                           <p:stCondLst>
                                             <p:cond delay="0"/>
                                           </p:stCondLst>
@@ -9857,7 +10404,7 @@
                                         <p:tgtEl>
                                           <p:spTgt spid="3">
                                             <p:txEl>
-                                              <p:pRg st="1" end="1"/>
+                                              <p:pRg st="2" end="2"/>
                                             </p:txEl>
                                           </p:spTgt>
                                         </p:tgtEl>
@@ -9871,11 +10418,11 @@
                                     </p:set>
                                     <p:animEffect transition="in" filter="fade">
                                       <p:cBhvr>
-                                        <p:cTn id="31" dur="500"/>
-                                        <p:tgtEl>
-                                          <p:spTgt spid="3">
-                                            <p:txEl>
-                                              <p:pRg st="1" end="1"/>
+                                        <p:cTn id="23" dur="500"/>
+                                        <p:tgtEl>
+                                          <p:spTgt spid="3">
+                                            <p:txEl>
+                                              <p:pRg st="2" end="2"/>
                                             </p:txEl>
                                           </p:spTgt>
                                         </p:tgtEl>
@@ -9883,11 +10430,11 @@
                                     </p:animEffect>
                                     <p:anim calcmode="lin" valueType="num">
                                       <p:cBhvr>
-                                        <p:cTn id="32" dur="500" fill="hold"/>
-                                        <p:tgtEl>
-                                          <p:spTgt spid="3">
-                                            <p:txEl>
-                                              <p:pRg st="1" end="1"/>
+                                        <p:cTn id="24" dur="500" fill="hold"/>
+                                        <p:tgtEl>
+                                          <p:spTgt spid="3">
+                                            <p:txEl>
+                                              <p:pRg st="2" end="2"/>
                                             </p:txEl>
                                           </p:spTgt>
                                         </p:tgtEl>
@@ -9910,11 +10457,11 @@
                                     </p:anim>
                                     <p:anim calcmode="lin" valueType="num">
                                       <p:cBhvr>
-                                        <p:cTn id="33" dur="500" fill="hold"/>
-                                        <p:tgtEl>
-                                          <p:spTgt spid="3">
-                                            <p:txEl>
-                                              <p:pRg st="1" end="1"/>
+                                        <p:cTn id="25" dur="500" fill="hold"/>
+                                        <p:tgtEl>
+                                          <p:spTgt spid="3">
+                                            <p:txEl>
+                                              <p:pRg st="2" end="2"/>
                                             </p:txEl>
                                           </p:spTgt>
                                         </p:tgtEl>
@@ -9942,20 +10489,20 @@
                           </p:cTn>
                         </p:par>
                         <p:par>
-                          <p:cTn id="34" fill="hold">
+                          <p:cTn id="26" fill="hold">
                             <p:stCondLst>
-                              <p:cond delay="2400"/>
+                              <p:cond delay="2600"/>
                             </p:stCondLst>
                             <p:childTnLst>
                               <p:par>
-                                <p:cTn id="35" presetID="42" presetClass="entr" presetSubtype="0" fill="hold" grpId="0" nodeType="afterEffect">
+                                <p:cTn id="27" presetID="42" presetClass="entr" presetSubtype="0" fill="hold" grpId="0" nodeType="afterEffect">
                                   <p:stCondLst>
                                     <p:cond delay="200"/>
                                   </p:stCondLst>
                                   <p:childTnLst>
                                     <p:set>
                                       <p:cBhvr>
-                                        <p:cTn id="36" dur="1" fill="hold">
+                                        <p:cTn id="28" dur="1" fill="hold">
                                           <p:stCondLst>
                                             <p:cond delay="0"/>
                                           </p:stCondLst>
@@ -9963,7 +10510,7 @@
                                         <p:tgtEl>
                                           <p:spTgt spid="3">
                                             <p:txEl>
-                                              <p:pRg st="2" end="2"/>
+                                              <p:pRg st="3" end="3"/>
                                             </p:txEl>
                                           </p:spTgt>
                                         </p:tgtEl>
@@ -9977,11 +10524,11 @@
                                     </p:set>
                                     <p:animEffect transition="in" filter="fade">
                                       <p:cBhvr>
-                                        <p:cTn id="37" dur="500"/>
-                                        <p:tgtEl>
-                                          <p:spTgt spid="3">
-                                            <p:txEl>
-                                              <p:pRg st="2" end="2"/>
+                                        <p:cTn id="29" dur="500"/>
+                                        <p:tgtEl>
+                                          <p:spTgt spid="3">
+                                            <p:txEl>
+                                              <p:pRg st="3" end="3"/>
                                             </p:txEl>
                                           </p:spTgt>
                                         </p:tgtEl>
@@ -9989,11 +10536,11 @@
                                     </p:animEffect>
                                     <p:anim calcmode="lin" valueType="num">
                                       <p:cBhvr>
-                                        <p:cTn id="38" dur="500" fill="hold"/>
-                                        <p:tgtEl>
-                                          <p:spTgt spid="3">
-                                            <p:txEl>
-                                              <p:pRg st="2" end="2"/>
+                                        <p:cTn id="30" dur="500" fill="hold"/>
+                                        <p:tgtEl>
+                                          <p:spTgt spid="3">
+                                            <p:txEl>
+                                              <p:pRg st="3" end="3"/>
                                             </p:txEl>
                                           </p:spTgt>
                                         </p:tgtEl>
@@ -10016,11 +10563,11 @@
                                     </p:anim>
                                     <p:anim calcmode="lin" valueType="num">
                                       <p:cBhvr>
-                                        <p:cTn id="39" dur="500" fill="hold"/>
-                                        <p:tgtEl>
-                                          <p:spTgt spid="3">
-                                            <p:txEl>
-                                              <p:pRg st="2" end="2"/>
+                                        <p:cTn id="31" dur="500" fill="hold"/>
+                                        <p:tgtEl>
+                                          <p:spTgt spid="3">
+                                            <p:txEl>
+                                              <p:pRg st="3" end="3"/>
                                             </p:txEl>
                                           </p:spTgt>
                                         </p:tgtEl>
@@ -10048,20 +10595,20 @@
                           </p:cTn>
                         </p:par>
                         <p:par>
-                          <p:cTn id="40" fill="hold">
+                          <p:cTn id="32" fill="hold">
                             <p:stCondLst>
-                              <p:cond delay="3100"/>
+                              <p:cond delay="3300"/>
                             </p:stCondLst>
                             <p:childTnLst>
                               <p:par>
-                                <p:cTn id="41" presetID="42" presetClass="entr" presetSubtype="0" fill="hold" grpId="0" nodeType="afterEffect">
+                                <p:cTn id="33" presetID="42" presetClass="entr" presetSubtype="0" fill="hold" grpId="0" nodeType="afterEffect">
                                   <p:stCondLst>
                                     <p:cond delay="200"/>
                                   </p:stCondLst>
                                   <p:childTnLst>
                                     <p:set>
                                       <p:cBhvr>
-                                        <p:cTn id="42" dur="1" fill="hold">
+                                        <p:cTn id="34" dur="1" fill="hold">
                                           <p:stCondLst>
                                             <p:cond delay="0"/>
                                           </p:stCondLst>
@@ -10069,7 +10616,7 @@
                                         <p:tgtEl>
                                           <p:spTgt spid="3">
                                             <p:txEl>
-                                              <p:pRg st="3" end="3"/>
+                                              <p:pRg st="4" end="4"/>
                                             </p:txEl>
                                           </p:spTgt>
                                         </p:tgtEl>
@@ -10083,11 +10630,11 @@
                                     </p:set>
                                     <p:animEffect transition="in" filter="fade">
                                       <p:cBhvr>
-                                        <p:cTn id="43" dur="500"/>
-                                        <p:tgtEl>
-                                          <p:spTgt spid="3">
-                                            <p:txEl>
-                                              <p:pRg st="3" end="3"/>
+                                        <p:cTn id="35" dur="500"/>
+                                        <p:tgtEl>
+                                          <p:spTgt spid="3">
+                                            <p:txEl>
+                                              <p:pRg st="4" end="4"/>
                                             </p:txEl>
                                           </p:spTgt>
                                         </p:tgtEl>
@@ -10095,11 +10642,11 @@
                                     </p:animEffect>
                                     <p:anim calcmode="lin" valueType="num">
                                       <p:cBhvr>
-                                        <p:cTn id="44" dur="500" fill="hold"/>
-                                        <p:tgtEl>
-                                          <p:spTgt spid="3">
-                                            <p:txEl>
-                                              <p:pRg st="3" end="3"/>
+                                        <p:cTn id="36" dur="500" fill="hold"/>
+                                        <p:tgtEl>
+                                          <p:spTgt spid="3">
+                                            <p:txEl>
+                                              <p:pRg st="4" end="4"/>
                                             </p:txEl>
                                           </p:spTgt>
                                         </p:tgtEl>
@@ -10122,11 +10669,11 @@
                                     </p:anim>
                                     <p:anim calcmode="lin" valueType="num">
                                       <p:cBhvr>
-                                        <p:cTn id="45" dur="500" fill="hold"/>
-                                        <p:tgtEl>
-                                          <p:spTgt spid="3">
-                                            <p:txEl>
-                                              <p:pRg st="3" end="3"/>
+                                        <p:cTn id="37" dur="500" fill="hold"/>
+                                        <p:tgtEl>
+                                          <p:spTgt spid="3">
+                                            <p:txEl>
+                                              <p:pRg st="4" end="4"/>
                                             </p:txEl>
                                           </p:spTgt>
                                         </p:tgtEl>
@@ -10154,30 +10701,26 @@
                           </p:cTn>
                         </p:par>
                         <p:par>
-                          <p:cTn id="46" fill="hold">
+                          <p:cTn id="38" fill="hold">
                             <p:stCondLst>
-                              <p:cond delay="3800"/>
+                              <p:cond delay="4000"/>
                             </p:stCondLst>
                             <p:childTnLst>
                               <p:par>
-                                <p:cTn id="47" presetID="42" presetClass="entr" presetSubtype="0" fill="hold" grpId="0" nodeType="afterEffect">
+                                <p:cTn id="39" presetID="42" presetClass="entr" presetSubtype="0" fill="hold" nodeType="afterEffect">
                                   <p:stCondLst>
-                                    <p:cond delay="200"/>
+                                    <p:cond delay="0"/>
                                   </p:stCondLst>
                                   <p:childTnLst>
                                     <p:set>
                                       <p:cBhvr>
-                                        <p:cTn id="48" dur="1" fill="hold">
+                                        <p:cTn id="40" dur="1" fill="hold">
                                           <p:stCondLst>
                                             <p:cond delay="0"/>
                                           </p:stCondLst>
                                         </p:cTn>
                                         <p:tgtEl>
-                                          <p:spTgt spid="3">
-                                            <p:txEl>
-                                              <p:pRg st="4" end="4"/>
-                                            </p:txEl>
-                                          </p:spTgt>
+                                          <p:spTgt spid="9"/>
                                         </p:tgtEl>
                                         <p:attrNameLst>
                                           <p:attrName>style.visibility</p:attrName>
@@ -10189,25 +10732,17 @@
                                     </p:set>
                                     <p:animEffect transition="in" filter="fade">
                                       <p:cBhvr>
-                                        <p:cTn id="49" dur="500"/>
-                                        <p:tgtEl>
-                                          <p:spTgt spid="3">
-                                            <p:txEl>
-                                              <p:pRg st="4" end="4"/>
-                                            </p:txEl>
-                                          </p:spTgt>
+                                        <p:cTn id="41" dur="500"/>
+                                        <p:tgtEl>
+                                          <p:spTgt spid="9"/>
                                         </p:tgtEl>
                                       </p:cBhvr>
                                     </p:animEffect>
                                     <p:anim calcmode="lin" valueType="num">
                                       <p:cBhvr>
-                                        <p:cTn id="50" dur="500" fill="hold"/>
-                                        <p:tgtEl>
-                                          <p:spTgt spid="3">
-                                            <p:txEl>
-                                              <p:pRg st="4" end="4"/>
-                                            </p:txEl>
-                                          </p:spTgt>
+                                        <p:cTn id="42" dur="500" fill="hold"/>
+                                        <p:tgtEl>
+                                          <p:spTgt spid="9"/>
                                         </p:tgtEl>
                                         <p:attrNameLst>
                                           <p:attrName>ppt_x</p:attrName>
@@ -10228,13 +10763,9 @@
                                     </p:anim>
                                     <p:anim calcmode="lin" valueType="num">
                                       <p:cBhvr>
-                                        <p:cTn id="51" dur="500" fill="hold"/>
-                                        <p:tgtEl>
-                                          <p:spTgt spid="3">
-                                            <p:txEl>
-                                              <p:pRg st="4" end="4"/>
-                                            </p:txEl>
-                                          </p:spTgt>
+                                        <p:cTn id="43" dur="500" fill="hold"/>
+                                        <p:tgtEl>
+                                          <p:spTgt spid="9"/>
                                         </p:tgtEl>
                                         <p:attrNameLst>
                                           <p:attrName>ppt_y</p:attrName>
@@ -10244,6 +10775,152 @@
                                         <p:tav tm="0">
                                           <p:val>
                                             <p:strVal val="#ppt_y+.1"/>
+                                          </p:val>
+                                        </p:tav>
+                                        <p:tav tm="100000">
+                                          <p:val>
+                                            <p:strVal val="#ppt_y"/>
+                                          </p:val>
+                                        </p:tav>
+                                      </p:tavLst>
+                                    </p:anim>
+                                  </p:childTnLst>
+                                </p:cTn>
+                              </p:par>
+                              <p:par>
+                                <p:cTn id="44" presetID="2" presetClass="entr" presetSubtype="2" fill="hold" nodeType="withEffect">
+                                  <p:stCondLst>
+                                    <p:cond delay="0"/>
+                                  </p:stCondLst>
+                                  <p:childTnLst>
+                                    <p:set>
+                                      <p:cBhvr>
+                                        <p:cTn id="45" dur="1" fill="hold">
+                                          <p:stCondLst>
+                                            <p:cond delay="0"/>
+                                          </p:stCondLst>
+                                        </p:cTn>
+                                        <p:tgtEl>
+                                          <p:spTgt spid="7"/>
+                                        </p:tgtEl>
+                                        <p:attrNameLst>
+                                          <p:attrName>style.visibility</p:attrName>
+                                        </p:attrNameLst>
+                                      </p:cBhvr>
+                                      <p:to>
+                                        <p:strVal val="visible"/>
+                                      </p:to>
+                                    </p:set>
+                                    <p:anim calcmode="lin" valueType="num">
+                                      <p:cBhvr additive="base">
+                                        <p:cTn id="46" dur="500" fill="hold"/>
+                                        <p:tgtEl>
+                                          <p:spTgt spid="7"/>
+                                        </p:tgtEl>
+                                        <p:attrNameLst>
+                                          <p:attrName>ppt_x</p:attrName>
+                                        </p:attrNameLst>
+                                      </p:cBhvr>
+                                      <p:tavLst>
+                                        <p:tav tm="0">
+                                          <p:val>
+                                            <p:strVal val="1+#ppt_w/2"/>
+                                          </p:val>
+                                        </p:tav>
+                                        <p:tav tm="100000">
+                                          <p:val>
+                                            <p:strVal val="#ppt_x"/>
+                                          </p:val>
+                                        </p:tav>
+                                      </p:tavLst>
+                                    </p:anim>
+                                    <p:anim calcmode="lin" valueType="num">
+                                      <p:cBhvr additive="base">
+                                        <p:cTn id="47" dur="500" fill="hold"/>
+                                        <p:tgtEl>
+                                          <p:spTgt spid="7"/>
+                                        </p:tgtEl>
+                                        <p:attrNameLst>
+                                          <p:attrName>ppt_y</p:attrName>
+                                        </p:attrNameLst>
+                                      </p:cBhvr>
+                                      <p:tavLst>
+                                        <p:tav tm="0">
+                                          <p:val>
+                                            <p:strVal val="#ppt_y"/>
+                                          </p:val>
+                                        </p:tav>
+                                        <p:tav tm="100000">
+                                          <p:val>
+                                            <p:strVal val="#ppt_y"/>
+                                          </p:val>
+                                        </p:tav>
+                                      </p:tavLst>
+                                    </p:anim>
+                                  </p:childTnLst>
+                                </p:cTn>
+                              </p:par>
+                              <p:par>
+                                <p:cTn id="48" presetID="2" presetClass="entr" presetSubtype="2" fill="hold" nodeType="withEffect">
+                                  <p:stCondLst>
+                                    <p:cond delay="0"/>
+                                  </p:stCondLst>
+                                  <p:childTnLst>
+                                    <p:set>
+                                      <p:cBhvr>
+                                        <p:cTn id="49" dur="1" fill="hold">
+                                          <p:stCondLst>
+                                            <p:cond delay="0"/>
+                                          </p:stCondLst>
+                                        </p:cTn>
+                                        <p:tgtEl>
+                                          <p:spTgt spid="2050"/>
+                                        </p:tgtEl>
+                                        <p:attrNameLst>
+                                          <p:attrName>style.visibility</p:attrName>
+                                        </p:attrNameLst>
+                                      </p:cBhvr>
+                                      <p:to>
+                                        <p:strVal val="visible"/>
+                                      </p:to>
+                                    </p:set>
+                                    <p:anim calcmode="lin" valueType="num">
+                                      <p:cBhvr additive="base">
+                                        <p:cTn id="50" dur="500" fill="hold"/>
+                                        <p:tgtEl>
+                                          <p:spTgt spid="2050"/>
+                                        </p:tgtEl>
+                                        <p:attrNameLst>
+                                          <p:attrName>ppt_x</p:attrName>
+                                        </p:attrNameLst>
+                                      </p:cBhvr>
+                                      <p:tavLst>
+                                        <p:tav tm="0">
+                                          <p:val>
+                                            <p:strVal val="1+#ppt_w/2"/>
+                                          </p:val>
+                                        </p:tav>
+                                        <p:tav tm="100000">
+                                          <p:val>
+                                            <p:strVal val="#ppt_x"/>
+                                          </p:val>
+                                        </p:tav>
+                                      </p:tavLst>
+                                    </p:anim>
+                                    <p:anim calcmode="lin" valueType="num">
+                                      <p:cBhvr additive="base">
+                                        <p:cTn id="51" dur="500" fill="hold"/>
+                                        <p:tgtEl>
+                                          <p:spTgt spid="2050"/>
+                                        </p:tgtEl>
+                                        <p:attrNameLst>
+                                          <p:attrName>ppt_y</p:attrName>
+                                        </p:attrNameLst>
+                                      </p:cBhvr>
+                                      <p:tavLst>
+                                        <p:tav tm="0">
+                                          <p:val>
+                                            <p:strVal val="#ppt_y"/>
                                           </p:val>
                                         </p:tav>
                                         <p:tav tm="100000">
@@ -10294,6 +10971,14 @@
 <file path=ppt/slides/slide7.xml><?xml version="1.0" encoding="utf-8"?>
 <p:sld xmlns:a="http://schemas.openxmlformats.org/drawingml/2006/main" xmlns:r="http://schemas.openxmlformats.org/officeDocument/2006/relationships" xmlns:p="http://schemas.openxmlformats.org/presentationml/2006/main">
   <p:cSld>
+    <p:bg>
+      <p:bgPr>
+        <a:solidFill>
+          <a:srgbClr val="FFF0E0"/>
+        </a:solidFill>
+        <a:effectLst/>
+      </p:bgPr>
+    </p:bg>
     <p:spTree>
       <p:nvGrpSpPr>
         <p:cNvPr id="1" name=""/>
@@ -10663,7 +11348,7 @@
                             </p:stCondLst>
                             <p:childTnLst>
                               <p:par>
-                                <p:cTn id="9" presetID="2" presetClass="entr" presetSubtype="2" fill="hold" nodeType="afterEffect">
+                                <p:cTn id="9" presetID="2" presetClass="entr" presetSubtype="4" fill="hold" nodeType="afterEffect">
                                   <p:stCondLst>
                                     <p:cond delay="0"/>
                                   </p:stCondLst>
@@ -10676,7 +11361,11 @@
                                           </p:stCondLst>
                                         </p:cTn>
                                         <p:tgtEl>
-                                          <p:spTgt spid="5"/>
+                                          <p:spTgt spid="3">
+                                            <p:txEl>
+                                              <p:pRg st="0" end="0"/>
+                                            </p:txEl>
+                                          </p:spTgt>
                                         </p:tgtEl>
                                         <p:attrNameLst>
                                           <p:attrName>style.visibility</p:attrName>
@@ -10690,7 +11379,11 @@
                                       <p:cBhvr additive="base">
                                         <p:cTn id="11" dur="500" fill="hold"/>
                                         <p:tgtEl>
-                                          <p:spTgt spid="5"/>
+                                          <p:spTgt spid="3">
+                                            <p:txEl>
+                                              <p:pRg st="0" end="0"/>
+                                            </p:txEl>
+                                          </p:spTgt>
                                         </p:tgtEl>
                                         <p:attrNameLst>
                                           <p:attrName>ppt_x</p:attrName>
@@ -10699,7 +11392,7 @@
                                       <p:tavLst>
                                         <p:tav tm="0">
                                           <p:val>
-                                            <p:strVal val="1+#ppt_w/2"/>
+                                            <p:strVal val="#ppt_x"/>
                                           </p:val>
                                         </p:tav>
                                         <p:tav tm="100000">
@@ -10713,153 +11406,11 @@
                                       <p:cBhvr additive="base">
                                         <p:cTn id="12" dur="500" fill="hold"/>
                                         <p:tgtEl>
-                                          <p:spTgt spid="5"/>
-                                        </p:tgtEl>
-                                        <p:attrNameLst>
-                                          <p:attrName>ppt_y</p:attrName>
-                                        </p:attrNameLst>
-                                      </p:cBhvr>
-                                      <p:tavLst>
-                                        <p:tav tm="0">
-                                          <p:val>
-                                            <p:strVal val="#ppt_y"/>
-                                          </p:val>
-                                        </p:tav>
-                                        <p:tav tm="100000">
-                                          <p:val>
-                                            <p:strVal val="#ppt_y"/>
-                                          </p:val>
-                                        </p:tav>
-                                      </p:tavLst>
-                                    </p:anim>
-                                  </p:childTnLst>
-                                </p:cTn>
-                              </p:par>
-                              <p:par>
-                                <p:cTn id="13" presetID="2" presetClass="entr" presetSubtype="2" fill="hold" nodeType="withEffect">
-                                  <p:stCondLst>
-                                    <p:cond delay="0"/>
-                                  </p:stCondLst>
-                                  <p:childTnLst>
-                                    <p:set>
-                                      <p:cBhvr>
-                                        <p:cTn id="14" dur="1" fill="hold">
-                                          <p:stCondLst>
-                                            <p:cond delay="0"/>
-                                          </p:stCondLst>
-                                        </p:cTn>
-                                        <p:tgtEl>
-                                          <p:spTgt spid="7"/>
-                                        </p:tgtEl>
-                                        <p:attrNameLst>
-                                          <p:attrName>style.visibility</p:attrName>
-                                        </p:attrNameLst>
-                                      </p:cBhvr>
-                                      <p:to>
-                                        <p:strVal val="visible"/>
-                                      </p:to>
-                                    </p:set>
-                                    <p:anim calcmode="lin" valueType="num">
-                                      <p:cBhvr additive="base">
-                                        <p:cTn id="15" dur="500" fill="hold"/>
-                                        <p:tgtEl>
-                                          <p:spTgt spid="7"/>
-                                        </p:tgtEl>
-                                        <p:attrNameLst>
-                                          <p:attrName>ppt_x</p:attrName>
-                                        </p:attrNameLst>
-                                      </p:cBhvr>
-                                      <p:tavLst>
-                                        <p:tav tm="0">
-                                          <p:val>
-                                            <p:strVal val="1+#ppt_w/2"/>
-                                          </p:val>
-                                        </p:tav>
-                                        <p:tav tm="100000">
-                                          <p:val>
-                                            <p:strVal val="#ppt_x"/>
-                                          </p:val>
-                                        </p:tav>
-                                      </p:tavLst>
-                                    </p:anim>
-                                    <p:anim calcmode="lin" valueType="num">
-                                      <p:cBhvr additive="base">
-                                        <p:cTn id="16" dur="500" fill="hold"/>
-                                        <p:tgtEl>
-                                          <p:spTgt spid="7"/>
-                                        </p:tgtEl>
-                                        <p:attrNameLst>
-                                          <p:attrName>ppt_y</p:attrName>
-                                        </p:attrNameLst>
-                                      </p:cBhvr>
-                                      <p:tavLst>
-                                        <p:tav tm="0">
-                                          <p:val>
-                                            <p:strVal val="#ppt_y"/>
-                                          </p:val>
-                                        </p:tav>
-                                        <p:tav tm="100000">
-                                          <p:val>
-                                            <p:strVal val="#ppt_y"/>
-                                          </p:val>
-                                        </p:tav>
-                                      </p:tavLst>
-                                    </p:anim>
-                                  </p:childTnLst>
-                                </p:cTn>
-                              </p:par>
-                              <p:par>
-                                <p:cTn id="17" presetID="2" presetClass="entr" presetSubtype="4" fill="hold" nodeType="withEffect">
-                                  <p:stCondLst>
-                                    <p:cond delay="0"/>
-                                  </p:stCondLst>
-                                  <p:childTnLst>
-                                    <p:set>
-                                      <p:cBhvr>
-                                        <p:cTn id="18" dur="1" fill="hold">
-                                          <p:stCondLst>
-                                            <p:cond delay="0"/>
-                                          </p:stCondLst>
-                                        </p:cTn>
-                                        <p:tgtEl>
-                                          <p:spTgt spid="9"/>
-                                        </p:tgtEl>
-                                        <p:attrNameLst>
-                                          <p:attrName>style.visibility</p:attrName>
-                                        </p:attrNameLst>
-                                      </p:cBhvr>
-                                      <p:to>
-                                        <p:strVal val="visible"/>
-                                      </p:to>
-                                    </p:set>
-                                    <p:anim calcmode="lin" valueType="num">
-                                      <p:cBhvr additive="base">
-                                        <p:cTn id="19" dur="500" fill="hold"/>
-                                        <p:tgtEl>
-                                          <p:spTgt spid="9"/>
-                                        </p:tgtEl>
-                                        <p:attrNameLst>
-                                          <p:attrName>ppt_x</p:attrName>
-                                        </p:attrNameLst>
-                                      </p:cBhvr>
-                                      <p:tavLst>
-                                        <p:tav tm="0">
-                                          <p:val>
-                                            <p:strVal val="#ppt_x"/>
-                                          </p:val>
-                                        </p:tav>
-                                        <p:tav tm="100000">
-                                          <p:val>
-                                            <p:strVal val="#ppt_x"/>
-                                          </p:val>
-                                        </p:tav>
-                                      </p:tavLst>
-                                    </p:anim>
-                                    <p:anim calcmode="lin" valueType="num">
-                                      <p:cBhvr additive="base">
-                                        <p:cTn id="20" dur="500" fill="hold"/>
-                                        <p:tgtEl>
-                                          <p:spTgt spid="9"/>
+                                          <p:spTgt spid="3">
+                                            <p:txEl>
+                                              <p:pRg st="0" end="0"/>
+                                            </p:txEl>
+                                          </p:spTgt>
                                         </p:tgtEl>
                                         <p:attrNameLst>
                                           <p:attrName>ppt_y</p:attrName>
@@ -10885,20 +11436,20 @@
                           </p:cTn>
                         </p:par>
                         <p:par>
-                          <p:cTn id="21" fill="hold">
+                          <p:cTn id="13" fill="hold">
                             <p:stCondLst>
                               <p:cond delay="1000"/>
                             </p:stCondLst>
                             <p:childTnLst>
                               <p:par>
-                                <p:cTn id="22" presetID="2" presetClass="entr" presetSubtype="4" fill="hold" nodeType="afterEffect">
+                                <p:cTn id="14" presetID="2" presetClass="entr" presetSubtype="4" fill="hold" nodeType="afterEffect">
                                   <p:stCondLst>
                                     <p:cond delay="0"/>
                                   </p:stCondLst>
                                   <p:childTnLst>
                                     <p:set>
                                       <p:cBhvr>
-                                        <p:cTn id="23" dur="1" fill="hold">
+                                        <p:cTn id="15" dur="1" fill="hold">
                                           <p:stCondLst>
                                             <p:cond delay="0"/>
                                           </p:stCondLst>
@@ -10906,7 +11457,7 @@
                                         <p:tgtEl>
                                           <p:spTgt spid="3">
                                             <p:txEl>
-                                              <p:pRg st="0" end="0"/>
+                                              <p:pRg st="1" end="1"/>
                                             </p:txEl>
                                           </p:spTgt>
                                         </p:tgtEl>
@@ -10920,11 +11471,11 @@
                                     </p:set>
                                     <p:anim calcmode="lin" valueType="num">
                                       <p:cBhvr additive="base">
-                                        <p:cTn id="24" dur="500" fill="hold"/>
-                                        <p:tgtEl>
-                                          <p:spTgt spid="3">
-                                            <p:txEl>
-                                              <p:pRg st="0" end="0"/>
+                                        <p:cTn id="16" dur="500" fill="hold"/>
+                                        <p:tgtEl>
+                                          <p:spTgt spid="3">
+                                            <p:txEl>
+                                              <p:pRg st="1" end="1"/>
                                             </p:txEl>
                                           </p:spTgt>
                                         </p:tgtEl>
@@ -10947,11 +11498,11 @@
                                     </p:anim>
                                     <p:anim calcmode="lin" valueType="num">
                                       <p:cBhvr additive="base">
-                                        <p:cTn id="25" dur="500" fill="hold"/>
-                                        <p:tgtEl>
-                                          <p:spTgt spid="3">
-                                            <p:txEl>
-                                              <p:pRg st="0" end="0"/>
+                                        <p:cTn id="17" dur="500" fill="hold"/>
+                                        <p:tgtEl>
+                                          <p:spTgt spid="3">
+                                            <p:txEl>
+                                              <p:pRg st="1" end="1"/>
                                             </p:txEl>
                                           </p:spTgt>
                                         </p:tgtEl>
@@ -10979,20 +11530,20 @@
                           </p:cTn>
                         </p:par>
                         <p:par>
-                          <p:cTn id="26" fill="hold">
+                          <p:cTn id="18" fill="hold">
                             <p:stCondLst>
                               <p:cond delay="1500"/>
                             </p:stCondLst>
                             <p:childTnLst>
                               <p:par>
-                                <p:cTn id="27" presetID="2" presetClass="entr" presetSubtype="4" fill="hold" nodeType="afterEffect">
+                                <p:cTn id="19" presetID="2" presetClass="entr" presetSubtype="4" fill="hold" nodeType="afterEffect">
                                   <p:stCondLst>
                                     <p:cond delay="0"/>
                                   </p:stCondLst>
                                   <p:childTnLst>
                                     <p:set>
                                       <p:cBhvr>
-                                        <p:cTn id="28" dur="1" fill="hold">
+                                        <p:cTn id="20" dur="1" fill="hold">
                                           <p:stCondLst>
                                             <p:cond delay="0"/>
                                           </p:stCondLst>
@@ -11000,7 +11551,7 @@
                                         <p:tgtEl>
                                           <p:spTgt spid="3">
                                             <p:txEl>
-                                              <p:pRg st="1" end="1"/>
+                                              <p:pRg st="2" end="2"/>
                                             </p:txEl>
                                           </p:spTgt>
                                         </p:tgtEl>
@@ -11014,11 +11565,11 @@
                                     </p:set>
                                     <p:anim calcmode="lin" valueType="num">
                                       <p:cBhvr additive="base">
-                                        <p:cTn id="29" dur="500" fill="hold"/>
-                                        <p:tgtEl>
-                                          <p:spTgt spid="3">
-                                            <p:txEl>
-                                              <p:pRg st="1" end="1"/>
+                                        <p:cTn id="21" dur="500" fill="hold"/>
+                                        <p:tgtEl>
+                                          <p:spTgt spid="3">
+                                            <p:txEl>
+                                              <p:pRg st="2" end="2"/>
                                             </p:txEl>
                                           </p:spTgt>
                                         </p:tgtEl>
@@ -11041,11 +11592,11 @@
                                     </p:anim>
                                     <p:anim calcmode="lin" valueType="num">
                                       <p:cBhvr additive="base">
-                                        <p:cTn id="30" dur="500" fill="hold"/>
-                                        <p:tgtEl>
-                                          <p:spTgt spid="3">
-                                            <p:txEl>
-                                              <p:pRg st="1" end="1"/>
+                                        <p:cTn id="22" dur="500" fill="hold"/>
+                                        <p:tgtEl>
+                                          <p:spTgt spid="3">
+                                            <p:txEl>
+                                              <p:pRg st="2" end="2"/>
                                             </p:txEl>
                                           </p:spTgt>
                                         </p:tgtEl>
@@ -11073,30 +11624,172 @@
                           </p:cTn>
                         </p:par>
                         <p:par>
-                          <p:cTn id="31" fill="hold">
+                          <p:cTn id="23" fill="hold">
                             <p:stCondLst>
                               <p:cond delay="2000"/>
                             </p:stCondLst>
                             <p:childTnLst>
                               <p:par>
-                                <p:cTn id="32" presetID="2" presetClass="entr" presetSubtype="4" fill="hold" nodeType="afterEffect">
+                                <p:cTn id="24" presetID="2" presetClass="entr" presetSubtype="2" fill="hold" nodeType="afterEffect">
                                   <p:stCondLst>
                                     <p:cond delay="0"/>
                                   </p:stCondLst>
                                   <p:childTnLst>
                                     <p:set>
                                       <p:cBhvr>
+                                        <p:cTn id="25" dur="1" fill="hold">
+                                          <p:stCondLst>
+                                            <p:cond delay="0"/>
+                                          </p:stCondLst>
+                                        </p:cTn>
+                                        <p:tgtEl>
+                                          <p:spTgt spid="5"/>
+                                        </p:tgtEl>
+                                        <p:attrNameLst>
+                                          <p:attrName>style.visibility</p:attrName>
+                                        </p:attrNameLst>
+                                      </p:cBhvr>
+                                      <p:to>
+                                        <p:strVal val="visible"/>
+                                      </p:to>
+                                    </p:set>
+                                    <p:anim calcmode="lin" valueType="num">
+                                      <p:cBhvr additive="base">
+                                        <p:cTn id="26" dur="500" fill="hold"/>
+                                        <p:tgtEl>
+                                          <p:spTgt spid="5"/>
+                                        </p:tgtEl>
+                                        <p:attrNameLst>
+                                          <p:attrName>ppt_x</p:attrName>
+                                        </p:attrNameLst>
+                                      </p:cBhvr>
+                                      <p:tavLst>
+                                        <p:tav tm="0">
+                                          <p:val>
+                                            <p:strVal val="1+#ppt_w/2"/>
+                                          </p:val>
+                                        </p:tav>
+                                        <p:tav tm="100000">
+                                          <p:val>
+                                            <p:strVal val="#ppt_x"/>
+                                          </p:val>
+                                        </p:tav>
+                                      </p:tavLst>
+                                    </p:anim>
+                                    <p:anim calcmode="lin" valueType="num">
+                                      <p:cBhvr additive="base">
+                                        <p:cTn id="27" dur="500" fill="hold"/>
+                                        <p:tgtEl>
+                                          <p:spTgt spid="5"/>
+                                        </p:tgtEl>
+                                        <p:attrNameLst>
+                                          <p:attrName>ppt_y</p:attrName>
+                                        </p:attrNameLst>
+                                      </p:cBhvr>
+                                      <p:tavLst>
+                                        <p:tav tm="0">
+                                          <p:val>
+                                            <p:strVal val="#ppt_y"/>
+                                          </p:val>
+                                        </p:tav>
+                                        <p:tav tm="100000">
+                                          <p:val>
+                                            <p:strVal val="#ppt_y"/>
+                                          </p:val>
+                                        </p:tav>
+                                      </p:tavLst>
+                                    </p:anim>
+                                  </p:childTnLst>
+                                </p:cTn>
+                              </p:par>
+                              <p:par>
+                                <p:cTn id="28" presetID="2" presetClass="entr" presetSubtype="2" fill="hold" nodeType="withEffect">
+                                  <p:stCondLst>
+                                    <p:cond delay="0"/>
+                                  </p:stCondLst>
+                                  <p:childTnLst>
+                                    <p:set>
+                                      <p:cBhvr>
+                                        <p:cTn id="29" dur="1" fill="hold">
+                                          <p:stCondLst>
+                                            <p:cond delay="0"/>
+                                          </p:stCondLst>
+                                        </p:cTn>
+                                        <p:tgtEl>
+                                          <p:spTgt spid="7"/>
+                                        </p:tgtEl>
+                                        <p:attrNameLst>
+                                          <p:attrName>style.visibility</p:attrName>
+                                        </p:attrNameLst>
+                                      </p:cBhvr>
+                                      <p:to>
+                                        <p:strVal val="visible"/>
+                                      </p:to>
+                                    </p:set>
+                                    <p:anim calcmode="lin" valueType="num">
+                                      <p:cBhvr additive="base">
+                                        <p:cTn id="30" dur="500" fill="hold"/>
+                                        <p:tgtEl>
+                                          <p:spTgt spid="7"/>
+                                        </p:tgtEl>
+                                        <p:attrNameLst>
+                                          <p:attrName>ppt_x</p:attrName>
+                                        </p:attrNameLst>
+                                      </p:cBhvr>
+                                      <p:tavLst>
+                                        <p:tav tm="0">
+                                          <p:val>
+                                            <p:strVal val="1+#ppt_w/2"/>
+                                          </p:val>
+                                        </p:tav>
+                                        <p:tav tm="100000">
+                                          <p:val>
+                                            <p:strVal val="#ppt_x"/>
+                                          </p:val>
+                                        </p:tav>
+                                      </p:tavLst>
+                                    </p:anim>
+                                    <p:anim calcmode="lin" valueType="num">
+                                      <p:cBhvr additive="base">
+                                        <p:cTn id="31" dur="500" fill="hold"/>
+                                        <p:tgtEl>
+                                          <p:spTgt spid="7"/>
+                                        </p:tgtEl>
+                                        <p:attrNameLst>
+                                          <p:attrName>ppt_y</p:attrName>
+                                        </p:attrNameLst>
+                                      </p:cBhvr>
+                                      <p:tavLst>
+                                        <p:tav tm="0">
+                                          <p:val>
+                                            <p:strVal val="#ppt_y"/>
+                                          </p:val>
+                                        </p:tav>
+                                        <p:tav tm="100000">
+                                          <p:val>
+                                            <p:strVal val="#ppt_y"/>
+                                          </p:val>
+                                        </p:tav>
+                                      </p:tavLst>
+                                    </p:anim>
+                                  </p:childTnLst>
+                                </p:cTn>
+                              </p:par>
+                              <p:par>
+                                <p:cTn id="32" presetID="2" presetClass="entr" presetSubtype="4" fill="hold" nodeType="withEffect">
+                                  <p:stCondLst>
+                                    <p:cond delay="0"/>
+                                  </p:stCondLst>
+                                  <p:childTnLst>
+                                    <p:set>
+                                      <p:cBhvr>
                                         <p:cTn id="33" dur="1" fill="hold">
                                           <p:stCondLst>
                                             <p:cond delay="0"/>
                                           </p:stCondLst>
                                         </p:cTn>
                                         <p:tgtEl>
-                                          <p:spTgt spid="3">
-                                            <p:txEl>
-                                              <p:pRg st="2" end="2"/>
-                                            </p:txEl>
-                                          </p:spTgt>
+                                          <p:spTgt spid="9"/>
                                         </p:tgtEl>
                                         <p:attrNameLst>
                                           <p:attrName>style.visibility</p:attrName>
@@ -11110,11 +11803,7 @@
                                       <p:cBhvr additive="base">
                                         <p:cTn id="34" dur="500" fill="hold"/>
                                         <p:tgtEl>
-                                          <p:spTgt spid="3">
-                                            <p:txEl>
-                                              <p:pRg st="2" end="2"/>
-                                            </p:txEl>
-                                          </p:spTgt>
+                                          <p:spTgt spid="9"/>
                                         </p:tgtEl>
                                         <p:attrNameLst>
                                           <p:attrName>ppt_x</p:attrName>
@@ -11137,11 +11826,7 @@
                                       <p:cBhvr additive="base">
                                         <p:cTn id="35" dur="500" fill="hold"/>
                                         <p:tgtEl>
-                                          <p:spTgt spid="3">
-                                            <p:txEl>
-                                              <p:pRg st="2" end="2"/>
-                                            </p:txEl>
-                                          </p:spTgt>
+                                          <p:spTgt spid="9"/>
                                         </p:tgtEl>
                                         <p:attrNameLst>
                                           <p:attrName>ppt_y</p:attrName>
@@ -11200,6 +11885,14 @@
 <file path=ppt/slides/slide8.xml><?xml version="1.0" encoding="utf-8"?>
 <p:sld xmlns:a="http://schemas.openxmlformats.org/drawingml/2006/main" xmlns:r="http://schemas.openxmlformats.org/officeDocument/2006/relationships" xmlns:p="http://schemas.openxmlformats.org/presentationml/2006/main">
   <p:cSld>
+    <p:bg>
+      <p:bgPr>
+        <a:solidFill>
+          <a:srgbClr val="FFF0E0"/>
+        </a:solidFill>
+        <a:effectLst/>
+      </p:bgPr>
+    </p:bg>
     <p:spTree>
       <p:nvGrpSpPr>
         <p:cNvPr id="1" name=""/>
@@ -11276,7 +11969,7 @@
           <a:p>
             <a:pPr>
               <a:buFont typeface="Wingdings" panose="05000000000000000000" pitchFamily="2" charset="2"/>
-              <a:buChar char="Ø"/>
+              <a:buChar char="§"/>
             </a:pPr>
             <a:r>
               <a:rPr lang="hu-HU" dirty="0">
@@ -11292,7 +11985,7 @@
           <a:p>
             <a:pPr>
               <a:buFont typeface="Wingdings" panose="05000000000000000000" pitchFamily="2" charset="2"/>
-              <a:buChar char="Ø"/>
+              <a:buChar char="§"/>
             </a:pPr>
             <a:r>
               <a:rPr lang="hu-HU" dirty="0">
@@ -11467,7 +12160,7 @@
         </p:blipFill>
         <p:spPr>
           <a:xfrm>
-            <a:off x="6172200" y="3534506"/>
+            <a:off x="6530799" y="3429000"/>
             <a:ext cx="2062868" cy="3156437"/>
           </a:xfrm>
           <a:prstGeom prst="rect">
@@ -11562,11 +12255,11 @@
                         <p:par>
                           <p:cTn id="8" fill="hold">
                             <p:stCondLst>
-                              <p:cond delay="700"/>
+                              <p:cond delay="1400"/>
                             </p:stCondLst>
                             <p:childTnLst>
                               <p:par>
-                                <p:cTn id="9" presetID="2" presetClass="entr" presetSubtype="2" fill="hold" nodeType="afterEffect">
+                                <p:cTn id="9" presetID="2" presetClass="entr" presetSubtype="4" fill="hold" grpId="0" nodeType="afterEffect">
                                   <p:stCondLst>
                                     <p:cond delay="200"/>
                                   </p:stCondLst>
@@ -11579,7 +12272,11 @@
                                           </p:stCondLst>
                                         </p:cTn>
                                         <p:tgtEl>
-                                          <p:spTgt spid="5"/>
+                                          <p:spTgt spid="3">
+                                            <p:txEl>
+                                              <p:pRg st="0" end="0"/>
+                                            </p:txEl>
+                                          </p:spTgt>
                                         </p:tgtEl>
                                         <p:attrNameLst>
                                           <p:attrName>style.visibility</p:attrName>
@@ -11593,7 +12290,11 @@
                                       <p:cBhvr additive="base">
                                         <p:cTn id="11" dur="500" fill="hold"/>
                                         <p:tgtEl>
-                                          <p:spTgt spid="5"/>
+                                          <p:spTgt spid="3">
+                                            <p:txEl>
+                                              <p:pRg st="0" end="0"/>
+                                            </p:txEl>
+                                          </p:spTgt>
                                         </p:tgtEl>
                                         <p:attrNameLst>
                                           <p:attrName>ppt_x</p:attrName>
@@ -11602,7 +12303,7 @@
                                       <p:tavLst>
                                         <p:tav tm="0">
                                           <p:val>
-                                            <p:strVal val="1+#ppt_w/2"/>
+                                            <p:strVal val="#ppt_x"/>
                                           </p:val>
                                         </p:tav>
                                         <p:tav tm="100000">
@@ -11616,7 +12317,11 @@
                                       <p:cBhvr additive="base">
                                         <p:cTn id="12" dur="500" fill="hold"/>
                                         <p:tgtEl>
-                                          <p:spTgt spid="5"/>
+                                          <p:spTgt spid="3">
+                                            <p:txEl>
+                                              <p:pRg st="0" end="0"/>
+                                            </p:txEl>
+                                          </p:spTgt>
                                         </p:tgtEl>
                                         <p:attrNameLst>
                                           <p:attrName>ppt_y</p:attrName>
@@ -11625,7 +12330,7 @@
                                       <p:tavLst>
                                         <p:tav tm="0">
                                           <p:val>
-                                            <p:strVal val="#ppt_y"/>
+                                            <p:strVal val="1+#ppt_h/2"/>
                                           </p:val>
                                         </p:tav>
                                         <p:tav tm="100000">
@@ -11644,7 +12349,7 @@
                         <p:par>
                           <p:cTn id="13" fill="hold">
                             <p:stCondLst>
-                              <p:cond delay="1400"/>
+                              <p:cond delay="2100"/>
                             </p:stCondLst>
                             <p:childTnLst>
                               <p:par>
@@ -11663,7 +12368,7 @@
                                         <p:tgtEl>
                                           <p:spTgt spid="3">
                                             <p:txEl>
-                                              <p:pRg st="0" end="0"/>
+                                              <p:pRg st="1" end="1"/>
                                             </p:txEl>
                                           </p:spTgt>
                                         </p:tgtEl>
@@ -11681,7 +12386,7 @@
                                         <p:tgtEl>
                                           <p:spTgt spid="3">
                                             <p:txEl>
-                                              <p:pRg st="0" end="0"/>
+                                              <p:pRg st="1" end="1"/>
                                             </p:txEl>
                                           </p:spTgt>
                                         </p:tgtEl>
@@ -11708,7 +12413,7 @@
                                         <p:tgtEl>
                                           <p:spTgt spid="3">
                                             <p:txEl>
-                                              <p:pRg st="0" end="0"/>
+                                              <p:pRg st="1" end="1"/>
                                             </p:txEl>
                                           </p:spTgt>
                                         </p:tgtEl>
@@ -11738,13 +12443,13 @@
                         <p:par>
                           <p:cTn id="18" fill="hold">
                             <p:stCondLst>
-                              <p:cond delay="2100"/>
+                              <p:cond delay="2800"/>
                             </p:stCondLst>
                             <p:childTnLst>
                               <p:par>
                                 <p:cTn id="19" presetID="2" presetClass="entr" presetSubtype="4" fill="hold" grpId="0" nodeType="afterEffect">
                                   <p:stCondLst>
-                                    <p:cond delay="200"/>
+                                    <p:cond delay="0"/>
                                   </p:stCondLst>
                                   <p:childTnLst>
                                     <p:set>
@@ -11757,7 +12462,7 @@
                                         <p:tgtEl>
                                           <p:spTgt spid="3">
                                             <p:txEl>
-                                              <p:pRg st="1" end="1"/>
+                                              <p:pRg st="2" end="2"/>
                                             </p:txEl>
                                           </p:spTgt>
                                         </p:tgtEl>
@@ -11775,7 +12480,7 @@
                                         <p:tgtEl>
                                           <p:spTgt spid="3">
                                             <p:txEl>
-                                              <p:pRg st="1" end="1"/>
+                                              <p:pRg st="2" end="2"/>
                                             </p:txEl>
                                           </p:spTgt>
                                         </p:tgtEl>
@@ -11802,7 +12507,7 @@
                                         <p:tgtEl>
                                           <p:spTgt spid="3">
                                             <p:txEl>
-                                              <p:pRg st="1" end="1"/>
+                                              <p:pRg st="2" end="2"/>
                                             </p:txEl>
                                           </p:spTgt>
                                         </p:tgtEl>
@@ -11832,7 +12537,7 @@
                         <p:par>
                           <p:cTn id="23" fill="hold">
                             <p:stCondLst>
-                              <p:cond delay="2800"/>
+                              <p:cond delay="3300"/>
                             </p:stCondLst>
                             <p:childTnLst>
                               <p:par>
@@ -11851,7 +12556,7 @@
                                         <p:tgtEl>
                                           <p:spTgt spid="3">
                                             <p:txEl>
-                                              <p:pRg st="2" end="2"/>
+                                              <p:pRg st="3" end="3"/>
                                             </p:txEl>
                                           </p:spTgt>
                                         </p:tgtEl>
@@ -11869,7 +12574,7 @@
                                         <p:tgtEl>
                                           <p:spTgt spid="3">
                                             <p:txEl>
-                                              <p:pRg st="2" end="2"/>
+                                              <p:pRg st="3" end="3"/>
                                             </p:txEl>
                                           </p:spTgt>
                                         </p:tgtEl>
@@ -11896,7 +12601,7 @@
                                         <p:tgtEl>
                                           <p:spTgt spid="3">
                                             <p:txEl>
-                                              <p:pRg st="2" end="2"/>
+                                              <p:pRg st="3" end="3"/>
                                             </p:txEl>
                                           </p:spTgt>
                                         </p:tgtEl>
@@ -11926,7 +12631,7 @@
                         <p:par>
                           <p:cTn id="28" fill="hold">
                             <p:stCondLst>
-                              <p:cond delay="3300"/>
+                              <p:cond delay="3800"/>
                             </p:stCondLst>
                             <p:childTnLst>
                               <p:par>
@@ -11945,7 +12650,7 @@
                                         <p:tgtEl>
                                           <p:spTgt spid="3">
                                             <p:txEl>
-                                              <p:pRg st="3" end="3"/>
+                                              <p:pRg st="4" end="4"/>
                                             </p:txEl>
                                           </p:spTgt>
                                         </p:tgtEl>
@@ -11963,7 +12668,7 @@
                                         <p:tgtEl>
                                           <p:spTgt spid="3">
                                             <p:txEl>
-                                              <p:pRg st="3" end="3"/>
+                                              <p:pRg st="4" end="4"/>
                                             </p:txEl>
                                           </p:spTgt>
                                         </p:tgtEl>
@@ -11990,7 +12695,7 @@
                                         <p:tgtEl>
                                           <p:spTgt spid="3">
                                             <p:txEl>
-                                              <p:pRg st="3" end="3"/>
+                                              <p:pRg st="4" end="4"/>
                                             </p:txEl>
                                           </p:spTgt>
                                         </p:tgtEl>
@@ -12020,7 +12725,7 @@
                         <p:par>
                           <p:cTn id="33" fill="hold">
                             <p:stCondLst>
-                              <p:cond delay="3800"/>
+                              <p:cond delay="4300"/>
                             </p:stCondLst>
                             <p:childTnLst>
                               <p:par>
@@ -12039,7 +12744,7 @@
                                         <p:tgtEl>
                                           <p:spTgt spid="3">
                                             <p:txEl>
-                                              <p:pRg st="4" end="4"/>
+                                              <p:pRg st="5" end="5"/>
                                             </p:txEl>
                                           </p:spTgt>
                                         </p:tgtEl>
@@ -12057,7 +12762,7 @@
                                         <p:tgtEl>
                                           <p:spTgt spid="3">
                                             <p:txEl>
-                                              <p:pRg st="4" end="4"/>
+                                              <p:pRg st="5" end="5"/>
                                             </p:txEl>
                                           </p:spTgt>
                                         </p:tgtEl>
@@ -12084,7 +12789,7 @@
                                         <p:tgtEl>
                                           <p:spTgt spid="3">
                                             <p:txEl>
-                                              <p:pRg st="4" end="4"/>
+                                              <p:pRg st="5" end="5"/>
                                             </p:txEl>
                                           </p:spTgt>
                                         </p:tgtEl>
@@ -12114,11 +12819,11 @@
                         <p:par>
                           <p:cTn id="38" fill="hold">
                             <p:stCondLst>
-                              <p:cond delay="4300"/>
+                              <p:cond delay="4800"/>
                             </p:stCondLst>
                             <p:childTnLst>
                               <p:par>
-                                <p:cTn id="39" presetID="2" presetClass="entr" presetSubtype="4" fill="hold" grpId="0" nodeType="afterEffect">
+                                <p:cTn id="39" presetID="2" presetClass="entr" presetSubtype="2" fill="hold" nodeType="afterEffect">
                                   <p:stCondLst>
                                     <p:cond delay="0"/>
                                   </p:stCondLst>
@@ -12131,11 +12836,7 @@
                                           </p:stCondLst>
                                         </p:cTn>
                                         <p:tgtEl>
-                                          <p:spTgt spid="3">
-                                            <p:txEl>
-                                              <p:pRg st="5" end="5"/>
-                                            </p:txEl>
-                                          </p:spTgt>
+                                          <p:spTgt spid="5"/>
                                         </p:tgtEl>
                                         <p:attrNameLst>
                                           <p:attrName>style.visibility</p:attrName>
@@ -12149,11 +12850,7 @@
                                       <p:cBhvr additive="base">
                                         <p:cTn id="41" dur="500" fill="hold"/>
                                         <p:tgtEl>
-                                          <p:spTgt spid="3">
-                                            <p:txEl>
-                                              <p:pRg st="5" end="5"/>
-                                            </p:txEl>
-                                          </p:spTgt>
+                                          <p:spTgt spid="5"/>
                                         </p:tgtEl>
                                         <p:attrNameLst>
                                           <p:attrName>ppt_x</p:attrName>
@@ -12162,7 +12859,7 @@
                                       <p:tavLst>
                                         <p:tav tm="0">
                                           <p:val>
-                                            <p:strVal val="#ppt_x"/>
+                                            <p:strVal val="1+#ppt_w/2"/>
                                           </p:val>
                                         </p:tav>
                                         <p:tav tm="100000">
@@ -12176,11 +12873,7 @@
                                       <p:cBhvr additive="base">
                                         <p:cTn id="42" dur="500" fill="hold"/>
                                         <p:tgtEl>
-                                          <p:spTgt spid="3">
-                                            <p:txEl>
-                                              <p:pRg st="5" end="5"/>
-                                            </p:txEl>
-                                          </p:spTgt>
+                                          <p:spTgt spid="5"/>
                                         </p:tgtEl>
                                         <p:attrNameLst>
                                           <p:attrName>ppt_y</p:attrName>
@@ -12189,7 +12882,7 @@
                                       <p:tavLst>
                                         <p:tav tm="0">
                                           <p:val>
-                                            <p:strVal val="1+#ppt_h/2"/>
+                                            <p:strVal val="#ppt_y"/>
                                           </p:val>
                                         </p:tav>
                                         <p:tav tm="100000">
@@ -12275,6 +12968,14 @@
 <file path=ppt/slides/slide9.xml><?xml version="1.0" encoding="utf-8"?>
 <p:sld xmlns:a="http://schemas.openxmlformats.org/drawingml/2006/main" xmlns:r="http://schemas.openxmlformats.org/officeDocument/2006/relationships" xmlns:p="http://schemas.openxmlformats.org/presentationml/2006/main">
   <p:cSld>
+    <p:bg>
+      <p:bgPr>
+        <a:solidFill>
+          <a:srgbClr val="FFF0E0"/>
+        </a:solidFill>
+        <a:effectLst/>
+      </p:bgPr>
+    </p:bg>
     <p:spTree>
       <p:nvGrpSpPr>
         <p:cNvPr id="1" name=""/>
@@ -12355,7 +13056,7 @@
           <a:lstStyle/>
           <a:p>
             <a:r>
-              <a:rPr lang="hu-HU" dirty="0" smtClean="0">
+              <a:rPr lang="hu-HU" dirty="0">
                 <a:solidFill>
                   <a:schemeClr val="tx1"/>
                 </a:solidFill>
@@ -12368,7 +13069,7 @@
           <a:p>
             <a:pPr lvl="1"/>
             <a:r>
-              <a:rPr lang="hu-HU" i="0" dirty="0" smtClean="0">
+              <a:rPr lang="hu-HU" i="0" dirty="0">
                 <a:solidFill>
                   <a:schemeClr val="tx1"/>
                 </a:solidFill>
@@ -12381,7 +13082,7 @@
           <a:p>
             <a:pPr lvl="1"/>
             <a:r>
-              <a:rPr lang="hu-HU" i="0" dirty="0" smtClean="0">
+              <a:rPr lang="hu-HU" i="0" dirty="0">
                 <a:solidFill>
                   <a:schemeClr val="tx1"/>
                 </a:solidFill>
@@ -12394,7 +13095,7 @@
           <a:p>
             <a:pPr lvl="1"/>
             <a:r>
-              <a:rPr lang="hu-HU" i="0" dirty="0" smtClean="0">
+              <a:rPr lang="hu-HU" i="0" dirty="0">
                 <a:solidFill>
                   <a:schemeClr val="tx1"/>
                 </a:solidFill>
@@ -12403,13 +13104,6 @@
               </a:rPr>
               <a:t>Mobil</a:t>
             </a:r>
-            <a:endParaRPr lang="hu-HU" i="0" dirty="0">
-              <a:solidFill>
-                <a:schemeClr val="tx1"/>
-              </a:solidFill>
-              <a:latin typeface="Times New Roman" panose="02020603050405020304" pitchFamily="18" charset="0"/>
-              <a:cs typeface="Times New Roman" panose="02020603050405020304" pitchFamily="18" charset="0"/>
-            </a:endParaRPr>
           </a:p>
         </p:txBody>
       </p:sp>
@@ -12529,6 +13223,585 @@
                                         </p:tgtEl>
                                       </p:cBhvr>
                                     </p:animEffect>
+                                  </p:childTnLst>
+                                </p:cTn>
+                              </p:par>
+                            </p:childTnLst>
+                          </p:cTn>
+                        </p:par>
+                        <p:par>
+                          <p:cTn id="8" fill="hold">
+                            <p:stCondLst>
+                              <p:cond delay="500"/>
+                            </p:stCondLst>
+                            <p:childTnLst>
+                              <p:par>
+                                <p:cTn id="9" presetID="42" presetClass="entr" presetSubtype="0" fill="hold" nodeType="afterEffect">
+                                  <p:stCondLst>
+                                    <p:cond delay="200"/>
+                                  </p:stCondLst>
+                                  <p:childTnLst>
+                                    <p:set>
+                                      <p:cBhvr>
+                                        <p:cTn id="10" dur="1" fill="hold">
+                                          <p:stCondLst>
+                                            <p:cond delay="0"/>
+                                          </p:stCondLst>
+                                        </p:cTn>
+                                        <p:tgtEl>
+                                          <p:spTgt spid="3">
+                                            <p:txEl>
+                                              <p:pRg st="0" end="0"/>
+                                            </p:txEl>
+                                          </p:spTgt>
+                                        </p:tgtEl>
+                                        <p:attrNameLst>
+                                          <p:attrName>style.visibility</p:attrName>
+                                        </p:attrNameLst>
+                                      </p:cBhvr>
+                                      <p:to>
+                                        <p:strVal val="visible"/>
+                                      </p:to>
+                                    </p:set>
+                                    <p:animEffect transition="in" filter="fade">
+                                      <p:cBhvr>
+                                        <p:cTn id="11" dur="500"/>
+                                        <p:tgtEl>
+                                          <p:spTgt spid="3">
+                                            <p:txEl>
+                                              <p:pRg st="0" end="0"/>
+                                            </p:txEl>
+                                          </p:spTgt>
+                                        </p:tgtEl>
+                                      </p:cBhvr>
+                                    </p:animEffect>
+                                    <p:anim calcmode="lin" valueType="num">
+                                      <p:cBhvr>
+                                        <p:cTn id="12" dur="500" fill="hold"/>
+                                        <p:tgtEl>
+                                          <p:spTgt spid="3">
+                                            <p:txEl>
+                                              <p:pRg st="0" end="0"/>
+                                            </p:txEl>
+                                          </p:spTgt>
+                                        </p:tgtEl>
+                                        <p:attrNameLst>
+                                          <p:attrName>ppt_x</p:attrName>
+                                        </p:attrNameLst>
+                                      </p:cBhvr>
+                                      <p:tavLst>
+                                        <p:tav tm="0">
+                                          <p:val>
+                                            <p:strVal val="#ppt_x"/>
+                                          </p:val>
+                                        </p:tav>
+                                        <p:tav tm="100000">
+                                          <p:val>
+                                            <p:strVal val="#ppt_x"/>
+                                          </p:val>
+                                        </p:tav>
+                                      </p:tavLst>
+                                    </p:anim>
+                                    <p:anim calcmode="lin" valueType="num">
+                                      <p:cBhvr>
+                                        <p:cTn id="13" dur="500" fill="hold"/>
+                                        <p:tgtEl>
+                                          <p:spTgt spid="3">
+                                            <p:txEl>
+                                              <p:pRg st="0" end="0"/>
+                                            </p:txEl>
+                                          </p:spTgt>
+                                        </p:tgtEl>
+                                        <p:attrNameLst>
+                                          <p:attrName>ppt_y</p:attrName>
+                                        </p:attrNameLst>
+                                      </p:cBhvr>
+                                      <p:tavLst>
+                                        <p:tav tm="0">
+                                          <p:val>
+                                            <p:strVal val="#ppt_y+.1"/>
+                                          </p:val>
+                                        </p:tav>
+                                        <p:tav tm="100000">
+                                          <p:val>
+                                            <p:strVal val="#ppt_y"/>
+                                          </p:val>
+                                        </p:tav>
+                                      </p:tavLst>
+                                    </p:anim>
+                                  </p:childTnLst>
+                                </p:cTn>
+                              </p:par>
+                            </p:childTnLst>
+                          </p:cTn>
+                        </p:par>
+                        <p:par>
+                          <p:cTn id="14" fill="hold">
+                            <p:stCondLst>
+                              <p:cond delay="1200"/>
+                            </p:stCondLst>
+                            <p:childTnLst>
+                              <p:par>
+                                <p:cTn id="15" presetID="42" presetClass="entr" presetSubtype="0" fill="hold" nodeType="afterEffect">
+                                  <p:stCondLst>
+                                    <p:cond delay="200"/>
+                                  </p:stCondLst>
+                                  <p:childTnLst>
+                                    <p:set>
+                                      <p:cBhvr>
+                                        <p:cTn id="16" dur="1" fill="hold">
+                                          <p:stCondLst>
+                                            <p:cond delay="0"/>
+                                          </p:stCondLst>
+                                        </p:cTn>
+                                        <p:tgtEl>
+                                          <p:spTgt spid="3">
+                                            <p:txEl>
+                                              <p:pRg st="1" end="1"/>
+                                            </p:txEl>
+                                          </p:spTgt>
+                                        </p:tgtEl>
+                                        <p:attrNameLst>
+                                          <p:attrName>style.visibility</p:attrName>
+                                        </p:attrNameLst>
+                                      </p:cBhvr>
+                                      <p:to>
+                                        <p:strVal val="visible"/>
+                                      </p:to>
+                                    </p:set>
+                                    <p:animEffect transition="in" filter="fade">
+                                      <p:cBhvr>
+                                        <p:cTn id="17" dur="500"/>
+                                        <p:tgtEl>
+                                          <p:spTgt spid="3">
+                                            <p:txEl>
+                                              <p:pRg st="1" end="1"/>
+                                            </p:txEl>
+                                          </p:spTgt>
+                                        </p:tgtEl>
+                                      </p:cBhvr>
+                                    </p:animEffect>
+                                    <p:anim calcmode="lin" valueType="num">
+                                      <p:cBhvr>
+                                        <p:cTn id="18" dur="500" fill="hold"/>
+                                        <p:tgtEl>
+                                          <p:spTgt spid="3">
+                                            <p:txEl>
+                                              <p:pRg st="1" end="1"/>
+                                            </p:txEl>
+                                          </p:spTgt>
+                                        </p:tgtEl>
+                                        <p:attrNameLst>
+                                          <p:attrName>ppt_x</p:attrName>
+                                        </p:attrNameLst>
+                                      </p:cBhvr>
+                                      <p:tavLst>
+                                        <p:tav tm="0">
+                                          <p:val>
+                                            <p:strVal val="#ppt_x"/>
+                                          </p:val>
+                                        </p:tav>
+                                        <p:tav tm="100000">
+                                          <p:val>
+                                            <p:strVal val="#ppt_x"/>
+                                          </p:val>
+                                        </p:tav>
+                                      </p:tavLst>
+                                    </p:anim>
+                                    <p:anim calcmode="lin" valueType="num">
+                                      <p:cBhvr>
+                                        <p:cTn id="19" dur="500" fill="hold"/>
+                                        <p:tgtEl>
+                                          <p:spTgt spid="3">
+                                            <p:txEl>
+                                              <p:pRg st="1" end="1"/>
+                                            </p:txEl>
+                                          </p:spTgt>
+                                        </p:tgtEl>
+                                        <p:attrNameLst>
+                                          <p:attrName>ppt_y</p:attrName>
+                                        </p:attrNameLst>
+                                      </p:cBhvr>
+                                      <p:tavLst>
+                                        <p:tav tm="0">
+                                          <p:val>
+                                            <p:strVal val="#ppt_y+.1"/>
+                                          </p:val>
+                                        </p:tav>
+                                        <p:tav tm="100000">
+                                          <p:val>
+                                            <p:strVal val="#ppt_y"/>
+                                          </p:val>
+                                        </p:tav>
+                                      </p:tavLst>
+                                    </p:anim>
+                                  </p:childTnLst>
+                                </p:cTn>
+                              </p:par>
+                            </p:childTnLst>
+                          </p:cTn>
+                        </p:par>
+                        <p:par>
+                          <p:cTn id="20" fill="hold">
+                            <p:stCondLst>
+                              <p:cond delay="1900"/>
+                            </p:stCondLst>
+                            <p:childTnLst>
+                              <p:par>
+                                <p:cTn id="21" presetID="42" presetClass="entr" presetSubtype="0" fill="hold" nodeType="afterEffect">
+                                  <p:stCondLst>
+                                    <p:cond delay="200"/>
+                                  </p:stCondLst>
+                                  <p:childTnLst>
+                                    <p:set>
+                                      <p:cBhvr>
+                                        <p:cTn id="22" dur="1" fill="hold">
+                                          <p:stCondLst>
+                                            <p:cond delay="0"/>
+                                          </p:stCondLst>
+                                        </p:cTn>
+                                        <p:tgtEl>
+                                          <p:spTgt spid="3">
+                                            <p:txEl>
+                                              <p:pRg st="2" end="2"/>
+                                            </p:txEl>
+                                          </p:spTgt>
+                                        </p:tgtEl>
+                                        <p:attrNameLst>
+                                          <p:attrName>style.visibility</p:attrName>
+                                        </p:attrNameLst>
+                                      </p:cBhvr>
+                                      <p:to>
+                                        <p:strVal val="visible"/>
+                                      </p:to>
+                                    </p:set>
+                                    <p:animEffect transition="in" filter="fade">
+                                      <p:cBhvr>
+                                        <p:cTn id="23" dur="500"/>
+                                        <p:tgtEl>
+                                          <p:spTgt spid="3">
+                                            <p:txEl>
+                                              <p:pRg st="2" end="2"/>
+                                            </p:txEl>
+                                          </p:spTgt>
+                                        </p:tgtEl>
+                                      </p:cBhvr>
+                                    </p:animEffect>
+                                    <p:anim calcmode="lin" valueType="num">
+                                      <p:cBhvr>
+                                        <p:cTn id="24" dur="500" fill="hold"/>
+                                        <p:tgtEl>
+                                          <p:spTgt spid="3">
+                                            <p:txEl>
+                                              <p:pRg st="2" end="2"/>
+                                            </p:txEl>
+                                          </p:spTgt>
+                                        </p:tgtEl>
+                                        <p:attrNameLst>
+                                          <p:attrName>ppt_x</p:attrName>
+                                        </p:attrNameLst>
+                                      </p:cBhvr>
+                                      <p:tavLst>
+                                        <p:tav tm="0">
+                                          <p:val>
+                                            <p:strVal val="#ppt_x"/>
+                                          </p:val>
+                                        </p:tav>
+                                        <p:tav tm="100000">
+                                          <p:val>
+                                            <p:strVal val="#ppt_x"/>
+                                          </p:val>
+                                        </p:tav>
+                                      </p:tavLst>
+                                    </p:anim>
+                                    <p:anim calcmode="lin" valueType="num">
+                                      <p:cBhvr>
+                                        <p:cTn id="25" dur="500" fill="hold"/>
+                                        <p:tgtEl>
+                                          <p:spTgt spid="3">
+                                            <p:txEl>
+                                              <p:pRg st="2" end="2"/>
+                                            </p:txEl>
+                                          </p:spTgt>
+                                        </p:tgtEl>
+                                        <p:attrNameLst>
+                                          <p:attrName>ppt_y</p:attrName>
+                                        </p:attrNameLst>
+                                      </p:cBhvr>
+                                      <p:tavLst>
+                                        <p:tav tm="0">
+                                          <p:val>
+                                            <p:strVal val="#ppt_y+.1"/>
+                                          </p:val>
+                                        </p:tav>
+                                        <p:tav tm="100000">
+                                          <p:val>
+                                            <p:strVal val="#ppt_y"/>
+                                          </p:val>
+                                        </p:tav>
+                                      </p:tavLst>
+                                    </p:anim>
+                                  </p:childTnLst>
+                                </p:cTn>
+                              </p:par>
+                            </p:childTnLst>
+                          </p:cTn>
+                        </p:par>
+                        <p:par>
+                          <p:cTn id="26" fill="hold">
+                            <p:stCondLst>
+                              <p:cond delay="2600"/>
+                            </p:stCondLst>
+                            <p:childTnLst>
+                              <p:par>
+                                <p:cTn id="27" presetID="42" presetClass="entr" presetSubtype="0" fill="hold" nodeType="afterEffect">
+                                  <p:stCondLst>
+                                    <p:cond delay="200"/>
+                                  </p:stCondLst>
+                                  <p:childTnLst>
+                                    <p:set>
+                                      <p:cBhvr>
+                                        <p:cTn id="28" dur="1" fill="hold">
+                                          <p:stCondLst>
+                                            <p:cond delay="0"/>
+                                          </p:stCondLst>
+                                        </p:cTn>
+                                        <p:tgtEl>
+                                          <p:spTgt spid="3">
+                                            <p:txEl>
+                                              <p:pRg st="3" end="3"/>
+                                            </p:txEl>
+                                          </p:spTgt>
+                                        </p:tgtEl>
+                                        <p:attrNameLst>
+                                          <p:attrName>style.visibility</p:attrName>
+                                        </p:attrNameLst>
+                                      </p:cBhvr>
+                                      <p:to>
+                                        <p:strVal val="visible"/>
+                                      </p:to>
+                                    </p:set>
+                                    <p:animEffect transition="in" filter="fade">
+                                      <p:cBhvr>
+                                        <p:cTn id="29" dur="500"/>
+                                        <p:tgtEl>
+                                          <p:spTgt spid="3">
+                                            <p:txEl>
+                                              <p:pRg st="3" end="3"/>
+                                            </p:txEl>
+                                          </p:spTgt>
+                                        </p:tgtEl>
+                                      </p:cBhvr>
+                                    </p:animEffect>
+                                    <p:anim calcmode="lin" valueType="num">
+                                      <p:cBhvr>
+                                        <p:cTn id="30" dur="500" fill="hold"/>
+                                        <p:tgtEl>
+                                          <p:spTgt spid="3">
+                                            <p:txEl>
+                                              <p:pRg st="3" end="3"/>
+                                            </p:txEl>
+                                          </p:spTgt>
+                                        </p:tgtEl>
+                                        <p:attrNameLst>
+                                          <p:attrName>ppt_x</p:attrName>
+                                        </p:attrNameLst>
+                                      </p:cBhvr>
+                                      <p:tavLst>
+                                        <p:tav tm="0">
+                                          <p:val>
+                                            <p:strVal val="#ppt_x"/>
+                                          </p:val>
+                                        </p:tav>
+                                        <p:tav tm="100000">
+                                          <p:val>
+                                            <p:strVal val="#ppt_x"/>
+                                          </p:val>
+                                        </p:tav>
+                                      </p:tavLst>
+                                    </p:anim>
+                                    <p:anim calcmode="lin" valueType="num">
+                                      <p:cBhvr>
+                                        <p:cTn id="31" dur="500" fill="hold"/>
+                                        <p:tgtEl>
+                                          <p:spTgt spid="3">
+                                            <p:txEl>
+                                              <p:pRg st="3" end="3"/>
+                                            </p:txEl>
+                                          </p:spTgt>
+                                        </p:tgtEl>
+                                        <p:attrNameLst>
+                                          <p:attrName>ppt_y</p:attrName>
+                                        </p:attrNameLst>
+                                      </p:cBhvr>
+                                      <p:tavLst>
+                                        <p:tav tm="0">
+                                          <p:val>
+                                            <p:strVal val="#ppt_y+.1"/>
+                                          </p:val>
+                                        </p:tav>
+                                        <p:tav tm="100000">
+                                          <p:val>
+                                            <p:strVal val="#ppt_y"/>
+                                          </p:val>
+                                        </p:tav>
+                                      </p:tavLst>
+                                    </p:anim>
+                                  </p:childTnLst>
+                                </p:cTn>
+                              </p:par>
+                            </p:childTnLst>
+                          </p:cTn>
+                        </p:par>
+                        <p:par>
+                          <p:cTn id="32" fill="hold">
+                            <p:stCondLst>
+                              <p:cond delay="3300"/>
+                            </p:stCondLst>
+                            <p:childTnLst>
+                              <p:par>
+                                <p:cTn id="33" presetID="2" presetClass="entr" presetSubtype="4" fill="hold" nodeType="afterEffect">
+                                  <p:stCondLst>
+                                    <p:cond delay="200"/>
+                                  </p:stCondLst>
+                                  <p:childTnLst>
+                                    <p:set>
+                                      <p:cBhvr>
+                                        <p:cTn id="34" dur="1" fill="hold">
+                                          <p:stCondLst>
+                                            <p:cond delay="0"/>
+                                          </p:stCondLst>
+                                        </p:cTn>
+                                        <p:tgtEl>
+                                          <p:spTgt spid="5"/>
+                                        </p:tgtEl>
+                                        <p:attrNameLst>
+                                          <p:attrName>style.visibility</p:attrName>
+                                        </p:attrNameLst>
+                                      </p:cBhvr>
+                                      <p:to>
+                                        <p:strVal val="visible"/>
+                                      </p:to>
+                                    </p:set>
+                                    <p:anim calcmode="lin" valueType="num">
+                                      <p:cBhvr additive="base">
+                                        <p:cTn id="35" dur="500" fill="hold"/>
+                                        <p:tgtEl>
+                                          <p:spTgt spid="5"/>
+                                        </p:tgtEl>
+                                        <p:attrNameLst>
+                                          <p:attrName>ppt_x</p:attrName>
+                                        </p:attrNameLst>
+                                      </p:cBhvr>
+                                      <p:tavLst>
+                                        <p:tav tm="0">
+                                          <p:val>
+                                            <p:strVal val="#ppt_x"/>
+                                          </p:val>
+                                        </p:tav>
+                                        <p:tav tm="100000">
+                                          <p:val>
+                                            <p:strVal val="#ppt_x"/>
+                                          </p:val>
+                                        </p:tav>
+                                      </p:tavLst>
+                                    </p:anim>
+                                    <p:anim calcmode="lin" valueType="num">
+                                      <p:cBhvr additive="base">
+                                        <p:cTn id="36" dur="500" fill="hold"/>
+                                        <p:tgtEl>
+                                          <p:spTgt spid="5"/>
+                                        </p:tgtEl>
+                                        <p:attrNameLst>
+                                          <p:attrName>ppt_y</p:attrName>
+                                        </p:attrNameLst>
+                                      </p:cBhvr>
+                                      <p:tavLst>
+                                        <p:tav tm="0">
+                                          <p:val>
+                                            <p:strVal val="1+#ppt_h/2"/>
+                                          </p:val>
+                                        </p:tav>
+                                        <p:tav tm="100000">
+                                          <p:val>
+                                            <p:strVal val="#ppt_y"/>
+                                          </p:val>
+                                        </p:tav>
+                                      </p:tavLst>
+                                    </p:anim>
+                                  </p:childTnLst>
+                                </p:cTn>
+                              </p:par>
+                              <p:par>
+                                <p:cTn id="37" presetID="2" presetClass="entr" presetSubtype="2" fill="hold" nodeType="withEffect">
+                                  <p:stCondLst>
+                                    <p:cond delay="200"/>
+                                  </p:stCondLst>
+                                  <p:childTnLst>
+                                    <p:set>
+                                      <p:cBhvr>
+                                        <p:cTn id="38" dur="1" fill="hold">
+                                          <p:stCondLst>
+                                            <p:cond delay="0"/>
+                                          </p:stCondLst>
+                                        </p:cTn>
+                                        <p:tgtEl>
+                                          <p:spTgt spid="4"/>
+                                        </p:tgtEl>
+                                        <p:attrNameLst>
+                                          <p:attrName>style.visibility</p:attrName>
+                                        </p:attrNameLst>
+                                      </p:cBhvr>
+                                      <p:to>
+                                        <p:strVal val="visible"/>
+                                      </p:to>
+                                    </p:set>
+                                    <p:anim calcmode="lin" valueType="num">
+                                      <p:cBhvr additive="base">
+                                        <p:cTn id="39" dur="500" fill="hold"/>
+                                        <p:tgtEl>
+                                          <p:spTgt spid="4"/>
+                                        </p:tgtEl>
+                                        <p:attrNameLst>
+                                          <p:attrName>ppt_x</p:attrName>
+                                        </p:attrNameLst>
+                                      </p:cBhvr>
+                                      <p:tavLst>
+                                        <p:tav tm="0">
+                                          <p:val>
+                                            <p:strVal val="1+#ppt_w/2"/>
+                                          </p:val>
+                                        </p:tav>
+                                        <p:tav tm="100000">
+                                          <p:val>
+                                            <p:strVal val="#ppt_x"/>
+                                          </p:val>
+                                        </p:tav>
+                                      </p:tavLst>
+                                    </p:anim>
+                                    <p:anim calcmode="lin" valueType="num">
+                                      <p:cBhvr additive="base">
+                                        <p:cTn id="40" dur="500" fill="hold"/>
+                                        <p:tgtEl>
+                                          <p:spTgt spid="4"/>
+                                        </p:tgtEl>
+                                        <p:attrNameLst>
+                                          <p:attrName>ppt_y</p:attrName>
+                                        </p:attrNameLst>
+                                      </p:cBhvr>
+                                      <p:tavLst>
+                                        <p:tav tm="0">
+                                          <p:val>
+                                            <p:strVal val="#ppt_y"/>
+                                          </p:val>
+                                        </p:tav>
+                                        <p:tav tm="100000">
+                                          <p:val>
+                                            <p:strVal val="#ppt_y"/>
+                                          </p:val>
+                                        </p:tav>
+                                      </p:tavLst>
+                                    </p:anim>
                                   </p:childTnLst>
                                 </p:cTn>
                               </p:par>

--- a/Fájlok/Bemutató.pptx
+++ b/Fájlok/Bemutató.pptx
@@ -293,7 +293,7 @@
           <a:p>
             <a:fld id="{BD2B674F-1946-412B-A744-B9E1115EC83C}" type="datetimeFigureOut">
               <a:rPr lang="en-GB" smtClean="0"/>
-              <a:t>27/03/2026</a:t>
+              <a:t>13/04/2026</a:t>
             </a:fld>
             <a:endParaRPr lang="en-GB"/>
           </a:p>
@@ -623,7 +623,7 @@
           <a:p>
             <a:fld id="{BD2B674F-1946-412B-A744-B9E1115EC83C}" type="datetimeFigureOut">
               <a:rPr lang="en-GB" smtClean="0"/>
-              <a:t>27/03/2026</a:t>
+              <a:t>13/04/2026</a:t>
             </a:fld>
             <a:endParaRPr lang="en-GB"/>
           </a:p>
@@ -803,7 +803,7 @@
           <a:p>
             <a:fld id="{BD2B674F-1946-412B-A744-B9E1115EC83C}" type="datetimeFigureOut">
               <a:rPr lang="en-GB" smtClean="0"/>
-              <a:t>27/03/2026</a:t>
+              <a:t>13/04/2026</a:t>
             </a:fld>
             <a:endParaRPr lang="en-GB"/>
           </a:p>
@@ -973,7 +973,7 @@
           <a:p>
             <a:fld id="{BD2B674F-1946-412B-A744-B9E1115EC83C}" type="datetimeFigureOut">
               <a:rPr lang="en-GB" smtClean="0"/>
-              <a:t>27/03/2026</a:t>
+              <a:t>13/04/2026</a:t>
             </a:fld>
             <a:endParaRPr lang="en-GB"/>
           </a:p>
@@ -1250,7 +1250,7 @@
           <a:p>
             <a:fld id="{BD2B674F-1946-412B-A744-B9E1115EC83C}" type="datetimeFigureOut">
               <a:rPr lang="en-GB" smtClean="0"/>
-              <a:t>27/03/2026</a:t>
+              <a:t>13/04/2026</a:t>
             </a:fld>
             <a:endParaRPr lang="en-GB"/>
           </a:p>
@@ -1644,7 +1644,7 @@
           <a:p>
             <a:fld id="{BD2B674F-1946-412B-A744-B9E1115EC83C}" type="datetimeFigureOut">
               <a:rPr lang="en-GB" smtClean="0"/>
-              <a:t>27/03/2026</a:t>
+              <a:t>13/04/2026</a:t>
             </a:fld>
             <a:endParaRPr lang="en-GB"/>
           </a:p>
@@ -2121,7 +2121,7 @@
           <a:p>
             <a:fld id="{BD2B674F-1946-412B-A744-B9E1115EC83C}" type="datetimeFigureOut">
               <a:rPr lang="en-GB" smtClean="0"/>
-              <a:t>27/03/2026</a:t>
+              <a:t>13/04/2026</a:t>
             </a:fld>
             <a:endParaRPr lang="en-GB"/>
           </a:p>
@@ -2239,7 +2239,7 @@
           <a:p>
             <a:fld id="{BD2B674F-1946-412B-A744-B9E1115EC83C}" type="datetimeFigureOut">
               <a:rPr lang="en-GB" smtClean="0"/>
-              <a:t>27/03/2026</a:t>
+              <a:t>13/04/2026</a:t>
             </a:fld>
             <a:endParaRPr lang="en-GB"/>
           </a:p>
@@ -2334,7 +2334,7 @@
           <a:p>
             <a:fld id="{BD2B674F-1946-412B-A744-B9E1115EC83C}" type="datetimeFigureOut">
               <a:rPr lang="en-GB" smtClean="0"/>
-              <a:t>27/03/2026</a:t>
+              <a:t>13/04/2026</a:t>
             </a:fld>
             <a:endParaRPr lang="en-GB"/>
           </a:p>
@@ -2680,7 +2680,7 @@
           <a:p>
             <a:fld id="{BD2B674F-1946-412B-A744-B9E1115EC83C}" type="datetimeFigureOut">
               <a:rPr lang="en-GB" smtClean="0"/>
-              <a:t>27/03/2026</a:t>
+              <a:t>13/04/2026</a:t>
             </a:fld>
             <a:endParaRPr lang="en-GB"/>
           </a:p>
@@ -3068,7 +3068,7 @@
           <a:p>
             <a:fld id="{BD2B674F-1946-412B-A744-B9E1115EC83C}" type="datetimeFigureOut">
               <a:rPr lang="en-GB" smtClean="0"/>
-              <a:t>27/03/2026</a:t>
+              <a:t>13/04/2026</a:t>
             </a:fld>
             <a:endParaRPr lang="en-GB"/>
           </a:p>
@@ -3346,7 +3346,7 @@
           <a:p>
             <a:fld id="{BD2B674F-1946-412B-A744-B9E1115EC83C}" type="datetimeFigureOut">
               <a:rPr lang="en-GB" smtClean="0"/>
-              <a:t>27/03/2026</a:t>
+              <a:t>13/04/2026</a:t>
             </a:fld>
             <a:endParaRPr lang="en-GB"/>
           </a:p>
@@ -5153,6 +5153,18 @@
             </a:r>
           </a:p>
           <a:p>
+            <a:r>
+              <a:rPr lang="hu-HU" dirty="0">
+                <a:solidFill>
+                  <a:schemeClr val="tx1"/>
+                </a:solidFill>
+                <a:latin typeface="Times New Roman" panose="02020603050405020304" pitchFamily="18" charset="0"/>
+                <a:cs typeface="Times New Roman" panose="02020603050405020304" pitchFamily="18" charset="0"/>
+              </a:rPr>
+              <a:t>Blogposztokban termékek megjelölése</a:t>
+            </a:r>
+          </a:p>
+          <a:p>
             <a:endParaRPr lang="hu-HU" dirty="0">
               <a:solidFill>
                 <a:schemeClr val="tx1"/>
@@ -5847,6 +5859,112 @@
                                           <p:spTgt spid="3">
                                             <p:txEl>
                                               <p:pRg st="5" end="5"/>
+                                            </p:txEl>
+                                          </p:spTgt>
+                                        </p:tgtEl>
+                                        <p:attrNameLst>
+                                          <p:attrName>ppt_y</p:attrName>
+                                        </p:attrNameLst>
+                                      </p:cBhvr>
+                                      <p:tavLst>
+                                        <p:tav tm="0">
+                                          <p:val>
+                                            <p:strVal val="#ppt_y+.1"/>
+                                          </p:val>
+                                        </p:tav>
+                                        <p:tav tm="100000">
+                                          <p:val>
+                                            <p:strVal val="#ppt_y"/>
+                                          </p:val>
+                                        </p:tav>
+                                      </p:tavLst>
+                                    </p:anim>
+                                  </p:childTnLst>
+                                </p:cTn>
+                              </p:par>
+                            </p:childTnLst>
+                          </p:cTn>
+                        </p:par>
+                        <p:par>
+                          <p:cTn id="44" fill="hold">
+                            <p:stCondLst>
+                              <p:cond delay="4700"/>
+                            </p:stCondLst>
+                            <p:childTnLst>
+                              <p:par>
+                                <p:cTn id="45" presetID="42" presetClass="entr" presetSubtype="0" fill="hold" grpId="0" nodeType="afterEffect">
+                                  <p:stCondLst>
+                                    <p:cond delay="200"/>
+                                  </p:stCondLst>
+                                  <p:childTnLst>
+                                    <p:set>
+                                      <p:cBhvr>
+                                        <p:cTn id="46" dur="1" fill="hold">
+                                          <p:stCondLst>
+                                            <p:cond delay="0"/>
+                                          </p:stCondLst>
+                                        </p:cTn>
+                                        <p:tgtEl>
+                                          <p:spTgt spid="3">
+                                            <p:txEl>
+                                              <p:pRg st="6" end="6"/>
+                                            </p:txEl>
+                                          </p:spTgt>
+                                        </p:tgtEl>
+                                        <p:attrNameLst>
+                                          <p:attrName>style.visibility</p:attrName>
+                                        </p:attrNameLst>
+                                      </p:cBhvr>
+                                      <p:to>
+                                        <p:strVal val="visible"/>
+                                      </p:to>
+                                    </p:set>
+                                    <p:animEffect transition="in" filter="fade">
+                                      <p:cBhvr>
+                                        <p:cTn id="47" dur="500"/>
+                                        <p:tgtEl>
+                                          <p:spTgt spid="3">
+                                            <p:txEl>
+                                              <p:pRg st="6" end="6"/>
+                                            </p:txEl>
+                                          </p:spTgt>
+                                        </p:tgtEl>
+                                      </p:cBhvr>
+                                    </p:animEffect>
+                                    <p:anim calcmode="lin" valueType="num">
+                                      <p:cBhvr>
+                                        <p:cTn id="48" dur="500" fill="hold"/>
+                                        <p:tgtEl>
+                                          <p:spTgt spid="3">
+                                            <p:txEl>
+                                              <p:pRg st="6" end="6"/>
+                                            </p:txEl>
+                                          </p:spTgt>
+                                        </p:tgtEl>
+                                        <p:attrNameLst>
+                                          <p:attrName>ppt_x</p:attrName>
+                                        </p:attrNameLst>
+                                      </p:cBhvr>
+                                      <p:tavLst>
+                                        <p:tav tm="0">
+                                          <p:val>
+                                            <p:strVal val="#ppt_x"/>
+                                          </p:val>
+                                        </p:tav>
+                                        <p:tav tm="100000">
+                                          <p:val>
+                                            <p:strVal val="#ppt_x"/>
+                                          </p:val>
+                                        </p:tav>
+                                      </p:tavLst>
+                                    </p:anim>
+                                    <p:anim calcmode="lin" valueType="num">
+                                      <p:cBhvr>
+                                        <p:cTn id="49" dur="500" fill="hold"/>
+                                        <p:tgtEl>
+                                          <p:spTgt spid="3">
+                                            <p:txEl>
+                                              <p:pRg st="6" end="6"/>
                                             </p:txEl>
                                           </p:spTgt>
                                         </p:tgtEl>

--- a/Fájlok/Bemutató.pptx
+++ b/Fájlok/Bemutató.pptx
@@ -293,7 +293,7 @@
           <a:p>
             <a:fld id="{BD2B674F-1946-412B-A744-B9E1115EC83C}" type="datetimeFigureOut">
               <a:rPr lang="en-GB" smtClean="0"/>
-              <a:t>13/04/2026</a:t>
+              <a:t>14/04/2026</a:t>
             </a:fld>
             <a:endParaRPr lang="en-GB"/>
           </a:p>
@@ -623,7 +623,7 @@
           <a:p>
             <a:fld id="{BD2B674F-1946-412B-A744-B9E1115EC83C}" type="datetimeFigureOut">
               <a:rPr lang="en-GB" smtClean="0"/>
-              <a:t>13/04/2026</a:t>
+              <a:t>14/04/2026</a:t>
             </a:fld>
             <a:endParaRPr lang="en-GB"/>
           </a:p>
@@ -803,7 +803,7 @@
           <a:p>
             <a:fld id="{BD2B674F-1946-412B-A744-B9E1115EC83C}" type="datetimeFigureOut">
               <a:rPr lang="en-GB" smtClean="0"/>
-              <a:t>13/04/2026</a:t>
+              <a:t>14/04/2026</a:t>
             </a:fld>
             <a:endParaRPr lang="en-GB"/>
           </a:p>
@@ -973,7 +973,7 @@
           <a:p>
             <a:fld id="{BD2B674F-1946-412B-A744-B9E1115EC83C}" type="datetimeFigureOut">
               <a:rPr lang="en-GB" smtClean="0"/>
-              <a:t>13/04/2026</a:t>
+              <a:t>14/04/2026</a:t>
             </a:fld>
             <a:endParaRPr lang="en-GB"/>
           </a:p>
@@ -1250,7 +1250,7 @@
           <a:p>
             <a:fld id="{BD2B674F-1946-412B-A744-B9E1115EC83C}" type="datetimeFigureOut">
               <a:rPr lang="en-GB" smtClean="0"/>
-              <a:t>13/04/2026</a:t>
+              <a:t>14/04/2026</a:t>
             </a:fld>
             <a:endParaRPr lang="en-GB"/>
           </a:p>
@@ -1644,7 +1644,7 @@
           <a:p>
             <a:fld id="{BD2B674F-1946-412B-A744-B9E1115EC83C}" type="datetimeFigureOut">
               <a:rPr lang="en-GB" smtClean="0"/>
-              <a:t>13/04/2026</a:t>
+              <a:t>14/04/2026</a:t>
             </a:fld>
             <a:endParaRPr lang="en-GB"/>
           </a:p>
@@ -2121,7 +2121,7 @@
           <a:p>
             <a:fld id="{BD2B674F-1946-412B-A744-B9E1115EC83C}" type="datetimeFigureOut">
               <a:rPr lang="en-GB" smtClean="0"/>
-              <a:t>13/04/2026</a:t>
+              <a:t>14/04/2026</a:t>
             </a:fld>
             <a:endParaRPr lang="en-GB"/>
           </a:p>
@@ -2239,7 +2239,7 @@
           <a:p>
             <a:fld id="{BD2B674F-1946-412B-A744-B9E1115EC83C}" type="datetimeFigureOut">
               <a:rPr lang="en-GB" smtClean="0"/>
-              <a:t>13/04/2026</a:t>
+              <a:t>14/04/2026</a:t>
             </a:fld>
             <a:endParaRPr lang="en-GB"/>
           </a:p>
@@ -2334,7 +2334,7 @@
           <a:p>
             <a:fld id="{BD2B674F-1946-412B-A744-B9E1115EC83C}" type="datetimeFigureOut">
               <a:rPr lang="en-GB" smtClean="0"/>
-              <a:t>13/04/2026</a:t>
+              <a:t>14/04/2026</a:t>
             </a:fld>
             <a:endParaRPr lang="en-GB"/>
           </a:p>
@@ -2680,7 +2680,7 @@
           <a:p>
             <a:fld id="{BD2B674F-1946-412B-A744-B9E1115EC83C}" type="datetimeFigureOut">
               <a:rPr lang="en-GB" smtClean="0"/>
-              <a:t>13/04/2026</a:t>
+              <a:t>14/04/2026</a:t>
             </a:fld>
             <a:endParaRPr lang="en-GB"/>
           </a:p>
@@ -3068,7 +3068,7 @@
           <a:p>
             <a:fld id="{BD2B674F-1946-412B-A744-B9E1115EC83C}" type="datetimeFigureOut">
               <a:rPr lang="en-GB" smtClean="0"/>
-              <a:t>13/04/2026</a:t>
+              <a:t>14/04/2026</a:t>
             </a:fld>
             <a:endParaRPr lang="en-GB"/>
           </a:p>
@@ -3346,7 +3346,7 @@
           <a:p>
             <a:fld id="{BD2B674F-1946-412B-A744-B9E1115EC83C}" type="datetimeFigureOut">
               <a:rPr lang="en-GB" smtClean="0"/>
-              <a:t>13/04/2026</a:t>
+              <a:t>14/04/2026</a:t>
             </a:fld>
             <a:endParaRPr lang="en-GB"/>
           </a:p>
@@ -5161,7 +5161,7 @@
                 <a:latin typeface="Times New Roman" panose="02020603050405020304" pitchFamily="18" charset="0"/>
                 <a:cs typeface="Times New Roman" panose="02020603050405020304" pitchFamily="18" charset="0"/>
               </a:rPr>
-              <a:t>Blogposztokban termékek megjelölése</a:t>
+              <a:t>Blogposztokban a tartalomkészítésben felhasznált termékek megjelölése</a:t>
             </a:r>
           </a:p>
           <a:p>
@@ -13227,7 +13227,7 @@
       </p:sp>
       <p:pic>
         <p:nvPicPr>
-          <p:cNvPr id="4" name="Kép 3"/>
+          <p:cNvPr id="5" name="Kép 4"/>
           <p:cNvPicPr>
             <a:picLocks noChangeAspect="1"/>
           </p:cNvPicPr>
@@ -13241,8 +13241,8 @@
         </p:blipFill>
         <p:spPr>
           <a:xfrm>
-            <a:off x="8977612" y="685800"/>
-            <a:ext cx="2741953" cy="5510335"/>
+            <a:off x="5482899" y="2709111"/>
+            <a:ext cx="2889689" cy="4068916"/>
           </a:xfrm>
           <a:prstGeom prst="rect">
             <a:avLst/>
@@ -13251,7 +13251,13 @@
       </p:pic>
       <p:pic>
         <p:nvPicPr>
-          <p:cNvPr id="5" name="Kép 4"/>
+          <p:cNvPr id="7" name="Kép 6">
+            <a:extLst>
+              <a:ext uri="{FF2B5EF4-FFF2-40B4-BE49-F238E27FC236}">
+                <a16:creationId xmlns:a16="http://schemas.microsoft.com/office/drawing/2014/main" id="{416EE7A9-D8DB-422E-8782-F147E5C3A70B}"/>
+              </a:ext>
+            </a:extLst>
+          </p:cNvPr>
           <p:cNvPicPr>
             <a:picLocks noChangeAspect="1"/>
           </p:cNvPicPr>
@@ -13265,8 +13271,8 @@
         </p:blipFill>
         <p:spPr>
           <a:xfrm>
-            <a:off x="5482899" y="2709111"/>
-            <a:ext cx="2889689" cy="4068916"/>
+            <a:off x="8816348" y="976032"/>
+            <a:ext cx="3040745" cy="4641988"/>
           </a:xfrm>
           <a:prstGeom prst="rect">
             <a:avLst/>
@@ -13864,7 +13870,7 @@
                                           </p:stCondLst>
                                         </p:cTn>
                                         <p:tgtEl>
-                                          <p:spTgt spid="4"/>
+                                          <p:spTgt spid="7"/>
                                         </p:tgtEl>
                                         <p:attrNameLst>
                                           <p:attrName>style.visibility</p:attrName>
@@ -13878,7 +13884,7 @@
                                       <p:cBhvr additive="base">
                                         <p:cTn id="39" dur="500" fill="hold"/>
                                         <p:tgtEl>
-                                          <p:spTgt spid="4"/>
+                                          <p:spTgt spid="7"/>
                                         </p:tgtEl>
                                         <p:attrNameLst>
                                           <p:attrName>ppt_x</p:attrName>
@@ -13901,7 +13907,7 @@
                                       <p:cBhvr additive="base">
                                         <p:cTn id="40" dur="500" fill="hold"/>
                                         <p:tgtEl>
-                                          <p:spTgt spid="4"/>
+                                          <p:spTgt spid="7"/>
                                         </p:tgtEl>
                                         <p:attrNameLst>
                                           <p:attrName>ppt_y</p:attrName>

--- a/Fájlok/Bemutató.pptx
+++ b/Fájlok/Bemutató.pptx
@@ -293,7 +293,7 @@
           <a:p>
             <a:fld id="{BD2B674F-1946-412B-A744-B9E1115EC83C}" type="datetimeFigureOut">
               <a:rPr lang="en-GB" smtClean="0"/>
-              <a:t>14/04/2026</a:t>
+              <a:t>15/04/2026</a:t>
             </a:fld>
             <a:endParaRPr lang="en-GB"/>
           </a:p>
@@ -623,7 +623,7 @@
           <a:p>
             <a:fld id="{BD2B674F-1946-412B-A744-B9E1115EC83C}" type="datetimeFigureOut">
               <a:rPr lang="en-GB" smtClean="0"/>
-              <a:t>14/04/2026</a:t>
+              <a:t>15/04/2026</a:t>
             </a:fld>
             <a:endParaRPr lang="en-GB"/>
           </a:p>
@@ -803,7 +803,7 @@
           <a:p>
             <a:fld id="{BD2B674F-1946-412B-A744-B9E1115EC83C}" type="datetimeFigureOut">
               <a:rPr lang="en-GB" smtClean="0"/>
-              <a:t>14/04/2026</a:t>
+              <a:t>15/04/2026</a:t>
             </a:fld>
             <a:endParaRPr lang="en-GB"/>
           </a:p>
@@ -973,7 +973,7 @@
           <a:p>
             <a:fld id="{BD2B674F-1946-412B-A744-B9E1115EC83C}" type="datetimeFigureOut">
               <a:rPr lang="en-GB" smtClean="0"/>
-              <a:t>14/04/2026</a:t>
+              <a:t>15/04/2026</a:t>
             </a:fld>
             <a:endParaRPr lang="en-GB"/>
           </a:p>
@@ -1250,7 +1250,7 @@
           <a:p>
             <a:fld id="{BD2B674F-1946-412B-A744-B9E1115EC83C}" type="datetimeFigureOut">
               <a:rPr lang="en-GB" smtClean="0"/>
-              <a:t>14/04/2026</a:t>
+              <a:t>15/04/2026</a:t>
             </a:fld>
             <a:endParaRPr lang="en-GB"/>
           </a:p>
@@ -1644,7 +1644,7 @@
           <a:p>
             <a:fld id="{BD2B674F-1946-412B-A744-B9E1115EC83C}" type="datetimeFigureOut">
               <a:rPr lang="en-GB" smtClean="0"/>
-              <a:t>14/04/2026</a:t>
+              <a:t>15/04/2026</a:t>
             </a:fld>
             <a:endParaRPr lang="en-GB"/>
           </a:p>
@@ -2121,7 +2121,7 @@
           <a:p>
             <a:fld id="{BD2B674F-1946-412B-A744-B9E1115EC83C}" type="datetimeFigureOut">
               <a:rPr lang="en-GB" smtClean="0"/>
-              <a:t>14/04/2026</a:t>
+              <a:t>15/04/2026</a:t>
             </a:fld>
             <a:endParaRPr lang="en-GB"/>
           </a:p>
@@ -2239,7 +2239,7 @@
           <a:p>
             <a:fld id="{BD2B674F-1946-412B-A744-B9E1115EC83C}" type="datetimeFigureOut">
               <a:rPr lang="en-GB" smtClean="0"/>
-              <a:t>14/04/2026</a:t>
+              <a:t>15/04/2026</a:t>
             </a:fld>
             <a:endParaRPr lang="en-GB"/>
           </a:p>
@@ -2334,7 +2334,7 @@
           <a:p>
             <a:fld id="{BD2B674F-1946-412B-A744-B9E1115EC83C}" type="datetimeFigureOut">
               <a:rPr lang="en-GB" smtClean="0"/>
-              <a:t>14/04/2026</a:t>
+              <a:t>15/04/2026</a:t>
             </a:fld>
             <a:endParaRPr lang="en-GB"/>
           </a:p>
@@ -2680,7 +2680,7 @@
           <a:p>
             <a:fld id="{BD2B674F-1946-412B-A744-B9E1115EC83C}" type="datetimeFigureOut">
               <a:rPr lang="en-GB" smtClean="0"/>
-              <a:t>14/04/2026</a:t>
+              <a:t>15/04/2026</a:t>
             </a:fld>
             <a:endParaRPr lang="en-GB"/>
           </a:p>
@@ -3068,7 +3068,7 @@
           <a:p>
             <a:fld id="{BD2B674F-1946-412B-A744-B9E1115EC83C}" type="datetimeFigureOut">
               <a:rPr lang="en-GB" smtClean="0"/>
-              <a:t>14/04/2026</a:t>
+              <a:t>15/04/2026</a:t>
             </a:fld>
             <a:endParaRPr lang="en-GB"/>
           </a:p>
@@ -3346,7 +3346,7 @@
           <a:p>
             <a:fld id="{BD2B674F-1946-412B-A744-B9E1115EC83C}" type="datetimeFigureOut">
               <a:rPr lang="en-GB" smtClean="0"/>
-              <a:t>14/04/2026</a:t>
+              <a:t>15/04/2026</a:t>
             </a:fld>
             <a:endParaRPr lang="en-GB"/>
           </a:p>
@@ -8381,14 +8381,14 @@
               <a:buChar char="§"/>
             </a:pPr>
             <a:r>
-              <a:rPr lang="hu-HU" i="0" dirty="0" err="1">
+              <a:rPr lang="hu-HU" i="0">
                 <a:solidFill>
                   <a:schemeClr val="tx1"/>
                 </a:solidFill>
                 <a:latin typeface="Times New Roman" panose="02020603050405020304" pitchFamily="18" charset="0"/>
                 <a:cs typeface="Times New Roman" panose="02020603050405020304" pitchFamily="18" charset="0"/>
               </a:rPr>
-              <a:t>Mysql</a:t>
+              <a:t>Relációs adatbázis</a:t>
             </a:r>
             <a:endParaRPr lang="hu-HU" i="0" dirty="0">
               <a:solidFill>

--- a/Fájlok/Bemutató.pptx
+++ b/Fájlok/Bemutató.pptx
@@ -293,7 +293,7 @@
           <a:p>
             <a:fld id="{BD2B674F-1946-412B-A744-B9E1115EC83C}" type="datetimeFigureOut">
               <a:rPr lang="en-GB" smtClean="0"/>
-              <a:t>15/04/2026</a:t>
+              <a:t>17/04/2026</a:t>
             </a:fld>
             <a:endParaRPr lang="en-GB"/>
           </a:p>
@@ -623,7 +623,7 @@
           <a:p>
             <a:fld id="{BD2B674F-1946-412B-A744-B9E1115EC83C}" type="datetimeFigureOut">
               <a:rPr lang="en-GB" smtClean="0"/>
-              <a:t>15/04/2026</a:t>
+              <a:t>17/04/2026</a:t>
             </a:fld>
             <a:endParaRPr lang="en-GB"/>
           </a:p>
@@ -803,7 +803,7 @@
           <a:p>
             <a:fld id="{BD2B674F-1946-412B-A744-B9E1115EC83C}" type="datetimeFigureOut">
               <a:rPr lang="en-GB" smtClean="0"/>
-              <a:t>15/04/2026</a:t>
+              <a:t>17/04/2026</a:t>
             </a:fld>
             <a:endParaRPr lang="en-GB"/>
           </a:p>
@@ -973,7 +973,7 @@
           <a:p>
             <a:fld id="{BD2B674F-1946-412B-A744-B9E1115EC83C}" type="datetimeFigureOut">
               <a:rPr lang="en-GB" smtClean="0"/>
-              <a:t>15/04/2026</a:t>
+              <a:t>17/04/2026</a:t>
             </a:fld>
             <a:endParaRPr lang="en-GB"/>
           </a:p>
@@ -1250,7 +1250,7 @@
           <a:p>
             <a:fld id="{BD2B674F-1946-412B-A744-B9E1115EC83C}" type="datetimeFigureOut">
               <a:rPr lang="en-GB" smtClean="0"/>
-              <a:t>15/04/2026</a:t>
+              <a:t>17/04/2026</a:t>
             </a:fld>
             <a:endParaRPr lang="en-GB"/>
           </a:p>
@@ -1644,7 +1644,7 @@
           <a:p>
             <a:fld id="{BD2B674F-1946-412B-A744-B9E1115EC83C}" type="datetimeFigureOut">
               <a:rPr lang="en-GB" smtClean="0"/>
-              <a:t>15/04/2026</a:t>
+              <a:t>17/04/2026</a:t>
             </a:fld>
             <a:endParaRPr lang="en-GB"/>
           </a:p>
@@ -2121,7 +2121,7 @@
           <a:p>
             <a:fld id="{BD2B674F-1946-412B-A744-B9E1115EC83C}" type="datetimeFigureOut">
               <a:rPr lang="en-GB" smtClean="0"/>
-              <a:t>15/04/2026</a:t>
+              <a:t>17/04/2026</a:t>
             </a:fld>
             <a:endParaRPr lang="en-GB"/>
           </a:p>
@@ -2239,7 +2239,7 @@
           <a:p>
             <a:fld id="{BD2B674F-1946-412B-A744-B9E1115EC83C}" type="datetimeFigureOut">
               <a:rPr lang="en-GB" smtClean="0"/>
-              <a:t>15/04/2026</a:t>
+              <a:t>17/04/2026</a:t>
             </a:fld>
             <a:endParaRPr lang="en-GB"/>
           </a:p>
@@ -2334,7 +2334,7 @@
           <a:p>
             <a:fld id="{BD2B674F-1946-412B-A744-B9E1115EC83C}" type="datetimeFigureOut">
               <a:rPr lang="en-GB" smtClean="0"/>
-              <a:t>15/04/2026</a:t>
+              <a:t>17/04/2026</a:t>
             </a:fld>
             <a:endParaRPr lang="en-GB"/>
           </a:p>
@@ -2680,7 +2680,7 @@
           <a:p>
             <a:fld id="{BD2B674F-1946-412B-A744-B9E1115EC83C}" type="datetimeFigureOut">
               <a:rPr lang="en-GB" smtClean="0"/>
-              <a:t>15/04/2026</a:t>
+              <a:t>17/04/2026</a:t>
             </a:fld>
             <a:endParaRPr lang="en-GB"/>
           </a:p>
@@ -3068,7 +3068,7 @@
           <a:p>
             <a:fld id="{BD2B674F-1946-412B-A744-B9E1115EC83C}" type="datetimeFigureOut">
               <a:rPr lang="en-GB" smtClean="0"/>
-              <a:t>15/04/2026</a:t>
+              <a:t>17/04/2026</a:t>
             </a:fld>
             <a:endParaRPr lang="en-GB"/>
           </a:p>
@@ -3346,7 +3346,7 @@
           <a:p>
             <a:fld id="{BD2B674F-1946-412B-A744-B9E1115EC83C}" type="datetimeFigureOut">
               <a:rPr lang="en-GB" smtClean="0"/>
-              <a:t>15/04/2026</a:t>
+              <a:t>17/04/2026</a:t>
             </a:fld>
             <a:endParaRPr lang="en-GB"/>
           </a:p>
@@ -5118,6 +5118,16 @@
           </a:p>
           <a:p>
             <a:r>
+              <a:rPr lang="hu-HU">
+                <a:solidFill>
+                  <a:schemeClr val="tx1"/>
+                </a:solidFill>
+                <a:latin typeface="Times New Roman" panose="02020603050405020304" pitchFamily="18" charset="0"/>
+                <a:cs typeface="Times New Roman" panose="02020603050405020304" pitchFamily="18" charset="0"/>
+              </a:rPr>
+              <a:t>Felhasználók </a:t>
+            </a:r>
+            <a:r>
               <a:rPr lang="hu-HU" dirty="0">
                 <a:solidFill>
                   <a:schemeClr val="tx1"/>
@@ -5125,19 +5135,7 @@
                 <a:latin typeface="Times New Roman" panose="02020603050405020304" pitchFamily="18" charset="0"/>
                 <a:cs typeface="Times New Roman" panose="02020603050405020304" pitchFamily="18" charset="0"/>
               </a:rPr>
-              <a:t>Moderátorok</a:t>
-            </a:r>
-          </a:p>
-          <a:p>
-            <a:r>
-              <a:rPr lang="hu-HU" dirty="0">
-                <a:solidFill>
-                  <a:schemeClr val="tx1"/>
-                </a:solidFill>
-                <a:latin typeface="Times New Roman" panose="02020603050405020304" pitchFamily="18" charset="0"/>
-                <a:cs typeface="Times New Roman" panose="02020603050405020304" pitchFamily="18" charset="0"/>
-              </a:rPr>
-              <a:t>Felhasználók közötti üzenetváltás</a:t>
+              <a:t>közötti üzenetváltás</a:t>
             </a:r>
           </a:p>
           <a:p>
@@ -5859,112 +5857,6 @@
                                           <p:spTgt spid="3">
                                             <p:txEl>
                                               <p:pRg st="5" end="5"/>
-                                            </p:txEl>
-                                          </p:spTgt>
-                                        </p:tgtEl>
-                                        <p:attrNameLst>
-                                          <p:attrName>ppt_y</p:attrName>
-                                        </p:attrNameLst>
-                                      </p:cBhvr>
-                                      <p:tavLst>
-                                        <p:tav tm="0">
-                                          <p:val>
-                                            <p:strVal val="#ppt_y+.1"/>
-                                          </p:val>
-                                        </p:tav>
-                                        <p:tav tm="100000">
-                                          <p:val>
-                                            <p:strVal val="#ppt_y"/>
-                                          </p:val>
-                                        </p:tav>
-                                      </p:tavLst>
-                                    </p:anim>
-                                  </p:childTnLst>
-                                </p:cTn>
-                              </p:par>
-                            </p:childTnLst>
-                          </p:cTn>
-                        </p:par>
-                        <p:par>
-                          <p:cTn id="44" fill="hold">
-                            <p:stCondLst>
-                              <p:cond delay="4700"/>
-                            </p:stCondLst>
-                            <p:childTnLst>
-                              <p:par>
-                                <p:cTn id="45" presetID="42" presetClass="entr" presetSubtype="0" fill="hold" grpId="0" nodeType="afterEffect">
-                                  <p:stCondLst>
-                                    <p:cond delay="200"/>
-                                  </p:stCondLst>
-                                  <p:childTnLst>
-                                    <p:set>
-                                      <p:cBhvr>
-                                        <p:cTn id="46" dur="1" fill="hold">
-                                          <p:stCondLst>
-                                            <p:cond delay="0"/>
-                                          </p:stCondLst>
-                                        </p:cTn>
-                                        <p:tgtEl>
-                                          <p:spTgt spid="3">
-                                            <p:txEl>
-                                              <p:pRg st="6" end="6"/>
-                                            </p:txEl>
-                                          </p:spTgt>
-                                        </p:tgtEl>
-                                        <p:attrNameLst>
-                                          <p:attrName>style.visibility</p:attrName>
-                                        </p:attrNameLst>
-                                      </p:cBhvr>
-                                      <p:to>
-                                        <p:strVal val="visible"/>
-                                      </p:to>
-                                    </p:set>
-                                    <p:animEffect transition="in" filter="fade">
-                                      <p:cBhvr>
-                                        <p:cTn id="47" dur="500"/>
-                                        <p:tgtEl>
-                                          <p:spTgt spid="3">
-                                            <p:txEl>
-                                              <p:pRg st="6" end="6"/>
-                                            </p:txEl>
-                                          </p:spTgt>
-                                        </p:tgtEl>
-                                      </p:cBhvr>
-                                    </p:animEffect>
-                                    <p:anim calcmode="lin" valueType="num">
-                                      <p:cBhvr>
-                                        <p:cTn id="48" dur="500" fill="hold"/>
-                                        <p:tgtEl>
-                                          <p:spTgt spid="3">
-                                            <p:txEl>
-                                              <p:pRg st="6" end="6"/>
-                                            </p:txEl>
-                                          </p:spTgt>
-                                        </p:tgtEl>
-                                        <p:attrNameLst>
-                                          <p:attrName>ppt_x</p:attrName>
-                                        </p:attrNameLst>
-                                      </p:cBhvr>
-                                      <p:tavLst>
-                                        <p:tav tm="0">
-                                          <p:val>
-                                            <p:strVal val="#ppt_x"/>
-                                          </p:val>
-                                        </p:tav>
-                                        <p:tav tm="100000">
-                                          <p:val>
-                                            <p:strVal val="#ppt_x"/>
-                                          </p:val>
-                                        </p:tav>
-                                      </p:tavLst>
-                                    </p:anim>
-                                    <p:anim calcmode="lin" valueType="num">
-                                      <p:cBhvr>
-                                        <p:cTn id="49" dur="500" fill="hold"/>
-                                        <p:tgtEl>
-                                          <p:spTgt spid="3">
-                                            <p:txEl>
-                                              <p:pRg st="6" end="6"/>
                                             </p:txEl>
                                           </p:spTgt>
                                         </p:tgtEl>

--- a/Fájlok/Bemutató.pptx
+++ b/Fájlok/Bemutató.pptx
@@ -293,7 +293,7 @@
           <a:p>
             <a:fld id="{BD2B674F-1946-412B-A744-B9E1115EC83C}" type="datetimeFigureOut">
               <a:rPr lang="en-GB" smtClean="0"/>
-              <a:t>17/04/2026</a:t>
+              <a:t>19/04/2026</a:t>
             </a:fld>
             <a:endParaRPr lang="en-GB"/>
           </a:p>
@@ -623,7 +623,7 @@
           <a:p>
             <a:fld id="{BD2B674F-1946-412B-A744-B9E1115EC83C}" type="datetimeFigureOut">
               <a:rPr lang="en-GB" smtClean="0"/>
-              <a:t>17/04/2026</a:t>
+              <a:t>19/04/2026</a:t>
             </a:fld>
             <a:endParaRPr lang="en-GB"/>
           </a:p>
@@ -803,7 +803,7 @@
           <a:p>
             <a:fld id="{BD2B674F-1946-412B-A744-B9E1115EC83C}" type="datetimeFigureOut">
               <a:rPr lang="en-GB" smtClean="0"/>
-              <a:t>17/04/2026</a:t>
+              <a:t>19/04/2026</a:t>
             </a:fld>
             <a:endParaRPr lang="en-GB"/>
           </a:p>
@@ -973,7 +973,7 @@
           <a:p>
             <a:fld id="{BD2B674F-1946-412B-A744-B9E1115EC83C}" type="datetimeFigureOut">
               <a:rPr lang="en-GB" smtClean="0"/>
-              <a:t>17/04/2026</a:t>
+              <a:t>19/04/2026</a:t>
             </a:fld>
             <a:endParaRPr lang="en-GB"/>
           </a:p>
@@ -1250,7 +1250,7 @@
           <a:p>
             <a:fld id="{BD2B674F-1946-412B-A744-B9E1115EC83C}" type="datetimeFigureOut">
               <a:rPr lang="en-GB" smtClean="0"/>
-              <a:t>17/04/2026</a:t>
+              <a:t>19/04/2026</a:t>
             </a:fld>
             <a:endParaRPr lang="en-GB"/>
           </a:p>
@@ -1644,7 +1644,7 @@
           <a:p>
             <a:fld id="{BD2B674F-1946-412B-A744-B9E1115EC83C}" type="datetimeFigureOut">
               <a:rPr lang="en-GB" smtClean="0"/>
-              <a:t>17/04/2026</a:t>
+              <a:t>19/04/2026</a:t>
             </a:fld>
             <a:endParaRPr lang="en-GB"/>
           </a:p>
@@ -2121,7 +2121,7 @@
           <a:p>
             <a:fld id="{BD2B674F-1946-412B-A744-B9E1115EC83C}" type="datetimeFigureOut">
               <a:rPr lang="en-GB" smtClean="0"/>
-              <a:t>17/04/2026</a:t>
+              <a:t>19/04/2026</a:t>
             </a:fld>
             <a:endParaRPr lang="en-GB"/>
           </a:p>
@@ -2239,7 +2239,7 @@
           <a:p>
             <a:fld id="{BD2B674F-1946-412B-A744-B9E1115EC83C}" type="datetimeFigureOut">
               <a:rPr lang="en-GB" smtClean="0"/>
-              <a:t>17/04/2026</a:t>
+              <a:t>19/04/2026</a:t>
             </a:fld>
             <a:endParaRPr lang="en-GB"/>
           </a:p>
@@ -2334,7 +2334,7 @@
           <a:p>
             <a:fld id="{BD2B674F-1946-412B-A744-B9E1115EC83C}" type="datetimeFigureOut">
               <a:rPr lang="en-GB" smtClean="0"/>
-              <a:t>17/04/2026</a:t>
+              <a:t>19/04/2026</a:t>
             </a:fld>
             <a:endParaRPr lang="en-GB"/>
           </a:p>
@@ -2680,7 +2680,7 @@
           <a:p>
             <a:fld id="{BD2B674F-1946-412B-A744-B9E1115EC83C}" type="datetimeFigureOut">
               <a:rPr lang="en-GB" smtClean="0"/>
-              <a:t>17/04/2026</a:t>
+              <a:t>19/04/2026</a:t>
             </a:fld>
             <a:endParaRPr lang="en-GB"/>
           </a:p>
@@ -3068,7 +3068,7 @@
           <a:p>
             <a:fld id="{BD2B674F-1946-412B-A744-B9E1115EC83C}" type="datetimeFigureOut">
               <a:rPr lang="en-GB" smtClean="0"/>
-              <a:t>17/04/2026</a:t>
+              <a:t>19/04/2026</a:t>
             </a:fld>
             <a:endParaRPr lang="en-GB"/>
           </a:p>
@@ -3346,7 +3346,7 @@
           <a:p>
             <a:fld id="{BD2B674F-1946-412B-A744-B9E1115EC83C}" type="datetimeFigureOut">
               <a:rPr lang="en-GB" smtClean="0"/>
-              <a:t>17/04/2026</a:t>
+              <a:t>19/04/2026</a:t>
             </a:fld>
             <a:endParaRPr lang="en-GB"/>
           </a:p>
@@ -12145,47 +12145,26 @@
       </p:pic>
       <p:pic>
         <p:nvPicPr>
-          <p:cNvPr id="6" name="Tartalom helye 4">
-            <a:extLst>
-              <a:ext uri="{FF2B5EF4-FFF2-40B4-BE49-F238E27FC236}">
-                <a16:creationId xmlns:a16="http://schemas.microsoft.com/office/drawing/2014/main" id="{1BE3CA50-2222-4845-A8AB-0CE8C5056A0A}"/>
-              </a:ext>
-            </a:extLst>
-          </p:cNvPr>
+          <p:cNvPr id="4" name="Kép 3"/>
           <p:cNvPicPr>
             <a:picLocks noChangeAspect="1"/>
           </p:cNvPicPr>
           <p:nvPr/>
         </p:nvPicPr>
-        <p:blipFill rotWithShape="1">
-          <a:blip r:embed="rId3">
-            <a:extLst>
-              <a:ext uri="{28A0092B-C50C-407E-A947-70E740481C1C}">
-                <a14:useLocalDpi xmlns:a14="http://schemas.microsoft.com/office/drawing/2010/main" val="0"/>
-              </a:ext>
-            </a:extLst>
-          </a:blip>
-          <a:srcRect l="36629" t="17395" r="36973" b="8660"/>
-          <a:stretch/>
+        <p:blipFill>
+          <a:blip r:embed="rId3"/>
+          <a:stretch>
+            <a:fillRect/>
+          </a:stretch>
         </p:blipFill>
         <p:spPr>
           <a:xfrm>
-            <a:off x="6530799" y="3429000"/>
-            <a:ext cx="2062868" cy="3156437"/>
+            <a:off x="5767101" y="3152083"/>
+            <a:ext cx="2607034" cy="3276997"/>
           </a:xfrm>
           <a:prstGeom prst="rect">
             <a:avLst/>
           </a:prstGeom>
-          <a:noFill/>
-          <a:effectLst>
-            <a:outerShdw blurRad="279400" dir="5400000" algn="ctr" rotWithShape="0">
-              <a:schemeClr val="tx1">
-                <a:lumMod val="50000"/>
-                <a:lumOff val="50000"/>
-                <a:alpha val="26000"/>
-              </a:schemeClr>
-            </a:outerShdw>
-          </a:effectLst>
         </p:spPr>
       </p:pic>
     </p:spTree>
@@ -12905,21 +12884,30 @@
                                   </p:childTnLst>
                                 </p:cTn>
                               </p:par>
+                            </p:childTnLst>
+                          </p:cTn>
+                        </p:par>
+                        <p:par>
+                          <p:cTn id="43" fill="hold">
+                            <p:stCondLst>
+                              <p:cond delay="5300"/>
+                            </p:stCondLst>
+                            <p:childTnLst>
                               <p:par>
-                                <p:cTn id="43" presetID="10" presetClass="entr" presetSubtype="0" fill="hold" nodeType="withEffect">
+                                <p:cTn id="44" presetID="2" presetClass="entr" presetSubtype="4" fill="hold" nodeType="afterEffect">
                                   <p:stCondLst>
-                                    <p:cond delay="200"/>
+                                    <p:cond delay="0"/>
                                   </p:stCondLst>
                                   <p:childTnLst>
                                     <p:set>
                                       <p:cBhvr>
-                                        <p:cTn id="44" dur="1" fill="hold">
+                                        <p:cTn id="45" dur="1" fill="hold">
                                           <p:stCondLst>
                                             <p:cond delay="0"/>
                                           </p:stCondLst>
                                         </p:cTn>
                                         <p:tgtEl>
-                                          <p:spTgt spid="6"/>
+                                          <p:spTgt spid="4"/>
                                         </p:tgtEl>
                                         <p:attrNameLst>
                                           <p:attrName>style.visibility</p:attrName>
@@ -12929,14 +12917,52 @@
                                         <p:strVal val="visible"/>
                                       </p:to>
                                     </p:set>
-                                    <p:animEffect transition="in" filter="fade">
-                                      <p:cBhvr>
-                                        <p:cTn id="45" dur="500"/>
-                                        <p:tgtEl>
-                                          <p:spTgt spid="6"/>
-                                        </p:tgtEl>
-                                      </p:cBhvr>
-                                    </p:animEffect>
+                                    <p:anim calcmode="lin" valueType="num">
+                                      <p:cBhvr additive="base">
+                                        <p:cTn id="46" dur="500" fill="hold"/>
+                                        <p:tgtEl>
+                                          <p:spTgt spid="4"/>
+                                        </p:tgtEl>
+                                        <p:attrNameLst>
+                                          <p:attrName>ppt_x</p:attrName>
+                                        </p:attrNameLst>
+                                      </p:cBhvr>
+                                      <p:tavLst>
+                                        <p:tav tm="0">
+                                          <p:val>
+                                            <p:strVal val="#ppt_x"/>
+                                          </p:val>
+                                        </p:tav>
+                                        <p:tav tm="100000">
+                                          <p:val>
+                                            <p:strVal val="#ppt_x"/>
+                                          </p:val>
+                                        </p:tav>
+                                      </p:tavLst>
+                                    </p:anim>
+                                    <p:anim calcmode="lin" valueType="num">
+                                      <p:cBhvr additive="base">
+                                        <p:cTn id="47" dur="500" fill="hold"/>
+                                        <p:tgtEl>
+                                          <p:spTgt spid="4"/>
+                                        </p:tgtEl>
+                                        <p:attrNameLst>
+                                          <p:attrName>ppt_y</p:attrName>
+                                        </p:attrNameLst>
+                                      </p:cBhvr>
+                                      <p:tavLst>
+                                        <p:tav tm="0">
+                                          <p:val>
+                                            <p:strVal val="1+#ppt_h/2"/>
+                                          </p:val>
+                                        </p:tav>
+                                        <p:tav tm="100000">
+                                          <p:val>
+                                            <p:strVal val="#ppt_y"/>
+                                          </p:val>
+                                        </p:tav>
+                                      </p:tavLst>
+                                    </p:anim>
                                   </p:childTnLst>
                                 </p:cTn>
                               </p:par>

--- a/Fájlok/Bemutató.pptx
+++ b/Fájlok/Bemutató.pptx
@@ -293,7 +293,7 @@
           <a:p>
             <a:fld id="{BD2B674F-1946-412B-A744-B9E1115EC83C}" type="datetimeFigureOut">
               <a:rPr lang="en-GB" smtClean="0"/>
-              <a:t>19/04/2026</a:t>
+              <a:t>25/04/2026</a:t>
             </a:fld>
             <a:endParaRPr lang="en-GB"/>
           </a:p>
@@ -623,7 +623,7 @@
           <a:p>
             <a:fld id="{BD2B674F-1946-412B-A744-B9E1115EC83C}" type="datetimeFigureOut">
               <a:rPr lang="en-GB" smtClean="0"/>
-              <a:t>19/04/2026</a:t>
+              <a:t>25/04/2026</a:t>
             </a:fld>
             <a:endParaRPr lang="en-GB"/>
           </a:p>
@@ -803,7 +803,7 @@
           <a:p>
             <a:fld id="{BD2B674F-1946-412B-A744-B9E1115EC83C}" type="datetimeFigureOut">
               <a:rPr lang="en-GB" smtClean="0"/>
-              <a:t>19/04/2026</a:t>
+              <a:t>25/04/2026</a:t>
             </a:fld>
             <a:endParaRPr lang="en-GB"/>
           </a:p>
@@ -973,7 +973,7 @@
           <a:p>
             <a:fld id="{BD2B674F-1946-412B-A744-B9E1115EC83C}" type="datetimeFigureOut">
               <a:rPr lang="en-GB" smtClean="0"/>
-              <a:t>19/04/2026</a:t>
+              <a:t>25/04/2026</a:t>
             </a:fld>
             <a:endParaRPr lang="en-GB"/>
           </a:p>
@@ -1250,7 +1250,7 @@
           <a:p>
             <a:fld id="{BD2B674F-1946-412B-A744-B9E1115EC83C}" type="datetimeFigureOut">
               <a:rPr lang="en-GB" smtClean="0"/>
-              <a:t>19/04/2026</a:t>
+              <a:t>25/04/2026</a:t>
             </a:fld>
             <a:endParaRPr lang="en-GB"/>
           </a:p>
@@ -1644,7 +1644,7 @@
           <a:p>
             <a:fld id="{BD2B674F-1946-412B-A744-B9E1115EC83C}" type="datetimeFigureOut">
               <a:rPr lang="en-GB" smtClean="0"/>
-              <a:t>19/04/2026</a:t>
+              <a:t>25/04/2026</a:t>
             </a:fld>
             <a:endParaRPr lang="en-GB"/>
           </a:p>
@@ -2121,7 +2121,7 @@
           <a:p>
             <a:fld id="{BD2B674F-1946-412B-A744-B9E1115EC83C}" type="datetimeFigureOut">
               <a:rPr lang="en-GB" smtClean="0"/>
-              <a:t>19/04/2026</a:t>
+              <a:t>25/04/2026</a:t>
             </a:fld>
             <a:endParaRPr lang="en-GB"/>
           </a:p>
@@ -2239,7 +2239,7 @@
           <a:p>
             <a:fld id="{BD2B674F-1946-412B-A744-B9E1115EC83C}" type="datetimeFigureOut">
               <a:rPr lang="en-GB" smtClean="0"/>
-              <a:t>19/04/2026</a:t>
+              <a:t>25/04/2026</a:t>
             </a:fld>
             <a:endParaRPr lang="en-GB"/>
           </a:p>
@@ -2334,7 +2334,7 @@
           <a:p>
             <a:fld id="{BD2B674F-1946-412B-A744-B9E1115EC83C}" type="datetimeFigureOut">
               <a:rPr lang="en-GB" smtClean="0"/>
-              <a:t>19/04/2026</a:t>
+              <a:t>25/04/2026</a:t>
             </a:fld>
             <a:endParaRPr lang="en-GB"/>
           </a:p>
@@ -2680,7 +2680,7 @@
           <a:p>
             <a:fld id="{BD2B674F-1946-412B-A744-B9E1115EC83C}" type="datetimeFigureOut">
               <a:rPr lang="en-GB" smtClean="0"/>
-              <a:t>19/04/2026</a:t>
+              <a:t>25/04/2026</a:t>
             </a:fld>
             <a:endParaRPr lang="en-GB"/>
           </a:p>
@@ -3068,7 +3068,7 @@
           <a:p>
             <a:fld id="{BD2B674F-1946-412B-A744-B9E1115EC83C}" type="datetimeFigureOut">
               <a:rPr lang="en-GB" smtClean="0"/>
-              <a:t>19/04/2026</a:t>
+              <a:t>25/04/2026</a:t>
             </a:fld>
             <a:endParaRPr lang="en-GB"/>
           </a:p>
@@ -3346,7 +3346,7 @@
           <a:p>
             <a:fld id="{BD2B674F-1946-412B-A744-B9E1115EC83C}" type="datetimeFigureOut">
               <a:rPr lang="en-GB" smtClean="0"/>
-              <a:t>19/04/2026</a:t>
+              <a:t>25/04/2026</a:t>
             </a:fld>
             <a:endParaRPr lang="en-GB"/>
           </a:p>
@@ -4060,6 +4060,13 @@
       <p:transition advClick="0"/>
     </mc:Fallback>
   </mc:AlternateContent>
+  <p:timing>
+    <p:tnLst>
+      <p:par>
+        <p:cTn id="1" dur="indefinite" restart="never" nodeType="tmRoot"/>
+      </p:par>
+    </p:tnLst>
+  </p:timing>
 </p:sld>
 </file>
 
@@ -13145,7 +13152,7 @@
       </p:sp>
       <p:pic>
         <p:nvPicPr>
-          <p:cNvPr id="5" name="Kép 4"/>
+          <p:cNvPr id="4" name="Kép 3"/>
           <p:cNvPicPr>
             <a:picLocks noChangeAspect="1"/>
           </p:cNvPicPr>
@@ -13159,8 +13166,8 @@
         </p:blipFill>
         <p:spPr>
           <a:xfrm>
-            <a:off x="5482899" y="2709111"/>
-            <a:ext cx="2889689" cy="4068916"/>
+            <a:off x="8954695" y="376389"/>
+            <a:ext cx="2707483" cy="5802739"/>
           </a:xfrm>
           <a:prstGeom prst="rect">
             <a:avLst/>
@@ -13169,13 +13176,7 @@
       </p:pic>
       <p:pic>
         <p:nvPicPr>
-          <p:cNvPr id="7" name="Kép 6">
-            <a:extLst>
-              <a:ext uri="{FF2B5EF4-FFF2-40B4-BE49-F238E27FC236}">
-                <a16:creationId xmlns:a16="http://schemas.microsoft.com/office/drawing/2014/main" id="{416EE7A9-D8DB-422E-8782-F147E5C3A70B}"/>
-              </a:ext>
-            </a:extLst>
-          </p:cNvPr>
+          <p:cNvPr id="8" name="Kép 7"/>
           <p:cNvPicPr>
             <a:picLocks noChangeAspect="1"/>
           </p:cNvPicPr>
@@ -13189,8 +13190,8 @@
         </p:blipFill>
         <p:spPr>
           <a:xfrm>
-            <a:off x="8816348" y="976032"/>
-            <a:ext cx="3040745" cy="4641988"/>
+            <a:off x="4876800" y="2532040"/>
+            <a:ext cx="3272208" cy="4033187"/>
           </a:xfrm>
           <a:prstGeom prst="rect">
             <a:avLst/>
@@ -13704,7 +13705,7 @@
                               <p:par>
                                 <p:cTn id="33" presetID="2" presetClass="entr" presetSubtype="4" fill="hold" nodeType="afterEffect">
                                   <p:stCondLst>
-                                    <p:cond delay="200"/>
+                                    <p:cond delay="0"/>
                                   </p:stCondLst>
                                   <p:childTnLst>
                                     <p:set>
@@ -13715,7 +13716,7 @@
                                           </p:stCondLst>
                                         </p:cTn>
                                         <p:tgtEl>
-                                          <p:spTgt spid="5"/>
+                                          <p:spTgt spid="8"/>
                                         </p:tgtEl>
                                         <p:attrNameLst>
                                           <p:attrName>style.visibility</p:attrName>
@@ -13729,7 +13730,7 @@
                                       <p:cBhvr additive="base">
                                         <p:cTn id="35" dur="500" fill="hold"/>
                                         <p:tgtEl>
-                                          <p:spTgt spid="5"/>
+                                          <p:spTgt spid="8"/>
                                         </p:tgtEl>
                                         <p:attrNameLst>
                                           <p:attrName>ppt_x</p:attrName>
@@ -13752,7 +13753,7 @@
                                       <p:cBhvr additive="base">
                                         <p:cTn id="36" dur="500" fill="hold"/>
                                         <p:tgtEl>
-                                          <p:spTgt spid="5"/>
+                                          <p:spTgt spid="8"/>
                                         </p:tgtEl>
                                         <p:attrNameLst>
                                           <p:attrName>ppt_y</p:attrName>
@@ -13774,21 +13775,30 @@
                                   </p:childTnLst>
                                 </p:cTn>
                               </p:par>
+                            </p:childTnLst>
+                          </p:cTn>
+                        </p:par>
+                        <p:par>
+                          <p:cTn id="37" fill="hold">
+                            <p:stCondLst>
+                              <p:cond delay="3800"/>
+                            </p:stCondLst>
+                            <p:childTnLst>
                               <p:par>
-                                <p:cTn id="37" presetID="2" presetClass="entr" presetSubtype="2" fill="hold" nodeType="withEffect">
+                                <p:cTn id="38" presetID="2" presetClass="entr" presetSubtype="2" fill="hold" nodeType="afterEffect">
                                   <p:stCondLst>
-                                    <p:cond delay="200"/>
+                                    <p:cond delay="0"/>
                                   </p:stCondLst>
                                   <p:childTnLst>
                                     <p:set>
                                       <p:cBhvr>
-                                        <p:cTn id="38" dur="1" fill="hold">
+                                        <p:cTn id="39" dur="1" fill="hold">
                                           <p:stCondLst>
                                             <p:cond delay="0"/>
                                           </p:stCondLst>
                                         </p:cTn>
                                         <p:tgtEl>
-                                          <p:spTgt spid="7"/>
+                                          <p:spTgt spid="4"/>
                                         </p:tgtEl>
                                         <p:attrNameLst>
                                           <p:attrName>style.visibility</p:attrName>
@@ -13800,9 +13810,9 @@
                                     </p:set>
                                     <p:anim calcmode="lin" valueType="num">
                                       <p:cBhvr additive="base">
-                                        <p:cTn id="39" dur="500" fill="hold"/>
-                                        <p:tgtEl>
-                                          <p:spTgt spid="7"/>
+                                        <p:cTn id="40" dur="500" fill="hold"/>
+                                        <p:tgtEl>
+                                          <p:spTgt spid="4"/>
                                         </p:tgtEl>
                                         <p:attrNameLst>
                                           <p:attrName>ppt_x</p:attrName>
@@ -13823,9 +13833,9 @@
                                     </p:anim>
                                     <p:anim calcmode="lin" valueType="num">
                                       <p:cBhvr additive="base">
-                                        <p:cTn id="40" dur="500" fill="hold"/>
-                                        <p:tgtEl>
-                                          <p:spTgt spid="7"/>
+                                        <p:cTn id="41" dur="500" fill="hold"/>
+                                        <p:tgtEl>
+                                          <p:spTgt spid="4"/>
                                         </p:tgtEl>
                                         <p:attrNameLst>
                                           <p:attrName>ppt_y</p:attrName>
